--- a/presentations/Clinicopathological-Conference.pptx
+++ b/presentations/Clinicopathological-Conference.pptx
@@ -19,9 +19,13 @@
     <p:sldId id="267" r:id="rId13"/>
     <p:sldId id="268" r:id="rId14"/>
     <p:sldId id="269" r:id="rId15"/>
+    <p:sldId id="270" r:id="rId16"/>
+    <p:sldId id="271" r:id="rId17"/>
+    <p:sldId id="272" r:id="rId18"/>
+    <p:sldId id="273" r:id="rId19"/>
   </p:sldIdLst>
   <p:notesMasterIdLst>
-    <p:notesMasterId r:id="rId16"/>
+    <p:notesMasterId r:id="rId20"/>
   </p:notesMasterIdLst>
   <p:sldSz cx="12191695" cy="6858000"/>
   <p:notesSz cx="6858000" cy="12191695"/>
@@ -979,6 +983,358 @@
             <a:fld id="{F7021451-1387-4CA6-816F-3879F97B5CBC}" type="slidenum">
               <a:rPr lang="en-US"/>
               <a:t>14</a:t>
+            </a:fld>
+            <a:endParaRPr lang="en-US"/>
+          </a:p>
+        </p:txBody>
+      </p:sp>
+    </p:spTree>
+    <p:extLst>
+      <p:ext uri="{BB962C8B-B14F-4D97-AF65-F5344CB8AC3E}">
+        <p14:creationId xmlns:p14="http://schemas.microsoft.com/office/powerpoint/2010/main" val="1024086991"/>
+      </p:ext>
+    </p:extLst>
+  </p:cSld>
+  <p:clrMapOvr>
+    <a:masterClrMapping/>
+  </p:clrMapOvr>
+</p:notes>
+</file>
+
+<file path=ppt/notesSlides/notesSlide15.xml><?xml version="1.0" encoding="utf-8"?>
+<p:notes xmlns:a="http://schemas.openxmlformats.org/drawingml/2006/main" xmlns:r="http://schemas.openxmlformats.org/officeDocument/2006/relationships" xmlns:p="http://schemas.openxmlformats.org/presentationml/2006/main">
+  <p:cSld>
+    <p:spTree>
+      <p:nvGrpSpPr>
+        <p:cNvPr id="1" name=""/>
+        <p:cNvGrpSpPr/>
+        <p:nvPr/>
+      </p:nvGrpSpPr>
+      <p:grpSpPr>
+        <a:xfrm>
+          <a:off x="0" y="0"/>
+          <a:ext cx="0" cy="0"/>
+          <a:chOff x="0" y="0"/>
+          <a:chExt cx="0" cy="0"/>
+        </a:xfrm>
+      </p:grpSpPr>
+      <p:sp>
+        <p:nvSpPr>
+          <p:cNvPr id="2" name="Slide Image Placeholder 1"/>
+          <p:cNvSpPr>
+            <a:spLocks noGrp="1" noRot="1" noChangeAspect="1"/>
+          </p:cNvSpPr>
+          <p:nvPr>
+            <p:ph type="sldImg"/>
+          </p:nvPr>
+        </p:nvSpPr>
+        <p:spPr/>
+      </p:sp>
+      <p:sp>
+        <p:nvSpPr>
+          <p:cNvPr id="3" name="Notes Placeholder 2"/>
+          <p:cNvSpPr>
+            <a:spLocks noGrp="1"/>
+          </p:cNvSpPr>
+          <p:nvPr>
+            <p:ph type="body" idx="1"/>
+          </p:nvPr>
+        </p:nvSpPr>
+        <p:spPr/>
+        <p:txBody>
+          <a:bodyPr/>
+          <a:lstStyle/>
+          <a:p>
+            <a:r>
+              <a:rPr lang="en-US" dirty="0"/>
+              <a:t/>
+            </a:r>
+            <a:endParaRPr lang="en-US" dirty="0"/>
+          </a:p>
+        </p:txBody>
+      </p:sp>
+      <p:sp>
+        <p:nvSpPr>
+          <p:cNvPr id="4" name="Slide Number Placeholder 3"/>
+          <p:cNvSpPr>
+            <a:spLocks noGrp="1"/>
+          </p:cNvSpPr>
+          <p:nvPr>
+            <p:ph type="sldNum" sz="quarter" idx="10"/>
+          </p:nvPr>
+        </p:nvSpPr>
+        <p:spPr/>
+        <p:txBody>
+          <a:bodyPr/>
+          <a:lstStyle/>
+          <a:p>
+            <a:fld id="{F7021451-1387-4CA6-816F-3879F97B5CBC}" type="slidenum">
+              <a:rPr lang="en-US"/>
+              <a:t>15</a:t>
+            </a:fld>
+            <a:endParaRPr lang="en-US"/>
+          </a:p>
+        </p:txBody>
+      </p:sp>
+    </p:spTree>
+    <p:extLst>
+      <p:ext uri="{BB962C8B-B14F-4D97-AF65-F5344CB8AC3E}">
+        <p14:creationId xmlns:p14="http://schemas.microsoft.com/office/powerpoint/2010/main" val="1024086991"/>
+      </p:ext>
+    </p:extLst>
+  </p:cSld>
+  <p:clrMapOvr>
+    <a:masterClrMapping/>
+  </p:clrMapOvr>
+</p:notes>
+</file>
+
+<file path=ppt/notesSlides/notesSlide16.xml><?xml version="1.0" encoding="utf-8"?>
+<p:notes xmlns:a="http://schemas.openxmlformats.org/drawingml/2006/main" xmlns:r="http://schemas.openxmlformats.org/officeDocument/2006/relationships" xmlns:p="http://schemas.openxmlformats.org/presentationml/2006/main">
+  <p:cSld>
+    <p:spTree>
+      <p:nvGrpSpPr>
+        <p:cNvPr id="1" name=""/>
+        <p:cNvGrpSpPr/>
+        <p:nvPr/>
+      </p:nvGrpSpPr>
+      <p:grpSpPr>
+        <a:xfrm>
+          <a:off x="0" y="0"/>
+          <a:ext cx="0" cy="0"/>
+          <a:chOff x="0" y="0"/>
+          <a:chExt cx="0" cy="0"/>
+        </a:xfrm>
+      </p:grpSpPr>
+      <p:sp>
+        <p:nvSpPr>
+          <p:cNvPr id="2" name="Slide Image Placeholder 1"/>
+          <p:cNvSpPr>
+            <a:spLocks noGrp="1" noRot="1" noChangeAspect="1"/>
+          </p:cNvSpPr>
+          <p:nvPr>
+            <p:ph type="sldImg"/>
+          </p:nvPr>
+        </p:nvSpPr>
+        <p:spPr/>
+      </p:sp>
+      <p:sp>
+        <p:nvSpPr>
+          <p:cNvPr id="3" name="Notes Placeholder 2"/>
+          <p:cNvSpPr>
+            <a:spLocks noGrp="1"/>
+          </p:cNvSpPr>
+          <p:nvPr>
+            <p:ph type="body" idx="1"/>
+          </p:nvPr>
+        </p:nvSpPr>
+        <p:spPr/>
+        <p:txBody>
+          <a:bodyPr/>
+          <a:lstStyle/>
+          <a:p>
+            <a:r>
+              <a:rPr lang="en-US" dirty="0"/>
+              <a:t/>
+            </a:r>
+            <a:endParaRPr lang="en-US" dirty="0"/>
+          </a:p>
+        </p:txBody>
+      </p:sp>
+      <p:sp>
+        <p:nvSpPr>
+          <p:cNvPr id="4" name="Slide Number Placeholder 3"/>
+          <p:cNvSpPr>
+            <a:spLocks noGrp="1"/>
+          </p:cNvSpPr>
+          <p:nvPr>
+            <p:ph type="sldNum" sz="quarter" idx="10"/>
+          </p:nvPr>
+        </p:nvSpPr>
+        <p:spPr/>
+        <p:txBody>
+          <a:bodyPr/>
+          <a:lstStyle/>
+          <a:p>
+            <a:fld id="{F7021451-1387-4CA6-816F-3879F97B5CBC}" type="slidenum">
+              <a:rPr lang="en-US"/>
+              <a:t>16</a:t>
+            </a:fld>
+            <a:endParaRPr lang="en-US"/>
+          </a:p>
+        </p:txBody>
+      </p:sp>
+    </p:spTree>
+    <p:extLst>
+      <p:ext uri="{BB962C8B-B14F-4D97-AF65-F5344CB8AC3E}">
+        <p14:creationId xmlns:p14="http://schemas.microsoft.com/office/powerpoint/2010/main" val="1024086991"/>
+      </p:ext>
+    </p:extLst>
+  </p:cSld>
+  <p:clrMapOvr>
+    <a:masterClrMapping/>
+  </p:clrMapOvr>
+</p:notes>
+</file>
+
+<file path=ppt/notesSlides/notesSlide17.xml><?xml version="1.0" encoding="utf-8"?>
+<p:notes xmlns:a="http://schemas.openxmlformats.org/drawingml/2006/main" xmlns:r="http://schemas.openxmlformats.org/officeDocument/2006/relationships" xmlns:p="http://schemas.openxmlformats.org/presentationml/2006/main">
+  <p:cSld>
+    <p:spTree>
+      <p:nvGrpSpPr>
+        <p:cNvPr id="1" name=""/>
+        <p:cNvGrpSpPr/>
+        <p:nvPr/>
+      </p:nvGrpSpPr>
+      <p:grpSpPr>
+        <a:xfrm>
+          <a:off x="0" y="0"/>
+          <a:ext cx="0" cy="0"/>
+          <a:chOff x="0" y="0"/>
+          <a:chExt cx="0" cy="0"/>
+        </a:xfrm>
+      </p:grpSpPr>
+      <p:sp>
+        <p:nvSpPr>
+          <p:cNvPr id="2" name="Slide Image Placeholder 1"/>
+          <p:cNvSpPr>
+            <a:spLocks noGrp="1" noRot="1" noChangeAspect="1"/>
+          </p:cNvSpPr>
+          <p:nvPr>
+            <p:ph type="sldImg"/>
+          </p:nvPr>
+        </p:nvSpPr>
+        <p:spPr/>
+      </p:sp>
+      <p:sp>
+        <p:nvSpPr>
+          <p:cNvPr id="3" name="Notes Placeholder 2"/>
+          <p:cNvSpPr>
+            <a:spLocks noGrp="1"/>
+          </p:cNvSpPr>
+          <p:nvPr>
+            <p:ph type="body" idx="1"/>
+          </p:nvPr>
+        </p:nvSpPr>
+        <p:spPr/>
+        <p:txBody>
+          <a:bodyPr/>
+          <a:lstStyle/>
+          <a:p>
+            <a:r>
+              <a:rPr lang="en-US" dirty="0"/>
+              <a:t/>
+            </a:r>
+            <a:endParaRPr lang="en-US" dirty="0"/>
+          </a:p>
+        </p:txBody>
+      </p:sp>
+      <p:sp>
+        <p:nvSpPr>
+          <p:cNvPr id="4" name="Slide Number Placeholder 3"/>
+          <p:cNvSpPr>
+            <a:spLocks noGrp="1"/>
+          </p:cNvSpPr>
+          <p:nvPr>
+            <p:ph type="sldNum" sz="quarter" idx="10"/>
+          </p:nvPr>
+        </p:nvSpPr>
+        <p:spPr/>
+        <p:txBody>
+          <a:bodyPr/>
+          <a:lstStyle/>
+          <a:p>
+            <a:fld id="{F7021451-1387-4CA6-816F-3879F97B5CBC}" type="slidenum">
+              <a:rPr lang="en-US"/>
+              <a:t>17</a:t>
+            </a:fld>
+            <a:endParaRPr lang="en-US"/>
+          </a:p>
+        </p:txBody>
+      </p:sp>
+    </p:spTree>
+    <p:extLst>
+      <p:ext uri="{BB962C8B-B14F-4D97-AF65-F5344CB8AC3E}">
+        <p14:creationId xmlns:p14="http://schemas.microsoft.com/office/powerpoint/2010/main" val="1024086991"/>
+      </p:ext>
+    </p:extLst>
+  </p:cSld>
+  <p:clrMapOvr>
+    <a:masterClrMapping/>
+  </p:clrMapOvr>
+</p:notes>
+</file>
+
+<file path=ppt/notesSlides/notesSlide18.xml><?xml version="1.0" encoding="utf-8"?>
+<p:notes xmlns:a="http://schemas.openxmlformats.org/drawingml/2006/main" xmlns:r="http://schemas.openxmlformats.org/officeDocument/2006/relationships" xmlns:p="http://schemas.openxmlformats.org/presentationml/2006/main">
+  <p:cSld>
+    <p:spTree>
+      <p:nvGrpSpPr>
+        <p:cNvPr id="1" name=""/>
+        <p:cNvGrpSpPr/>
+        <p:nvPr/>
+      </p:nvGrpSpPr>
+      <p:grpSpPr>
+        <a:xfrm>
+          <a:off x="0" y="0"/>
+          <a:ext cx="0" cy="0"/>
+          <a:chOff x="0" y="0"/>
+          <a:chExt cx="0" cy="0"/>
+        </a:xfrm>
+      </p:grpSpPr>
+      <p:sp>
+        <p:nvSpPr>
+          <p:cNvPr id="2" name="Slide Image Placeholder 1"/>
+          <p:cNvSpPr>
+            <a:spLocks noGrp="1" noRot="1" noChangeAspect="1"/>
+          </p:cNvSpPr>
+          <p:nvPr>
+            <p:ph type="sldImg"/>
+          </p:nvPr>
+        </p:nvSpPr>
+        <p:spPr/>
+      </p:sp>
+      <p:sp>
+        <p:nvSpPr>
+          <p:cNvPr id="3" name="Notes Placeholder 2"/>
+          <p:cNvSpPr>
+            <a:spLocks noGrp="1"/>
+          </p:cNvSpPr>
+          <p:nvPr>
+            <p:ph type="body" idx="1"/>
+          </p:nvPr>
+        </p:nvSpPr>
+        <p:spPr/>
+        <p:txBody>
+          <a:bodyPr/>
+          <a:lstStyle/>
+          <a:p>
+            <a:r>
+              <a:rPr lang="en-US" dirty="0"/>
+              <a:t/>
+            </a:r>
+            <a:endParaRPr lang="en-US" dirty="0"/>
+          </a:p>
+        </p:txBody>
+      </p:sp>
+      <p:sp>
+        <p:nvSpPr>
+          <p:cNvPr id="4" name="Slide Number Placeholder 3"/>
+          <p:cNvSpPr>
+            <a:spLocks noGrp="1"/>
+          </p:cNvSpPr>
+          <p:nvPr>
+            <p:ph type="sldNum" sz="quarter" idx="10"/>
+          </p:nvPr>
+        </p:nvSpPr>
+        <p:spPr/>
+        <p:txBody>
+          <a:bodyPr/>
+          <a:lstStyle/>
+          <a:p>
+            <a:fld id="{F7021451-1387-4CA6-816F-3879F97B5CBC}" type="slidenum">
+              <a:rPr lang="en-US"/>
+              <a:t>18</a:t>
             </a:fld>
             <a:endParaRPr lang="en-US"/>
           </a:p>
@@ -5865,6 +6221,8611 @@
     <p:bg>
       <p:bgPr>
         <a:solidFill>
+          <a:srgbClr val="FFFFFF"/>
+        </a:solidFill>
+      </p:bgPr>
+    </p:bg>
+    <p:spTree>
+      <p:nvGrpSpPr>
+        <p:cNvPr id="1" name=""/>
+        <p:cNvGrpSpPr/>
+        <p:nvPr/>
+      </p:nvGrpSpPr>
+      <p:grpSpPr>
+        <a:xfrm>
+          <a:off x="0" y="0"/>
+          <a:ext cx="0" cy="0"/>
+          <a:chOff x="0" y="0"/>
+          <a:chExt cx="0" cy="0"/>
+        </a:xfrm>
+      </p:grpSpPr>
+      <p:sp>
+        <p:nvSpPr>
+          <p:cNvPr id="2" name="Shape 0"/>
+          <p:cNvSpPr/>
+          <p:nvPr/>
+        </p:nvSpPr>
+        <p:spPr>
+          <a:xfrm>
+            <a:off x="502920" y="457200"/>
+            <a:ext cx="868680" cy="868680"/>
+          </a:xfrm>
+          <a:prstGeom prst="ellipse">
+            <a:avLst/>
+          </a:prstGeom>
+          <a:solidFill>
+            <a:srgbClr val="FFF0F3"/>
+          </a:solidFill>
+          <a:ln w="12700">
+            <a:solidFill>
+              <a:srgbClr val="FBD8DF"/>
+            </a:solidFill>
+            <a:prstDash val="solid"/>
+          </a:ln>
+        </p:spPr>
+      </p:sp>
+      <p:pic>
+        <p:nvPicPr>
+          <p:cNvPr id="3" name="Image 0" descr="preencoded.png">    </p:cNvPr>
+          <p:cNvPicPr>
+            <a:picLocks noChangeAspect="1"/>
+          </p:cNvPicPr>
+          <p:nvPr/>
+        </p:nvPicPr>
+        <p:blipFill>
+          <a:blip r:embed="rId1"/>
+          <a:stretch>
+            <a:fillRect/>
+          </a:stretch>
+        </p:blipFill>
+        <p:spPr>
+          <a:xfrm>
+            <a:off x="694944" y="649224"/>
+            <a:ext cx="484632" cy="484632"/>
+          </a:xfrm>
+          <a:prstGeom prst="rect">
+            <a:avLst/>
+          </a:prstGeom>
+        </p:spPr>
+      </p:pic>
+      <p:sp>
+        <p:nvSpPr>
+          <p:cNvPr id="4" name="Text 1"/>
+          <p:cNvSpPr/>
+          <p:nvPr/>
+        </p:nvSpPr>
+        <p:spPr>
+          <a:xfrm>
+            <a:off x="1572768" y="502920"/>
+            <a:ext cx="9601200" cy="274320"/>
+          </a:xfrm>
+          <a:prstGeom prst="rect">
+            <a:avLst/>
+          </a:prstGeom>
+          <a:noFill/>
+          <a:ln/>
+        </p:spPr>
+        <p:txBody>
+          <a:bodyPr wrap="square" rtlCol="0" anchor="t"/>
+          <a:lstStyle/>
+          <a:p>
+            <a:pPr algn="l" indent="0" marL="0">
+              <a:buNone/>
+            </a:pPr>
+            <a:r>
+              <a:rPr lang="en-US" sz="1250" b="1" spc="200" kern="0" dirty="0">
+                <a:solidFill>
+                  <a:srgbClr val="A4133C"/>
+                </a:solidFill>
+                <a:latin typeface="Calibri" pitchFamily="34" charset="0"/>
+                <a:ea typeface="Calibri" pitchFamily="34" charset="-122"/>
+                <a:cs typeface="Calibri" pitchFamily="34" charset="-120"/>
+              </a:rPr>
+              <a:t>INVESTIGATIONS · ELECTROCARDIOGRAM</a:t>
+            </a:r>
+            <a:endParaRPr lang="en-US" sz="1250" dirty="0"/>
+          </a:p>
+        </p:txBody>
+      </p:sp>
+      <p:sp>
+        <p:nvSpPr>
+          <p:cNvPr id="5" name="Text 2"/>
+          <p:cNvSpPr/>
+          <p:nvPr/>
+        </p:nvSpPr>
+        <p:spPr>
+          <a:xfrm>
+            <a:off x="1554480" y="749808"/>
+            <a:ext cx="10058400" cy="640080"/>
+          </a:xfrm>
+          <a:prstGeom prst="rect">
+            <a:avLst/>
+          </a:prstGeom>
+          <a:noFill/>
+          <a:ln/>
+        </p:spPr>
+        <p:txBody>
+          <a:bodyPr wrap="square" rtlCol="0" anchor="t"/>
+          <a:lstStyle/>
+          <a:p>
+            <a:pPr algn="l" indent="0" marL="0">
+              <a:buNone/>
+            </a:pPr>
+            <a:r>
+              <a:rPr lang="en-US" sz="3000" b="1" dirty="0">
+                <a:solidFill>
+                  <a:srgbClr val="2B2B33"/>
+                </a:solidFill>
+                <a:latin typeface="Cambria" pitchFamily="34" charset="0"/>
+                <a:ea typeface="Cambria" pitchFamily="34" charset="-122"/>
+                <a:cs typeface="Cambria" pitchFamily="34" charset="-120"/>
+              </a:rPr>
+              <a:t>12-Lead ECG</a:t>
+            </a:r>
+            <a:endParaRPr lang="en-US" sz="3000" dirty="0"/>
+          </a:p>
+        </p:txBody>
+      </p:sp>
+      <p:sp>
+        <p:nvSpPr>
+          <p:cNvPr id="6" name="Shape 3"/>
+          <p:cNvSpPr/>
+          <p:nvPr/>
+        </p:nvSpPr>
+        <p:spPr>
+          <a:xfrm>
+            <a:off x="502920" y="1627632"/>
+            <a:ext cx="11183112" cy="1078992"/>
+          </a:xfrm>
+          <a:prstGeom prst="roundRect">
+            <a:avLst>
+              <a:gd name="adj" fmla="val 10169"/>
+            </a:avLst>
+          </a:prstGeom>
+          <a:solidFill>
+            <a:srgbClr val="590D22"/>
+          </a:solidFill>
+          <a:ln/>
+          <a:effectLst>
+            <a:outerShdw sx="100000" sy="100000" kx="0" ky="0" algn="bl" rotWithShape="0" blurRad="127000" dist="50800" dir="5400000">
+              <a:srgbClr val="C9A3AC">
+                <a:alpha val="45000"/>
+              </a:srgbClr>
+            </a:outerShdw>
+          </a:effectLst>
+        </p:spPr>
+      </p:sp>
+      <p:sp>
+        <p:nvSpPr>
+          <p:cNvPr id="7" name="Shape 4"/>
+          <p:cNvSpPr/>
+          <p:nvPr/>
+        </p:nvSpPr>
+        <p:spPr>
+          <a:xfrm>
+            <a:off x="777240" y="1856232"/>
+            <a:ext cx="621792" cy="621792"/>
+          </a:xfrm>
+          <a:prstGeom prst="ellipse">
+            <a:avLst/>
+          </a:prstGeom>
+          <a:solidFill>
+            <a:srgbClr val="A4133C"/>
+          </a:solidFill>
+          <a:ln/>
+        </p:spPr>
+      </p:sp>
+      <p:pic>
+        <p:nvPicPr>
+          <p:cNvPr id="8" name="Image 1" descr="preencoded.png">    </p:cNvPr>
+          <p:cNvPicPr>
+            <a:picLocks noChangeAspect="1"/>
+          </p:cNvPicPr>
+          <p:nvPr/>
+        </p:nvPicPr>
+        <p:blipFill>
+          <a:blip r:embed="rId2"/>
+          <a:stretch>
+            <a:fillRect/>
+          </a:stretch>
+        </p:blipFill>
+        <p:spPr>
+          <a:xfrm>
+            <a:off x="932688" y="2011680"/>
+            <a:ext cx="310896" cy="310896"/>
+          </a:xfrm>
+          <a:prstGeom prst="rect">
+            <a:avLst/>
+          </a:prstGeom>
+        </p:spPr>
+      </p:pic>
+      <p:sp>
+        <p:nvSpPr>
+          <p:cNvPr id="9" name="Text 5"/>
+          <p:cNvSpPr/>
+          <p:nvPr/>
+        </p:nvSpPr>
+        <p:spPr>
+          <a:xfrm>
+            <a:off x="1600200" y="1783080"/>
+            <a:ext cx="9921240" cy="566928"/>
+          </a:xfrm>
+          <a:prstGeom prst="rect">
+            <a:avLst/>
+          </a:prstGeom>
+          <a:noFill/>
+          <a:ln/>
+        </p:spPr>
+        <p:txBody>
+          <a:bodyPr wrap="square" lIns="0" tIns="0" rIns="0" bIns="0" rtlCol="0" anchor="ctr"/>
+          <a:lstStyle/>
+          <a:p>
+            <a:pPr algn="l" indent="0" marL="0">
+              <a:buNone/>
+            </a:pPr>
+            <a:r>
+              <a:rPr lang="en-US" sz="2800" b="1" dirty="0">
+                <a:solidFill>
+                  <a:srgbClr val="FFFFFF"/>
+                </a:solidFill>
+                <a:latin typeface="Cambria" pitchFamily="34" charset="0"/>
+                <a:ea typeface="Cambria" pitchFamily="34" charset="-122"/>
+                <a:cs typeface="Cambria" pitchFamily="34" charset="-120"/>
+              </a:rPr>
+              <a:t>Atrial Fibrillation with Rapid Ventricular Response</a:t>
+            </a:r>
+            <a:endParaRPr lang="en-US" sz="2800" dirty="0"/>
+          </a:p>
+        </p:txBody>
+      </p:sp>
+      <p:sp>
+        <p:nvSpPr>
+          <p:cNvPr id="10" name="Text 6"/>
+          <p:cNvSpPr/>
+          <p:nvPr/>
+        </p:nvSpPr>
+        <p:spPr>
+          <a:xfrm>
+            <a:off x="1600200" y="2331720"/>
+            <a:ext cx="9921240" cy="274320"/>
+          </a:xfrm>
+          <a:prstGeom prst="rect">
+            <a:avLst/>
+          </a:prstGeom>
+          <a:noFill/>
+          <a:ln/>
+        </p:spPr>
+        <p:txBody>
+          <a:bodyPr wrap="square" lIns="0" tIns="0" rIns="0" bIns="0" rtlCol="0" anchor="t"/>
+          <a:lstStyle/>
+          <a:p>
+            <a:pPr algn="l" indent="0" marL="0">
+              <a:buNone/>
+            </a:pPr>
+            <a:r>
+              <a:rPr lang="en-US" sz="1300" b="1" dirty="0">
+                <a:solidFill>
+                  <a:srgbClr val="FF4D6D"/>
+                </a:solidFill>
+                <a:latin typeface="Calibri" pitchFamily="34" charset="0"/>
+                <a:ea typeface="Calibri" pitchFamily="34" charset="-122"/>
+                <a:cs typeface="Calibri" pitchFamily="34" charset="-120"/>
+              </a:rPr>
+              <a:t>Abnormal rhythm ECG · 06-Jul-2026</a:t>
+            </a:r>
+            <a:endParaRPr lang="en-US" sz="1300" dirty="0"/>
+          </a:p>
+        </p:txBody>
+      </p:sp>
+      <p:sp>
+        <p:nvSpPr>
+          <p:cNvPr id="11" name="Shape 7"/>
+          <p:cNvSpPr/>
+          <p:nvPr/>
+        </p:nvSpPr>
+        <p:spPr>
+          <a:xfrm>
+            <a:off x="502920" y="2889504"/>
+            <a:ext cx="3246120" cy="2615184"/>
+          </a:xfrm>
+          <a:prstGeom prst="roundRect">
+            <a:avLst>
+              <a:gd name="adj" fmla="val 4196"/>
+            </a:avLst>
+          </a:prstGeom>
+          <a:solidFill>
+            <a:srgbClr val="FFF0F3"/>
+          </a:solidFill>
+          <a:ln w="12700">
+            <a:solidFill>
+              <a:srgbClr val="FBD8DF"/>
+            </a:solidFill>
+            <a:prstDash val="solid"/>
+          </a:ln>
+          <a:effectLst>
+            <a:outerShdw sx="100000" sy="100000" kx="0" ky="0" algn="bl" rotWithShape="0" blurRad="127000" dist="50800" dir="5400000">
+              <a:srgbClr val="C9A3AC">
+                <a:alpha val="45000"/>
+              </a:srgbClr>
+            </a:outerShdw>
+          </a:effectLst>
+        </p:spPr>
+      </p:sp>
+      <p:sp>
+        <p:nvSpPr>
+          <p:cNvPr id="12" name="Text 8"/>
+          <p:cNvSpPr/>
+          <p:nvPr/>
+        </p:nvSpPr>
+        <p:spPr>
+          <a:xfrm>
+            <a:off x="777240" y="3145536"/>
+            <a:ext cx="2743200" cy="274320"/>
+          </a:xfrm>
+          <a:prstGeom prst="rect">
+            <a:avLst/>
+          </a:prstGeom>
+          <a:noFill/>
+          <a:ln/>
+        </p:spPr>
+        <p:txBody>
+          <a:bodyPr wrap="square" lIns="0" tIns="0" rIns="0" bIns="0" rtlCol="0" anchor="t"/>
+          <a:lstStyle/>
+          <a:p>
+            <a:pPr algn="l" indent="0" marL="0">
+              <a:buNone/>
+            </a:pPr>
+            <a:r>
+              <a:rPr lang="en-US" sz="1250" b="1" spc="200" kern="0" dirty="0">
+                <a:solidFill>
+                  <a:srgbClr val="A4133C"/>
+                </a:solidFill>
+                <a:latin typeface="Calibri" pitchFamily="34" charset="0"/>
+                <a:ea typeface="Calibri" pitchFamily="34" charset="-122"/>
+                <a:cs typeface="Calibri" pitchFamily="34" charset="-120"/>
+              </a:rPr>
+              <a:t>VENTRICULAR RATE</a:t>
+            </a:r>
+            <a:endParaRPr lang="en-US" sz="1250" dirty="0"/>
+          </a:p>
+        </p:txBody>
+      </p:sp>
+      <p:pic>
+        <p:nvPicPr>
+          <p:cNvPr id="13" name="Image 2" descr="preencoded.png">    </p:cNvPr>
+          <p:cNvPicPr>
+            <a:picLocks noChangeAspect="1"/>
+          </p:cNvPicPr>
+          <p:nvPr/>
+        </p:nvPicPr>
+        <p:blipFill>
+          <a:blip r:embed="rId3"/>
+          <a:stretch>
+            <a:fillRect/>
+          </a:stretch>
+        </p:blipFill>
+        <p:spPr>
+          <a:xfrm>
+            <a:off x="3246120" y="3127248"/>
+            <a:ext cx="292608" cy="292608"/>
+          </a:xfrm>
+          <a:prstGeom prst="rect">
+            <a:avLst/>
+          </a:prstGeom>
+        </p:spPr>
+      </p:pic>
+      <p:sp>
+        <p:nvSpPr>
+          <p:cNvPr id="14" name="Text 9"/>
+          <p:cNvSpPr/>
+          <p:nvPr/>
+        </p:nvSpPr>
+        <p:spPr>
+          <a:xfrm>
+            <a:off x="777240" y="3511296"/>
+            <a:ext cx="2743200" cy="868680"/>
+          </a:xfrm>
+          <a:prstGeom prst="rect">
+            <a:avLst/>
+          </a:prstGeom>
+          <a:noFill/>
+          <a:ln/>
+        </p:spPr>
+        <p:txBody>
+          <a:bodyPr wrap="square" lIns="0" tIns="0" rIns="0" bIns="0" rtlCol="0" anchor="ctr"/>
+          <a:lstStyle/>
+          <a:p>
+            <a:pPr algn="l" indent="0" marL="0">
+              <a:buNone/>
+            </a:pPr>
+            <a:r>
+              <a:rPr lang="en-US" sz="4400" b="1" dirty="0">
+                <a:solidFill>
+                  <a:srgbClr val="FF4D6D"/>
+                </a:solidFill>
+                <a:latin typeface="Cambria" pitchFamily="34" charset="0"/>
+                <a:ea typeface="Cambria" pitchFamily="34" charset="-122"/>
+                <a:cs typeface="Cambria" pitchFamily="34" charset="-120"/>
+              </a:rPr>
+              <a:t>146</a:t>
+            </a:r>
+            <a:pPr algn="l" indent="0" marL="0">
+              <a:buNone/>
+            </a:pPr>
+            <a:r>
+              <a:rPr lang="en-US" sz="1800" b="1" dirty="0">
+                <a:solidFill>
+                  <a:srgbClr val="6B6B76"/>
+                </a:solidFill>
+                <a:latin typeface="Calibri" pitchFamily="34" charset="0"/>
+                <a:ea typeface="Calibri" pitchFamily="34" charset="-122"/>
+                <a:cs typeface="Calibri" pitchFamily="34" charset="-120"/>
+              </a:rPr>
+              <a:t>  bpm</a:t>
+            </a:r>
+            <a:endParaRPr lang="en-US" sz="4400" dirty="0"/>
+          </a:p>
+        </p:txBody>
+      </p:sp>
+      <p:sp>
+        <p:nvSpPr>
+          <p:cNvPr id="15" name="Shape 10"/>
+          <p:cNvSpPr/>
+          <p:nvPr/>
+        </p:nvSpPr>
+        <p:spPr>
+          <a:xfrm>
+            <a:off x="777240" y="4526280"/>
+            <a:ext cx="1463040" cy="457200"/>
+          </a:xfrm>
+          <a:prstGeom prst="roundRect">
+            <a:avLst>
+              <a:gd name="adj" fmla="val 50000"/>
+            </a:avLst>
+          </a:prstGeom>
+          <a:solidFill>
+            <a:srgbClr val="FF4D6D"/>
+          </a:solidFill>
+          <a:ln/>
+        </p:spPr>
+      </p:sp>
+      <p:sp>
+        <p:nvSpPr>
+          <p:cNvPr id="16" name="Text 11"/>
+          <p:cNvSpPr/>
+          <p:nvPr/>
+        </p:nvSpPr>
+        <p:spPr>
+          <a:xfrm>
+            <a:off x="777240" y="4526280"/>
+            <a:ext cx="1463040" cy="457200"/>
+          </a:xfrm>
+          <a:prstGeom prst="rect">
+            <a:avLst/>
+          </a:prstGeom>
+          <a:noFill/>
+          <a:ln/>
+        </p:spPr>
+        <p:txBody>
+          <a:bodyPr wrap="square" rtlCol="0" anchor="ctr"/>
+          <a:lstStyle/>
+          <a:p>
+            <a:pPr algn="ctr" indent="0" marL="0">
+              <a:buNone/>
+            </a:pPr>
+            <a:r>
+              <a:rPr lang="en-US" sz="1300" b="1" spc="150" kern="0" dirty="0">
+                <a:solidFill>
+                  <a:srgbClr val="FFFFFF"/>
+                </a:solidFill>
+                <a:latin typeface="Calibri" pitchFamily="34" charset="0"/>
+                <a:ea typeface="Calibri" pitchFamily="34" charset="-122"/>
+                <a:cs typeface="Calibri" pitchFamily="34" charset="-120"/>
+              </a:rPr>
+              <a:t>RAPID</a:t>
+            </a:r>
+            <a:endParaRPr lang="en-US" sz="1300" dirty="0"/>
+          </a:p>
+        </p:txBody>
+      </p:sp>
+      <p:sp>
+        <p:nvSpPr>
+          <p:cNvPr id="17" name="Shape 12"/>
+          <p:cNvSpPr/>
+          <p:nvPr/>
+        </p:nvSpPr>
+        <p:spPr>
+          <a:xfrm>
+            <a:off x="868680" y="5193792"/>
+            <a:ext cx="854964" cy="0"/>
+          </a:xfrm>
+          <a:prstGeom prst="line">
+            <a:avLst/>
+          </a:prstGeom>
+          <a:noFill/>
+          <a:ln w="28575">
+            <a:solidFill>
+              <a:srgbClr val="FF4D6D">
+                <a:alpha val="75000"/>
+              </a:srgbClr>
+            </a:solidFill>
+            <a:prstDash val="solid"/>
+          </a:ln>
+        </p:spPr>
+      </p:sp>
+      <p:sp>
+        <p:nvSpPr>
+          <p:cNvPr id="18" name="Shape 13"/>
+          <p:cNvSpPr/>
+          <p:nvPr/>
+        </p:nvSpPr>
+        <p:spPr>
+          <a:xfrm flipV="1">
+            <a:off x="1723644" y="5047488"/>
+            <a:ext cx="150876" cy="146304"/>
+          </a:xfrm>
+          <a:prstGeom prst="line">
+            <a:avLst/>
+          </a:prstGeom>
+          <a:noFill/>
+          <a:ln w="28575">
+            <a:solidFill>
+              <a:srgbClr val="FF4D6D">
+                <a:alpha val="75000"/>
+              </a:srgbClr>
+            </a:solidFill>
+            <a:prstDash val="solid"/>
+          </a:ln>
+        </p:spPr>
+      </p:sp>
+      <p:sp>
+        <p:nvSpPr>
+          <p:cNvPr id="19" name="Shape 14"/>
+          <p:cNvSpPr/>
+          <p:nvPr/>
+        </p:nvSpPr>
+        <p:spPr>
+          <a:xfrm>
+            <a:off x="1874520" y="5047488"/>
+            <a:ext cx="150876" cy="457200"/>
+          </a:xfrm>
+          <a:prstGeom prst="line">
+            <a:avLst/>
+          </a:prstGeom>
+          <a:noFill/>
+          <a:ln w="28575">
+            <a:solidFill>
+              <a:srgbClr val="FF4D6D">
+                <a:alpha val="75000"/>
+              </a:srgbClr>
+            </a:solidFill>
+            <a:prstDash val="solid"/>
+          </a:ln>
+        </p:spPr>
+      </p:sp>
+      <p:sp>
+        <p:nvSpPr>
+          <p:cNvPr id="20" name="Shape 15"/>
+          <p:cNvSpPr/>
+          <p:nvPr/>
+        </p:nvSpPr>
+        <p:spPr>
+          <a:xfrm flipV="1">
+            <a:off x="2025396" y="4690872"/>
+            <a:ext cx="150876" cy="813816"/>
+          </a:xfrm>
+          <a:prstGeom prst="line">
+            <a:avLst/>
+          </a:prstGeom>
+          <a:noFill/>
+          <a:ln w="28575">
+            <a:solidFill>
+              <a:srgbClr val="FF4D6D">
+                <a:alpha val="75000"/>
+              </a:srgbClr>
+            </a:solidFill>
+            <a:prstDash val="solid"/>
+          </a:ln>
+        </p:spPr>
+      </p:sp>
+      <p:sp>
+        <p:nvSpPr>
+          <p:cNvPr id="21" name="Shape 16"/>
+          <p:cNvSpPr/>
+          <p:nvPr/>
+        </p:nvSpPr>
+        <p:spPr>
+          <a:xfrm>
+            <a:off x="2176272" y="4690872"/>
+            <a:ext cx="150876" cy="685800"/>
+          </a:xfrm>
+          <a:prstGeom prst="line">
+            <a:avLst/>
+          </a:prstGeom>
+          <a:noFill/>
+          <a:ln w="28575">
+            <a:solidFill>
+              <a:srgbClr val="FF4D6D">
+                <a:alpha val="75000"/>
+              </a:srgbClr>
+            </a:solidFill>
+            <a:prstDash val="solid"/>
+          </a:ln>
+        </p:spPr>
+      </p:sp>
+      <p:sp>
+        <p:nvSpPr>
+          <p:cNvPr id="22" name="Shape 17"/>
+          <p:cNvSpPr/>
+          <p:nvPr/>
+        </p:nvSpPr>
+        <p:spPr>
+          <a:xfrm flipV="1">
+            <a:off x="2327148" y="5193792"/>
+            <a:ext cx="150876" cy="182880"/>
+          </a:xfrm>
+          <a:prstGeom prst="line">
+            <a:avLst/>
+          </a:prstGeom>
+          <a:noFill/>
+          <a:ln w="28575">
+            <a:solidFill>
+              <a:srgbClr val="FF4D6D">
+                <a:alpha val="75000"/>
+              </a:srgbClr>
+            </a:solidFill>
+            <a:prstDash val="solid"/>
+          </a:ln>
+        </p:spPr>
+      </p:sp>
+      <p:sp>
+        <p:nvSpPr>
+          <p:cNvPr id="23" name="Shape 18"/>
+          <p:cNvSpPr/>
+          <p:nvPr/>
+        </p:nvSpPr>
+        <p:spPr>
+          <a:xfrm>
+            <a:off x="2478024" y="5193792"/>
+            <a:ext cx="905256" cy="0"/>
+          </a:xfrm>
+          <a:prstGeom prst="line">
+            <a:avLst/>
+          </a:prstGeom>
+          <a:noFill/>
+          <a:ln w="28575">
+            <a:solidFill>
+              <a:srgbClr val="FF4D6D">
+                <a:alpha val="75000"/>
+              </a:srgbClr>
+            </a:solidFill>
+            <a:prstDash val="solid"/>
+          </a:ln>
+        </p:spPr>
+      </p:sp>
+      <p:sp>
+        <p:nvSpPr>
+          <p:cNvPr id="24" name="Shape 19"/>
+          <p:cNvSpPr/>
+          <p:nvPr/>
+        </p:nvSpPr>
+        <p:spPr>
+          <a:xfrm>
+            <a:off x="3977640" y="2889504"/>
+            <a:ext cx="3739896" cy="777240"/>
+          </a:xfrm>
+          <a:prstGeom prst="roundRect">
+            <a:avLst>
+              <a:gd name="adj" fmla="val 11765"/>
+            </a:avLst>
+          </a:prstGeom>
+          <a:solidFill>
+            <a:srgbClr val="FFF0F3"/>
+          </a:solidFill>
+          <a:ln w="12700">
+            <a:solidFill>
+              <a:srgbClr val="FBD8DF"/>
+            </a:solidFill>
+            <a:prstDash val="solid"/>
+          </a:ln>
+        </p:spPr>
+      </p:sp>
+      <p:sp>
+        <p:nvSpPr>
+          <p:cNvPr id="25" name="Text 20"/>
+          <p:cNvSpPr/>
+          <p:nvPr/>
+        </p:nvSpPr>
+        <p:spPr>
+          <a:xfrm>
+            <a:off x="4206240" y="3008376"/>
+            <a:ext cx="3328416" cy="219456"/>
+          </a:xfrm>
+          <a:prstGeom prst="rect">
+            <a:avLst/>
+          </a:prstGeom>
+          <a:noFill/>
+          <a:ln/>
+        </p:spPr>
+        <p:txBody>
+          <a:bodyPr wrap="square" lIns="0" tIns="0" rIns="0" bIns="0" rtlCol="0" anchor="t"/>
+          <a:lstStyle/>
+          <a:p>
+            <a:pPr algn="l" indent="0" marL="0">
+              <a:buNone/>
+            </a:pPr>
+            <a:r>
+              <a:rPr lang="en-US" sz="1100" b="1" spc="120" kern="0" dirty="0">
+                <a:solidFill>
+                  <a:srgbClr val="A4133C"/>
+                </a:solidFill>
+                <a:latin typeface="Calibri" pitchFamily="34" charset="0"/>
+                <a:ea typeface="Calibri" pitchFamily="34" charset="-122"/>
+                <a:cs typeface="Calibri" pitchFamily="34" charset="-120"/>
+              </a:rPr>
+              <a:t>RHYTHM</a:t>
+            </a:r>
+            <a:endParaRPr lang="en-US" sz="1100" dirty="0"/>
+          </a:p>
+        </p:txBody>
+      </p:sp>
+      <p:sp>
+        <p:nvSpPr>
+          <p:cNvPr id="26" name="Text 21"/>
+          <p:cNvSpPr/>
+          <p:nvPr/>
+        </p:nvSpPr>
+        <p:spPr>
+          <a:xfrm>
+            <a:off x="4206240" y="3236976"/>
+            <a:ext cx="3328416" cy="384048"/>
+          </a:xfrm>
+          <a:prstGeom prst="rect">
+            <a:avLst/>
+          </a:prstGeom>
+          <a:noFill/>
+          <a:ln/>
+        </p:spPr>
+        <p:txBody>
+          <a:bodyPr wrap="square" lIns="0" tIns="0" rIns="0" bIns="0" rtlCol="0" anchor="t"/>
+          <a:lstStyle/>
+          <a:p>
+            <a:pPr algn="l" indent="0" marL="0">
+              <a:lnSpc>
+                <a:spcPct val="100000"/>
+              </a:lnSpc>
+              <a:buNone/>
+            </a:pPr>
+            <a:r>
+              <a:rPr lang="en-US" sz="1300" b="1" dirty="0">
+                <a:solidFill>
+                  <a:srgbClr val="2B2B33"/>
+                </a:solidFill>
+                <a:latin typeface="Calibri" pitchFamily="34" charset="0"/>
+                <a:ea typeface="Calibri" pitchFamily="34" charset="-122"/>
+                <a:cs typeface="Calibri" pitchFamily="34" charset="-120"/>
+              </a:rPr>
+              <a:t>Atrial fibrillation (irregularly irregular)</a:t>
+            </a:r>
+            <a:endParaRPr lang="en-US" sz="1300" dirty="0"/>
+          </a:p>
+        </p:txBody>
+      </p:sp>
+      <p:sp>
+        <p:nvSpPr>
+          <p:cNvPr id="27" name="Shape 22"/>
+          <p:cNvSpPr/>
+          <p:nvPr/>
+        </p:nvSpPr>
+        <p:spPr>
+          <a:xfrm>
+            <a:off x="7946136" y="2889504"/>
+            <a:ext cx="3739896" cy="777240"/>
+          </a:xfrm>
+          <a:prstGeom prst="roundRect">
+            <a:avLst>
+              <a:gd name="adj" fmla="val 11765"/>
+            </a:avLst>
+          </a:prstGeom>
+          <a:solidFill>
+            <a:srgbClr val="FFF0F3"/>
+          </a:solidFill>
+          <a:ln w="12700">
+            <a:solidFill>
+              <a:srgbClr val="FBD8DF"/>
+            </a:solidFill>
+            <a:prstDash val="solid"/>
+          </a:ln>
+        </p:spPr>
+      </p:sp>
+      <p:sp>
+        <p:nvSpPr>
+          <p:cNvPr id="28" name="Text 23"/>
+          <p:cNvSpPr/>
+          <p:nvPr/>
+        </p:nvSpPr>
+        <p:spPr>
+          <a:xfrm>
+            <a:off x="8174736" y="3008376"/>
+            <a:ext cx="3328416" cy="219456"/>
+          </a:xfrm>
+          <a:prstGeom prst="rect">
+            <a:avLst/>
+          </a:prstGeom>
+          <a:noFill/>
+          <a:ln/>
+        </p:spPr>
+        <p:txBody>
+          <a:bodyPr wrap="square" lIns="0" tIns="0" rIns="0" bIns="0" rtlCol="0" anchor="t"/>
+          <a:lstStyle/>
+          <a:p>
+            <a:pPr algn="l" indent="0" marL="0">
+              <a:buNone/>
+            </a:pPr>
+            <a:r>
+              <a:rPr lang="en-US" sz="1100" b="1" spc="120" kern="0" dirty="0">
+                <a:solidFill>
+                  <a:srgbClr val="A4133C"/>
+                </a:solidFill>
+                <a:latin typeface="Calibri" pitchFamily="34" charset="0"/>
+                <a:ea typeface="Calibri" pitchFamily="34" charset="-122"/>
+                <a:cs typeface="Calibri" pitchFamily="34" charset="-120"/>
+              </a:rPr>
+              <a:t>P WAVES</a:t>
+            </a:r>
+            <a:endParaRPr lang="en-US" sz="1100" dirty="0"/>
+          </a:p>
+        </p:txBody>
+      </p:sp>
+      <p:sp>
+        <p:nvSpPr>
+          <p:cNvPr id="29" name="Text 24"/>
+          <p:cNvSpPr/>
+          <p:nvPr/>
+        </p:nvSpPr>
+        <p:spPr>
+          <a:xfrm>
+            <a:off x="8174736" y="3236976"/>
+            <a:ext cx="3328416" cy="384048"/>
+          </a:xfrm>
+          <a:prstGeom prst="rect">
+            <a:avLst/>
+          </a:prstGeom>
+          <a:noFill/>
+          <a:ln/>
+        </p:spPr>
+        <p:txBody>
+          <a:bodyPr wrap="square" lIns="0" tIns="0" rIns="0" bIns="0" rtlCol="0" anchor="t"/>
+          <a:lstStyle/>
+          <a:p>
+            <a:pPr algn="l" indent="0" marL="0">
+              <a:lnSpc>
+                <a:spcPct val="100000"/>
+              </a:lnSpc>
+              <a:buNone/>
+            </a:pPr>
+            <a:r>
+              <a:rPr lang="en-US" sz="1300" b="1" dirty="0">
+                <a:solidFill>
+                  <a:srgbClr val="2B2B33"/>
+                </a:solidFill>
+                <a:latin typeface="Calibri" pitchFamily="34" charset="0"/>
+                <a:ea typeface="Calibri" pitchFamily="34" charset="-122"/>
+                <a:cs typeface="Calibri" pitchFamily="34" charset="-120"/>
+              </a:rPr>
+              <a:t>Absent (no organised atrial activity)</a:t>
+            </a:r>
+            <a:endParaRPr lang="en-US" sz="1300" dirty="0"/>
+          </a:p>
+        </p:txBody>
+      </p:sp>
+      <p:sp>
+        <p:nvSpPr>
+          <p:cNvPr id="30" name="Shape 25"/>
+          <p:cNvSpPr/>
+          <p:nvPr/>
+        </p:nvSpPr>
+        <p:spPr>
+          <a:xfrm>
+            <a:off x="3977640" y="3808476"/>
+            <a:ext cx="3739896" cy="777240"/>
+          </a:xfrm>
+          <a:prstGeom prst="roundRect">
+            <a:avLst>
+              <a:gd name="adj" fmla="val 11765"/>
+            </a:avLst>
+          </a:prstGeom>
+          <a:solidFill>
+            <a:srgbClr val="FFF0F3"/>
+          </a:solidFill>
+          <a:ln w="12700">
+            <a:solidFill>
+              <a:srgbClr val="FBD8DF"/>
+            </a:solidFill>
+            <a:prstDash val="solid"/>
+          </a:ln>
+        </p:spPr>
+      </p:sp>
+      <p:sp>
+        <p:nvSpPr>
+          <p:cNvPr id="31" name="Text 26"/>
+          <p:cNvSpPr/>
+          <p:nvPr/>
+        </p:nvSpPr>
+        <p:spPr>
+          <a:xfrm>
+            <a:off x="4206240" y="3927348"/>
+            <a:ext cx="3328416" cy="219456"/>
+          </a:xfrm>
+          <a:prstGeom prst="rect">
+            <a:avLst/>
+          </a:prstGeom>
+          <a:noFill/>
+          <a:ln/>
+        </p:spPr>
+        <p:txBody>
+          <a:bodyPr wrap="square" lIns="0" tIns="0" rIns="0" bIns="0" rtlCol="0" anchor="t"/>
+          <a:lstStyle/>
+          <a:p>
+            <a:pPr algn="l" indent="0" marL="0">
+              <a:buNone/>
+            </a:pPr>
+            <a:r>
+              <a:rPr lang="en-US" sz="1100" b="1" spc="120" kern="0" dirty="0">
+                <a:solidFill>
+                  <a:srgbClr val="A4133C"/>
+                </a:solidFill>
+                <a:latin typeface="Calibri" pitchFamily="34" charset="0"/>
+                <a:ea typeface="Calibri" pitchFamily="34" charset="-122"/>
+                <a:cs typeface="Calibri" pitchFamily="34" charset="-120"/>
+              </a:rPr>
+              <a:t>PR INTERVAL</a:t>
+            </a:r>
+            <a:endParaRPr lang="en-US" sz="1100" dirty="0"/>
+          </a:p>
+        </p:txBody>
+      </p:sp>
+      <p:sp>
+        <p:nvSpPr>
+          <p:cNvPr id="32" name="Text 27"/>
+          <p:cNvSpPr/>
+          <p:nvPr/>
+        </p:nvSpPr>
+        <p:spPr>
+          <a:xfrm>
+            <a:off x="4206240" y="4155948"/>
+            <a:ext cx="3328416" cy="384048"/>
+          </a:xfrm>
+          <a:prstGeom prst="rect">
+            <a:avLst/>
+          </a:prstGeom>
+          <a:noFill/>
+          <a:ln/>
+        </p:spPr>
+        <p:txBody>
+          <a:bodyPr wrap="square" lIns="0" tIns="0" rIns="0" bIns="0" rtlCol="0" anchor="t"/>
+          <a:lstStyle/>
+          <a:p>
+            <a:pPr algn="l" indent="0" marL="0">
+              <a:lnSpc>
+                <a:spcPct val="100000"/>
+              </a:lnSpc>
+              <a:buNone/>
+            </a:pPr>
+            <a:r>
+              <a:rPr lang="en-US" sz="1300" b="1" dirty="0">
+                <a:solidFill>
+                  <a:srgbClr val="2B2B33"/>
+                </a:solidFill>
+                <a:latin typeface="Calibri" pitchFamily="34" charset="0"/>
+                <a:ea typeface="Calibri" pitchFamily="34" charset="-122"/>
+                <a:cs typeface="Calibri" pitchFamily="34" charset="-120"/>
+              </a:rPr>
+              <a:t>Not measurable</a:t>
+            </a:r>
+            <a:endParaRPr lang="en-US" sz="1300" dirty="0"/>
+          </a:p>
+        </p:txBody>
+      </p:sp>
+      <p:sp>
+        <p:nvSpPr>
+          <p:cNvPr id="33" name="Shape 28"/>
+          <p:cNvSpPr/>
+          <p:nvPr/>
+        </p:nvSpPr>
+        <p:spPr>
+          <a:xfrm>
+            <a:off x="7946136" y="3808476"/>
+            <a:ext cx="3739896" cy="777240"/>
+          </a:xfrm>
+          <a:prstGeom prst="roundRect">
+            <a:avLst>
+              <a:gd name="adj" fmla="val 11765"/>
+            </a:avLst>
+          </a:prstGeom>
+          <a:solidFill>
+            <a:srgbClr val="FFF0F3"/>
+          </a:solidFill>
+          <a:ln w="12700">
+            <a:solidFill>
+              <a:srgbClr val="FBD8DF"/>
+            </a:solidFill>
+            <a:prstDash val="solid"/>
+          </a:ln>
+        </p:spPr>
+      </p:sp>
+      <p:sp>
+        <p:nvSpPr>
+          <p:cNvPr id="34" name="Text 29"/>
+          <p:cNvSpPr/>
+          <p:nvPr/>
+        </p:nvSpPr>
+        <p:spPr>
+          <a:xfrm>
+            <a:off x="8174736" y="3927348"/>
+            <a:ext cx="3328416" cy="219456"/>
+          </a:xfrm>
+          <a:prstGeom prst="rect">
+            <a:avLst/>
+          </a:prstGeom>
+          <a:noFill/>
+          <a:ln/>
+        </p:spPr>
+        <p:txBody>
+          <a:bodyPr wrap="square" lIns="0" tIns="0" rIns="0" bIns="0" rtlCol="0" anchor="t"/>
+          <a:lstStyle/>
+          <a:p>
+            <a:pPr algn="l" indent="0" marL="0">
+              <a:buNone/>
+            </a:pPr>
+            <a:r>
+              <a:rPr lang="en-US" sz="1100" b="1" spc="120" kern="0" dirty="0">
+                <a:solidFill>
+                  <a:srgbClr val="A4133C"/>
+                </a:solidFill>
+                <a:latin typeface="Calibri" pitchFamily="34" charset="0"/>
+                <a:ea typeface="Calibri" pitchFamily="34" charset="-122"/>
+                <a:cs typeface="Calibri" pitchFamily="34" charset="-120"/>
+              </a:rPr>
+              <a:t>QRS DURATION</a:t>
+            </a:r>
+            <a:endParaRPr lang="en-US" sz="1100" dirty="0"/>
+          </a:p>
+        </p:txBody>
+      </p:sp>
+      <p:sp>
+        <p:nvSpPr>
+          <p:cNvPr id="35" name="Text 30"/>
+          <p:cNvSpPr/>
+          <p:nvPr/>
+        </p:nvSpPr>
+        <p:spPr>
+          <a:xfrm>
+            <a:off x="8174736" y="4155948"/>
+            <a:ext cx="3328416" cy="384048"/>
+          </a:xfrm>
+          <a:prstGeom prst="rect">
+            <a:avLst/>
+          </a:prstGeom>
+          <a:noFill/>
+          <a:ln/>
+        </p:spPr>
+        <p:txBody>
+          <a:bodyPr wrap="square" lIns="0" tIns="0" rIns="0" bIns="0" rtlCol="0" anchor="t"/>
+          <a:lstStyle/>
+          <a:p>
+            <a:pPr algn="l" indent="0" marL="0">
+              <a:lnSpc>
+                <a:spcPct val="100000"/>
+              </a:lnSpc>
+              <a:buNone/>
+            </a:pPr>
+            <a:r>
+              <a:rPr lang="en-US" sz="1300" b="1" dirty="0">
+                <a:solidFill>
+                  <a:srgbClr val="2B2B33"/>
+                </a:solidFill>
+                <a:latin typeface="Calibri" pitchFamily="34" charset="0"/>
+                <a:ea typeface="Calibri" pitchFamily="34" charset="-122"/>
+                <a:cs typeface="Calibri" pitchFamily="34" charset="-120"/>
+              </a:rPr>
+              <a:t>80 ms</a:t>
+            </a:r>
+            <a:pPr algn="l" indent="0" marL="0">
+              <a:lnSpc>
+                <a:spcPct val="100000"/>
+              </a:lnSpc>
+              <a:buNone/>
+            </a:pPr>
+            <a:r>
+              <a:rPr lang="en-US" sz="1100" b="1" dirty="0">
+                <a:solidFill>
+                  <a:srgbClr val="2E7D32"/>
+                </a:solidFill>
+                <a:latin typeface="Calibri" pitchFamily="34" charset="0"/>
+                <a:ea typeface="Calibri" pitchFamily="34" charset="-122"/>
+                <a:cs typeface="Calibri" pitchFamily="34" charset="-120"/>
+              </a:rPr>
+              <a:t>   normal</a:t>
+            </a:r>
+            <a:endParaRPr lang="en-US" sz="1300" dirty="0"/>
+          </a:p>
+        </p:txBody>
+      </p:sp>
+      <p:sp>
+        <p:nvSpPr>
+          <p:cNvPr id="36" name="Shape 31"/>
+          <p:cNvSpPr/>
+          <p:nvPr/>
+        </p:nvSpPr>
+        <p:spPr>
+          <a:xfrm>
+            <a:off x="3977640" y="4727448"/>
+            <a:ext cx="3739896" cy="777240"/>
+          </a:xfrm>
+          <a:prstGeom prst="roundRect">
+            <a:avLst>
+              <a:gd name="adj" fmla="val 11765"/>
+            </a:avLst>
+          </a:prstGeom>
+          <a:solidFill>
+            <a:srgbClr val="FFF0F3"/>
+          </a:solidFill>
+          <a:ln w="12700">
+            <a:solidFill>
+              <a:srgbClr val="FBD8DF"/>
+            </a:solidFill>
+            <a:prstDash val="solid"/>
+          </a:ln>
+        </p:spPr>
+      </p:sp>
+      <p:sp>
+        <p:nvSpPr>
+          <p:cNvPr id="37" name="Text 32"/>
+          <p:cNvSpPr/>
+          <p:nvPr/>
+        </p:nvSpPr>
+        <p:spPr>
+          <a:xfrm>
+            <a:off x="4206240" y="4846320"/>
+            <a:ext cx="3328416" cy="219456"/>
+          </a:xfrm>
+          <a:prstGeom prst="rect">
+            <a:avLst/>
+          </a:prstGeom>
+          <a:noFill/>
+          <a:ln/>
+        </p:spPr>
+        <p:txBody>
+          <a:bodyPr wrap="square" lIns="0" tIns="0" rIns="0" bIns="0" rtlCol="0" anchor="t"/>
+          <a:lstStyle/>
+          <a:p>
+            <a:pPr algn="l" indent="0" marL="0">
+              <a:buNone/>
+            </a:pPr>
+            <a:r>
+              <a:rPr lang="en-US" sz="1100" b="1" spc="120" kern="0" dirty="0">
+                <a:solidFill>
+                  <a:srgbClr val="A4133C"/>
+                </a:solidFill>
+                <a:latin typeface="Calibri" pitchFamily="34" charset="0"/>
+                <a:ea typeface="Calibri" pitchFamily="34" charset="-122"/>
+                <a:cs typeface="Calibri" pitchFamily="34" charset="-120"/>
+              </a:rPr>
+              <a:t>QT / QTC</a:t>
+            </a:r>
+            <a:endParaRPr lang="en-US" sz="1100" dirty="0"/>
+          </a:p>
+        </p:txBody>
+      </p:sp>
+      <p:sp>
+        <p:nvSpPr>
+          <p:cNvPr id="38" name="Text 33"/>
+          <p:cNvSpPr/>
+          <p:nvPr/>
+        </p:nvSpPr>
+        <p:spPr>
+          <a:xfrm>
+            <a:off x="4206240" y="5074920"/>
+            <a:ext cx="3328416" cy="384048"/>
+          </a:xfrm>
+          <a:prstGeom prst="rect">
+            <a:avLst/>
+          </a:prstGeom>
+          <a:noFill/>
+          <a:ln/>
+        </p:spPr>
+        <p:txBody>
+          <a:bodyPr wrap="square" lIns="0" tIns="0" rIns="0" bIns="0" rtlCol="0" anchor="t"/>
+          <a:lstStyle/>
+          <a:p>
+            <a:pPr algn="l" indent="0" marL="0">
+              <a:lnSpc>
+                <a:spcPct val="100000"/>
+              </a:lnSpc>
+              <a:buNone/>
+            </a:pPr>
+            <a:r>
+              <a:rPr lang="en-US" sz="1300" b="1" dirty="0">
+                <a:solidFill>
+                  <a:srgbClr val="2B2B33"/>
+                </a:solidFill>
+                <a:latin typeface="Calibri" pitchFamily="34" charset="0"/>
+                <a:ea typeface="Calibri" pitchFamily="34" charset="-122"/>
+                <a:cs typeface="Calibri" pitchFamily="34" charset="-120"/>
+              </a:rPr>
+              <a:t>298 / 382 ms</a:t>
+            </a:r>
+            <a:endParaRPr lang="en-US" sz="1300" dirty="0"/>
+          </a:p>
+        </p:txBody>
+      </p:sp>
+      <p:sp>
+        <p:nvSpPr>
+          <p:cNvPr id="39" name="Shape 34"/>
+          <p:cNvSpPr/>
+          <p:nvPr/>
+        </p:nvSpPr>
+        <p:spPr>
+          <a:xfrm>
+            <a:off x="7946136" y="4727448"/>
+            <a:ext cx="3739896" cy="777240"/>
+          </a:xfrm>
+          <a:prstGeom prst="roundRect">
+            <a:avLst>
+              <a:gd name="adj" fmla="val 11765"/>
+            </a:avLst>
+          </a:prstGeom>
+          <a:solidFill>
+            <a:srgbClr val="FFF0F3"/>
+          </a:solidFill>
+          <a:ln w="12700">
+            <a:solidFill>
+              <a:srgbClr val="FBD8DF"/>
+            </a:solidFill>
+            <a:prstDash val="solid"/>
+          </a:ln>
+        </p:spPr>
+      </p:sp>
+      <p:sp>
+        <p:nvSpPr>
+          <p:cNvPr id="40" name="Text 35"/>
+          <p:cNvSpPr/>
+          <p:nvPr/>
+        </p:nvSpPr>
+        <p:spPr>
+          <a:xfrm>
+            <a:off x="8174736" y="4846320"/>
+            <a:ext cx="3328416" cy="219456"/>
+          </a:xfrm>
+          <a:prstGeom prst="rect">
+            <a:avLst/>
+          </a:prstGeom>
+          <a:noFill/>
+          <a:ln/>
+        </p:spPr>
+        <p:txBody>
+          <a:bodyPr wrap="square" lIns="0" tIns="0" rIns="0" bIns="0" rtlCol="0" anchor="t"/>
+          <a:lstStyle/>
+          <a:p>
+            <a:pPr algn="l" indent="0" marL="0">
+              <a:buNone/>
+            </a:pPr>
+            <a:r>
+              <a:rPr lang="en-US" sz="1100" b="1" spc="120" kern="0" dirty="0">
+                <a:solidFill>
+                  <a:srgbClr val="A4133C"/>
+                </a:solidFill>
+                <a:latin typeface="Calibri" pitchFamily="34" charset="0"/>
+                <a:ea typeface="Calibri" pitchFamily="34" charset="-122"/>
+                <a:cs typeface="Calibri" pitchFamily="34" charset="-120"/>
+              </a:rPr>
+              <a:t>QRS AXIS</a:t>
+            </a:r>
+            <a:endParaRPr lang="en-US" sz="1100" dirty="0"/>
+          </a:p>
+        </p:txBody>
+      </p:sp>
+      <p:sp>
+        <p:nvSpPr>
+          <p:cNvPr id="41" name="Text 36"/>
+          <p:cNvSpPr/>
+          <p:nvPr/>
+        </p:nvSpPr>
+        <p:spPr>
+          <a:xfrm>
+            <a:off x="8174736" y="5074920"/>
+            <a:ext cx="3328416" cy="384048"/>
+          </a:xfrm>
+          <a:prstGeom prst="rect">
+            <a:avLst/>
+          </a:prstGeom>
+          <a:noFill/>
+          <a:ln/>
+        </p:spPr>
+        <p:txBody>
+          <a:bodyPr wrap="square" lIns="0" tIns="0" rIns="0" bIns="0" rtlCol="0" anchor="t"/>
+          <a:lstStyle/>
+          <a:p>
+            <a:pPr algn="l" indent="0" marL="0">
+              <a:lnSpc>
+                <a:spcPct val="100000"/>
+              </a:lnSpc>
+              <a:buNone/>
+            </a:pPr>
+            <a:r>
+              <a:rPr lang="en-US" sz="1300" b="1" dirty="0">
+                <a:solidFill>
+                  <a:srgbClr val="2B2B33"/>
+                </a:solidFill>
+                <a:latin typeface="Calibri" pitchFamily="34" charset="0"/>
+                <a:ea typeface="Calibri" pitchFamily="34" charset="-122"/>
+                <a:cs typeface="Calibri" pitchFamily="34" charset="-120"/>
+              </a:rPr>
+              <a:t>38°</a:t>
+            </a:r>
+            <a:endParaRPr lang="en-US" sz="1300" dirty="0"/>
+          </a:p>
+        </p:txBody>
+      </p:sp>
+      <p:sp>
+        <p:nvSpPr>
+          <p:cNvPr id="42" name="Shape 37"/>
+          <p:cNvSpPr/>
+          <p:nvPr/>
+        </p:nvSpPr>
+        <p:spPr>
+          <a:xfrm>
+            <a:off x="502920" y="5687568"/>
+            <a:ext cx="11183112" cy="457200"/>
+          </a:xfrm>
+          <a:prstGeom prst="roundRect">
+            <a:avLst>
+              <a:gd name="adj" fmla="val 20000"/>
+            </a:avLst>
+          </a:prstGeom>
+          <a:solidFill>
+            <a:srgbClr val="FFFFFF"/>
+          </a:solidFill>
+          <a:ln w="12700">
+            <a:solidFill>
+              <a:srgbClr val="FBD8DF"/>
+            </a:solidFill>
+            <a:prstDash val="solid"/>
+          </a:ln>
+        </p:spPr>
+      </p:sp>
+      <p:pic>
+        <p:nvPicPr>
+          <p:cNvPr id="43" name="Image 3" descr="preencoded.png">    </p:cNvPr>
+          <p:cNvPicPr>
+            <a:picLocks noChangeAspect="1"/>
+          </p:cNvPicPr>
+          <p:nvPr/>
+        </p:nvPicPr>
+        <p:blipFill>
+          <a:blip r:embed="rId4"/>
+          <a:stretch>
+            <a:fillRect/>
+          </a:stretch>
+        </p:blipFill>
+        <p:spPr>
+          <a:xfrm>
+            <a:off x="749808" y="5797296"/>
+            <a:ext cx="237744" cy="237744"/>
+          </a:xfrm>
+          <a:prstGeom prst="rect">
+            <a:avLst/>
+          </a:prstGeom>
+        </p:spPr>
+      </p:pic>
+      <p:sp>
+        <p:nvSpPr>
+          <p:cNvPr id="44" name="Text 38"/>
+          <p:cNvSpPr/>
+          <p:nvPr/>
+        </p:nvSpPr>
+        <p:spPr>
+          <a:xfrm>
+            <a:off x="1097280" y="5687568"/>
+            <a:ext cx="10332720" cy="457200"/>
+          </a:xfrm>
+          <a:prstGeom prst="rect">
+            <a:avLst/>
+          </a:prstGeom>
+          <a:noFill/>
+          <a:ln/>
+        </p:spPr>
+        <p:txBody>
+          <a:bodyPr wrap="square" lIns="0" tIns="0" rIns="0" bIns="0" rtlCol="0" anchor="ctr"/>
+          <a:lstStyle/>
+          <a:p>
+            <a:pPr algn="l" indent="0" marL="0">
+              <a:buNone/>
+            </a:pPr>
+            <a:r>
+              <a:rPr lang="en-US" sz="1350" i="1" dirty="0">
+                <a:solidFill>
+                  <a:srgbClr val="2B2B33"/>
+                </a:solidFill>
+                <a:latin typeface="Calibri" pitchFamily="34" charset="0"/>
+                <a:ea typeface="Calibri" pitchFamily="34" charset="-122"/>
+                <a:cs typeface="Calibri" pitchFamily="34" charset="-120"/>
+              </a:rPr>
+              <a:t>Confirms atrial fibrillation with a fast ventricular rate.</a:t>
+            </a:r>
+            <a:endParaRPr lang="en-US" sz="1350" dirty="0"/>
+          </a:p>
+        </p:txBody>
+      </p:sp>
+      <p:sp>
+        <p:nvSpPr>
+          <p:cNvPr id="45" name="Text 39"/>
+          <p:cNvSpPr/>
+          <p:nvPr/>
+        </p:nvSpPr>
+        <p:spPr>
+          <a:xfrm>
+            <a:off x="11277295" y="6355080"/>
+            <a:ext cx="548640" cy="320040"/>
+          </a:xfrm>
+          <a:prstGeom prst="rect">
+            <a:avLst/>
+          </a:prstGeom>
+          <a:noFill/>
+          <a:ln/>
+        </p:spPr>
+        <p:txBody>
+          <a:bodyPr wrap="square" rtlCol="0" anchor="t"/>
+          <a:lstStyle/>
+          <a:p>
+            <a:pPr algn="r" indent="0" marL="0">
+              <a:buNone/>
+            </a:pPr>
+            <a:r>
+              <a:rPr lang="en-US" sz="1100" b="1" dirty="0">
+                <a:solidFill>
+                  <a:srgbClr val="6B6B76"/>
+                </a:solidFill>
+                <a:latin typeface="Calibri" pitchFamily="34" charset="0"/>
+                <a:ea typeface="Calibri" pitchFamily="34" charset="-122"/>
+                <a:cs typeface="Calibri" pitchFamily="34" charset="-120"/>
+              </a:rPr>
+              <a:t>14</a:t>
+            </a:r>
+            <a:endParaRPr lang="en-US" sz="1100" dirty="0"/>
+          </a:p>
+        </p:txBody>
+      </p:sp>
+      <p:sp>
+        <p:nvSpPr>
+          <p:cNvPr id="46" name="Text 40"/>
+          <p:cNvSpPr/>
+          <p:nvPr/>
+        </p:nvSpPr>
+        <p:spPr>
+          <a:xfrm>
+            <a:off x="502920" y="6355080"/>
+            <a:ext cx="5486400" cy="320040"/>
+          </a:xfrm>
+          <a:prstGeom prst="rect">
+            <a:avLst/>
+          </a:prstGeom>
+          <a:noFill/>
+          <a:ln/>
+        </p:spPr>
+        <p:txBody>
+          <a:bodyPr wrap="square" rtlCol="0" anchor="t"/>
+          <a:lstStyle/>
+          <a:p>
+            <a:pPr algn="l" indent="0" marL="0">
+              <a:buNone/>
+            </a:pPr>
+            <a:r>
+              <a:rPr lang="en-US" sz="900" dirty="0">
+                <a:solidFill>
+                  <a:srgbClr val="6B6B76"/>
+                </a:solidFill>
+                <a:latin typeface="Calibri" pitchFamily="34" charset="0"/>
+                <a:ea typeface="Calibri" pitchFamily="34" charset="-122"/>
+                <a:cs typeface="Calibri" pitchFamily="34" charset="-120"/>
+              </a:rPr>
+              <a:t>Clinicopathological Conference</a:t>
+            </a:r>
+            <a:endParaRPr lang="en-US" sz="900" dirty="0"/>
+          </a:p>
+        </p:txBody>
+      </p:sp>
+    </p:spTree>
+  </p:cSld>
+  <p:clrMapOvr>
+    <a:masterClrMapping/>
+  </p:clrMapOvr>
+</p:sld>
+</file>
+
+<file path=ppt/slides/slide15.xml><?xml version="1.0" encoding="utf-8"?>
+<p:sld xmlns:a="http://schemas.openxmlformats.org/drawingml/2006/main" xmlns:r="http://schemas.openxmlformats.org/officeDocument/2006/relationships" xmlns:p="http://schemas.openxmlformats.org/presentationml/2006/main">
+  <p:cSld name="Slide 15">
+    <p:bg>
+      <p:bgPr>
+        <a:solidFill>
+          <a:srgbClr val="FFFFFF"/>
+        </a:solidFill>
+      </p:bgPr>
+    </p:bg>
+    <p:spTree>
+      <p:nvGrpSpPr>
+        <p:cNvPr id="1" name=""/>
+        <p:cNvGrpSpPr/>
+        <p:nvPr/>
+      </p:nvGrpSpPr>
+      <p:grpSpPr>
+        <a:xfrm>
+          <a:off x="0" y="0"/>
+          <a:ext cx="0" cy="0"/>
+          <a:chOff x="0" y="0"/>
+          <a:chExt cx="0" cy="0"/>
+        </a:xfrm>
+      </p:grpSpPr>
+      <p:sp>
+        <p:nvSpPr>
+          <p:cNvPr id="2" name="Shape 0"/>
+          <p:cNvSpPr/>
+          <p:nvPr/>
+        </p:nvSpPr>
+        <p:spPr>
+          <a:xfrm>
+            <a:off x="502920" y="457200"/>
+            <a:ext cx="868680" cy="868680"/>
+          </a:xfrm>
+          <a:prstGeom prst="ellipse">
+            <a:avLst/>
+          </a:prstGeom>
+          <a:solidFill>
+            <a:srgbClr val="FFF0F3"/>
+          </a:solidFill>
+          <a:ln w="12700">
+            <a:solidFill>
+              <a:srgbClr val="FBD8DF"/>
+            </a:solidFill>
+            <a:prstDash val="solid"/>
+          </a:ln>
+        </p:spPr>
+      </p:sp>
+      <p:pic>
+        <p:nvPicPr>
+          <p:cNvPr id="3" name="Image 0" descr="preencoded.png">    </p:cNvPr>
+          <p:cNvPicPr>
+            <a:picLocks noChangeAspect="1"/>
+          </p:cNvPicPr>
+          <p:nvPr/>
+        </p:nvPicPr>
+        <p:blipFill>
+          <a:blip r:embed="rId1"/>
+          <a:stretch>
+            <a:fillRect/>
+          </a:stretch>
+        </p:blipFill>
+        <p:spPr>
+          <a:xfrm>
+            <a:off x="694944" y="649224"/>
+            <a:ext cx="484632" cy="484632"/>
+          </a:xfrm>
+          <a:prstGeom prst="rect">
+            <a:avLst/>
+          </a:prstGeom>
+        </p:spPr>
+      </p:pic>
+      <p:sp>
+        <p:nvSpPr>
+          <p:cNvPr id="4" name="Text 1"/>
+          <p:cNvSpPr/>
+          <p:nvPr/>
+        </p:nvSpPr>
+        <p:spPr>
+          <a:xfrm>
+            <a:off x="1572768" y="502920"/>
+            <a:ext cx="9601200" cy="274320"/>
+          </a:xfrm>
+          <a:prstGeom prst="rect">
+            <a:avLst/>
+          </a:prstGeom>
+          <a:noFill/>
+          <a:ln/>
+        </p:spPr>
+        <p:txBody>
+          <a:bodyPr wrap="square" rtlCol="0" anchor="t"/>
+          <a:lstStyle/>
+          <a:p>
+            <a:pPr algn="l" indent="0" marL="0">
+              <a:buNone/>
+            </a:pPr>
+            <a:r>
+              <a:rPr lang="en-US" sz="1250" b="1" spc="200" kern="0" dirty="0">
+                <a:solidFill>
+                  <a:srgbClr val="A4133C"/>
+                </a:solidFill>
+                <a:latin typeface="Calibri" pitchFamily="34" charset="0"/>
+                <a:ea typeface="Calibri" pitchFamily="34" charset="-122"/>
+                <a:cs typeface="Calibri" pitchFamily="34" charset="-120"/>
+              </a:rPr>
+              <a:t>INVESTIGATIONS · HAEMATOLOGY</a:t>
+            </a:r>
+            <a:endParaRPr lang="en-US" sz="1250" dirty="0"/>
+          </a:p>
+        </p:txBody>
+      </p:sp>
+      <p:sp>
+        <p:nvSpPr>
+          <p:cNvPr id="5" name="Text 2"/>
+          <p:cNvSpPr/>
+          <p:nvPr/>
+        </p:nvSpPr>
+        <p:spPr>
+          <a:xfrm>
+            <a:off x="1554480" y="749808"/>
+            <a:ext cx="10058400" cy="640080"/>
+          </a:xfrm>
+          <a:prstGeom prst="rect">
+            <a:avLst/>
+          </a:prstGeom>
+          <a:noFill/>
+          <a:ln/>
+        </p:spPr>
+        <p:txBody>
+          <a:bodyPr wrap="square" rtlCol="0" anchor="t"/>
+          <a:lstStyle/>
+          <a:p>
+            <a:pPr algn="l" indent="0" marL="0">
+              <a:buNone/>
+            </a:pPr>
+            <a:r>
+              <a:rPr lang="en-US" sz="3000" b="1" dirty="0">
+                <a:solidFill>
+                  <a:srgbClr val="2B2B33"/>
+                </a:solidFill>
+                <a:latin typeface="Cambria" pitchFamily="34" charset="0"/>
+                <a:ea typeface="Cambria" pitchFamily="34" charset="-122"/>
+                <a:cs typeface="Cambria" pitchFamily="34" charset="-120"/>
+              </a:rPr>
+              <a:t>Complete Blood Count</a:t>
+            </a:r>
+            <a:endParaRPr lang="en-US" sz="3000" dirty="0"/>
+          </a:p>
+        </p:txBody>
+      </p:sp>
+      <p:sp>
+        <p:nvSpPr>
+          <p:cNvPr id="6" name="Text 3"/>
+          <p:cNvSpPr/>
+          <p:nvPr/>
+        </p:nvSpPr>
+        <p:spPr>
+          <a:xfrm>
+            <a:off x="8485632" y="1024128"/>
+            <a:ext cx="3200400" cy="274320"/>
+          </a:xfrm>
+          <a:prstGeom prst="rect">
+            <a:avLst/>
+          </a:prstGeom>
+          <a:noFill/>
+          <a:ln/>
+        </p:spPr>
+        <p:txBody>
+          <a:bodyPr wrap="square" rtlCol="0" anchor="t"/>
+          <a:lstStyle/>
+          <a:p>
+            <a:pPr algn="r" indent="0" marL="0">
+              <a:buNone/>
+            </a:pPr>
+            <a:r>
+              <a:rPr lang="en-US" sz="1200" i="1" dirty="0">
+                <a:solidFill>
+                  <a:srgbClr val="6B6B76"/>
+                </a:solidFill>
+                <a:latin typeface="Calibri" pitchFamily="34" charset="0"/>
+                <a:ea typeface="Calibri" pitchFamily="34" charset="-122"/>
+                <a:cs typeface="Calibri" pitchFamily="34" charset="-120"/>
+              </a:rPr>
+              <a:t>Sample date: 10-Jun-2022</a:t>
+            </a:r>
+            <a:endParaRPr lang="en-US" sz="1200" dirty="0"/>
+          </a:p>
+        </p:txBody>
+      </p:sp>
+      <p:sp>
+        <p:nvSpPr>
+          <p:cNvPr id="7" name="Shape 4"/>
+          <p:cNvSpPr/>
+          <p:nvPr/>
+        </p:nvSpPr>
+        <p:spPr>
+          <a:xfrm>
+            <a:off x="502920" y="1719072"/>
+            <a:ext cx="5449824" cy="384048"/>
+          </a:xfrm>
+          <a:prstGeom prst="roundRect">
+            <a:avLst>
+              <a:gd name="adj" fmla="val 19048"/>
+            </a:avLst>
+          </a:prstGeom>
+          <a:solidFill>
+            <a:srgbClr val="A4133C"/>
+          </a:solidFill>
+          <a:ln/>
+        </p:spPr>
+      </p:sp>
+      <p:sp>
+        <p:nvSpPr>
+          <p:cNvPr id="8" name="Text 5"/>
+          <p:cNvSpPr/>
+          <p:nvPr/>
+        </p:nvSpPr>
+        <p:spPr>
+          <a:xfrm>
+            <a:off x="640080" y="1719072"/>
+            <a:ext cx="1325880" cy="384048"/>
+          </a:xfrm>
+          <a:prstGeom prst="rect">
+            <a:avLst/>
+          </a:prstGeom>
+          <a:noFill/>
+          <a:ln/>
+        </p:spPr>
+        <p:txBody>
+          <a:bodyPr wrap="square" lIns="0" tIns="0" rIns="0" bIns="0" rtlCol="0" anchor="ctr"/>
+          <a:lstStyle/>
+          <a:p>
+            <a:pPr algn="l" indent="0" marL="0">
+              <a:buNone/>
+            </a:pPr>
+            <a:r>
+              <a:rPr lang="en-US" sz="1150" b="1" dirty="0">
+                <a:solidFill>
+                  <a:srgbClr val="FFFFFF"/>
+                </a:solidFill>
+                <a:latin typeface="Calibri" pitchFamily="34" charset="0"/>
+                <a:ea typeface="Calibri" pitchFamily="34" charset="-122"/>
+                <a:cs typeface="Calibri" pitchFamily="34" charset="-120"/>
+              </a:rPr>
+              <a:t>TEST</a:t>
+            </a:r>
+            <a:endParaRPr lang="en-US" sz="1150" dirty="0"/>
+          </a:p>
+        </p:txBody>
+      </p:sp>
+      <p:sp>
+        <p:nvSpPr>
+          <p:cNvPr id="9" name="Text 6"/>
+          <p:cNvSpPr/>
+          <p:nvPr/>
+        </p:nvSpPr>
+        <p:spPr>
+          <a:xfrm>
+            <a:off x="1984248" y="1719072"/>
+            <a:ext cx="1280160" cy="384048"/>
+          </a:xfrm>
+          <a:prstGeom prst="rect">
+            <a:avLst/>
+          </a:prstGeom>
+          <a:noFill/>
+          <a:ln/>
+        </p:spPr>
+        <p:txBody>
+          <a:bodyPr wrap="square" lIns="0" tIns="0" rIns="0" bIns="0" rtlCol="0" anchor="ctr"/>
+          <a:lstStyle/>
+          <a:p>
+            <a:pPr algn="l" indent="0" marL="0">
+              <a:buNone/>
+            </a:pPr>
+            <a:r>
+              <a:rPr lang="en-US" sz="1150" b="1" dirty="0">
+                <a:solidFill>
+                  <a:srgbClr val="FFFFFF"/>
+                </a:solidFill>
+                <a:latin typeface="Calibri" pitchFamily="34" charset="0"/>
+                <a:ea typeface="Calibri" pitchFamily="34" charset="-122"/>
+                <a:cs typeface="Calibri" pitchFamily="34" charset="-120"/>
+              </a:rPr>
+              <a:t>RESULT</a:t>
+            </a:r>
+            <a:endParaRPr lang="en-US" sz="1150" dirty="0"/>
+          </a:p>
+        </p:txBody>
+      </p:sp>
+      <p:sp>
+        <p:nvSpPr>
+          <p:cNvPr id="10" name="Text 7"/>
+          <p:cNvSpPr/>
+          <p:nvPr/>
+        </p:nvSpPr>
+        <p:spPr>
+          <a:xfrm>
+            <a:off x="3282696" y="1719072"/>
+            <a:ext cx="1554480" cy="384048"/>
+          </a:xfrm>
+          <a:prstGeom prst="rect">
+            <a:avLst/>
+          </a:prstGeom>
+          <a:noFill/>
+          <a:ln/>
+        </p:spPr>
+        <p:txBody>
+          <a:bodyPr wrap="square" lIns="0" tIns="0" rIns="0" bIns="0" rtlCol="0" anchor="ctr"/>
+          <a:lstStyle/>
+          <a:p>
+            <a:pPr algn="l" indent="0" marL="0">
+              <a:buNone/>
+            </a:pPr>
+            <a:r>
+              <a:rPr lang="en-US" sz="1150" b="1" dirty="0">
+                <a:solidFill>
+                  <a:srgbClr val="FFFFFF"/>
+                </a:solidFill>
+                <a:latin typeface="Calibri" pitchFamily="34" charset="0"/>
+                <a:ea typeface="Calibri" pitchFamily="34" charset="-122"/>
+                <a:cs typeface="Calibri" pitchFamily="34" charset="-120"/>
+              </a:rPr>
+              <a:t>REFERENCE RANGE</a:t>
+            </a:r>
+            <a:endParaRPr lang="en-US" sz="1150" dirty="0"/>
+          </a:p>
+        </p:txBody>
+      </p:sp>
+      <p:sp>
+        <p:nvSpPr>
+          <p:cNvPr id="11" name="Text 8"/>
+          <p:cNvSpPr/>
+          <p:nvPr/>
+        </p:nvSpPr>
+        <p:spPr>
+          <a:xfrm>
+            <a:off x="4855464" y="1719072"/>
+            <a:ext cx="1005840" cy="384048"/>
+          </a:xfrm>
+          <a:prstGeom prst="rect">
+            <a:avLst/>
+          </a:prstGeom>
+          <a:noFill/>
+          <a:ln/>
+        </p:spPr>
+        <p:txBody>
+          <a:bodyPr wrap="square" lIns="0" tIns="0" rIns="0" bIns="0" rtlCol="0" anchor="ctr"/>
+          <a:lstStyle/>
+          <a:p>
+            <a:pPr algn="l" indent="0" marL="0">
+              <a:buNone/>
+            </a:pPr>
+            <a:r>
+              <a:rPr lang="en-US" sz="1150" b="1" dirty="0">
+                <a:solidFill>
+                  <a:srgbClr val="FFFFFF"/>
+                </a:solidFill>
+                <a:latin typeface="Calibri" pitchFamily="34" charset="0"/>
+                <a:ea typeface="Calibri" pitchFamily="34" charset="-122"/>
+                <a:cs typeface="Calibri" pitchFamily="34" charset="-120"/>
+              </a:rPr>
+              <a:t>UNITS</a:t>
+            </a:r>
+            <a:endParaRPr lang="en-US" sz="1150" dirty="0"/>
+          </a:p>
+        </p:txBody>
+      </p:sp>
+      <p:sp>
+        <p:nvSpPr>
+          <p:cNvPr id="12" name="Shape 9"/>
+          <p:cNvSpPr/>
+          <p:nvPr/>
+        </p:nvSpPr>
+        <p:spPr>
+          <a:xfrm>
+            <a:off x="502920" y="2176272"/>
+            <a:ext cx="5449824" cy="502920"/>
+          </a:xfrm>
+          <a:prstGeom prst="rect">
+            <a:avLst/>
+          </a:prstGeom>
+          <a:solidFill>
+            <a:srgbClr val="FFF0F3"/>
+          </a:solidFill>
+          <a:ln/>
+        </p:spPr>
+      </p:sp>
+      <p:sp>
+        <p:nvSpPr>
+          <p:cNvPr id="13" name="Shape 10"/>
+          <p:cNvSpPr/>
+          <p:nvPr/>
+        </p:nvSpPr>
+        <p:spPr>
+          <a:xfrm>
+            <a:off x="502920" y="2679192"/>
+            <a:ext cx="5449824" cy="0"/>
+          </a:xfrm>
+          <a:prstGeom prst="line">
+            <a:avLst/>
+          </a:prstGeom>
+          <a:noFill/>
+          <a:ln w="12700">
+            <a:solidFill>
+              <a:srgbClr val="FBD8DF"/>
+            </a:solidFill>
+            <a:prstDash val="solid"/>
+          </a:ln>
+        </p:spPr>
+      </p:sp>
+      <p:sp>
+        <p:nvSpPr>
+          <p:cNvPr id="14" name="Text 11"/>
+          <p:cNvSpPr/>
+          <p:nvPr/>
+        </p:nvSpPr>
+        <p:spPr>
+          <a:xfrm>
+            <a:off x="640080" y="2176272"/>
+            <a:ext cx="1325880" cy="502920"/>
+          </a:xfrm>
+          <a:prstGeom prst="rect">
+            <a:avLst/>
+          </a:prstGeom>
+          <a:noFill/>
+          <a:ln/>
+        </p:spPr>
+        <p:txBody>
+          <a:bodyPr wrap="square" lIns="0" tIns="0" rIns="0" bIns="0" rtlCol="0" anchor="ctr"/>
+          <a:lstStyle/>
+          <a:p>
+            <a:pPr algn="l" indent="0" marL="0">
+              <a:buNone/>
+            </a:pPr>
+            <a:r>
+              <a:rPr lang="en-US" sz="1300" dirty="0">
+                <a:solidFill>
+                  <a:srgbClr val="2B2B33"/>
+                </a:solidFill>
+                <a:latin typeface="Calibri" pitchFamily="34" charset="0"/>
+                <a:ea typeface="Calibri" pitchFamily="34" charset="-122"/>
+                <a:cs typeface="Calibri" pitchFamily="34" charset="-120"/>
+              </a:rPr>
+              <a:t>Haemoglobin</a:t>
+            </a:r>
+            <a:endParaRPr lang="en-US" sz="1300" dirty="0"/>
+          </a:p>
+        </p:txBody>
+      </p:sp>
+      <p:sp>
+        <p:nvSpPr>
+          <p:cNvPr id="15" name="Text 12"/>
+          <p:cNvSpPr/>
+          <p:nvPr/>
+        </p:nvSpPr>
+        <p:spPr>
+          <a:xfrm>
+            <a:off x="1984248" y="2176272"/>
+            <a:ext cx="1280160" cy="502920"/>
+          </a:xfrm>
+          <a:prstGeom prst="rect">
+            <a:avLst/>
+          </a:prstGeom>
+          <a:noFill/>
+          <a:ln/>
+        </p:spPr>
+        <p:txBody>
+          <a:bodyPr wrap="square" lIns="0" tIns="0" rIns="0" bIns="0" rtlCol="0" anchor="ctr"/>
+          <a:lstStyle/>
+          <a:p>
+            <a:pPr algn="l" indent="0" marL="0">
+              <a:buNone/>
+            </a:pPr>
+            <a:r>
+              <a:rPr lang="en-US" sz="1350" b="1" dirty="0">
+                <a:solidFill>
+                  <a:srgbClr val="FF4D6D"/>
+                </a:solidFill>
+                <a:latin typeface="Calibri" pitchFamily="34" charset="0"/>
+                <a:ea typeface="Calibri" pitchFamily="34" charset="-122"/>
+                <a:cs typeface="Calibri" pitchFamily="34" charset="-120"/>
+              </a:rPr>
+              <a:t>10.6</a:t>
+            </a:r>
+            <a:pPr algn="l" indent="0" marL="0">
+              <a:buNone/>
+            </a:pPr>
+            <a:r>
+              <a:rPr lang="en-US" sz="950" b="1" dirty="0">
+                <a:solidFill>
+                  <a:srgbClr val="FF4D6D"/>
+                </a:solidFill>
+                <a:latin typeface="Calibri" pitchFamily="34" charset="0"/>
+                <a:ea typeface="Calibri" pitchFamily="34" charset="-122"/>
+                <a:cs typeface="Calibri" pitchFamily="34" charset="-120"/>
+              </a:rPr>
+              <a:t>  LOW</a:t>
+            </a:r>
+            <a:endParaRPr lang="en-US" sz="1350" dirty="0"/>
+          </a:p>
+        </p:txBody>
+      </p:sp>
+      <p:sp>
+        <p:nvSpPr>
+          <p:cNvPr id="16" name="Text 13"/>
+          <p:cNvSpPr/>
+          <p:nvPr/>
+        </p:nvSpPr>
+        <p:spPr>
+          <a:xfrm>
+            <a:off x="3282696" y="2176272"/>
+            <a:ext cx="1554480" cy="502920"/>
+          </a:xfrm>
+          <a:prstGeom prst="rect">
+            <a:avLst/>
+          </a:prstGeom>
+          <a:noFill/>
+          <a:ln/>
+        </p:spPr>
+        <p:txBody>
+          <a:bodyPr wrap="square" lIns="0" tIns="0" rIns="0" bIns="0" rtlCol="0" anchor="ctr"/>
+          <a:lstStyle/>
+          <a:p>
+            <a:pPr algn="l" indent="0" marL="0">
+              <a:buNone/>
+            </a:pPr>
+            <a:r>
+              <a:rPr lang="en-US" sz="1250" dirty="0">
+                <a:solidFill>
+                  <a:srgbClr val="6B6B76"/>
+                </a:solidFill>
+                <a:latin typeface="Calibri" pitchFamily="34" charset="0"/>
+                <a:ea typeface="Calibri" pitchFamily="34" charset="-122"/>
+                <a:cs typeface="Calibri" pitchFamily="34" charset="-120"/>
+              </a:rPr>
+              <a:t>11.5–16.5</a:t>
+            </a:r>
+            <a:endParaRPr lang="en-US" sz="1250" dirty="0"/>
+          </a:p>
+        </p:txBody>
+      </p:sp>
+      <p:sp>
+        <p:nvSpPr>
+          <p:cNvPr id="17" name="Text 14"/>
+          <p:cNvSpPr/>
+          <p:nvPr/>
+        </p:nvSpPr>
+        <p:spPr>
+          <a:xfrm>
+            <a:off x="4855464" y="2176272"/>
+            <a:ext cx="1005840" cy="502920"/>
+          </a:xfrm>
+          <a:prstGeom prst="rect">
+            <a:avLst/>
+          </a:prstGeom>
+          <a:noFill/>
+          <a:ln/>
+        </p:spPr>
+        <p:txBody>
+          <a:bodyPr wrap="square" lIns="0" tIns="0" rIns="0" bIns="0" rtlCol="0" anchor="ctr"/>
+          <a:lstStyle/>
+          <a:p>
+            <a:pPr algn="l" indent="0" marL="0">
+              <a:buNone/>
+            </a:pPr>
+            <a:r>
+              <a:rPr lang="en-US" sz="1200" dirty="0">
+                <a:solidFill>
+                  <a:srgbClr val="6B6B76"/>
+                </a:solidFill>
+                <a:latin typeface="Calibri" pitchFamily="34" charset="0"/>
+                <a:ea typeface="Calibri" pitchFamily="34" charset="-122"/>
+                <a:cs typeface="Calibri" pitchFamily="34" charset="-120"/>
+              </a:rPr>
+              <a:t>g/dL</a:t>
+            </a:r>
+            <a:endParaRPr lang="en-US" sz="1200" dirty="0"/>
+          </a:p>
+        </p:txBody>
+      </p:sp>
+      <p:sp>
+        <p:nvSpPr>
+          <p:cNvPr id="18" name="Shape 15"/>
+          <p:cNvSpPr/>
+          <p:nvPr/>
+        </p:nvSpPr>
+        <p:spPr>
+          <a:xfrm>
+            <a:off x="502920" y="3182112"/>
+            <a:ext cx="5449824" cy="0"/>
+          </a:xfrm>
+          <a:prstGeom prst="line">
+            <a:avLst/>
+          </a:prstGeom>
+          <a:noFill/>
+          <a:ln w="12700">
+            <a:solidFill>
+              <a:srgbClr val="FBD8DF"/>
+            </a:solidFill>
+            <a:prstDash val="solid"/>
+          </a:ln>
+        </p:spPr>
+      </p:sp>
+      <p:sp>
+        <p:nvSpPr>
+          <p:cNvPr id="19" name="Text 16"/>
+          <p:cNvSpPr/>
+          <p:nvPr/>
+        </p:nvSpPr>
+        <p:spPr>
+          <a:xfrm>
+            <a:off x="640080" y="2679192"/>
+            <a:ext cx="1325880" cy="502920"/>
+          </a:xfrm>
+          <a:prstGeom prst="rect">
+            <a:avLst/>
+          </a:prstGeom>
+          <a:noFill/>
+          <a:ln/>
+        </p:spPr>
+        <p:txBody>
+          <a:bodyPr wrap="square" lIns="0" tIns="0" rIns="0" bIns="0" rtlCol="0" anchor="ctr"/>
+          <a:lstStyle/>
+          <a:p>
+            <a:pPr algn="l" indent="0" marL="0">
+              <a:buNone/>
+            </a:pPr>
+            <a:r>
+              <a:rPr lang="en-US" sz="1300" dirty="0">
+                <a:solidFill>
+                  <a:srgbClr val="2B2B33"/>
+                </a:solidFill>
+                <a:latin typeface="Calibri" pitchFamily="34" charset="0"/>
+                <a:ea typeface="Calibri" pitchFamily="34" charset="-122"/>
+                <a:cs typeface="Calibri" pitchFamily="34" charset="-120"/>
+              </a:rPr>
+              <a:t>WBC</a:t>
+            </a:r>
+            <a:endParaRPr lang="en-US" sz="1300" dirty="0"/>
+          </a:p>
+        </p:txBody>
+      </p:sp>
+      <p:sp>
+        <p:nvSpPr>
+          <p:cNvPr id="20" name="Text 17"/>
+          <p:cNvSpPr/>
+          <p:nvPr/>
+        </p:nvSpPr>
+        <p:spPr>
+          <a:xfrm>
+            <a:off x="1984248" y="2679192"/>
+            <a:ext cx="1280160" cy="502920"/>
+          </a:xfrm>
+          <a:prstGeom prst="rect">
+            <a:avLst/>
+          </a:prstGeom>
+          <a:noFill/>
+          <a:ln/>
+        </p:spPr>
+        <p:txBody>
+          <a:bodyPr wrap="square" lIns="0" tIns="0" rIns="0" bIns="0" rtlCol="0" anchor="ctr"/>
+          <a:lstStyle/>
+          <a:p>
+            <a:pPr algn="l" indent="0" marL="0">
+              <a:buNone/>
+            </a:pPr>
+            <a:r>
+              <a:rPr lang="en-US" sz="1350" b="1" dirty="0">
+                <a:solidFill>
+                  <a:srgbClr val="2B2B33"/>
+                </a:solidFill>
+                <a:latin typeface="Calibri" pitchFamily="34" charset="0"/>
+                <a:ea typeface="Calibri" pitchFamily="34" charset="-122"/>
+                <a:cs typeface="Calibri" pitchFamily="34" charset="-120"/>
+              </a:rPr>
+              <a:t>6.94</a:t>
+            </a:r>
+            <a:endParaRPr lang="en-US" sz="1350" dirty="0"/>
+          </a:p>
+        </p:txBody>
+      </p:sp>
+      <p:sp>
+        <p:nvSpPr>
+          <p:cNvPr id="21" name="Text 18"/>
+          <p:cNvSpPr/>
+          <p:nvPr/>
+        </p:nvSpPr>
+        <p:spPr>
+          <a:xfrm>
+            <a:off x="3282696" y="2679192"/>
+            <a:ext cx="1554480" cy="502920"/>
+          </a:xfrm>
+          <a:prstGeom prst="rect">
+            <a:avLst/>
+          </a:prstGeom>
+          <a:noFill/>
+          <a:ln/>
+        </p:spPr>
+        <p:txBody>
+          <a:bodyPr wrap="square" lIns="0" tIns="0" rIns="0" bIns="0" rtlCol="0" anchor="ctr"/>
+          <a:lstStyle/>
+          <a:p>
+            <a:pPr algn="l" indent="0" marL="0">
+              <a:buNone/>
+            </a:pPr>
+            <a:r>
+              <a:rPr lang="en-US" sz="1250" dirty="0">
+                <a:solidFill>
+                  <a:srgbClr val="6B6B76"/>
+                </a:solidFill>
+                <a:latin typeface="Calibri" pitchFamily="34" charset="0"/>
+                <a:ea typeface="Calibri" pitchFamily="34" charset="-122"/>
+                <a:cs typeface="Calibri" pitchFamily="34" charset="-120"/>
+              </a:rPr>
+              <a:t>4.0–11.0</a:t>
+            </a:r>
+            <a:endParaRPr lang="en-US" sz="1250" dirty="0"/>
+          </a:p>
+        </p:txBody>
+      </p:sp>
+      <p:sp>
+        <p:nvSpPr>
+          <p:cNvPr id="22" name="Text 19"/>
+          <p:cNvSpPr/>
+          <p:nvPr/>
+        </p:nvSpPr>
+        <p:spPr>
+          <a:xfrm>
+            <a:off x="4855464" y="2679192"/>
+            <a:ext cx="1005840" cy="502920"/>
+          </a:xfrm>
+          <a:prstGeom prst="rect">
+            <a:avLst/>
+          </a:prstGeom>
+          <a:noFill/>
+          <a:ln/>
+        </p:spPr>
+        <p:txBody>
+          <a:bodyPr wrap="square" lIns="0" tIns="0" rIns="0" bIns="0" rtlCol="0" anchor="ctr"/>
+          <a:lstStyle/>
+          <a:p>
+            <a:pPr algn="l" indent="0" marL="0">
+              <a:buNone/>
+            </a:pPr>
+            <a:r>
+              <a:rPr lang="en-US" sz="1200" dirty="0">
+                <a:solidFill>
+                  <a:srgbClr val="6B6B76"/>
+                </a:solidFill>
+                <a:latin typeface="Calibri" pitchFamily="34" charset="0"/>
+                <a:ea typeface="Calibri" pitchFamily="34" charset="-122"/>
+                <a:cs typeface="Calibri" pitchFamily="34" charset="-120"/>
+              </a:rPr>
+              <a:t>×10³/µL</a:t>
+            </a:r>
+            <a:endParaRPr lang="en-US" sz="1200" dirty="0"/>
+          </a:p>
+        </p:txBody>
+      </p:sp>
+      <p:sp>
+        <p:nvSpPr>
+          <p:cNvPr id="23" name="Shape 20"/>
+          <p:cNvSpPr/>
+          <p:nvPr/>
+        </p:nvSpPr>
+        <p:spPr>
+          <a:xfrm>
+            <a:off x="502920" y="3182112"/>
+            <a:ext cx="5449824" cy="502920"/>
+          </a:xfrm>
+          <a:prstGeom prst="rect">
+            <a:avLst/>
+          </a:prstGeom>
+          <a:solidFill>
+            <a:srgbClr val="FFF0F3"/>
+          </a:solidFill>
+          <a:ln/>
+        </p:spPr>
+      </p:sp>
+      <p:sp>
+        <p:nvSpPr>
+          <p:cNvPr id="24" name="Shape 21"/>
+          <p:cNvSpPr/>
+          <p:nvPr/>
+        </p:nvSpPr>
+        <p:spPr>
+          <a:xfrm>
+            <a:off x="502920" y="3685032"/>
+            <a:ext cx="5449824" cy="0"/>
+          </a:xfrm>
+          <a:prstGeom prst="line">
+            <a:avLst/>
+          </a:prstGeom>
+          <a:noFill/>
+          <a:ln w="12700">
+            <a:solidFill>
+              <a:srgbClr val="FBD8DF"/>
+            </a:solidFill>
+            <a:prstDash val="solid"/>
+          </a:ln>
+        </p:spPr>
+      </p:sp>
+      <p:sp>
+        <p:nvSpPr>
+          <p:cNvPr id="25" name="Text 22"/>
+          <p:cNvSpPr/>
+          <p:nvPr/>
+        </p:nvSpPr>
+        <p:spPr>
+          <a:xfrm>
+            <a:off x="640080" y="3182112"/>
+            <a:ext cx="1325880" cy="502920"/>
+          </a:xfrm>
+          <a:prstGeom prst="rect">
+            <a:avLst/>
+          </a:prstGeom>
+          <a:noFill/>
+          <a:ln/>
+        </p:spPr>
+        <p:txBody>
+          <a:bodyPr wrap="square" lIns="0" tIns="0" rIns="0" bIns="0" rtlCol="0" anchor="ctr"/>
+          <a:lstStyle/>
+          <a:p>
+            <a:pPr algn="l" indent="0" marL="0">
+              <a:buNone/>
+            </a:pPr>
+            <a:r>
+              <a:rPr lang="en-US" sz="1300" dirty="0">
+                <a:solidFill>
+                  <a:srgbClr val="2B2B33"/>
+                </a:solidFill>
+                <a:latin typeface="Calibri" pitchFamily="34" charset="0"/>
+                <a:ea typeface="Calibri" pitchFamily="34" charset="-122"/>
+                <a:cs typeface="Calibri" pitchFamily="34" charset="-120"/>
+              </a:rPr>
+              <a:t>Neutrophils</a:t>
+            </a:r>
+            <a:endParaRPr lang="en-US" sz="1300" dirty="0"/>
+          </a:p>
+        </p:txBody>
+      </p:sp>
+      <p:sp>
+        <p:nvSpPr>
+          <p:cNvPr id="26" name="Text 23"/>
+          <p:cNvSpPr/>
+          <p:nvPr/>
+        </p:nvSpPr>
+        <p:spPr>
+          <a:xfrm>
+            <a:off x="1984248" y="3182112"/>
+            <a:ext cx="1280160" cy="502920"/>
+          </a:xfrm>
+          <a:prstGeom prst="rect">
+            <a:avLst/>
+          </a:prstGeom>
+          <a:noFill/>
+          <a:ln/>
+        </p:spPr>
+        <p:txBody>
+          <a:bodyPr wrap="square" lIns="0" tIns="0" rIns="0" bIns="0" rtlCol="0" anchor="ctr"/>
+          <a:lstStyle/>
+          <a:p>
+            <a:pPr algn="l" indent="0" marL="0">
+              <a:buNone/>
+            </a:pPr>
+            <a:r>
+              <a:rPr lang="en-US" sz="1350" b="1" dirty="0">
+                <a:solidFill>
+                  <a:srgbClr val="2B2B33"/>
+                </a:solidFill>
+                <a:latin typeface="Calibri" pitchFamily="34" charset="0"/>
+                <a:ea typeface="Calibri" pitchFamily="34" charset="-122"/>
+                <a:cs typeface="Calibri" pitchFamily="34" charset="-120"/>
+              </a:rPr>
+              <a:t>61</a:t>
+            </a:r>
+            <a:endParaRPr lang="en-US" sz="1350" dirty="0"/>
+          </a:p>
+        </p:txBody>
+      </p:sp>
+      <p:sp>
+        <p:nvSpPr>
+          <p:cNvPr id="27" name="Text 24"/>
+          <p:cNvSpPr/>
+          <p:nvPr/>
+        </p:nvSpPr>
+        <p:spPr>
+          <a:xfrm>
+            <a:off x="3282696" y="3182112"/>
+            <a:ext cx="1554480" cy="502920"/>
+          </a:xfrm>
+          <a:prstGeom prst="rect">
+            <a:avLst/>
+          </a:prstGeom>
+          <a:noFill/>
+          <a:ln/>
+        </p:spPr>
+        <p:txBody>
+          <a:bodyPr wrap="square" lIns="0" tIns="0" rIns="0" bIns="0" rtlCol="0" anchor="ctr"/>
+          <a:lstStyle/>
+          <a:p>
+            <a:pPr algn="l" indent="0" marL="0">
+              <a:buNone/>
+            </a:pPr>
+            <a:r>
+              <a:rPr lang="en-US" sz="1250" dirty="0">
+                <a:solidFill>
+                  <a:srgbClr val="6B6B76"/>
+                </a:solidFill>
+                <a:latin typeface="Calibri" pitchFamily="34" charset="0"/>
+                <a:ea typeface="Calibri" pitchFamily="34" charset="-122"/>
+                <a:cs typeface="Calibri" pitchFamily="34" charset="-120"/>
+              </a:rPr>
+              <a:t>40–75</a:t>
+            </a:r>
+            <a:endParaRPr lang="en-US" sz="1250" dirty="0"/>
+          </a:p>
+        </p:txBody>
+      </p:sp>
+      <p:sp>
+        <p:nvSpPr>
+          <p:cNvPr id="28" name="Text 25"/>
+          <p:cNvSpPr/>
+          <p:nvPr/>
+        </p:nvSpPr>
+        <p:spPr>
+          <a:xfrm>
+            <a:off x="4855464" y="3182112"/>
+            <a:ext cx="1005840" cy="502920"/>
+          </a:xfrm>
+          <a:prstGeom prst="rect">
+            <a:avLst/>
+          </a:prstGeom>
+          <a:noFill/>
+          <a:ln/>
+        </p:spPr>
+        <p:txBody>
+          <a:bodyPr wrap="square" lIns="0" tIns="0" rIns="0" bIns="0" rtlCol="0" anchor="ctr"/>
+          <a:lstStyle/>
+          <a:p>
+            <a:pPr algn="l" indent="0" marL="0">
+              <a:buNone/>
+            </a:pPr>
+            <a:r>
+              <a:rPr lang="en-US" sz="1200" dirty="0">
+                <a:solidFill>
+                  <a:srgbClr val="6B6B76"/>
+                </a:solidFill>
+                <a:latin typeface="Calibri" pitchFamily="34" charset="0"/>
+                <a:ea typeface="Calibri" pitchFamily="34" charset="-122"/>
+                <a:cs typeface="Calibri" pitchFamily="34" charset="-120"/>
+              </a:rPr>
+              <a:t>%</a:t>
+            </a:r>
+            <a:endParaRPr lang="en-US" sz="1200" dirty="0"/>
+          </a:p>
+        </p:txBody>
+      </p:sp>
+      <p:sp>
+        <p:nvSpPr>
+          <p:cNvPr id="29" name="Shape 26"/>
+          <p:cNvSpPr/>
+          <p:nvPr/>
+        </p:nvSpPr>
+        <p:spPr>
+          <a:xfrm>
+            <a:off x="502920" y="4187952"/>
+            <a:ext cx="5449824" cy="0"/>
+          </a:xfrm>
+          <a:prstGeom prst="line">
+            <a:avLst/>
+          </a:prstGeom>
+          <a:noFill/>
+          <a:ln w="12700">
+            <a:solidFill>
+              <a:srgbClr val="FBD8DF"/>
+            </a:solidFill>
+            <a:prstDash val="solid"/>
+          </a:ln>
+        </p:spPr>
+      </p:sp>
+      <p:sp>
+        <p:nvSpPr>
+          <p:cNvPr id="30" name="Text 27"/>
+          <p:cNvSpPr/>
+          <p:nvPr/>
+        </p:nvSpPr>
+        <p:spPr>
+          <a:xfrm>
+            <a:off x="640080" y="3685032"/>
+            <a:ext cx="1325880" cy="502920"/>
+          </a:xfrm>
+          <a:prstGeom prst="rect">
+            <a:avLst/>
+          </a:prstGeom>
+          <a:noFill/>
+          <a:ln/>
+        </p:spPr>
+        <p:txBody>
+          <a:bodyPr wrap="square" lIns="0" tIns="0" rIns="0" bIns="0" rtlCol="0" anchor="ctr"/>
+          <a:lstStyle/>
+          <a:p>
+            <a:pPr algn="l" indent="0" marL="0">
+              <a:buNone/>
+            </a:pPr>
+            <a:r>
+              <a:rPr lang="en-US" sz="1300" dirty="0">
+                <a:solidFill>
+                  <a:srgbClr val="2B2B33"/>
+                </a:solidFill>
+                <a:latin typeface="Calibri" pitchFamily="34" charset="0"/>
+                <a:ea typeface="Calibri" pitchFamily="34" charset="-122"/>
+                <a:cs typeface="Calibri" pitchFamily="34" charset="-120"/>
+              </a:rPr>
+              <a:t>Lymphocytes</a:t>
+            </a:r>
+            <a:endParaRPr lang="en-US" sz="1300" dirty="0"/>
+          </a:p>
+        </p:txBody>
+      </p:sp>
+      <p:sp>
+        <p:nvSpPr>
+          <p:cNvPr id="31" name="Text 28"/>
+          <p:cNvSpPr/>
+          <p:nvPr/>
+        </p:nvSpPr>
+        <p:spPr>
+          <a:xfrm>
+            <a:off x="1984248" y="3685032"/>
+            <a:ext cx="1280160" cy="502920"/>
+          </a:xfrm>
+          <a:prstGeom prst="rect">
+            <a:avLst/>
+          </a:prstGeom>
+          <a:noFill/>
+          <a:ln/>
+        </p:spPr>
+        <p:txBody>
+          <a:bodyPr wrap="square" lIns="0" tIns="0" rIns="0" bIns="0" rtlCol="0" anchor="ctr"/>
+          <a:lstStyle/>
+          <a:p>
+            <a:pPr algn="l" indent="0" marL="0">
+              <a:buNone/>
+            </a:pPr>
+            <a:r>
+              <a:rPr lang="en-US" sz="1350" b="1" dirty="0">
+                <a:solidFill>
+                  <a:srgbClr val="2B2B33"/>
+                </a:solidFill>
+                <a:latin typeface="Calibri" pitchFamily="34" charset="0"/>
+                <a:ea typeface="Calibri" pitchFamily="34" charset="-122"/>
+                <a:cs typeface="Calibri" pitchFamily="34" charset="-120"/>
+              </a:rPr>
+              <a:t>28</a:t>
+            </a:r>
+            <a:endParaRPr lang="en-US" sz="1350" dirty="0"/>
+          </a:p>
+        </p:txBody>
+      </p:sp>
+      <p:sp>
+        <p:nvSpPr>
+          <p:cNvPr id="32" name="Text 29"/>
+          <p:cNvSpPr/>
+          <p:nvPr/>
+        </p:nvSpPr>
+        <p:spPr>
+          <a:xfrm>
+            <a:off x="3282696" y="3685032"/>
+            <a:ext cx="1554480" cy="502920"/>
+          </a:xfrm>
+          <a:prstGeom prst="rect">
+            <a:avLst/>
+          </a:prstGeom>
+          <a:noFill/>
+          <a:ln/>
+        </p:spPr>
+        <p:txBody>
+          <a:bodyPr wrap="square" lIns="0" tIns="0" rIns="0" bIns="0" rtlCol="0" anchor="ctr"/>
+          <a:lstStyle/>
+          <a:p>
+            <a:pPr algn="l" indent="0" marL="0">
+              <a:buNone/>
+            </a:pPr>
+            <a:r>
+              <a:rPr lang="en-US" sz="1250" dirty="0">
+                <a:solidFill>
+                  <a:srgbClr val="6B6B76"/>
+                </a:solidFill>
+                <a:latin typeface="Calibri" pitchFamily="34" charset="0"/>
+                <a:ea typeface="Calibri" pitchFamily="34" charset="-122"/>
+                <a:cs typeface="Calibri" pitchFamily="34" charset="-120"/>
+              </a:rPr>
+              <a:t>20–45</a:t>
+            </a:r>
+            <a:endParaRPr lang="en-US" sz="1250" dirty="0"/>
+          </a:p>
+        </p:txBody>
+      </p:sp>
+      <p:sp>
+        <p:nvSpPr>
+          <p:cNvPr id="33" name="Text 30"/>
+          <p:cNvSpPr/>
+          <p:nvPr/>
+        </p:nvSpPr>
+        <p:spPr>
+          <a:xfrm>
+            <a:off x="4855464" y="3685032"/>
+            <a:ext cx="1005840" cy="502920"/>
+          </a:xfrm>
+          <a:prstGeom prst="rect">
+            <a:avLst/>
+          </a:prstGeom>
+          <a:noFill/>
+          <a:ln/>
+        </p:spPr>
+        <p:txBody>
+          <a:bodyPr wrap="square" lIns="0" tIns="0" rIns="0" bIns="0" rtlCol="0" anchor="ctr"/>
+          <a:lstStyle/>
+          <a:p>
+            <a:pPr algn="l" indent="0" marL="0">
+              <a:buNone/>
+            </a:pPr>
+            <a:r>
+              <a:rPr lang="en-US" sz="1200" dirty="0">
+                <a:solidFill>
+                  <a:srgbClr val="6B6B76"/>
+                </a:solidFill>
+                <a:latin typeface="Calibri" pitchFamily="34" charset="0"/>
+                <a:ea typeface="Calibri" pitchFamily="34" charset="-122"/>
+                <a:cs typeface="Calibri" pitchFamily="34" charset="-120"/>
+              </a:rPr>
+              <a:t>%</a:t>
+            </a:r>
+            <a:endParaRPr lang="en-US" sz="1200" dirty="0"/>
+          </a:p>
+        </p:txBody>
+      </p:sp>
+      <p:sp>
+        <p:nvSpPr>
+          <p:cNvPr id="34" name="Shape 31"/>
+          <p:cNvSpPr/>
+          <p:nvPr/>
+        </p:nvSpPr>
+        <p:spPr>
+          <a:xfrm>
+            <a:off x="502920" y="4187952"/>
+            <a:ext cx="5449824" cy="502920"/>
+          </a:xfrm>
+          <a:prstGeom prst="rect">
+            <a:avLst/>
+          </a:prstGeom>
+          <a:solidFill>
+            <a:srgbClr val="FFF0F3"/>
+          </a:solidFill>
+          <a:ln/>
+        </p:spPr>
+      </p:sp>
+      <p:sp>
+        <p:nvSpPr>
+          <p:cNvPr id="35" name="Shape 32"/>
+          <p:cNvSpPr/>
+          <p:nvPr/>
+        </p:nvSpPr>
+        <p:spPr>
+          <a:xfrm>
+            <a:off x="502920" y="4690872"/>
+            <a:ext cx="5449824" cy="0"/>
+          </a:xfrm>
+          <a:prstGeom prst="line">
+            <a:avLst/>
+          </a:prstGeom>
+          <a:noFill/>
+          <a:ln w="12700">
+            <a:solidFill>
+              <a:srgbClr val="FBD8DF"/>
+            </a:solidFill>
+            <a:prstDash val="solid"/>
+          </a:ln>
+        </p:spPr>
+      </p:sp>
+      <p:sp>
+        <p:nvSpPr>
+          <p:cNvPr id="36" name="Text 33"/>
+          <p:cNvSpPr/>
+          <p:nvPr/>
+        </p:nvSpPr>
+        <p:spPr>
+          <a:xfrm>
+            <a:off x="640080" y="4187952"/>
+            <a:ext cx="1325880" cy="502920"/>
+          </a:xfrm>
+          <a:prstGeom prst="rect">
+            <a:avLst/>
+          </a:prstGeom>
+          <a:noFill/>
+          <a:ln/>
+        </p:spPr>
+        <p:txBody>
+          <a:bodyPr wrap="square" lIns="0" tIns="0" rIns="0" bIns="0" rtlCol="0" anchor="ctr"/>
+          <a:lstStyle/>
+          <a:p>
+            <a:pPr algn="l" indent="0" marL="0">
+              <a:buNone/>
+            </a:pPr>
+            <a:r>
+              <a:rPr lang="en-US" sz="1300" dirty="0">
+                <a:solidFill>
+                  <a:srgbClr val="2B2B33"/>
+                </a:solidFill>
+                <a:latin typeface="Calibri" pitchFamily="34" charset="0"/>
+                <a:ea typeface="Calibri" pitchFamily="34" charset="-122"/>
+                <a:cs typeface="Calibri" pitchFamily="34" charset="-120"/>
+              </a:rPr>
+              <a:t>Monocytes</a:t>
+            </a:r>
+            <a:endParaRPr lang="en-US" sz="1300" dirty="0"/>
+          </a:p>
+        </p:txBody>
+      </p:sp>
+      <p:sp>
+        <p:nvSpPr>
+          <p:cNvPr id="37" name="Text 34"/>
+          <p:cNvSpPr/>
+          <p:nvPr/>
+        </p:nvSpPr>
+        <p:spPr>
+          <a:xfrm>
+            <a:off x="1984248" y="4187952"/>
+            <a:ext cx="1280160" cy="502920"/>
+          </a:xfrm>
+          <a:prstGeom prst="rect">
+            <a:avLst/>
+          </a:prstGeom>
+          <a:noFill/>
+          <a:ln/>
+        </p:spPr>
+        <p:txBody>
+          <a:bodyPr wrap="square" lIns="0" tIns="0" rIns="0" bIns="0" rtlCol="0" anchor="ctr"/>
+          <a:lstStyle/>
+          <a:p>
+            <a:pPr algn="l" indent="0" marL="0">
+              <a:buNone/>
+            </a:pPr>
+            <a:r>
+              <a:rPr lang="en-US" sz="1350" b="1" dirty="0">
+                <a:solidFill>
+                  <a:srgbClr val="2B2B33"/>
+                </a:solidFill>
+                <a:latin typeface="Calibri" pitchFamily="34" charset="0"/>
+                <a:ea typeface="Calibri" pitchFamily="34" charset="-122"/>
+                <a:cs typeface="Calibri" pitchFamily="34" charset="-120"/>
+              </a:rPr>
+              <a:t>4</a:t>
+            </a:r>
+            <a:endParaRPr lang="en-US" sz="1350" dirty="0"/>
+          </a:p>
+        </p:txBody>
+      </p:sp>
+      <p:sp>
+        <p:nvSpPr>
+          <p:cNvPr id="38" name="Text 35"/>
+          <p:cNvSpPr/>
+          <p:nvPr/>
+        </p:nvSpPr>
+        <p:spPr>
+          <a:xfrm>
+            <a:off x="3282696" y="4187952"/>
+            <a:ext cx="1554480" cy="502920"/>
+          </a:xfrm>
+          <a:prstGeom prst="rect">
+            <a:avLst/>
+          </a:prstGeom>
+          <a:noFill/>
+          <a:ln/>
+        </p:spPr>
+        <p:txBody>
+          <a:bodyPr wrap="square" lIns="0" tIns="0" rIns="0" bIns="0" rtlCol="0" anchor="ctr"/>
+          <a:lstStyle/>
+          <a:p>
+            <a:pPr algn="l" indent="0" marL="0">
+              <a:buNone/>
+            </a:pPr>
+            <a:r>
+              <a:rPr lang="en-US" sz="1250" dirty="0">
+                <a:solidFill>
+                  <a:srgbClr val="6B6B76"/>
+                </a:solidFill>
+                <a:latin typeface="Calibri" pitchFamily="34" charset="0"/>
+                <a:ea typeface="Calibri" pitchFamily="34" charset="-122"/>
+                <a:cs typeface="Calibri" pitchFamily="34" charset="-120"/>
+              </a:rPr>
+              <a:t>2–10</a:t>
+            </a:r>
+            <a:endParaRPr lang="en-US" sz="1250" dirty="0"/>
+          </a:p>
+        </p:txBody>
+      </p:sp>
+      <p:sp>
+        <p:nvSpPr>
+          <p:cNvPr id="39" name="Text 36"/>
+          <p:cNvSpPr/>
+          <p:nvPr/>
+        </p:nvSpPr>
+        <p:spPr>
+          <a:xfrm>
+            <a:off x="4855464" y="4187952"/>
+            <a:ext cx="1005840" cy="502920"/>
+          </a:xfrm>
+          <a:prstGeom prst="rect">
+            <a:avLst/>
+          </a:prstGeom>
+          <a:noFill/>
+          <a:ln/>
+        </p:spPr>
+        <p:txBody>
+          <a:bodyPr wrap="square" lIns="0" tIns="0" rIns="0" bIns="0" rtlCol="0" anchor="ctr"/>
+          <a:lstStyle/>
+          <a:p>
+            <a:pPr algn="l" indent="0" marL="0">
+              <a:buNone/>
+            </a:pPr>
+            <a:r>
+              <a:rPr lang="en-US" sz="1200" dirty="0">
+                <a:solidFill>
+                  <a:srgbClr val="6B6B76"/>
+                </a:solidFill>
+                <a:latin typeface="Calibri" pitchFamily="34" charset="0"/>
+                <a:ea typeface="Calibri" pitchFamily="34" charset="-122"/>
+                <a:cs typeface="Calibri" pitchFamily="34" charset="-120"/>
+              </a:rPr>
+              <a:t>%</a:t>
+            </a:r>
+            <a:endParaRPr lang="en-US" sz="1200" dirty="0"/>
+          </a:p>
+        </p:txBody>
+      </p:sp>
+      <p:sp>
+        <p:nvSpPr>
+          <p:cNvPr id="40" name="Shape 37"/>
+          <p:cNvSpPr/>
+          <p:nvPr/>
+        </p:nvSpPr>
+        <p:spPr>
+          <a:xfrm>
+            <a:off x="502920" y="5193792"/>
+            <a:ext cx="5449824" cy="0"/>
+          </a:xfrm>
+          <a:prstGeom prst="line">
+            <a:avLst/>
+          </a:prstGeom>
+          <a:noFill/>
+          <a:ln w="12700">
+            <a:solidFill>
+              <a:srgbClr val="FBD8DF"/>
+            </a:solidFill>
+            <a:prstDash val="solid"/>
+          </a:ln>
+        </p:spPr>
+      </p:sp>
+      <p:sp>
+        <p:nvSpPr>
+          <p:cNvPr id="41" name="Text 38"/>
+          <p:cNvSpPr/>
+          <p:nvPr/>
+        </p:nvSpPr>
+        <p:spPr>
+          <a:xfrm>
+            <a:off x="640080" y="4690872"/>
+            <a:ext cx="1325880" cy="502920"/>
+          </a:xfrm>
+          <a:prstGeom prst="rect">
+            <a:avLst/>
+          </a:prstGeom>
+          <a:noFill/>
+          <a:ln/>
+        </p:spPr>
+        <p:txBody>
+          <a:bodyPr wrap="square" lIns="0" tIns="0" rIns="0" bIns="0" rtlCol="0" anchor="ctr"/>
+          <a:lstStyle/>
+          <a:p>
+            <a:pPr algn="l" indent="0" marL="0">
+              <a:buNone/>
+            </a:pPr>
+            <a:r>
+              <a:rPr lang="en-US" sz="1300" dirty="0">
+                <a:solidFill>
+                  <a:srgbClr val="2B2B33"/>
+                </a:solidFill>
+                <a:latin typeface="Calibri" pitchFamily="34" charset="0"/>
+                <a:ea typeface="Calibri" pitchFamily="34" charset="-122"/>
+                <a:cs typeface="Calibri" pitchFamily="34" charset="-120"/>
+              </a:rPr>
+              <a:t>Eosinophils</a:t>
+            </a:r>
+            <a:endParaRPr lang="en-US" sz="1300" dirty="0"/>
+          </a:p>
+        </p:txBody>
+      </p:sp>
+      <p:sp>
+        <p:nvSpPr>
+          <p:cNvPr id="42" name="Text 39"/>
+          <p:cNvSpPr/>
+          <p:nvPr/>
+        </p:nvSpPr>
+        <p:spPr>
+          <a:xfrm>
+            <a:off x="1984248" y="4690872"/>
+            <a:ext cx="1280160" cy="502920"/>
+          </a:xfrm>
+          <a:prstGeom prst="rect">
+            <a:avLst/>
+          </a:prstGeom>
+          <a:noFill/>
+          <a:ln/>
+        </p:spPr>
+        <p:txBody>
+          <a:bodyPr wrap="square" lIns="0" tIns="0" rIns="0" bIns="0" rtlCol="0" anchor="ctr"/>
+          <a:lstStyle/>
+          <a:p>
+            <a:pPr algn="l" indent="0" marL="0">
+              <a:buNone/>
+            </a:pPr>
+            <a:r>
+              <a:rPr lang="en-US" sz="1350" b="1" dirty="0">
+                <a:solidFill>
+                  <a:srgbClr val="FF4D6D"/>
+                </a:solidFill>
+                <a:latin typeface="Calibri" pitchFamily="34" charset="0"/>
+                <a:ea typeface="Calibri" pitchFamily="34" charset="-122"/>
+                <a:cs typeface="Calibri" pitchFamily="34" charset="-120"/>
+              </a:rPr>
+              <a:t>7</a:t>
+            </a:r>
+            <a:pPr algn="l" indent="0" marL="0">
+              <a:buNone/>
+            </a:pPr>
+            <a:r>
+              <a:rPr lang="en-US" sz="950" b="1" dirty="0">
+                <a:solidFill>
+                  <a:srgbClr val="FF4D6D"/>
+                </a:solidFill>
+                <a:latin typeface="Calibri" pitchFamily="34" charset="0"/>
+                <a:ea typeface="Calibri" pitchFamily="34" charset="-122"/>
+                <a:cs typeface="Calibri" pitchFamily="34" charset="-120"/>
+              </a:rPr>
+              <a:t>  HIGH</a:t>
+            </a:r>
+            <a:endParaRPr lang="en-US" sz="1350" dirty="0"/>
+          </a:p>
+        </p:txBody>
+      </p:sp>
+      <p:sp>
+        <p:nvSpPr>
+          <p:cNvPr id="43" name="Text 40"/>
+          <p:cNvSpPr/>
+          <p:nvPr/>
+        </p:nvSpPr>
+        <p:spPr>
+          <a:xfrm>
+            <a:off x="3282696" y="4690872"/>
+            <a:ext cx="1554480" cy="502920"/>
+          </a:xfrm>
+          <a:prstGeom prst="rect">
+            <a:avLst/>
+          </a:prstGeom>
+          <a:noFill/>
+          <a:ln/>
+        </p:spPr>
+        <p:txBody>
+          <a:bodyPr wrap="square" lIns="0" tIns="0" rIns="0" bIns="0" rtlCol="0" anchor="ctr"/>
+          <a:lstStyle/>
+          <a:p>
+            <a:pPr algn="l" indent="0" marL="0">
+              <a:buNone/>
+            </a:pPr>
+            <a:r>
+              <a:rPr lang="en-US" sz="1250" dirty="0">
+                <a:solidFill>
+                  <a:srgbClr val="6B6B76"/>
+                </a:solidFill>
+                <a:latin typeface="Calibri" pitchFamily="34" charset="0"/>
+                <a:ea typeface="Calibri" pitchFamily="34" charset="-122"/>
+                <a:cs typeface="Calibri" pitchFamily="34" charset="-120"/>
+              </a:rPr>
+              <a:t>1–6</a:t>
+            </a:r>
+            <a:endParaRPr lang="en-US" sz="1250" dirty="0"/>
+          </a:p>
+        </p:txBody>
+      </p:sp>
+      <p:sp>
+        <p:nvSpPr>
+          <p:cNvPr id="44" name="Text 41"/>
+          <p:cNvSpPr/>
+          <p:nvPr/>
+        </p:nvSpPr>
+        <p:spPr>
+          <a:xfrm>
+            <a:off x="4855464" y="4690872"/>
+            <a:ext cx="1005840" cy="502920"/>
+          </a:xfrm>
+          <a:prstGeom prst="rect">
+            <a:avLst/>
+          </a:prstGeom>
+          <a:noFill/>
+          <a:ln/>
+        </p:spPr>
+        <p:txBody>
+          <a:bodyPr wrap="square" lIns="0" tIns="0" rIns="0" bIns="0" rtlCol="0" anchor="ctr"/>
+          <a:lstStyle/>
+          <a:p>
+            <a:pPr algn="l" indent="0" marL="0">
+              <a:buNone/>
+            </a:pPr>
+            <a:r>
+              <a:rPr lang="en-US" sz="1200" dirty="0">
+                <a:solidFill>
+                  <a:srgbClr val="6B6B76"/>
+                </a:solidFill>
+                <a:latin typeface="Calibri" pitchFamily="34" charset="0"/>
+                <a:ea typeface="Calibri" pitchFamily="34" charset="-122"/>
+                <a:cs typeface="Calibri" pitchFamily="34" charset="-120"/>
+              </a:rPr>
+              <a:t>%</a:t>
+            </a:r>
+            <a:endParaRPr lang="en-US" sz="1200" dirty="0"/>
+          </a:p>
+        </p:txBody>
+      </p:sp>
+      <p:sp>
+        <p:nvSpPr>
+          <p:cNvPr id="45" name="Shape 42"/>
+          <p:cNvSpPr/>
+          <p:nvPr/>
+        </p:nvSpPr>
+        <p:spPr>
+          <a:xfrm>
+            <a:off x="6236208" y="1719072"/>
+            <a:ext cx="5449824" cy="384048"/>
+          </a:xfrm>
+          <a:prstGeom prst="roundRect">
+            <a:avLst>
+              <a:gd name="adj" fmla="val 19048"/>
+            </a:avLst>
+          </a:prstGeom>
+          <a:solidFill>
+            <a:srgbClr val="A4133C"/>
+          </a:solidFill>
+          <a:ln/>
+        </p:spPr>
+      </p:sp>
+      <p:sp>
+        <p:nvSpPr>
+          <p:cNvPr id="46" name="Text 43"/>
+          <p:cNvSpPr/>
+          <p:nvPr/>
+        </p:nvSpPr>
+        <p:spPr>
+          <a:xfrm>
+            <a:off x="6373368" y="1719072"/>
+            <a:ext cx="1325880" cy="384048"/>
+          </a:xfrm>
+          <a:prstGeom prst="rect">
+            <a:avLst/>
+          </a:prstGeom>
+          <a:noFill/>
+          <a:ln/>
+        </p:spPr>
+        <p:txBody>
+          <a:bodyPr wrap="square" lIns="0" tIns="0" rIns="0" bIns="0" rtlCol="0" anchor="ctr"/>
+          <a:lstStyle/>
+          <a:p>
+            <a:pPr algn="l" indent="0" marL="0">
+              <a:buNone/>
+            </a:pPr>
+            <a:r>
+              <a:rPr lang="en-US" sz="1150" b="1" dirty="0">
+                <a:solidFill>
+                  <a:srgbClr val="FFFFFF"/>
+                </a:solidFill>
+                <a:latin typeface="Calibri" pitchFamily="34" charset="0"/>
+                <a:ea typeface="Calibri" pitchFamily="34" charset="-122"/>
+                <a:cs typeface="Calibri" pitchFamily="34" charset="-120"/>
+              </a:rPr>
+              <a:t>TEST</a:t>
+            </a:r>
+            <a:endParaRPr lang="en-US" sz="1150" dirty="0"/>
+          </a:p>
+        </p:txBody>
+      </p:sp>
+      <p:sp>
+        <p:nvSpPr>
+          <p:cNvPr id="47" name="Text 44"/>
+          <p:cNvSpPr/>
+          <p:nvPr/>
+        </p:nvSpPr>
+        <p:spPr>
+          <a:xfrm>
+            <a:off x="7717536" y="1719072"/>
+            <a:ext cx="1280160" cy="384048"/>
+          </a:xfrm>
+          <a:prstGeom prst="rect">
+            <a:avLst/>
+          </a:prstGeom>
+          <a:noFill/>
+          <a:ln/>
+        </p:spPr>
+        <p:txBody>
+          <a:bodyPr wrap="square" lIns="0" tIns="0" rIns="0" bIns="0" rtlCol="0" anchor="ctr"/>
+          <a:lstStyle/>
+          <a:p>
+            <a:pPr algn="l" indent="0" marL="0">
+              <a:buNone/>
+            </a:pPr>
+            <a:r>
+              <a:rPr lang="en-US" sz="1150" b="1" dirty="0">
+                <a:solidFill>
+                  <a:srgbClr val="FFFFFF"/>
+                </a:solidFill>
+                <a:latin typeface="Calibri" pitchFamily="34" charset="0"/>
+                <a:ea typeface="Calibri" pitchFamily="34" charset="-122"/>
+                <a:cs typeface="Calibri" pitchFamily="34" charset="-120"/>
+              </a:rPr>
+              <a:t>RESULT</a:t>
+            </a:r>
+            <a:endParaRPr lang="en-US" sz="1150" dirty="0"/>
+          </a:p>
+        </p:txBody>
+      </p:sp>
+      <p:sp>
+        <p:nvSpPr>
+          <p:cNvPr id="48" name="Text 45"/>
+          <p:cNvSpPr/>
+          <p:nvPr/>
+        </p:nvSpPr>
+        <p:spPr>
+          <a:xfrm>
+            <a:off x="9015984" y="1719072"/>
+            <a:ext cx="1554480" cy="384048"/>
+          </a:xfrm>
+          <a:prstGeom prst="rect">
+            <a:avLst/>
+          </a:prstGeom>
+          <a:noFill/>
+          <a:ln/>
+        </p:spPr>
+        <p:txBody>
+          <a:bodyPr wrap="square" lIns="0" tIns="0" rIns="0" bIns="0" rtlCol="0" anchor="ctr"/>
+          <a:lstStyle/>
+          <a:p>
+            <a:pPr algn="l" indent="0" marL="0">
+              <a:buNone/>
+            </a:pPr>
+            <a:r>
+              <a:rPr lang="en-US" sz="1150" b="1" dirty="0">
+                <a:solidFill>
+                  <a:srgbClr val="FFFFFF"/>
+                </a:solidFill>
+                <a:latin typeface="Calibri" pitchFamily="34" charset="0"/>
+                <a:ea typeface="Calibri" pitchFamily="34" charset="-122"/>
+                <a:cs typeface="Calibri" pitchFamily="34" charset="-120"/>
+              </a:rPr>
+              <a:t>REFERENCE RANGE</a:t>
+            </a:r>
+            <a:endParaRPr lang="en-US" sz="1150" dirty="0"/>
+          </a:p>
+        </p:txBody>
+      </p:sp>
+      <p:sp>
+        <p:nvSpPr>
+          <p:cNvPr id="49" name="Text 46"/>
+          <p:cNvSpPr/>
+          <p:nvPr/>
+        </p:nvSpPr>
+        <p:spPr>
+          <a:xfrm>
+            <a:off x="10588752" y="1719072"/>
+            <a:ext cx="1005840" cy="384048"/>
+          </a:xfrm>
+          <a:prstGeom prst="rect">
+            <a:avLst/>
+          </a:prstGeom>
+          <a:noFill/>
+          <a:ln/>
+        </p:spPr>
+        <p:txBody>
+          <a:bodyPr wrap="square" lIns="0" tIns="0" rIns="0" bIns="0" rtlCol="0" anchor="ctr"/>
+          <a:lstStyle/>
+          <a:p>
+            <a:pPr algn="l" indent="0" marL="0">
+              <a:buNone/>
+            </a:pPr>
+            <a:r>
+              <a:rPr lang="en-US" sz="1150" b="1" dirty="0">
+                <a:solidFill>
+                  <a:srgbClr val="FFFFFF"/>
+                </a:solidFill>
+                <a:latin typeface="Calibri" pitchFamily="34" charset="0"/>
+                <a:ea typeface="Calibri" pitchFamily="34" charset="-122"/>
+                <a:cs typeface="Calibri" pitchFamily="34" charset="-120"/>
+              </a:rPr>
+              <a:t>UNITS</a:t>
+            </a:r>
+            <a:endParaRPr lang="en-US" sz="1150" dirty="0"/>
+          </a:p>
+        </p:txBody>
+      </p:sp>
+      <p:sp>
+        <p:nvSpPr>
+          <p:cNvPr id="50" name="Shape 47"/>
+          <p:cNvSpPr/>
+          <p:nvPr/>
+        </p:nvSpPr>
+        <p:spPr>
+          <a:xfrm>
+            <a:off x="6236208" y="2176272"/>
+            <a:ext cx="5449824" cy="502920"/>
+          </a:xfrm>
+          <a:prstGeom prst="rect">
+            <a:avLst/>
+          </a:prstGeom>
+          <a:solidFill>
+            <a:srgbClr val="FFF0F3"/>
+          </a:solidFill>
+          <a:ln/>
+        </p:spPr>
+      </p:sp>
+      <p:sp>
+        <p:nvSpPr>
+          <p:cNvPr id="51" name="Shape 48"/>
+          <p:cNvSpPr/>
+          <p:nvPr/>
+        </p:nvSpPr>
+        <p:spPr>
+          <a:xfrm>
+            <a:off x="6236208" y="2679192"/>
+            <a:ext cx="5449824" cy="0"/>
+          </a:xfrm>
+          <a:prstGeom prst="line">
+            <a:avLst/>
+          </a:prstGeom>
+          <a:noFill/>
+          <a:ln w="12700">
+            <a:solidFill>
+              <a:srgbClr val="FBD8DF"/>
+            </a:solidFill>
+            <a:prstDash val="solid"/>
+          </a:ln>
+        </p:spPr>
+      </p:sp>
+      <p:sp>
+        <p:nvSpPr>
+          <p:cNvPr id="52" name="Text 49"/>
+          <p:cNvSpPr/>
+          <p:nvPr/>
+        </p:nvSpPr>
+        <p:spPr>
+          <a:xfrm>
+            <a:off x="6373368" y="2176272"/>
+            <a:ext cx="1325880" cy="502920"/>
+          </a:xfrm>
+          <a:prstGeom prst="rect">
+            <a:avLst/>
+          </a:prstGeom>
+          <a:noFill/>
+          <a:ln/>
+        </p:spPr>
+        <p:txBody>
+          <a:bodyPr wrap="square" lIns="0" tIns="0" rIns="0" bIns="0" rtlCol="0" anchor="ctr"/>
+          <a:lstStyle/>
+          <a:p>
+            <a:pPr algn="l" indent="0" marL="0">
+              <a:buNone/>
+            </a:pPr>
+            <a:r>
+              <a:rPr lang="en-US" sz="1300" dirty="0">
+                <a:solidFill>
+                  <a:srgbClr val="2B2B33"/>
+                </a:solidFill>
+                <a:latin typeface="Calibri" pitchFamily="34" charset="0"/>
+                <a:ea typeface="Calibri" pitchFamily="34" charset="-122"/>
+                <a:cs typeface="Calibri" pitchFamily="34" charset="-120"/>
+              </a:rPr>
+              <a:t>Platelets</a:t>
+            </a:r>
+            <a:endParaRPr lang="en-US" sz="1300" dirty="0"/>
+          </a:p>
+        </p:txBody>
+      </p:sp>
+      <p:sp>
+        <p:nvSpPr>
+          <p:cNvPr id="53" name="Text 50"/>
+          <p:cNvSpPr/>
+          <p:nvPr/>
+        </p:nvSpPr>
+        <p:spPr>
+          <a:xfrm>
+            <a:off x="7717536" y="2176272"/>
+            <a:ext cx="1280160" cy="502920"/>
+          </a:xfrm>
+          <a:prstGeom prst="rect">
+            <a:avLst/>
+          </a:prstGeom>
+          <a:noFill/>
+          <a:ln/>
+        </p:spPr>
+        <p:txBody>
+          <a:bodyPr wrap="square" lIns="0" tIns="0" rIns="0" bIns="0" rtlCol="0" anchor="ctr"/>
+          <a:lstStyle/>
+          <a:p>
+            <a:pPr algn="l" indent="0" marL="0">
+              <a:buNone/>
+            </a:pPr>
+            <a:r>
+              <a:rPr lang="en-US" sz="1350" b="1" dirty="0">
+                <a:solidFill>
+                  <a:srgbClr val="2B2B33"/>
+                </a:solidFill>
+                <a:latin typeface="Calibri" pitchFamily="34" charset="0"/>
+                <a:ea typeface="Calibri" pitchFamily="34" charset="-122"/>
+                <a:cs typeface="Calibri" pitchFamily="34" charset="-120"/>
+              </a:rPr>
+              <a:t>296</a:t>
+            </a:r>
+            <a:endParaRPr lang="en-US" sz="1350" dirty="0"/>
+          </a:p>
+        </p:txBody>
+      </p:sp>
+      <p:sp>
+        <p:nvSpPr>
+          <p:cNvPr id="54" name="Text 51"/>
+          <p:cNvSpPr/>
+          <p:nvPr/>
+        </p:nvSpPr>
+        <p:spPr>
+          <a:xfrm>
+            <a:off x="9015984" y="2176272"/>
+            <a:ext cx="1554480" cy="502920"/>
+          </a:xfrm>
+          <a:prstGeom prst="rect">
+            <a:avLst/>
+          </a:prstGeom>
+          <a:noFill/>
+          <a:ln/>
+        </p:spPr>
+        <p:txBody>
+          <a:bodyPr wrap="square" lIns="0" tIns="0" rIns="0" bIns="0" rtlCol="0" anchor="ctr"/>
+          <a:lstStyle/>
+          <a:p>
+            <a:pPr algn="l" indent="0" marL="0">
+              <a:buNone/>
+            </a:pPr>
+            <a:r>
+              <a:rPr lang="en-US" sz="1250" dirty="0">
+                <a:solidFill>
+                  <a:srgbClr val="6B6B76"/>
+                </a:solidFill>
+                <a:latin typeface="Calibri" pitchFamily="34" charset="0"/>
+                <a:ea typeface="Calibri" pitchFamily="34" charset="-122"/>
+                <a:cs typeface="Calibri" pitchFamily="34" charset="-120"/>
+              </a:rPr>
+              <a:t>150–400</a:t>
+            </a:r>
+            <a:endParaRPr lang="en-US" sz="1250" dirty="0"/>
+          </a:p>
+        </p:txBody>
+      </p:sp>
+      <p:sp>
+        <p:nvSpPr>
+          <p:cNvPr id="55" name="Text 52"/>
+          <p:cNvSpPr/>
+          <p:nvPr/>
+        </p:nvSpPr>
+        <p:spPr>
+          <a:xfrm>
+            <a:off x="10588752" y="2176272"/>
+            <a:ext cx="1005840" cy="502920"/>
+          </a:xfrm>
+          <a:prstGeom prst="rect">
+            <a:avLst/>
+          </a:prstGeom>
+          <a:noFill/>
+          <a:ln/>
+        </p:spPr>
+        <p:txBody>
+          <a:bodyPr wrap="square" lIns="0" tIns="0" rIns="0" bIns="0" rtlCol="0" anchor="ctr"/>
+          <a:lstStyle/>
+          <a:p>
+            <a:pPr algn="l" indent="0" marL="0">
+              <a:buNone/>
+            </a:pPr>
+            <a:r>
+              <a:rPr lang="en-US" sz="1200" dirty="0">
+                <a:solidFill>
+                  <a:srgbClr val="6B6B76"/>
+                </a:solidFill>
+                <a:latin typeface="Calibri" pitchFamily="34" charset="0"/>
+                <a:ea typeface="Calibri" pitchFamily="34" charset="-122"/>
+                <a:cs typeface="Calibri" pitchFamily="34" charset="-120"/>
+              </a:rPr>
+              <a:t>×10³/µL</a:t>
+            </a:r>
+            <a:endParaRPr lang="en-US" sz="1200" dirty="0"/>
+          </a:p>
+        </p:txBody>
+      </p:sp>
+      <p:sp>
+        <p:nvSpPr>
+          <p:cNvPr id="56" name="Shape 53"/>
+          <p:cNvSpPr/>
+          <p:nvPr/>
+        </p:nvSpPr>
+        <p:spPr>
+          <a:xfrm>
+            <a:off x="6236208" y="3182112"/>
+            <a:ext cx="5449824" cy="0"/>
+          </a:xfrm>
+          <a:prstGeom prst="line">
+            <a:avLst/>
+          </a:prstGeom>
+          <a:noFill/>
+          <a:ln w="12700">
+            <a:solidFill>
+              <a:srgbClr val="FBD8DF"/>
+            </a:solidFill>
+            <a:prstDash val="solid"/>
+          </a:ln>
+        </p:spPr>
+      </p:sp>
+      <p:sp>
+        <p:nvSpPr>
+          <p:cNvPr id="57" name="Text 54"/>
+          <p:cNvSpPr/>
+          <p:nvPr/>
+        </p:nvSpPr>
+        <p:spPr>
+          <a:xfrm>
+            <a:off x="6373368" y="2679192"/>
+            <a:ext cx="1325880" cy="502920"/>
+          </a:xfrm>
+          <a:prstGeom prst="rect">
+            <a:avLst/>
+          </a:prstGeom>
+          <a:noFill/>
+          <a:ln/>
+        </p:spPr>
+        <p:txBody>
+          <a:bodyPr wrap="square" lIns="0" tIns="0" rIns="0" bIns="0" rtlCol="0" anchor="ctr"/>
+          <a:lstStyle/>
+          <a:p>
+            <a:pPr algn="l" indent="0" marL="0">
+              <a:buNone/>
+            </a:pPr>
+            <a:r>
+              <a:rPr lang="en-US" sz="1300" dirty="0">
+                <a:solidFill>
+                  <a:srgbClr val="2B2B33"/>
+                </a:solidFill>
+                <a:latin typeface="Calibri" pitchFamily="34" charset="0"/>
+                <a:ea typeface="Calibri" pitchFamily="34" charset="-122"/>
+                <a:cs typeface="Calibri" pitchFamily="34" charset="-120"/>
+              </a:rPr>
+              <a:t>RBC</a:t>
+            </a:r>
+            <a:endParaRPr lang="en-US" sz="1300" dirty="0"/>
+          </a:p>
+        </p:txBody>
+      </p:sp>
+      <p:sp>
+        <p:nvSpPr>
+          <p:cNvPr id="58" name="Text 55"/>
+          <p:cNvSpPr/>
+          <p:nvPr/>
+        </p:nvSpPr>
+        <p:spPr>
+          <a:xfrm>
+            <a:off x="7717536" y="2679192"/>
+            <a:ext cx="1280160" cy="502920"/>
+          </a:xfrm>
+          <a:prstGeom prst="rect">
+            <a:avLst/>
+          </a:prstGeom>
+          <a:noFill/>
+          <a:ln/>
+        </p:spPr>
+        <p:txBody>
+          <a:bodyPr wrap="square" lIns="0" tIns="0" rIns="0" bIns="0" rtlCol="0" anchor="ctr"/>
+          <a:lstStyle/>
+          <a:p>
+            <a:pPr algn="l" indent="0" marL="0">
+              <a:buNone/>
+            </a:pPr>
+            <a:r>
+              <a:rPr lang="en-US" sz="1350" b="1" dirty="0">
+                <a:solidFill>
+                  <a:srgbClr val="FF4D6D"/>
+                </a:solidFill>
+                <a:latin typeface="Calibri" pitchFamily="34" charset="0"/>
+                <a:ea typeface="Calibri" pitchFamily="34" charset="-122"/>
+                <a:cs typeface="Calibri" pitchFamily="34" charset="-120"/>
+              </a:rPr>
+              <a:t>3.53</a:t>
+            </a:r>
+            <a:pPr algn="l" indent="0" marL="0">
+              <a:buNone/>
+            </a:pPr>
+            <a:r>
+              <a:rPr lang="en-US" sz="950" b="1" dirty="0">
+                <a:solidFill>
+                  <a:srgbClr val="FF4D6D"/>
+                </a:solidFill>
+                <a:latin typeface="Calibri" pitchFamily="34" charset="0"/>
+                <a:ea typeface="Calibri" pitchFamily="34" charset="-122"/>
+                <a:cs typeface="Calibri" pitchFamily="34" charset="-120"/>
+              </a:rPr>
+              <a:t>  LOW</a:t>
+            </a:r>
+            <a:endParaRPr lang="en-US" sz="1350" dirty="0"/>
+          </a:p>
+        </p:txBody>
+      </p:sp>
+      <p:sp>
+        <p:nvSpPr>
+          <p:cNvPr id="59" name="Text 56"/>
+          <p:cNvSpPr/>
+          <p:nvPr/>
+        </p:nvSpPr>
+        <p:spPr>
+          <a:xfrm>
+            <a:off x="9015984" y="2679192"/>
+            <a:ext cx="1554480" cy="502920"/>
+          </a:xfrm>
+          <a:prstGeom prst="rect">
+            <a:avLst/>
+          </a:prstGeom>
+          <a:noFill/>
+          <a:ln/>
+        </p:spPr>
+        <p:txBody>
+          <a:bodyPr wrap="square" lIns="0" tIns="0" rIns="0" bIns="0" rtlCol="0" anchor="ctr"/>
+          <a:lstStyle/>
+          <a:p>
+            <a:pPr algn="l" indent="0" marL="0">
+              <a:buNone/>
+            </a:pPr>
+            <a:r>
+              <a:rPr lang="en-US" sz="1250" dirty="0">
+                <a:solidFill>
+                  <a:srgbClr val="6B6B76"/>
+                </a:solidFill>
+                <a:latin typeface="Calibri" pitchFamily="34" charset="0"/>
+                <a:ea typeface="Calibri" pitchFamily="34" charset="-122"/>
+                <a:cs typeface="Calibri" pitchFamily="34" charset="-120"/>
+              </a:rPr>
+              <a:t>3.6–5.8</a:t>
+            </a:r>
+            <a:endParaRPr lang="en-US" sz="1250" dirty="0"/>
+          </a:p>
+        </p:txBody>
+      </p:sp>
+      <p:sp>
+        <p:nvSpPr>
+          <p:cNvPr id="60" name="Text 57"/>
+          <p:cNvSpPr/>
+          <p:nvPr/>
+        </p:nvSpPr>
+        <p:spPr>
+          <a:xfrm>
+            <a:off x="10588752" y="2679192"/>
+            <a:ext cx="1005840" cy="502920"/>
+          </a:xfrm>
+          <a:prstGeom prst="rect">
+            <a:avLst/>
+          </a:prstGeom>
+          <a:noFill/>
+          <a:ln/>
+        </p:spPr>
+        <p:txBody>
+          <a:bodyPr wrap="square" lIns="0" tIns="0" rIns="0" bIns="0" rtlCol="0" anchor="ctr"/>
+          <a:lstStyle/>
+          <a:p>
+            <a:pPr algn="l" indent="0" marL="0">
+              <a:buNone/>
+            </a:pPr>
+            <a:r>
+              <a:rPr lang="en-US" sz="1200" dirty="0">
+                <a:solidFill>
+                  <a:srgbClr val="6B6B76"/>
+                </a:solidFill>
+                <a:latin typeface="Calibri" pitchFamily="34" charset="0"/>
+                <a:ea typeface="Calibri" pitchFamily="34" charset="-122"/>
+                <a:cs typeface="Calibri" pitchFamily="34" charset="-120"/>
+              </a:rPr>
+              <a:t>×10⁶/µL</a:t>
+            </a:r>
+            <a:endParaRPr lang="en-US" sz="1200" dirty="0"/>
+          </a:p>
+        </p:txBody>
+      </p:sp>
+      <p:sp>
+        <p:nvSpPr>
+          <p:cNvPr id="61" name="Shape 58"/>
+          <p:cNvSpPr/>
+          <p:nvPr/>
+        </p:nvSpPr>
+        <p:spPr>
+          <a:xfrm>
+            <a:off x="6236208" y="3182112"/>
+            <a:ext cx="5449824" cy="502920"/>
+          </a:xfrm>
+          <a:prstGeom prst="rect">
+            <a:avLst/>
+          </a:prstGeom>
+          <a:solidFill>
+            <a:srgbClr val="FFF0F3"/>
+          </a:solidFill>
+          <a:ln/>
+        </p:spPr>
+      </p:sp>
+      <p:sp>
+        <p:nvSpPr>
+          <p:cNvPr id="62" name="Shape 59"/>
+          <p:cNvSpPr/>
+          <p:nvPr/>
+        </p:nvSpPr>
+        <p:spPr>
+          <a:xfrm>
+            <a:off x="6236208" y="3685032"/>
+            <a:ext cx="5449824" cy="0"/>
+          </a:xfrm>
+          <a:prstGeom prst="line">
+            <a:avLst/>
+          </a:prstGeom>
+          <a:noFill/>
+          <a:ln w="12700">
+            <a:solidFill>
+              <a:srgbClr val="FBD8DF"/>
+            </a:solidFill>
+            <a:prstDash val="solid"/>
+          </a:ln>
+        </p:spPr>
+      </p:sp>
+      <p:sp>
+        <p:nvSpPr>
+          <p:cNvPr id="63" name="Text 60"/>
+          <p:cNvSpPr/>
+          <p:nvPr/>
+        </p:nvSpPr>
+        <p:spPr>
+          <a:xfrm>
+            <a:off x="6373368" y="3182112"/>
+            <a:ext cx="1325880" cy="502920"/>
+          </a:xfrm>
+          <a:prstGeom prst="rect">
+            <a:avLst/>
+          </a:prstGeom>
+          <a:noFill/>
+          <a:ln/>
+        </p:spPr>
+        <p:txBody>
+          <a:bodyPr wrap="square" lIns="0" tIns="0" rIns="0" bIns="0" rtlCol="0" anchor="ctr"/>
+          <a:lstStyle/>
+          <a:p>
+            <a:pPr algn="l" indent="0" marL="0">
+              <a:buNone/>
+            </a:pPr>
+            <a:r>
+              <a:rPr lang="en-US" sz="1300" dirty="0">
+                <a:solidFill>
+                  <a:srgbClr val="2B2B33"/>
+                </a:solidFill>
+                <a:latin typeface="Calibri" pitchFamily="34" charset="0"/>
+                <a:ea typeface="Calibri" pitchFamily="34" charset="-122"/>
+                <a:cs typeface="Calibri" pitchFamily="34" charset="-120"/>
+              </a:rPr>
+              <a:t>MCV</a:t>
+            </a:r>
+            <a:endParaRPr lang="en-US" sz="1300" dirty="0"/>
+          </a:p>
+        </p:txBody>
+      </p:sp>
+      <p:sp>
+        <p:nvSpPr>
+          <p:cNvPr id="64" name="Text 61"/>
+          <p:cNvSpPr/>
+          <p:nvPr/>
+        </p:nvSpPr>
+        <p:spPr>
+          <a:xfrm>
+            <a:off x="7717536" y="3182112"/>
+            <a:ext cx="1280160" cy="502920"/>
+          </a:xfrm>
+          <a:prstGeom prst="rect">
+            <a:avLst/>
+          </a:prstGeom>
+          <a:noFill/>
+          <a:ln/>
+        </p:spPr>
+        <p:txBody>
+          <a:bodyPr wrap="square" lIns="0" tIns="0" rIns="0" bIns="0" rtlCol="0" anchor="ctr"/>
+          <a:lstStyle/>
+          <a:p>
+            <a:pPr algn="l" indent="0" marL="0">
+              <a:buNone/>
+            </a:pPr>
+            <a:r>
+              <a:rPr lang="en-US" sz="1350" b="1" dirty="0">
+                <a:solidFill>
+                  <a:srgbClr val="2B2B33"/>
+                </a:solidFill>
+                <a:latin typeface="Calibri" pitchFamily="34" charset="0"/>
+                <a:ea typeface="Calibri" pitchFamily="34" charset="-122"/>
+                <a:cs typeface="Calibri" pitchFamily="34" charset="-120"/>
+              </a:rPr>
+              <a:t>85.7</a:t>
+            </a:r>
+            <a:endParaRPr lang="en-US" sz="1350" dirty="0"/>
+          </a:p>
+        </p:txBody>
+      </p:sp>
+      <p:sp>
+        <p:nvSpPr>
+          <p:cNvPr id="65" name="Text 62"/>
+          <p:cNvSpPr/>
+          <p:nvPr/>
+        </p:nvSpPr>
+        <p:spPr>
+          <a:xfrm>
+            <a:off x="9015984" y="3182112"/>
+            <a:ext cx="1554480" cy="502920"/>
+          </a:xfrm>
+          <a:prstGeom prst="rect">
+            <a:avLst/>
+          </a:prstGeom>
+          <a:noFill/>
+          <a:ln/>
+        </p:spPr>
+        <p:txBody>
+          <a:bodyPr wrap="square" lIns="0" tIns="0" rIns="0" bIns="0" rtlCol="0" anchor="ctr"/>
+          <a:lstStyle/>
+          <a:p>
+            <a:pPr algn="l" indent="0" marL="0">
+              <a:buNone/>
+            </a:pPr>
+            <a:r>
+              <a:rPr lang="en-US" sz="1250" dirty="0">
+                <a:solidFill>
+                  <a:srgbClr val="6B6B76"/>
+                </a:solidFill>
+                <a:latin typeface="Calibri" pitchFamily="34" charset="0"/>
+                <a:ea typeface="Calibri" pitchFamily="34" charset="-122"/>
+                <a:cs typeface="Calibri" pitchFamily="34" charset="-120"/>
+              </a:rPr>
+              <a:t>80–100</a:t>
+            </a:r>
+            <a:endParaRPr lang="en-US" sz="1250" dirty="0"/>
+          </a:p>
+        </p:txBody>
+      </p:sp>
+      <p:sp>
+        <p:nvSpPr>
+          <p:cNvPr id="66" name="Text 63"/>
+          <p:cNvSpPr/>
+          <p:nvPr/>
+        </p:nvSpPr>
+        <p:spPr>
+          <a:xfrm>
+            <a:off x="10588752" y="3182112"/>
+            <a:ext cx="1005840" cy="502920"/>
+          </a:xfrm>
+          <a:prstGeom prst="rect">
+            <a:avLst/>
+          </a:prstGeom>
+          <a:noFill/>
+          <a:ln/>
+        </p:spPr>
+        <p:txBody>
+          <a:bodyPr wrap="square" lIns="0" tIns="0" rIns="0" bIns="0" rtlCol="0" anchor="ctr"/>
+          <a:lstStyle/>
+          <a:p>
+            <a:pPr algn="l" indent="0" marL="0">
+              <a:buNone/>
+            </a:pPr>
+            <a:r>
+              <a:rPr lang="en-US" sz="1200" dirty="0">
+                <a:solidFill>
+                  <a:srgbClr val="6B6B76"/>
+                </a:solidFill>
+                <a:latin typeface="Calibri" pitchFamily="34" charset="0"/>
+                <a:ea typeface="Calibri" pitchFamily="34" charset="-122"/>
+                <a:cs typeface="Calibri" pitchFamily="34" charset="-120"/>
+              </a:rPr>
+              <a:t>fL</a:t>
+            </a:r>
+            <a:endParaRPr lang="en-US" sz="1200" dirty="0"/>
+          </a:p>
+        </p:txBody>
+      </p:sp>
+      <p:sp>
+        <p:nvSpPr>
+          <p:cNvPr id="67" name="Shape 64"/>
+          <p:cNvSpPr/>
+          <p:nvPr/>
+        </p:nvSpPr>
+        <p:spPr>
+          <a:xfrm>
+            <a:off x="6236208" y="4187952"/>
+            <a:ext cx="5449824" cy="0"/>
+          </a:xfrm>
+          <a:prstGeom prst="line">
+            <a:avLst/>
+          </a:prstGeom>
+          <a:noFill/>
+          <a:ln w="12700">
+            <a:solidFill>
+              <a:srgbClr val="FBD8DF"/>
+            </a:solidFill>
+            <a:prstDash val="solid"/>
+          </a:ln>
+        </p:spPr>
+      </p:sp>
+      <p:sp>
+        <p:nvSpPr>
+          <p:cNvPr id="68" name="Text 65"/>
+          <p:cNvSpPr/>
+          <p:nvPr/>
+        </p:nvSpPr>
+        <p:spPr>
+          <a:xfrm>
+            <a:off x="6373368" y="3685032"/>
+            <a:ext cx="1325880" cy="502920"/>
+          </a:xfrm>
+          <a:prstGeom prst="rect">
+            <a:avLst/>
+          </a:prstGeom>
+          <a:noFill/>
+          <a:ln/>
+        </p:spPr>
+        <p:txBody>
+          <a:bodyPr wrap="square" lIns="0" tIns="0" rIns="0" bIns="0" rtlCol="0" anchor="ctr"/>
+          <a:lstStyle/>
+          <a:p>
+            <a:pPr algn="l" indent="0" marL="0">
+              <a:buNone/>
+            </a:pPr>
+            <a:r>
+              <a:rPr lang="en-US" sz="1300" dirty="0">
+                <a:solidFill>
+                  <a:srgbClr val="2B2B33"/>
+                </a:solidFill>
+                <a:latin typeface="Calibri" pitchFamily="34" charset="0"/>
+                <a:ea typeface="Calibri" pitchFamily="34" charset="-122"/>
+                <a:cs typeface="Calibri" pitchFamily="34" charset="-120"/>
+              </a:rPr>
+              <a:t>MCH</a:t>
+            </a:r>
+            <a:endParaRPr lang="en-US" sz="1300" dirty="0"/>
+          </a:p>
+        </p:txBody>
+      </p:sp>
+      <p:sp>
+        <p:nvSpPr>
+          <p:cNvPr id="69" name="Text 66"/>
+          <p:cNvSpPr/>
+          <p:nvPr/>
+        </p:nvSpPr>
+        <p:spPr>
+          <a:xfrm>
+            <a:off x="7717536" y="3685032"/>
+            <a:ext cx="1280160" cy="502920"/>
+          </a:xfrm>
+          <a:prstGeom prst="rect">
+            <a:avLst/>
+          </a:prstGeom>
+          <a:noFill/>
+          <a:ln/>
+        </p:spPr>
+        <p:txBody>
+          <a:bodyPr wrap="square" lIns="0" tIns="0" rIns="0" bIns="0" rtlCol="0" anchor="ctr"/>
+          <a:lstStyle/>
+          <a:p>
+            <a:pPr algn="l" indent="0" marL="0">
+              <a:buNone/>
+            </a:pPr>
+            <a:r>
+              <a:rPr lang="en-US" sz="1350" b="1" dirty="0">
+                <a:solidFill>
+                  <a:srgbClr val="2B2B33"/>
+                </a:solidFill>
+                <a:latin typeface="Calibri" pitchFamily="34" charset="0"/>
+                <a:ea typeface="Calibri" pitchFamily="34" charset="-122"/>
+                <a:cs typeface="Calibri" pitchFamily="34" charset="-120"/>
+              </a:rPr>
+              <a:t>30.0</a:t>
+            </a:r>
+            <a:endParaRPr lang="en-US" sz="1350" dirty="0"/>
+          </a:p>
+        </p:txBody>
+      </p:sp>
+      <p:sp>
+        <p:nvSpPr>
+          <p:cNvPr id="70" name="Text 67"/>
+          <p:cNvSpPr/>
+          <p:nvPr/>
+        </p:nvSpPr>
+        <p:spPr>
+          <a:xfrm>
+            <a:off x="9015984" y="3685032"/>
+            <a:ext cx="1554480" cy="502920"/>
+          </a:xfrm>
+          <a:prstGeom prst="rect">
+            <a:avLst/>
+          </a:prstGeom>
+          <a:noFill/>
+          <a:ln/>
+        </p:spPr>
+        <p:txBody>
+          <a:bodyPr wrap="square" lIns="0" tIns="0" rIns="0" bIns="0" rtlCol="0" anchor="ctr"/>
+          <a:lstStyle/>
+          <a:p>
+            <a:pPr algn="l" indent="0" marL="0">
+              <a:buNone/>
+            </a:pPr>
+            <a:r>
+              <a:rPr lang="en-US" sz="1250" dirty="0">
+                <a:solidFill>
+                  <a:srgbClr val="6B6B76"/>
+                </a:solidFill>
+                <a:latin typeface="Calibri" pitchFamily="34" charset="0"/>
+                <a:ea typeface="Calibri" pitchFamily="34" charset="-122"/>
+                <a:cs typeface="Calibri" pitchFamily="34" charset="-120"/>
+              </a:rPr>
+              <a:t>27–34</a:t>
+            </a:r>
+            <a:endParaRPr lang="en-US" sz="1250" dirty="0"/>
+          </a:p>
+        </p:txBody>
+      </p:sp>
+      <p:sp>
+        <p:nvSpPr>
+          <p:cNvPr id="71" name="Text 68"/>
+          <p:cNvSpPr/>
+          <p:nvPr/>
+        </p:nvSpPr>
+        <p:spPr>
+          <a:xfrm>
+            <a:off x="10588752" y="3685032"/>
+            <a:ext cx="1005840" cy="502920"/>
+          </a:xfrm>
+          <a:prstGeom prst="rect">
+            <a:avLst/>
+          </a:prstGeom>
+          <a:noFill/>
+          <a:ln/>
+        </p:spPr>
+        <p:txBody>
+          <a:bodyPr wrap="square" lIns="0" tIns="0" rIns="0" bIns="0" rtlCol="0" anchor="ctr"/>
+          <a:lstStyle/>
+          <a:p>
+            <a:pPr algn="l" indent="0" marL="0">
+              <a:buNone/>
+            </a:pPr>
+            <a:r>
+              <a:rPr lang="en-US" sz="1200" dirty="0">
+                <a:solidFill>
+                  <a:srgbClr val="6B6B76"/>
+                </a:solidFill>
+                <a:latin typeface="Calibri" pitchFamily="34" charset="0"/>
+                <a:ea typeface="Calibri" pitchFamily="34" charset="-122"/>
+                <a:cs typeface="Calibri" pitchFamily="34" charset="-120"/>
+              </a:rPr>
+              <a:t>pg</a:t>
+            </a:r>
+            <a:endParaRPr lang="en-US" sz="1200" dirty="0"/>
+          </a:p>
+        </p:txBody>
+      </p:sp>
+      <p:sp>
+        <p:nvSpPr>
+          <p:cNvPr id="72" name="Shape 69"/>
+          <p:cNvSpPr/>
+          <p:nvPr/>
+        </p:nvSpPr>
+        <p:spPr>
+          <a:xfrm>
+            <a:off x="6236208" y="4187952"/>
+            <a:ext cx="5449824" cy="502920"/>
+          </a:xfrm>
+          <a:prstGeom prst="rect">
+            <a:avLst/>
+          </a:prstGeom>
+          <a:solidFill>
+            <a:srgbClr val="FFF0F3"/>
+          </a:solidFill>
+          <a:ln/>
+        </p:spPr>
+      </p:sp>
+      <p:sp>
+        <p:nvSpPr>
+          <p:cNvPr id="73" name="Shape 70"/>
+          <p:cNvSpPr/>
+          <p:nvPr/>
+        </p:nvSpPr>
+        <p:spPr>
+          <a:xfrm>
+            <a:off x="6236208" y="4690872"/>
+            <a:ext cx="5449824" cy="0"/>
+          </a:xfrm>
+          <a:prstGeom prst="line">
+            <a:avLst/>
+          </a:prstGeom>
+          <a:noFill/>
+          <a:ln w="12700">
+            <a:solidFill>
+              <a:srgbClr val="FBD8DF"/>
+            </a:solidFill>
+            <a:prstDash val="solid"/>
+          </a:ln>
+        </p:spPr>
+      </p:sp>
+      <p:sp>
+        <p:nvSpPr>
+          <p:cNvPr id="74" name="Text 71"/>
+          <p:cNvSpPr/>
+          <p:nvPr/>
+        </p:nvSpPr>
+        <p:spPr>
+          <a:xfrm>
+            <a:off x="6373368" y="4187952"/>
+            <a:ext cx="1325880" cy="502920"/>
+          </a:xfrm>
+          <a:prstGeom prst="rect">
+            <a:avLst/>
+          </a:prstGeom>
+          <a:noFill/>
+          <a:ln/>
+        </p:spPr>
+        <p:txBody>
+          <a:bodyPr wrap="square" lIns="0" tIns="0" rIns="0" bIns="0" rtlCol="0" anchor="ctr"/>
+          <a:lstStyle/>
+          <a:p>
+            <a:pPr algn="l" indent="0" marL="0">
+              <a:buNone/>
+            </a:pPr>
+            <a:r>
+              <a:rPr lang="en-US" sz="1300" dirty="0">
+                <a:solidFill>
+                  <a:srgbClr val="2B2B33"/>
+                </a:solidFill>
+                <a:latin typeface="Calibri" pitchFamily="34" charset="0"/>
+                <a:ea typeface="Calibri" pitchFamily="34" charset="-122"/>
+                <a:cs typeface="Calibri" pitchFamily="34" charset="-120"/>
+              </a:rPr>
+              <a:t>MCHC</a:t>
+            </a:r>
+            <a:endParaRPr lang="en-US" sz="1300" dirty="0"/>
+          </a:p>
+        </p:txBody>
+      </p:sp>
+      <p:sp>
+        <p:nvSpPr>
+          <p:cNvPr id="75" name="Text 72"/>
+          <p:cNvSpPr/>
+          <p:nvPr/>
+        </p:nvSpPr>
+        <p:spPr>
+          <a:xfrm>
+            <a:off x="7717536" y="4187952"/>
+            <a:ext cx="1280160" cy="502920"/>
+          </a:xfrm>
+          <a:prstGeom prst="rect">
+            <a:avLst/>
+          </a:prstGeom>
+          <a:noFill/>
+          <a:ln/>
+        </p:spPr>
+        <p:txBody>
+          <a:bodyPr wrap="square" lIns="0" tIns="0" rIns="0" bIns="0" rtlCol="0" anchor="ctr"/>
+          <a:lstStyle/>
+          <a:p>
+            <a:pPr algn="l" indent="0" marL="0">
+              <a:buNone/>
+            </a:pPr>
+            <a:r>
+              <a:rPr lang="en-US" sz="1350" b="1" dirty="0">
+                <a:solidFill>
+                  <a:srgbClr val="2B2B33"/>
+                </a:solidFill>
+                <a:latin typeface="Calibri" pitchFamily="34" charset="0"/>
+                <a:ea typeface="Calibri" pitchFamily="34" charset="-122"/>
+                <a:cs typeface="Calibri" pitchFamily="34" charset="-120"/>
+              </a:rPr>
+              <a:t>35.0</a:t>
+            </a:r>
+            <a:endParaRPr lang="en-US" sz="1350" dirty="0"/>
+          </a:p>
+        </p:txBody>
+      </p:sp>
+      <p:sp>
+        <p:nvSpPr>
+          <p:cNvPr id="76" name="Text 73"/>
+          <p:cNvSpPr/>
+          <p:nvPr/>
+        </p:nvSpPr>
+        <p:spPr>
+          <a:xfrm>
+            <a:off x="9015984" y="4187952"/>
+            <a:ext cx="1554480" cy="502920"/>
+          </a:xfrm>
+          <a:prstGeom prst="rect">
+            <a:avLst/>
+          </a:prstGeom>
+          <a:noFill/>
+          <a:ln/>
+        </p:spPr>
+        <p:txBody>
+          <a:bodyPr wrap="square" lIns="0" tIns="0" rIns="0" bIns="0" rtlCol="0" anchor="ctr"/>
+          <a:lstStyle/>
+          <a:p>
+            <a:pPr algn="l" indent="0" marL="0">
+              <a:buNone/>
+            </a:pPr>
+            <a:r>
+              <a:rPr lang="en-US" sz="1250" dirty="0">
+                <a:solidFill>
+                  <a:srgbClr val="6B6B76"/>
+                </a:solidFill>
+                <a:latin typeface="Calibri" pitchFamily="34" charset="0"/>
+                <a:ea typeface="Calibri" pitchFamily="34" charset="-122"/>
+                <a:cs typeface="Calibri" pitchFamily="34" charset="-120"/>
+              </a:rPr>
+              <a:t>30–35</a:t>
+            </a:r>
+            <a:endParaRPr lang="en-US" sz="1250" dirty="0"/>
+          </a:p>
+        </p:txBody>
+      </p:sp>
+      <p:sp>
+        <p:nvSpPr>
+          <p:cNvPr id="77" name="Text 74"/>
+          <p:cNvSpPr/>
+          <p:nvPr/>
+        </p:nvSpPr>
+        <p:spPr>
+          <a:xfrm>
+            <a:off x="10588752" y="4187952"/>
+            <a:ext cx="1005840" cy="502920"/>
+          </a:xfrm>
+          <a:prstGeom prst="rect">
+            <a:avLst/>
+          </a:prstGeom>
+          <a:noFill/>
+          <a:ln/>
+        </p:spPr>
+        <p:txBody>
+          <a:bodyPr wrap="square" lIns="0" tIns="0" rIns="0" bIns="0" rtlCol="0" anchor="ctr"/>
+          <a:lstStyle/>
+          <a:p>
+            <a:pPr algn="l" indent="0" marL="0">
+              <a:buNone/>
+            </a:pPr>
+            <a:r>
+              <a:rPr lang="en-US" sz="1200" dirty="0">
+                <a:solidFill>
+                  <a:srgbClr val="6B6B76"/>
+                </a:solidFill>
+                <a:latin typeface="Calibri" pitchFamily="34" charset="0"/>
+                <a:ea typeface="Calibri" pitchFamily="34" charset="-122"/>
+                <a:cs typeface="Calibri" pitchFamily="34" charset="-120"/>
+              </a:rPr>
+              <a:t>g/dL</a:t>
+            </a:r>
+            <a:endParaRPr lang="en-US" sz="1200" dirty="0"/>
+          </a:p>
+        </p:txBody>
+      </p:sp>
+      <p:sp>
+        <p:nvSpPr>
+          <p:cNvPr id="78" name="Shape 75"/>
+          <p:cNvSpPr/>
+          <p:nvPr/>
+        </p:nvSpPr>
+        <p:spPr>
+          <a:xfrm>
+            <a:off x="6236208" y="5193792"/>
+            <a:ext cx="5449824" cy="0"/>
+          </a:xfrm>
+          <a:prstGeom prst="line">
+            <a:avLst/>
+          </a:prstGeom>
+          <a:noFill/>
+          <a:ln w="12700">
+            <a:solidFill>
+              <a:srgbClr val="FBD8DF"/>
+            </a:solidFill>
+            <a:prstDash val="solid"/>
+          </a:ln>
+        </p:spPr>
+      </p:sp>
+      <p:sp>
+        <p:nvSpPr>
+          <p:cNvPr id="79" name="Text 76"/>
+          <p:cNvSpPr/>
+          <p:nvPr/>
+        </p:nvSpPr>
+        <p:spPr>
+          <a:xfrm>
+            <a:off x="6373368" y="4690872"/>
+            <a:ext cx="1325880" cy="502920"/>
+          </a:xfrm>
+          <a:prstGeom prst="rect">
+            <a:avLst/>
+          </a:prstGeom>
+          <a:noFill/>
+          <a:ln/>
+        </p:spPr>
+        <p:txBody>
+          <a:bodyPr wrap="square" lIns="0" tIns="0" rIns="0" bIns="0" rtlCol="0" anchor="ctr"/>
+          <a:lstStyle/>
+          <a:p>
+            <a:pPr algn="l" indent="0" marL="0">
+              <a:buNone/>
+            </a:pPr>
+            <a:r>
+              <a:rPr lang="en-US" sz="1300" dirty="0">
+                <a:solidFill>
+                  <a:srgbClr val="2B2B33"/>
+                </a:solidFill>
+                <a:latin typeface="Calibri" pitchFamily="34" charset="0"/>
+                <a:ea typeface="Calibri" pitchFamily="34" charset="-122"/>
+                <a:cs typeface="Calibri" pitchFamily="34" charset="-120"/>
+              </a:rPr>
+              <a:t>HCT</a:t>
+            </a:r>
+            <a:endParaRPr lang="en-US" sz="1300" dirty="0"/>
+          </a:p>
+        </p:txBody>
+      </p:sp>
+      <p:sp>
+        <p:nvSpPr>
+          <p:cNvPr id="80" name="Text 77"/>
+          <p:cNvSpPr/>
+          <p:nvPr/>
+        </p:nvSpPr>
+        <p:spPr>
+          <a:xfrm>
+            <a:off x="7717536" y="4690872"/>
+            <a:ext cx="1280160" cy="502920"/>
+          </a:xfrm>
+          <a:prstGeom prst="rect">
+            <a:avLst/>
+          </a:prstGeom>
+          <a:noFill/>
+          <a:ln/>
+        </p:spPr>
+        <p:txBody>
+          <a:bodyPr wrap="square" lIns="0" tIns="0" rIns="0" bIns="0" rtlCol="0" anchor="ctr"/>
+          <a:lstStyle/>
+          <a:p>
+            <a:pPr algn="l" indent="0" marL="0">
+              <a:buNone/>
+            </a:pPr>
+            <a:r>
+              <a:rPr lang="en-US" sz="1350" b="1" dirty="0">
+                <a:solidFill>
+                  <a:srgbClr val="FF4D6D"/>
+                </a:solidFill>
+                <a:latin typeface="Calibri" pitchFamily="34" charset="0"/>
+                <a:ea typeface="Calibri" pitchFamily="34" charset="-122"/>
+                <a:cs typeface="Calibri" pitchFamily="34" charset="-120"/>
+              </a:rPr>
+              <a:t>30.3</a:t>
+            </a:r>
+            <a:pPr algn="l" indent="0" marL="0">
+              <a:buNone/>
+            </a:pPr>
+            <a:r>
+              <a:rPr lang="en-US" sz="950" b="1" dirty="0">
+                <a:solidFill>
+                  <a:srgbClr val="FF4D6D"/>
+                </a:solidFill>
+                <a:latin typeface="Calibri" pitchFamily="34" charset="0"/>
+                <a:ea typeface="Calibri" pitchFamily="34" charset="-122"/>
+                <a:cs typeface="Calibri" pitchFamily="34" charset="-120"/>
+              </a:rPr>
+              <a:t>  LOW</a:t>
+            </a:r>
+            <a:endParaRPr lang="en-US" sz="1350" dirty="0"/>
+          </a:p>
+        </p:txBody>
+      </p:sp>
+      <p:sp>
+        <p:nvSpPr>
+          <p:cNvPr id="81" name="Text 78"/>
+          <p:cNvSpPr/>
+          <p:nvPr/>
+        </p:nvSpPr>
+        <p:spPr>
+          <a:xfrm>
+            <a:off x="9015984" y="4690872"/>
+            <a:ext cx="1554480" cy="502920"/>
+          </a:xfrm>
+          <a:prstGeom prst="rect">
+            <a:avLst/>
+          </a:prstGeom>
+          <a:noFill/>
+          <a:ln/>
+        </p:spPr>
+        <p:txBody>
+          <a:bodyPr wrap="square" lIns="0" tIns="0" rIns="0" bIns="0" rtlCol="0" anchor="ctr"/>
+          <a:lstStyle/>
+          <a:p>
+            <a:pPr algn="l" indent="0" marL="0">
+              <a:buNone/>
+            </a:pPr>
+            <a:r>
+              <a:rPr lang="en-US" sz="1250" dirty="0">
+                <a:solidFill>
+                  <a:srgbClr val="6B6B76"/>
+                </a:solidFill>
+                <a:latin typeface="Calibri" pitchFamily="34" charset="0"/>
+                <a:ea typeface="Calibri" pitchFamily="34" charset="-122"/>
+                <a:cs typeface="Calibri" pitchFamily="34" charset="-120"/>
+              </a:rPr>
+              <a:t>35–47</a:t>
+            </a:r>
+            <a:endParaRPr lang="en-US" sz="1250" dirty="0"/>
+          </a:p>
+        </p:txBody>
+      </p:sp>
+      <p:sp>
+        <p:nvSpPr>
+          <p:cNvPr id="82" name="Text 79"/>
+          <p:cNvSpPr/>
+          <p:nvPr/>
+        </p:nvSpPr>
+        <p:spPr>
+          <a:xfrm>
+            <a:off x="10588752" y="4690872"/>
+            <a:ext cx="1005840" cy="502920"/>
+          </a:xfrm>
+          <a:prstGeom prst="rect">
+            <a:avLst/>
+          </a:prstGeom>
+          <a:noFill/>
+          <a:ln/>
+        </p:spPr>
+        <p:txBody>
+          <a:bodyPr wrap="square" lIns="0" tIns="0" rIns="0" bIns="0" rtlCol="0" anchor="ctr"/>
+          <a:lstStyle/>
+          <a:p>
+            <a:pPr algn="l" indent="0" marL="0">
+              <a:buNone/>
+            </a:pPr>
+            <a:r>
+              <a:rPr lang="en-US" sz="1200" dirty="0">
+                <a:solidFill>
+                  <a:srgbClr val="6B6B76"/>
+                </a:solidFill>
+                <a:latin typeface="Calibri" pitchFamily="34" charset="0"/>
+                <a:ea typeface="Calibri" pitchFamily="34" charset="-122"/>
+                <a:cs typeface="Calibri" pitchFamily="34" charset="-120"/>
+              </a:rPr>
+              <a:t>%</a:t>
+            </a:r>
+            <a:endParaRPr lang="en-US" sz="1200" dirty="0"/>
+          </a:p>
+        </p:txBody>
+      </p:sp>
+      <p:sp>
+        <p:nvSpPr>
+          <p:cNvPr id="83" name="Shape 80"/>
+          <p:cNvSpPr/>
+          <p:nvPr/>
+        </p:nvSpPr>
+        <p:spPr>
+          <a:xfrm>
+            <a:off x="502920" y="5431536"/>
+            <a:ext cx="11183112" cy="658368"/>
+          </a:xfrm>
+          <a:prstGeom prst="roundRect">
+            <a:avLst>
+              <a:gd name="adj" fmla="val 16667"/>
+            </a:avLst>
+          </a:prstGeom>
+          <a:solidFill>
+            <a:srgbClr val="590D22"/>
+          </a:solidFill>
+          <a:ln/>
+          <a:effectLst>
+            <a:outerShdw sx="100000" sy="100000" kx="0" ky="0" algn="bl" rotWithShape="0" blurRad="127000" dist="50800" dir="5400000">
+              <a:srgbClr val="C9A3AC">
+                <a:alpha val="45000"/>
+              </a:srgbClr>
+            </a:outerShdw>
+          </a:effectLst>
+        </p:spPr>
+      </p:sp>
+      <p:sp>
+        <p:nvSpPr>
+          <p:cNvPr id="84" name="Text 81"/>
+          <p:cNvSpPr/>
+          <p:nvPr/>
+        </p:nvSpPr>
+        <p:spPr>
+          <a:xfrm>
+            <a:off x="868680" y="5431536"/>
+            <a:ext cx="10515600" cy="658368"/>
+          </a:xfrm>
+          <a:prstGeom prst="rect">
+            <a:avLst/>
+          </a:prstGeom>
+          <a:noFill/>
+          <a:ln/>
+        </p:spPr>
+        <p:txBody>
+          <a:bodyPr wrap="square" lIns="0" tIns="0" rIns="0" bIns="0" rtlCol="0" anchor="ctr"/>
+          <a:lstStyle/>
+          <a:p>
+            <a:pPr algn="l" indent="0" marL="0">
+              <a:buNone/>
+            </a:pPr>
+            <a:r>
+              <a:rPr lang="en-US" sz="1500" b="1" spc="150" kern="0" dirty="0">
+                <a:solidFill>
+                  <a:srgbClr val="FF4D6D"/>
+                </a:solidFill>
+                <a:latin typeface="Calibri" pitchFamily="34" charset="0"/>
+                <a:ea typeface="Calibri" pitchFamily="34" charset="-122"/>
+                <a:cs typeface="Calibri" pitchFamily="34" charset="-120"/>
+              </a:rPr>
+              <a:t>IMPRESSION   </a:t>
+            </a:r>
+            <a:pPr algn="l" indent="0" marL="0">
+              <a:buNone/>
+            </a:pPr>
+            <a:r>
+              <a:rPr lang="en-US" sz="1500" dirty="0">
+                <a:solidFill>
+                  <a:srgbClr val="FFFFFF"/>
+                </a:solidFill>
+                <a:latin typeface="Calibri" pitchFamily="34" charset="0"/>
+                <a:ea typeface="Calibri" pitchFamily="34" charset="-122"/>
+                <a:cs typeface="Calibri" pitchFamily="34" charset="-120"/>
+              </a:rPr>
+              <a:t>Mild normocytic anaemia (low Hb, RBC &amp; HCT) with mild eosinophilia.</a:t>
+            </a:r>
+            <a:endParaRPr lang="en-US" sz="1500" dirty="0"/>
+          </a:p>
+        </p:txBody>
+      </p:sp>
+      <p:sp>
+        <p:nvSpPr>
+          <p:cNvPr id="85" name="Text 82"/>
+          <p:cNvSpPr/>
+          <p:nvPr/>
+        </p:nvSpPr>
+        <p:spPr>
+          <a:xfrm>
+            <a:off x="11277295" y="6355080"/>
+            <a:ext cx="548640" cy="320040"/>
+          </a:xfrm>
+          <a:prstGeom prst="rect">
+            <a:avLst/>
+          </a:prstGeom>
+          <a:noFill/>
+          <a:ln/>
+        </p:spPr>
+        <p:txBody>
+          <a:bodyPr wrap="square" rtlCol="0" anchor="t"/>
+          <a:lstStyle/>
+          <a:p>
+            <a:pPr algn="r" indent="0" marL="0">
+              <a:buNone/>
+            </a:pPr>
+            <a:r>
+              <a:rPr lang="en-US" sz="1100" b="1" dirty="0">
+                <a:solidFill>
+                  <a:srgbClr val="6B6B76"/>
+                </a:solidFill>
+                <a:latin typeface="Calibri" pitchFamily="34" charset="0"/>
+                <a:ea typeface="Calibri" pitchFamily="34" charset="-122"/>
+                <a:cs typeface="Calibri" pitchFamily="34" charset="-120"/>
+              </a:rPr>
+              <a:t>15</a:t>
+            </a:r>
+            <a:endParaRPr lang="en-US" sz="1100" dirty="0"/>
+          </a:p>
+        </p:txBody>
+      </p:sp>
+      <p:sp>
+        <p:nvSpPr>
+          <p:cNvPr id="86" name="Text 83"/>
+          <p:cNvSpPr/>
+          <p:nvPr/>
+        </p:nvSpPr>
+        <p:spPr>
+          <a:xfrm>
+            <a:off x="502920" y="6355080"/>
+            <a:ext cx="5486400" cy="320040"/>
+          </a:xfrm>
+          <a:prstGeom prst="rect">
+            <a:avLst/>
+          </a:prstGeom>
+          <a:noFill/>
+          <a:ln/>
+        </p:spPr>
+        <p:txBody>
+          <a:bodyPr wrap="square" rtlCol="0" anchor="t"/>
+          <a:lstStyle/>
+          <a:p>
+            <a:pPr algn="l" indent="0" marL="0">
+              <a:buNone/>
+            </a:pPr>
+            <a:r>
+              <a:rPr lang="en-US" sz="900" dirty="0">
+                <a:solidFill>
+                  <a:srgbClr val="6B6B76"/>
+                </a:solidFill>
+                <a:latin typeface="Calibri" pitchFamily="34" charset="0"/>
+                <a:ea typeface="Calibri" pitchFamily="34" charset="-122"/>
+                <a:cs typeface="Calibri" pitchFamily="34" charset="-120"/>
+              </a:rPr>
+              <a:t>Clinicopathological Conference</a:t>
+            </a:r>
+            <a:endParaRPr lang="en-US" sz="900" dirty="0"/>
+          </a:p>
+        </p:txBody>
+      </p:sp>
+    </p:spTree>
+  </p:cSld>
+  <p:clrMapOvr>
+    <a:masterClrMapping/>
+  </p:clrMapOvr>
+</p:sld>
+</file>
+
+<file path=ppt/slides/slide16.xml><?xml version="1.0" encoding="utf-8"?>
+<p:sld xmlns:a="http://schemas.openxmlformats.org/drawingml/2006/main" xmlns:r="http://schemas.openxmlformats.org/officeDocument/2006/relationships" xmlns:p="http://schemas.openxmlformats.org/presentationml/2006/main">
+  <p:cSld name="Slide 16">
+    <p:bg>
+      <p:bgPr>
+        <a:solidFill>
+          <a:srgbClr val="FFFFFF"/>
+        </a:solidFill>
+      </p:bgPr>
+    </p:bg>
+    <p:spTree>
+      <p:nvGrpSpPr>
+        <p:cNvPr id="1" name=""/>
+        <p:cNvGrpSpPr/>
+        <p:nvPr/>
+      </p:nvGrpSpPr>
+      <p:grpSpPr>
+        <a:xfrm>
+          <a:off x="0" y="0"/>
+          <a:ext cx="0" cy="0"/>
+          <a:chOff x="0" y="0"/>
+          <a:chExt cx="0" cy="0"/>
+        </a:xfrm>
+      </p:grpSpPr>
+      <p:sp>
+        <p:nvSpPr>
+          <p:cNvPr id="2" name="Shape 0"/>
+          <p:cNvSpPr/>
+          <p:nvPr/>
+        </p:nvSpPr>
+        <p:spPr>
+          <a:xfrm>
+            <a:off x="502920" y="457200"/>
+            <a:ext cx="868680" cy="868680"/>
+          </a:xfrm>
+          <a:prstGeom prst="ellipse">
+            <a:avLst/>
+          </a:prstGeom>
+          <a:solidFill>
+            <a:srgbClr val="FFF0F3"/>
+          </a:solidFill>
+          <a:ln w="12700">
+            <a:solidFill>
+              <a:srgbClr val="FBD8DF"/>
+            </a:solidFill>
+            <a:prstDash val="solid"/>
+          </a:ln>
+        </p:spPr>
+      </p:sp>
+      <p:pic>
+        <p:nvPicPr>
+          <p:cNvPr id="3" name="Image 0" descr="preencoded.png">    </p:cNvPr>
+          <p:cNvPicPr>
+            <a:picLocks noChangeAspect="1"/>
+          </p:cNvPicPr>
+          <p:nvPr/>
+        </p:nvPicPr>
+        <p:blipFill>
+          <a:blip r:embed="rId1"/>
+          <a:stretch>
+            <a:fillRect/>
+          </a:stretch>
+        </p:blipFill>
+        <p:spPr>
+          <a:xfrm>
+            <a:off x="694944" y="649224"/>
+            <a:ext cx="484632" cy="484632"/>
+          </a:xfrm>
+          <a:prstGeom prst="rect">
+            <a:avLst/>
+          </a:prstGeom>
+        </p:spPr>
+      </p:pic>
+      <p:sp>
+        <p:nvSpPr>
+          <p:cNvPr id="4" name="Text 1"/>
+          <p:cNvSpPr/>
+          <p:nvPr/>
+        </p:nvSpPr>
+        <p:spPr>
+          <a:xfrm>
+            <a:off x="1572768" y="502920"/>
+            <a:ext cx="9601200" cy="274320"/>
+          </a:xfrm>
+          <a:prstGeom prst="rect">
+            <a:avLst/>
+          </a:prstGeom>
+          <a:noFill/>
+          <a:ln/>
+        </p:spPr>
+        <p:txBody>
+          <a:bodyPr wrap="square" rtlCol="0" anchor="t"/>
+          <a:lstStyle/>
+          <a:p>
+            <a:pPr algn="l" indent="0" marL="0">
+              <a:buNone/>
+            </a:pPr>
+            <a:r>
+              <a:rPr lang="en-US" sz="1250" b="1" spc="200" kern="0" dirty="0">
+                <a:solidFill>
+                  <a:srgbClr val="A4133C"/>
+                </a:solidFill>
+                <a:latin typeface="Calibri" pitchFamily="34" charset="0"/>
+                <a:ea typeface="Calibri" pitchFamily="34" charset="-122"/>
+                <a:cs typeface="Calibri" pitchFamily="34" charset="-120"/>
+              </a:rPr>
+              <a:t>INVESTIGATIONS · ROUTINE CHEMISTRY</a:t>
+            </a:r>
+            <a:endParaRPr lang="en-US" sz="1250" dirty="0"/>
+          </a:p>
+        </p:txBody>
+      </p:sp>
+      <p:sp>
+        <p:nvSpPr>
+          <p:cNvPr id="5" name="Text 2"/>
+          <p:cNvSpPr/>
+          <p:nvPr/>
+        </p:nvSpPr>
+        <p:spPr>
+          <a:xfrm>
+            <a:off x="1554480" y="749808"/>
+            <a:ext cx="10058400" cy="640080"/>
+          </a:xfrm>
+          <a:prstGeom prst="rect">
+            <a:avLst/>
+          </a:prstGeom>
+          <a:noFill/>
+          <a:ln/>
+        </p:spPr>
+        <p:txBody>
+          <a:bodyPr wrap="square" rtlCol="0" anchor="t"/>
+          <a:lstStyle/>
+          <a:p>
+            <a:pPr algn="l" indent="0" marL="0">
+              <a:buNone/>
+            </a:pPr>
+            <a:r>
+              <a:rPr lang="en-US" sz="3000" b="1" dirty="0">
+                <a:solidFill>
+                  <a:srgbClr val="2B2B33"/>
+                </a:solidFill>
+                <a:latin typeface="Cambria" pitchFamily="34" charset="0"/>
+                <a:ea typeface="Cambria" pitchFamily="34" charset="-122"/>
+                <a:cs typeface="Cambria" pitchFamily="34" charset="-120"/>
+              </a:rPr>
+              <a:t>Renal, Electrolytes &amp; Viral Screen</a:t>
+            </a:r>
+            <a:endParaRPr lang="en-US" sz="3000" dirty="0"/>
+          </a:p>
+        </p:txBody>
+      </p:sp>
+      <p:sp>
+        <p:nvSpPr>
+          <p:cNvPr id="6" name="Text 3"/>
+          <p:cNvSpPr/>
+          <p:nvPr/>
+        </p:nvSpPr>
+        <p:spPr>
+          <a:xfrm>
+            <a:off x="8485632" y="1024128"/>
+            <a:ext cx="3200400" cy="274320"/>
+          </a:xfrm>
+          <a:prstGeom prst="rect">
+            <a:avLst/>
+          </a:prstGeom>
+          <a:noFill/>
+          <a:ln/>
+        </p:spPr>
+        <p:txBody>
+          <a:bodyPr wrap="square" rtlCol="0" anchor="t"/>
+          <a:lstStyle/>
+          <a:p>
+            <a:pPr algn="r" indent="0" marL="0">
+              <a:buNone/>
+            </a:pPr>
+            <a:r>
+              <a:rPr lang="en-US" sz="1200" i="1" dirty="0">
+                <a:solidFill>
+                  <a:srgbClr val="6B6B76"/>
+                </a:solidFill>
+                <a:latin typeface="Calibri" pitchFamily="34" charset="0"/>
+                <a:ea typeface="Calibri" pitchFamily="34" charset="-122"/>
+                <a:cs typeface="Calibri" pitchFamily="34" charset="-120"/>
+              </a:rPr>
+              <a:t>Sample date: 06-Jul-2026</a:t>
+            </a:r>
+            <a:endParaRPr lang="en-US" sz="1200" dirty="0"/>
+          </a:p>
+        </p:txBody>
+      </p:sp>
+      <p:sp>
+        <p:nvSpPr>
+          <p:cNvPr id="7" name="Shape 4"/>
+          <p:cNvSpPr/>
+          <p:nvPr/>
+        </p:nvSpPr>
+        <p:spPr>
+          <a:xfrm>
+            <a:off x="502920" y="1783080"/>
+            <a:ext cx="3611880" cy="3429000"/>
+          </a:xfrm>
+          <a:prstGeom prst="roundRect">
+            <a:avLst>
+              <a:gd name="adj" fmla="val 3200"/>
+            </a:avLst>
+          </a:prstGeom>
+          <a:solidFill>
+            <a:srgbClr val="FFF0F3"/>
+          </a:solidFill>
+          <a:ln w="12700">
+            <a:solidFill>
+              <a:srgbClr val="FBD8DF"/>
+            </a:solidFill>
+            <a:prstDash val="solid"/>
+          </a:ln>
+          <a:effectLst>
+            <a:outerShdw sx="100000" sy="100000" kx="0" ky="0" algn="bl" rotWithShape="0" blurRad="127000" dist="50800" dir="5400000">
+              <a:srgbClr val="C9A3AC">
+                <a:alpha val="45000"/>
+              </a:srgbClr>
+            </a:outerShdw>
+          </a:effectLst>
+        </p:spPr>
+      </p:sp>
+      <p:sp>
+        <p:nvSpPr>
+          <p:cNvPr id="8" name="Text 5"/>
+          <p:cNvSpPr/>
+          <p:nvPr/>
+        </p:nvSpPr>
+        <p:spPr>
+          <a:xfrm>
+            <a:off x="777240" y="2039112"/>
+            <a:ext cx="3063240" cy="274320"/>
+          </a:xfrm>
+          <a:prstGeom prst="rect">
+            <a:avLst/>
+          </a:prstGeom>
+          <a:noFill/>
+          <a:ln/>
+        </p:spPr>
+        <p:txBody>
+          <a:bodyPr wrap="square" lIns="0" tIns="0" rIns="0" bIns="0" rtlCol="0" anchor="t"/>
+          <a:lstStyle/>
+          <a:p>
+            <a:pPr algn="l" indent="0" marL="0">
+              <a:buNone/>
+            </a:pPr>
+            <a:r>
+              <a:rPr lang="en-US" sz="1250" b="1" spc="150" kern="0" dirty="0">
+                <a:solidFill>
+                  <a:srgbClr val="A4133C"/>
+                </a:solidFill>
+                <a:latin typeface="Calibri" pitchFamily="34" charset="0"/>
+                <a:ea typeface="Calibri" pitchFamily="34" charset="-122"/>
+                <a:cs typeface="Calibri" pitchFamily="34" charset="-120"/>
+              </a:rPr>
+              <a:t>RENAL FUNCTION</a:t>
+            </a:r>
+            <a:endParaRPr lang="en-US" sz="1250" dirty="0"/>
+          </a:p>
+        </p:txBody>
+      </p:sp>
+      <p:sp>
+        <p:nvSpPr>
+          <p:cNvPr id="9" name="Shape 6"/>
+          <p:cNvSpPr/>
+          <p:nvPr/>
+        </p:nvSpPr>
+        <p:spPr>
+          <a:xfrm>
+            <a:off x="758952" y="2496312"/>
+            <a:ext cx="3099816" cy="1152144"/>
+          </a:xfrm>
+          <a:prstGeom prst="roundRect">
+            <a:avLst>
+              <a:gd name="adj" fmla="val 6349"/>
+            </a:avLst>
+          </a:prstGeom>
+          <a:solidFill>
+            <a:srgbClr val="FFFFFF"/>
+          </a:solidFill>
+          <a:ln w="12700">
+            <a:solidFill>
+              <a:srgbClr val="FBD8DF"/>
+            </a:solidFill>
+            <a:prstDash val="solid"/>
+          </a:ln>
+        </p:spPr>
+      </p:sp>
+      <p:sp>
+        <p:nvSpPr>
+          <p:cNvPr id="10" name="Text 7"/>
+          <p:cNvSpPr/>
+          <p:nvPr/>
+        </p:nvSpPr>
+        <p:spPr>
+          <a:xfrm>
+            <a:off x="960120" y="2624328"/>
+            <a:ext cx="2423160" cy="292608"/>
+          </a:xfrm>
+          <a:prstGeom prst="rect">
+            <a:avLst/>
+          </a:prstGeom>
+          <a:noFill/>
+          <a:ln/>
+        </p:spPr>
+        <p:txBody>
+          <a:bodyPr wrap="square" lIns="0" tIns="0" rIns="0" bIns="0" rtlCol="0" anchor="t"/>
+          <a:lstStyle/>
+          <a:p>
+            <a:pPr algn="l" indent="0" marL="0">
+              <a:buNone/>
+            </a:pPr>
+            <a:r>
+              <a:rPr lang="en-US" sz="1350" b="1" dirty="0">
+                <a:solidFill>
+                  <a:srgbClr val="2B2B33"/>
+                </a:solidFill>
+                <a:latin typeface="Calibri" pitchFamily="34" charset="0"/>
+                <a:ea typeface="Calibri" pitchFamily="34" charset="-122"/>
+                <a:cs typeface="Calibri" pitchFamily="34" charset="-120"/>
+              </a:rPr>
+              <a:t>Urea</a:t>
+            </a:r>
+            <a:endParaRPr lang="en-US" sz="1350" dirty="0"/>
+          </a:p>
+        </p:txBody>
+      </p:sp>
+      <p:pic>
+        <p:nvPicPr>
+          <p:cNvPr id="11" name="Image 1" descr="preencoded.png">    </p:cNvPr>
+          <p:cNvPicPr>
+            <a:picLocks noChangeAspect="1"/>
+          </p:cNvPicPr>
+          <p:nvPr/>
+        </p:nvPicPr>
+        <p:blipFill>
+          <a:blip r:embed="rId2"/>
+          <a:stretch>
+            <a:fillRect/>
+          </a:stretch>
+        </p:blipFill>
+        <p:spPr>
+          <a:xfrm>
+            <a:off x="3364992" y="2642616"/>
+            <a:ext cx="256032" cy="256032"/>
+          </a:xfrm>
+          <a:prstGeom prst="rect">
+            <a:avLst/>
+          </a:prstGeom>
+        </p:spPr>
+      </p:pic>
+      <p:sp>
+        <p:nvSpPr>
+          <p:cNvPr id="12" name="Text 8"/>
+          <p:cNvSpPr/>
+          <p:nvPr/>
+        </p:nvSpPr>
+        <p:spPr>
+          <a:xfrm>
+            <a:off x="960120" y="2926080"/>
+            <a:ext cx="2651760" cy="411480"/>
+          </a:xfrm>
+          <a:prstGeom prst="rect">
+            <a:avLst/>
+          </a:prstGeom>
+          <a:noFill/>
+          <a:ln/>
+        </p:spPr>
+        <p:txBody>
+          <a:bodyPr wrap="square" lIns="0" tIns="0" rIns="0" bIns="0" rtlCol="0" anchor="t"/>
+          <a:lstStyle/>
+          <a:p>
+            <a:pPr algn="l" indent="0" marL="0">
+              <a:buNone/>
+            </a:pPr>
+            <a:r>
+              <a:rPr lang="en-US" sz="2100" b="1" dirty="0">
+                <a:solidFill>
+                  <a:srgbClr val="2B2B33"/>
+                </a:solidFill>
+                <a:latin typeface="Cambria" pitchFamily="34" charset="0"/>
+                <a:ea typeface="Cambria" pitchFamily="34" charset="-122"/>
+                <a:cs typeface="Cambria" pitchFamily="34" charset="-120"/>
+              </a:rPr>
+              <a:t>28</a:t>
+            </a:r>
+            <a:pPr algn="l" indent="0" marL="0">
+              <a:buNone/>
+            </a:pPr>
+            <a:r>
+              <a:rPr lang="en-US" sz="1250" dirty="0">
+                <a:solidFill>
+                  <a:srgbClr val="6B6B76"/>
+                </a:solidFill>
+                <a:latin typeface="Calibri" pitchFamily="34" charset="0"/>
+                <a:ea typeface="Calibri" pitchFamily="34" charset="-122"/>
+                <a:cs typeface="Calibri" pitchFamily="34" charset="-120"/>
+              </a:rPr>
+              <a:t>  mg/dL</a:t>
+            </a:r>
+            <a:endParaRPr lang="en-US" sz="2100" dirty="0"/>
+          </a:p>
+        </p:txBody>
+      </p:sp>
+      <p:sp>
+        <p:nvSpPr>
+          <p:cNvPr id="13" name="Text 9"/>
+          <p:cNvSpPr/>
+          <p:nvPr/>
+        </p:nvSpPr>
+        <p:spPr>
+          <a:xfrm>
+            <a:off x="960120" y="3355848"/>
+            <a:ext cx="2651760" cy="256032"/>
+          </a:xfrm>
+          <a:prstGeom prst="rect">
+            <a:avLst/>
+          </a:prstGeom>
+          <a:noFill/>
+          <a:ln/>
+        </p:spPr>
+        <p:txBody>
+          <a:bodyPr wrap="square" lIns="0" tIns="0" rIns="0" bIns="0" rtlCol="0" anchor="t"/>
+          <a:lstStyle/>
+          <a:p>
+            <a:pPr algn="l" indent="0" marL="0">
+              <a:buNone/>
+            </a:pPr>
+            <a:r>
+              <a:rPr lang="en-US" sz="1150" dirty="0">
+                <a:solidFill>
+                  <a:srgbClr val="6B6B76"/>
+                </a:solidFill>
+                <a:latin typeface="Calibri" pitchFamily="34" charset="0"/>
+                <a:ea typeface="Calibri" pitchFamily="34" charset="-122"/>
+                <a:cs typeface="Calibri" pitchFamily="34" charset="-120"/>
+              </a:rPr>
+              <a:t>Reference 16.6–48.6 mg/dL</a:t>
+            </a:r>
+            <a:endParaRPr lang="en-US" sz="1150" dirty="0"/>
+          </a:p>
+        </p:txBody>
+      </p:sp>
+      <p:sp>
+        <p:nvSpPr>
+          <p:cNvPr id="14" name="Shape 10"/>
+          <p:cNvSpPr/>
+          <p:nvPr/>
+        </p:nvSpPr>
+        <p:spPr>
+          <a:xfrm>
+            <a:off x="758952" y="3794760"/>
+            <a:ext cx="3099816" cy="1152144"/>
+          </a:xfrm>
+          <a:prstGeom prst="roundRect">
+            <a:avLst>
+              <a:gd name="adj" fmla="val 6349"/>
+            </a:avLst>
+          </a:prstGeom>
+          <a:solidFill>
+            <a:srgbClr val="FFFFFF"/>
+          </a:solidFill>
+          <a:ln w="12700">
+            <a:solidFill>
+              <a:srgbClr val="FBD8DF"/>
+            </a:solidFill>
+            <a:prstDash val="solid"/>
+          </a:ln>
+        </p:spPr>
+      </p:sp>
+      <p:sp>
+        <p:nvSpPr>
+          <p:cNvPr id="15" name="Text 11"/>
+          <p:cNvSpPr/>
+          <p:nvPr/>
+        </p:nvSpPr>
+        <p:spPr>
+          <a:xfrm>
+            <a:off x="960120" y="3922776"/>
+            <a:ext cx="2423160" cy="292608"/>
+          </a:xfrm>
+          <a:prstGeom prst="rect">
+            <a:avLst/>
+          </a:prstGeom>
+          <a:noFill/>
+          <a:ln/>
+        </p:spPr>
+        <p:txBody>
+          <a:bodyPr wrap="square" lIns="0" tIns="0" rIns="0" bIns="0" rtlCol="0" anchor="t"/>
+          <a:lstStyle/>
+          <a:p>
+            <a:pPr algn="l" indent="0" marL="0">
+              <a:buNone/>
+            </a:pPr>
+            <a:r>
+              <a:rPr lang="en-US" sz="1350" b="1" dirty="0">
+                <a:solidFill>
+                  <a:srgbClr val="2B2B33"/>
+                </a:solidFill>
+                <a:latin typeface="Calibri" pitchFamily="34" charset="0"/>
+                <a:ea typeface="Calibri" pitchFamily="34" charset="-122"/>
+                <a:cs typeface="Calibri" pitchFamily="34" charset="-120"/>
+              </a:rPr>
+              <a:t>Creatinine</a:t>
+            </a:r>
+            <a:endParaRPr lang="en-US" sz="1350" dirty="0"/>
+          </a:p>
+        </p:txBody>
+      </p:sp>
+      <p:pic>
+        <p:nvPicPr>
+          <p:cNvPr id="16" name="Image 2" descr="preencoded.png">    </p:cNvPr>
+          <p:cNvPicPr>
+            <a:picLocks noChangeAspect="1"/>
+          </p:cNvPicPr>
+          <p:nvPr/>
+        </p:nvPicPr>
+        <p:blipFill>
+          <a:blip r:embed="rId3"/>
+          <a:stretch>
+            <a:fillRect/>
+          </a:stretch>
+        </p:blipFill>
+        <p:spPr>
+          <a:xfrm>
+            <a:off x="3364992" y="3941064"/>
+            <a:ext cx="256032" cy="256032"/>
+          </a:xfrm>
+          <a:prstGeom prst="rect">
+            <a:avLst/>
+          </a:prstGeom>
+        </p:spPr>
+      </p:pic>
+      <p:sp>
+        <p:nvSpPr>
+          <p:cNvPr id="17" name="Text 12"/>
+          <p:cNvSpPr/>
+          <p:nvPr/>
+        </p:nvSpPr>
+        <p:spPr>
+          <a:xfrm>
+            <a:off x="960120" y="4224528"/>
+            <a:ext cx="2651760" cy="411480"/>
+          </a:xfrm>
+          <a:prstGeom prst="rect">
+            <a:avLst/>
+          </a:prstGeom>
+          <a:noFill/>
+          <a:ln/>
+        </p:spPr>
+        <p:txBody>
+          <a:bodyPr wrap="square" lIns="0" tIns="0" rIns="0" bIns="0" rtlCol="0" anchor="t"/>
+          <a:lstStyle/>
+          <a:p>
+            <a:pPr algn="l" indent="0" marL="0">
+              <a:buNone/>
+            </a:pPr>
+            <a:r>
+              <a:rPr lang="en-US" sz="2100" b="1" dirty="0">
+                <a:solidFill>
+                  <a:srgbClr val="2B2B33"/>
+                </a:solidFill>
+                <a:latin typeface="Cambria" pitchFamily="34" charset="0"/>
+                <a:ea typeface="Cambria" pitchFamily="34" charset="-122"/>
+                <a:cs typeface="Cambria" pitchFamily="34" charset="-120"/>
+              </a:rPr>
+              <a:t>0.8</a:t>
+            </a:r>
+            <a:pPr algn="l" indent="0" marL="0">
+              <a:buNone/>
+            </a:pPr>
+            <a:r>
+              <a:rPr lang="en-US" sz="1250" dirty="0">
+                <a:solidFill>
+                  <a:srgbClr val="6B6B76"/>
+                </a:solidFill>
+                <a:latin typeface="Calibri" pitchFamily="34" charset="0"/>
+                <a:ea typeface="Calibri" pitchFamily="34" charset="-122"/>
+                <a:cs typeface="Calibri" pitchFamily="34" charset="-120"/>
+              </a:rPr>
+              <a:t>  mg/dL</a:t>
+            </a:r>
+            <a:endParaRPr lang="en-US" sz="2100" dirty="0"/>
+          </a:p>
+        </p:txBody>
+      </p:sp>
+      <p:sp>
+        <p:nvSpPr>
+          <p:cNvPr id="18" name="Text 13"/>
+          <p:cNvSpPr/>
+          <p:nvPr/>
+        </p:nvSpPr>
+        <p:spPr>
+          <a:xfrm>
+            <a:off x="960120" y="4654296"/>
+            <a:ext cx="2651760" cy="256032"/>
+          </a:xfrm>
+          <a:prstGeom prst="rect">
+            <a:avLst/>
+          </a:prstGeom>
+          <a:noFill/>
+          <a:ln/>
+        </p:spPr>
+        <p:txBody>
+          <a:bodyPr wrap="square" lIns="0" tIns="0" rIns="0" bIns="0" rtlCol="0" anchor="t"/>
+          <a:lstStyle/>
+          <a:p>
+            <a:pPr algn="l" indent="0" marL="0">
+              <a:buNone/>
+            </a:pPr>
+            <a:r>
+              <a:rPr lang="en-US" sz="1150" dirty="0">
+                <a:solidFill>
+                  <a:srgbClr val="6B6B76"/>
+                </a:solidFill>
+                <a:latin typeface="Calibri" pitchFamily="34" charset="0"/>
+                <a:ea typeface="Calibri" pitchFamily="34" charset="-122"/>
+                <a:cs typeface="Calibri" pitchFamily="34" charset="-120"/>
+              </a:rPr>
+              <a:t>Reference 0.6–1.2 mg/dL</a:t>
+            </a:r>
+            <a:endParaRPr lang="en-US" sz="1150" dirty="0"/>
+          </a:p>
+        </p:txBody>
+      </p:sp>
+      <p:sp>
+        <p:nvSpPr>
+          <p:cNvPr id="19" name="Shape 14"/>
+          <p:cNvSpPr/>
+          <p:nvPr/>
+        </p:nvSpPr>
+        <p:spPr>
+          <a:xfrm>
+            <a:off x="4288536" y="1783080"/>
+            <a:ext cx="3611880" cy="3429000"/>
+          </a:xfrm>
+          <a:prstGeom prst="roundRect">
+            <a:avLst>
+              <a:gd name="adj" fmla="val 3200"/>
+            </a:avLst>
+          </a:prstGeom>
+          <a:solidFill>
+            <a:srgbClr val="FFF0F3"/>
+          </a:solidFill>
+          <a:ln w="12700">
+            <a:solidFill>
+              <a:srgbClr val="FBD8DF"/>
+            </a:solidFill>
+            <a:prstDash val="solid"/>
+          </a:ln>
+          <a:effectLst>
+            <a:outerShdw sx="100000" sy="100000" kx="0" ky="0" algn="bl" rotWithShape="0" blurRad="127000" dist="50800" dir="5400000">
+              <a:srgbClr val="C9A3AC">
+                <a:alpha val="45000"/>
+              </a:srgbClr>
+            </a:outerShdw>
+          </a:effectLst>
+        </p:spPr>
+      </p:sp>
+      <p:sp>
+        <p:nvSpPr>
+          <p:cNvPr id="20" name="Text 15"/>
+          <p:cNvSpPr/>
+          <p:nvPr/>
+        </p:nvSpPr>
+        <p:spPr>
+          <a:xfrm>
+            <a:off x="4562856" y="2039112"/>
+            <a:ext cx="3063240" cy="274320"/>
+          </a:xfrm>
+          <a:prstGeom prst="rect">
+            <a:avLst/>
+          </a:prstGeom>
+          <a:noFill/>
+          <a:ln/>
+        </p:spPr>
+        <p:txBody>
+          <a:bodyPr wrap="square" lIns="0" tIns="0" rIns="0" bIns="0" rtlCol="0" anchor="t"/>
+          <a:lstStyle/>
+          <a:p>
+            <a:pPr algn="l" indent="0" marL="0">
+              <a:buNone/>
+            </a:pPr>
+            <a:r>
+              <a:rPr lang="en-US" sz="1250" b="1" spc="150" kern="0" dirty="0">
+                <a:solidFill>
+                  <a:srgbClr val="A4133C"/>
+                </a:solidFill>
+                <a:latin typeface="Calibri" pitchFamily="34" charset="0"/>
+                <a:ea typeface="Calibri" pitchFamily="34" charset="-122"/>
+                <a:cs typeface="Calibri" pitchFamily="34" charset="-120"/>
+              </a:rPr>
+              <a:t>SERUM ELECTROLYTES</a:t>
+            </a:r>
+            <a:endParaRPr lang="en-US" sz="1250" dirty="0"/>
+          </a:p>
+        </p:txBody>
+      </p:sp>
+      <p:sp>
+        <p:nvSpPr>
+          <p:cNvPr id="21" name="Shape 16"/>
+          <p:cNvSpPr/>
+          <p:nvPr/>
+        </p:nvSpPr>
+        <p:spPr>
+          <a:xfrm>
+            <a:off x="4544568" y="2496312"/>
+            <a:ext cx="3099816" cy="1152144"/>
+          </a:xfrm>
+          <a:prstGeom prst="roundRect">
+            <a:avLst>
+              <a:gd name="adj" fmla="val 6349"/>
+            </a:avLst>
+          </a:prstGeom>
+          <a:solidFill>
+            <a:srgbClr val="FFFFFF"/>
+          </a:solidFill>
+          <a:ln w="12700">
+            <a:solidFill>
+              <a:srgbClr val="FBD8DF"/>
+            </a:solidFill>
+            <a:prstDash val="solid"/>
+          </a:ln>
+        </p:spPr>
+      </p:sp>
+      <p:sp>
+        <p:nvSpPr>
+          <p:cNvPr id="22" name="Text 17"/>
+          <p:cNvSpPr/>
+          <p:nvPr/>
+        </p:nvSpPr>
+        <p:spPr>
+          <a:xfrm>
+            <a:off x="4745736" y="2624328"/>
+            <a:ext cx="2423160" cy="292608"/>
+          </a:xfrm>
+          <a:prstGeom prst="rect">
+            <a:avLst/>
+          </a:prstGeom>
+          <a:noFill/>
+          <a:ln/>
+        </p:spPr>
+        <p:txBody>
+          <a:bodyPr wrap="square" lIns="0" tIns="0" rIns="0" bIns="0" rtlCol="0" anchor="t"/>
+          <a:lstStyle/>
+          <a:p>
+            <a:pPr algn="l" indent="0" marL="0">
+              <a:buNone/>
+            </a:pPr>
+            <a:r>
+              <a:rPr lang="en-US" sz="1350" b="1" dirty="0">
+                <a:solidFill>
+                  <a:srgbClr val="2B2B33"/>
+                </a:solidFill>
+                <a:latin typeface="Calibri" pitchFamily="34" charset="0"/>
+                <a:ea typeface="Calibri" pitchFamily="34" charset="-122"/>
+                <a:cs typeface="Calibri" pitchFamily="34" charset="-120"/>
+              </a:rPr>
+              <a:t>Sodium</a:t>
+            </a:r>
+            <a:endParaRPr lang="en-US" sz="1350" dirty="0"/>
+          </a:p>
+        </p:txBody>
+      </p:sp>
+      <p:pic>
+        <p:nvPicPr>
+          <p:cNvPr id="23" name="Image 3" descr="preencoded.png">    </p:cNvPr>
+          <p:cNvPicPr>
+            <a:picLocks noChangeAspect="1"/>
+          </p:cNvPicPr>
+          <p:nvPr/>
+        </p:nvPicPr>
+        <p:blipFill>
+          <a:blip r:embed="rId4"/>
+          <a:stretch>
+            <a:fillRect/>
+          </a:stretch>
+        </p:blipFill>
+        <p:spPr>
+          <a:xfrm>
+            <a:off x="7150608" y="2642616"/>
+            <a:ext cx="256032" cy="256032"/>
+          </a:xfrm>
+          <a:prstGeom prst="rect">
+            <a:avLst/>
+          </a:prstGeom>
+        </p:spPr>
+      </p:pic>
+      <p:sp>
+        <p:nvSpPr>
+          <p:cNvPr id="24" name="Text 18"/>
+          <p:cNvSpPr/>
+          <p:nvPr/>
+        </p:nvSpPr>
+        <p:spPr>
+          <a:xfrm>
+            <a:off x="4745736" y="2926080"/>
+            <a:ext cx="2651760" cy="411480"/>
+          </a:xfrm>
+          <a:prstGeom prst="rect">
+            <a:avLst/>
+          </a:prstGeom>
+          <a:noFill/>
+          <a:ln/>
+        </p:spPr>
+        <p:txBody>
+          <a:bodyPr wrap="square" lIns="0" tIns="0" rIns="0" bIns="0" rtlCol="0" anchor="t"/>
+          <a:lstStyle/>
+          <a:p>
+            <a:pPr algn="l" indent="0" marL="0">
+              <a:buNone/>
+            </a:pPr>
+            <a:r>
+              <a:rPr lang="en-US" sz="2100" b="1" dirty="0">
+                <a:solidFill>
+                  <a:srgbClr val="2B2B33"/>
+                </a:solidFill>
+                <a:latin typeface="Cambria" pitchFamily="34" charset="0"/>
+                <a:ea typeface="Cambria" pitchFamily="34" charset="-122"/>
+                <a:cs typeface="Cambria" pitchFamily="34" charset="-120"/>
+              </a:rPr>
+              <a:t>141</a:t>
+            </a:r>
+            <a:pPr algn="l" indent="0" marL="0">
+              <a:buNone/>
+            </a:pPr>
+            <a:r>
+              <a:rPr lang="en-US" sz="1250" dirty="0">
+                <a:solidFill>
+                  <a:srgbClr val="6B6B76"/>
+                </a:solidFill>
+                <a:latin typeface="Calibri" pitchFamily="34" charset="0"/>
+                <a:ea typeface="Calibri" pitchFamily="34" charset="-122"/>
+                <a:cs typeface="Calibri" pitchFamily="34" charset="-120"/>
+              </a:rPr>
+              <a:t>  mmol/L</a:t>
+            </a:r>
+            <a:endParaRPr lang="en-US" sz="2100" dirty="0"/>
+          </a:p>
+        </p:txBody>
+      </p:sp>
+      <p:sp>
+        <p:nvSpPr>
+          <p:cNvPr id="25" name="Text 19"/>
+          <p:cNvSpPr/>
+          <p:nvPr/>
+        </p:nvSpPr>
+        <p:spPr>
+          <a:xfrm>
+            <a:off x="4745736" y="3355848"/>
+            <a:ext cx="2651760" cy="256032"/>
+          </a:xfrm>
+          <a:prstGeom prst="rect">
+            <a:avLst/>
+          </a:prstGeom>
+          <a:noFill/>
+          <a:ln/>
+        </p:spPr>
+        <p:txBody>
+          <a:bodyPr wrap="square" lIns="0" tIns="0" rIns="0" bIns="0" rtlCol="0" anchor="t"/>
+          <a:lstStyle/>
+          <a:p>
+            <a:pPr algn="l" indent="0" marL="0">
+              <a:buNone/>
+            </a:pPr>
+            <a:r>
+              <a:rPr lang="en-US" sz="1150" dirty="0">
+                <a:solidFill>
+                  <a:srgbClr val="6B6B76"/>
+                </a:solidFill>
+                <a:latin typeface="Calibri" pitchFamily="34" charset="0"/>
+                <a:ea typeface="Calibri" pitchFamily="34" charset="-122"/>
+                <a:cs typeface="Calibri" pitchFamily="34" charset="-120"/>
+              </a:rPr>
+              <a:t>Reference 135–155 mmol/L</a:t>
+            </a:r>
+            <a:endParaRPr lang="en-US" sz="1150" dirty="0"/>
+          </a:p>
+        </p:txBody>
+      </p:sp>
+      <p:sp>
+        <p:nvSpPr>
+          <p:cNvPr id="26" name="Shape 20"/>
+          <p:cNvSpPr/>
+          <p:nvPr/>
+        </p:nvSpPr>
+        <p:spPr>
+          <a:xfrm>
+            <a:off x="4544568" y="3794760"/>
+            <a:ext cx="3099816" cy="1152144"/>
+          </a:xfrm>
+          <a:prstGeom prst="roundRect">
+            <a:avLst>
+              <a:gd name="adj" fmla="val 6349"/>
+            </a:avLst>
+          </a:prstGeom>
+          <a:solidFill>
+            <a:srgbClr val="FFFFFF"/>
+          </a:solidFill>
+          <a:ln w="12700">
+            <a:solidFill>
+              <a:srgbClr val="FBD8DF"/>
+            </a:solidFill>
+            <a:prstDash val="solid"/>
+          </a:ln>
+        </p:spPr>
+      </p:sp>
+      <p:sp>
+        <p:nvSpPr>
+          <p:cNvPr id="27" name="Text 21"/>
+          <p:cNvSpPr/>
+          <p:nvPr/>
+        </p:nvSpPr>
+        <p:spPr>
+          <a:xfrm>
+            <a:off x="4745736" y="3922776"/>
+            <a:ext cx="2423160" cy="292608"/>
+          </a:xfrm>
+          <a:prstGeom prst="rect">
+            <a:avLst/>
+          </a:prstGeom>
+          <a:noFill/>
+          <a:ln/>
+        </p:spPr>
+        <p:txBody>
+          <a:bodyPr wrap="square" lIns="0" tIns="0" rIns="0" bIns="0" rtlCol="0" anchor="t"/>
+          <a:lstStyle/>
+          <a:p>
+            <a:pPr algn="l" indent="0" marL="0">
+              <a:buNone/>
+            </a:pPr>
+            <a:r>
+              <a:rPr lang="en-US" sz="1350" b="1" dirty="0">
+                <a:solidFill>
+                  <a:srgbClr val="2B2B33"/>
+                </a:solidFill>
+                <a:latin typeface="Calibri" pitchFamily="34" charset="0"/>
+                <a:ea typeface="Calibri" pitchFamily="34" charset="-122"/>
+                <a:cs typeface="Calibri" pitchFamily="34" charset="-120"/>
+              </a:rPr>
+              <a:t>Potassium</a:t>
+            </a:r>
+            <a:endParaRPr lang="en-US" sz="1350" dirty="0"/>
+          </a:p>
+        </p:txBody>
+      </p:sp>
+      <p:pic>
+        <p:nvPicPr>
+          <p:cNvPr id="28" name="Image 4" descr="preencoded.png">    </p:cNvPr>
+          <p:cNvPicPr>
+            <a:picLocks noChangeAspect="1"/>
+          </p:cNvPicPr>
+          <p:nvPr/>
+        </p:nvPicPr>
+        <p:blipFill>
+          <a:blip r:embed="rId5"/>
+          <a:stretch>
+            <a:fillRect/>
+          </a:stretch>
+        </p:blipFill>
+        <p:spPr>
+          <a:xfrm>
+            <a:off x="7150608" y="3941064"/>
+            <a:ext cx="256032" cy="256032"/>
+          </a:xfrm>
+          <a:prstGeom prst="rect">
+            <a:avLst/>
+          </a:prstGeom>
+        </p:spPr>
+      </p:pic>
+      <p:sp>
+        <p:nvSpPr>
+          <p:cNvPr id="29" name="Text 22"/>
+          <p:cNvSpPr/>
+          <p:nvPr/>
+        </p:nvSpPr>
+        <p:spPr>
+          <a:xfrm>
+            <a:off x="4745736" y="4224528"/>
+            <a:ext cx="2651760" cy="411480"/>
+          </a:xfrm>
+          <a:prstGeom prst="rect">
+            <a:avLst/>
+          </a:prstGeom>
+          <a:noFill/>
+          <a:ln/>
+        </p:spPr>
+        <p:txBody>
+          <a:bodyPr wrap="square" lIns="0" tIns="0" rIns="0" bIns="0" rtlCol="0" anchor="t"/>
+          <a:lstStyle/>
+          <a:p>
+            <a:pPr algn="l" indent="0" marL="0">
+              <a:buNone/>
+            </a:pPr>
+            <a:r>
+              <a:rPr lang="en-US" sz="2100" b="1" dirty="0">
+                <a:solidFill>
+                  <a:srgbClr val="2B2B33"/>
+                </a:solidFill>
+                <a:latin typeface="Cambria" pitchFamily="34" charset="0"/>
+                <a:ea typeface="Cambria" pitchFamily="34" charset="-122"/>
+                <a:cs typeface="Cambria" pitchFamily="34" charset="-120"/>
+              </a:rPr>
+              <a:t>3.9</a:t>
+            </a:r>
+            <a:pPr algn="l" indent="0" marL="0">
+              <a:buNone/>
+            </a:pPr>
+            <a:r>
+              <a:rPr lang="en-US" sz="1250" dirty="0">
+                <a:solidFill>
+                  <a:srgbClr val="6B6B76"/>
+                </a:solidFill>
+                <a:latin typeface="Calibri" pitchFamily="34" charset="0"/>
+                <a:ea typeface="Calibri" pitchFamily="34" charset="-122"/>
+                <a:cs typeface="Calibri" pitchFamily="34" charset="-120"/>
+              </a:rPr>
+              <a:t>  mmol/L</a:t>
+            </a:r>
+            <a:endParaRPr lang="en-US" sz="2100" dirty="0"/>
+          </a:p>
+        </p:txBody>
+      </p:sp>
+      <p:sp>
+        <p:nvSpPr>
+          <p:cNvPr id="30" name="Text 23"/>
+          <p:cNvSpPr/>
+          <p:nvPr/>
+        </p:nvSpPr>
+        <p:spPr>
+          <a:xfrm>
+            <a:off x="4745736" y="4654296"/>
+            <a:ext cx="2651760" cy="256032"/>
+          </a:xfrm>
+          <a:prstGeom prst="rect">
+            <a:avLst/>
+          </a:prstGeom>
+          <a:noFill/>
+          <a:ln/>
+        </p:spPr>
+        <p:txBody>
+          <a:bodyPr wrap="square" lIns="0" tIns="0" rIns="0" bIns="0" rtlCol="0" anchor="t"/>
+          <a:lstStyle/>
+          <a:p>
+            <a:pPr algn="l" indent="0" marL="0">
+              <a:buNone/>
+            </a:pPr>
+            <a:r>
+              <a:rPr lang="en-US" sz="1150" dirty="0">
+                <a:solidFill>
+                  <a:srgbClr val="6B6B76"/>
+                </a:solidFill>
+                <a:latin typeface="Calibri" pitchFamily="34" charset="0"/>
+                <a:ea typeface="Calibri" pitchFamily="34" charset="-122"/>
+                <a:cs typeface="Calibri" pitchFamily="34" charset="-120"/>
+              </a:rPr>
+              <a:t>Reference 3.5–5.5 mmol/L</a:t>
+            </a:r>
+            <a:endParaRPr lang="en-US" sz="1150" dirty="0"/>
+          </a:p>
+        </p:txBody>
+      </p:sp>
+      <p:sp>
+        <p:nvSpPr>
+          <p:cNvPr id="31" name="Shape 24"/>
+          <p:cNvSpPr/>
+          <p:nvPr/>
+        </p:nvSpPr>
+        <p:spPr>
+          <a:xfrm>
+            <a:off x="8074152" y="1783080"/>
+            <a:ext cx="3611880" cy="3429000"/>
+          </a:xfrm>
+          <a:prstGeom prst="roundRect">
+            <a:avLst>
+              <a:gd name="adj" fmla="val 3200"/>
+            </a:avLst>
+          </a:prstGeom>
+          <a:solidFill>
+            <a:srgbClr val="FFF0F3"/>
+          </a:solidFill>
+          <a:ln w="12700">
+            <a:solidFill>
+              <a:srgbClr val="FBD8DF"/>
+            </a:solidFill>
+            <a:prstDash val="solid"/>
+          </a:ln>
+          <a:effectLst>
+            <a:outerShdw sx="100000" sy="100000" kx="0" ky="0" algn="bl" rotWithShape="0" blurRad="127000" dist="50800" dir="5400000">
+              <a:srgbClr val="C9A3AC">
+                <a:alpha val="45000"/>
+              </a:srgbClr>
+            </a:outerShdw>
+          </a:effectLst>
+        </p:spPr>
+      </p:sp>
+      <p:sp>
+        <p:nvSpPr>
+          <p:cNvPr id="32" name="Text 25"/>
+          <p:cNvSpPr/>
+          <p:nvPr/>
+        </p:nvSpPr>
+        <p:spPr>
+          <a:xfrm>
+            <a:off x="8348472" y="2039112"/>
+            <a:ext cx="3063240" cy="274320"/>
+          </a:xfrm>
+          <a:prstGeom prst="rect">
+            <a:avLst/>
+          </a:prstGeom>
+          <a:noFill/>
+          <a:ln/>
+        </p:spPr>
+        <p:txBody>
+          <a:bodyPr wrap="square" lIns="0" tIns="0" rIns="0" bIns="0" rtlCol="0" anchor="t"/>
+          <a:lstStyle/>
+          <a:p>
+            <a:pPr algn="l" indent="0" marL="0">
+              <a:buNone/>
+            </a:pPr>
+            <a:r>
+              <a:rPr lang="en-US" sz="1250" b="1" spc="150" kern="0" dirty="0">
+                <a:solidFill>
+                  <a:srgbClr val="A4133C"/>
+                </a:solidFill>
+                <a:latin typeface="Calibri" pitchFamily="34" charset="0"/>
+                <a:ea typeface="Calibri" pitchFamily="34" charset="-122"/>
+                <a:cs typeface="Calibri" pitchFamily="34" charset="-120"/>
+              </a:rPr>
+              <a:t>VIRAL SCREEN</a:t>
+            </a:r>
+            <a:endParaRPr lang="en-US" sz="1250" dirty="0"/>
+          </a:p>
+        </p:txBody>
+      </p:sp>
+      <p:sp>
+        <p:nvSpPr>
+          <p:cNvPr id="33" name="Shape 26"/>
+          <p:cNvSpPr/>
+          <p:nvPr/>
+        </p:nvSpPr>
+        <p:spPr>
+          <a:xfrm>
+            <a:off x="8330184" y="2532888"/>
+            <a:ext cx="3099816" cy="749808"/>
+          </a:xfrm>
+          <a:prstGeom prst="roundRect">
+            <a:avLst>
+              <a:gd name="adj" fmla="val 9756"/>
+            </a:avLst>
+          </a:prstGeom>
+          <a:solidFill>
+            <a:srgbClr val="FFFFFF"/>
+          </a:solidFill>
+          <a:ln w="12700">
+            <a:solidFill>
+              <a:srgbClr val="FBD8DF"/>
+            </a:solidFill>
+            <a:prstDash val="solid"/>
+          </a:ln>
+        </p:spPr>
+      </p:sp>
+      <p:pic>
+        <p:nvPicPr>
+          <p:cNvPr id="34" name="Image 5" descr="preencoded.png">    </p:cNvPr>
+          <p:cNvPicPr>
+            <a:picLocks noChangeAspect="1"/>
+          </p:cNvPicPr>
+          <p:nvPr/>
+        </p:nvPicPr>
+        <p:blipFill>
+          <a:blip r:embed="rId6"/>
+          <a:stretch>
+            <a:fillRect/>
+          </a:stretch>
+        </p:blipFill>
+        <p:spPr>
+          <a:xfrm>
+            <a:off x="8513064" y="2770632"/>
+            <a:ext cx="274320" cy="274320"/>
+          </a:xfrm>
+          <a:prstGeom prst="rect">
+            <a:avLst/>
+          </a:prstGeom>
+        </p:spPr>
+      </p:pic>
+      <p:sp>
+        <p:nvSpPr>
+          <p:cNvPr id="35" name="Text 27"/>
+          <p:cNvSpPr/>
+          <p:nvPr/>
+        </p:nvSpPr>
+        <p:spPr>
+          <a:xfrm>
+            <a:off x="8933688" y="2532888"/>
+            <a:ext cx="1417320" cy="749808"/>
+          </a:xfrm>
+          <a:prstGeom prst="rect">
+            <a:avLst/>
+          </a:prstGeom>
+          <a:noFill/>
+          <a:ln/>
+        </p:spPr>
+        <p:txBody>
+          <a:bodyPr wrap="square" lIns="0" tIns="0" rIns="0" bIns="0" rtlCol="0" anchor="ctr"/>
+          <a:lstStyle/>
+          <a:p>
+            <a:pPr algn="l" indent="0" marL="0">
+              <a:buNone/>
+            </a:pPr>
+            <a:r>
+              <a:rPr lang="en-US" sz="1400" b="1" dirty="0">
+                <a:solidFill>
+                  <a:srgbClr val="2B2B33"/>
+                </a:solidFill>
+                <a:latin typeface="Calibri" pitchFamily="34" charset="0"/>
+                <a:ea typeface="Calibri" pitchFamily="34" charset="-122"/>
+                <a:cs typeface="Calibri" pitchFamily="34" charset="-120"/>
+              </a:rPr>
+              <a:t>HBsAg</a:t>
+            </a:r>
+            <a:endParaRPr lang="en-US" sz="1400" dirty="0"/>
+          </a:p>
+        </p:txBody>
+      </p:sp>
+      <p:sp>
+        <p:nvSpPr>
+          <p:cNvPr id="36" name="Shape 28"/>
+          <p:cNvSpPr/>
+          <p:nvPr/>
+        </p:nvSpPr>
+        <p:spPr>
+          <a:xfrm>
+            <a:off x="10113264" y="2724912"/>
+            <a:ext cx="1097280" cy="365760"/>
+          </a:xfrm>
+          <a:prstGeom prst="roundRect">
+            <a:avLst>
+              <a:gd name="adj" fmla="val 50000"/>
+            </a:avLst>
+          </a:prstGeom>
+          <a:solidFill>
+            <a:srgbClr val="2E7D32"/>
+          </a:solidFill>
+          <a:ln/>
+        </p:spPr>
+      </p:sp>
+      <p:sp>
+        <p:nvSpPr>
+          <p:cNvPr id="37" name="Text 29"/>
+          <p:cNvSpPr/>
+          <p:nvPr/>
+        </p:nvSpPr>
+        <p:spPr>
+          <a:xfrm>
+            <a:off x="10113264" y="2724912"/>
+            <a:ext cx="1097280" cy="365760"/>
+          </a:xfrm>
+          <a:prstGeom prst="rect">
+            <a:avLst/>
+          </a:prstGeom>
+          <a:noFill/>
+          <a:ln/>
+        </p:spPr>
+        <p:txBody>
+          <a:bodyPr wrap="square" rtlCol="0" anchor="ctr"/>
+          <a:lstStyle/>
+          <a:p>
+            <a:pPr algn="ctr" indent="0" marL="0">
+              <a:buNone/>
+            </a:pPr>
+            <a:r>
+              <a:rPr lang="en-US" sz="1150" b="1" dirty="0">
+                <a:solidFill>
+                  <a:srgbClr val="FFFFFF"/>
+                </a:solidFill>
+                <a:latin typeface="Calibri" pitchFamily="34" charset="0"/>
+                <a:ea typeface="Calibri" pitchFamily="34" charset="-122"/>
+                <a:cs typeface="Calibri" pitchFamily="34" charset="-120"/>
+              </a:rPr>
+              <a:t>Negative</a:t>
+            </a:r>
+            <a:endParaRPr lang="en-US" sz="1150" dirty="0"/>
+          </a:p>
+        </p:txBody>
+      </p:sp>
+      <p:sp>
+        <p:nvSpPr>
+          <p:cNvPr id="38" name="Shape 30"/>
+          <p:cNvSpPr/>
+          <p:nvPr/>
+        </p:nvSpPr>
+        <p:spPr>
+          <a:xfrm>
+            <a:off x="8330184" y="3429000"/>
+            <a:ext cx="3099816" cy="749808"/>
+          </a:xfrm>
+          <a:prstGeom prst="roundRect">
+            <a:avLst>
+              <a:gd name="adj" fmla="val 9756"/>
+            </a:avLst>
+          </a:prstGeom>
+          <a:solidFill>
+            <a:srgbClr val="FFFFFF"/>
+          </a:solidFill>
+          <a:ln w="12700">
+            <a:solidFill>
+              <a:srgbClr val="FBD8DF"/>
+            </a:solidFill>
+            <a:prstDash val="solid"/>
+          </a:ln>
+        </p:spPr>
+      </p:sp>
+      <p:pic>
+        <p:nvPicPr>
+          <p:cNvPr id="39" name="Image 6" descr="preencoded.png">    </p:cNvPr>
+          <p:cNvPicPr>
+            <a:picLocks noChangeAspect="1"/>
+          </p:cNvPicPr>
+          <p:nvPr/>
+        </p:nvPicPr>
+        <p:blipFill>
+          <a:blip r:embed="rId7"/>
+          <a:stretch>
+            <a:fillRect/>
+          </a:stretch>
+        </p:blipFill>
+        <p:spPr>
+          <a:xfrm>
+            <a:off x="8513064" y="3666744"/>
+            <a:ext cx="274320" cy="274320"/>
+          </a:xfrm>
+          <a:prstGeom prst="rect">
+            <a:avLst/>
+          </a:prstGeom>
+        </p:spPr>
+      </p:pic>
+      <p:sp>
+        <p:nvSpPr>
+          <p:cNvPr id="40" name="Text 31"/>
+          <p:cNvSpPr/>
+          <p:nvPr/>
+        </p:nvSpPr>
+        <p:spPr>
+          <a:xfrm>
+            <a:off x="8933688" y="3429000"/>
+            <a:ext cx="1417320" cy="749808"/>
+          </a:xfrm>
+          <a:prstGeom prst="rect">
+            <a:avLst/>
+          </a:prstGeom>
+          <a:noFill/>
+          <a:ln/>
+        </p:spPr>
+        <p:txBody>
+          <a:bodyPr wrap="square" lIns="0" tIns="0" rIns="0" bIns="0" rtlCol="0" anchor="ctr"/>
+          <a:lstStyle/>
+          <a:p>
+            <a:pPr algn="l" indent="0" marL="0">
+              <a:buNone/>
+            </a:pPr>
+            <a:r>
+              <a:rPr lang="en-US" sz="1400" b="1" dirty="0">
+                <a:solidFill>
+                  <a:srgbClr val="2B2B33"/>
+                </a:solidFill>
+                <a:latin typeface="Calibri" pitchFamily="34" charset="0"/>
+                <a:ea typeface="Calibri" pitchFamily="34" charset="-122"/>
+                <a:cs typeface="Calibri" pitchFamily="34" charset="-120"/>
+              </a:rPr>
+              <a:t>HIV Ag/Ab</a:t>
+            </a:r>
+            <a:endParaRPr lang="en-US" sz="1400" dirty="0"/>
+          </a:p>
+        </p:txBody>
+      </p:sp>
+      <p:sp>
+        <p:nvSpPr>
+          <p:cNvPr id="41" name="Shape 32"/>
+          <p:cNvSpPr/>
+          <p:nvPr/>
+        </p:nvSpPr>
+        <p:spPr>
+          <a:xfrm>
+            <a:off x="10113264" y="3621024"/>
+            <a:ext cx="1097280" cy="365760"/>
+          </a:xfrm>
+          <a:prstGeom prst="roundRect">
+            <a:avLst>
+              <a:gd name="adj" fmla="val 50000"/>
+            </a:avLst>
+          </a:prstGeom>
+          <a:solidFill>
+            <a:srgbClr val="2E7D32"/>
+          </a:solidFill>
+          <a:ln/>
+        </p:spPr>
+      </p:sp>
+      <p:sp>
+        <p:nvSpPr>
+          <p:cNvPr id="42" name="Text 33"/>
+          <p:cNvSpPr/>
+          <p:nvPr/>
+        </p:nvSpPr>
+        <p:spPr>
+          <a:xfrm>
+            <a:off x="10113264" y="3621024"/>
+            <a:ext cx="1097280" cy="365760"/>
+          </a:xfrm>
+          <a:prstGeom prst="rect">
+            <a:avLst/>
+          </a:prstGeom>
+          <a:noFill/>
+          <a:ln/>
+        </p:spPr>
+        <p:txBody>
+          <a:bodyPr wrap="square" rtlCol="0" anchor="ctr"/>
+          <a:lstStyle/>
+          <a:p>
+            <a:pPr algn="ctr" indent="0" marL="0">
+              <a:buNone/>
+            </a:pPr>
+            <a:r>
+              <a:rPr lang="en-US" sz="1150" b="1" dirty="0">
+                <a:solidFill>
+                  <a:srgbClr val="FFFFFF"/>
+                </a:solidFill>
+                <a:latin typeface="Calibri" pitchFamily="34" charset="0"/>
+                <a:ea typeface="Calibri" pitchFamily="34" charset="-122"/>
+                <a:cs typeface="Calibri" pitchFamily="34" charset="-120"/>
+              </a:rPr>
+              <a:t>Negative</a:t>
+            </a:r>
+            <a:endParaRPr lang="en-US" sz="1150" dirty="0"/>
+          </a:p>
+        </p:txBody>
+      </p:sp>
+      <p:sp>
+        <p:nvSpPr>
+          <p:cNvPr id="43" name="Shape 34"/>
+          <p:cNvSpPr/>
+          <p:nvPr/>
+        </p:nvSpPr>
+        <p:spPr>
+          <a:xfrm>
+            <a:off x="8330184" y="4325112"/>
+            <a:ext cx="3099816" cy="749808"/>
+          </a:xfrm>
+          <a:prstGeom prst="roundRect">
+            <a:avLst>
+              <a:gd name="adj" fmla="val 9756"/>
+            </a:avLst>
+          </a:prstGeom>
+          <a:solidFill>
+            <a:srgbClr val="FFFFFF"/>
+          </a:solidFill>
+          <a:ln w="12700">
+            <a:solidFill>
+              <a:srgbClr val="FBD8DF"/>
+            </a:solidFill>
+            <a:prstDash val="solid"/>
+          </a:ln>
+        </p:spPr>
+      </p:sp>
+      <p:pic>
+        <p:nvPicPr>
+          <p:cNvPr id="44" name="Image 7" descr="preencoded.png">    </p:cNvPr>
+          <p:cNvPicPr>
+            <a:picLocks noChangeAspect="1"/>
+          </p:cNvPicPr>
+          <p:nvPr/>
+        </p:nvPicPr>
+        <p:blipFill>
+          <a:blip r:embed="rId8"/>
+          <a:stretch>
+            <a:fillRect/>
+          </a:stretch>
+        </p:blipFill>
+        <p:spPr>
+          <a:xfrm>
+            <a:off x="8513064" y="4562856"/>
+            <a:ext cx="274320" cy="274320"/>
+          </a:xfrm>
+          <a:prstGeom prst="rect">
+            <a:avLst/>
+          </a:prstGeom>
+        </p:spPr>
+      </p:pic>
+      <p:sp>
+        <p:nvSpPr>
+          <p:cNvPr id="45" name="Text 35"/>
+          <p:cNvSpPr/>
+          <p:nvPr/>
+        </p:nvSpPr>
+        <p:spPr>
+          <a:xfrm>
+            <a:off x="8933688" y="4325112"/>
+            <a:ext cx="1417320" cy="749808"/>
+          </a:xfrm>
+          <a:prstGeom prst="rect">
+            <a:avLst/>
+          </a:prstGeom>
+          <a:noFill/>
+          <a:ln/>
+        </p:spPr>
+        <p:txBody>
+          <a:bodyPr wrap="square" lIns="0" tIns="0" rIns="0" bIns="0" rtlCol="0" anchor="ctr"/>
+          <a:lstStyle/>
+          <a:p>
+            <a:pPr algn="l" indent="0" marL="0">
+              <a:buNone/>
+            </a:pPr>
+            <a:r>
+              <a:rPr lang="en-US" sz="1400" b="1" dirty="0">
+                <a:solidFill>
+                  <a:srgbClr val="2B2B33"/>
+                </a:solidFill>
+                <a:latin typeface="Calibri" pitchFamily="34" charset="0"/>
+                <a:ea typeface="Calibri" pitchFamily="34" charset="-122"/>
+                <a:cs typeface="Calibri" pitchFamily="34" charset="-120"/>
+              </a:rPr>
+              <a:t>HCV (ICT)</a:t>
+            </a:r>
+            <a:endParaRPr lang="en-US" sz="1400" dirty="0"/>
+          </a:p>
+        </p:txBody>
+      </p:sp>
+      <p:sp>
+        <p:nvSpPr>
+          <p:cNvPr id="46" name="Shape 36"/>
+          <p:cNvSpPr/>
+          <p:nvPr/>
+        </p:nvSpPr>
+        <p:spPr>
+          <a:xfrm>
+            <a:off x="10113264" y="4517136"/>
+            <a:ext cx="1097280" cy="365760"/>
+          </a:xfrm>
+          <a:prstGeom prst="roundRect">
+            <a:avLst>
+              <a:gd name="adj" fmla="val 50000"/>
+            </a:avLst>
+          </a:prstGeom>
+          <a:solidFill>
+            <a:srgbClr val="2E7D32"/>
+          </a:solidFill>
+          <a:ln/>
+        </p:spPr>
+      </p:sp>
+      <p:sp>
+        <p:nvSpPr>
+          <p:cNvPr id="47" name="Text 37"/>
+          <p:cNvSpPr/>
+          <p:nvPr/>
+        </p:nvSpPr>
+        <p:spPr>
+          <a:xfrm>
+            <a:off x="10113264" y="4517136"/>
+            <a:ext cx="1097280" cy="365760"/>
+          </a:xfrm>
+          <a:prstGeom prst="rect">
+            <a:avLst/>
+          </a:prstGeom>
+          <a:noFill/>
+          <a:ln/>
+        </p:spPr>
+        <p:txBody>
+          <a:bodyPr wrap="square" rtlCol="0" anchor="ctr"/>
+          <a:lstStyle/>
+          <a:p>
+            <a:pPr algn="ctr" indent="0" marL="0">
+              <a:buNone/>
+            </a:pPr>
+            <a:r>
+              <a:rPr lang="en-US" sz="1150" b="1" dirty="0">
+                <a:solidFill>
+                  <a:srgbClr val="FFFFFF"/>
+                </a:solidFill>
+                <a:latin typeface="Calibri" pitchFamily="34" charset="0"/>
+                <a:ea typeface="Calibri" pitchFamily="34" charset="-122"/>
+                <a:cs typeface="Calibri" pitchFamily="34" charset="-120"/>
+              </a:rPr>
+              <a:t>Negative</a:t>
+            </a:r>
+            <a:endParaRPr lang="en-US" sz="1150" dirty="0"/>
+          </a:p>
+        </p:txBody>
+      </p:sp>
+      <p:sp>
+        <p:nvSpPr>
+          <p:cNvPr id="48" name="Shape 38"/>
+          <p:cNvSpPr/>
+          <p:nvPr/>
+        </p:nvSpPr>
+        <p:spPr>
+          <a:xfrm>
+            <a:off x="502920" y="5431536"/>
+            <a:ext cx="11183112" cy="658368"/>
+          </a:xfrm>
+          <a:prstGeom prst="roundRect">
+            <a:avLst>
+              <a:gd name="adj" fmla="val 16667"/>
+            </a:avLst>
+          </a:prstGeom>
+          <a:solidFill>
+            <a:srgbClr val="590D22"/>
+          </a:solidFill>
+          <a:ln/>
+          <a:effectLst>
+            <a:outerShdw sx="100000" sy="100000" kx="0" ky="0" algn="bl" rotWithShape="0" blurRad="127000" dist="50800" dir="5400000">
+              <a:srgbClr val="C9A3AC">
+                <a:alpha val="45000"/>
+              </a:srgbClr>
+            </a:outerShdw>
+          </a:effectLst>
+        </p:spPr>
+      </p:sp>
+      <p:sp>
+        <p:nvSpPr>
+          <p:cNvPr id="49" name="Text 39"/>
+          <p:cNvSpPr/>
+          <p:nvPr/>
+        </p:nvSpPr>
+        <p:spPr>
+          <a:xfrm>
+            <a:off x="868680" y="5431536"/>
+            <a:ext cx="10515600" cy="658368"/>
+          </a:xfrm>
+          <a:prstGeom prst="rect">
+            <a:avLst/>
+          </a:prstGeom>
+          <a:noFill/>
+          <a:ln/>
+        </p:spPr>
+        <p:txBody>
+          <a:bodyPr wrap="square" lIns="0" tIns="0" rIns="0" bIns="0" rtlCol="0" anchor="ctr"/>
+          <a:lstStyle/>
+          <a:p>
+            <a:pPr algn="l" indent="0" marL="0">
+              <a:buNone/>
+            </a:pPr>
+            <a:r>
+              <a:rPr lang="en-US" sz="1500" b="1" spc="150" kern="0" dirty="0">
+                <a:solidFill>
+                  <a:srgbClr val="FF4D6D"/>
+                </a:solidFill>
+                <a:latin typeface="Calibri" pitchFamily="34" charset="0"/>
+                <a:ea typeface="Calibri" pitchFamily="34" charset="-122"/>
+                <a:cs typeface="Calibri" pitchFamily="34" charset="-120"/>
+              </a:rPr>
+              <a:t>IMPRESSION   </a:t>
+            </a:r>
+            <a:pPr algn="l" indent="0" marL="0">
+              <a:buNone/>
+            </a:pPr>
+            <a:r>
+              <a:rPr lang="en-US" sz="1500" dirty="0">
+                <a:solidFill>
+                  <a:srgbClr val="FFFFFF"/>
+                </a:solidFill>
+                <a:latin typeface="Calibri" pitchFamily="34" charset="0"/>
+                <a:ea typeface="Calibri" pitchFamily="34" charset="-122"/>
+                <a:cs typeface="Calibri" pitchFamily="34" charset="-120"/>
+              </a:rPr>
+              <a:t>Normal renal function and electrolytes; viral screen negative.</a:t>
+            </a:r>
+            <a:endParaRPr lang="en-US" sz="1500" dirty="0"/>
+          </a:p>
+        </p:txBody>
+      </p:sp>
+      <p:sp>
+        <p:nvSpPr>
+          <p:cNvPr id="50" name="Text 40"/>
+          <p:cNvSpPr/>
+          <p:nvPr/>
+        </p:nvSpPr>
+        <p:spPr>
+          <a:xfrm>
+            <a:off x="11277295" y="6355080"/>
+            <a:ext cx="548640" cy="320040"/>
+          </a:xfrm>
+          <a:prstGeom prst="rect">
+            <a:avLst/>
+          </a:prstGeom>
+          <a:noFill/>
+          <a:ln/>
+        </p:spPr>
+        <p:txBody>
+          <a:bodyPr wrap="square" rtlCol="0" anchor="t"/>
+          <a:lstStyle/>
+          <a:p>
+            <a:pPr algn="r" indent="0" marL="0">
+              <a:buNone/>
+            </a:pPr>
+            <a:r>
+              <a:rPr lang="en-US" sz="1100" b="1" dirty="0">
+                <a:solidFill>
+                  <a:srgbClr val="6B6B76"/>
+                </a:solidFill>
+                <a:latin typeface="Calibri" pitchFamily="34" charset="0"/>
+                <a:ea typeface="Calibri" pitchFamily="34" charset="-122"/>
+                <a:cs typeface="Calibri" pitchFamily="34" charset="-120"/>
+              </a:rPr>
+              <a:t>16</a:t>
+            </a:r>
+            <a:endParaRPr lang="en-US" sz="1100" dirty="0"/>
+          </a:p>
+        </p:txBody>
+      </p:sp>
+      <p:sp>
+        <p:nvSpPr>
+          <p:cNvPr id="51" name="Text 41"/>
+          <p:cNvSpPr/>
+          <p:nvPr/>
+        </p:nvSpPr>
+        <p:spPr>
+          <a:xfrm>
+            <a:off x="502920" y="6355080"/>
+            <a:ext cx="5486400" cy="320040"/>
+          </a:xfrm>
+          <a:prstGeom prst="rect">
+            <a:avLst/>
+          </a:prstGeom>
+          <a:noFill/>
+          <a:ln/>
+        </p:spPr>
+        <p:txBody>
+          <a:bodyPr wrap="square" rtlCol="0" anchor="t"/>
+          <a:lstStyle/>
+          <a:p>
+            <a:pPr algn="l" indent="0" marL="0">
+              <a:buNone/>
+            </a:pPr>
+            <a:r>
+              <a:rPr lang="en-US" sz="900" dirty="0">
+                <a:solidFill>
+                  <a:srgbClr val="6B6B76"/>
+                </a:solidFill>
+                <a:latin typeface="Calibri" pitchFamily="34" charset="0"/>
+                <a:ea typeface="Calibri" pitchFamily="34" charset="-122"/>
+                <a:cs typeface="Calibri" pitchFamily="34" charset="-120"/>
+              </a:rPr>
+              <a:t>Clinicopathological Conference</a:t>
+            </a:r>
+            <a:endParaRPr lang="en-US" sz="900" dirty="0"/>
+          </a:p>
+        </p:txBody>
+      </p:sp>
+    </p:spTree>
+  </p:cSld>
+  <p:clrMapOvr>
+    <a:masterClrMapping/>
+  </p:clrMapOvr>
+</p:sld>
+</file>
+
+<file path=ppt/slides/slide17.xml><?xml version="1.0" encoding="utf-8"?>
+<p:sld xmlns:a="http://schemas.openxmlformats.org/drawingml/2006/main" xmlns:r="http://schemas.openxmlformats.org/officeDocument/2006/relationships" xmlns:p="http://schemas.openxmlformats.org/presentationml/2006/main">
+  <p:cSld name="Slide 17">
+    <p:bg>
+      <p:bgPr>
+        <a:solidFill>
+          <a:srgbClr val="FFFFFF"/>
+        </a:solidFill>
+      </p:bgPr>
+    </p:bg>
+    <p:spTree>
+      <p:nvGrpSpPr>
+        <p:cNvPr id="1" name=""/>
+        <p:cNvGrpSpPr/>
+        <p:nvPr/>
+      </p:nvGrpSpPr>
+      <p:grpSpPr>
+        <a:xfrm>
+          <a:off x="0" y="0"/>
+          <a:ext cx="0" cy="0"/>
+          <a:chOff x="0" y="0"/>
+          <a:chExt cx="0" cy="0"/>
+        </a:xfrm>
+      </p:grpSpPr>
+      <p:sp>
+        <p:nvSpPr>
+          <p:cNvPr id="2" name="Shape 0"/>
+          <p:cNvSpPr/>
+          <p:nvPr/>
+        </p:nvSpPr>
+        <p:spPr>
+          <a:xfrm>
+            <a:off x="502920" y="457200"/>
+            <a:ext cx="868680" cy="868680"/>
+          </a:xfrm>
+          <a:prstGeom prst="ellipse">
+            <a:avLst/>
+          </a:prstGeom>
+          <a:solidFill>
+            <a:srgbClr val="FFF0F3"/>
+          </a:solidFill>
+          <a:ln w="12700">
+            <a:solidFill>
+              <a:srgbClr val="FBD8DF"/>
+            </a:solidFill>
+            <a:prstDash val="solid"/>
+          </a:ln>
+        </p:spPr>
+      </p:sp>
+      <p:pic>
+        <p:nvPicPr>
+          <p:cNvPr id="3" name="Image 0" descr="preencoded.png">    </p:cNvPr>
+          <p:cNvPicPr>
+            <a:picLocks noChangeAspect="1"/>
+          </p:cNvPicPr>
+          <p:nvPr/>
+        </p:nvPicPr>
+        <p:blipFill>
+          <a:blip r:embed="rId1"/>
+          <a:stretch>
+            <a:fillRect/>
+          </a:stretch>
+        </p:blipFill>
+        <p:spPr>
+          <a:xfrm>
+            <a:off x="694944" y="649224"/>
+            <a:ext cx="484632" cy="484632"/>
+          </a:xfrm>
+          <a:prstGeom prst="rect">
+            <a:avLst/>
+          </a:prstGeom>
+        </p:spPr>
+      </p:pic>
+      <p:sp>
+        <p:nvSpPr>
+          <p:cNvPr id="4" name="Text 1"/>
+          <p:cNvSpPr/>
+          <p:nvPr/>
+        </p:nvSpPr>
+        <p:spPr>
+          <a:xfrm>
+            <a:off x="1572768" y="502920"/>
+            <a:ext cx="9601200" cy="274320"/>
+          </a:xfrm>
+          <a:prstGeom prst="rect">
+            <a:avLst/>
+          </a:prstGeom>
+          <a:noFill/>
+          <a:ln/>
+        </p:spPr>
+        <p:txBody>
+          <a:bodyPr wrap="square" rtlCol="0" anchor="t"/>
+          <a:lstStyle/>
+          <a:p>
+            <a:pPr algn="l" indent="0" marL="0">
+              <a:buNone/>
+            </a:pPr>
+            <a:r>
+              <a:rPr lang="en-US" sz="1250" b="1" spc="200" kern="0" dirty="0">
+                <a:solidFill>
+                  <a:srgbClr val="A4133C"/>
+                </a:solidFill>
+                <a:latin typeface="Calibri" pitchFamily="34" charset="0"/>
+                <a:ea typeface="Calibri" pitchFamily="34" charset="-122"/>
+                <a:cs typeface="Calibri" pitchFamily="34" charset="-120"/>
+              </a:rPr>
+              <a:t>INVESTIGATIONS · ECHOCARDIOGRAPHY</a:t>
+            </a:r>
+            <a:endParaRPr lang="en-US" sz="1250" dirty="0"/>
+          </a:p>
+        </p:txBody>
+      </p:sp>
+      <p:sp>
+        <p:nvSpPr>
+          <p:cNvPr id="5" name="Text 2"/>
+          <p:cNvSpPr/>
+          <p:nvPr/>
+        </p:nvSpPr>
+        <p:spPr>
+          <a:xfrm>
+            <a:off x="1554480" y="749808"/>
+            <a:ext cx="10058400" cy="640080"/>
+          </a:xfrm>
+          <a:prstGeom prst="rect">
+            <a:avLst/>
+          </a:prstGeom>
+          <a:noFill/>
+          <a:ln/>
+        </p:spPr>
+        <p:txBody>
+          <a:bodyPr wrap="square" rtlCol="0" anchor="t"/>
+          <a:lstStyle/>
+          <a:p>
+            <a:pPr algn="l" indent="0" marL="0">
+              <a:buNone/>
+            </a:pPr>
+            <a:r>
+              <a:rPr lang="en-US" sz="3000" b="1" dirty="0">
+                <a:solidFill>
+                  <a:srgbClr val="2B2B33"/>
+                </a:solidFill>
+                <a:latin typeface="Cambria" pitchFamily="34" charset="0"/>
+                <a:ea typeface="Cambria" pitchFamily="34" charset="-122"/>
+                <a:cs typeface="Cambria" pitchFamily="34" charset="-120"/>
+              </a:rPr>
+              <a:t>Echocardiography</a:t>
+            </a:r>
+            <a:endParaRPr lang="en-US" sz="3000" dirty="0"/>
+          </a:p>
+        </p:txBody>
+      </p:sp>
+      <p:sp>
+        <p:nvSpPr>
+          <p:cNvPr id="6" name="Text 3"/>
+          <p:cNvSpPr/>
+          <p:nvPr/>
+        </p:nvSpPr>
+        <p:spPr>
+          <a:xfrm>
+            <a:off x="8028432" y="1024128"/>
+            <a:ext cx="3657600" cy="274320"/>
+          </a:xfrm>
+          <a:prstGeom prst="rect">
+            <a:avLst/>
+          </a:prstGeom>
+          <a:noFill/>
+          <a:ln/>
+        </p:spPr>
+        <p:txBody>
+          <a:bodyPr wrap="square" rtlCol="0" anchor="t"/>
+          <a:lstStyle/>
+          <a:p>
+            <a:pPr algn="r" indent="0" marL="0">
+              <a:buNone/>
+            </a:pPr>
+            <a:r>
+              <a:rPr lang="en-US" sz="1200" i="1" dirty="0">
+                <a:solidFill>
+                  <a:srgbClr val="6B6B76"/>
+                </a:solidFill>
+                <a:latin typeface="Calibri" pitchFamily="34" charset="0"/>
+                <a:ea typeface="Calibri" pitchFamily="34" charset="-122"/>
+                <a:cs typeface="Calibri" pitchFamily="34" charset="-120"/>
+              </a:rPr>
+              <a:t>27-Jan-2023 · Dr Ussama Munir</a:t>
+            </a:r>
+            <a:endParaRPr lang="en-US" sz="1200" dirty="0"/>
+          </a:p>
+        </p:txBody>
+      </p:sp>
+      <p:sp>
+        <p:nvSpPr>
+          <p:cNvPr id="7" name="Shape 4"/>
+          <p:cNvSpPr/>
+          <p:nvPr/>
+        </p:nvSpPr>
+        <p:spPr>
+          <a:xfrm>
+            <a:off x="502920" y="1783080"/>
+            <a:ext cx="3383280" cy="1783080"/>
+          </a:xfrm>
+          <a:prstGeom prst="roundRect">
+            <a:avLst>
+              <a:gd name="adj" fmla="val 6154"/>
+            </a:avLst>
+          </a:prstGeom>
+          <a:solidFill>
+            <a:srgbClr val="590D22"/>
+          </a:solidFill>
+          <a:ln/>
+          <a:effectLst>
+            <a:outerShdw sx="100000" sy="100000" kx="0" ky="0" algn="bl" rotWithShape="0" blurRad="127000" dist="50800" dir="5400000">
+              <a:srgbClr val="C9A3AC">
+                <a:alpha val="45000"/>
+              </a:srgbClr>
+            </a:outerShdw>
+          </a:effectLst>
+        </p:spPr>
+      </p:sp>
+      <p:sp>
+        <p:nvSpPr>
+          <p:cNvPr id="8" name="Text 5"/>
+          <p:cNvSpPr/>
+          <p:nvPr/>
+        </p:nvSpPr>
+        <p:spPr>
+          <a:xfrm>
+            <a:off x="777240" y="2011680"/>
+            <a:ext cx="2834640" cy="256032"/>
+          </a:xfrm>
+          <a:prstGeom prst="rect">
+            <a:avLst/>
+          </a:prstGeom>
+          <a:noFill/>
+          <a:ln/>
+        </p:spPr>
+        <p:txBody>
+          <a:bodyPr wrap="square" lIns="0" tIns="0" rIns="0" bIns="0" rtlCol="0" anchor="t"/>
+          <a:lstStyle/>
+          <a:p>
+            <a:pPr algn="l" indent="0" marL="0">
+              <a:buNone/>
+            </a:pPr>
+            <a:r>
+              <a:rPr lang="en-US" sz="1150" b="1" spc="150" kern="0" dirty="0">
+                <a:solidFill>
+                  <a:srgbClr val="FF4D6D"/>
+                </a:solidFill>
+                <a:latin typeface="Calibri" pitchFamily="34" charset="0"/>
+                <a:ea typeface="Calibri" pitchFamily="34" charset="-122"/>
+                <a:cs typeface="Calibri" pitchFamily="34" charset="-120"/>
+              </a:rPr>
+              <a:t>EJECTION FRACTION</a:t>
+            </a:r>
+            <a:endParaRPr lang="en-US" sz="1150" dirty="0"/>
+          </a:p>
+        </p:txBody>
+      </p:sp>
+      <p:sp>
+        <p:nvSpPr>
+          <p:cNvPr id="9" name="Text 6"/>
+          <p:cNvSpPr/>
+          <p:nvPr/>
+        </p:nvSpPr>
+        <p:spPr>
+          <a:xfrm>
+            <a:off x="777240" y="2304288"/>
+            <a:ext cx="2834640" cy="685800"/>
+          </a:xfrm>
+          <a:prstGeom prst="rect">
+            <a:avLst/>
+          </a:prstGeom>
+          <a:noFill/>
+          <a:ln/>
+        </p:spPr>
+        <p:txBody>
+          <a:bodyPr wrap="square" lIns="0" tIns="0" rIns="0" bIns="0" rtlCol="0" anchor="t"/>
+          <a:lstStyle/>
+          <a:p>
+            <a:pPr algn="l" indent="0" marL="0">
+              <a:buNone/>
+            </a:pPr>
+            <a:r>
+              <a:rPr lang="en-US" sz="4000" b="1" dirty="0">
+                <a:solidFill>
+                  <a:srgbClr val="FFFFFF"/>
+                </a:solidFill>
+                <a:latin typeface="Cambria" pitchFamily="34" charset="0"/>
+                <a:ea typeface="Cambria" pitchFamily="34" charset="-122"/>
+                <a:cs typeface="Cambria" pitchFamily="34" charset="-120"/>
+              </a:rPr>
+              <a:t>LVEF 65%</a:t>
+            </a:r>
+            <a:endParaRPr lang="en-US" sz="4000" dirty="0"/>
+          </a:p>
+        </p:txBody>
+      </p:sp>
+      <p:sp>
+        <p:nvSpPr>
+          <p:cNvPr id="10" name="Text 7"/>
+          <p:cNvSpPr/>
+          <p:nvPr/>
+        </p:nvSpPr>
+        <p:spPr>
+          <a:xfrm>
+            <a:off x="777240" y="3090672"/>
+            <a:ext cx="2834640" cy="274320"/>
+          </a:xfrm>
+          <a:prstGeom prst="rect">
+            <a:avLst/>
+          </a:prstGeom>
+          <a:noFill/>
+          <a:ln/>
+        </p:spPr>
+        <p:txBody>
+          <a:bodyPr wrap="square" lIns="0" tIns="0" rIns="0" bIns="0" rtlCol="0" anchor="t"/>
+          <a:lstStyle/>
+          <a:p>
+            <a:pPr algn="l" indent="0" marL="0">
+              <a:buNone/>
+            </a:pPr>
+            <a:r>
+              <a:rPr lang="en-US" sz="1300" i="1" dirty="0">
+                <a:solidFill>
+                  <a:srgbClr val="FBD8DF"/>
+                </a:solidFill>
+                <a:latin typeface="Calibri" pitchFamily="34" charset="0"/>
+                <a:ea typeface="Calibri" pitchFamily="34" charset="-122"/>
+                <a:cs typeface="Calibri" pitchFamily="34" charset="-120"/>
+              </a:rPr>
+              <a:t>(Normal 57–73%)</a:t>
+            </a:r>
+            <a:endParaRPr lang="en-US" sz="1300" dirty="0"/>
+          </a:p>
+        </p:txBody>
+      </p:sp>
+      <p:sp>
+        <p:nvSpPr>
+          <p:cNvPr id="11" name="Shape 8"/>
+          <p:cNvSpPr/>
+          <p:nvPr/>
+        </p:nvSpPr>
+        <p:spPr>
+          <a:xfrm>
+            <a:off x="502920" y="3703320"/>
+            <a:ext cx="3383280" cy="1645920"/>
+          </a:xfrm>
+          <a:prstGeom prst="roundRect">
+            <a:avLst>
+              <a:gd name="adj" fmla="val 6667"/>
+            </a:avLst>
+          </a:prstGeom>
+          <a:solidFill>
+            <a:srgbClr val="FFF0F3"/>
+          </a:solidFill>
+          <a:ln w="12700">
+            <a:solidFill>
+              <a:srgbClr val="FBD8DF"/>
+            </a:solidFill>
+            <a:prstDash val="solid"/>
+          </a:ln>
+          <a:effectLst>
+            <a:outerShdw sx="100000" sy="100000" kx="0" ky="0" algn="bl" rotWithShape="0" blurRad="127000" dist="50800" dir="5400000">
+              <a:srgbClr val="C9A3AC">
+                <a:alpha val="45000"/>
+              </a:srgbClr>
+            </a:outerShdw>
+          </a:effectLst>
+        </p:spPr>
+      </p:sp>
+      <p:sp>
+        <p:nvSpPr>
+          <p:cNvPr id="12" name="Text 9"/>
+          <p:cNvSpPr/>
+          <p:nvPr/>
+        </p:nvSpPr>
+        <p:spPr>
+          <a:xfrm>
+            <a:off x="777240" y="3931920"/>
+            <a:ext cx="2834640" cy="256032"/>
+          </a:xfrm>
+          <a:prstGeom prst="rect">
+            <a:avLst/>
+          </a:prstGeom>
+          <a:noFill/>
+          <a:ln/>
+        </p:spPr>
+        <p:txBody>
+          <a:bodyPr wrap="square" lIns="0" tIns="0" rIns="0" bIns="0" rtlCol="0" anchor="t"/>
+          <a:lstStyle/>
+          <a:p>
+            <a:pPr algn="l" indent="0" marL="0">
+              <a:buNone/>
+            </a:pPr>
+            <a:r>
+              <a:rPr lang="en-US" sz="1150" b="1" spc="150" kern="0" dirty="0">
+                <a:solidFill>
+                  <a:srgbClr val="A4133C"/>
+                </a:solidFill>
+                <a:latin typeface="Calibri" pitchFamily="34" charset="0"/>
+                <a:ea typeface="Calibri" pitchFamily="34" charset="-122"/>
+                <a:cs typeface="Calibri" pitchFamily="34" charset="-120"/>
+              </a:rPr>
+              <a:t>RELEVANT TO AF</a:t>
+            </a:r>
+            <a:endParaRPr lang="en-US" sz="1150" dirty="0"/>
+          </a:p>
+        </p:txBody>
+      </p:sp>
+      <p:pic>
+        <p:nvPicPr>
+          <p:cNvPr id="13" name="Image 1" descr="preencoded.png">    </p:cNvPr>
+          <p:cNvPicPr>
+            <a:picLocks noChangeAspect="1"/>
+          </p:cNvPicPr>
+          <p:nvPr/>
+        </p:nvPicPr>
+        <p:blipFill>
+          <a:blip r:embed="rId2"/>
+          <a:stretch>
+            <a:fillRect/>
+          </a:stretch>
+        </p:blipFill>
+        <p:spPr>
+          <a:xfrm>
+            <a:off x="777240" y="4315968"/>
+            <a:ext cx="384048" cy="384048"/>
+          </a:xfrm>
+          <a:prstGeom prst="rect">
+            <a:avLst/>
+          </a:prstGeom>
+        </p:spPr>
+      </p:pic>
+      <p:sp>
+        <p:nvSpPr>
+          <p:cNvPr id="14" name="Text 10"/>
+          <p:cNvSpPr/>
+          <p:nvPr/>
+        </p:nvSpPr>
+        <p:spPr>
+          <a:xfrm>
+            <a:off x="1298448" y="4224528"/>
+            <a:ext cx="2468880" cy="914400"/>
+          </a:xfrm>
+          <a:prstGeom prst="rect">
+            <a:avLst/>
+          </a:prstGeom>
+          <a:noFill/>
+          <a:ln/>
+        </p:spPr>
+        <p:txBody>
+          <a:bodyPr wrap="square" lIns="0" tIns="0" rIns="0" bIns="0" rtlCol="0" anchor="ctr"/>
+          <a:lstStyle/>
+          <a:p>
+            <a:pPr algn="l" indent="0" marL="0">
+              <a:lnSpc>
+                <a:spcPct val="100000"/>
+              </a:lnSpc>
+              <a:buNone/>
+            </a:pPr>
+            <a:r>
+              <a:rPr lang="en-US" sz="2300" b="1" dirty="0">
+                <a:solidFill>
+                  <a:srgbClr val="2B2B33"/>
+                </a:solidFill>
+                <a:latin typeface="Cambria" pitchFamily="34" charset="0"/>
+                <a:ea typeface="Cambria" pitchFamily="34" charset="-122"/>
+                <a:cs typeface="Cambria" pitchFamily="34" charset="-120"/>
+              </a:rPr>
+              <a:t>No clot in LA / LV</a:t>
+            </a:r>
+            <a:endParaRPr lang="en-US" sz="2300" dirty="0"/>
+          </a:p>
+        </p:txBody>
+      </p:sp>
+      <p:sp>
+        <p:nvSpPr>
+          <p:cNvPr id="15" name="Shape 11"/>
+          <p:cNvSpPr/>
+          <p:nvPr/>
+        </p:nvSpPr>
+        <p:spPr>
+          <a:xfrm>
+            <a:off x="4114800" y="1783080"/>
+            <a:ext cx="3703320" cy="3566160"/>
+          </a:xfrm>
+          <a:prstGeom prst="roundRect">
+            <a:avLst>
+              <a:gd name="adj" fmla="val 3077"/>
+            </a:avLst>
+          </a:prstGeom>
+          <a:solidFill>
+            <a:srgbClr val="FFFFFF"/>
+          </a:solidFill>
+          <a:ln w="12700">
+            <a:solidFill>
+              <a:srgbClr val="FBD8DF"/>
+            </a:solidFill>
+            <a:prstDash val="solid"/>
+          </a:ln>
+          <a:effectLst>
+            <a:outerShdw sx="100000" sy="100000" kx="0" ky="0" algn="bl" rotWithShape="0" blurRad="127000" dist="50800" dir="5400000">
+              <a:srgbClr val="C9A3AC">
+                <a:alpha val="45000"/>
+              </a:srgbClr>
+            </a:outerShdw>
+          </a:effectLst>
+        </p:spPr>
+      </p:sp>
+      <p:sp>
+        <p:nvSpPr>
+          <p:cNvPr id="16" name="Text 12"/>
+          <p:cNvSpPr/>
+          <p:nvPr/>
+        </p:nvSpPr>
+        <p:spPr>
+          <a:xfrm>
+            <a:off x="4343400" y="1956816"/>
+            <a:ext cx="3246120" cy="256032"/>
+          </a:xfrm>
+          <a:prstGeom prst="rect">
+            <a:avLst/>
+          </a:prstGeom>
+          <a:noFill/>
+          <a:ln/>
+        </p:spPr>
+        <p:txBody>
+          <a:bodyPr wrap="square" lIns="0" tIns="0" rIns="0" bIns="0" rtlCol="0" anchor="t"/>
+          <a:lstStyle/>
+          <a:p>
+            <a:pPr algn="l" indent="0" marL="0">
+              <a:buNone/>
+            </a:pPr>
+            <a:r>
+              <a:rPr lang="en-US" sz="1250" b="1" spc="150" kern="0" dirty="0">
+                <a:solidFill>
+                  <a:srgbClr val="A4133C"/>
+                </a:solidFill>
+                <a:latin typeface="Calibri" pitchFamily="34" charset="0"/>
+                <a:ea typeface="Calibri" pitchFamily="34" charset="-122"/>
+                <a:cs typeface="Calibri" pitchFamily="34" charset="-120"/>
+              </a:rPr>
+              <a:t>MEASUREMENTS</a:t>
+            </a:r>
+            <a:endParaRPr lang="en-US" sz="1250" dirty="0"/>
+          </a:p>
+        </p:txBody>
+      </p:sp>
+      <p:sp>
+        <p:nvSpPr>
+          <p:cNvPr id="17" name="Shape 13"/>
+          <p:cNvSpPr/>
+          <p:nvPr/>
+        </p:nvSpPr>
+        <p:spPr>
+          <a:xfrm>
+            <a:off x="4224528" y="2304288"/>
+            <a:ext cx="3483864" cy="420624"/>
+          </a:xfrm>
+          <a:prstGeom prst="rect">
+            <a:avLst/>
+          </a:prstGeom>
+          <a:solidFill>
+            <a:srgbClr val="FFF0F3"/>
+          </a:solidFill>
+          <a:ln/>
+        </p:spPr>
+      </p:sp>
+      <p:sp>
+        <p:nvSpPr>
+          <p:cNvPr id="18" name="Text 14"/>
+          <p:cNvSpPr/>
+          <p:nvPr/>
+        </p:nvSpPr>
+        <p:spPr>
+          <a:xfrm>
+            <a:off x="4343400" y="2304288"/>
+            <a:ext cx="1051560" cy="420624"/>
+          </a:xfrm>
+          <a:prstGeom prst="rect">
+            <a:avLst/>
+          </a:prstGeom>
+          <a:noFill/>
+          <a:ln/>
+        </p:spPr>
+        <p:txBody>
+          <a:bodyPr wrap="square" lIns="0" tIns="0" rIns="0" bIns="0" rtlCol="0" anchor="ctr"/>
+          <a:lstStyle/>
+          <a:p>
+            <a:pPr algn="l" indent="0" marL="0">
+              <a:buNone/>
+            </a:pPr>
+            <a:r>
+              <a:rPr lang="en-US" sz="1250" b="1" dirty="0">
+                <a:solidFill>
+                  <a:srgbClr val="2B2B33"/>
+                </a:solidFill>
+                <a:latin typeface="Calibri" pitchFamily="34" charset="0"/>
+                <a:ea typeface="Calibri" pitchFamily="34" charset="-122"/>
+                <a:cs typeface="Calibri" pitchFamily="34" charset="-120"/>
+              </a:rPr>
+              <a:t>LVEF</a:t>
+            </a:r>
+            <a:endParaRPr lang="en-US" sz="1250" dirty="0"/>
+          </a:p>
+        </p:txBody>
+      </p:sp>
+      <p:sp>
+        <p:nvSpPr>
+          <p:cNvPr id="19" name="Text 15"/>
+          <p:cNvSpPr/>
+          <p:nvPr/>
+        </p:nvSpPr>
+        <p:spPr>
+          <a:xfrm>
+            <a:off x="5440680" y="2304288"/>
+            <a:ext cx="685800" cy="420624"/>
+          </a:xfrm>
+          <a:prstGeom prst="rect">
+            <a:avLst/>
+          </a:prstGeom>
+          <a:noFill/>
+          <a:ln/>
+        </p:spPr>
+        <p:txBody>
+          <a:bodyPr wrap="square" lIns="0" tIns="0" rIns="0" bIns="0" rtlCol="0" anchor="ctr"/>
+          <a:lstStyle/>
+          <a:p>
+            <a:pPr algn="l" indent="0" marL="0">
+              <a:buNone/>
+            </a:pPr>
+            <a:r>
+              <a:rPr lang="en-US" sz="1350" b="1" dirty="0">
+                <a:solidFill>
+                  <a:srgbClr val="2B2B33"/>
+                </a:solidFill>
+                <a:latin typeface="Calibri" pitchFamily="34" charset="0"/>
+                <a:ea typeface="Calibri" pitchFamily="34" charset="-122"/>
+                <a:cs typeface="Calibri" pitchFamily="34" charset="-120"/>
+              </a:rPr>
+              <a:t>65</a:t>
+            </a:r>
+            <a:endParaRPr lang="en-US" sz="1350" dirty="0"/>
+          </a:p>
+        </p:txBody>
+      </p:sp>
+      <p:sp>
+        <p:nvSpPr>
+          <p:cNvPr id="20" name="Text 16"/>
+          <p:cNvSpPr/>
+          <p:nvPr/>
+        </p:nvSpPr>
+        <p:spPr>
+          <a:xfrm>
+            <a:off x="6172200" y="2304288"/>
+            <a:ext cx="868680" cy="420624"/>
+          </a:xfrm>
+          <a:prstGeom prst="rect">
+            <a:avLst/>
+          </a:prstGeom>
+          <a:noFill/>
+          <a:ln/>
+        </p:spPr>
+        <p:txBody>
+          <a:bodyPr wrap="square" lIns="0" tIns="0" rIns="0" bIns="0" rtlCol="0" anchor="ctr"/>
+          <a:lstStyle/>
+          <a:p>
+            <a:pPr algn="l" indent="0" marL="0">
+              <a:buNone/>
+            </a:pPr>
+            <a:r>
+              <a:rPr lang="en-US" sz="1150" dirty="0">
+                <a:solidFill>
+                  <a:srgbClr val="6B6B76"/>
+                </a:solidFill>
+                <a:latin typeface="Calibri" pitchFamily="34" charset="0"/>
+                <a:ea typeface="Calibri" pitchFamily="34" charset="-122"/>
+                <a:cs typeface="Calibri" pitchFamily="34" charset="-120"/>
+              </a:rPr>
+              <a:t>57–73</a:t>
+            </a:r>
+            <a:endParaRPr lang="en-US" sz="1150" dirty="0"/>
+          </a:p>
+        </p:txBody>
+      </p:sp>
+      <p:sp>
+        <p:nvSpPr>
+          <p:cNvPr id="21" name="Text 17"/>
+          <p:cNvSpPr/>
+          <p:nvPr/>
+        </p:nvSpPr>
+        <p:spPr>
+          <a:xfrm>
+            <a:off x="7059168" y="2304288"/>
+            <a:ext cx="685800" cy="420624"/>
+          </a:xfrm>
+          <a:prstGeom prst="rect">
+            <a:avLst/>
+          </a:prstGeom>
+          <a:noFill/>
+          <a:ln/>
+        </p:spPr>
+        <p:txBody>
+          <a:bodyPr wrap="square" lIns="0" tIns="0" rIns="0" bIns="0" rtlCol="0" anchor="ctr"/>
+          <a:lstStyle/>
+          <a:p>
+            <a:pPr algn="l" indent="0" marL="0">
+              <a:buNone/>
+            </a:pPr>
+            <a:r>
+              <a:rPr lang="en-US" sz="1150" dirty="0">
+                <a:solidFill>
+                  <a:srgbClr val="6B6B76"/>
+                </a:solidFill>
+                <a:latin typeface="Calibri" pitchFamily="34" charset="0"/>
+                <a:ea typeface="Calibri" pitchFamily="34" charset="-122"/>
+                <a:cs typeface="Calibri" pitchFamily="34" charset="-120"/>
+              </a:rPr>
+              <a:t>%</a:t>
+            </a:r>
+            <a:endParaRPr lang="en-US" sz="1150" dirty="0"/>
+          </a:p>
+        </p:txBody>
+      </p:sp>
+      <p:sp>
+        <p:nvSpPr>
+          <p:cNvPr id="22" name="Text 18"/>
+          <p:cNvSpPr/>
+          <p:nvPr/>
+        </p:nvSpPr>
+        <p:spPr>
+          <a:xfrm>
+            <a:off x="4343400" y="2724912"/>
+            <a:ext cx="1051560" cy="420624"/>
+          </a:xfrm>
+          <a:prstGeom prst="rect">
+            <a:avLst/>
+          </a:prstGeom>
+          <a:noFill/>
+          <a:ln/>
+        </p:spPr>
+        <p:txBody>
+          <a:bodyPr wrap="square" lIns="0" tIns="0" rIns="0" bIns="0" rtlCol="0" anchor="ctr"/>
+          <a:lstStyle/>
+          <a:p>
+            <a:pPr algn="l" indent="0" marL="0">
+              <a:buNone/>
+            </a:pPr>
+            <a:r>
+              <a:rPr lang="en-US" sz="1250" b="1" dirty="0">
+                <a:solidFill>
+                  <a:srgbClr val="2B2B33"/>
+                </a:solidFill>
+                <a:latin typeface="Calibri" pitchFamily="34" charset="0"/>
+                <a:ea typeface="Calibri" pitchFamily="34" charset="-122"/>
+                <a:cs typeface="Calibri" pitchFamily="34" charset="-120"/>
+              </a:rPr>
+              <a:t>LVIDD</a:t>
+            </a:r>
+            <a:endParaRPr lang="en-US" sz="1250" dirty="0"/>
+          </a:p>
+        </p:txBody>
+      </p:sp>
+      <p:sp>
+        <p:nvSpPr>
+          <p:cNvPr id="23" name="Text 19"/>
+          <p:cNvSpPr/>
+          <p:nvPr/>
+        </p:nvSpPr>
+        <p:spPr>
+          <a:xfrm>
+            <a:off x="5440680" y="2724912"/>
+            <a:ext cx="685800" cy="420624"/>
+          </a:xfrm>
+          <a:prstGeom prst="rect">
+            <a:avLst/>
+          </a:prstGeom>
+          <a:noFill/>
+          <a:ln/>
+        </p:spPr>
+        <p:txBody>
+          <a:bodyPr wrap="square" lIns="0" tIns="0" rIns="0" bIns="0" rtlCol="0" anchor="ctr"/>
+          <a:lstStyle/>
+          <a:p>
+            <a:pPr algn="l" indent="0" marL="0">
+              <a:buNone/>
+            </a:pPr>
+            <a:r>
+              <a:rPr lang="en-US" sz="1350" b="1" dirty="0">
+                <a:solidFill>
+                  <a:srgbClr val="2B2B33"/>
+                </a:solidFill>
+                <a:latin typeface="Calibri" pitchFamily="34" charset="0"/>
+                <a:ea typeface="Calibri" pitchFamily="34" charset="-122"/>
+                <a:cs typeface="Calibri" pitchFamily="34" charset="-120"/>
+              </a:rPr>
+              <a:t>45</a:t>
+            </a:r>
+            <a:endParaRPr lang="en-US" sz="1350" dirty="0"/>
+          </a:p>
+        </p:txBody>
+      </p:sp>
+      <p:sp>
+        <p:nvSpPr>
+          <p:cNvPr id="24" name="Text 20"/>
+          <p:cNvSpPr/>
+          <p:nvPr/>
+        </p:nvSpPr>
+        <p:spPr>
+          <a:xfrm>
+            <a:off x="6172200" y="2724912"/>
+            <a:ext cx="868680" cy="420624"/>
+          </a:xfrm>
+          <a:prstGeom prst="rect">
+            <a:avLst/>
+          </a:prstGeom>
+          <a:noFill/>
+          <a:ln/>
+        </p:spPr>
+        <p:txBody>
+          <a:bodyPr wrap="square" lIns="0" tIns="0" rIns="0" bIns="0" rtlCol="0" anchor="ctr"/>
+          <a:lstStyle/>
+          <a:p>
+            <a:pPr algn="l" indent="0" marL="0">
+              <a:buNone/>
+            </a:pPr>
+            <a:r>
+              <a:rPr lang="en-US" sz="1150" dirty="0">
+                <a:solidFill>
+                  <a:srgbClr val="6B6B76"/>
+                </a:solidFill>
+                <a:latin typeface="Calibri" pitchFamily="34" charset="0"/>
+                <a:ea typeface="Calibri" pitchFamily="34" charset="-122"/>
+                <a:cs typeface="Calibri" pitchFamily="34" charset="-120"/>
+              </a:rPr>
+              <a:t>35–56</a:t>
+            </a:r>
+            <a:endParaRPr lang="en-US" sz="1150" dirty="0"/>
+          </a:p>
+        </p:txBody>
+      </p:sp>
+      <p:sp>
+        <p:nvSpPr>
+          <p:cNvPr id="25" name="Text 21"/>
+          <p:cNvSpPr/>
+          <p:nvPr/>
+        </p:nvSpPr>
+        <p:spPr>
+          <a:xfrm>
+            <a:off x="7059168" y="2724912"/>
+            <a:ext cx="685800" cy="420624"/>
+          </a:xfrm>
+          <a:prstGeom prst="rect">
+            <a:avLst/>
+          </a:prstGeom>
+          <a:noFill/>
+          <a:ln/>
+        </p:spPr>
+        <p:txBody>
+          <a:bodyPr wrap="square" lIns="0" tIns="0" rIns="0" bIns="0" rtlCol="0" anchor="ctr"/>
+          <a:lstStyle/>
+          <a:p>
+            <a:pPr algn="l" indent="0" marL="0">
+              <a:buNone/>
+            </a:pPr>
+            <a:r>
+              <a:rPr lang="en-US" sz="1150" dirty="0">
+                <a:solidFill>
+                  <a:srgbClr val="6B6B76"/>
+                </a:solidFill>
+                <a:latin typeface="Calibri" pitchFamily="34" charset="0"/>
+                <a:ea typeface="Calibri" pitchFamily="34" charset="-122"/>
+                <a:cs typeface="Calibri" pitchFamily="34" charset="-120"/>
+              </a:rPr>
+              <a:t>mm</a:t>
+            </a:r>
+            <a:endParaRPr lang="en-US" sz="1150" dirty="0"/>
+          </a:p>
+        </p:txBody>
+      </p:sp>
+      <p:sp>
+        <p:nvSpPr>
+          <p:cNvPr id="26" name="Shape 22"/>
+          <p:cNvSpPr/>
+          <p:nvPr/>
+        </p:nvSpPr>
+        <p:spPr>
+          <a:xfrm>
+            <a:off x="4224528" y="3145536"/>
+            <a:ext cx="3483864" cy="420624"/>
+          </a:xfrm>
+          <a:prstGeom prst="rect">
+            <a:avLst/>
+          </a:prstGeom>
+          <a:solidFill>
+            <a:srgbClr val="FFF0F3"/>
+          </a:solidFill>
+          <a:ln/>
+        </p:spPr>
+      </p:sp>
+      <p:sp>
+        <p:nvSpPr>
+          <p:cNvPr id="27" name="Text 23"/>
+          <p:cNvSpPr/>
+          <p:nvPr/>
+        </p:nvSpPr>
+        <p:spPr>
+          <a:xfrm>
+            <a:off x="4343400" y="3145536"/>
+            <a:ext cx="1051560" cy="420624"/>
+          </a:xfrm>
+          <a:prstGeom prst="rect">
+            <a:avLst/>
+          </a:prstGeom>
+          <a:noFill/>
+          <a:ln/>
+        </p:spPr>
+        <p:txBody>
+          <a:bodyPr wrap="square" lIns="0" tIns="0" rIns="0" bIns="0" rtlCol="0" anchor="ctr"/>
+          <a:lstStyle/>
+          <a:p>
+            <a:pPr algn="l" indent="0" marL="0">
+              <a:buNone/>
+            </a:pPr>
+            <a:r>
+              <a:rPr lang="en-US" sz="1250" b="1" dirty="0">
+                <a:solidFill>
+                  <a:srgbClr val="2B2B33"/>
+                </a:solidFill>
+                <a:latin typeface="Calibri" pitchFamily="34" charset="0"/>
+                <a:ea typeface="Calibri" pitchFamily="34" charset="-122"/>
+                <a:cs typeface="Calibri" pitchFamily="34" charset="-120"/>
+              </a:rPr>
+              <a:t>IVS</a:t>
+            </a:r>
+            <a:endParaRPr lang="en-US" sz="1250" dirty="0"/>
+          </a:p>
+        </p:txBody>
+      </p:sp>
+      <p:sp>
+        <p:nvSpPr>
+          <p:cNvPr id="28" name="Text 24"/>
+          <p:cNvSpPr/>
+          <p:nvPr/>
+        </p:nvSpPr>
+        <p:spPr>
+          <a:xfrm>
+            <a:off x="5440680" y="3145536"/>
+            <a:ext cx="685800" cy="420624"/>
+          </a:xfrm>
+          <a:prstGeom prst="rect">
+            <a:avLst/>
+          </a:prstGeom>
+          <a:noFill/>
+          <a:ln/>
+        </p:spPr>
+        <p:txBody>
+          <a:bodyPr wrap="square" lIns="0" tIns="0" rIns="0" bIns="0" rtlCol="0" anchor="ctr"/>
+          <a:lstStyle/>
+          <a:p>
+            <a:pPr algn="l" indent="0" marL="0">
+              <a:buNone/>
+            </a:pPr>
+            <a:r>
+              <a:rPr lang="en-US" sz="1350" b="1" dirty="0">
+                <a:solidFill>
+                  <a:srgbClr val="2B2B33"/>
+                </a:solidFill>
+                <a:latin typeface="Calibri" pitchFamily="34" charset="0"/>
+                <a:ea typeface="Calibri" pitchFamily="34" charset="-122"/>
+                <a:cs typeface="Calibri" pitchFamily="34" charset="-120"/>
+              </a:rPr>
+              <a:t>7</a:t>
+            </a:r>
+            <a:endParaRPr lang="en-US" sz="1350" dirty="0"/>
+          </a:p>
+        </p:txBody>
+      </p:sp>
+      <p:sp>
+        <p:nvSpPr>
+          <p:cNvPr id="29" name="Text 25"/>
+          <p:cNvSpPr/>
+          <p:nvPr/>
+        </p:nvSpPr>
+        <p:spPr>
+          <a:xfrm>
+            <a:off x="6172200" y="3145536"/>
+            <a:ext cx="868680" cy="420624"/>
+          </a:xfrm>
+          <a:prstGeom prst="rect">
+            <a:avLst/>
+          </a:prstGeom>
+          <a:noFill/>
+          <a:ln/>
+        </p:spPr>
+        <p:txBody>
+          <a:bodyPr wrap="square" lIns="0" tIns="0" rIns="0" bIns="0" rtlCol="0" anchor="ctr"/>
+          <a:lstStyle/>
+          <a:p>
+            <a:pPr algn="l" indent="0" marL="0">
+              <a:buNone/>
+            </a:pPr>
+            <a:r>
+              <a:rPr lang="en-US" sz="1150" dirty="0">
+                <a:solidFill>
+                  <a:srgbClr val="6B6B76"/>
+                </a:solidFill>
+                <a:latin typeface="Calibri" pitchFamily="34" charset="0"/>
+                <a:ea typeface="Calibri" pitchFamily="34" charset="-122"/>
+                <a:cs typeface="Calibri" pitchFamily="34" charset="-120"/>
+              </a:rPr>
+              <a:t>6–11</a:t>
+            </a:r>
+            <a:endParaRPr lang="en-US" sz="1150" dirty="0"/>
+          </a:p>
+        </p:txBody>
+      </p:sp>
+      <p:sp>
+        <p:nvSpPr>
+          <p:cNvPr id="30" name="Text 26"/>
+          <p:cNvSpPr/>
+          <p:nvPr/>
+        </p:nvSpPr>
+        <p:spPr>
+          <a:xfrm>
+            <a:off x="7059168" y="3145536"/>
+            <a:ext cx="685800" cy="420624"/>
+          </a:xfrm>
+          <a:prstGeom prst="rect">
+            <a:avLst/>
+          </a:prstGeom>
+          <a:noFill/>
+          <a:ln/>
+        </p:spPr>
+        <p:txBody>
+          <a:bodyPr wrap="square" lIns="0" tIns="0" rIns="0" bIns="0" rtlCol="0" anchor="ctr"/>
+          <a:lstStyle/>
+          <a:p>
+            <a:pPr algn="l" indent="0" marL="0">
+              <a:buNone/>
+            </a:pPr>
+            <a:r>
+              <a:rPr lang="en-US" sz="1150" dirty="0">
+                <a:solidFill>
+                  <a:srgbClr val="6B6B76"/>
+                </a:solidFill>
+                <a:latin typeface="Calibri" pitchFamily="34" charset="0"/>
+                <a:ea typeface="Calibri" pitchFamily="34" charset="-122"/>
+                <a:cs typeface="Calibri" pitchFamily="34" charset="-120"/>
+              </a:rPr>
+              <a:t>mm</a:t>
+            </a:r>
+            <a:endParaRPr lang="en-US" sz="1150" dirty="0"/>
+          </a:p>
+        </p:txBody>
+      </p:sp>
+      <p:sp>
+        <p:nvSpPr>
+          <p:cNvPr id="31" name="Text 27"/>
+          <p:cNvSpPr/>
+          <p:nvPr/>
+        </p:nvSpPr>
+        <p:spPr>
+          <a:xfrm>
+            <a:off x="4343400" y="3566160"/>
+            <a:ext cx="1051560" cy="420624"/>
+          </a:xfrm>
+          <a:prstGeom prst="rect">
+            <a:avLst/>
+          </a:prstGeom>
+          <a:noFill/>
+          <a:ln/>
+        </p:spPr>
+        <p:txBody>
+          <a:bodyPr wrap="square" lIns="0" tIns="0" rIns="0" bIns="0" rtlCol="0" anchor="ctr"/>
+          <a:lstStyle/>
+          <a:p>
+            <a:pPr algn="l" indent="0" marL="0">
+              <a:buNone/>
+            </a:pPr>
+            <a:r>
+              <a:rPr lang="en-US" sz="1250" b="1" dirty="0">
+                <a:solidFill>
+                  <a:srgbClr val="2B2B33"/>
+                </a:solidFill>
+                <a:latin typeface="Calibri" pitchFamily="34" charset="0"/>
+                <a:ea typeface="Calibri" pitchFamily="34" charset="-122"/>
+                <a:cs typeface="Calibri" pitchFamily="34" charset="-120"/>
+              </a:rPr>
+              <a:t>LVPW</a:t>
+            </a:r>
+            <a:endParaRPr lang="en-US" sz="1250" dirty="0"/>
+          </a:p>
+        </p:txBody>
+      </p:sp>
+      <p:sp>
+        <p:nvSpPr>
+          <p:cNvPr id="32" name="Text 28"/>
+          <p:cNvSpPr/>
+          <p:nvPr/>
+        </p:nvSpPr>
+        <p:spPr>
+          <a:xfrm>
+            <a:off x="5440680" y="3566160"/>
+            <a:ext cx="685800" cy="420624"/>
+          </a:xfrm>
+          <a:prstGeom prst="rect">
+            <a:avLst/>
+          </a:prstGeom>
+          <a:noFill/>
+          <a:ln/>
+        </p:spPr>
+        <p:txBody>
+          <a:bodyPr wrap="square" lIns="0" tIns="0" rIns="0" bIns="0" rtlCol="0" anchor="ctr"/>
+          <a:lstStyle/>
+          <a:p>
+            <a:pPr algn="l" indent="0" marL="0">
+              <a:buNone/>
+            </a:pPr>
+            <a:r>
+              <a:rPr lang="en-US" sz="1350" b="1" dirty="0">
+                <a:solidFill>
+                  <a:srgbClr val="2B2B33"/>
+                </a:solidFill>
+                <a:latin typeface="Calibri" pitchFamily="34" charset="0"/>
+                <a:ea typeface="Calibri" pitchFamily="34" charset="-122"/>
+                <a:cs typeface="Calibri" pitchFamily="34" charset="-120"/>
+              </a:rPr>
+              <a:t>8</a:t>
+            </a:r>
+            <a:endParaRPr lang="en-US" sz="1350" dirty="0"/>
+          </a:p>
+        </p:txBody>
+      </p:sp>
+      <p:sp>
+        <p:nvSpPr>
+          <p:cNvPr id="33" name="Text 29"/>
+          <p:cNvSpPr/>
+          <p:nvPr/>
+        </p:nvSpPr>
+        <p:spPr>
+          <a:xfrm>
+            <a:off x="6172200" y="3566160"/>
+            <a:ext cx="868680" cy="420624"/>
+          </a:xfrm>
+          <a:prstGeom prst="rect">
+            <a:avLst/>
+          </a:prstGeom>
+          <a:noFill/>
+          <a:ln/>
+        </p:spPr>
+        <p:txBody>
+          <a:bodyPr wrap="square" lIns="0" tIns="0" rIns="0" bIns="0" rtlCol="0" anchor="ctr"/>
+          <a:lstStyle/>
+          <a:p>
+            <a:pPr algn="l" indent="0" marL="0">
+              <a:buNone/>
+            </a:pPr>
+            <a:r>
+              <a:rPr lang="en-US" sz="1150" dirty="0">
+                <a:solidFill>
+                  <a:srgbClr val="6B6B76"/>
+                </a:solidFill>
+                <a:latin typeface="Calibri" pitchFamily="34" charset="0"/>
+                <a:ea typeface="Calibri" pitchFamily="34" charset="-122"/>
+                <a:cs typeface="Calibri" pitchFamily="34" charset="-120"/>
+              </a:rPr>
+              <a:t>6–11</a:t>
+            </a:r>
+            <a:endParaRPr lang="en-US" sz="1150" dirty="0"/>
+          </a:p>
+        </p:txBody>
+      </p:sp>
+      <p:sp>
+        <p:nvSpPr>
+          <p:cNvPr id="34" name="Text 30"/>
+          <p:cNvSpPr/>
+          <p:nvPr/>
+        </p:nvSpPr>
+        <p:spPr>
+          <a:xfrm>
+            <a:off x="7059168" y="3566160"/>
+            <a:ext cx="685800" cy="420624"/>
+          </a:xfrm>
+          <a:prstGeom prst="rect">
+            <a:avLst/>
+          </a:prstGeom>
+          <a:noFill/>
+          <a:ln/>
+        </p:spPr>
+        <p:txBody>
+          <a:bodyPr wrap="square" lIns="0" tIns="0" rIns="0" bIns="0" rtlCol="0" anchor="ctr"/>
+          <a:lstStyle/>
+          <a:p>
+            <a:pPr algn="l" indent="0" marL="0">
+              <a:buNone/>
+            </a:pPr>
+            <a:r>
+              <a:rPr lang="en-US" sz="1150" dirty="0">
+                <a:solidFill>
+                  <a:srgbClr val="6B6B76"/>
+                </a:solidFill>
+                <a:latin typeface="Calibri" pitchFamily="34" charset="0"/>
+                <a:ea typeface="Calibri" pitchFamily="34" charset="-122"/>
+                <a:cs typeface="Calibri" pitchFamily="34" charset="-120"/>
+              </a:rPr>
+              <a:t>mm</a:t>
+            </a:r>
+            <a:endParaRPr lang="en-US" sz="1150" dirty="0"/>
+          </a:p>
+        </p:txBody>
+      </p:sp>
+      <p:sp>
+        <p:nvSpPr>
+          <p:cNvPr id="35" name="Shape 31"/>
+          <p:cNvSpPr/>
+          <p:nvPr/>
+        </p:nvSpPr>
+        <p:spPr>
+          <a:xfrm>
+            <a:off x="4224528" y="3986784"/>
+            <a:ext cx="3483864" cy="420624"/>
+          </a:xfrm>
+          <a:prstGeom prst="rect">
+            <a:avLst/>
+          </a:prstGeom>
+          <a:solidFill>
+            <a:srgbClr val="FFF0F3"/>
+          </a:solidFill>
+          <a:ln/>
+        </p:spPr>
+      </p:sp>
+      <p:sp>
+        <p:nvSpPr>
+          <p:cNvPr id="36" name="Text 32"/>
+          <p:cNvSpPr/>
+          <p:nvPr/>
+        </p:nvSpPr>
+        <p:spPr>
+          <a:xfrm>
+            <a:off x="4343400" y="3986784"/>
+            <a:ext cx="1051560" cy="420624"/>
+          </a:xfrm>
+          <a:prstGeom prst="rect">
+            <a:avLst/>
+          </a:prstGeom>
+          <a:noFill/>
+          <a:ln/>
+        </p:spPr>
+        <p:txBody>
+          <a:bodyPr wrap="square" lIns="0" tIns="0" rIns="0" bIns="0" rtlCol="0" anchor="ctr"/>
+          <a:lstStyle/>
+          <a:p>
+            <a:pPr algn="l" indent="0" marL="0">
+              <a:buNone/>
+            </a:pPr>
+            <a:r>
+              <a:rPr lang="en-US" sz="1250" b="1" dirty="0">
+                <a:solidFill>
+                  <a:srgbClr val="2B2B33"/>
+                </a:solidFill>
+                <a:latin typeface="Calibri" pitchFamily="34" charset="0"/>
+                <a:ea typeface="Calibri" pitchFamily="34" charset="-122"/>
+                <a:cs typeface="Calibri" pitchFamily="34" charset="-120"/>
+              </a:rPr>
+              <a:t>LAD</a:t>
+            </a:r>
+            <a:endParaRPr lang="en-US" sz="1250" dirty="0"/>
+          </a:p>
+        </p:txBody>
+      </p:sp>
+      <p:sp>
+        <p:nvSpPr>
+          <p:cNvPr id="37" name="Text 33"/>
+          <p:cNvSpPr/>
+          <p:nvPr/>
+        </p:nvSpPr>
+        <p:spPr>
+          <a:xfrm>
+            <a:off x="5440680" y="3986784"/>
+            <a:ext cx="685800" cy="420624"/>
+          </a:xfrm>
+          <a:prstGeom prst="rect">
+            <a:avLst/>
+          </a:prstGeom>
+          <a:noFill/>
+          <a:ln/>
+        </p:spPr>
+        <p:txBody>
+          <a:bodyPr wrap="square" lIns="0" tIns="0" rIns="0" bIns="0" rtlCol="0" anchor="ctr"/>
+          <a:lstStyle/>
+          <a:p>
+            <a:pPr algn="l" indent="0" marL="0">
+              <a:buNone/>
+            </a:pPr>
+            <a:r>
+              <a:rPr lang="en-US" sz="1350" b="1" dirty="0">
+                <a:solidFill>
+                  <a:srgbClr val="2B2B33"/>
+                </a:solidFill>
+                <a:latin typeface="Calibri" pitchFamily="34" charset="0"/>
+                <a:ea typeface="Calibri" pitchFamily="34" charset="-122"/>
+                <a:cs typeface="Calibri" pitchFamily="34" charset="-120"/>
+              </a:rPr>
+              <a:t>29</a:t>
+            </a:r>
+            <a:endParaRPr lang="en-US" sz="1350" dirty="0"/>
+          </a:p>
+        </p:txBody>
+      </p:sp>
+      <p:sp>
+        <p:nvSpPr>
+          <p:cNvPr id="38" name="Text 34"/>
+          <p:cNvSpPr/>
+          <p:nvPr/>
+        </p:nvSpPr>
+        <p:spPr>
+          <a:xfrm>
+            <a:off x="6172200" y="3986784"/>
+            <a:ext cx="868680" cy="420624"/>
+          </a:xfrm>
+          <a:prstGeom prst="rect">
+            <a:avLst/>
+          </a:prstGeom>
+          <a:noFill/>
+          <a:ln/>
+        </p:spPr>
+        <p:txBody>
+          <a:bodyPr wrap="square" lIns="0" tIns="0" rIns="0" bIns="0" rtlCol="0" anchor="ctr"/>
+          <a:lstStyle/>
+          <a:p>
+            <a:pPr algn="l" indent="0" marL="0">
+              <a:buNone/>
+            </a:pPr>
+            <a:r>
+              <a:rPr lang="en-US" sz="1150" dirty="0">
+                <a:solidFill>
+                  <a:srgbClr val="6B6B76"/>
+                </a:solidFill>
+                <a:latin typeface="Calibri" pitchFamily="34" charset="0"/>
+                <a:ea typeface="Calibri" pitchFamily="34" charset="-122"/>
+                <a:cs typeface="Calibri" pitchFamily="34" charset="-120"/>
+              </a:rPr>
+              <a:t>19–40</a:t>
+            </a:r>
+            <a:endParaRPr lang="en-US" sz="1150" dirty="0"/>
+          </a:p>
+        </p:txBody>
+      </p:sp>
+      <p:sp>
+        <p:nvSpPr>
+          <p:cNvPr id="39" name="Text 35"/>
+          <p:cNvSpPr/>
+          <p:nvPr/>
+        </p:nvSpPr>
+        <p:spPr>
+          <a:xfrm>
+            <a:off x="7059168" y="3986784"/>
+            <a:ext cx="685800" cy="420624"/>
+          </a:xfrm>
+          <a:prstGeom prst="rect">
+            <a:avLst/>
+          </a:prstGeom>
+          <a:noFill/>
+          <a:ln/>
+        </p:spPr>
+        <p:txBody>
+          <a:bodyPr wrap="square" lIns="0" tIns="0" rIns="0" bIns="0" rtlCol="0" anchor="ctr"/>
+          <a:lstStyle/>
+          <a:p>
+            <a:pPr algn="l" indent="0" marL="0">
+              <a:buNone/>
+            </a:pPr>
+            <a:r>
+              <a:rPr lang="en-US" sz="1150" dirty="0">
+                <a:solidFill>
+                  <a:srgbClr val="6B6B76"/>
+                </a:solidFill>
+                <a:latin typeface="Calibri" pitchFamily="34" charset="0"/>
+                <a:ea typeface="Calibri" pitchFamily="34" charset="-122"/>
+                <a:cs typeface="Calibri" pitchFamily="34" charset="-120"/>
+              </a:rPr>
+              <a:t>mm</a:t>
+            </a:r>
+            <a:endParaRPr lang="en-US" sz="1150" dirty="0"/>
+          </a:p>
+        </p:txBody>
+      </p:sp>
+      <p:sp>
+        <p:nvSpPr>
+          <p:cNvPr id="40" name="Text 36"/>
+          <p:cNvSpPr/>
+          <p:nvPr/>
+        </p:nvSpPr>
+        <p:spPr>
+          <a:xfrm>
+            <a:off x="4343400" y="4407408"/>
+            <a:ext cx="1051560" cy="420624"/>
+          </a:xfrm>
+          <a:prstGeom prst="rect">
+            <a:avLst/>
+          </a:prstGeom>
+          <a:noFill/>
+          <a:ln/>
+        </p:spPr>
+        <p:txBody>
+          <a:bodyPr wrap="square" lIns="0" tIns="0" rIns="0" bIns="0" rtlCol="0" anchor="ctr"/>
+          <a:lstStyle/>
+          <a:p>
+            <a:pPr algn="l" indent="0" marL="0">
+              <a:buNone/>
+            </a:pPr>
+            <a:r>
+              <a:rPr lang="en-US" sz="1250" b="1" dirty="0">
+                <a:solidFill>
+                  <a:srgbClr val="2B2B33"/>
+                </a:solidFill>
+                <a:latin typeface="Calibri" pitchFamily="34" charset="0"/>
+                <a:ea typeface="Calibri" pitchFamily="34" charset="-122"/>
+                <a:cs typeface="Calibri" pitchFamily="34" charset="-120"/>
+              </a:rPr>
+              <a:t>E/A</a:t>
+            </a:r>
+            <a:endParaRPr lang="en-US" sz="1250" dirty="0"/>
+          </a:p>
+        </p:txBody>
+      </p:sp>
+      <p:sp>
+        <p:nvSpPr>
+          <p:cNvPr id="41" name="Text 37"/>
+          <p:cNvSpPr/>
+          <p:nvPr/>
+        </p:nvSpPr>
+        <p:spPr>
+          <a:xfrm>
+            <a:off x="5440680" y="4407408"/>
+            <a:ext cx="685800" cy="420624"/>
+          </a:xfrm>
+          <a:prstGeom prst="rect">
+            <a:avLst/>
+          </a:prstGeom>
+          <a:noFill/>
+          <a:ln/>
+        </p:spPr>
+        <p:txBody>
+          <a:bodyPr wrap="square" lIns="0" tIns="0" rIns="0" bIns="0" rtlCol="0" anchor="ctr"/>
+          <a:lstStyle/>
+          <a:p>
+            <a:pPr algn="l" indent="0" marL="0">
+              <a:buNone/>
+            </a:pPr>
+            <a:r>
+              <a:rPr lang="en-US" sz="1350" b="1" dirty="0">
+                <a:solidFill>
+                  <a:srgbClr val="2B2B33"/>
+                </a:solidFill>
+                <a:latin typeface="Calibri" pitchFamily="34" charset="0"/>
+                <a:ea typeface="Calibri" pitchFamily="34" charset="-122"/>
+                <a:cs typeface="Calibri" pitchFamily="34" charset="-120"/>
+              </a:rPr>
+              <a:t>0.8</a:t>
+            </a:r>
+            <a:endParaRPr lang="en-US" sz="1350" dirty="0"/>
+          </a:p>
+        </p:txBody>
+      </p:sp>
+      <p:sp>
+        <p:nvSpPr>
+          <p:cNvPr id="42" name="Text 38"/>
+          <p:cNvSpPr/>
+          <p:nvPr/>
+        </p:nvSpPr>
+        <p:spPr>
+          <a:xfrm>
+            <a:off x="6172200" y="4407408"/>
+            <a:ext cx="868680" cy="420624"/>
+          </a:xfrm>
+          <a:prstGeom prst="rect">
+            <a:avLst/>
+          </a:prstGeom>
+          <a:noFill/>
+          <a:ln/>
+        </p:spPr>
+        <p:txBody>
+          <a:bodyPr wrap="square" lIns="0" tIns="0" rIns="0" bIns="0" rtlCol="0" anchor="ctr"/>
+          <a:lstStyle/>
+          <a:p>
+            <a:pPr algn="l" indent="0" marL="0">
+              <a:buNone/>
+            </a:pPr>
+            <a:r>
+              <a:rPr lang="en-US" sz="1150" dirty="0">
+                <a:solidFill>
+                  <a:srgbClr val="6B6B76"/>
+                </a:solidFill>
+                <a:latin typeface="Calibri" pitchFamily="34" charset="0"/>
+                <a:ea typeface="Calibri" pitchFamily="34" charset="-122"/>
+                <a:cs typeface="Calibri" pitchFamily="34" charset="-120"/>
+              </a:rPr>
+              <a:t>—</a:t>
+            </a:r>
+            <a:endParaRPr lang="en-US" sz="1150" dirty="0"/>
+          </a:p>
+        </p:txBody>
+      </p:sp>
+      <p:sp>
+        <p:nvSpPr>
+          <p:cNvPr id="43" name="Text 39"/>
+          <p:cNvSpPr/>
+          <p:nvPr/>
+        </p:nvSpPr>
+        <p:spPr>
+          <a:xfrm>
+            <a:off x="7059168" y="4407408"/>
+            <a:ext cx="685800" cy="420624"/>
+          </a:xfrm>
+          <a:prstGeom prst="rect">
+            <a:avLst/>
+          </a:prstGeom>
+          <a:noFill/>
+          <a:ln/>
+        </p:spPr>
+        <p:txBody>
+          <a:bodyPr wrap="square" lIns="0" tIns="0" rIns="0" bIns="0" rtlCol="0" anchor="ctr"/>
+          <a:lstStyle/>
+          <a:p>
+            <a:pPr algn="l" indent="0" marL="0">
+              <a:buNone/>
+            </a:pPr>
+            <a:endParaRPr lang="en-US" sz="1150" dirty="0"/>
+          </a:p>
+        </p:txBody>
+      </p:sp>
+      <p:sp>
+        <p:nvSpPr>
+          <p:cNvPr id="44" name="Shape 40"/>
+          <p:cNvSpPr/>
+          <p:nvPr/>
+        </p:nvSpPr>
+        <p:spPr>
+          <a:xfrm>
+            <a:off x="4224528" y="4828032"/>
+            <a:ext cx="3483864" cy="420624"/>
+          </a:xfrm>
+          <a:prstGeom prst="rect">
+            <a:avLst/>
+          </a:prstGeom>
+          <a:solidFill>
+            <a:srgbClr val="FFF0F3"/>
+          </a:solidFill>
+          <a:ln/>
+        </p:spPr>
+      </p:sp>
+      <p:sp>
+        <p:nvSpPr>
+          <p:cNvPr id="45" name="Text 41"/>
+          <p:cNvSpPr/>
+          <p:nvPr/>
+        </p:nvSpPr>
+        <p:spPr>
+          <a:xfrm>
+            <a:off x="4343400" y="4828032"/>
+            <a:ext cx="1051560" cy="420624"/>
+          </a:xfrm>
+          <a:prstGeom prst="rect">
+            <a:avLst/>
+          </a:prstGeom>
+          <a:noFill/>
+          <a:ln/>
+        </p:spPr>
+        <p:txBody>
+          <a:bodyPr wrap="square" lIns="0" tIns="0" rIns="0" bIns="0" rtlCol="0" anchor="ctr"/>
+          <a:lstStyle/>
+          <a:p>
+            <a:pPr algn="l" indent="0" marL="0">
+              <a:buNone/>
+            </a:pPr>
+            <a:r>
+              <a:rPr lang="en-US" sz="1250" b="1" dirty="0">
+                <a:solidFill>
+                  <a:srgbClr val="2B2B33"/>
+                </a:solidFill>
+                <a:latin typeface="Calibri" pitchFamily="34" charset="0"/>
+                <a:ea typeface="Calibri" pitchFamily="34" charset="-122"/>
+                <a:cs typeface="Calibri" pitchFamily="34" charset="-120"/>
+              </a:rPr>
+              <a:t>PASP</a:t>
+            </a:r>
+            <a:endParaRPr lang="en-US" sz="1250" dirty="0"/>
+          </a:p>
+        </p:txBody>
+      </p:sp>
+      <p:sp>
+        <p:nvSpPr>
+          <p:cNvPr id="46" name="Text 42"/>
+          <p:cNvSpPr/>
+          <p:nvPr/>
+        </p:nvSpPr>
+        <p:spPr>
+          <a:xfrm>
+            <a:off x="5440680" y="4828032"/>
+            <a:ext cx="685800" cy="420624"/>
+          </a:xfrm>
+          <a:prstGeom prst="rect">
+            <a:avLst/>
+          </a:prstGeom>
+          <a:noFill/>
+          <a:ln/>
+        </p:spPr>
+        <p:txBody>
+          <a:bodyPr wrap="square" lIns="0" tIns="0" rIns="0" bIns="0" rtlCol="0" anchor="ctr"/>
+          <a:lstStyle/>
+          <a:p>
+            <a:pPr algn="l" indent="0" marL="0">
+              <a:buNone/>
+            </a:pPr>
+            <a:r>
+              <a:rPr lang="en-US" sz="1350" b="1" dirty="0">
+                <a:solidFill>
+                  <a:srgbClr val="2B2B33"/>
+                </a:solidFill>
+                <a:latin typeface="Calibri" pitchFamily="34" charset="0"/>
+                <a:ea typeface="Calibri" pitchFamily="34" charset="-122"/>
+                <a:cs typeface="Calibri" pitchFamily="34" charset="-120"/>
+              </a:rPr>
+              <a:t>15</a:t>
+            </a:r>
+            <a:endParaRPr lang="en-US" sz="1350" dirty="0"/>
+          </a:p>
+        </p:txBody>
+      </p:sp>
+      <p:sp>
+        <p:nvSpPr>
+          <p:cNvPr id="47" name="Text 43"/>
+          <p:cNvSpPr/>
+          <p:nvPr/>
+        </p:nvSpPr>
+        <p:spPr>
+          <a:xfrm>
+            <a:off x="6172200" y="4828032"/>
+            <a:ext cx="868680" cy="420624"/>
+          </a:xfrm>
+          <a:prstGeom prst="rect">
+            <a:avLst/>
+          </a:prstGeom>
+          <a:noFill/>
+          <a:ln/>
+        </p:spPr>
+        <p:txBody>
+          <a:bodyPr wrap="square" lIns="0" tIns="0" rIns="0" bIns="0" rtlCol="0" anchor="ctr"/>
+          <a:lstStyle/>
+          <a:p>
+            <a:pPr algn="l" indent="0" marL="0">
+              <a:buNone/>
+            </a:pPr>
+            <a:r>
+              <a:rPr lang="en-US" sz="1150" dirty="0">
+                <a:solidFill>
+                  <a:srgbClr val="6B6B76"/>
+                </a:solidFill>
+                <a:latin typeface="Calibri" pitchFamily="34" charset="0"/>
+                <a:ea typeface="Calibri" pitchFamily="34" charset="-122"/>
+                <a:cs typeface="Calibri" pitchFamily="34" charset="-120"/>
+              </a:rPr>
+              <a:t>—</a:t>
+            </a:r>
+            <a:endParaRPr lang="en-US" sz="1150" dirty="0"/>
+          </a:p>
+        </p:txBody>
+      </p:sp>
+      <p:sp>
+        <p:nvSpPr>
+          <p:cNvPr id="48" name="Text 44"/>
+          <p:cNvSpPr/>
+          <p:nvPr/>
+        </p:nvSpPr>
+        <p:spPr>
+          <a:xfrm>
+            <a:off x="7059168" y="4828032"/>
+            <a:ext cx="685800" cy="420624"/>
+          </a:xfrm>
+          <a:prstGeom prst="rect">
+            <a:avLst/>
+          </a:prstGeom>
+          <a:noFill/>
+          <a:ln/>
+        </p:spPr>
+        <p:txBody>
+          <a:bodyPr wrap="square" lIns="0" tIns="0" rIns="0" bIns="0" rtlCol="0" anchor="ctr"/>
+          <a:lstStyle/>
+          <a:p>
+            <a:pPr algn="l" indent="0" marL="0">
+              <a:buNone/>
+            </a:pPr>
+            <a:r>
+              <a:rPr lang="en-US" sz="1150" dirty="0">
+                <a:solidFill>
+                  <a:srgbClr val="6B6B76"/>
+                </a:solidFill>
+                <a:latin typeface="Calibri" pitchFamily="34" charset="0"/>
+                <a:ea typeface="Calibri" pitchFamily="34" charset="-122"/>
+                <a:cs typeface="Calibri" pitchFamily="34" charset="-120"/>
+              </a:rPr>
+              <a:t>mmHg</a:t>
+            </a:r>
+            <a:endParaRPr lang="en-US" sz="1150" dirty="0"/>
+          </a:p>
+        </p:txBody>
+      </p:sp>
+      <p:sp>
+        <p:nvSpPr>
+          <p:cNvPr id="49" name="Shape 45"/>
+          <p:cNvSpPr/>
+          <p:nvPr/>
+        </p:nvSpPr>
+        <p:spPr>
+          <a:xfrm>
+            <a:off x="7955280" y="1783080"/>
+            <a:ext cx="3730752" cy="3566160"/>
+          </a:xfrm>
+          <a:prstGeom prst="roundRect">
+            <a:avLst>
+              <a:gd name="adj" fmla="val 3077"/>
+            </a:avLst>
+          </a:prstGeom>
+          <a:solidFill>
+            <a:srgbClr val="FFF0F3"/>
+          </a:solidFill>
+          <a:ln w="12700">
+            <a:solidFill>
+              <a:srgbClr val="FBD8DF"/>
+            </a:solidFill>
+            <a:prstDash val="solid"/>
+          </a:ln>
+          <a:effectLst>
+            <a:outerShdw sx="100000" sy="100000" kx="0" ky="0" algn="bl" rotWithShape="0" blurRad="127000" dist="50800" dir="5400000">
+              <a:srgbClr val="C9A3AC">
+                <a:alpha val="45000"/>
+              </a:srgbClr>
+            </a:outerShdw>
+          </a:effectLst>
+        </p:spPr>
+      </p:sp>
+      <p:sp>
+        <p:nvSpPr>
+          <p:cNvPr id="50" name="Text 46"/>
+          <p:cNvSpPr/>
+          <p:nvPr/>
+        </p:nvSpPr>
+        <p:spPr>
+          <a:xfrm>
+            <a:off x="8211312" y="1956816"/>
+            <a:ext cx="3218688" cy="256032"/>
+          </a:xfrm>
+          <a:prstGeom prst="rect">
+            <a:avLst/>
+          </a:prstGeom>
+          <a:noFill/>
+          <a:ln/>
+        </p:spPr>
+        <p:txBody>
+          <a:bodyPr wrap="square" lIns="0" tIns="0" rIns="0" bIns="0" rtlCol="0" anchor="t"/>
+          <a:lstStyle/>
+          <a:p>
+            <a:pPr algn="l" indent="0" marL="0">
+              <a:buNone/>
+            </a:pPr>
+            <a:r>
+              <a:rPr lang="en-US" sz="1250" b="1" spc="150" kern="0" dirty="0">
+                <a:solidFill>
+                  <a:srgbClr val="A4133C"/>
+                </a:solidFill>
+                <a:latin typeface="Calibri" pitchFamily="34" charset="0"/>
+                <a:ea typeface="Calibri" pitchFamily="34" charset="-122"/>
+                <a:cs typeface="Calibri" pitchFamily="34" charset="-120"/>
+              </a:rPr>
+              <a:t>FINDINGS</a:t>
+            </a:r>
+            <a:endParaRPr lang="en-US" sz="1250" dirty="0"/>
+          </a:p>
+        </p:txBody>
+      </p:sp>
+      <p:pic>
+        <p:nvPicPr>
+          <p:cNvPr id="51" name="Image 2" descr="preencoded.png">    </p:cNvPr>
+          <p:cNvPicPr>
+            <a:picLocks noChangeAspect="1"/>
+          </p:cNvPicPr>
+          <p:nvPr/>
+        </p:nvPicPr>
+        <p:blipFill>
+          <a:blip r:embed="rId3"/>
+          <a:stretch>
+            <a:fillRect/>
+          </a:stretch>
+        </p:blipFill>
+        <p:spPr>
+          <a:xfrm>
+            <a:off x="8229600" y="2359152"/>
+            <a:ext cx="219456" cy="219456"/>
+          </a:xfrm>
+          <a:prstGeom prst="rect">
+            <a:avLst/>
+          </a:prstGeom>
+        </p:spPr>
+      </p:pic>
+      <p:sp>
+        <p:nvSpPr>
+          <p:cNvPr id="52" name="Text 47"/>
+          <p:cNvSpPr/>
+          <p:nvPr/>
+        </p:nvSpPr>
+        <p:spPr>
+          <a:xfrm>
+            <a:off x="8577072" y="2331720"/>
+            <a:ext cx="2862072" cy="548640"/>
+          </a:xfrm>
+          <a:prstGeom prst="rect">
+            <a:avLst/>
+          </a:prstGeom>
+          <a:noFill/>
+          <a:ln/>
+        </p:spPr>
+        <p:txBody>
+          <a:bodyPr wrap="square" lIns="0" tIns="0" rIns="0" bIns="0" rtlCol="0" anchor="t"/>
+          <a:lstStyle/>
+          <a:p>
+            <a:pPr algn="l" indent="0" marL="0">
+              <a:lnSpc>
+                <a:spcPct val="105000"/>
+              </a:lnSpc>
+              <a:buNone/>
+            </a:pPr>
+            <a:r>
+              <a:rPr lang="en-US" sz="1250" dirty="0">
+                <a:solidFill>
+                  <a:srgbClr val="2B2B33"/>
+                </a:solidFill>
+                <a:latin typeface="Calibri" pitchFamily="34" charset="0"/>
+                <a:ea typeface="Calibri" pitchFamily="34" charset="-122"/>
+                <a:cs typeface="Calibri" pitchFamily="34" charset="-120"/>
+              </a:rPr>
+              <a:t>Normal LV size &amp; good systolic function</a:t>
+            </a:r>
+            <a:endParaRPr lang="en-US" sz="1250" dirty="0"/>
+          </a:p>
+        </p:txBody>
+      </p:sp>
+      <p:pic>
+        <p:nvPicPr>
+          <p:cNvPr id="53" name="Image 3" descr="preencoded.png">    </p:cNvPr>
+          <p:cNvPicPr>
+            <a:picLocks noChangeAspect="1"/>
+          </p:cNvPicPr>
+          <p:nvPr/>
+        </p:nvPicPr>
+        <p:blipFill>
+          <a:blip r:embed="rId4"/>
+          <a:stretch>
+            <a:fillRect/>
+          </a:stretch>
+        </p:blipFill>
+        <p:spPr>
+          <a:xfrm>
+            <a:off x="8229600" y="2953512"/>
+            <a:ext cx="219456" cy="219456"/>
+          </a:xfrm>
+          <a:prstGeom prst="rect">
+            <a:avLst/>
+          </a:prstGeom>
+        </p:spPr>
+      </p:pic>
+      <p:sp>
+        <p:nvSpPr>
+          <p:cNvPr id="54" name="Text 48"/>
+          <p:cNvSpPr/>
+          <p:nvPr/>
+        </p:nvSpPr>
+        <p:spPr>
+          <a:xfrm>
+            <a:off x="8577072" y="2926080"/>
+            <a:ext cx="2862072" cy="548640"/>
+          </a:xfrm>
+          <a:prstGeom prst="rect">
+            <a:avLst/>
+          </a:prstGeom>
+          <a:noFill/>
+          <a:ln/>
+        </p:spPr>
+        <p:txBody>
+          <a:bodyPr wrap="square" lIns="0" tIns="0" rIns="0" bIns="0" rtlCol="0" anchor="t"/>
+          <a:lstStyle/>
+          <a:p>
+            <a:pPr algn="l" indent="0" marL="0">
+              <a:lnSpc>
+                <a:spcPct val="105000"/>
+              </a:lnSpc>
+              <a:buNone/>
+            </a:pPr>
+            <a:r>
+              <a:rPr lang="en-US" sz="1250" dirty="0">
+                <a:solidFill>
+                  <a:srgbClr val="2B2B33"/>
+                </a:solidFill>
+                <a:latin typeface="Calibri" pitchFamily="34" charset="0"/>
+                <a:ea typeface="Calibri" pitchFamily="34" charset="-122"/>
+                <a:cs typeface="Calibri" pitchFamily="34" charset="-120"/>
+              </a:rPr>
+              <a:t>No regional wall-motion abnormality</a:t>
+            </a:r>
+            <a:endParaRPr lang="en-US" sz="1250" dirty="0"/>
+          </a:p>
+        </p:txBody>
+      </p:sp>
+      <p:pic>
+        <p:nvPicPr>
+          <p:cNvPr id="55" name="Image 4" descr="preencoded.png">    </p:cNvPr>
+          <p:cNvPicPr>
+            <a:picLocks noChangeAspect="1"/>
+          </p:cNvPicPr>
+          <p:nvPr/>
+        </p:nvPicPr>
+        <p:blipFill>
+          <a:blip r:embed="rId5"/>
+          <a:stretch>
+            <a:fillRect/>
+          </a:stretch>
+        </p:blipFill>
+        <p:spPr>
+          <a:xfrm>
+            <a:off x="8229600" y="3547872"/>
+            <a:ext cx="219456" cy="219456"/>
+          </a:xfrm>
+          <a:prstGeom prst="rect">
+            <a:avLst/>
+          </a:prstGeom>
+        </p:spPr>
+      </p:pic>
+      <p:sp>
+        <p:nvSpPr>
+          <p:cNvPr id="56" name="Text 49"/>
+          <p:cNvSpPr/>
+          <p:nvPr/>
+        </p:nvSpPr>
+        <p:spPr>
+          <a:xfrm>
+            <a:off x="8577072" y="3520440"/>
+            <a:ext cx="2862072" cy="548640"/>
+          </a:xfrm>
+          <a:prstGeom prst="rect">
+            <a:avLst/>
+          </a:prstGeom>
+          <a:noFill/>
+          <a:ln/>
+        </p:spPr>
+        <p:txBody>
+          <a:bodyPr wrap="square" lIns="0" tIns="0" rIns="0" bIns="0" rtlCol="0" anchor="t"/>
+          <a:lstStyle/>
+          <a:p>
+            <a:pPr algn="l" indent="0" marL="0">
+              <a:lnSpc>
+                <a:spcPct val="105000"/>
+              </a:lnSpc>
+              <a:buNone/>
+            </a:pPr>
+            <a:r>
+              <a:rPr lang="en-US" sz="1250" dirty="0">
+                <a:solidFill>
+                  <a:srgbClr val="2B2B33"/>
+                </a:solidFill>
+                <a:latin typeface="Calibri" pitchFamily="34" charset="0"/>
+                <a:ea typeface="Calibri" pitchFamily="34" charset="-122"/>
+                <a:cs typeface="Calibri" pitchFamily="34" charset="-120"/>
+              </a:rPr>
+              <a:t>No clot in LA or LV</a:t>
+            </a:r>
+            <a:endParaRPr lang="en-US" sz="1250" dirty="0"/>
+          </a:p>
+        </p:txBody>
+      </p:sp>
+      <p:pic>
+        <p:nvPicPr>
+          <p:cNvPr id="57" name="Image 5" descr="preencoded.png">    </p:cNvPr>
+          <p:cNvPicPr>
+            <a:picLocks noChangeAspect="1"/>
+          </p:cNvPicPr>
+          <p:nvPr/>
+        </p:nvPicPr>
+        <p:blipFill>
+          <a:blip r:embed="rId6"/>
+          <a:stretch>
+            <a:fillRect/>
+          </a:stretch>
+        </p:blipFill>
+        <p:spPr>
+          <a:xfrm>
+            <a:off x="8229600" y="4142232"/>
+            <a:ext cx="219456" cy="219456"/>
+          </a:xfrm>
+          <a:prstGeom prst="rect">
+            <a:avLst/>
+          </a:prstGeom>
+        </p:spPr>
+      </p:pic>
+      <p:sp>
+        <p:nvSpPr>
+          <p:cNvPr id="58" name="Text 50"/>
+          <p:cNvSpPr/>
+          <p:nvPr/>
+        </p:nvSpPr>
+        <p:spPr>
+          <a:xfrm>
+            <a:off x="8577072" y="4114800"/>
+            <a:ext cx="2862072" cy="548640"/>
+          </a:xfrm>
+          <a:prstGeom prst="rect">
+            <a:avLst/>
+          </a:prstGeom>
+          <a:noFill/>
+          <a:ln/>
+        </p:spPr>
+        <p:txBody>
+          <a:bodyPr wrap="square" lIns="0" tIns="0" rIns="0" bIns="0" rtlCol="0" anchor="t"/>
+          <a:lstStyle/>
+          <a:p>
+            <a:pPr algn="l" indent="0" marL="0">
+              <a:lnSpc>
+                <a:spcPct val="105000"/>
+              </a:lnSpc>
+              <a:buNone/>
+            </a:pPr>
+            <a:r>
+              <a:rPr lang="en-US" sz="1250" dirty="0">
+                <a:solidFill>
+                  <a:srgbClr val="2B2B33"/>
+                </a:solidFill>
+                <a:latin typeface="Calibri" pitchFamily="34" charset="0"/>
+                <a:ea typeface="Calibri" pitchFamily="34" charset="-122"/>
+                <a:cs typeface="Calibri" pitchFamily="34" charset="-120"/>
+              </a:rPr>
+              <a:t>Normal chambers, valves, IAS &amp; IVS</a:t>
+            </a:r>
+            <a:endParaRPr lang="en-US" sz="1250" dirty="0"/>
+          </a:p>
+        </p:txBody>
+      </p:sp>
+      <p:pic>
+        <p:nvPicPr>
+          <p:cNvPr id="59" name="Image 6" descr="preencoded.png">    </p:cNvPr>
+          <p:cNvPicPr>
+            <a:picLocks noChangeAspect="1"/>
+          </p:cNvPicPr>
+          <p:nvPr/>
+        </p:nvPicPr>
+        <p:blipFill>
+          <a:blip r:embed="rId7"/>
+          <a:stretch>
+            <a:fillRect/>
+          </a:stretch>
+        </p:blipFill>
+        <p:spPr>
+          <a:xfrm>
+            <a:off x="8229600" y="4736592"/>
+            <a:ext cx="219456" cy="219456"/>
+          </a:xfrm>
+          <a:prstGeom prst="rect">
+            <a:avLst/>
+          </a:prstGeom>
+        </p:spPr>
+      </p:pic>
+      <p:sp>
+        <p:nvSpPr>
+          <p:cNvPr id="60" name="Text 51"/>
+          <p:cNvSpPr/>
+          <p:nvPr/>
+        </p:nvSpPr>
+        <p:spPr>
+          <a:xfrm>
+            <a:off x="8577072" y="4709160"/>
+            <a:ext cx="2862072" cy="548640"/>
+          </a:xfrm>
+          <a:prstGeom prst="rect">
+            <a:avLst/>
+          </a:prstGeom>
+          <a:noFill/>
+          <a:ln/>
+        </p:spPr>
+        <p:txBody>
+          <a:bodyPr wrap="square" lIns="0" tIns="0" rIns="0" bIns="0" rtlCol="0" anchor="t"/>
+          <a:lstStyle/>
+          <a:p>
+            <a:pPr algn="l" indent="0" marL="0">
+              <a:lnSpc>
+                <a:spcPct val="105000"/>
+              </a:lnSpc>
+              <a:buNone/>
+            </a:pPr>
+            <a:r>
+              <a:rPr lang="en-US" sz="1250" dirty="0">
+                <a:solidFill>
+                  <a:srgbClr val="2B2B33"/>
+                </a:solidFill>
+                <a:latin typeface="Calibri" pitchFamily="34" charset="0"/>
+                <a:ea typeface="Calibri" pitchFamily="34" charset="-122"/>
+                <a:cs typeface="Calibri" pitchFamily="34" charset="-120"/>
+              </a:rPr>
+              <a:t>Normal pericardium</a:t>
+            </a:r>
+            <a:endParaRPr lang="en-US" sz="1250" dirty="0"/>
+          </a:p>
+        </p:txBody>
+      </p:sp>
+      <p:sp>
+        <p:nvSpPr>
+          <p:cNvPr id="61" name="Shape 52"/>
+          <p:cNvSpPr/>
+          <p:nvPr/>
+        </p:nvSpPr>
+        <p:spPr>
+          <a:xfrm>
+            <a:off x="502920" y="5559552"/>
+            <a:ext cx="11183112" cy="566928"/>
+          </a:xfrm>
+          <a:prstGeom prst="roundRect">
+            <a:avLst>
+              <a:gd name="adj" fmla="val 50000"/>
+            </a:avLst>
+          </a:prstGeom>
+          <a:solidFill>
+            <a:srgbClr val="590D22"/>
+          </a:solidFill>
+          <a:ln/>
+          <a:effectLst>
+            <a:outerShdw sx="100000" sy="100000" kx="0" ky="0" algn="bl" rotWithShape="0" blurRad="127000" dist="50800" dir="5400000">
+              <a:srgbClr val="C9A3AC">
+                <a:alpha val="45000"/>
+              </a:srgbClr>
+            </a:outerShdw>
+          </a:effectLst>
+        </p:spPr>
+      </p:sp>
+      <p:sp>
+        <p:nvSpPr>
+          <p:cNvPr id="62" name="Text 53"/>
+          <p:cNvSpPr/>
+          <p:nvPr/>
+        </p:nvSpPr>
+        <p:spPr>
+          <a:xfrm>
+            <a:off x="502920" y="5559552"/>
+            <a:ext cx="11183112" cy="566928"/>
+          </a:xfrm>
+          <a:prstGeom prst="rect">
+            <a:avLst/>
+          </a:prstGeom>
+          <a:noFill/>
+          <a:ln/>
+        </p:spPr>
+        <p:txBody>
+          <a:bodyPr wrap="square" lIns="0" tIns="0" rIns="0" bIns="0" rtlCol="0" anchor="ctr"/>
+          <a:lstStyle/>
+          <a:p>
+            <a:pPr algn="ctr" indent="0" marL="0">
+              <a:buNone/>
+            </a:pPr>
+            <a:r>
+              <a:rPr lang="en-US" sz="1500" b="1" spc="150" kern="0" dirty="0">
+                <a:solidFill>
+                  <a:srgbClr val="FF4D6D"/>
+                </a:solidFill>
+                <a:latin typeface="Calibri" pitchFamily="34" charset="0"/>
+                <a:ea typeface="Calibri" pitchFamily="34" charset="-122"/>
+                <a:cs typeface="Calibri" pitchFamily="34" charset="-120"/>
+              </a:rPr>
+              <a:t>CONCLUSION   </a:t>
+            </a:r>
+            <a:pPr algn="ctr" indent="0" marL="0">
+              <a:buNone/>
+            </a:pPr>
+            <a:r>
+              <a:rPr lang="en-US" sz="1500" b="1" dirty="0">
+                <a:solidFill>
+                  <a:srgbClr val="FFFFFF"/>
+                </a:solidFill>
+                <a:latin typeface="Calibri" pitchFamily="34" charset="0"/>
+                <a:ea typeface="Calibri" pitchFamily="34" charset="-122"/>
+                <a:cs typeface="Calibri" pitchFamily="34" charset="-120"/>
+              </a:rPr>
+              <a:t>Normal biventricular size and systolic function.</a:t>
+            </a:r>
+            <a:endParaRPr lang="en-US" sz="1500" dirty="0"/>
+          </a:p>
+        </p:txBody>
+      </p:sp>
+      <p:sp>
+        <p:nvSpPr>
+          <p:cNvPr id="63" name="Text 54"/>
+          <p:cNvSpPr/>
+          <p:nvPr/>
+        </p:nvSpPr>
+        <p:spPr>
+          <a:xfrm>
+            <a:off x="11277295" y="6355080"/>
+            <a:ext cx="548640" cy="320040"/>
+          </a:xfrm>
+          <a:prstGeom prst="rect">
+            <a:avLst/>
+          </a:prstGeom>
+          <a:noFill/>
+          <a:ln/>
+        </p:spPr>
+        <p:txBody>
+          <a:bodyPr wrap="square" rtlCol="0" anchor="t"/>
+          <a:lstStyle/>
+          <a:p>
+            <a:pPr algn="r" indent="0" marL="0">
+              <a:buNone/>
+            </a:pPr>
+            <a:r>
+              <a:rPr lang="en-US" sz="1100" b="1" dirty="0">
+                <a:solidFill>
+                  <a:srgbClr val="6B6B76"/>
+                </a:solidFill>
+                <a:latin typeface="Calibri" pitchFamily="34" charset="0"/>
+                <a:ea typeface="Calibri" pitchFamily="34" charset="-122"/>
+                <a:cs typeface="Calibri" pitchFamily="34" charset="-120"/>
+              </a:rPr>
+              <a:t>17</a:t>
+            </a:r>
+            <a:endParaRPr lang="en-US" sz="1100" dirty="0"/>
+          </a:p>
+        </p:txBody>
+      </p:sp>
+      <p:sp>
+        <p:nvSpPr>
+          <p:cNvPr id="64" name="Text 55"/>
+          <p:cNvSpPr/>
+          <p:nvPr/>
+        </p:nvSpPr>
+        <p:spPr>
+          <a:xfrm>
+            <a:off x="502920" y="6355080"/>
+            <a:ext cx="5486400" cy="320040"/>
+          </a:xfrm>
+          <a:prstGeom prst="rect">
+            <a:avLst/>
+          </a:prstGeom>
+          <a:noFill/>
+          <a:ln/>
+        </p:spPr>
+        <p:txBody>
+          <a:bodyPr wrap="square" rtlCol="0" anchor="t"/>
+          <a:lstStyle/>
+          <a:p>
+            <a:pPr algn="l" indent="0" marL="0">
+              <a:buNone/>
+            </a:pPr>
+            <a:r>
+              <a:rPr lang="en-US" sz="900" dirty="0">
+                <a:solidFill>
+                  <a:srgbClr val="6B6B76"/>
+                </a:solidFill>
+                <a:latin typeface="Calibri" pitchFamily="34" charset="0"/>
+                <a:ea typeface="Calibri" pitchFamily="34" charset="-122"/>
+                <a:cs typeface="Calibri" pitchFamily="34" charset="-120"/>
+              </a:rPr>
+              <a:t>Clinicopathological Conference</a:t>
+            </a:r>
+            <a:endParaRPr lang="en-US" sz="900" dirty="0"/>
+          </a:p>
+        </p:txBody>
+      </p:sp>
+    </p:spTree>
+  </p:cSld>
+  <p:clrMapOvr>
+    <a:masterClrMapping/>
+  </p:clrMapOvr>
+</p:sld>
+</file>
+
+<file path=ppt/slides/slide18.xml><?xml version="1.0" encoding="utf-8"?>
+<p:sld xmlns:a="http://schemas.openxmlformats.org/drawingml/2006/main" xmlns:r="http://schemas.openxmlformats.org/officeDocument/2006/relationships" xmlns:p="http://schemas.openxmlformats.org/presentationml/2006/main">
+  <p:cSld name="Slide 18">
+    <p:bg>
+      <p:bgPr>
+        <a:solidFill>
           <a:srgbClr val="590D22"/>
         </a:solidFill>
       </p:bgPr>
@@ -6616,7 +15577,7 @@
                 <a:ea typeface="Calibri" pitchFamily="34" charset="-122"/>
                 <a:cs typeface="Calibri" pitchFamily="34" charset="-120"/>
               </a:rPr>
-              <a:t>14</a:t>
+              <a:t>18</a:t>
             </a:r>
             <a:endParaRPr lang="en-US" sz="1100" dirty="0"/>
           </a:p>

--- a/presentations/Clinicopathological-Conference.pptx
+++ b/presentations/Clinicopathological-Conference.pptx
@@ -23,9 +23,10 @@
     <p:sldId id="271" r:id="rId17"/>
     <p:sldId id="272" r:id="rId18"/>
     <p:sldId id="273" r:id="rId19"/>
+    <p:sldId id="274" r:id="rId20"/>
   </p:sldIdLst>
   <p:notesMasterIdLst>
-    <p:notesMasterId r:id="rId20"/>
+    <p:notesMasterId r:id="rId21"/>
   </p:notesMasterIdLst>
   <p:sldSz cx="12191695" cy="6858000"/>
   <p:notesSz cx="6858000" cy="12191695"/>
@@ -1335,6 +1336,94 @@
             <a:fld id="{F7021451-1387-4CA6-816F-3879F97B5CBC}" type="slidenum">
               <a:rPr lang="en-US"/>
               <a:t>18</a:t>
+            </a:fld>
+            <a:endParaRPr lang="en-US"/>
+          </a:p>
+        </p:txBody>
+      </p:sp>
+    </p:spTree>
+    <p:extLst>
+      <p:ext uri="{BB962C8B-B14F-4D97-AF65-F5344CB8AC3E}">
+        <p14:creationId xmlns:p14="http://schemas.microsoft.com/office/powerpoint/2010/main" val="1024086991"/>
+      </p:ext>
+    </p:extLst>
+  </p:cSld>
+  <p:clrMapOvr>
+    <a:masterClrMapping/>
+  </p:clrMapOvr>
+</p:notes>
+</file>
+
+<file path=ppt/notesSlides/notesSlide19.xml><?xml version="1.0" encoding="utf-8"?>
+<p:notes xmlns:a="http://schemas.openxmlformats.org/drawingml/2006/main" xmlns:r="http://schemas.openxmlformats.org/officeDocument/2006/relationships" xmlns:p="http://schemas.openxmlformats.org/presentationml/2006/main">
+  <p:cSld>
+    <p:spTree>
+      <p:nvGrpSpPr>
+        <p:cNvPr id="1" name=""/>
+        <p:cNvGrpSpPr/>
+        <p:nvPr/>
+      </p:nvGrpSpPr>
+      <p:grpSpPr>
+        <a:xfrm>
+          <a:off x="0" y="0"/>
+          <a:ext cx="0" cy="0"/>
+          <a:chOff x="0" y="0"/>
+          <a:chExt cx="0" cy="0"/>
+        </a:xfrm>
+      </p:grpSpPr>
+      <p:sp>
+        <p:nvSpPr>
+          <p:cNvPr id="2" name="Slide Image Placeholder 1"/>
+          <p:cNvSpPr>
+            <a:spLocks noGrp="1" noRot="1" noChangeAspect="1"/>
+          </p:cNvSpPr>
+          <p:nvPr>
+            <p:ph type="sldImg"/>
+          </p:nvPr>
+        </p:nvSpPr>
+        <p:spPr/>
+      </p:sp>
+      <p:sp>
+        <p:nvSpPr>
+          <p:cNvPr id="3" name="Notes Placeholder 2"/>
+          <p:cNvSpPr>
+            <a:spLocks noGrp="1"/>
+          </p:cNvSpPr>
+          <p:nvPr>
+            <p:ph type="body" idx="1"/>
+          </p:nvPr>
+        </p:nvSpPr>
+        <p:spPr/>
+        <p:txBody>
+          <a:bodyPr/>
+          <a:lstStyle/>
+          <a:p>
+            <a:r>
+              <a:rPr lang="en-US" dirty="0"/>
+              <a:t/>
+            </a:r>
+            <a:endParaRPr lang="en-US" dirty="0"/>
+          </a:p>
+        </p:txBody>
+      </p:sp>
+      <p:sp>
+        <p:nvSpPr>
+          <p:cNvPr id="4" name="Slide Number Placeholder 3"/>
+          <p:cNvSpPr>
+            <a:spLocks noGrp="1"/>
+          </p:cNvSpPr>
+          <p:nvPr>
+            <p:ph type="sldNum" sz="quarter" idx="10"/>
+          </p:nvPr>
+        </p:nvSpPr>
+        <p:spPr/>
+        <p:txBody>
+          <a:bodyPr/>
+          <a:lstStyle/>
+          <a:p>
+            <a:fld id="{F7021451-1387-4CA6-816F-3879F97B5CBC}" type="slidenum">
+              <a:rPr lang="en-US"/>
+              <a:t>19</a:t>
             </a:fld>
             <a:endParaRPr lang="en-US"/>
           </a:p>
@@ -6374,12 +6463,12 @@
         </p:nvSpPr>
         <p:spPr>
           <a:xfrm>
-            <a:off x="502920" y="1627632"/>
-            <a:ext cx="11183112" cy="1078992"/>
+            <a:off x="502920" y="1600200"/>
+            <a:ext cx="11183112" cy="896112"/>
           </a:xfrm>
           <a:prstGeom prst="roundRect">
             <a:avLst>
-              <a:gd name="adj" fmla="val 10169"/>
+              <a:gd name="adj" fmla="val 12245"/>
             </a:avLst>
           </a:prstGeom>
           <a:solidFill>
@@ -6403,8 +6492,8 @@
         </p:nvSpPr>
         <p:spPr>
           <a:xfrm>
-            <a:off x="777240" y="1856232"/>
-            <a:ext cx="621792" cy="621792"/>
+            <a:off x="749808" y="1801368"/>
+            <a:ext cx="512064" cy="512064"/>
           </a:xfrm>
           <a:prstGeom prst="ellipse">
             <a:avLst/>
@@ -6431,8 +6520,8 @@
         </p:blipFill>
         <p:spPr>
           <a:xfrm>
-            <a:off x="932688" y="2011680"/>
-            <a:ext cx="310896" cy="310896"/>
+            <a:off x="877824" y="1929384"/>
+            <a:ext cx="256032" cy="256032"/>
           </a:xfrm>
           <a:prstGeom prst="rect">
             <a:avLst/>
@@ -6447,8 +6536,8 @@
         </p:nvSpPr>
         <p:spPr>
           <a:xfrm>
-            <a:off x="1600200" y="1783080"/>
-            <a:ext cx="9921240" cy="566928"/>
+            <a:off x="1463040" y="1600200"/>
+            <a:ext cx="7498080" cy="896112"/>
           </a:xfrm>
           <a:prstGeom prst="rect">
             <a:avLst/>
@@ -6464,7 +6553,7 @@
               <a:buNone/>
             </a:pPr>
             <a:r>
-              <a:rPr lang="en-US" sz="2800" b="1" dirty="0">
+              <a:rPr lang="en-US" sz="2200" b="1" dirty="0">
                 <a:solidFill>
                   <a:srgbClr val="FFFFFF"/>
                 </a:solidFill>
@@ -6474,7 +6563,7 @@
               </a:rPr>
               <a:t>Atrial Fibrillation with Rapid Ventricular Response</a:t>
             </a:r>
-            <a:endParaRPr lang="en-US" sz="2800" dirty="0"/>
+            <a:endParaRPr lang="en-US" sz="2200" dirty="0"/>
           </a:p>
         </p:txBody>
       </p:sp>
@@ -6486,24 +6575,38 @@
         </p:nvSpPr>
         <p:spPr>
           <a:xfrm>
-            <a:off x="1600200" y="2331720"/>
-            <a:ext cx="9921240" cy="274320"/>
-          </a:xfrm>
-          <a:prstGeom prst="rect">
-            <a:avLst/>
-          </a:prstGeom>
-          <a:noFill/>
-          <a:ln/>
-        </p:spPr>
-        <p:txBody>
-          <a:bodyPr wrap="square" lIns="0" tIns="0" rIns="0" bIns="0" rtlCol="0" anchor="t"/>
-          <a:lstStyle/>
-          <a:p>
-            <a:pPr algn="l" indent="0" marL="0">
-              <a:buNone/>
-            </a:pPr>
-            <a:r>
-              <a:rPr lang="en-US" sz="1300" b="1" dirty="0">
+            <a:off x="8869680" y="1600200"/>
+            <a:ext cx="2697480" cy="896112"/>
+          </a:xfrm>
+          <a:prstGeom prst="rect">
+            <a:avLst/>
+          </a:prstGeom>
+          <a:noFill/>
+          <a:ln/>
+        </p:spPr>
+        <p:txBody>
+          <a:bodyPr wrap="square" lIns="0" tIns="0" rIns="0" bIns="0" rtlCol="0" anchor="ctr"/>
+          <a:lstStyle/>
+          <a:p>
+            <a:pPr algn="r" indent="0" marL="0">
+              <a:buNone/>
+            </a:pPr>
+            <a:r>
+              <a:rPr lang="en-US" sz="1250" dirty="0">
+                <a:solidFill>
+                  <a:srgbClr val="FBD8DF"/>
+                </a:solidFill>
+                <a:latin typeface="Calibri" pitchFamily="34" charset="0"/>
+                <a:ea typeface="Calibri" pitchFamily="34" charset="-122"/>
+                <a:cs typeface="Calibri" pitchFamily="34" charset="-120"/>
+              </a:rPr>
+              <a:t>Abnormal rhythm ECG · </a:t>
+            </a:r>
+            <a:pPr algn="r" indent="0" marL="0">
+              <a:buNone/>
+            </a:pPr>
+            <a:r>
+              <a:rPr lang="en-US" sz="1250" b="1" dirty="0">
                 <a:solidFill>
                   <a:srgbClr val="FF4D6D"/>
                 </a:solidFill>
@@ -6511,9 +6614,9 @@
                 <a:ea typeface="Calibri" pitchFamily="34" charset="-122"/>
                 <a:cs typeface="Calibri" pitchFamily="34" charset="-120"/>
               </a:rPr>
-              <a:t>Abnormal rhythm ECG · 06-Jul-2026</a:t>
-            </a:r>
-            <a:endParaRPr lang="en-US" sz="1300" dirty="0"/>
+              <a:t>06-Jul-2026</a:t>
+            </a:r>
+            <a:endParaRPr lang="en-US" sz="1250" dirty="0"/>
           </a:p>
         </p:txBody>
       </p:sp>
@@ -6525,12 +6628,70 @@
         </p:nvSpPr>
         <p:spPr>
           <a:xfrm>
-            <a:off x="502920" y="2889504"/>
-            <a:ext cx="3246120" cy="2615184"/>
+            <a:off x="502920" y="2651760"/>
+            <a:ext cx="7973568" cy="3355848"/>
           </a:xfrm>
           <a:prstGeom prst="roundRect">
             <a:avLst>
-              <a:gd name="adj" fmla="val 4196"/>
+              <a:gd name="adj" fmla="val 3270"/>
+            </a:avLst>
+          </a:prstGeom>
+          <a:solidFill>
+            <a:srgbClr val="FFFFFF"/>
+          </a:solidFill>
+          <a:ln w="12700">
+            <a:solidFill>
+              <a:srgbClr val="FBD8DF"/>
+            </a:solidFill>
+            <a:prstDash val="solid"/>
+          </a:ln>
+          <a:effectLst>
+            <a:outerShdw sx="100000" sy="100000" kx="0" ky="0" algn="bl" rotWithShape="0" blurRad="127000" dist="50800" dir="5400000">
+              <a:srgbClr val="C9A3AC">
+                <a:alpha val="45000"/>
+              </a:srgbClr>
+            </a:outerShdw>
+          </a:effectLst>
+        </p:spPr>
+      </p:sp>
+      <p:pic>
+        <p:nvPicPr>
+          <p:cNvPr id="12" name="Image 2" descr="preencoded.png">    </p:cNvPr>
+          <p:cNvPicPr>
+            <a:picLocks noChangeAspect="1"/>
+          </p:cNvPicPr>
+          <p:nvPr/>
+        </p:nvPicPr>
+        <p:blipFill>
+          <a:blip r:embed="rId3"/>
+          <a:stretch>
+            <a:fillRect/>
+          </a:stretch>
+        </p:blipFill>
+        <p:spPr>
+          <a:xfrm>
+            <a:off x="621792" y="2724912"/>
+            <a:ext cx="7735824" cy="3227832"/>
+          </a:xfrm>
+          <a:prstGeom prst="rect">
+            <a:avLst/>
+          </a:prstGeom>
+        </p:spPr>
+      </p:pic>
+      <p:sp>
+        <p:nvSpPr>
+          <p:cNvPr id="13" name="Shape 8"/>
+          <p:cNvSpPr/>
+          <p:nvPr/>
+        </p:nvSpPr>
+        <p:spPr>
+          <a:xfrm>
+            <a:off x="8613648" y="2651760"/>
+            <a:ext cx="3072384" cy="1078992"/>
+          </a:xfrm>
+          <a:prstGeom prst="roundRect">
+            <a:avLst>
+              <a:gd name="adj" fmla="val 10169"/>
             </a:avLst>
           </a:prstGeom>
           <a:solidFill>
@@ -6553,14 +6714,14 @@
       </p:sp>
       <p:sp>
         <p:nvSpPr>
-          <p:cNvPr id="12" name="Text 8"/>
-          <p:cNvSpPr/>
-          <p:nvPr/>
-        </p:nvSpPr>
-        <p:spPr>
-          <a:xfrm>
-            <a:off x="777240" y="3145536"/>
-            <a:ext cx="2743200" cy="274320"/>
+          <p:cNvPr id="14" name="Text 9"/>
+          <p:cNvSpPr/>
+          <p:nvPr/>
+        </p:nvSpPr>
+        <p:spPr>
+          <a:xfrm>
+            <a:off x="8833104" y="2779776"/>
+            <a:ext cx="2194560" cy="256032"/>
           </a:xfrm>
           <a:prstGeom prst="rect">
             <a:avLst/>
@@ -6576,7 +6737,7 @@
               <a:buNone/>
             </a:pPr>
             <a:r>
-              <a:rPr lang="en-US" sz="1250" b="1" spc="200" kern="0" dirty="0">
+              <a:rPr lang="en-US" sz="1100" b="1" spc="150" kern="0" dirty="0">
                 <a:solidFill>
                   <a:srgbClr val="A4133C"/>
                 </a:solidFill>
@@ -6586,28 +6747,28 @@
               </a:rPr>
               <a:t>VENTRICULAR RATE</a:t>
             </a:r>
-            <a:endParaRPr lang="en-US" sz="1250" dirty="0"/>
+            <a:endParaRPr lang="en-US" sz="1100" dirty="0"/>
           </a:p>
         </p:txBody>
       </p:sp>
       <p:pic>
         <p:nvPicPr>
-          <p:cNvPr id="13" name="Image 2" descr="preencoded.png">    </p:cNvPr>
+          <p:cNvPr id="15" name="Image 3" descr="preencoded.png">    </p:cNvPr>
           <p:cNvPicPr>
             <a:picLocks noChangeAspect="1"/>
           </p:cNvPicPr>
           <p:nvPr/>
         </p:nvPicPr>
         <p:blipFill>
-          <a:blip r:embed="rId3"/>
+          <a:blip r:embed="rId4"/>
           <a:stretch>
             <a:fillRect/>
           </a:stretch>
         </p:blipFill>
         <p:spPr>
           <a:xfrm>
-            <a:off x="3246120" y="3127248"/>
-            <a:ext cx="292608" cy="292608"/>
+            <a:off x="11228832" y="2761488"/>
+            <a:ext cx="274320" cy="274320"/>
           </a:xfrm>
           <a:prstGeom prst="rect">
             <a:avLst/>
@@ -6616,14 +6777,14 @@
       </p:pic>
       <p:sp>
         <p:nvSpPr>
-          <p:cNvPr id="14" name="Text 9"/>
-          <p:cNvSpPr/>
-          <p:nvPr/>
-        </p:nvSpPr>
-        <p:spPr>
-          <a:xfrm>
-            <a:off x="777240" y="3511296"/>
-            <a:ext cx="2743200" cy="868680"/>
+          <p:cNvPr id="16" name="Text 10"/>
+          <p:cNvSpPr/>
+          <p:nvPr/>
+        </p:nvSpPr>
+        <p:spPr>
+          <a:xfrm>
+            <a:off x="8833104" y="3072384"/>
+            <a:ext cx="1828800" cy="548640"/>
           </a:xfrm>
           <a:prstGeom prst="rect">
             <a:avLst/>
@@ -6639,7 +6800,7 @@
               <a:buNone/>
             </a:pPr>
             <a:r>
-              <a:rPr lang="en-US" sz="4400" b="1" dirty="0">
+              <a:rPr lang="en-US" sz="3600" b="1" dirty="0">
                 <a:solidFill>
                   <a:srgbClr val="FF4D6D"/>
                 </a:solidFill>
@@ -6653,7 +6814,7 @@
               <a:buNone/>
             </a:pPr>
             <a:r>
-              <a:rPr lang="en-US" sz="1800" b="1" dirty="0">
+              <a:rPr lang="en-US" sz="1500" b="1" dirty="0">
                 <a:solidFill>
                   <a:srgbClr val="6B6B76"/>
                 </a:solidFill>
@@ -6661,22 +6822,22 @@
                 <a:ea typeface="Calibri" pitchFamily="34" charset="-122"/>
                 <a:cs typeface="Calibri" pitchFamily="34" charset="-120"/>
               </a:rPr>
-              <a:t>  bpm</a:t>
-            </a:r>
-            <a:endParaRPr lang="en-US" sz="4400" dirty="0"/>
-          </a:p>
-        </p:txBody>
-      </p:sp>
-      <p:sp>
-        <p:nvSpPr>
-          <p:cNvPr id="15" name="Shape 10"/>
-          <p:cNvSpPr/>
-          <p:nvPr/>
-        </p:nvSpPr>
-        <p:spPr>
-          <a:xfrm>
-            <a:off x="777240" y="4526280"/>
-            <a:ext cx="1463040" cy="457200"/>
+              <a:t> bpm</a:t>
+            </a:r>
+            <a:endParaRPr lang="en-US" sz="3600" dirty="0"/>
+          </a:p>
+        </p:txBody>
+      </p:sp>
+      <p:sp>
+        <p:nvSpPr>
+          <p:cNvPr id="17" name="Shape 11"/>
+          <p:cNvSpPr/>
+          <p:nvPr/>
+        </p:nvSpPr>
+        <p:spPr>
+          <a:xfrm>
+            <a:off x="10543032" y="3163824"/>
+            <a:ext cx="960120" cy="402336"/>
           </a:xfrm>
           <a:prstGeom prst="roundRect">
             <a:avLst>
@@ -6691,14 +6852,14 @@
       </p:sp>
       <p:sp>
         <p:nvSpPr>
-          <p:cNvPr id="16" name="Text 11"/>
-          <p:cNvSpPr/>
-          <p:nvPr/>
-        </p:nvSpPr>
-        <p:spPr>
-          <a:xfrm>
-            <a:off x="777240" y="4526280"/>
-            <a:ext cx="1463040" cy="457200"/>
+          <p:cNvPr id="18" name="Text 12"/>
+          <p:cNvSpPr/>
+          <p:nvPr/>
+        </p:nvSpPr>
+        <p:spPr>
+          <a:xfrm>
+            <a:off x="10543032" y="3163824"/>
+            <a:ext cx="960120" cy="402336"/>
           </a:xfrm>
           <a:prstGeom prst="rect">
             <a:avLst/>
@@ -6714,7 +6875,7 @@
               <a:buNone/>
             </a:pPr>
             <a:r>
-              <a:rPr lang="en-US" sz="1300" b="1" spc="150" kern="0" dirty="0">
+              <a:rPr lang="en-US" sz="1200" b="1" spc="100" kern="0" dirty="0">
                 <a:solidFill>
                   <a:srgbClr val="FFFFFF"/>
                 </a:solidFill>
@@ -6724,199 +6885,24 @@
               </a:rPr>
               <a:t>RAPID</a:t>
             </a:r>
-            <a:endParaRPr lang="en-US" sz="1300" dirty="0"/>
-          </a:p>
-        </p:txBody>
-      </p:sp>
-      <p:sp>
-        <p:nvSpPr>
-          <p:cNvPr id="17" name="Shape 12"/>
-          <p:cNvSpPr/>
-          <p:nvPr/>
-        </p:nvSpPr>
-        <p:spPr>
-          <a:xfrm>
-            <a:off x="868680" y="5193792"/>
-            <a:ext cx="854964" cy="0"/>
-          </a:xfrm>
-          <a:prstGeom prst="line">
-            <a:avLst/>
-          </a:prstGeom>
-          <a:noFill/>
-          <a:ln w="28575">
-            <a:solidFill>
-              <a:srgbClr val="FF4D6D">
-                <a:alpha val="75000"/>
-              </a:srgbClr>
-            </a:solidFill>
-            <a:prstDash val="solid"/>
-          </a:ln>
-        </p:spPr>
-      </p:sp>
-      <p:sp>
-        <p:nvSpPr>
-          <p:cNvPr id="18" name="Shape 13"/>
-          <p:cNvSpPr/>
-          <p:nvPr/>
-        </p:nvSpPr>
-        <p:spPr>
-          <a:xfrm flipV="1">
-            <a:off x="1723644" y="5047488"/>
-            <a:ext cx="150876" cy="146304"/>
-          </a:xfrm>
-          <a:prstGeom prst="line">
-            <a:avLst/>
-          </a:prstGeom>
-          <a:noFill/>
-          <a:ln w="28575">
-            <a:solidFill>
-              <a:srgbClr val="FF4D6D">
-                <a:alpha val="75000"/>
-              </a:srgbClr>
-            </a:solidFill>
-            <a:prstDash val="solid"/>
-          </a:ln>
-        </p:spPr>
-      </p:sp>
-      <p:sp>
-        <p:nvSpPr>
-          <p:cNvPr id="19" name="Shape 14"/>
-          <p:cNvSpPr/>
-          <p:nvPr/>
-        </p:nvSpPr>
-        <p:spPr>
-          <a:xfrm>
-            <a:off x="1874520" y="5047488"/>
-            <a:ext cx="150876" cy="457200"/>
-          </a:xfrm>
-          <a:prstGeom prst="line">
-            <a:avLst/>
-          </a:prstGeom>
-          <a:noFill/>
-          <a:ln w="28575">
-            <a:solidFill>
-              <a:srgbClr val="FF4D6D">
-                <a:alpha val="75000"/>
-              </a:srgbClr>
-            </a:solidFill>
-            <a:prstDash val="solid"/>
-          </a:ln>
-        </p:spPr>
-      </p:sp>
-      <p:sp>
-        <p:nvSpPr>
-          <p:cNvPr id="20" name="Shape 15"/>
-          <p:cNvSpPr/>
-          <p:nvPr/>
-        </p:nvSpPr>
-        <p:spPr>
-          <a:xfrm flipV="1">
-            <a:off x="2025396" y="4690872"/>
-            <a:ext cx="150876" cy="813816"/>
-          </a:xfrm>
-          <a:prstGeom prst="line">
-            <a:avLst/>
-          </a:prstGeom>
-          <a:noFill/>
-          <a:ln w="28575">
-            <a:solidFill>
-              <a:srgbClr val="FF4D6D">
-                <a:alpha val="75000"/>
-              </a:srgbClr>
-            </a:solidFill>
-            <a:prstDash val="solid"/>
-          </a:ln>
-        </p:spPr>
-      </p:sp>
-      <p:sp>
-        <p:nvSpPr>
-          <p:cNvPr id="21" name="Shape 16"/>
-          <p:cNvSpPr/>
-          <p:nvPr/>
-        </p:nvSpPr>
-        <p:spPr>
-          <a:xfrm>
-            <a:off x="2176272" y="4690872"/>
-            <a:ext cx="150876" cy="685800"/>
-          </a:xfrm>
-          <a:prstGeom prst="line">
-            <a:avLst/>
-          </a:prstGeom>
-          <a:noFill/>
-          <a:ln w="28575">
-            <a:solidFill>
-              <a:srgbClr val="FF4D6D">
-                <a:alpha val="75000"/>
-              </a:srgbClr>
-            </a:solidFill>
-            <a:prstDash val="solid"/>
-          </a:ln>
-        </p:spPr>
-      </p:sp>
-      <p:sp>
-        <p:nvSpPr>
-          <p:cNvPr id="22" name="Shape 17"/>
-          <p:cNvSpPr/>
-          <p:nvPr/>
-        </p:nvSpPr>
-        <p:spPr>
-          <a:xfrm flipV="1">
-            <a:off x="2327148" y="5193792"/>
-            <a:ext cx="150876" cy="182880"/>
-          </a:xfrm>
-          <a:prstGeom prst="line">
-            <a:avLst/>
-          </a:prstGeom>
-          <a:noFill/>
-          <a:ln w="28575">
-            <a:solidFill>
-              <a:srgbClr val="FF4D6D">
-                <a:alpha val="75000"/>
-              </a:srgbClr>
-            </a:solidFill>
-            <a:prstDash val="solid"/>
-          </a:ln>
-        </p:spPr>
-      </p:sp>
-      <p:sp>
-        <p:nvSpPr>
-          <p:cNvPr id="23" name="Shape 18"/>
-          <p:cNvSpPr/>
-          <p:nvPr/>
-        </p:nvSpPr>
-        <p:spPr>
-          <a:xfrm>
-            <a:off x="2478024" y="5193792"/>
-            <a:ext cx="905256" cy="0"/>
-          </a:xfrm>
-          <a:prstGeom prst="line">
-            <a:avLst/>
-          </a:prstGeom>
-          <a:noFill/>
-          <a:ln w="28575">
-            <a:solidFill>
-              <a:srgbClr val="FF4D6D">
-                <a:alpha val="75000"/>
-              </a:srgbClr>
-            </a:solidFill>
-            <a:prstDash val="solid"/>
-          </a:ln>
-        </p:spPr>
-      </p:sp>
-      <p:sp>
-        <p:nvSpPr>
-          <p:cNvPr id="24" name="Shape 19"/>
-          <p:cNvSpPr/>
-          <p:nvPr/>
-        </p:nvSpPr>
-        <p:spPr>
-          <a:xfrm>
-            <a:off x="3977640" y="2889504"/>
-            <a:ext cx="3739896" cy="777240"/>
+            <a:endParaRPr lang="en-US" sz="1200" dirty="0"/>
+          </a:p>
+        </p:txBody>
+      </p:sp>
+      <p:sp>
+        <p:nvSpPr>
+          <p:cNvPr id="19" name="Shape 13"/>
+          <p:cNvSpPr/>
+          <p:nvPr/>
+        </p:nvSpPr>
+        <p:spPr>
+          <a:xfrm>
+            <a:off x="8613648" y="3840480"/>
+            <a:ext cx="3072384" cy="493776"/>
           </a:xfrm>
           <a:prstGeom prst="roundRect">
             <a:avLst>
-              <a:gd name="adj" fmla="val 11765"/>
+              <a:gd name="adj" fmla="val 16667"/>
             </a:avLst>
           </a:prstGeom>
           <a:solidFill>
@@ -6932,14 +6918,14 @@
       </p:sp>
       <p:sp>
         <p:nvSpPr>
-          <p:cNvPr id="25" name="Text 20"/>
-          <p:cNvSpPr/>
-          <p:nvPr/>
-        </p:nvSpPr>
-        <p:spPr>
-          <a:xfrm>
-            <a:off x="4206240" y="3008376"/>
-            <a:ext cx="3328416" cy="219456"/>
+          <p:cNvPr id="20" name="Text 14"/>
+          <p:cNvSpPr/>
+          <p:nvPr/>
+        </p:nvSpPr>
+        <p:spPr>
+          <a:xfrm>
+            <a:off x="8814816" y="3904488"/>
+            <a:ext cx="2706624" cy="182880"/>
           </a:xfrm>
           <a:prstGeom prst="rect">
             <a:avLst/>
@@ -6955,7 +6941,7 @@
               <a:buNone/>
             </a:pPr>
             <a:r>
-              <a:rPr lang="en-US" sz="1100" b="1" spc="120" kern="0" dirty="0">
+              <a:rPr lang="en-US" sz="950" b="1" spc="100" kern="0" dirty="0">
                 <a:solidFill>
                   <a:srgbClr val="A4133C"/>
                 </a:solidFill>
@@ -6965,20 +6951,20 @@
               </a:rPr>
               <a:t>RHYTHM</a:t>
             </a:r>
-            <a:endParaRPr lang="en-US" sz="1100" dirty="0"/>
-          </a:p>
-        </p:txBody>
-      </p:sp>
-      <p:sp>
-        <p:nvSpPr>
-          <p:cNvPr id="26" name="Text 21"/>
-          <p:cNvSpPr/>
-          <p:nvPr/>
-        </p:nvSpPr>
-        <p:spPr>
-          <a:xfrm>
-            <a:off x="4206240" y="3236976"/>
-            <a:ext cx="3328416" cy="384048"/>
+            <a:endParaRPr lang="en-US" sz="950" dirty="0"/>
+          </a:p>
+        </p:txBody>
+      </p:sp>
+      <p:sp>
+        <p:nvSpPr>
+          <p:cNvPr id="21" name="Text 15"/>
+          <p:cNvSpPr/>
+          <p:nvPr/>
+        </p:nvSpPr>
+        <p:spPr>
+          <a:xfrm>
+            <a:off x="8814816" y="4078224"/>
+            <a:ext cx="2706624" cy="237744"/>
           </a:xfrm>
           <a:prstGeom prst="rect">
             <a:avLst/>
@@ -6991,13 +6977,10 @@
           <a:lstStyle/>
           <a:p>
             <a:pPr algn="l" indent="0" marL="0">
-              <a:lnSpc>
-                <a:spcPct val="100000"/>
-              </a:lnSpc>
-              <a:buNone/>
-            </a:pPr>
-            <a:r>
-              <a:rPr lang="en-US" sz="1300" b="1" dirty="0">
+              <a:buNone/>
+            </a:pPr>
+            <a:r>
+              <a:rPr lang="en-US" sz="1250" b="1" dirty="0">
                 <a:solidFill>
                   <a:srgbClr val="2B2B33"/>
                 </a:solidFill>
@@ -7005,26 +6988,26 @@
                 <a:ea typeface="Calibri" pitchFamily="34" charset="-122"/>
                 <a:cs typeface="Calibri" pitchFamily="34" charset="-120"/>
               </a:rPr>
-              <a:t>Atrial fibrillation (irregularly irregular)</a:t>
-            </a:r>
-            <a:endParaRPr lang="en-US" sz="1300" dirty="0"/>
-          </a:p>
-        </p:txBody>
-      </p:sp>
-      <p:sp>
-        <p:nvSpPr>
-          <p:cNvPr id="27" name="Shape 22"/>
-          <p:cNvSpPr/>
-          <p:nvPr/>
-        </p:nvSpPr>
-        <p:spPr>
-          <a:xfrm>
-            <a:off x="7946136" y="2889504"/>
-            <a:ext cx="3739896" cy="777240"/>
+              <a:t>Atrial fibrillation (irregular)</a:t>
+            </a:r>
+            <a:endParaRPr lang="en-US" sz="1250" dirty="0"/>
+          </a:p>
+        </p:txBody>
+      </p:sp>
+      <p:sp>
+        <p:nvSpPr>
+          <p:cNvPr id="22" name="Shape 16"/>
+          <p:cNvSpPr/>
+          <p:nvPr/>
+        </p:nvSpPr>
+        <p:spPr>
+          <a:xfrm>
+            <a:off x="8613648" y="4389120"/>
+            <a:ext cx="3072384" cy="493776"/>
           </a:xfrm>
           <a:prstGeom prst="roundRect">
             <a:avLst>
-              <a:gd name="adj" fmla="val 11765"/>
+              <a:gd name="adj" fmla="val 16667"/>
             </a:avLst>
           </a:prstGeom>
           <a:solidFill>
@@ -7040,14 +7023,14 @@
       </p:sp>
       <p:sp>
         <p:nvSpPr>
-          <p:cNvPr id="28" name="Text 23"/>
-          <p:cNvSpPr/>
-          <p:nvPr/>
-        </p:nvSpPr>
-        <p:spPr>
-          <a:xfrm>
-            <a:off x="8174736" y="3008376"/>
-            <a:ext cx="3328416" cy="219456"/>
+          <p:cNvPr id="23" name="Text 17"/>
+          <p:cNvSpPr/>
+          <p:nvPr/>
+        </p:nvSpPr>
+        <p:spPr>
+          <a:xfrm>
+            <a:off x="8814816" y="4453128"/>
+            <a:ext cx="2706624" cy="182880"/>
           </a:xfrm>
           <a:prstGeom prst="rect">
             <a:avLst/>
@@ -7063,7 +7046,7 @@
               <a:buNone/>
             </a:pPr>
             <a:r>
-              <a:rPr lang="en-US" sz="1100" b="1" spc="120" kern="0" dirty="0">
+              <a:rPr lang="en-US" sz="950" b="1" spc="100" kern="0" dirty="0">
                 <a:solidFill>
                   <a:srgbClr val="A4133C"/>
                 </a:solidFill>
@@ -7073,20 +7056,20 @@
               </a:rPr>
               <a:t>P WAVES</a:t>
             </a:r>
-            <a:endParaRPr lang="en-US" sz="1100" dirty="0"/>
-          </a:p>
-        </p:txBody>
-      </p:sp>
-      <p:sp>
-        <p:nvSpPr>
-          <p:cNvPr id="29" name="Text 24"/>
-          <p:cNvSpPr/>
-          <p:nvPr/>
-        </p:nvSpPr>
-        <p:spPr>
-          <a:xfrm>
-            <a:off x="8174736" y="3236976"/>
-            <a:ext cx="3328416" cy="384048"/>
+            <a:endParaRPr lang="en-US" sz="950" dirty="0"/>
+          </a:p>
+        </p:txBody>
+      </p:sp>
+      <p:sp>
+        <p:nvSpPr>
+          <p:cNvPr id="24" name="Text 18"/>
+          <p:cNvSpPr/>
+          <p:nvPr/>
+        </p:nvSpPr>
+        <p:spPr>
+          <a:xfrm>
+            <a:off x="8814816" y="4626864"/>
+            <a:ext cx="2706624" cy="237744"/>
           </a:xfrm>
           <a:prstGeom prst="rect">
             <a:avLst/>
@@ -7099,13 +7082,10 @@
           <a:lstStyle/>
           <a:p>
             <a:pPr algn="l" indent="0" marL="0">
-              <a:lnSpc>
-                <a:spcPct val="100000"/>
-              </a:lnSpc>
-              <a:buNone/>
-            </a:pPr>
-            <a:r>
-              <a:rPr lang="en-US" sz="1300" b="1" dirty="0">
+              <a:buNone/>
+            </a:pPr>
+            <a:r>
+              <a:rPr lang="en-US" sz="1250" b="1" dirty="0">
                 <a:solidFill>
                   <a:srgbClr val="2B2B33"/>
                 </a:solidFill>
@@ -7113,26 +7093,26 @@
                 <a:ea typeface="Calibri" pitchFamily="34" charset="-122"/>
                 <a:cs typeface="Calibri" pitchFamily="34" charset="-120"/>
               </a:rPr>
-              <a:t>Absent (no organised atrial activity)</a:t>
-            </a:r>
-            <a:endParaRPr lang="en-US" sz="1300" dirty="0"/>
-          </a:p>
-        </p:txBody>
-      </p:sp>
-      <p:sp>
-        <p:nvSpPr>
-          <p:cNvPr id="30" name="Shape 25"/>
-          <p:cNvSpPr/>
-          <p:nvPr/>
-        </p:nvSpPr>
-        <p:spPr>
-          <a:xfrm>
-            <a:off x="3977640" y="3808476"/>
-            <a:ext cx="3739896" cy="777240"/>
+              <a:t>Absent</a:t>
+            </a:r>
+            <a:endParaRPr lang="en-US" sz="1250" dirty="0"/>
+          </a:p>
+        </p:txBody>
+      </p:sp>
+      <p:sp>
+        <p:nvSpPr>
+          <p:cNvPr id="25" name="Shape 19"/>
+          <p:cNvSpPr/>
+          <p:nvPr/>
+        </p:nvSpPr>
+        <p:spPr>
+          <a:xfrm>
+            <a:off x="8613648" y="4937760"/>
+            <a:ext cx="3072384" cy="493776"/>
           </a:xfrm>
           <a:prstGeom prst="roundRect">
             <a:avLst>
-              <a:gd name="adj" fmla="val 11765"/>
+              <a:gd name="adj" fmla="val 16667"/>
             </a:avLst>
           </a:prstGeom>
           <a:solidFill>
@@ -7148,14 +7128,14 @@
       </p:sp>
       <p:sp>
         <p:nvSpPr>
-          <p:cNvPr id="31" name="Text 26"/>
-          <p:cNvSpPr/>
-          <p:nvPr/>
-        </p:nvSpPr>
-        <p:spPr>
-          <a:xfrm>
-            <a:off x="4206240" y="3927348"/>
-            <a:ext cx="3328416" cy="219456"/>
+          <p:cNvPr id="26" name="Text 20"/>
+          <p:cNvSpPr/>
+          <p:nvPr/>
+        </p:nvSpPr>
+        <p:spPr>
+          <a:xfrm>
+            <a:off x="8814816" y="5001768"/>
+            <a:ext cx="2706624" cy="182880"/>
           </a:xfrm>
           <a:prstGeom prst="rect">
             <a:avLst/>
@@ -7171,7 +7151,7 @@
               <a:buNone/>
             </a:pPr>
             <a:r>
-              <a:rPr lang="en-US" sz="1100" b="1" spc="120" kern="0" dirty="0">
+              <a:rPr lang="en-US" sz="950" b="1" spc="100" kern="0" dirty="0">
                 <a:solidFill>
                   <a:srgbClr val="A4133C"/>
                 </a:solidFill>
@@ -7179,22 +7159,22 @@
                 <a:ea typeface="Calibri" pitchFamily="34" charset="-122"/>
                 <a:cs typeface="Calibri" pitchFamily="34" charset="-120"/>
               </a:rPr>
-              <a:t>PR INTERVAL</a:t>
-            </a:r>
-            <a:endParaRPr lang="en-US" sz="1100" dirty="0"/>
-          </a:p>
-        </p:txBody>
-      </p:sp>
-      <p:sp>
-        <p:nvSpPr>
-          <p:cNvPr id="32" name="Text 27"/>
-          <p:cNvSpPr/>
-          <p:nvPr/>
-        </p:nvSpPr>
-        <p:spPr>
-          <a:xfrm>
-            <a:off x="4206240" y="4155948"/>
-            <a:ext cx="3328416" cy="384048"/>
+              <a:t>PR · QRS</a:t>
+            </a:r>
+            <a:endParaRPr lang="en-US" sz="950" dirty="0"/>
+          </a:p>
+        </p:txBody>
+      </p:sp>
+      <p:sp>
+        <p:nvSpPr>
+          <p:cNvPr id="27" name="Text 21"/>
+          <p:cNvSpPr/>
+          <p:nvPr/>
+        </p:nvSpPr>
+        <p:spPr>
+          <a:xfrm>
+            <a:off x="8814816" y="5175504"/>
+            <a:ext cx="2706624" cy="237744"/>
           </a:xfrm>
           <a:prstGeom prst="rect">
             <a:avLst/>
@@ -7207,13 +7187,10 @@
           <a:lstStyle/>
           <a:p>
             <a:pPr algn="l" indent="0" marL="0">
-              <a:lnSpc>
-                <a:spcPct val="100000"/>
-              </a:lnSpc>
-              <a:buNone/>
-            </a:pPr>
-            <a:r>
-              <a:rPr lang="en-US" sz="1300" b="1" dirty="0">
+              <a:buNone/>
+            </a:pPr>
+            <a:r>
+              <a:rPr lang="en-US" sz="1250" b="1" dirty="0">
                 <a:solidFill>
                   <a:srgbClr val="2B2B33"/>
                 </a:solidFill>
@@ -7221,26 +7198,26 @@
                 <a:ea typeface="Calibri" pitchFamily="34" charset="-122"/>
                 <a:cs typeface="Calibri" pitchFamily="34" charset="-120"/>
               </a:rPr>
-              <a:t>Not measurable</a:t>
-            </a:r>
-            <a:endParaRPr lang="en-US" sz="1300" dirty="0"/>
-          </a:p>
-        </p:txBody>
-      </p:sp>
-      <p:sp>
-        <p:nvSpPr>
-          <p:cNvPr id="33" name="Shape 28"/>
-          <p:cNvSpPr/>
-          <p:nvPr/>
-        </p:nvSpPr>
-        <p:spPr>
-          <a:xfrm>
-            <a:off x="7946136" y="3808476"/>
-            <a:ext cx="3739896" cy="777240"/>
+              <a:t>Not measurable · 80 ms</a:t>
+            </a:r>
+            <a:endParaRPr lang="en-US" sz="1250" dirty="0"/>
+          </a:p>
+        </p:txBody>
+      </p:sp>
+      <p:sp>
+        <p:nvSpPr>
+          <p:cNvPr id="28" name="Shape 22"/>
+          <p:cNvSpPr/>
+          <p:nvPr/>
+        </p:nvSpPr>
+        <p:spPr>
+          <a:xfrm>
+            <a:off x="8613648" y="5486400"/>
+            <a:ext cx="3072384" cy="493776"/>
           </a:xfrm>
           <a:prstGeom prst="roundRect">
             <a:avLst>
-              <a:gd name="adj" fmla="val 11765"/>
+              <a:gd name="adj" fmla="val 16667"/>
             </a:avLst>
           </a:prstGeom>
           <a:solidFill>
@@ -7256,14 +7233,14 @@
       </p:sp>
       <p:sp>
         <p:nvSpPr>
-          <p:cNvPr id="34" name="Text 29"/>
-          <p:cNvSpPr/>
-          <p:nvPr/>
-        </p:nvSpPr>
-        <p:spPr>
-          <a:xfrm>
-            <a:off x="8174736" y="3927348"/>
-            <a:ext cx="3328416" cy="219456"/>
+          <p:cNvPr id="29" name="Text 23"/>
+          <p:cNvSpPr/>
+          <p:nvPr/>
+        </p:nvSpPr>
+        <p:spPr>
+          <a:xfrm>
+            <a:off x="8814816" y="5550408"/>
+            <a:ext cx="2706624" cy="182880"/>
           </a:xfrm>
           <a:prstGeom prst="rect">
             <a:avLst/>
@@ -7279,7 +7256,7 @@
               <a:buNone/>
             </a:pPr>
             <a:r>
-              <a:rPr lang="en-US" sz="1100" b="1" spc="120" kern="0" dirty="0">
+              <a:rPr lang="en-US" sz="950" b="1" spc="100" kern="0" dirty="0">
                 <a:solidFill>
                   <a:srgbClr val="A4133C"/>
                 </a:solidFill>
@@ -7287,22 +7264,22 @@
                 <a:ea typeface="Calibri" pitchFamily="34" charset="-122"/>
                 <a:cs typeface="Calibri" pitchFamily="34" charset="-120"/>
               </a:rPr>
-              <a:t>QRS DURATION</a:t>
-            </a:r>
-            <a:endParaRPr lang="en-US" sz="1100" dirty="0"/>
-          </a:p>
-        </p:txBody>
-      </p:sp>
-      <p:sp>
-        <p:nvSpPr>
-          <p:cNvPr id="35" name="Text 30"/>
-          <p:cNvSpPr/>
-          <p:nvPr/>
-        </p:nvSpPr>
-        <p:spPr>
-          <a:xfrm>
-            <a:off x="8174736" y="4155948"/>
-            <a:ext cx="3328416" cy="384048"/>
+              <a:t>QTC · AXIS</a:t>
+            </a:r>
+            <a:endParaRPr lang="en-US" sz="950" dirty="0"/>
+          </a:p>
+        </p:txBody>
+      </p:sp>
+      <p:sp>
+        <p:nvSpPr>
+          <p:cNvPr id="30" name="Text 24"/>
+          <p:cNvSpPr/>
+          <p:nvPr/>
+        </p:nvSpPr>
+        <p:spPr>
+          <a:xfrm>
+            <a:off x="8814816" y="5724144"/>
+            <a:ext cx="2706624" cy="237744"/>
           </a:xfrm>
           <a:prstGeom prst="rect">
             <a:avLst/>
@@ -7315,13 +7292,10 @@
           <a:lstStyle/>
           <a:p>
             <a:pPr algn="l" indent="0" marL="0">
-              <a:lnSpc>
-                <a:spcPct val="100000"/>
-              </a:lnSpc>
-              <a:buNone/>
-            </a:pPr>
-            <a:r>
-              <a:rPr lang="en-US" sz="1300" b="1" dirty="0">
+              <a:buNone/>
+            </a:pPr>
+            <a:r>
+              <a:rPr lang="en-US" sz="1250" b="1" dirty="0">
                 <a:solidFill>
                   <a:srgbClr val="2B2B33"/>
                 </a:solidFill>
@@ -7329,338 +7303,15 @@
                 <a:ea typeface="Calibri" pitchFamily="34" charset="-122"/>
                 <a:cs typeface="Calibri" pitchFamily="34" charset="-120"/>
               </a:rPr>
-              <a:t>80 ms</a:t>
-            </a:r>
-            <a:pPr algn="l" indent="0" marL="0">
-              <a:lnSpc>
-                <a:spcPct val="100000"/>
-              </a:lnSpc>
-              <a:buNone/>
-            </a:pPr>
-            <a:r>
-              <a:rPr lang="en-US" sz="1100" b="1" dirty="0">
-                <a:solidFill>
-                  <a:srgbClr val="2E7D32"/>
-                </a:solidFill>
-                <a:latin typeface="Calibri" pitchFamily="34" charset="0"/>
-                <a:ea typeface="Calibri" pitchFamily="34" charset="-122"/>
-                <a:cs typeface="Calibri" pitchFamily="34" charset="-120"/>
-              </a:rPr>
-              <a:t>   normal</a:t>
-            </a:r>
-            <a:endParaRPr lang="en-US" sz="1300" dirty="0"/>
-          </a:p>
-        </p:txBody>
-      </p:sp>
-      <p:sp>
-        <p:nvSpPr>
-          <p:cNvPr id="36" name="Shape 31"/>
-          <p:cNvSpPr/>
-          <p:nvPr/>
-        </p:nvSpPr>
-        <p:spPr>
-          <a:xfrm>
-            <a:off x="3977640" y="4727448"/>
-            <a:ext cx="3739896" cy="777240"/>
-          </a:xfrm>
-          <a:prstGeom prst="roundRect">
-            <a:avLst>
-              <a:gd name="adj" fmla="val 11765"/>
-            </a:avLst>
-          </a:prstGeom>
-          <a:solidFill>
-            <a:srgbClr val="FFF0F3"/>
-          </a:solidFill>
-          <a:ln w="12700">
-            <a:solidFill>
-              <a:srgbClr val="FBD8DF"/>
-            </a:solidFill>
-            <a:prstDash val="solid"/>
-          </a:ln>
-        </p:spPr>
-      </p:sp>
-      <p:sp>
-        <p:nvSpPr>
-          <p:cNvPr id="37" name="Text 32"/>
-          <p:cNvSpPr/>
-          <p:nvPr/>
-        </p:nvSpPr>
-        <p:spPr>
-          <a:xfrm>
-            <a:off x="4206240" y="4846320"/>
-            <a:ext cx="3328416" cy="219456"/>
-          </a:xfrm>
-          <a:prstGeom prst="rect">
-            <a:avLst/>
-          </a:prstGeom>
-          <a:noFill/>
-          <a:ln/>
-        </p:spPr>
-        <p:txBody>
-          <a:bodyPr wrap="square" lIns="0" tIns="0" rIns="0" bIns="0" rtlCol="0" anchor="t"/>
-          <a:lstStyle/>
-          <a:p>
-            <a:pPr algn="l" indent="0" marL="0">
-              <a:buNone/>
-            </a:pPr>
-            <a:r>
-              <a:rPr lang="en-US" sz="1100" b="1" spc="120" kern="0" dirty="0">
-                <a:solidFill>
-                  <a:srgbClr val="A4133C"/>
-                </a:solidFill>
-                <a:latin typeface="Calibri" pitchFamily="34" charset="0"/>
-                <a:ea typeface="Calibri" pitchFamily="34" charset="-122"/>
-                <a:cs typeface="Calibri" pitchFamily="34" charset="-120"/>
-              </a:rPr>
-              <a:t>QT / QTC</a:t>
-            </a:r>
-            <a:endParaRPr lang="en-US" sz="1100" dirty="0"/>
-          </a:p>
-        </p:txBody>
-      </p:sp>
-      <p:sp>
-        <p:nvSpPr>
-          <p:cNvPr id="38" name="Text 33"/>
-          <p:cNvSpPr/>
-          <p:nvPr/>
-        </p:nvSpPr>
-        <p:spPr>
-          <a:xfrm>
-            <a:off x="4206240" y="5074920"/>
-            <a:ext cx="3328416" cy="384048"/>
-          </a:xfrm>
-          <a:prstGeom prst="rect">
-            <a:avLst/>
-          </a:prstGeom>
-          <a:noFill/>
-          <a:ln/>
-        </p:spPr>
-        <p:txBody>
-          <a:bodyPr wrap="square" lIns="0" tIns="0" rIns="0" bIns="0" rtlCol="0" anchor="t"/>
-          <a:lstStyle/>
-          <a:p>
-            <a:pPr algn="l" indent="0" marL="0">
-              <a:lnSpc>
-                <a:spcPct val="100000"/>
-              </a:lnSpc>
-              <a:buNone/>
-            </a:pPr>
-            <a:r>
-              <a:rPr lang="en-US" sz="1300" b="1" dirty="0">
-                <a:solidFill>
-                  <a:srgbClr val="2B2B33"/>
-                </a:solidFill>
-                <a:latin typeface="Calibri" pitchFamily="34" charset="0"/>
-                <a:ea typeface="Calibri" pitchFamily="34" charset="-122"/>
-                <a:cs typeface="Calibri" pitchFamily="34" charset="-120"/>
-              </a:rPr>
-              <a:t>298 / 382 ms</a:t>
-            </a:r>
-            <a:endParaRPr lang="en-US" sz="1300" dirty="0"/>
-          </a:p>
-        </p:txBody>
-      </p:sp>
-      <p:sp>
-        <p:nvSpPr>
-          <p:cNvPr id="39" name="Shape 34"/>
-          <p:cNvSpPr/>
-          <p:nvPr/>
-        </p:nvSpPr>
-        <p:spPr>
-          <a:xfrm>
-            <a:off x="7946136" y="4727448"/>
-            <a:ext cx="3739896" cy="777240"/>
-          </a:xfrm>
-          <a:prstGeom prst="roundRect">
-            <a:avLst>
-              <a:gd name="adj" fmla="val 11765"/>
-            </a:avLst>
-          </a:prstGeom>
-          <a:solidFill>
-            <a:srgbClr val="FFF0F3"/>
-          </a:solidFill>
-          <a:ln w="12700">
-            <a:solidFill>
-              <a:srgbClr val="FBD8DF"/>
-            </a:solidFill>
-            <a:prstDash val="solid"/>
-          </a:ln>
-        </p:spPr>
-      </p:sp>
-      <p:sp>
-        <p:nvSpPr>
-          <p:cNvPr id="40" name="Text 35"/>
-          <p:cNvSpPr/>
-          <p:nvPr/>
-        </p:nvSpPr>
-        <p:spPr>
-          <a:xfrm>
-            <a:off x="8174736" y="4846320"/>
-            <a:ext cx="3328416" cy="219456"/>
-          </a:xfrm>
-          <a:prstGeom prst="rect">
-            <a:avLst/>
-          </a:prstGeom>
-          <a:noFill/>
-          <a:ln/>
-        </p:spPr>
-        <p:txBody>
-          <a:bodyPr wrap="square" lIns="0" tIns="0" rIns="0" bIns="0" rtlCol="0" anchor="t"/>
-          <a:lstStyle/>
-          <a:p>
-            <a:pPr algn="l" indent="0" marL="0">
-              <a:buNone/>
-            </a:pPr>
-            <a:r>
-              <a:rPr lang="en-US" sz="1100" b="1" spc="120" kern="0" dirty="0">
-                <a:solidFill>
-                  <a:srgbClr val="A4133C"/>
-                </a:solidFill>
-                <a:latin typeface="Calibri" pitchFamily="34" charset="0"/>
-                <a:ea typeface="Calibri" pitchFamily="34" charset="-122"/>
-                <a:cs typeface="Calibri" pitchFamily="34" charset="-120"/>
-              </a:rPr>
-              <a:t>QRS AXIS</a:t>
-            </a:r>
-            <a:endParaRPr lang="en-US" sz="1100" dirty="0"/>
-          </a:p>
-        </p:txBody>
-      </p:sp>
-      <p:sp>
-        <p:nvSpPr>
-          <p:cNvPr id="41" name="Text 36"/>
-          <p:cNvSpPr/>
-          <p:nvPr/>
-        </p:nvSpPr>
-        <p:spPr>
-          <a:xfrm>
-            <a:off x="8174736" y="5074920"/>
-            <a:ext cx="3328416" cy="384048"/>
-          </a:xfrm>
-          <a:prstGeom prst="rect">
-            <a:avLst/>
-          </a:prstGeom>
-          <a:noFill/>
-          <a:ln/>
-        </p:spPr>
-        <p:txBody>
-          <a:bodyPr wrap="square" lIns="0" tIns="0" rIns="0" bIns="0" rtlCol="0" anchor="t"/>
-          <a:lstStyle/>
-          <a:p>
-            <a:pPr algn="l" indent="0" marL="0">
-              <a:lnSpc>
-                <a:spcPct val="100000"/>
-              </a:lnSpc>
-              <a:buNone/>
-            </a:pPr>
-            <a:r>
-              <a:rPr lang="en-US" sz="1300" b="1" dirty="0">
-                <a:solidFill>
-                  <a:srgbClr val="2B2B33"/>
-                </a:solidFill>
-                <a:latin typeface="Calibri" pitchFamily="34" charset="0"/>
-                <a:ea typeface="Calibri" pitchFamily="34" charset="-122"/>
-                <a:cs typeface="Calibri" pitchFamily="34" charset="-120"/>
-              </a:rPr>
-              <a:t>38°</a:t>
-            </a:r>
-            <a:endParaRPr lang="en-US" sz="1300" dirty="0"/>
-          </a:p>
-        </p:txBody>
-      </p:sp>
-      <p:sp>
-        <p:nvSpPr>
-          <p:cNvPr id="42" name="Shape 37"/>
-          <p:cNvSpPr/>
-          <p:nvPr/>
-        </p:nvSpPr>
-        <p:spPr>
-          <a:xfrm>
-            <a:off x="502920" y="5687568"/>
-            <a:ext cx="11183112" cy="457200"/>
-          </a:xfrm>
-          <a:prstGeom prst="roundRect">
-            <a:avLst>
-              <a:gd name="adj" fmla="val 20000"/>
-            </a:avLst>
-          </a:prstGeom>
-          <a:solidFill>
-            <a:srgbClr val="FFFFFF"/>
-          </a:solidFill>
-          <a:ln w="12700">
-            <a:solidFill>
-              <a:srgbClr val="FBD8DF"/>
-            </a:solidFill>
-            <a:prstDash val="solid"/>
-          </a:ln>
-        </p:spPr>
-      </p:sp>
-      <p:pic>
-        <p:nvPicPr>
-          <p:cNvPr id="43" name="Image 3" descr="preencoded.png">    </p:cNvPr>
-          <p:cNvPicPr>
-            <a:picLocks noChangeAspect="1"/>
-          </p:cNvPicPr>
-          <p:nvPr/>
-        </p:nvPicPr>
-        <p:blipFill>
-          <a:blip r:embed="rId4"/>
-          <a:stretch>
-            <a:fillRect/>
-          </a:stretch>
-        </p:blipFill>
-        <p:spPr>
-          <a:xfrm>
-            <a:off x="749808" y="5797296"/>
-            <a:ext cx="237744" cy="237744"/>
-          </a:xfrm>
-          <a:prstGeom prst="rect">
-            <a:avLst/>
-          </a:prstGeom>
-        </p:spPr>
-      </p:pic>
-      <p:sp>
-        <p:nvSpPr>
-          <p:cNvPr id="44" name="Text 38"/>
-          <p:cNvSpPr/>
-          <p:nvPr/>
-        </p:nvSpPr>
-        <p:spPr>
-          <a:xfrm>
-            <a:off x="1097280" y="5687568"/>
-            <a:ext cx="10332720" cy="457200"/>
-          </a:xfrm>
-          <a:prstGeom prst="rect">
-            <a:avLst/>
-          </a:prstGeom>
-          <a:noFill/>
-          <a:ln/>
-        </p:spPr>
-        <p:txBody>
-          <a:bodyPr wrap="square" lIns="0" tIns="0" rIns="0" bIns="0" rtlCol="0" anchor="ctr"/>
-          <a:lstStyle/>
-          <a:p>
-            <a:pPr algn="l" indent="0" marL="0">
-              <a:buNone/>
-            </a:pPr>
-            <a:r>
-              <a:rPr lang="en-US" sz="1350" i="1" dirty="0">
-                <a:solidFill>
-                  <a:srgbClr val="2B2B33"/>
-                </a:solidFill>
-                <a:latin typeface="Calibri" pitchFamily="34" charset="0"/>
-                <a:ea typeface="Calibri" pitchFamily="34" charset="-122"/>
-                <a:cs typeface="Calibri" pitchFamily="34" charset="-120"/>
-              </a:rPr>
-              <a:t>Confirms atrial fibrillation with a fast ventricular rate.</a:t>
-            </a:r>
-            <a:endParaRPr lang="en-US" sz="1350" dirty="0"/>
-          </a:p>
-        </p:txBody>
-      </p:sp>
-      <p:sp>
-        <p:nvSpPr>
-          <p:cNvPr id="45" name="Text 39"/>
+              <a:t>382 ms · 38°</a:t>
+            </a:r>
+            <a:endParaRPr lang="en-US" sz="1250" dirty="0"/>
+          </a:p>
+        </p:txBody>
+      </p:sp>
+      <p:sp>
+        <p:nvSpPr>
+          <p:cNvPr id="31" name="Text 25"/>
           <p:cNvSpPr/>
           <p:nvPr/>
         </p:nvSpPr>
@@ -7699,7 +7350,7 @@
       </p:sp>
       <p:sp>
         <p:nvSpPr>
-          <p:cNvPr id="46" name="Text 40"/>
+          <p:cNvPr id="32" name="Text 26"/>
           <p:cNvSpPr/>
           <p:nvPr/>
         </p:nvSpPr>
@@ -14826,6 +14477,1387 @@
     <p:bg>
       <p:bgPr>
         <a:solidFill>
+          <a:srgbClr val="FFFFFF"/>
+        </a:solidFill>
+      </p:bgPr>
+    </p:bg>
+    <p:spTree>
+      <p:nvGrpSpPr>
+        <p:cNvPr id="1" name=""/>
+        <p:cNvGrpSpPr/>
+        <p:nvPr/>
+      </p:nvGrpSpPr>
+      <p:grpSpPr>
+        <a:xfrm>
+          <a:off x="0" y="0"/>
+          <a:ext cx="0" cy="0"/>
+          <a:chOff x="0" y="0"/>
+          <a:chExt cx="0" cy="0"/>
+        </a:xfrm>
+      </p:grpSpPr>
+      <p:sp>
+        <p:nvSpPr>
+          <p:cNvPr id="2" name="Shape 0"/>
+          <p:cNvSpPr/>
+          <p:nvPr/>
+        </p:nvSpPr>
+        <p:spPr>
+          <a:xfrm>
+            <a:off x="502920" y="457200"/>
+            <a:ext cx="868680" cy="868680"/>
+          </a:xfrm>
+          <a:prstGeom prst="ellipse">
+            <a:avLst/>
+          </a:prstGeom>
+          <a:solidFill>
+            <a:srgbClr val="FFF0F3"/>
+          </a:solidFill>
+          <a:ln w="12700">
+            <a:solidFill>
+              <a:srgbClr val="FBD8DF"/>
+            </a:solidFill>
+            <a:prstDash val="solid"/>
+          </a:ln>
+        </p:spPr>
+      </p:sp>
+      <p:pic>
+        <p:nvPicPr>
+          <p:cNvPr id="3" name="Image 0" descr="preencoded.png">    </p:cNvPr>
+          <p:cNvPicPr>
+            <a:picLocks noChangeAspect="1"/>
+          </p:cNvPicPr>
+          <p:nvPr/>
+        </p:nvPicPr>
+        <p:blipFill>
+          <a:blip r:embed="rId1"/>
+          <a:stretch>
+            <a:fillRect/>
+          </a:stretch>
+        </p:blipFill>
+        <p:spPr>
+          <a:xfrm>
+            <a:off x="694944" y="649224"/>
+            <a:ext cx="484632" cy="484632"/>
+          </a:xfrm>
+          <a:prstGeom prst="rect">
+            <a:avLst/>
+          </a:prstGeom>
+        </p:spPr>
+      </p:pic>
+      <p:sp>
+        <p:nvSpPr>
+          <p:cNvPr id="4" name="Text 1"/>
+          <p:cNvSpPr/>
+          <p:nvPr/>
+        </p:nvSpPr>
+        <p:spPr>
+          <a:xfrm>
+            <a:off x="1572768" y="502920"/>
+            <a:ext cx="9601200" cy="274320"/>
+          </a:xfrm>
+          <a:prstGeom prst="rect">
+            <a:avLst/>
+          </a:prstGeom>
+          <a:noFill/>
+          <a:ln/>
+        </p:spPr>
+        <p:txBody>
+          <a:bodyPr wrap="square" rtlCol="0" anchor="t"/>
+          <a:lstStyle/>
+          <a:p>
+            <a:pPr algn="l" indent="0" marL="0">
+              <a:buNone/>
+            </a:pPr>
+            <a:r>
+              <a:rPr lang="en-US" sz="1250" b="1" spc="200" kern="0" dirty="0">
+                <a:solidFill>
+                  <a:srgbClr val="A4133C"/>
+                </a:solidFill>
+                <a:latin typeface="Calibri" pitchFamily="34" charset="0"/>
+                <a:ea typeface="Calibri" pitchFamily="34" charset="-122"/>
+                <a:cs typeface="Calibri" pitchFamily="34" charset="-120"/>
+              </a:rPr>
+              <a:t>CASE DISCUSSION</a:t>
+            </a:r>
+            <a:endParaRPr lang="en-US" sz="1250" dirty="0"/>
+          </a:p>
+        </p:txBody>
+      </p:sp>
+      <p:sp>
+        <p:nvSpPr>
+          <p:cNvPr id="5" name="Text 2"/>
+          <p:cNvSpPr/>
+          <p:nvPr/>
+        </p:nvSpPr>
+        <p:spPr>
+          <a:xfrm>
+            <a:off x="1554480" y="749808"/>
+            <a:ext cx="10058400" cy="640080"/>
+          </a:xfrm>
+          <a:prstGeom prst="rect">
+            <a:avLst/>
+          </a:prstGeom>
+          <a:noFill/>
+          <a:ln/>
+        </p:spPr>
+        <p:txBody>
+          <a:bodyPr wrap="square" rtlCol="0" anchor="t"/>
+          <a:lstStyle/>
+          <a:p>
+            <a:pPr algn="l" indent="0" marL="0">
+              <a:buNone/>
+            </a:pPr>
+            <a:r>
+              <a:rPr lang="en-US" sz="3000" b="1" dirty="0">
+                <a:solidFill>
+                  <a:srgbClr val="2B2B33"/>
+                </a:solidFill>
+                <a:latin typeface="Cambria" pitchFamily="34" charset="0"/>
+                <a:ea typeface="Cambria" pitchFamily="34" charset="-122"/>
+                <a:cs typeface="Cambria" pitchFamily="34" charset="-120"/>
+              </a:rPr>
+              <a:t>Differential &amp; Final Diagnosis</a:t>
+            </a:r>
+            <a:endParaRPr lang="en-US" sz="3000" dirty="0"/>
+          </a:p>
+        </p:txBody>
+      </p:sp>
+      <p:sp>
+        <p:nvSpPr>
+          <p:cNvPr id="6" name="Shape 3"/>
+          <p:cNvSpPr/>
+          <p:nvPr/>
+        </p:nvSpPr>
+        <p:spPr>
+          <a:xfrm>
+            <a:off x="502920" y="1783080"/>
+            <a:ext cx="6355080" cy="4206240"/>
+          </a:xfrm>
+          <a:prstGeom prst="roundRect">
+            <a:avLst>
+              <a:gd name="adj" fmla="val 2609"/>
+            </a:avLst>
+          </a:prstGeom>
+          <a:solidFill>
+            <a:srgbClr val="FFF0F3"/>
+          </a:solidFill>
+          <a:ln w="12700">
+            <a:solidFill>
+              <a:srgbClr val="FBD8DF"/>
+            </a:solidFill>
+            <a:prstDash val="solid"/>
+          </a:ln>
+          <a:effectLst>
+            <a:outerShdw sx="100000" sy="100000" kx="0" ky="0" algn="bl" rotWithShape="0" blurRad="127000" dist="50800" dir="5400000">
+              <a:srgbClr val="C9A3AC">
+                <a:alpha val="45000"/>
+              </a:srgbClr>
+            </a:outerShdw>
+          </a:effectLst>
+        </p:spPr>
+      </p:sp>
+      <p:sp>
+        <p:nvSpPr>
+          <p:cNvPr id="7" name="Text 4"/>
+          <p:cNvSpPr/>
+          <p:nvPr/>
+        </p:nvSpPr>
+        <p:spPr>
+          <a:xfrm>
+            <a:off x="822960" y="2029968"/>
+            <a:ext cx="5669280" cy="274320"/>
+          </a:xfrm>
+          <a:prstGeom prst="rect">
+            <a:avLst/>
+          </a:prstGeom>
+          <a:noFill/>
+          <a:ln/>
+        </p:spPr>
+        <p:txBody>
+          <a:bodyPr wrap="square" rtlCol="0" anchor="t"/>
+          <a:lstStyle/>
+          <a:p>
+            <a:pPr algn="l" indent="0" marL="0">
+              <a:buNone/>
+            </a:pPr>
+            <a:r>
+              <a:rPr lang="en-US" sz="1250" b="1" spc="150" kern="0" dirty="0">
+                <a:solidFill>
+                  <a:srgbClr val="A4133C"/>
+                </a:solidFill>
+                <a:latin typeface="Calibri" pitchFamily="34" charset="0"/>
+                <a:ea typeface="Calibri" pitchFamily="34" charset="-122"/>
+                <a:cs typeface="Calibri" pitchFamily="34" charset="-120"/>
+              </a:rPr>
+              <a:t>DIFFERENTIALS CONSIDERED</a:t>
+            </a:r>
+            <a:endParaRPr lang="en-US" sz="1250" dirty="0"/>
+          </a:p>
+        </p:txBody>
+      </p:sp>
+      <p:sp>
+        <p:nvSpPr>
+          <p:cNvPr id="8" name="Text 5"/>
+          <p:cNvSpPr/>
+          <p:nvPr/>
+        </p:nvSpPr>
+        <p:spPr>
+          <a:xfrm>
+            <a:off x="822960" y="2304288"/>
+            <a:ext cx="5669280" cy="274320"/>
+          </a:xfrm>
+          <a:prstGeom prst="rect">
+            <a:avLst/>
+          </a:prstGeom>
+          <a:noFill/>
+          <a:ln/>
+        </p:spPr>
+        <p:txBody>
+          <a:bodyPr wrap="square" rtlCol="0" anchor="t"/>
+          <a:lstStyle/>
+          <a:p>
+            <a:pPr algn="l" indent="0" marL="0">
+              <a:buNone/>
+            </a:pPr>
+            <a:r>
+              <a:rPr lang="en-US" sz="1250" i="1" dirty="0">
+                <a:solidFill>
+                  <a:srgbClr val="6B6B76"/>
+                </a:solidFill>
+                <a:latin typeface="Calibri" pitchFamily="34" charset="0"/>
+                <a:ea typeface="Calibri" pitchFamily="34" charset="-122"/>
+                <a:cs typeface="Calibri" pitchFamily="34" charset="-120"/>
+              </a:rPr>
+              <a:t>Causes of an irregular tachycardia</a:t>
+            </a:r>
+            <a:endParaRPr lang="en-US" sz="1250" dirty="0"/>
+          </a:p>
+        </p:txBody>
+      </p:sp>
+      <p:sp>
+        <p:nvSpPr>
+          <p:cNvPr id="9" name="Shape 6"/>
+          <p:cNvSpPr/>
+          <p:nvPr/>
+        </p:nvSpPr>
+        <p:spPr>
+          <a:xfrm>
+            <a:off x="868680" y="2779776"/>
+            <a:ext cx="384048" cy="384048"/>
+          </a:xfrm>
+          <a:prstGeom prst="ellipse">
+            <a:avLst/>
+          </a:prstGeom>
+          <a:solidFill>
+            <a:srgbClr val="FFFFFF"/>
+          </a:solidFill>
+          <a:ln w="12700">
+            <a:solidFill>
+              <a:srgbClr val="FBD8DF"/>
+            </a:solidFill>
+            <a:prstDash val="solid"/>
+          </a:ln>
+        </p:spPr>
+      </p:sp>
+      <p:pic>
+        <p:nvPicPr>
+          <p:cNvPr id="10" name="Image 1" descr="preencoded.png">    </p:cNvPr>
+          <p:cNvPicPr>
+            <a:picLocks noChangeAspect="1"/>
+          </p:cNvPicPr>
+          <p:nvPr/>
+        </p:nvPicPr>
+        <p:blipFill>
+          <a:blip r:embed="rId2"/>
+          <a:stretch>
+            <a:fillRect/>
+          </a:stretch>
+        </p:blipFill>
+        <p:spPr>
+          <a:xfrm>
+            <a:off x="941832" y="2852928"/>
+            <a:ext cx="237744" cy="237744"/>
+          </a:xfrm>
+          <a:prstGeom prst="rect">
+            <a:avLst/>
+          </a:prstGeom>
+        </p:spPr>
+      </p:pic>
+      <p:sp>
+        <p:nvSpPr>
+          <p:cNvPr id="11" name="Text 7"/>
+          <p:cNvSpPr/>
+          <p:nvPr/>
+        </p:nvSpPr>
+        <p:spPr>
+          <a:xfrm>
+            <a:off x="1417320" y="2706624"/>
+            <a:ext cx="5212080" cy="292608"/>
+          </a:xfrm>
+          <a:prstGeom prst="rect">
+            <a:avLst/>
+          </a:prstGeom>
+          <a:noFill/>
+          <a:ln/>
+        </p:spPr>
+        <p:txBody>
+          <a:bodyPr wrap="square" lIns="0" tIns="0" rIns="0" bIns="0" rtlCol="0" anchor="t"/>
+          <a:lstStyle/>
+          <a:p>
+            <a:pPr algn="l" indent="0" marL="0">
+              <a:buNone/>
+            </a:pPr>
+            <a:r>
+              <a:rPr lang="en-US" sz="1550" b="1" dirty="0">
+                <a:solidFill>
+                  <a:srgbClr val="2B2B33"/>
+                </a:solidFill>
+                <a:latin typeface="Cambria" pitchFamily="34" charset="0"/>
+                <a:ea typeface="Cambria" pitchFamily="34" charset="-122"/>
+                <a:cs typeface="Cambria" pitchFamily="34" charset="-120"/>
+              </a:rPr>
+              <a:t>Atrial flutter</a:t>
+            </a:r>
+            <a:endParaRPr lang="en-US" sz="1550" dirty="0"/>
+          </a:p>
+        </p:txBody>
+      </p:sp>
+      <p:sp>
+        <p:nvSpPr>
+          <p:cNvPr id="12" name="Text 8"/>
+          <p:cNvSpPr/>
+          <p:nvPr/>
+        </p:nvSpPr>
+        <p:spPr>
+          <a:xfrm>
+            <a:off x="1417320" y="2999232"/>
+            <a:ext cx="5257800" cy="274320"/>
+          </a:xfrm>
+          <a:prstGeom prst="rect">
+            <a:avLst/>
+          </a:prstGeom>
+          <a:noFill/>
+          <a:ln/>
+        </p:spPr>
+        <p:txBody>
+          <a:bodyPr wrap="square" lIns="0" tIns="0" rIns="0" bIns="0" rtlCol="0" anchor="t"/>
+          <a:lstStyle/>
+          <a:p>
+            <a:pPr algn="l" indent="0" marL="0">
+              <a:buNone/>
+            </a:pPr>
+            <a:r>
+              <a:rPr lang="en-US" sz="1200" dirty="0">
+                <a:solidFill>
+                  <a:srgbClr val="6B6B76"/>
+                </a:solidFill>
+                <a:latin typeface="Calibri" pitchFamily="34" charset="0"/>
+                <a:ea typeface="Calibri" pitchFamily="34" charset="-122"/>
+                <a:cs typeface="Calibri" pitchFamily="34" charset="-120"/>
+              </a:rPr>
+              <a:t>No sawtooth flutter waves; R–R irregular</a:t>
+            </a:r>
+            <a:endParaRPr lang="en-US" sz="1200" dirty="0"/>
+          </a:p>
+        </p:txBody>
+      </p:sp>
+      <p:sp>
+        <p:nvSpPr>
+          <p:cNvPr id="13" name="Shape 9"/>
+          <p:cNvSpPr/>
+          <p:nvPr/>
+        </p:nvSpPr>
+        <p:spPr>
+          <a:xfrm>
+            <a:off x="868680" y="3401568"/>
+            <a:ext cx="384048" cy="384048"/>
+          </a:xfrm>
+          <a:prstGeom prst="ellipse">
+            <a:avLst/>
+          </a:prstGeom>
+          <a:solidFill>
+            <a:srgbClr val="FFFFFF"/>
+          </a:solidFill>
+          <a:ln w="12700">
+            <a:solidFill>
+              <a:srgbClr val="FBD8DF"/>
+            </a:solidFill>
+            <a:prstDash val="solid"/>
+          </a:ln>
+        </p:spPr>
+      </p:sp>
+      <p:pic>
+        <p:nvPicPr>
+          <p:cNvPr id="14" name="Image 2" descr="preencoded.png">    </p:cNvPr>
+          <p:cNvPicPr>
+            <a:picLocks noChangeAspect="1"/>
+          </p:cNvPicPr>
+          <p:nvPr/>
+        </p:nvPicPr>
+        <p:blipFill>
+          <a:blip r:embed="rId3"/>
+          <a:stretch>
+            <a:fillRect/>
+          </a:stretch>
+        </p:blipFill>
+        <p:spPr>
+          <a:xfrm>
+            <a:off x="941832" y="3474720"/>
+            <a:ext cx="237744" cy="237744"/>
+          </a:xfrm>
+          <a:prstGeom prst="rect">
+            <a:avLst/>
+          </a:prstGeom>
+        </p:spPr>
+      </p:pic>
+      <p:sp>
+        <p:nvSpPr>
+          <p:cNvPr id="15" name="Text 10"/>
+          <p:cNvSpPr/>
+          <p:nvPr/>
+        </p:nvSpPr>
+        <p:spPr>
+          <a:xfrm>
+            <a:off x="1417320" y="3328416"/>
+            <a:ext cx="5212080" cy="292608"/>
+          </a:xfrm>
+          <a:prstGeom prst="rect">
+            <a:avLst/>
+          </a:prstGeom>
+          <a:noFill/>
+          <a:ln/>
+        </p:spPr>
+        <p:txBody>
+          <a:bodyPr wrap="square" lIns="0" tIns="0" rIns="0" bIns="0" rtlCol="0" anchor="t"/>
+          <a:lstStyle/>
+          <a:p>
+            <a:pPr algn="l" indent="0" marL="0">
+              <a:buNone/>
+            </a:pPr>
+            <a:r>
+              <a:rPr lang="en-US" sz="1550" b="1" dirty="0">
+                <a:solidFill>
+                  <a:srgbClr val="2B2B33"/>
+                </a:solidFill>
+                <a:latin typeface="Cambria" pitchFamily="34" charset="0"/>
+                <a:ea typeface="Cambria" pitchFamily="34" charset="-122"/>
+                <a:cs typeface="Cambria" pitchFamily="34" charset="-120"/>
+              </a:rPr>
+              <a:t>Multifocal atrial tachycardia</a:t>
+            </a:r>
+            <a:endParaRPr lang="en-US" sz="1550" dirty="0"/>
+          </a:p>
+        </p:txBody>
+      </p:sp>
+      <p:sp>
+        <p:nvSpPr>
+          <p:cNvPr id="16" name="Text 11"/>
+          <p:cNvSpPr/>
+          <p:nvPr/>
+        </p:nvSpPr>
+        <p:spPr>
+          <a:xfrm>
+            <a:off x="1417320" y="3621024"/>
+            <a:ext cx="5257800" cy="274320"/>
+          </a:xfrm>
+          <a:prstGeom prst="rect">
+            <a:avLst/>
+          </a:prstGeom>
+          <a:noFill/>
+          <a:ln/>
+        </p:spPr>
+        <p:txBody>
+          <a:bodyPr wrap="square" lIns="0" tIns="0" rIns="0" bIns="0" rtlCol="0" anchor="t"/>
+          <a:lstStyle/>
+          <a:p>
+            <a:pPr algn="l" indent="0" marL="0">
+              <a:buNone/>
+            </a:pPr>
+            <a:r>
+              <a:rPr lang="en-US" sz="1200" dirty="0">
+                <a:solidFill>
+                  <a:srgbClr val="6B6B76"/>
+                </a:solidFill>
+                <a:latin typeface="Calibri" pitchFamily="34" charset="0"/>
+                <a:ea typeface="Calibri" pitchFamily="34" charset="-122"/>
+                <a:cs typeface="Calibri" pitchFamily="34" charset="-120"/>
+              </a:rPr>
+              <a:t>No ≥ 3 differing P-wave morphologies</a:t>
+            </a:r>
+            <a:endParaRPr lang="en-US" sz="1200" dirty="0"/>
+          </a:p>
+        </p:txBody>
+      </p:sp>
+      <p:sp>
+        <p:nvSpPr>
+          <p:cNvPr id="17" name="Shape 12"/>
+          <p:cNvSpPr/>
+          <p:nvPr/>
+        </p:nvSpPr>
+        <p:spPr>
+          <a:xfrm>
+            <a:off x="868680" y="4023360"/>
+            <a:ext cx="384048" cy="384048"/>
+          </a:xfrm>
+          <a:prstGeom prst="ellipse">
+            <a:avLst/>
+          </a:prstGeom>
+          <a:solidFill>
+            <a:srgbClr val="FFFFFF"/>
+          </a:solidFill>
+          <a:ln w="12700">
+            <a:solidFill>
+              <a:srgbClr val="FBD8DF"/>
+            </a:solidFill>
+            <a:prstDash val="solid"/>
+          </a:ln>
+        </p:spPr>
+      </p:sp>
+      <p:pic>
+        <p:nvPicPr>
+          <p:cNvPr id="18" name="Image 3" descr="preencoded.png">    </p:cNvPr>
+          <p:cNvPicPr>
+            <a:picLocks noChangeAspect="1"/>
+          </p:cNvPicPr>
+          <p:nvPr/>
+        </p:nvPicPr>
+        <p:blipFill>
+          <a:blip r:embed="rId4"/>
+          <a:stretch>
+            <a:fillRect/>
+          </a:stretch>
+        </p:blipFill>
+        <p:spPr>
+          <a:xfrm>
+            <a:off x="941832" y="4096512"/>
+            <a:ext cx="237744" cy="237744"/>
+          </a:xfrm>
+          <a:prstGeom prst="rect">
+            <a:avLst/>
+          </a:prstGeom>
+        </p:spPr>
+      </p:pic>
+      <p:sp>
+        <p:nvSpPr>
+          <p:cNvPr id="19" name="Text 13"/>
+          <p:cNvSpPr/>
+          <p:nvPr/>
+        </p:nvSpPr>
+        <p:spPr>
+          <a:xfrm>
+            <a:off x="1417320" y="3950208"/>
+            <a:ext cx="5212080" cy="292608"/>
+          </a:xfrm>
+          <a:prstGeom prst="rect">
+            <a:avLst/>
+          </a:prstGeom>
+          <a:noFill/>
+          <a:ln/>
+        </p:spPr>
+        <p:txBody>
+          <a:bodyPr wrap="square" lIns="0" tIns="0" rIns="0" bIns="0" rtlCol="0" anchor="t"/>
+          <a:lstStyle/>
+          <a:p>
+            <a:pPr algn="l" indent="0" marL="0">
+              <a:buNone/>
+            </a:pPr>
+            <a:r>
+              <a:rPr lang="en-US" sz="1550" b="1" dirty="0">
+                <a:solidFill>
+                  <a:srgbClr val="2B2B33"/>
+                </a:solidFill>
+                <a:latin typeface="Cambria" pitchFamily="34" charset="0"/>
+                <a:ea typeface="Cambria" pitchFamily="34" charset="-122"/>
+                <a:cs typeface="Cambria" pitchFamily="34" charset="-120"/>
+              </a:rPr>
+              <a:t>Frequent atrial ectopics</a:t>
+            </a:r>
+            <a:endParaRPr lang="en-US" sz="1550" dirty="0"/>
+          </a:p>
+        </p:txBody>
+      </p:sp>
+      <p:sp>
+        <p:nvSpPr>
+          <p:cNvPr id="20" name="Text 14"/>
+          <p:cNvSpPr/>
+          <p:nvPr/>
+        </p:nvSpPr>
+        <p:spPr>
+          <a:xfrm>
+            <a:off x="1417320" y="4242816"/>
+            <a:ext cx="5257800" cy="274320"/>
+          </a:xfrm>
+          <a:prstGeom prst="rect">
+            <a:avLst/>
+          </a:prstGeom>
+          <a:noFill/>
+          <a:ln/>
+        </p:spPr>
+        <p:txBody>
+          <a:bodyPr wrap="square" lIns="0" tIns="0" rIns="0" bIns="0" rtlCol="0" anchor="t"/>
+          <a:lstStyle/>
+          <a:p>
+            <a:pPr algn="l" indent="0" marL="0">
+              <a:buNone/>
+            </a:pPr>
+            <a:r>
+              <a:rPr lang="en-US" sz="1200" dirty="0">
+                <a:solidFill>
+                  <a:srgbClr val="6B6B76"/>
+                </a:solidFill>
+                <a:latin typeface="Calibri" pitchFamily="34" charset="0"/>
+                <a:ea typeface="Calibri" pitchFamily="34" charset="-122"/>
+                <a:cs typeface="Calibri" pitchFamily="34" charset="-120"/>
+              </a:rPr>
+              <a:t>No discrete P waves before each QRS</a:t>
+            </a:r>
+            <a:endParaRPr lang="en-US" sz="1200" dirty="0"/>
+          </a:p>
+        </p:txBody>
+      </p:sp>
+      <p:sp>
+        <p:nvSpPr>
+          <p:cNvPr id="21" name="Shape 15"/>
+          <p:cNvSpPr/>
+          <p:nvPr/>
+        </p:nvSpPr>
+        <p:spPr>
+          <a:xfrm>
+            <a:off x="868680" y="4645152"/>
+            <a:ext cx="384048" cy="384048"/>
+          </a:xfrm>
+          <a:prstGeom prst="ellipse">
+            <a:avLst/>
+          </a:prstGeom>
+          <a:solidFill>
+            <a:srgbClr val="FFFFFF"/>
+          </a:solidFill>
+          <a:ln w="12700">
+            <a:solidFill>
+              <a:srgbClr val="FBD8DF"/>
+            </a:solidFill>
+            <a:prstDash val="solid"/>
+          </a:ln>
+        </p:spPr>
+      </p:sp>
+      <p:pic>
+        <p:nvPicPr>
+          <p:cNvPr id="22" name="Image 4" descr="preencoded.png">    </p:cNvPr>
+          <p:cNvPicPr>
+            <a:picLocks noChangeAspect="1"/>
+          </p:cNvPicPr>
+          <p:nvPr/>
+        </p:nvPicPr>
+        <p:blipFill>
+          <a:blip r:embed="rId5"/>
+          <a:stretch>
+            <a:fillRect/>
+          </a:stretch>
+        </p:blipFill>
+        <p:spPr>
+          <a:xfrm>
+            <a:off x="941832" y="4718304"/>
+            <a:ext cx="237744" cy="237744"/>
+          </a:xfrm>
+          <a:prstGeom prst="rect">
+            <a:avLst/>
+          </a:prstGeom>
+        </p:spPr>
+      </p:pic>
+      <p:sp>
+        <p:nvSpPr>
+          <p:cNvPr id="23" name="Text 16"/>
+          <p:cNvSpPr/>
+          <p:nvPr/>
+        </p:nvSpPr>
+        <p:spPr>
+          <a:xfrm>
+            <a:off x="1417320" y="4572000"/>
+            <a:ext cx="5212080" cy="292608"/>
+          </a:xfrm>
+          <a:prstGeom prst="rect">
+            <a:avLst/>
+          </a:prstGeom>
+          <a:noFill/>
+          <a:ln/>
+        </p:spPr>
+        <p:txBody>
+          <a:bodyPr wrap="square" lIns="0" tIns="0" rIns="0" bIns="0" rtlCol="0" anchor="t"/>
+          <a:lstStyle/>
+          <a:p>
+            <a:pPr algn="l" indent="0" marL="0">
+              <a:buNone/>
+            </a:pPr>
+            <a:r>
+              <a:rPr lang="en-US" sz="1550" b="1" dirty="0">
+                <a:solidFill>
+                  <a:srgbClr val="2B2B33"/>
+                </a:solidFill>
+                <a:latin typeface="Cambria" pitchFamily="34" charset="0"/>
+                <a:ea typeface="Cambria" pitchFamily="34" charset="-122"/>
+                <a:cs typeface="Cambria" pitchFamily="34" charset="-120"/>
+              </a:rPr>
+              <a:t>AVNRT / AVRT (SVT)</a:t>
+            </a:r>
+            <a:endParaRPr lang="en-US" sz="1550" dirty="0"/>
+          </a:p>
+        </p:txBody>
+      </p:sp>
+      <p:sp>
+        <p:nvSpPr>
+          <p:cNvPr id="24" name="Text 17"/>
+          <p:cNvSpPr/>
+          <p:nvPr/>
+        </p:nvSpPr>
+        <p:spPr>
+          <a:xfrm>
+            <a:off x="1417320" y="4864608"/>
+            <a:ext cx="5257800" cy="274320"/>
+          </a:xfrm>
+          <a:prstGeom prst="rect">
+            <a:avLst/>
+          </a:prstGeom>
+          <a:noFill/>
+          <a:ln/>
+        </p:spPr>
+        <p:txBody>
+          <a:bodyPr wrap="square" lIns="0" tIns="0" rIns="0" bIns="0" rtlCol="0" anchor="t"/>
+          <a:lstStyle/>
+          <a:p>
+            <a:pPr algn="l" indent="0" marL="0">
+              <a:buNone/>
+            </a:pPr>
+            <a:r>
+              <a:rPr lang="en-US" sz="1200" dirty="0">
+                <a:solidFill>
+                  <a:srgbClr val="6B6B76"/>
+                </a:solidFill>
+                <a:latin typeface="Calibri" pitchFamily="34" charset="0"/>
+                <a:ea typeface="Calibri" pitchFamily="34" charset="-122"/>
+                <a:cs typeface="Calibri" pitchFamily="34" charset="-120"/>
+              </a:rPr>
+              <a:t>Regular in SVT — here rhythm is irregular</a:t>
+            </a:r>
+            <a:endParaRPr lang="en-US" sz="1200" dirty="0"/>
+          </a:p>
+        </p:txBody>
+      </p:sp>
+      <p:sp>
+        <p:nvSpPr>
+          <p:cNvPr id="25" name="Shape 18"/>
+          <p:cNvSpPr/>
+          <p:nvPr/>
+        </p:nvSpPr>
+        <p:spPr>
+          <a:xfrm>
+            <a:off x="868680" y="5266944"/>
+            <a:ext cx="384048" cy="384048"/>
+          </a:xfrm>
+          <a:prstGeom prst="ellipse">
+            <a:avLst/>
+          </a:prstGeom>
+          <a:solidFill>
+            <a:srgbClr val="FFFFFF"/>
+          </a:solidFill>
+          <a:ln w="12700">
+            <a:solidFill>
+              <a:srgbClr val="FBD8DF"/>
+            </a:solidFill>
+            <a:prstDash val="solid"/>
+          </a:ln>
+        </p:spPr>
+      </p:sp>
+      <p:pic>
+        <p:nvPicPr>
+          <p:cNvPr id="26" name="Image 5" descr="preencoded.png">    </p:cNvPr>
+          <p:cNvPicPr>
+            <a:picLocks noChangeAspect="1"/>
+          </p:cNvPicPr>
+          <p:nvPr/>
+        </p:nvPicPr>
+        <p:blipFill>
+          <a:blip r:embed="rId6"/>
+          <a:stretch>
+            <a:fillRect/>
+          </a:stretch>
+        </p:blipFill>
+        <p:spPr>
+          <a:xfrm>
+            <a:off x="941832" y="5340096"/>
+            <a:ext cx="237744" cy="237744"/>
+          </a:xfrm>
+          <a:prstGeom prst="rect">
+            <a:avLst/>
+          </a:prstGeom>
+        </p:spPr>
+      </p:pic>
+      <p:sp>
+        <p:nvSpPr>
+          <p:cNvPr id="27" name="Text 19"/>
+          <p:cNvSpPr/>
+          <p:nvPr/>
+        </p:nvSpPr>
+        <p:spPr>
+          <a:xfrm>
+            <a:off x="1417320" y="5193792"/>
+            <a:ext cx="5212080" cy="292608"/>
+          </a:xfrm>
+          <a:prstGeom prst="rect">
+            <a:avLst/>
+          </a:prstGeom>
+          <a:noFill/>
+          <a:ln/>
+        </p:spPr>
+        <p:txBody>
+          <a:bodyPr wrap="square" lIns="0" tIns="0" rIns="0" bIns="0" rtlCol="0" anchor="t"/>
+          <a:lstStyle/>
+          <a:p>
+            <a:pPr algn="l" indent="0" marL="0">
+              <a:buNone/>
+            </a:pPr>
+            <a:r>
+              <a:rPr lang="en-US" sz="1550" b="1" dirty="0">
+                <a:solidFill>
+                  <a:srgbClr val="2B2B33"/>
+                </a:solidFill>
+                <a:latin typeface="Cambria" pitchFamily="34" charset="0"/>
+                <a:ea typeface="Cambria" pitchFamily="34" charset="-122"/>
+                <a:cs typeface="Cambria" pitchFamily="34" charset="-120"/>
+              </a:rPr>
+              <a:t>Sinus tachycardia + ectopics</a:t>
+            </a:r>
+            <a:endParaRPr lang="en-US" sz="1550" dirty="0"/>
+          </a:p>
+        </p:txBody>
+      </p:sp>
+      <p:sp>
+        <p:nvSpPr>
+          <p:cNvPr id="28" name="Text 20"/>
+          <p:cNvSpPr/>
+          <p:nvPr/>
+        </p:nvSpPr>
+        <p:spPr>
+          <a:xfrm>
+            <a:off x="1417320" y="5486400"/>
+            <a:ext cx="5257800" cy="274320"/>
+          </a:xfrm>
+          <a:prstGeom prst="rect">
+            <a:avLst/>
+          </a:prstGeom>
+          <a:noFill/>
+          <a:ln/>
+        </p:spPr>
+        <p:txBody>
+          <a:bodyPr wrap="square" lIns="0" tIns="0" rIns="0" bIns="0" rtlCol="0" anchor="t"/>
+          <a:lstStyle/>
+          <a:p>
+            <a:pPr algn="l" indent="0" marL="0">
+              <a:buNone/>
+            </a:pPr>
+            <a:r>
+              <a:rPr lang="en-US" sz="1200" dirty="0">
+                <a:solidFill>
+                  <a:srgbClr val="6B6B76"/>
+                </a:solidFill>
+                <a:latin typeface="Calibri" pitchFamily="34" charset="0"/>
+                <a:ea typeface="Calibri" pitchFamily="34" charset="-122"/>
+                <a:cs typeface="Calibri" pitchFamily="34" charset="-120"/>
+              </a:rPr>
+              <a:t>P waves absent; irregularly irregular</a:t>
+            </a:r>
+            <a:endParaRPr lang="en-US" sz="1200" dirty="0"/>
+          </a:p>
+        </p:txBody>
+      </p:sp>
+      <p:sp>
+        <p:nvSpPr>
+          <p:cNvPr id="29" name="Shape 21"/>
+          <p:cNvSpPr/>
+          <p:nvPr/>
+        </p:nvSpPr>
+        <p:spPr>
+          <a:xfrm>
+            <a:off x="6995160" y="1783080"/>
+            <a:ext cx="4690872" cy="4206240"/>
+          </a:xfrm>
+          <a:prstGeom prst="roundRect">
+            <a:avLst>
+              <a:gd name="adj" fmla="val 2609"/>
+            </a:avLst>
+          </a:prstGeom>
+          <a:solidFill>
+            <a:srgbClr val="590D22"/>
+          </a:solidFill>
+          <a:ln/>
+          <a:effectLst>
+            <a:outerShdw sx="100000" sy="100000" kx="0" ky="0" algn="bl" rotWithShape="0" blurRad="127000" dist="50800" dir="5400000">
+              <a:srgbClr val="C9A3AC">
+                <a:alpha val="45000"/>
+              </a:srgbClr>
+            </a:outerShdw>
+          </a:effectLst>
+        </p:spPr>
+      </p:sp>
+      <p:sp>
+        <p:nvSpPr>
+          <p:cNvPr id="30" name="Text 22"/>
+          <p:cNvSpPr/>
+          <p:nvPr/>
+        </p:nvSpPr>
+        <p:spPr>
+          <a:xfrm>
+            <a:off x="7296912" y="2048256"/>
+            <a:ext cx="4114800" cy="274320"/>
+          </a:xfrm>
+          <a:prstGeom prst="rect">
+            <a:avLst/>
+          </a:prstGeom>
+          <a:noFill/>
+          <a:ln/>
+        </p:spPr>
+        <p:txBody>
+          <a:bodyPr wrap="square" rtlCol="0" anchor="t"/>
+          <a:lstStyle/>
+          <a:p>
+            <a:pPr algn="l" indent="0" marL="0">
+              <a:buNone/>
+            </a:pPr>
+            <a:r>
+              <a:rPr lang="en-US" sz="1250" b="1" spc="200" kern="0" dirty="0">
+                <a:solidFill>
+                  <a:srgbClr val="FF4D6D"/>
+                </a:solidFill>
+                <a:latin typeface="Calibri" pitchFamily="34" charset="0"/>
+                <a:ea typeface="Calibri" pitchFamily="34" charset="-122"/>
+                <a:cs typeface="Calibri" pitchFamily="34" charset="-120"/>
+              </a:rPr>
+              <a:t>FINAL DIAGNOSIS</a:t>
+            </a:r>
+            <a:endParaRPr lang="en-US" sz="1250" dirty="0"/>
+          </a:p>
+        </p:txBody>
+      </p:sp>
+      <p:sp>
+        <p:nvSpPr>
+          <p:cNvPr id="31" name="Text 23"/>
+          <p:cNvSpPr/>
+          <p:nvPr/>
+        </p:nvSpPr>
+        <p:spPr>
+          <a:xfrm>
+            <a:off x="7296912" y="2377440"/>
+            <a:ext cx="4160520" cy="1371600"/>
+          </a:xfrm>
+          <a:prstGeom prst="rect">
+            <a:avLst/>
+          </a:prstGeom>
+          <a:noFill/>
+          <a:ln/>
+        </p:spPr>
+        <p:txBody>
+          <a:bodyPr wrap="square" rtlCol="0" anchor="t"/>
+          <a:lstStyle/>
+          <a:p>
+            <a:pPr algn="l" indent="0" marL="0">
+              <a:lnSpc>
+                <a:spcPct val="100000"/>
+              </a:lnSpc>
+              <a:buNone/>
+            </a:pPr>
+            <a:r>
+              <a:rPr lang="en-US" sz="2400" b="1" dirty="0">
+                <a:solidFill>
+                  <a:srgbClr val="FFFFFF"/>
+                </a:solidFill>
+                <a:latin typeface="Cambria" pitchFamily="34" charset="0"/>
+                <a:ea typeface="Cambria" pitchFamily="34" charset="-122"/>
+                <a:cs typeface="Cambria" pitchFamily="34" charset="-120"/>
+              </a:rPr>
+              <a:t>Atrial Fibrillation with Rapid Ventricular Response</a:t>
+            </a:r>
+            <a:endParaRPr lang="en-US" sz="2400" dirty="0"/>
+          </a:p>
+        </p:txBody>
+      </p:sp>
+      <p:sp>
+        <p:nvSpPr>
+          <p:cNvPr id="32" name="Shape 24"/>
+          <p:cNvSpPr/>
+          <p:nvPr/>
+        </p:nvSpPr>
+        <p:spPr>
+          <a:xfrm>
+            <a:off x="7296912" y="3858768"/>
+            <a:ext cx="4114800" cy="0"/>
+          </a:xfrm>
+          <a:prstGeom prst="line">
+            <a:avLst/>
+          </a:prstGeom>
+          <a:noFill/>
+          <a:ln w="12700">
+            <a:solidFill>
+              <a:srgbClr val="7A2233"/>
+            </a:solidFill>
+            <a:prstDash val="solid"/>
+          </a:ln>
+        </p:spPr>
+      </p:sp>
+      <p:pic>
+        <p:nvPicPr>
+          <p:cNvPr id="33" name="Image 6" descr="preencoded.png">    </p:cNvPr>
+          <p:cNvPicPr>
+            <a:picLocks noChangeAspect="1"/>
+          </p:cNvPicPr>
+          <p:nvPr/>
+        </p:nvPicPr>
+        <p:blipFill>
+          <a:blip r:embed="rId7"/>
+          <a:stretch>
+            <a:fillRect/>
+          </a:stretch>
+        </p:blipFill>
+        <p:spPr>
+          <a:xfrm>
+            <a:off x="7296912" y="4050792"/>
+            <a:ext cx="274320" cy="274320"/>
+          </a:xfrm>
+          <a:prstGeom prst="rect">
+            <a:avLst/>
+          </a:prstGeom>
+        </p:spPr>
+      </p:pic>
+      <p:sp>
+        <p:nvSpPr>
+          <p:cNvPr id="34" name="Text 25"/>
+          <p:cNvSpPr/>
+          <p:nvPr/>
+        </p:nvSpPr>
+        <p:spPr>
+          <a:xfrm>
+            <a:off x="7680960" y="4041648"/>
+            <a:ext cx="3794760" cy="457200"/>
+          </a:xfrm>
+          <a:prstGeom prst="rect">
+            <a:avLst/>
+          </a:prstGeom>
+          <a:noFill/>
+          <a:ln/>
+        </p:spPr>
+        <p:txBody>
+          <a:bodyPr wrap="square" lIns="0" tIns="0" rIns="0" bIns="0" rtlCol="0" anchor="t"/>
+          <a:lstStyle/>
+          <a:p>
+            <a:pPr algn="l" indent="0" marL="0">
+              <a:lnSpc>
+                <a:spcPct val="102000"/>
+              </a:lnSpc>
+              <a:buNone/>
+            </a:pPr>
+            <a:r>
+              <a:rPr lang="en-US" sz="1200" dirty="0">
+                <a:solidFill>
+                  <a:srgbClr val="FBD8DF"/>
+                </a:solidFill>
+                <a:latin typeface="Calibri" pitchFamily="34" charset="0"/>
+                <a:ea typeface="Calibri" pitchFamily="34" charset="-122"/>
+                <a:cs typeface="Calibri" pitchFamily="34" charset="-120"/>
+              </a:rPr>
+              <a:t>Confirmed on 12-lead ECG — 146 bpm, no P waves</a:t>
+            </a:r>
+            <a:endParaRPr lang="en-US" sz="1200" dirty="0"/>
+          </a:p>
+        </p:txBody>
+      </p:sp>
+      <p:pic>
+        <p:nvPicPr>
+          <p:cNvPr id="35" name="Image 7" descr="preencoded.png">    </p:cNvPr>
+          <p:cNvPicPr>
+            <a:picLocks noChangeAspect="1"/>
+          </p:cNvPicPr>
+          <p:nvPr/>
+        </p:nvPicPr>
+        <p:blipFill>
+          <a:blip r:embed="rId8"/>
+          <a:stretch>
+            <a:fillRect/>
+          </a:stretch>
+        </p:blipFill>
+        <p:spPr>
+          <a:xfrm>
+            <a:off x="7296912" y="4535424"/>
+            <a:ext cx="274320" cy="274320"/>
+          </a:xfrm>
+          <a:prstGeom prst="rect">
+            <a:avLst/>
+          </a:prstGeom>
+        </p:spPr>
+      </p:pic>
+      <p:sp>
+        <p:nvSpPr>
+          <p:cNvPr id="36" name="Text 26"/>
+          <p:cNvSpPr/>
+          <p:nvPr/>
+        </p:nvSpPr>
+        <p:spPr>
+          <a:xfrm>
+            <a:off x="7680960" y="4526280"/>
+            <a:ext cx="3794760" cy="457200"/>
+          </a:xfrm>
+          <a:prstGeom prst="rect">
+            <a:avLst/>
+          </a:prstGeom>
+          <a:noFill/>
+          <a:ln/>
+        </p:spPr>
+        <p:txBody>
+          <a:bodyPr wrap="square" lIns="0" tIns="0" rIns="0" bIns="0" rtlCol="0" anchor="t"/>
+          <a:lstStyle/>
+          <a:p>
+            <a:pPr algn="l" indent="0" marL="0">
+              <a:lnSpc>
+                <a:spcPct val="102000"/>
+              </a:lnSpc>
+              <a:buNone/>
+            </a:pPr>
+            <a:r>
+              <a:rPr lang="en-US" sz="1200" dirty="0">
+                <a:solidFill>
+                  <a:srgbClr val="FBD8DF"/>
+                </a:solidFill>
+                <a:latin typeface="Calibri" pitchFamily="34" charset="0"/>
+                <a:ea typeface="Calibri" pitchFamily="34" charset="-122"/>
+                <a:cs typeface="Calibri" pitchFamily="34" charset="-120"/>
+              </a:rPr>
+              <a:t>Structurally normal heart — LVEF 65%, no LA/LV clot</a:t>
+            </a:r>
+            <a:endParaRPr lang="en-US" sz="1200" dirty="0"/>
+          </a:p>
+        </p:txBody>
+      </p:sp>
+      <p:pic>
+        <p:nvPicPr>
+          <p:cNvPr id="37" name="Image 8" descr="preencoded.png">    </p:cNvPr>
+          <p:cNvPicPr>
+            <a:picLocks noChangeAspect="1"/>
+          </p:cNvPicPr>
+          <p:nvPr/>
+        </p:nvPicPr>
+        <p:blipFill>
+          <a:blip r:embed="rId9"/>
+          <a:stretch>
+            <a:fillRect/>
+          </a:stretch>
+        </p:blipFill>
+        <p:spPr>
+          <a:xfrm>
+            <a:off x="7296912" y="5020056"/>
+            <a:ext cx="274320" cy="274320"/>
+          </a:xfrm>
+          <a:prstGeom prst="rect">
+            <a:avLst/>
+          </a:prstGeom>
+        </p:spPr>
+      </p:pic>
+      <p:sp>
+        <p:nvSpPr>
+          <p:cNvPr id="38" name="Text 27"/>
+          <p:cNvSpPr/>
+          <p:nvPr/>
+        </p:nvSpPr>
+        <p:spPr>
+          <a:xfrm>
+            <a:off x="7680960" y="5010912"/>
+            <a:ext cx="3794760" cy="457200"/>
+          </a:xfrm>
+          <a:prstGeom prst="rect">
+            <a:avLst/>
+          </a:prstGeom>
+          <a:noFill/>
+          <a:ln/>
+        </p:spPr>
+        <p:txBody>
+          <a:bodyPr wrap="square" lIns="0" tIns="0" rIns="0" bIns="0" rtlCol="0" anchor="t"/>
+          <a:lstStyle/>
+          <a:p>
+            <a:pPr algn="l" indent="0" marL="0">
+              <a:lnSpc>
+                <a:spcPct val="102000"/>
+              </a:lnSpc>
+              <a:buNone/>
+            </a:pPr>
+            <a:r>
+              <a:rPr lang="en-US" sz="1200" dirty="0">
+                <a:solidFill>
+                  <a:srgbClr val="FBD8DF"/>
+                </a:solidFill>
+                <a:latin typeface="Calibri" pitchFamily="34" charset="0"/>
+                <a:ea typeface="Calibri" pitchFamily="34" charset="-122"/>
+                <a:cs typeface="Calibri" pitchFamily="34" charset="-120"/>
+              </a:rPr>
+              <a:t>Background hypertension</a:t>
+            </a:r>
+            <a:endParaRPr lang="en-US" sz="1200" dirty="0"/>
+          </a:p>
+        </p:txBody>
+      </p:sp>
+      <p:pic>
+        <p:nvPicPr>
+          <p:cNvPr id="39" name="Image 9" descr="preencoded.png">    </p:cNvPr>
+          <p:cNvPicPr>
+            <a:picLocks noChangeAspect="1"/>
+          </p:cNvPicPr>
+          <p:nvPr/>
+        </p:nvPicPr>
+        <p:blipFill>
+          <a:blip r:embed="rId10"/>
+          <a:stretch>
+            <a:fillRect/>
+          </a:stretch>
+        </p:blipFill>
+        <p:spPr>
+          <a:xfrm>
+            <a:off x="7296912" y="5504688"/>
+            <a:ext cx="274320" cy="274320"/>
+          </a:xfrm>
+          <a:prstGeom prst="rect">
+            <a:avLst/>
+          </a:prstGeom>
+        </p:spPr>
+      </p:pic>
+      <p:sp>
+        <p:nvSpPr>
+          <p:cNvPr id="40" name="Text 28"/>
+          <p:cNvSpPr/>
+          <p:nvPr/>
+        </p:nvSpPr>
+        <p:spPr>
+          <a:xfrm>
+            <a:off x="7680960" y="5495544"/>
+            <a:ext cx="3794760" cy="457200"/>
+          </a:xfrm>
+          <a:prstGeom prst="rect">
+            <a:avLst/>
+          </a:prstGeom>
+          <a:noFill/>
+          <a:ln/>
+        </p:spPr>
+        <p:txBody>
+          <a:bodyPr wrap="square" lIns="0" tIns="0" rIns="0" bIns="0" rtlCol="0" anchor="t"/>
+          <a:lstStyle/>
+          <a:p>
+            <a:pPr algn="l" indent="0" marL="0">
+              <a:lnSpc>
+                <a:spcPct val="102000"/>
+              </a:lnSpc>
+              <a:buNone/>
+            </a:pPr>
+            <a:r>
+              <a:rPr lang="en-US" sz="1200" dirty="0">
+                <a:solidFill>
+                  <a:srgbClr val="FBD8DF"/>
+                </a:solidFill>
+                <a:latin typeface="Calibri" pitchFamily="34" charset="0"/>
+                <a:ea typeface="Calibri" pitchFamily="34" charset="-122"/>
+                <a:cs typeface="Calibri" pitchFamily="34" charset="-120"/>
+              </a:rPr>
+              <a:t>Mild normocytic anaemia (incidental)</a:t>
+            </a:r>
+            <a:endParaRPr lang="en-US" sz="1200" dirty="0"/>
+          </a:p>
+        </p:txBody>
+      </p:sp>
+      <p:sp>
+        <p:nvSpPr>
+          <p:cNvPr id="41" name="Text 29"/>
+          <p:cNvSpPr/>
+          <p:nvPr/>
+        </p:nvSpPr>
+        <p:spPr>
+          <a:xfrm>
+            <a:off x="11277295" y="6355080"/>
+            <a:ext cx="548640" cy="320040"/>
+          </a:xfrm>
+          <a:prstGeom prst="rect">
+            <a:avLst/>
+          </a:prstGeom>
+          <a:noFill/>
+          <a:ln/>
+        </p:spPr>
+        <p:txBody>
+          <a:bodyPr wrap="square" rtlCol="0" anchor="t"/>
+          <a:lstStyle/>
+          <a:p>
+            <a:pPr algn="r" indent="0" marL="0">
+              <a:buNone/>
+            </a:pPr>
+            <a:r>
+              <a:rPr lang="en-US" sz="1100" b="1" dirty="0">
+                <a:solidFill>
+                  <a:srgbClr val="6B6B76"/>
+                </a:solidFill>
+                <a:latin typeface="Calibri" pitchFamily="34" charset="0"/>
+                <a:ea typeface="Calibri" pitchFamily="34" charset="-122"/>
+                <a:cs typeface="Calibri" pitchFamily="34" charset="-120"/>
+              </a:rPr>
+              <a:t>18</a:t>
+            </a:r>
+            <a:endParaRPr lang="en-US" sz="1100" dirty="0"/>
+          </a:p>
+        </p:txBody>
+      </p:sp>
+      <p:sp>
+        <p:nvSpPr>
+          <p:cNvPr id="42" name="Text 30"/>
+          <p:cNvSpPr/>
+          <p:nvPr/>
+        </p:nvSpPr>
+        <p:spPr>
+          <a:xfrm>
+            <a:off x="502920" y="6355080"/>
+            <a:ext cx="5486400" cy="320040"/>
+          </a:xfrm>
+          <a:prstGeom prst="rect">
+            <a:avLst/>
+          </a:prstGeom>
+          <a:noFill/>
+          <a:ln/>
+        </p:spPr>
+        <p:txBody>
+          <a:bodyPr wrap="square" rtlCol="0" anchor="t"/>
+          <a:lstStyle/>
+          <a:p>
+            <a:pPr algn="l" indent="0" marL="0">
+              <a:buNone/>
+            </a:pPr>
+            <a:r>
+              <a:rPr lang="en-US" sz="900" dirty="0">
+                <a:solidFill>
+                  <a:srgbClr val="6B6B76"/>
+                </a:solidFill>
+                <a:latin typeface="Calibri" pitchFamily="34" charset="0"/>
+                <a:ea typeface="Calibri" pitchFamily="34" charset="-122"/>
+                <a:cs typeface="Calibri" pitchFamily="34" charset="-120"/>
+              </a:rPr>
+              <a:t>Clinicopathological Conference</a:t>
+            </a:r>
+            <a:endParaRPr lang="en-US" sz="900" dirty="0"/>
+          </a:p>
+        </p:txBody>
+      </p:sp>
+    </p:spTree>
+  </p:cSld>
+  <p:clrMapOvr>
+    <a:masterClrMapping/>
+  </p:clrMapOvr>
+</p:sld>
+</file>
+
+<file path=ppt/slides/slide19.xml><?xml version="1.0" encoding="utf-8"?>
+<p:sld xmlns:a="http://schemas.openxmlformats.org/drawingml/2006/main" xmlns:r="http://schemas.openxmlformats.org/officeDocument/2006/relationships" xmlns:p="http://schemas.openxmlformats.org/presentationml/2006/main">
+  <p:cSld name="Slide 19">
+    <p:bg>
+      <p:bgPr>
+        <a:solidFill>
           <a:srgbClr val="590D22"/>
         </a:solidFill>
       </p:bgPr>
@@ -15577,7 +16609,7 @@
                 <a:ea typeface="Calibri" pitchFamily="34" charset="-122"/>
                 <a:cs typeface="Calibri" pitchFamily="34" charset="-120"/>
               </a:rPr>
-              <a:t>18</a:t>
+              <a:t>19</a:t>
             </a:r>
             <a:endParaRPr lang="en-US" sz="1100" dirty="0"/>
           </a:p>
@@ -18646,7 +19678,7 @@
                 <a:ea typeface="Cambria" pitchFamily="34" charset="-122"/>
                 <a:cs typeface="Cambria" pitchFamily="34" charset="-120"/>
               </a:rPr>
-              <a:t>Medical History</a:t>
+              <a:t>Drug History</a:t>
             </a:r>
             <a:endParaRPr lang="en-US" sz="3000" dirty="0"/>
           </a:p>
@@ -18765,7 +19797,7 @@
                 <a:ea typeface="Cambria" pitchFamily="34" charset="-122"/>
                 <a:cs typeface="Cambria" pitchFamily="34" charset="-120"/>
               </a:rPr>
-              <a:t>Medical</a:t>
+              <a:t>Medications</a:t>
             </a:r>
             <a:endParaRPr lang="en-US" sz="2500" dirty="0"/>
           </a:p>
@@ -18955,11 +19987,11 @@
         <p:spPr>
           <a:xfrm>
             <a:off x="4937760" y="1783080"/>
-            <a:ext cx="6766560" cy="4206240"/>
+            <a:ext cx="6766560" cy="1325880"/>
           </a:xfrm>
           <a:prstGeom prst="roundRect">
             <a:avLst>
-              <a:gd name="adj" fmla="val 2609"/>
+              <a:gd name="adj" fmla="val 6897"/>
             </a:avLst>
           </a:prstGeom>
           <a:solidFill>
@@ -18982,69 +20014,79 @@
       </p:sp>
       <p:sp>
         <p:nvSpPr>
-          <p:cNvPr id="18" name="Text 14"/>
-          <p:cNvSpPr/>
-          <p:nvPr/>
-        </p:nvSpPr>
-        <p:spPr>
-          <a:xfrm>
-            <a:off x="5440680" y="2194560"/>
-            <a:ext cx="5852160" cy="274320"/>
-          </a:xfrm>
-          <a:prstGeom prst="rect">
-            <a:avLst/>
-          </a:prstGeom>
-          <a:noFill/>
-          <a:ln/>
-        </p:spPr>
-        <p:txBody>
-          <a:bodyPr wrap="square" rtlCol="0" anchor="t"/>
-          <a:lstStyle/>
-          <a:p>
-            <a:pPr algn="l" indent="0" marL="0">
-              <a:buNone/>
-            </a:pPr>
-            <a:r>
-              <a:rPr lang="en-US" sz="1250" b="1" spc="200" kern="0" dirty="0">
-                <a:solidFill>
-                  <a:srgbClr val="A4133C"/>
-                </a:solidFill>
-                <a:latin typeface="Calibri" pitchFamily="34" charset="0"/>
-                <a:ea typeface="Calibri" pitchFamily="34" charset="-122"/>
-                <a:cs typeface="Calibri" pitchFamily="34" charset="-120"/>
-              </a:rPr>
-              <a:t>KNOWN COMORBIDITY</a:t>
-            </a:r>
-            <a:endParaRPr lang="en-US" sz="1250" dirty="0"/>
-          </a:p>
-        </p:txBody>
-      </p:sp>
-      <p:sp>
-        <p:nvSpPr>
-          <p:cNvPr id="19" name="Text 15"/>
-          <p:cNvSpPr/>
-          <p:nvPr/>
-        </p:nvSpPr>
-        <p:spPr>
-          <a:xfrm>
-            <a:off x="5440680" y="2606040"/>
-            <a:ext cx="5852160" cy="822960"/>
-          </a:xfrm>
-          <a:prstGeom prst="rect">
-            <a:avLst/>
-          </a:prstGeom>
-          <a:noFill/>
-          <a:ln/>
-        </p:spPr>
-        <p:txBody>
-          <a:bodyPr wrap="square" rtlCol="0" anchor="t"/>
-          <a:lstStyle/>
-          <a:p>
-            <a:pPr algn="l" indent="0" marL="0">
-              <a:buNone/>
-            </a:pPr>
-            <a:r>
-              <a:rPr lang="en-US" sz="4400" b="1" dirty="0">
+          <p:cNvPr id="18" name="Shape 14"/>
+          <p:cNvSpPr/>
+          <p:nvPr/>
+        </p:nvSpPr>
+        <p:spPr>
+          <a:xfrm>
+            <a:off x="5257800" y="2084832"/>
+            <a:ext cx="731520" cy="731520"/>
+          </a:xfrm>
+          <a:prstGeom prst="ellipse">
+            <a:avLst/>
+          </a:prstGeom>
+          <a:solidFill>
+            <a:srgbClr val="FFFFFF"/>
+          </a:solidFill>
+          <a:ln w="12700">
+            <a:solidFill>
+              <a:srgbClr val="FBD8DF"/>
+            </a:solidFill>
+            <a:prstDash val="solid"/>
+          </a:ln>
+        </p:spPr>
+      </p:sp>
+      <p:pic>
+        <p:nvPicPr>
+          <p:cNvPr id="19" name="Image 2" descr="preencoded.png">    </p:cNvPr>
+          <p:cNvPicPr>
+            <a:picLocks noChangeAspect="1"/>
+          </p:cNvPicPr>
+          <p:nvPr/>
+        </p:nvPicPr>
+        <p:blipFill>
+          <a:blip r:embed="rId3"/>
+          <a:stretch>
+            <a:fillRect/>
+          </a:stretch>
+        </p:blipFill>
+        <p:spPr>
+          <a:xfrm>
+            <a:off x="5440680" y="2267712"/>
+            <a:ext cx="365760" cy="365760"/>
+          </a:xfrm>
+          <a:prstGeom prst="rect">
+            <a:avLst/>
+          </a:prstGeom>
+        </p:spPr>
+      </p:pic>
+      <p:sp>
+        <p:nvSpPr>
+          <p:cNvPr id="20" name="Text 15"/>
+          <p:cNvSpPr/>
+          <p:nvPr/>
+        </p:nvSpPr>
+        <p:spPr>
+          <a:xfrm>
+            <a:off x="6217920" y="2039112"/>
+            <a:ext cx="5120640" cy="457200"/>
+          </a:xfrm>
+          <a:prstGeom prst="rect">
+            <a:avLst/>
+          </a:prstGeom>
+          <a:noFill/>
+          <a:ln/>
+        </p:spPr>
+        <p:txBody>
+          <a:bodyPr wrap="square" lIns="0" tIns="0" rIns="0" bIns="0" rtlCol="0" anchor="t"/>
+          <a:lstStyle/>
+          <a:p>
+            <a:pPr algn="l" indent="0" marL="0">
+              <a:buNone/>
+            </a:pPr>
+            <a:r>
+              <a:rPr lang="en-US" sz="2400" b="1" dirty="0">
                 <a:solidFill>
                   <a:srgbClr val="2B2B33"/>
                 </a:solidFill>
@@ -19052,38 +20094,38 @@
                 <a:ea typeface="Cambria" pitchFamily="34" charset="-122"/>
                 <a:cs typeface="Cambria" pitchFamily="34" charset="-120"/>
               </a:rPr>
-              <a:t>Hypertension</a:t>
-            </a:r>
-            <a:endParaRPr lang="en-US" sz="4400" dirty="0"/>
-          </a:p>
-        </p:txBody>
-      </p:sp>
-      <p:sp>
-        <p:nvSpPr>
-          <p:cNvPr id="20" name="Text 16"/>
-          <p:cNvSpPr/>
-          <p:nvPr/>
-        </p:nvSpPr>
-        <p:spPr>
-          <a:xfrm>
-            <a:off x="5458968" y="3611880"/>
-            <a:ext cx="5760720" cy="457200"/>
-          </a:xfrm>
-          <a:prstGeom prst="rect">
-            <a:avLst/>
-          </a:prstGeom>
-          <a:noFill/>
-          <a:ln/>
-        </p:spPr>
-        <p:txBody>
-          <a:bodyPr wrap="square" rtlCol="0" anchor="t"/>
-          <a:lstStyle/>
-          <a:p>
-            <a:pPr algn="l" indent="0" marL="0">
-              <a:buNone/>
-            </a:pPr>
-            <a:r>
-              <a:rPr lang="en-US" sz="1700" i="1" dirty="0">
+              <a:t>Tab Vadil</a:t>
+            </a:r>
+            <a:endParaRPr lang="en-US" sz="2400" dirty="0"/>
+          </a:p>
+        </p:txBody>
+      </p:sp>
+      <p:sp>
+        <p:nvSpPr>
+          <p:cNvPr id="21" name="Text 16"/>
+          <p:cNvSpPr/>
+          <p:nvPr/>
+        </p:nvSpPr>
+        <p:spPr>
+          <a:xfrm>
+            <a:off x="6217920" y="2532888"/>
+            <a:ext cx="5120640" cy="365760"/>
+          </a:xfrm>
+          <a:prstGeom prst="rect">
+            <a:avLst/>
+          </a:prstGeom>
+          <a:noFill/>
+          <a:ln/>
+        </p:spPr>
+        <p:txBody>
+          <a:bodyPr wrap="square" lIns="0" tIns="0" rIns="0" bIns="0" rtlCol="0" anchor="t"/>
+          <a:lstStyle/>
+          <a:p>
+            <a:pPr algn="l" indent="0" marL="0">
+              <a:buNone/>
+            </a:pPr>
+            <a:r>
+              <a:rPr lang="en-US" sz="1450" i="1" dirty="0">
                 <a:solidFill>
                   <a:srgbClr val="6B6B76"/>
                 </a:solidFill>
@@ -19091,44 +20133,212 @@
                 <a:ea typeface="Calibri" pitchFamily="34" charset="-122"/>
                 <a:cs typeface="Calibri" pitchFamily="34" charset="-120"/>
               </a:rPr>
-              <a:t>On oral antihypertensive medication</a:t>
-            </a:r>
-            <a:endParaRPr lang="en-US" sz="1700" dirty="0"/>
-          </a:p>
-        </p:txBody>
-      </p:sp>
-      <p:sp>
-        <p:nvSpPr>
-          <p:cNvPr id="21" name="Shape 17"/>
-          <p:cNvSpPr/>
-          <p:nvPr/>
-        </p:nvSpPr>
-        <p:spPr>
-          <a:xfrm>
-            <a:off x="5440680" y="4572000"/>
-            <a:ext cx="2148840" cy="566928"/>
+              <a:t>Rate / rhythm control</a:t>
+            </a:r>
+            <a:endParaRPr lang="en-US" sz="1450" dirty="0"/>
+          </a:p>
+        </p:txBody>
+      </p:sp>
+      <p:sp>
+        <p:nvSpPr>
+          <p:cNvPr id="22" name="Shape 17"/>
+          <p:cNvSpPr/>
+          <p:nvPr/>
+        </p:nvSpPr>
+        <p:spPr>
+          <a:xfrm>
+            <a:off x="4937760" y="3291840"/>
+            <a:ext cx="6766560" cy="1325880"/>
           </a:xfrm>
           <a:prstGeom prst="roundRect">
             <a:avLst>
-              <a:gd name="adj" fmla="val 50000"/>
+              <a:gd name="adj" fmla="val 6897"/>
             </a:avLst>
           </a:prstGeom>
           <a:solidFill>
-            <a:srgbClr val="A4133C"/>
+            <a:srgbClr val="FFF0F3"/>
           </a:solidFill>
-          <a:ln/>
-        </p:spPr>
-      </p:sp>
-      <p:sp>
-        <p:nvSpPr>
-          <p:cNvPr id="22" name="Text 18"/>
-          <p:cNvSpPr/>
-          <p:nvPr/>
-        </p:nvSpPr>
-        <p:spPr>
-          <a:xfrm>
-            <a:off x="5440680" y="4572000"/>
-            <a:ext cx="2148840" cy="566928"/>
+          <a:ln w="12700">
+            <a:solidFill>
+              <a:srgbClr val="FBD8DF"/>
+            </a:solidFill>
+            <a:prstDash val="solid"/>
+          </a:ln>
+          <a:effectLst>
+            <a:outerShdw sx="100000" sy="100000" kx="0" ky="0" algn="bl" rotWithShape="0" blurRad="127000" dist="50800" dir="5400000">
+              <a:srgbClr val="C9A3AC">
+                <a:alpha val="45000"/>
+              </a:srgbClr>
+            </a:outerShdw>
+          </a:effectLst>
+        </p:spPr>
+      </p:sp>
+      <p:sp>
+        <p:nvSpPr>
+          <p:cNvPr id="23" name="Shape 18"/>
+          <p:cNvSpPr/>
+          <p:nvPr/>
+        </p:nvSpPr>
+        <p:spPr>
+          <a:xfrm>
+            <a:off x="5257800" y="3593592"/>
+            <a:ext cx="731520" cy="731520"/>
+          </a:xfrm>
+          <a:prstGeom prst="ellipse">
+            <a:avLst/>
+          </a:prstGeom>
+          <a:solidFill>
+            <a:srgbClr val="FFFFFF"/>
+          </a:solidFill>
+          <a:ln w="12700">
+            <a:solidFill>
+              <a:srgbClr val="FBD8DF"/>
+            </a:solidFill>
+            <a:prstDash val="solid"/>
+          </a:ln>
+        </p:spPr>
+      </p:sp>
+      <p:pic>
+        <p:nvPicPr>
+          <p:cNvPr id="24" name="Image 3" descr="preencoded.png">    </p:cNvPr>
+          <p:cNvPicPr>
+            <a:picLocks noChangeAspect="1"/>
+          </p:cNvPicPr>
+          <p:nvPr/>
+        </p:nvPicPr>
+        <p:blipFill>
+          <a:blip r:embed="rId4"/>
+          <a:stretch>
+            <a:fillRect/>
+          </a:stretch>
+        </p:blipFill>
+        <p:spPr>
+          <a:xfrm>
+            <a:off x="5440680" y="3776472"/>
+            <a:ext cx="365760" cy="365760"/>
+          </a:xfrm>
+          <a:prstGeom prst="rect">
+            <a:avLst/>
+          </a:prstGeom>
+        </p:spPr>
+      </p:pic>
+      <p:sp>
+        <p:nvSpPr>
+          <p:cNvPr id="25" name="Text 19"/>
+          <p:cNvSpPr/>
+          <p:nvPr/>
+        </p:nvSpPr>
+        <p:spPr>
+          <a:xfrm>
+            <a:off x="6217920" y="3547872"/>
+            <a:ext cx="5120640" cy="457200"/>
+          </a:xfrm>
+          <a:prstGeom prst="rect">
+            <a:avLst/>
+          </a:prstGeom>
+          <a:noFill/>
+          <a:ln/>
+        </p:spPr>
+        <p:txBody>
+          <a:bodyPr wrap="square" lIns="0" tIns="0" rIns="0" bIns="0" rtlCol="0" anchor="t"/>
+          <a:lstStyle/>
+          <a:p>
+            <a:pPr algn="l" indent="0" marL="0">
+              <a:buNone/>
+            </a:pPr>
+            <a:r>
+              <a:rPr lang="en-US" sz="2400" b="1" dirty="0">
+                <a:solidFill>
+                  <a:srgbClr val="2B2B33"/>
+                </a:solidFill>
+                <a:latin typeface="Cambria" pitchFamily="34" charset="0"/>
+                <a:ea typeface="Cambria" pitchFamily="34" charset="-122"/>
+                <a:cs typeface="Cambria" pitchFamily="34" charset="-120"/>
+              </a:rPr>
+              <a:t>Tab Rivaroxaban</a:t>
+            </a:r>
+            <a:endParaRPr lang="en-US" sz="2400" dirty="0"/>
+          </a:p>
+        </p:txBody>
+      </p:sp>
+      <p:sp>
+        <p:nvSpPr>
+          <p:cNvPr id="26" name="Text 20"/>
+          <p:cNvSpPr/>
+          <p:nvPr/>
+        </p:nvSpPr>
+        <p:spPr>
+          <a:xfrm>
+            <a:off x="6217920" y="4041648"/>
+            <a:ext cx="5120640" cy="365760"/>
+          </a:xfrm>
+          <a:prstGeom prst="rect">
+            <a:avLst/>
+          </a:prstGeom>
+          <a:noFill/>
+          <a:ln/>
+        </p:spPr>
+        <p:txBody>
+          <a:bodyPr wrap="square" lIns="0" tIns="0" rIns="0" bIns="0" rtlCol="0" anchor="t"/>
+          <a:lstStyle/>
+          <a:p>
+            <a:pPr algn="l" indent="0" marL="0">
+              <a:buNone/>
+            </a:pPr>
+            <a:r>
+              <a:rPr lang="en-US" sz="1450" i="1" dirty="0">
+                <a:solidFill>
+                  <a:srgbClr val="6B6B76"/>
+                </a:solidFill>
+                <a:latin typeface="Calibri" pitchFamily="34" charset="0"/>
+                <a:ea typeface="Calibri" pitchFamily="34" charset="-122"/>
+                <a:cs typeface="Calibri" pitchFamily="34" charset="-120"/>
+              </a:rPr>
+              <a:t>Oral anticoagulation</a:t>
+            </a:r>
+            <a:endParaRPr lang="en-US" sz="1450" dirty="0"/>
+          </a:p>
+        </p:txBody>
+      </p:sp>
+      <p:sp>
+        <p:nvSpPr>
+          <p:cNvPr id="27" name="Shape 21"/>
+          <p:cNvSpPr/>
+          <p:nvPr/>
+        </p:nvSpPr>
+        <p:spPr>
+          <a:xfrm>
+            <a:off x="4937760" y="4800600"/>
+            <a:ext cx="6766560" cy="1188720"/>
+          </a:xfrm>
+          <a:prstGeom prst="roundRect">
+            <a:avLst>
+              <a:gd name="adj" fmla="val 7692"/>
+            </a:avLst>
+          </a:prstGeom>
+          <a:solidFill>
+            <a:srgbClr val="590D22"/>
+          </a:solidFill>
+          <a:ln/>
+          <a:effectLst>
+            <a:outerShdw sx="100000" sy="100000" kx="0" ky="0" algn="bl" rotWithShape="0" blurRad="127000" dist="50800" dir="5400000">
+              <a:srgbClr val="C9A3AC">
+                <a:alpha val="45000"/>
+              </a:srgbClr>
+            </a:outerShdw>
+          </a:effectLst>
+        </p:spPr>
+      </p:sp>
+      <p:sp>
+        <p:nvSpPr>
+          <p:cNvPr id="28" name="Text 22"/>
+          <p:cNvSpPr/>
+          <p:nvPr/>
+        </p:nvSpPr>
+        <p:spPr>
+          <a:xfrm>
+            <a:off x="5394960" y="4800600"/>
+            <a:ext cx="5852160" cy="1188720"/>
           </a:xfrm>
           <a:prstGeom prst="rect">
             <a:avLst/>
@@ -19140,27 +20350,41 @@
           <a:bodyPr wrap="square" rtlCol="0" anchor="ctr"/>
           <a:lstStyle/>
           <a:p>
-            <a:pPr algn="ctr" indent="0" marL="0">
-              <a:buNone/>
-            </a:pPr>
-            <a:r>
-              <a:rPr lang="en-US" sz="1450" b="1" dirty="0">
-                <a:solidFill>
-                  <a:srgbClr val="FFFFFF"/>
-                </a:solidFill>
-                <a:latin typeface="Calibri" pitchFamily="34" charset="0"/>
-                <a:ea typeface="Calibri" pitchFamily="34" charset="-122"/>
-                <a:cs typeface="Calibri" pitchFamily="34" charset="-120"/>
-              </a:rPr>
-              <a:t>HTN</a:t>
-            </a:r>
-            <a:endParaRPr lang="en-US" sz="1450" dirty="0"/>
-          </a:p>
-        </p:txBody>
-      </p:sp>
-      <p:sp>
-        <p:nvSpPr>
-          <p:cNvPr id="23" name="Text 19"/>
+            <a:pPr algn="l" indent="0" marL="0">
+              <a:buNone/>
+            </a:pPr>
+            <a:r>
+              <a:rPr lang="en-US" sz="1600" b="1" dirty="0">
+                <a:solidFill>
+                  <a:srgbClr val="FF4D6D"/>
+                </a:solidFill>
+                <a:latin typeface="Calibri" pitchFamily="34" charset="0"/>
+                <a:ea typeface="Calibri" pitchFamily="34" charset="-122"/>
+                <a:cs typeface="Calibri" pitchFamily="34" charset="-120"/>
+              </a:rPr>
+              <a:t>Purpose  </a:t>
+            </a:r>
+            <a:pPr algn="l" indent="0" marL="0">
+              <a:buNone/>
+            </a:pPr>
+            <a:r>
+              <a:rPr lang="en-US" sz="1600" dirty="0">
+                <a:solidFill>
+                  <a:srgbClr val="FBD8DF"/>
+                </a:solidFill>
+                <a:latin typeface="Calibri" pitchFamily="34" charset="0"/>
+                <a:ea typeface="Calibri" pitchFamily="34" charset="-122"/>
+                <a:cs typeface="Calibri" pitchFamily="34" charset="-120"/>
+              </a:rPr>
+              <a:t>Symptom control with stroke-risk protection</a:t>
+            </a:r>
+            <a:endParaRPr lang="en-US" sz="1600" dirty="0"/>
+          </a:p>
+        </p:txBody>
+      </p:sp>
+      <p:sp>
+        <p:nvSpPr>
+          <p:cNvPr id="29" name="Text 23"/>
           <p:cNvSpPr/>
           <p:nvPr/>
         </p:nvSpPr>
@@ -19199,7 +20423,7 @@
       </p:sp>
       <p:sp>
         <p:nvSpPr>
-          <p:cNvPr id="24" name="Text 20"/>
+          <p:cNvPr id="30" name="Text 24"/>
           <p:cNvSpPr/>
           <p:nvPr/>
         </p:nvSpPr>
@@ -19389,7 +20613,7 @@
                 <a:ea typeface="Cambria" pitchFamily="34" charset="-122"/>
                 <a:cs typeface="Cambria" pitchFamily="34" charset="-120"/>
               </a:rPr>
-              <a:t>Drug History</a:t>
+              <a:t>Medical History</a:t>
             </a:r>
             <a:endParaRPr lang="en-US" sz="3000" dirty="0"/>
           </a:p>
@@ -19508,7 +20732,7 @@
                 <a:ea typeface="Cambria" pitchFamily="34" charset="-122"/>
                 <a:cs typeface="Cambria" pitchFamily="34" charset="-120"/>
               </a:rPr>
-              <a:t>Medications</a:t>
+              <a:t>Medical</a:t>
             </a:r>
             <a:endParaRPr lang="en-US" sz="2500" dirty="0"/>
           </a:p>
@@ -19698,11 +20922,11 @@
         <p:spPr>
           <a:xfrm>
             <a:off x="4937760" y="1783080"/>
-            <a:ext cx="6766560" cy="1325880"/>
+            <a:ext cx="6766560" cy="4206240"/>
           </a:xfrm>
           <a:prstGeom prst="roundRect">
             <a:avLst>
-              <a:gd name="adj" fmla="val 6897"/>
+              <a:gd name="adj" fmla="val 2609"/>
             </a:avLst>
           </a:prstGeom>
           <a:solidFill>
@@ -19725,79 +20949,69 @@
       </p:sp>
       <p:sp>
         <p:nvSpPr>
-          <p:cNvPr id="18" name="Shape 14"/>
-          <p:cNvSpPr/>
-          <p:nvPr/>
-        </p:nvSpPr>
-        <p:spPr>
-          <a:xfrm>
-            <a:off x="5257800" y="2084832"/>
-            <a:ext cx="731520" cy="731520"/>
-          </a:xfrm>
-          <a:prstGeom prst="ellipse">
-            <a:avLst/>
-          </a:prstGeom>
-          <a:solidFill>
-            <a:srgbClr val="FFFFFF"/>
-          </a:solidFill>
-          <a:ln w="12700">
-            <a:solidFill>
-              <a:srgbClr val="FBD8DF"/>
-            </a:solidFill>
-            <a:prstDash val="solid"/>
-          </a:ln>
-        </p:spPr>
-      </p:sp>
-      <p:pic>
-        <p:nvPicPr>
-          <p:cNvPr id="19" name="Image 2" descr="preencoded.png">    </p:cNvPr>
-          <p:cNvPicPr>
-            <a:picLocks noChangeAspect="1"/>
-          </p:cNvPicPr>
-          <p:nvPr/>
-        </p:nvPicPr>
-        <p:blipFill>
-          <a:blip r:embed="rId3"/>
-          <a:stretch>
-            <a:fillRect/>
-          </a:stretch>
-        </p:blipFill>
-        <p:spPr>
-          <a:xfrm>
-            <a:off x="5440680" y="2267712"/>
-            <a:ext cx="365760" cy="365760"/>
-          </a:xfrm>
-          <a:prstGeom prst="rect">
-            <a:avLst/>
-          </a:prstGeom>
-        </p:spPr>
-      </p:pic>
-      <p:sp>
-        <p:nvSpPr>
-          <p:cNvPr id="20" name="Text 15"/>
-          <p:cNvSpPr/>
-          <p:nvPr/>
-        </p:nvSpPr>
-        <p:spPr>
-          <a:xfrm>
-            <a:off x="6217920" y="2039112"/>
-            <a:ext cx="5120640" cy="457200"/>
-          </a:xfrm>
-          <a:prstGeom prst="rect">
-            <a:avLst/>
-          </a:prstGeom>
-          <a:noFill/>
-          <a:ln/>
-        </p:spPr>
-        <p:txBody>
-          <a:bodyPr wrap="square" lIns="0" tIns="0" rIns="0" bIns="0" rtlCol="0" anchor="t"/>
-          <a:lstStyle/>
-          <a:p>
-            <a:pPr algn="l" indent="0" marL="0">
-              <a:buNone/>
-            </a:pPr>
-            <a:r>
-              <a:rPr lang="en-US" sz="2400" b="1" dirty="0">
+          <p:cNvPr id="18" name="Text 14"/>
+          <p:cNvSpPr/>
+          <p:nvPr/>
+        </p:nvSpPr>
+        <p:spPr>
+          <a:xfrm>
+            <a:off x="5440680" y="2194560"/>
+            <a:ext cx="5852160" cy="274320"/>
+          </a:xfrm>
+          <a:prstGeom prst="rect">
+            <a:avLst/>
+          </a:prstGeom>
+          <a:noFill/>
+          <a:ln/>
+        </p:spPr>
+        <p:txBody>
+          <a:bodyPr wrap="square" rtlCol="0" anchor="t"/>
+          <a:lstStyle/>
+          <a:p>
+            <a:pPr algn="l" indent="0" marL="0">
+              <a:buNone/>
+            </a:pPr>
+            <a:r>
+              <a:rPr lang="en-US" sz="1250" b="1" spc="200" kern="0" dirty="0">
+                <a:solidFill>
+                  <a:srgbClr val="A4133C"/>
+                </a:solidFill>
+                <a:latin typeface="Calibri" pitchFamily="34" charset="0"/>
+                <a:ea typeface="Calibri" pitchFamily="34" charset="-122"/>
+                <a:cs typeface="Calibri" pitchFamily="34" charset="-120"/>
+              </a:rPr>
+              <a:t>KNOWN COMORBIDITY</a:t>
+            </a:r>
+            <a:endParaRPr lang="en-US" sz="1250" dirty="0"/>
+          </a:p>
+        </p:txBody>
+      </p:sp>
+      <p:sp>
+        <p:nvSpPr>
+          <p:cNvPr id="19" name="Text 15"/>
+          <p:cNvSpPr/>
+          <p:nvPr/>
+        </p:nvSpPr>
+        <p:spPr>
+          <a:xfrm>
+            <a:off x="5440680" y="2606040"/>
+            <a:ext cx="5852160" cy="822960"/>
+          </a:xfrm>
+          <a:prstGeom prst="rect">
+            <a:avLst/>
+          </a:prstGeom>
+          <a:noFill/>
+          <a:ln/>
+        </p:spPr>
+        <p:txBody>
+          <a:bodyPr wrap="square" rtlCol="0" anchor="t"/>
+          <a:lstStyle/>
+          <a:p>
+            <a:pPr algn="l" indent="0" marL="0">
+              <a:buNone/>
+            </a:pPr>
+            <a:r>
+              <a:rPr lang="en-US" sz="4400" b="1" dirty="0">
                 <a:solidFill>
                   <a:srgbClr val="2B2B33"/>
                 </a:solidFill>
@@ -19805,38 +21019,38 @@
                 <a:ea typeface="Cambria" pitchFamily="34" charset="-122"/>
                 <a:cs typeface="Cambria" pitchFamily="34" charset="-120"/>
               </a:rPr>
-              <a:t>Tab Vadil</a:t>
-            </a:r>
-            <a:endParaRPr lang="en-US" sz="2400" dirty="0"/>
-          </a:p>
-        </p:txBody>
-      </p:sp>
-      <p:sp>
-        <p:nvSpPr>
-          <p:cNvPr id="21" name="Text 16"/>
-          <p:cNvSpPr/>
-          <p:nvPr/>
-        </p:nvSpPr>
-        <p:spPr>
-          <a:xfrm>
-            <a:off x="6217920" y="2532888"/>
-            <a:ext cx="5120640" cy="365760"/>
-          </a:xfrm>
-          <a:prstGeom prst="rect">
-            <a:avLst/>
-          </a:prstGeom>
-          <a:noFill/>
-          <a:ln/>
-        </p:spPr>
-        <p:txBody>
-          <a:bodyPr wrap="square" lIns="0" tIns="0" rIns="0" bIns="0" rtlCol="0" anchor="t"/>
-          <a:lstStyle/>
-          <a:p>
-            <a:pPr algn="l" indent="0" marL="0">
-              <a:buNone/>
-            </a:pPr>
-            <a:r>
-              <a:rPr lang="en-US" sz="1450" i="1" dirty="0">
+              <a:t>Hypertension</a:t>
+            </a:r>
+            <a:endParaRPr lang="en-US" sz="4400" dirty="0"/>
+          </a:p>
+        </p:txBody>
+      </p:sp>
+      <p:sp>
+        <p:nvSpPr>
+          <p:cNvPr id="20" name="Text 16"/>
+          <p:cNvSpPr/>
+          <p:nvPr/>
+        </p:nvSpPr>
+        <p:spPr>
+          <a:xfrm>
+            <a:off x="5458968" y="3611880"/>
+            <a:ext cx="5760720" cy="457200"/>
+          </a:xfrm>
+          <a:prstGeom prst="rect">
+            <a:avLst/>
+          </a:prstGeom>
+          <a:noFill/>
+          <a:ln/>
+        </p:spPr>
+        <p:txBody>
+          <a:bodyPr wrap="square" rtlCol="0" anchor="t"/>
+          <a:lstStyle/>
+          <a:p>
+            <a:pPr algn="l" indent="0" marL="0">
+              <a:buNone/>
+            </a:pPr>
+            <a:r>
+              <a:rPr lang="en-US" sz="1700" i="1" dirty="0">
                 <a:solidFill>
                   <a:srgbClr val="6B6B76"/>
                 </a:solidFill>
@@ -19844,168 +21058,68 @@
                 <a:ea typeface="Calibri" pitchFamily="34" charset="-122"/>
                 <a:cs typeface="Calibri" pitchFamily="34" charset="-120"/>
               </a:rPr>
-              <a:t>Rate / rhythm control</a:t>
-            </a:r>
-            <a:endParaRPr lang="en-US" sz="1450" dirty="0"/>
-          </a:p>
-        </p:txBody>
-      </p:sp>
-      <p:sp>
-        <p:nvSpPr>
-          <p:cNvPr id="22" name="Shape 17"/>
-          <p:cNvSpPr/>
-          <p:nvPr/>
-        </p:nvSpPr>
-        <p:spPr>
-          <a:xfrm>
-            <a:off x="4937760" y="3291840"/>
-            <a:ext cx="6766560" cy="1325880"/>
+              <a:t>On oral antihypertensive medication</a:t>
+            </a:r>
+            <a:endParaRPr lang="en-US" sz="1700" dirty="0"/>
+          </a:p>
+        </p:txBody>
+      </p:sp>
+      <p:sp>
+        <p:nvSpPr>
+          <p:cNvPr id="21" name="Shape 17"/>
+          <p:cNvSpPr/>
+          <p:nvPr/>
+        </p:nvSpPr>
+        <p:spPr>
+          <a:xfrm>
+            <a:off x="5440680" y="4572000"/>
+            <a:ext cx="2148840" cy="566928"/>
           </a:xfrm>
           <a:prstGeom prst="roundRect">
             <a:avLst>
-              <a:gd name="adj" fmla="val 6897"/>
+              <a:gd name="adj" fmla="val 50000"/>
             </a:avLst>
           </a:prstGeom>
           <a:solidFill>
-            <a:srgbClr val="FFF0F3"/>
+            <a:srgbClr val="A4133C"/>
           </a:solidFill>
-          <a:ln w="12700">
-            <a:solidFill>
-              <a:srgbClr val="FBD8DF"/>
-            </a:solidFill>
-            <a:prstDash val="solid"/>
-          </a:ln>
-          <a:effectLst>
-            <a:outerShdw sx="100000" sy="100000" kx="0" ky="0" algn="bl" rotWithShape="0" blurRad="127000" dist="50800" dir="5400000">
-              <a:srgbClr val="C9A3AC">
-                <a:alpha val="45000"/>
-              </a:srgbClr>
-            </a:outerShdw>
-          </a:effectLst>
-        </p:spPr>
-      </p:sp>
-      <p:sp>
-        <p:nvSpPr>
-          <p:cNvPr id="23" name="Shape 18"/>
-          <p:cNvSpPr/>
-          <p:nvPr/>
-        </p:nvSpPr>
-        <p:spPr>
-          <a:xfrm>
-            <a:off x="5257800" y="3593592"/>
-            <a:ext cx="731520" cy="731520"/>
-          </a:xfrm>
-          <a:prstGeom prst="ellipse">
-            <a:avLst/>
-          </a:prstGeom>
-          <a:solidFill>
-            <a:srgbClr val="FFFFFF"/>
-          </a:solidFill>
-          <a:ln w="12700">
-            <a:solidFill>
-              <a:srgbClr val="FBD8DF"/>
-            </a:solidFill>
-            <a:prstDash val="solid"/>
-          </a:ln>
-        </p:spPr>
-      </p:sp>
-      <p:pic>
-        <p:nvPicPr>
-          <p:cNvPr id="24" name="Image 3" descr="preencoded.png">    </p:cNvPr>
-          <p:cNvPicPr>
-            <a:picLocks noChangeAspect="1"/>
-          </p:cNvPicPr>
-          <p:nvPr/>
-        </p:nvPicPr>
-        <p:blipFill>
-          <a:blip r:embed="rId4"/>
-          <a:stretch>
-            <a:fillRect/>
-          </a:stretch>
-        </p:blipFill>
-        <p:spPr>
-          <a:xfrm>
-            <a:off x="5440680" y="3776472"/>
-            <a:ext cx="365760" cy="365760"/>
-          </a:xfrm>
-          <a:prstGeom prst="rect">
-            <a:avLst/>
-          </a:prstGeom>
-        </p:spPr>
-      </p:pic>
-      <p:sp>
-        <p:nvSpPr>
-          <p:cNvPr id="25" name="Text 19"/>
-          <p:cNvSpPr/>
-          <p:nvPr/>
-        </p:nvSpPr>
-        <p:spPr>
-          <a:xfrm>
-            <a:off x="6217920" y="3547872"/>
-            <a:ext cx="5120640" cy="457200"/>
-          </a:xfrm>
-          <a:prstGeom prst="rect">
-            <a:avLst/>
-          </a:prstGeom>
-          <a:noFill/>
-          <a:ln/>
-        </p:spPr>
-        <p:txBody>
-          <a:bodyPr wrap="square" lIns="0" tIns="0" rIns="0" bIns="0" rtlCol="0" anchor="t"/>
-          <a:lstStyle/>
-          <a:p>
-            <a:pPr algn="l" indent="0" marL="0">
-              <a:buNone/>
-            </a:pPr>
-            <a:r>
-              <a:rPr lang="en-US" sz="2400" b="1" dirty="0">
-                <a:solidFill>
-                  <a:srgbClr val="2B2B33"/>
-                </a:solidFill>
-                <a:latin typeface="Cambria" pitchFamily="34" charset="0"/>
-                <a:ea typeface="Cambria" pitchFamily="34" charset="-122"/>
-                <a:cs typeface="Cambria" pitchFamily="34" charset="-120"/>
-              </a:rPr>
-              <a:t>Tab Rivaroxaban</a:t>
-            </a:r>
-            <a:endParaRPr lang="en-US" sz="2400" dirty="0"/>
-          </a:p>
-        </p:txBody>
-      </p:sp>
-      <p:sp>
-        <p:nvSpPr>
-          <p:cNvPr id="26" name="Text 20"/>
-          <p:cNvSpPr/>
-          <p:nvPr/>
-        </p:nvSpPr>
-        <p:spPr>
-          <a:xfrm>
-            <a:off x="6217920" y="4041648"/>
-            <a:ext cx="5120640" cy="365760"/>
-          </a:xfrm>
-          <a:prstGeom prst="rect">
-            <a:avLst/>
-          </a:prstGeom>
-          <a:noFill/>
-          <a:ln/>
-        </p:spPr>
-        <p:txBody>
-          <a:bodyPr wrap="square" lIns="0" tIns="0" rIns="0" bIns="0" rtlCol="0" anchor="t"/>
-          <a:lstStyle/>
-          <a:p>
-            <a:pPr algn="l" indent="0" marL="0">
-              <a:buNone/>
-            </a:pPr>
-            <a:r>
-              <a:rPr lang="en-US" sz="1450" i="1" dirty="0">
-                <a:solidFill>
-                  <a:srgbClr val="6B6B76"/>
-                </a:solidFill>
-                <a:latin typeface="Calibri" pitchFamily="34" charset="0"/>
-                <a:ea typeface="Calibri" pitchFamily="34" charset="-122"/>
-                <a:cs typeface="Calibri" pitchFamily="34" charset="-120"/>
-              </a:rPr>
-              <a:t>Oral anticoagulation</a:t>
+          <a:ln/>
+        </p:spPr>
+      </p:sp>
+      <p:sp>
+        <p:nvSpPr>
+          <p:cNvPr id="22" name="Text 18"/>
+          <p:cNvSpPr/>
+          <p:nvPr/>
+        </p:nvSpPr>
+        <p:spPr>
+          <a:xfrm>
+            <a:off x="5440680" y="4572000"/>
+            <a:ext cx="2148840" cy="566928"/>
+          </a:xfrm>
+          <a:prstGeom prst="rect">
+            <a:avLst/>
+          </a:prstGeom>
+          <a:noFill/>
+          <a:ln/>
+        </p:spPr>
+        <p:txBody>
+          <a:bodyPr wrap="square" rtlCol="0" anchor="ctr"/>
+          <a:lstStyle/>
+          <a:p>
+            <a:pPr algn="ctr" indent="0" marL="0">
+              <a:buNone/>
+            </a:pPr>
+            <a:r>
+              <a:rPr lang="en-US" sz="1450" b="1" dirty="0">
+                <a:solidFill>
+                  <a:srgbClr val="FFFFFF"/>
+                </a:solidFill>
+                <a:latin typeface="Calibri" pitchFamily="34" charset="0"/>
+                <a:ea typeface="Calibri" pitchFamily="34" charset="-122"/>
+                <a:cs typeface="Calibri" pitchFamily="34" charset="-120"/>
+              </a:rPr>
+              <a:t>HTN</a:t>
             </a:r>
             <a:endParaRPr lang="en-US" sz="1450" dirty="0"/>
           </a:p>
@@ -20013,89 +21127,7 @@
       </p:sp>
       <p:sp>
         <p:nvSpPr>
-          <p:cNvPr id="27" name="Shape 21"/>
-          <p:cNvSpPr/>
-          <p:nvPr/>
-        </p:nvSpPr>
-        <p:spPr>
-          <a:xfrm>
-            <a:off x="4937760" y="4800600"/>
-            <a:ext cx="6766560" cy="1188720"/>
-          </a:xfrm>
-          <a:prstGeom prst="roundRect">
-            <a:avLst>
-              <a:gd name="adj" fmla="val 7692"/>
-            </a:avLst>
-          </a:prstGeom>
-          <a:solidFill>
-            <a:srgbClr val="590D22"/>
-          </a:solidFill>
-          <a:ln/>
-          <a:effectLst>
-            <a:outerShdw sx="100000" sy="100000" kx="0" ky="0" algn="bl" rotWithShape="0" blurRad="127000" dist="50800" dir="5400000">
-              <a:srgbClr val="C9A3AC">
-                <a:alpha val="45000"/>
-              </a:srgbClr>
-            </a:outerShdw>
-          </a:effectLst>
-        </p:spPr>
-      </p:sp>
-      <p:sp>
-        <p:nvSpPr>
-          <p:cNvPr id="28" name="Text 22"/>
-          <p:cNvSpPr/>
-          <p:nvPr/>
-        </p:nvSpPr>
-        <p:spPr>
-          <a:xfrm>
-            <a:off x="5394960" y="4800600"/>
-            <a:ext cx="5852160" cy="1188720"/>
-          </a:xfrm>
-          <a:prstGeom prst="rect">
-            <a:avLst/>
-          </a:prstGeom>
-          <a:noFill/>
-          <a:ln/>
-        </p:spPr>
-        <p:txBody>
-          <a:bodyPr wrap="square" rtlCol="0" anchor="ctr"/>
-          <a:lstStyle/>
-          <a:p>
-            <a:pPr algn="l" indent="0" marL="0">
-              <a:buNone/>
-            </a:pPr>
-            <a:r>
-              <a:rPr lang="en-US" sz="1600" b="1" dirty="0">
-                <a:solidFill>
-                  <a:srgbClr val="FF4D6D"/>
-                </a:solidFill>
-                <a:latin typeface="Calibri" pitchFamily="34" charset="0"/>
-                <a:ea typeface="Calibri" pitchFamily="34" charset="-122"/>
-                <a:cs typeface="Calibri" pitchFamily="34" charset="-120"/>
-              </a:rPr>
-              <a:t>Purpose  </a:t>
-            </a:r>
-            <a:pPr algn="l" indent="0" marL="0">
-              <a:buNone/>
-            </a:pPr>
-            <a:r>
-              <a:rPr lang="en-US" sz="1600" dirty="0">
-                <a:solidFill>
-                  <a:srgbClr val="FBD8DF"/>
-                </a:solidFill>
-                <a:latin typeface="Calibri" pitchFamily="34" charset="0"/>
-                <a:ea typeface="Calibri" pitchFamily="34" charset="-122"/>
-                <a:cs typeface="Calibri" pitchFamily="34" charset="-120"/>
-              </a:rPr>
-              <a:t>Symptom control with stroke-risk protection</a:t>
-            </a:r>
-            <a:endParaRPr lang="en-US" sz="1600" dirty="0"/>
-          </a:p>
-        </p:txBody>
-      </p:sp>
-      <p:sp>
-        <p:nvSpPr>
-          <p:cNvPr id="29" name="Text 23"/>
+          <p:cNvPr id="23" name="Text 19"/>
           <p:cNvSpPr/>
           <p:nvPr/>
         </p:nvSpPr>
@@ -20134,7 +21166,7 @@
       </p:sp>
       <p:sp>
         <p:nvSpPr>
-          <p:cNvPr id="30" name="Text 24"/>
+          <p:cNvPr id="24" name="Text 20"/>
           <p:cNvSpPr/>
           <p:nvPr/>
         </p:nvSpPr>

--- a/presentations/Clinicopathological-Conference.pptx
+++ b/presentations/Clinicopathological-Conference.pptx
@@ -6463,177 +6463,12 @@
         </p:nvSpPr>
         <p:spPr>
           <a:xfrm>
-            <a:off x="502920" y="1600200"/>
-            <a:ext cx="11183112" cy="896112"/>
+            <a:off x="502920" y="1737360"/>
+            <a:ext cx="5669280" cy="4279392"/>
           </a:xfrm>
           <a:prstGeom prst="roundRect">
             <a:avLst>
-              <a:gd name="adj" fmla="val 12245"/>
-            </a:avLst>
-          </a:prstGeom>
-          <a:solidFill>
-            <a:srgbClr val="590D22"/>
-          </a:solidFill>
-          <a:ln/>
-          <a:effectLst>
-            <a:outerShdw sx="100000" sy="100000" kx="0" ky="0" algn="bl" rotWithShape="0" blurRad="127000" dist="50800" dir="5400000">
-              <a:srgbClr val="C9A3AC">
-                <a:alpha val="45000"/>
-              </a:srgbClr>
-            </a:outerShdw>
-          </a:effectLst>
-        </p:spPr>
-      </p:sp>
-      <p:sp>
-        <p:nvSpPr>
-          <p:cNvPr id="7" name="Shape 4"/>
-          <p:cNvSpPr/>
-          <p:nvPr/>
-        </p:nvSpPr>
-        <p:spPr>
-          <a:xfrm>
-            <a:off x="749808" y="1801368"/>
-            <a:ext cx="512064" cy="512064"/>
-          </a:xfrm>
-          <a:prstGeom prst="ellipse">
-            <a:avLst/>
-          </a:prstGeom>
-          <a:solidFill>
-            <a:srgbClr val="A4133C"/>
-          </a:solidFill>
-          <a:ln/>
-        </p:spPr>
-      </p:sp>
-      <p:pic>
-        <p:nvPicPr>
-          <p:cNvPr id="8" name="Image 1" descr="preencoded.png">    </p:cNvPr>
-          <p:cNvPicPr>
-            <a:picLocks noChangeAspect="1"/>
-          </p:cNvPicPr>
-          <p:nvPr/>
-        </p:nvPicPr>
-        <p:blipFill>
-          <a:blip r:embed="rId2"/>
-          <a:stretch>
-            <a:fillRect/>
-          </a:stretch>
-        </p:blipFill>
-        <p:spPr>
-          <a:xfrm>
-            <a:off x="877824" y="1929384"/>
-            <a:ext cx="256032" cy="256032"/>
-          </a:xfrm>
-          <a:prstGeom prst="rect">
-            <a:avLst/>
-          </a:prstGeom>
-        </p:spPr>
-      </p:pic>
-      <p:sp>
-        <p:nvSpPr>
-          <p:cNvPr id="9" name="Text 5"/>
-          <p:cNvSpPr/>
-          <p:nvPr/>
-        </p:nvSpPr>
-        <p:spPr>
-          <a:xfrm>
-            <a:off x="1463040" y="1600200"/>
-            <a:ext cx="7498080" cy="896112"/>
-          </a:xfrm>
-          <a:prstGeom prst="rect">
-            <a:avLst/>
-          </a:prstGeom>
-          <a:noFill/>
-          <a:ln/>
-        </p:spPr>
-        <p:txBody>
-          <a:bodyPr wrap="square" lIns="0" tIns="0" rIns="0" bIns="0" rtlCol="0" anchor="ctr"/>
-          <a:lstStyle/>
-          <a:p>
-            <a:pPr algn="l" indent="0" marL="0">
-              <a:buNone/>
-            </a:pPr>
-            <a:r>
-              <a:rPr lang="en-US" sz="2200" b="1" dirty="0">
-                <a:solidFill>
-                  <a:srgbClr val="FFFFFF"/>
-                </a:solidFill>
-                <a:latin typeface="Cambria" pitchFamily="34" charset="0"/>
-                <a:ea typeface="Cambria" pitchFamily="34" charset="-122"/>
-                <a:cs typeface="Cambria" pitchFamily="34" charset="-120"/>
-              </a:rPr>
-              <a:t>Atrial Fibrillation with Rapid Ventricular Response</a:t>
-            </a:r>
-            <a:endParaRPr lang="en-US" sz="2200" dirty="0"/>
-          </a:p>
-        </p:txBody>
-      </p:sp>
-      <p:sp>
-        <p:nvSpPr>
-          <p:cNvPr id="10" name="Text 6"/>
-          <p:cNvSpPr/>
-          <p:nvPr/>
-        </p:nvSpPr>
-        <p:spPr>
-          <a:xfrm>
-            <a:off x="8869680" y="1600200"/>
-            <a:ext cx="2697480" cy="896112"/>
-          </a:xfrm>
-          <a:prstGeom prst="rect">
-            <a:avLst/>
-          </a:prstGeom>
-          <a:noFill/>
-          <a:ln/>
-        </p:spPr>
-        <p:txBody>
-          <a:bodyPr wrap="square" lIns="0" tIns="0" rIns="0" bIns="0" rtlCol="0" anchor="ctr"/>
-          <a:lstStyle/>
-          <a:p>
-            <a:pPr algn="r" indent="0" marL="0">
-              <a:buNone/>
-            </a:pPr>
-            <a:r>
-              <a:rPr lang="en-US" sz="1250" dirty="0">
-                <a:solidFill>
-                  <a:srgbClr val="FBD8DF"/>
-                </a:solidFill>
-                <a:latin typeface="Calibri" pitchFamily="34" charset="0"/>
-                <a:ea typeface="Calibri" pitchFamily="34" charset="-122"/>
-                <a:cs typeface="Calibri" pitchFamily="34" charset="-120"/>
-              </a:rPr>
-              <a:t>Abnormal rhythm ECG · </a:t>
-            </a:r>
-            <a:pPr algn="r" indent="0" marL="0">
-              <a:buNone/>
-            </a:pPr>
-            <a:r>
-              <a:rPr lang="en-US" sz="1250" b="1" dirty="0">
-                <a:solidFill>
-                  <a:srgbClr val="FF4D6D"/>
-                </a:solidFill>
-                <a:latin typeface="Calibri" pitchFamily="34" charset="0"/>
-                <a:ea typeface="Calibri" pitchFamily="34" charset="-122"/>
-                <a:cs typeface="Calibri" pitchFamily="34" charset="-120"/>
-              </a:rPr>
-              <a:t>06-Jul-2026</a:t>
-            </a:r>
-            <a:endParaRPr lang="en-US" sz="1250" dirty="0"/>
-          </a:p>
-        </p:txBody>
-      </p:sp>
-      <p:sp>
-        <p:nvSpPr>
-          <p:cNvPr id="11" name="Shape 7"/>
-          <p:cNvSpPr/>
-          <p:nvPr/>
-        </p:nvSpPr>
-        <p:spPr>
-          <a:xfrm>
-            <a:off x="502920" y="2651760"/>
-            <a:ext cx="7973568" cy="3355848"/>
-          </a:xfrm>
-          <a:prstGeom prst="roundRect">
-            <a:avLst>
-              <a:gd name="adj" fmla="val 3270"/>
+              <a:gd name="adj" fmla="val 2564"/>
             </a:avLst>
           </a:prstGeom>
           <a:solidFill>
@@ -6656,7 +6491,80 @@
       </p:sp>
       <p:pic>
         <p:nvPicPr>
-          <p:cNvPr id="12" name="Image 2" descr="preencoded.png">    </p:cNvPr>
+          <p:cNvPr id="7" name="Image 1" descr="preencoded.png">    </p:cNvPr>
+          <p:cNvPicPr>
+            <a:picLocks noChangeAspect="1"/>
+          </p:cNvPicPr>
+          <p:nvPr/>
+        </p:nvPicPr>
+        <p:blipFill>
+          <a:blip r:embed="rId2"/>
+          <a:stretch>
+            <a:fillRect/>
+          </a:stretch>
+        </p:blipFill>
+        <p:spPr>
+          <a:xfrm>
+            <a:off x="612648" y="1819656"/>
+            <a:ext cx="5458968" cy="4114800"/>
+          </a:xfrm>
+          <a:prstGeom prst="rect">
+            <a:avLst/>
+          </a:prstGeom>
+        </p:spPr>
+      </p:pic>
+      <p:sp>
+        <p:nvSpPr>
+          <p:cNvPr id="8" name="Shape 4"/>
+          <p:cNvSpPr/>
+          <p:nvPr/>
+        </p:nvSpPr>
+        <p:spPr>
+          <a:xfrm>
+            <a:off x="6355080" y="1737360"/>
+            <a:ext cx="5349240" cy="1481328"/>
+          </a:xfrm>
+          <a:prstGeom prst="roundRect">
+            <a:avLst>
+              <a:gd name="adj" fmla="val 7407"/>
+            </a:avLst>
+          </a:prstGeom>
+          <a:solidFill>
+            <a:srgbClr val="590D22"/>
+          </a:solidFill>
+          <a:ln/>
+          <a:effectLst>
+            <a:outerShdw sx="100000" sy="100000" kx="0" ky="0" algn="bl" rotWithShape="0" blurRad="127000" dist="50800" dir="5400000">
+              <a:srgbClr val="C9A3AC">
+                <a:alpha val="45000"/>
+              </a:srgbClr>
+            </a:outerShdw>
+          </a:effectLst>
+        </p:spPr>
+      </p:sp>
+      <p:sp>
+        <p:nvSpPr>
+          <p:cNvPr id="9" name="Shape 5"/>
+          <p:cNvSpPr/>
+          <p:nvPr/>
+        </p:nvSpPr>
+        <p:spPr>
+          <a:xfrm>
+            <a:off x="6611112" y="1956816"/>
+            <a:ext cx="548640" cy="548640"/>
+          </a:xfrm>
+          <a:prstGeom prst="ellipse">
+            <a:avLst/>
+          </a:prstGeom>
+          <a:solidFill>
+            <a:srgbClr val="A4133C"/>
+          </a:solidFill>
+          <a:ln/>
+        </p:spPr>
+      </p:sp>
+      <p:pic>
+        <p:nvPicPr>
+          <p:cNvPr id="10" name="Image 2" descr="preencoded.png">    </p:cNvPr>
           <p:cNvPicPr>
             <a:picLocks noChangeAspect="1"/>
           </p:cNvPicPr>
@@ -6670,8 +6578,8 @@
         </p:blipFill>
         <p:spPr>
           <a:xfrm>
-            <a:off x="621792" y="2724912"/>
-            <a:ext cx="7735824" cy="3227832"/>
+            <a:off x="6748272" y="2093976"/>
+            <a:ext cx="274320" cy="274320"/>
           </a:xfrm>
           <a:prstGeom prst="rect">
             <a:avLst/>
@@ -6680,18 +6588,113 @@
       </p:pic>
       <p:sp>
         <p:nvSpPr>
+          <p:cNvPr id="11" name="Text 6"/>
+          <p:cNvSpPr/>
+          <p:nvPr/>
+        </p:nvSpPr>
+        <p:spPr>
+          <a:xfrm>
+            <a:off x="7287768" y="1828800"/>
+            <a:ext cx="4251960" cy="960120"/>
+          </a:xfrm>
+          <a:prstGeom prst="rect">
+            <a:avLst/>
+          </a:prstGeom>
+          <a:noFill/>
+          <a:ln/>
+        </p:spPr>
+        <p:txBody>
+          <a:bodyPr wrap="square" lIns="0" tIns="0" rIns="0" bIns="0" rtlCol="0" anchor="t"/>
+          <a:lstStyle/>
+          <a:p>
+            <a:pPr algn="l" indent="0" marL="0">
+              <a:lnSpc>
+                <a:spcPct val="100000"/>
+              </a:lnSpc>
+              <a:buNone/>
+            </a:pPr>
+            <a:r>
+              <a:rPr lang="en-US" sz="1900" b="1" dirty="0">
+                <a:solidFill>
+                  <a:srgbClr val="FFFFFF"/>
+                </a:solidFill>
+                <a:latin typeface="Cambria" pitchFamily="34" charset="0"/>
+                <a:ea typeface="Cambria" pitchFamily="34" charset="-122"/>
+                <a:cs typeface="Cambria" pitchFamily="34" charset="-120"/>
+              </a:rPr>
+              <a:t>Atrial Fibrillation with Rapid Ventricular Response</a:t>
+            </a:r>
+            <a:endParaRPr lang="en-US" sz="1900" dirty="0"/>
+          </a:p>
+        </p:txBody>
+      </p:sp>
+      <p:sp>
+        <p:nvSpPr>
+          <p:cNvPr id="12" name="Text 7"/>
+          <p:cNvSpPr/>
+          <p:nvPr/>
+        </p:nvSpPr>
+        <p:spPr>
+          <a:xfrm>
+            <a:off x="7287768" y="2798064"/>
+            <a:ext cx="4206240" cy="310896"/>
+          </a:xfrm>
+          <a:prstGeom prst="rect">
+            <a:avLst/>
+          </a:prstGeom>
+          <a:noFill/>
+          <a:ln/>
+        </p:spPr>
+        <p:txBody>
+          <a:bodyPr wrap="square" lIns="0" tIns="0" rIns="0" bIns="0" rtlCol="0" anchor="t"/>
+          <a:lstStyle/>
+          <a:p>
+            <a:pPr algn="l" indent="0" marL="0">
+              <a:buNone/>
+            </a:pPr>
+            <a:r>
+              <a:rPr lang="en-US" sz="1250" dirty="0">
+                <a:solidFill>
+                  <a:srgbClr val="FBD8DF"/>
+                </a:solidFill>
+                <a:latin typeface="Calibri" pitchFamily="34" charset="0"/>
+                <a:ea typeface="Calibri" pitchFamily="34" charset="-122"/>
+                <a:cs typeface="Calibri" pitchFamily="34" charset="-120"/>
+              </a:rPr>
+              <a:t>Abnormal rhythm ECG · </a:t>
+            </a:r>
+            <a:pPr algn="l" indent="0" marL="0">
+              <a:buNone/>
+            </a:pPr>
+            <a:r>
+              <a:rPr lang="en-US" sz="1250" b="1" dirty="0">
+                <a:solidFill>
+                  <a:srgbClr val="FF4D6D"/>
+                </a:solidFill>
+                <a:latin typeface="Calibri" pitchFamily="34" charset="0"/>
+                <a:ea typeface="Calibri" pitchFamily="34" charset="-122"/>
+                <a:cs typeface="Calibri" pitchFamily="34" charset="-120"/>
+              </a:rPr>
+              <a:t>06-Jul-2026</a:t>
+            </a:r>
+            <a:endParaRPr lang="en-US" sz="1250" dirty="0"/>
+          </a:p>
+        </p:txBody>
+      </p:sp>
+      <p:sp>
+        <p:nvSpPr>
           <p:cNvPr id="13" name="Shape 8"/>
           <p:cNvSpPr/>
           <p:nvPr/>
         </p:nvSpPr>
         <p:spPr>
           <a:xfrm>
-            <a:off x="8613648" y="2651760"/>
-            <a:ext cx="3072384" cy="1078992"/>
+            <a:off x="6355080" y="3364992"/>
+            <a:ext cx="5349240" cy="914400"/>
           </a:xfrm>
           <a:prstGeom prst="roundRect">
             <a:avLst>
-              <a:gd name="adj" fmla="val 10169"/>
+              <a:gd name="adj" fmla="val 12000"/>
             </a:avLst>
           </a:prstGeom>
           <a:solidFill>
@@ -6720,8 +6723,8 @@
         </p:nvSpPr>
         <p:spPr>
           <a:xfrm>
-            <a:off x="8833104" y="2779776"/>
-            <a:ext cx="2194560" cy="256032"/>
+            <a:off x="6611112" y="3493008"/>
+            <a:ext cx="2377440" cy="256032"/>
           </a:xfrm>
           <a:prstGeom prst="rect">
             <a:avLst/>
@@ -6748,12 +6751,65 @@
               <a:t>VENTRICULAR RATE</a:t>
             </a:r>
             <a:endParaRPr lang="en-US" sz="1100" dirty="0"/>
+          </a:p>
+        </p:txBody>
+      </p:sp>
+      <p:sp>
+        <p:nvSpPr>
+          <p:cNvPr id="15" name="Text 10"/>
+          <p:cNvSpPr/>
+          <p:nvPr/>
+        </p:nvSpPr>
+        <p:spPr>
+          <a:xfrm>
+            <a:off x="6611112" y="3767328"/>
+            <a:ext cx="2194560" cy="475488"/>
+          </a:xfrm>
+          <a:prstGeom prst="rect">
+            <a:avLst/>
+          </a:prstGeom>
+          <a:noFill/>
+          <a:ln/>
+        </p:spPr>
+        <p:txBody>
+          <a:bodyPr wrap="square" lIns="0" tIns="0" rIns="0" bIns="0" rtlCol="0" anchor="ctr"/>
+          <a:lstStyle/>
+          <a:p>
+            <a:pPr algn="l" indent="0" marL="0">
+              <a:buNone/>
+            </a:pPr>
+            <a:r>
+              <a:rPr lang="en-US" sz="3400" b="1" dirty="0">
+                <a:solidFill>
+                  <a:srgbClr val="FF4D6D"/>
+                </a:solidFill>
+                <a:latin typeface="Cambria" pitchFamily="34" charset="0"/>
+                <a:ea typeface="Cambria" pitchFamily="34" charset="-122"/>
+                <a:cs typeface="Cambria" pitchFamily="34" charset="-120"/>
+              </a:rPr>
+              <a:t>146</a:t>
+            </a:r>
+            <a:pPr algn="l" indent="0" marL="0">
+              <a:buNone/>
+            </a:pPr>
+            <a:r>
+              <a:rPr lang="en-US" sz="1500" b="1" dirty="0">
+                <a:solidFill>
+                  <a:srgbClr val="6B6B76"/>
+                </a:solidFill>
+                <a:latin typeface="Calibri" pitchFamily="34" charset="0"/>
+                <a:ea typeface="Calibri" pitchFamily="34" charset="-122"/>
+                <a:cs typeface="Calibri" pitchFamily="34" charset="-120"/>
+              </a:rPr>
+              <a:t> bpm</a:t>
+            </a:r>
+            <a:endParaRPr lang="en-US" sz="3400" dirty="0"/>
           </a:p>
         </p:txBody>
       </p:sp>
       <p:pic>
         <p:nvPicPr>
-          <p:cNvPr id="15" name="Image 3" descr="preencoded.png">    </p:cNvPr>
+          <p:cNvPr id="16" name="Image 3" descr="preencoded.png">    </p:cNvPr>
           <p:cNvPicPr>
             <a:picLocks noChangeAspect="1"/>
           </p:cNvPicPr>
@@ -6767,8 +6823,8 @@
         </p:blipFill>
         <p:spPr>
           <a:xfrm>
-            <a:off x="11228832" y="2761488"/>
-            <a:ext cx="274320" cy="274320"/>
+            <a:off x="11201400" y="3493008"/>
+            <a:ext cx="292608" cy="292608"/>
           </a:xfrm>
           <a:prstGeom prst="rect">
             <a:avLst/>
@@ -6777,67 +6833,14 @@
       </p:pic>
       <p:sp>
         <p:nvSpPr>
-          <p:cNvPr id="16" name="Text 10"/>
-          <p:cNvSpPr/>
-          <p:nvPr/>
-        </p:nvSpPr>
-        <p:spPr>
-          <a:xfrm>
-            <a:off x="8833104" y="3072384"/>
-            <a:ext cx="1828800" cy="548640"/>
-          </a:xfrm>
-          <a:prstGeom prst="rect">
-            <a:avLst/>
-          </a:prstGeom>
-          <a:noFill/>
-          <a:ln/>
-        </p:spPr>
-        <p:txBody>
-          <a:bodyPr wrap="square" lIns="0" tIns="0" rIns="0" bIns="0" rtlCol="0" anchor="ctr"/>
-          <a:lstStyle/>
-          <a:p>
-            <a:pPr algn="l" indent="0" marL="0">
-              <a:buNone/>
-            </a:pPr>
-            <a:r>
-              <a:rPr lang="en-US" sz="3600" b="1" dirty="0">
-                <a:solidFill>
-                  <a:srgbClr val="FF4D6D"/>
-                </a:solidFill>
-                <a:latin typeface="Cambria" pitchFamily="34" charset="0"/>
-                <a:ea typeface="Cambria" pitchFamily="34" charset="-122"/>
-                <a:cs typeface="Cambria" pitchFamily="34" charset="-120"/>
-              </a:rPr>
-              <a:t>146</a:t>
-            </a:r>
-            <a:pPr algn="l" indent="0" marL="0">
-              <a:buNone/>
-            </a:pPr>
-            <a:r>
-              <a:rPr lang="en-US" sz="1500" b="1" dirty="0">
-                <a:solidFill>
-                  <a:srgbClr val="6B6B76"/>
-                </a:solidFill>
-                <a:latin typeface="Calibri" pitchFamily="34" charset="0"/>
-                <a:ea typeface="Calibri" pitchFamily="34" charset="-122"/>
-                <a:cs typeface="Calibri" pitchFamily="34" charset="-120"/>
-              </a:rPr>
-              <a:t> bpm</a:t>
-            </a:r>
-            <a:endParaRPr lang="en-US" sz="3600" dirty="0"/>
-          </a:p>
-        </p:txBody>
-      </p:sp>
-      <p:sp>
-        <p:nvSpPr>
           <p:cNvPr id="17" name="Shape 11"/>
           <p:cNvSpPr/>
           <p:nvPr/>
         </p:nvSpPr>
         <p:spPr>
           <a:xfrm>
-            <a:off x="10543032" y="3163824"/>
-            <a:ext cx="960120" cy="402336"/>
+            <a:off x="10424160" y="3785616"/>
+            <a:ext cx="1051560" cy="420624"/>
           </a:xfrm>
           <a:prstGeom prst="roundRect">
             <a:avLst>
@@ -6858,8 +6861,8 @@
         </p:nvSpPr>
         <p:spPr>
           <a:xfrm>
-            <a:off x="10543032" y="3163824"/>
-            <a:ext cx="960120" cy="402336"/>
+            <a:off x="10424160" y="3785616"/>
+            <a:ext cx="1051560" cy="420624"/>
           </a:xfrm>
           <a:prstGeom prst="rect">
             <a:avLst/>
@@ -6875,7 +6878,7 @@
               <a:buNone/>
             </a:pPr>
             <a:r>
-              <a:rPr lang="en-US" sz="1200" b="1" spc="100" kern="0" dirty="0">
+              <a:rPr lang="en-US" sz="1250" b="1" spc="100" kern="0" dirty="0">
                 <a:solidFill>
                   <a:srgbClr val="FFFFFF"/>
                 </a:solidFill>
@@ -6885,7 +6888,7 @@
               </a:rPr>
               <a:t>RAPID</a:t>
             </a:r>
-            <a:endParaRPr lang="en-US" sz="1200" dirty="0"/>
+            <a:endParaRPr lang="en-US" sz="1250" dirty="0"/>
           </a:p>
         </p:txBody>
       </p:sp>
@@ -6897,12 +6900,12 @@
         </p:nvSpPr>
         <p:spPr>
           <a:xfrm>
-            <a:off x="8613648" y="3840480"/>
-            <a:ext cx="3072384" cy="493776"/>
+            <a:off x="6355080" y="4389120"/>
+            <a:ext cx="2615184" cy="749808"/>
           </a:xfrm>
           <a:prstGeom prst="roundRect">
             <a:avLst>
-              <a:gd name="adj" fmla="val 16667"/>
+              <a:gd name="adj" fmla="val 12195"/>
             </a:avLst>
           </a:prstGeom>
           <a:solidFill>
@@ -6924,8 +6927,8 @@
         </p:nvSpPr>
         <p:spPr>
           <a:xfrm>
-            <a:off x="8814816" y="3904488"/>
-            <a:ext cx="2706624" cy="182880"/>
+            <a:off x="6556248" y="4517136"/>
+            <a:ext cx="2249424" cy="219456"/>
           </a:xfrm>
           <a:prstGeom prst="rect">
             <a:avLst/>
@@ -6941,7 +6944,7 @@
               <a:buNone/>
             </a:pPr>
             <a:r>
-              <a:rPr lang="en-US" sz="950" b="1" spc="100" kern="0" dirty="0">
+              <a:rPr lang="en-US" sz="1000" b="1" spc="80" kern="0" dirty="0">
                 <a:solidFill>
                   <a:srgbClr val="A4133C"/>
                 </a:solidFill>
@@ -6951,7 +6954,7 @@
               </a:rPr>
               <a:t>RHYTHM</a:t>
             </a:r>
-            <a:endParaRPr lang="en-US" sz="950" dirty="0"/>
+            <a:endParaRPr lang="en-US" sz="1000" dirty="0"/>
           </a:p>
         </p:txBody>
       </p:sp>
@@ -6963,8 +6966,8 @@
         </p:nvSpPr>
         <p:spPr>
           <a:xfrm>
-            <a:off x="8814816" y="4078224"/>
-            <a:ext cx="2706624" cy="237744"/>
+            <a:off x="6556248" y="4773168"/>
+            <a:ext cx="2249424" cy="274320"/>
           </a:xfrm>
           <a:prstGeom prst="rect">
             <a:avLst/>
@@ -6980,7 +6983,7 @@
               <a:buNone/>
             </a:pPr>
             <a:r>
-              <a:rPr lang="en-US" sz="1250" b="1" dirty="0">
+              <a:rPr lang="en-US" sz="1300" b="1" dirty="0">
                 <a:solidFill>
                   <a:srgbClr val="2B2B33"/>
                 </a:solidFill>
@@ -6988,9 +6991,9 @@
                 <a:ea typeface="Calibri" pitchFamily="34" charset="-122"/>
                 <a:cs typeface="Calibri" pitchFamily="34" charset="-120"/>
               </a:rPr>
-              <a:t>Atrial fibrillation (irregular)</a:t>
-            </a:r>
-            <a:endParaRPr lang="en-US" sz="1250" dirty="0"/>
+              <a:t>Atrial fibrillation</a:t>
+            </a:r>
+            <a:endParaRPr lang="en-US" sz="1300" dirty="0"/>
           </a:p>
         </p:txBody>
       </p:sp>
@@ -7002,12 +7005,12 @@
         </p:nvSpPr>
         <p:spPr>
           <a:xfrm>
-            <a:off x="8613648" y="4389120"/>
-            <a:ext cx="3072384" cy="493776"/>
+            <a:off x="9089136" y="4389120"/>
+            <a:ext cx="2615184" cy="749808"/>
           </a:xfrm>
           <a:prstGeom prst="roundRect">
             <a:avLst>
-              <a:gd name="adj" fmla="val 16667"/>
+              <a:gd name="adj" fmla="val 12195"/>
             </a:avLst>
           </a:prstGeom>
           <a:solidFill>
@@ -7029,8 +7032,8 @@
         </p:nvSpPr>
         <p:spPr>
           <a:xfrm>
-            <a:off x="8814816" y="4453128"/>
-            <a:ext cx="2706624" cy="182880"/>
+            <a:off x="9290304" y="4517136"/>
+            <a:ext cx="2249424" cy="219456"/>
           </a:xfrm>
           <a:prstGeom prst="rect">
             <a:avLst/>
@@ -7046,7 +7049,7 @@
               <a:buNone/>
             </a:pPr>
             <a:r>
-              <a:rPr lang="en-US" sz="950" b="1" spc="100" kern="0" dirty="0">
+              <a:rPr lang="en-US" sz="1000" b="1" spc="80" kern="0" dirty="0">
                 <a:solidFill>
                   <a:srgbClr val="A4133C"/>
                 </a:solidFill>
@@ -7056,7 +7059,7 @@
               </a:rPr>
               <a:t>P WAVES</a:t>
             </a:r>
-            <a:endParaRPr lang="en-US" sz="950" dirty="0"/>
+            <a:endParaRPr lang="en-US" sz="1000" dirty="0"/>
           </a:p>
         </p:txBody>
       </p:sp>
@@ -7068,8 +7071,8 @@
         </p:nvSpPr>
         <p:spPr>
           <a:xfrm>
-            <a:off x="8814816" y="4626864"/>
-            <a:ext cx="2706624" cy="237744"/>
+            <a:off x="9290304" y="4773168"/>
+            <a:ext cx="2249424" cy="274320"/>
           </a:xfrm>
           <a:prstGeom prst="rect">
             <a:avLst/>
@@ -7085,7 +7088,7 @@
               <a:buNone/>
             </a:pPr>
             <a:r>
-              <a:rPr lang="en-US" sz="1250" b="1" dirty="0">
+              <a:rPr lang="en-US" sz="1300" b="1" dirty="0">
                 <a:solidFill>
                   <a:srgbClr val="2B2B33"/>
                 </a:solidFill>
@@ -7095,7 +7098,7 @@
               </a:rPr>
               <a:t>Absent</a:t>
             </a:r>
-            <a:endParaRPr lang="en-US" sz="1250" dirty="0"/>
+            <a:endParaRPr lang="en-US" sz="1300" dirty="0"/>
           </a:p>
         </p:txBody>
       </p:sp>
@@ -7107,12 +7110,12 @@
         </p:nvSpPr>
         <p:spPr>
           <a:xfrm>
-            <a:off x="8613648" y="4937760"/>
-            <a:ext cx="3072384" cy="493776"/>
+            <a:off x="6355080" y="5239512"/>
+            <a:ext cx="2615184" cy="749808"/>
           </a:xfrm>
           <a:prstGeom prst="roundRect">
             <a:avLst>
-              <a:gd name="adj" fmla="val 16667"/>
+              <a:gd name="adj" fmla="val 12195"/>
             </a:avLst>
           </a:prstGeom>
           <a:solidFill>
@@ -7134,8 +7137,8 @@
         </p:nvSpPr>
         <p:spPr>
           <a:xfrm>
-            <a:off x="8814816" y="5001768"/>
-            <a:ext cx="2706624" cy="182880"/>
+            <a:off x="6556248" y="5367528"/>
+            <a:ext cx="2249424" cy="219456"/>
           </a:xfrm>
           <a:prstGeom prst="rect">
             <a:avLst/>
@@ -7151,7 +7154,7 @@
               <a:buNone/>
             </a:pPr>
             <a:r>
-              <a:rPr lang="en-US" sz="950" b="1" spc="100" kern="0" dirty="0">
+              <a:rPr lang="en-US" sz="1000" b="1" spc="80" kern="0" dirty="0">
                 <a:solidFill>
                   <a:srgbClr val="A4133C"/>
                 </a:solidFill>
@@ -7161,7 +7164,7 @@
               </a:rPr>
               <a:t>PR · QRS</a:t>
             </a:r>
-            <a:endParaRPr lang="en-US" sz="950" dirty="0"/>
+            <a:endParaRPr lang="en-US" sz="1000" dirty="0"/>
           </a:p>
         </p:txBody>
       </p:sp>
@@ -7173,8 +7176,8 @@
         </p:nvSpPr>
         <p:spPr>
           <a:xfrm>
-            <a:off x="8814816" y="5175504"/>
-            <a:ext cx="2706624" cy="237744"/>
+            <a:off x="6556248" y="5623560"/>
+            <a:ext cx="2249424" cy="274320"/>
           </a:xfrm>
           <a:prstGeom prst="rect">
             <a:avLst/>
@@ -7190,7 +7193,7 @@
               <a:buNone/>
             </a:pPr>
             <a:r>
-              <a:rPr lang="en-US" sz="1250" b="1" dirty="0">
+              <a:rPr lang="en-US" sz="1300" b="1" dirty="0">
                 <a:solidFill>
                   <a:srgbClr val="2B2B33"/>
                 </a:solidFill>
@@ -7198,9 +7201,9 @@
                 <a:ea typeface="Calibri" pitchFamily="34" charset="-122"/>
                 <a:cs typeface="Calibri" pitchFamily="34" charset="-120"/>
               </a:rPr>
-              <a:t>Not measurable · 80 ms</a:t>
-            </a:r>
-            <a:endParaRPr lang="en-US" sz="1250" dirty="0"/>
+              <a:t>– · 80 ms</a:t>
+            </a:r>
+            <a:endParaRPr lang="en-US" sz="1300" dirty="0"/>
           </a:p>
         </p:txBody>
       </p:sp>
@@ -7212,12 +7215,12 @@
         </p:nvSpPr>
         <p:spPr>
           <a:xfrm>
-            <a:off x="8613648" y="5486400"/>
-            <a:ext cx="3072384" cy="493776"/>
+            <a:off x="9089136" y="5239512"/>
+            <a:ext cx="2615184" cy="749808"/>
           </a:xfrm>
           <a:prstGeom prst="roundRect">
             <a:avLst>
-              <a:gd name="adj" fmla="val 16667"/>
+              <a:gd name="adj" fmla="val 12195"/>
             </a:avLst>
           </a:prstGeom>
           <a:solidFill>
@@ -7239,8 +7242,8 @@
         </p:nvSpPr>
         <p:spPr>
           <a:xfrm>
-            <a:off x="8814816" y="5550408"/>
-            <a:ext cx="2706624" cy="182880"/>
+            <a:off x="9290304" y="5367528"/>
+            <a:ext cx="2249424" cy="219456"/>
           </a:xfrm>
           <a:prstGeom prst="rect">
             <a:avLst/>
@@ -7256,7 +7259,7 @@
               <a:buNone/>
             </a:pPr>
             <a:r>
-              <a:rPr lang="en-US" sz="950" b="1" spc="100" kern="0" dirty="0">
+              <a:rPr lang="en-US" sz="1000" b="1" spc="80" kern="0" dirty="0">
                 <a:solidFill>
                   <a:srgbClr val="A4133C"/>
                 </a:solidFill>
@@ -7264,9 +7267,9 @@
                 <a:ea typeface="Calibri" pitchFamily="34" charset="-122"/>
                 <a:cs typeface="Calibri" pitchFamily="34" charset="-120"/>
               </a:rPr>
-              <a:t>QTC · AXIS</a:t>
-            </a:r>
-            <a:endParaRPr lang="en-US" sz="950" dirty="0"/>
+              <a:t>QT / QTC · AXIS</a:t>
+            </a:r>
+            <a:endParaRPr lang="en-US" sz="1000" dirty="0"/>
           </a:p>
         </p:txBody>
       </p:sp>
@@ -7278,8 +7281,8 @@
         </p:nvSpPr>
         <p:spPr>
           <a:xfrm>
-            <a:off x="8814816" y="5724144"/>
-            <a:ext cx="2706624" cy="237744"/>
+            <a:off x="9290304" y="5623560"/>
+            <a:ext cx="2249424" cy="274320"/>
           </a:xfrm>
           <a:prstGeom prst="rect">
             <a:avLst/>
@@ -7295,7 +7298,7 @@
               <a:buNone/>
             </a:pPr>
             <a:r>
-              <a:rPr lang="en-US" sz="1250" b="1" dirty="0">
+              <a:rPr lang="en-US" sz="1300" b="1" dirty="0">
                 <a:solidFill>
                   <a:srgbClr val="2B2B33"/>
                 </a:solidFill>
@@ -7303,9 +7306,9 @@
                 <a:ea typeface="Calibri" pitchFamily="34" charset="-122"/>
                 <a:cs typeface="Calibri" pitchFamily="34" charset="-120"/>
               </a:rPr>
-              <a:t>382 ms · 38°</a:t>
-            </a:r>
-            <a:endParaRPr lang="en-US" sz="1250" dirty="0"/>
+              <a:t>298 / 382 ms · 38°</a:t>
+            </a:r>
+            <a:endParaRPr lang="en-US" sz="1300" dirty="0"/>
           </a:p>
         </p:txBody>
       </p:sp>

--- a/presentations/Clinicopathological-Conference.pptx
+++ b/presentations/Clinicopathological-Conference.pptx
@@ -24,9 +24,10 @@
     <p:sldId id="272" r:id="rId18"/>
     <p:sldId id="273" r:id="rId19"/>
     <p:sldId id="274" r:id="rId20"/>
+    <p:sldId id="275" r:id="rId21"/>
   </p:sldIdLst>
   <p:notesMasterIdLst>
-    <p:notesMasterId r:id="rId21"/>
+    <p:notesMasterId r:id="rId22"/>
   </p:notesMasterIdLst>
   <p:sldSz cx="12191695" cy="6858000"/>
   <p:notesSz cx="6858000" cy="12191695"/>
@@ -1512,6 +1513,94 @@
             <a:fld id="{F7021451-1387-4CA6-816F-3879F97B5CBC}" type="slidenum">
               <a:rPr lang="en-US"/>
               <a:t>2</a:t>
+            </a:fld>
+            <a:endParaRPr lang="en-US"/>
+          </a:p>
+        </p:txBody>
+      </p:sp>
+    </p:spTree>
+    <p:extLst>
+      <p:ext uri="{BB962C8B-B14F-4D97-AF65-F5344CB8AC3E}">
+        <p14:creationId xmlns:p14="http://schemas.microsoft.com/office/powerpoint/2010/main" val="1024086991"/>
+      </p:ext>
+    </p:extLst>
+  </p:cSld>
+  <p:clrMapOvr>
+    <a:masterClrMapping/>
+  </p:clrMapOvr>
+</p:notes>
+</file>
+
+<file path=ppt/notesSlides/notesSlide20.xml><?xml version="1.0" encoding="utf-8"?>
+<p:notes xmlns:a="http://schemas.openxmlformats.org/drawingml/2006/main" xmlns:r="http://schemas.openxmlformats.org/officeDocument/2006/relationships" xmlns:p="http://schemas.openxmlformats.org/presentationml/2006/main">
+  <p:cSld>
+    <p:spTree>
+      <p:nvGrpSpPr>
+        <p:cNvPr id="1" name=""/>
+        <p:cNvGrpSpPr/>
+        <p:nvPr/>
+      </p:nvGrpSpPr>
+      <p:grpSpPr>
+        <a:xfrm>
+          <a:off x="0" y="0"/>
+          <a:ext cx="0" cy="0"/>
+          <a:chOff x="0" y="0"/>
+          <a:chExt cx="0" cy="0"/>
+        </a:xfrm>
+      </p:grpSpPr>
+      <p:sp>
+        <p:nvSpPr>
+          <p:cNvPr id="2" name="Slide Image Placeholder 1"/>
+          <p:cNvSpPr>
+            <a:spLocks noGrp="1" noRot="1" noChangeAspect="1"/>
+          </p:cNvSpPr>
+          <p:nvPr>
+            <p:ph type="sldImg"/>
+          </p:nvPr>
+        </p:nvSpPr>
+        <p:spPr/>
+      </p:sp>
+      <p:sp>
+        <p:nvSpPr>
+          <p:cNvPr id="3" name="Notes Placeholder 2"/>
+          <p:cNvSpPr>
+            <a:spLocks noGrp="1"/>
+          </p:cNvSpPr>
+          <p:nvPr>
+            <p:ph type="body" idx="1"/>
+          </p:nvPr>
+        </p:nvSpPr>
+        <p:spPr/>
+        <p:txBody>
+          <a:bodyPr/>
+          <a:lstStyle/>
+          <a:p>
+            <a:r>
+              <a:rPr lang="en-US" dirty="0"/>
+              <a:t/>
+            </a:r>
+            <a:endParaRPr lang="en-US" dirty="0"/>
+          </a:p>
+        </p:txBody>
+      </p:sp>
+      <p:sp>
+        <p:nvSpPr>
+          <p:cNvPr id="4" name="Slide Number Placeholder 3"/>
+          <p:cNvSpPr>
+            <a:spLocks noGrp="1"/>
+          </p:cNvSpPr>
+          <p:nvPr>
+            <p:ph type="sldNum" sz="quarter" idx="10"/>
+          </p:nvPr>
+        </p:nvSpPr>
+        <p:spPr/>
+        <p:txBody>
+          <a:bodyPr/>
+          <a:lstStyle/>
+          <a:p>
+            <a:fld id="{F7021451-1387-4CA6-816F-3879F97B5CBC}" type="slidenum">
+              <a:rPr lang="en-US"/>
+              <a:t>20</a:t>
             </a:fld>
             <a:endParaRPr lang="en-US"/>
           </a:p>
@@ -14619,7 +14708,7 @@
                 <a:ea typeface="Cambria" pitchFamily="34" charset="-122"/>
                 <a:cs typeface="Cambria" pitchFamily="34" charset="-120"/>
               </a:rPr>
-              <a:t>Differential &amp; Final Diagnosis</a:t>
+              <a:t>Differential Diagnosis</a:t>
             </a:r>
             <a:endParaRPr lang="en-US" sz="3000" dirty="0"/>
           </a:p>
@@ -14627,18 +14716,57 @@
       </p:sp>
       <p:sp>
         <p:nvSpPr>
-          <p:cNvPr id="6" name="Shape 3"/>
-          <p:cNvSpPr/>
-          <p:nvPr/>
-        </p:nvSpPr>
-        <p:spPr>
-          <a:xfrm>
-            <a:off x="502920" y="1783080"/>
-            <a:ext cx="6355080" cy="4206240"/>
+          <p:cNvPr id="6" name="Text 3"/>
+          <p:cNvSpPr/>
+          <p:nvPr/>
+        </p:nvSpPr>
+        <p:spPr>
+          <a:xfrm>
+            <a:off x="548640" y="1481328"/>
+            <a:ext cx="10972800" cy="274320"/>
+          </a:xfrm>
+          <a:prstGeom prst="rect">
+            <a:avLst/>
+          </a:prstGeom>
+          <a:noFill/>
+          <a:ln/>
+        </p:spPr>
+        <p:txBody>
+          <a:bodyPr wrap="square" rtlCol="0" anchor="t"/>
+          <a:lstStyle/>
+          <a:p>
+            <a:pPr algn="l" indent="0" marL="0">
+              <a:buNone/>
+            </a:pPr>
+            <a:r>
+              <a:rPr lang="en-US" sz="1350" i="1" dirty="0">
+                <a:solidFill>
+                  <a:srgbClr val="6B6B76"/>
+                </a:solidFill>
+                <a:latin typeface="Calibri" pitchFamily="34" charset="0"/>
+                <a:ea typeface="Calibri" pitchFamily="34" charset="-122"/>
+                <a:cs typeface="Calibri" pitchFamily="34" charset="-120"/>
+              </a:rPr>
+              <a:t>Causes of an irregular tachycardia — each excluded on ECG grounds</a:t>
+            </a:r>
+            <a:endParaRPr lang="en-US" sz="1350" dirty="0"/>
+          </a:p>
+        </p:txBody>
+      </p:sp>
+      <p:sp>
+        <p:nvSpPr>
+          <p:cNvPr id="7" name="Shape 4"/>
+          <p:cNvSpPr/>
+          <p:nvPr/>
+        </p:nvSpPr>
+        <p:spPr>
+          <a:xfrm>
+            <a:off x="502920" y="1874520"/>
+            <a:ext cx="11183112" cy="731520"/>
           </a:xfrm>
           <a:prstGeom prst="roundRect">
             <a:avLst>
-              <a:gd name="adj" fmla="val 2609"/>
+              <a:gd name="adj" fmla="val 12500"/>
             </a:avLst>
           </a:prstGeom>
           <a:solidFill>
@@ -14661,91 +14789,13 @@
       </p:sp>
       <p:sp>
         <p:nvSpPr>
-          <p:cNvPr id="7" name="Text 4"/>
-          <p:cNvSpPr/>
-          <p:nvPr/>
-        </p:nvSpPr>
-        <p:spPr>
-          <a:xfrm>
-            <a:off x="822960" y="2029968"/>
-            <a:ext cx="5669280" cy="274320"/>
-          </a:xfrm>
-          <a:prstGeom prst="rect">
-            <a:avLst/>
-          </a:prstGeom>
-          <a:noFill/>
-          <a:ln/>
-        </p:spPr>
-        <p:txBody>
-          <a:bodyPr wrap="square" rtlCol="0" anchor="t"/>
-          <a:lstStyle/>
-          <a:p>
-            <a:pPr algn="l" indent="0" marL="0">
-              <a:buNone/>
-            </a:pPr>
-            <a:r>
-              <a:rPr lang="en-US" sz="1250" b="1" spc="150" kern="0" dirty="0">
-                <a:solidFill>
-                  <a:srgbClr val="A4133C"/>
-                </a:solidFill>
-                <a:latin typeface="Calibri" pitchFamily="34" charset="0"/>
-                <a:ea typeface="Calibri" pitchFamily="34" charset="-122"/>
-                <a:cs typeface="Calibri" pitchFamily="34" charset="-120"/>
-              </a:rPr>
-              <a:t>DIFFERENTIALS CONSIDERED</a:t>
-            </a:r>
-            <a:endParaRPr lang="en-US" sz="1250" dirty="0"/>
-          </a:p>
-        </p:txBody>
-      </p:sp>
-      <p:sp>
-        <p:nvSpPr>
-          <p:cNvPr id="8" name="Text 5"/>
-          <p:cNvSpPr/>
-          <p:nvPr/>
-        </p:nvSpPr>
-        <p:spPr>
-          <a:xfrm>
-            <a:off x="822960" y="2304288"/>
-            <a:ext cx="5669280" cy="274320"/>
-          </a:xfrm>
-          <a:prstGeom prst="rect">
-            <a:avLst/>
-          </a:prstGeom>
-          <a:noFill/>
-          <a:ln/>
-        </p:spPr>
-        <p:txBody>
-          <a:bodyPr wrap="square" rtlCol="0" anchor="t"/>
-          <a:lstStyle/>
-          <a:p>
-            <a:pPr algn="l" indent="0" marL="0">
-              <a:buNone/>
-            </a:pPr>
-            <a:r>
-              <a:rPr lang="en-US" sz="1250" i="1" dirty="0">
-                <a:solidFill>
-                  <a:srgbClr val="6B6B76"/>
-                </a:solidFill>
-                <a:latin typeface="Calibri" pitchFamily="34" charset="0"/>
-                <a:ea typeface="Calibri" pitchFamily="34" charset="-122"/>
-                <a:cs typeface="Calibri" pitchFamily="34" charset="-120"/>
-              </a:rPr>
-              <a:t>Causes of an irregular tachycardia</a:t>
-            </a:r>
-            <a:endParaRPr lang="en-US" sz="1250" dirty="0"/>
-          </a:p>
-        </p:txBody>
-      </p:sp>
-      <p:sp>
-        <p:nvSpPr>
-          <p:cNvPr id="9" name="Shape 6"/>
-          <p:cNvSpPr/>
-          <p:nvPr/>
-        </p:nvSpPr>
-        <p:spPr>
-          <a:xfrm>
-            <a:off x="868680" y="2779776"/>
+          <p:cNvPr id="8" name="Shape 5"/>
+          <p:cNvSpPr/>
+          <p:nvPr/>
+        </p:nvSpPr>
+        <p:spPr>
+          <a:xfrm>
+            <a:off x="777240" y="2048256"/>
             <a:ext cx="384048" cy="384048"/>
           </a:xfrm>
           <a:prstGeom prst="ellipse">
@@ -14764,7 +14814,7 @@
       </p:sp>
       <p:pic>
         <p:nvPicPr>
-          <p:cNvPr id="10" name="Image 1" descr="preencoded.png">    </p:cNvPr>
+          <p:cNvPr id="9" name="Image 1" descr="preencoded.png">    </p:cNvPr>
           <p:cNvPicPr>
             <a:picLocks noChangeAspect="1"/>
           </p:cNvPicPr>
@@ -14778,7 +14828,7 @@
         </p:blipFill>
         <p:spPr>
           <a:xfrm>
-            <a:off x="941832" y="2852928"/>
+            <a:off x="850392" y="2121408"/>
             <a:ext cx="237744" cy="237744"/>
           </a:xfrm>
           <a:prstGeom prst="rect">
@@ -14788,30 +14838,30 @@
       </p:pic>
       <p:sp>
         <p:nvSpPr>
-          <p:cNvPr id="11" name="Text 7"/>
-          <p:cNvSpPr/>
-          <p:nvPr/>
-        </p:nvSpPr>
-        <p:spPr>
-          <a:xfrm>
-            <a:off x="1417320" y="2706624"/>
-            <a:ext cx="5212080" cy="292608"/>
-          </a:xfrm>
-          <a:prstGeom prst="rect">
-            <a:avLst/>
-          </a:prstGeom>
-          <a:noFill/>
-          <a:ln/>
-        </p:spPr>
-        <p:txBody>
-          <a:bodyPr wrap="square" lIns="0" tIns="0" rIns="0" bIns="0" rtlCol="0" anchor="t"/>
-          <a:lstStyle/>
-          <a:p>
-            <a:pPr algn="l" indent="0" marL="0">
-              <a:buNone/>
-            </a:pPr>
-            <a:r>
-              <a:rPr lang="en-US" sz="1550" b="1" dirty="0">
+          <p:cNvPr id="10" name="Text 6"/>
+          <p:cNvSpPr/>
+          <p:nvPr/>
+        </p:nvSpPr>
+        <p:spPr>
+          <a:xfrm>
+            <a:off x="1371600" y="1874520"/>
+            <a:ext cx="3977640" cy="731520"/>
+          </a:xfrm>
+          <a:prstGeom prst="rect">
+            <a:avLst/>
+          </a:prstGeom>
+          <a:noFill/>
+          <a:ln/>
+        </p:spPr>
+        <p:txBody>
+          <a:bodyPr wrap="square" lIns="0" tIns="0" rIns="0" bIns="0" rtlCol="0" anchor="ctr"/>
+          <a:lstStyle/>
+          <a:p>
+            <a:pPr algn="l" indent="0" marL="0">
+              <a:buNone/>
+            </a:pPr>
+            <a:r>
+              <a:rPr lang="en-US" sz="1700" b="1" dirty="0">
                 <a:solidFill>
                   <a:srgbClr val="2B2B33"/>
                 </a:solidFill>
@@ -14821,9 +14871,32 @@
               </a:rPr>
               <a:t>Atrial flutter</a:t>
             </a:r>
-            <a:endParaRPr lang="en-US" sz="1550" dirty="0"/>
-          </a:p>
-        </p:txBody>
+            <a:endParaRPr lang="en-US" sz="1700" dirty="0"/>
+          </a:p>
+        </p:txBody>
+      </p:sp>
+      <p:sp>
+        <p:nvSpPr>
+          <p:cNvPr id="11" name="Shape 7"/>
+          <p:cNvSpPr/>
+          <p:nvPr/>
+        </p:nvSpPr>
+        <p:spPr>
+          <a:xfrm>
+            <a:off x="5440680" y="2020824"/>
+            <a:ext cx="0" cy="438912"/>
+          </a:xfrm>
+          <a:prstGeom prst="line">
+            <a:avLst/>
+          </a:prstGeom>
+          <a:noFill/>
+          <a:ln w="12700">
+            <a:solidFill>
+              <a:srgbClr val="FBD8DF"/>
+            </a:solidFill>
+            <a:prstDash val="solid"/>
+          </a:ln>
+        </p:spPr>
       </p:sp>
       <p:sp>
         <p:nvSpPr>
@@ -14833,24 +14906,24 @@
         </p:nvSpPr>
         <p:spPr>
           <a:xfrm>
-            <a:off x="1417320" y="2999232"/>
-            <a:ext cx="5257800" cy="274320"/>
-          </a:xfrm>
-          <a:prstGeom prst="rect">
-            <a:avLst/>
-          </a:prstGeom>
-          <a:noFill/>
-          <a:ln/>
-        </p:spPr>
-        <p:txBody>
-          <a:bodyPr wrap="square" lIns="0" tIns="0" rIns="0" bIns="0" rtlCol="0" anchor="t"/>
-          <a:lstStyle/>
-          <a:p>
-            <a:pPr algn="l" indent="0" marL="0">
-              <a:buNone/>
-            </a:pPr>
-            <a:r>
-              <a:rPr lang="en-US" sz="1200" dirty="0">
+            <a:off x="5669280" y="1874520"/>
+            <a:ext cx="5806440" cy="731520"/>
+          </a:xfrm>
+          <a:prstGeom prst="rect">
+            <a:avLst/>
+          </a:prstGeom>
+          <a:noFill/>
+          <a:ln/>
+        </p:spPr>
+        <p:txBody>
+          <a:bodyPr wrap="square" lIns="0" tIns="0" rIns="0" bIns="0" rtlCol="0" anchor="ctr"/>
+          <a:lstStyle/>
+          <a:p>
+            <a:pPr algn="l" indent="0" marL="0">
+              <a:buNone/>
+            </a:pPr>
+            <a:r>
+              <a:rPr lang="en-US" sz="1400" dirty="0">
                 <a:solidFill>
                   <a:srgbClr val="6B6B76"/>
                 </a:solidFill>
@@ -14858,9 +14931,9 @@
                 <a:ea typeface="Calibri" pitchFamily="34" charset="-122"/>
                 <a:cs typeface="Calibri" pitchFamily="34" charset="-120"/>
               </a:rPr>
-              <a:t>No sawtooth flutter waves; R–R irregular</a:t>
-            </a:r>
-            <a:endParaRPr lang="en-US" sz="1200" dirty="0"/>
+              <a:t>No sawtooth flutter waves; R–R interval is irregular</a:t>
+            </a:r>
+            <a:endParaRPr lang="en-US" sz="1400" dirty="0"/>
           </a:p>
         </p:txBody>
       </p:sp>
@@ -14872,7 +14945,41 @@
         </p:nvSpPr>
         <p:spPr>
           <a:xfrm>
-            <a:off x="868680" y="3401568"/>
+            <a:off x="502920" y="2688336"/>
+            <a:ext cx="11183112" cy="731520"/>
+          </a:xfrm>
+          <a:prstGeom prst="roundRect">
+            <a:avLst>
+              <a:gd name="adj" fmla="val 12500"/>
+            </a:avLst>
+          </a:prstGeom>
+          <a:solidFill>
+            <a:srgbClr val="FFF0F3"/>
+          </a:solidFill>
+          <a:ln w="12700">
+            <a:solidFill>
+              <a:srgbClr val="FBD8DF"/>
+            </a:solidFill>
+            <a:prstDash val="solid"/>
+          </a:ln>
+          <a:effectLst>
+            <a:outerShdw sx="100000" sy="100000" kx="0" ky="0" algn="bl" rotWithShape="0" blurRad="127000" dist="50800" dir="5400000">
+              <a:srgbClr val="C9A3AC">
+                <a:alpha val="45000"/>
+              </a:srgbClr>
+            </a:outerShdw>
+          </a:effectLst>
+        </p:spPr>
+      </p:sp>
+      <p:sp>
+        <p:nvSpPr>
+          <p:cNvPr id="14" name="Shape 10"/>
+          <p:cNvSpPr/>
+          <p:nvPr/>
+        </p:nvSpPr>
+        <p:spPr>
+          <a:xfrm>
+            <a:off x="777240" y="2862072"/>
             <a:ext cx="384048" cy="384048"/>
           </a:xfrm>
           <a:prstGeom prst="ellipse">
@@ -14891,7 +14998,7 @@
       </p:sp>
       <p:pic>
         <p:nvPicPr>
-          <p:cNvPr id="14" name="Image 2" descr="preencoded.png">    </p:cNvPr>
+          <p:cNvPr id="15" name="Image 2" descr="preencoded.png">    </p:cNvPr>
           <p:cNvPicPr>
             <a:picLocks noChangeAspect="1"/>
           </p:cNvPicPr>
@@ -14905,7 +15012,7 @@
         </p:blipFill>
         <p:spPr>
           <a:xfrm>
-            <a:off x="941832" y="3474720"/>
+            <a:off x="850392" y="2935224"/>
             <a:ext cx="237744" cy="237744"/>
           </a:xfrm>
           <a:prstGeom prst="rect">
@@ -14915,30 +15022,30 @@
       </p:pic>
       <p:sp>
         <p:nvSpPr>
-          <p:cNvPr id="15" name="Text 10"/>
-          <p:cNvSpPr/>
-          <p:nvPr/>
-        </p:nvSpPr>
-        <p:spPr>
-          <a:xfrm>
-            <a:off x="1417320" y="3328416"/>
-            <a:ext cx="5212080" cy="292608"/>
-          </a:xfrm>
-          <a:prstGeom prst="rect">
-            <a:avLst/>
-          </a:prstGeom>
-          <a:noFill/>
-          <a:ln/>
-        </p:spPr>
-        <p:txBody>
-          <a:bodyPr wrap="square" lIns="0" tIns="0" rIns="0" bIns="0" rtlCol="0" anchor="t"/>
-          <a:lstStyle/>
-          <a:p>
-            <a:pPr algn="l" indent="0" marL="0">
-              <a:buNone/>
-            </a:pPr>
-            <a:r>
-              <a:rPr lang="en-US" sz="1550" b="1" dirty="0">
+          <p:cNvPr id="16" name="Text 11"/>
+          <p:cNvSpPr/>
+          <p:nvPr/>
+        </p:nvSpPr>
+        <p:spPr>
+          <a:xfrm>
+            <a:off x="1371600" y="2688336"/>
+            <a:ext cx="3977640" cy="731520"/>
+          </a:xfrm>
+          <a:prstGeom prst="rect">
+            <a:avLst/>
+          </a:prstGeom>
+          <a:noFill/>
+          <a:ln/>
+        </p:spPr>
+        <p:txBody>
+          <a:bodyPr wrap="square" lIns="0" tIns="0" rIns="0" bIns="0" rtlCol="0" anchor="ctr"/>
+          <a:lstStyle/>
+          <a:p>
+            <a:pPr algn="l" indent="0" marL="0">
+              <a:buNone/>
+            </a:pPr>
+            <a:r>
+              <a:rPr lang="en-US" sz="1700" b="1" dirty="0">
                 <a:solidFill>
                   <a:srgbClr val="2B2B33"/>
                 </a:solidFill>
@@ -14948,36 +15055,59 @@
               </a:rPr>
               <a:t>Multifocal atrial tachycardia</a:t>
             </a:r>
-            <a:endParaRPr lang="en-US" sz="1550" dirty="0"/>
-          </a:p>
-        </p:txBody>
-      </p:sp>
-      <p:sp>
-        <p:nvSpPr>
-          <p:cNvPr id="16" name="Text 11"/>
-          <p:cNvSpPr/>
-          <p:nvPr/>
-        </p:nvSpPr>
-        <p:spPr>
-          <a:xfrm>
-            <a:off x="1417320" y="3621024"/>
-            <a:ext cx="5257800" cy="274320"/>
-          </a:xfrm>
-          <a:prstGeom prst="rect">
-            <a:avLst/>
-          </a:prstGeom>
-          <a:noFill/>
-          <a:ln/>
-        </p:spPr>
-        <p:txBody>
-          <a:bodyPr wrap="square" lIns="0" tIns="0" rIns="0" bIns="0" rtlCol="0" anchor="t"/>
-          <a:lstStyle/>
-          <a:p>
-            <a:pPr algn="l" indent="0" marL="0">
-              <a:buNone/>
-            </a:pPr>
-            <a:r>
-              <a:rPr lang="en-US" sz="1200" dirty="0">
+            <a:endParaRPr lang="en-US" sz="1700" dirty="0"/>
+          </a:p>
+        </p:txBody>
+      </p:sp>
+      <p:sp>
+        <p:nvSpPr>
+          <p:cNvPr id="17" name="Shape 12"/>
+          <p:cNvSpPr/>
+          <p:nvPr/>
+        </p:nvSpPr>
+        <p:spPr>
+          <a:xfrm>
+            <a:off x="5440680" y="2834640"/>
+            <a:ext cx="0" cy="438912"/>
+          </a:xfrm>
+          <a:prstGeom prst="line">
+            <a:avLst/>
+          </a:prstGeom>
+          <a:noFill/>
+          <a:ln w="12700">
+            <a:solidFill>
+              <a:srgbClr val="FBD8DF"/>
+            </a:solidFill>
+            <a:prstDash val="solid"/>
+          </a:ln>
+        </p:spPr>
+      </p:sp>
+      <p:sp>
+        <p:nvSpPr>
+          <p:cNvPr id="18" name="Text 13"/>
+          <p:cNvSpPr/>
+          <p:nvPr/>
+        </p:nvSpPr>
+        <p:spPr>
+          <a:xfrm>
+            <a:off x="5669280" y="2688336"/>
+            <a:ext cx="5806440" cy="731520"/>
+          </a:xfrm>
+          <a:prstGeom prst="rect">
+            <a:avLst/>
+          </a:prstGeom>
+          <a:noFill/>
+          <a:ln/>
+        </p:spPr>
+        <p:txBody>
+          <a:bodyPr wrap="square" lIns="0" tIns="0" rIns="0" bIns="0" rtlCol="0" anchor="ctr"/>
+          <a:lstStyle/>
+          <a:p>
+            <a:pPr algn="l" indent="0" marL="0">
+              <a:buNone/>
+            </a:pPr>
+            <a:r>
+              <a:rPr lang="en-US" sz="1400" dirty="0">
                 <a:solidFill>
                   <a:srgbClr val="6B6B76"/>
                 </a:solidFill>
@@ -14985,21 +15115,55 @@
                 <a:ea typeface="Calibri" pitchFamily="34" charset="-122"/>
                 <a:cs typeface="Calibri" pitchFamily="34" charset="-120"/>
               </a:rPr>
-              <a:t>No ≥ 3 differing P-wave morphologies</a:t>
-            </a:r>
-            <a:endParaRPr lang="en-US" sz="1200" dirty="0"/>
-          </a:p>
-        </p:txBody>
-      </p:sp>
-      <p:sp>
-        <p:nvSpPr>
-          <p:cNvPr id="17" name="Shape 12"/>
-          <p:cNvSpPr/>
-          <p:nvPr/>
-        </p:nvSpPr>
-        <p:spPr>
-          <a:xfrm>
-            <a:off x="868680" y="4023360"/>
+              <a:t>No ≥ 3 differing P-wave morphologies present</a:t>
+            </a:r>
+            <a:endParaRPr lang="en-US" sz="1400" dirty="0"/>
+          </a:p>
+        </p:txBody>
+      </p:sp>
+      <p:sp>
+        <p:nvSpPr>
+          <p:cNvPr id="19" name="Shape 14"/>
+          <p:cNvSpPr/>
+          <p:nvPr/>
+        </p:nvSpPr>
+        <p:spPr>
+          <a:xfrm>
+            <a:off x="502920" y="3502152"/>
+            <a:ext cx="11183112" cy="731520"/>
+          </a:xfrm>
+          <a:prstGeom prst="roundRect">
+            <a:avLst>
+              <a:gd name="adj" fmla="val 12500"/>
+            </a:avLst>
+          </a:prstGeom>
+          <a:solidFill>
+            <a:srgbClr val="FFF0F3"/>
+          </a:solidFill>
+          <a:ln w="12700">
+            <a:solidFill>
+              <a:srgbClr val="FBD8DF"/>
+            </a:solidFill>
+            <a:prstDash val="solid"/>
+          </a:ln>
+          <a:effectLst>
+            <a:outerShdw sx="100000" sy="100000" kx="0" ky="0" algn="bl" rotWithShape="0" blurRad="127000" dist="50800" dir="5400000">
+              <a:srgbClr val="C9A3AC">
+                <a:alpha val="45000"/>
+              </a:srgbClr>
+            </a:outerShdw>
+          </a:effectLst>
+        </p:spPr>
+      </p:sp>
+      <p:sp>
+        <p:nvSpPr>
+          <p:cNvPr id="20" name="Shape 15"/>
+          <p:cNvSpPr/>
+          <p:nvPr/>
+        </p:nvSpPr>
+        <p:spPr>
+          <a:xfrm>
+            <a:off x="777240" y="3675888"/>
             <a:ext cx="384048" cy="384048"/>
           </a:xfrm>
           <a:prstGeom prst="ellipse">
@@ -15018,7 +15182,7 @@
       </p:sp>
       <p:pic>
         <p:nvPicPr>
-          <p:cNvPr id="18" name="Image 3" descr="preencoded.png">    </p:cNvPr>
+          <p:cNvPr id="21" name="Image 3" descr="preencoded.png">    </p:cNvPr>
           <p:cNvPicPr>
             <a:picLocks noChangeAspect="1"/>
           </p:cNvPicPr>
@@ -15032,7 +15196,7 @@
         </p:blipFill>
         <p:spPr>
           <a:xfrm>
-            <a:off x="941832" y="4096512"/>
+            <a:off x="850392" y="3749040"/>
             <a:ext cx="237744" cy="237744"/>
           </a:xfrm>
           <a:prstGeom prst="rect">
@@ -15042,30 +15206,30 @@
       </p:pic>
       <p:sp>
         <p:nvSpPr>
-          <p:cNvPr id="19" name="Text 13"/>
-          <p:cNvSpPr/>
-          <p:nvPr/>
-        </p:nvSpPr>
-        <p:spPr>
-          <a:xfrm>
-            <a:off x="1417320" y="3950208"/>
-            <a:ext cx="5212080" cy="292608"/>
-          </a:xfrm>
-          <a:prstGeom prst="rect">
-            <a:avLst/>
-          </a:prstGeom>
-          <a:noFill/>
-          <a:ln/>
-        </p:spPr>
-        <p:txBody>
-          <a:bodyPr wrap="square" lIns="0" tIns="0" rIns="0" bIns="0" rtlCol="0" anchor="t"/>
-          <a:lstStyle/>
-          <a:p>
-            <a:pPr algn="l" indent="0" marL="0">
-              <a:buNone/>
-            </a:pPr>
-            <a:r>
-              <a:rPr lang="en-US" sz="1550" b="1" dirty="0">
+          <p:cNvPr id="22" name="Text 16"/>
+          <p:cNvSpPr/>
+          <p:nvPr/>
+        </p:nvSpPr>
+        <p:spPr>
+          <a:xfrm>
+            <a:off x="1371600" y="3502152"/>
+            <a:ext cx="3977640" cy="731520"/>
+          </a:xfrm>
+          <a:prstGeom prst="rect">
+            <a:avLst/>
+          </a:prstGeom>
+          <a:noFill/>
+          <a:ln/>
+        </p:spPr>
+        <p:txBody>
+          <a:bodyPr wrap="square" lIns="0" tIns="0" rIns="0" bIns="0" rtlCol="0" anchor="ctr"/>
+          <a:lstStyle/>
+          <a:p>
+            <a:pPr algn="l" indent="0" marL="0">
+              <a:buNone/>
+            </a:pPr>
+            <a:r>
+              <a:rPr lang="en-US" sz="1700" b="1" dirty="0">
                 <a:solidFill>
                   <a:srgbClr val="2B2B33"/>
                 </a:solidFill>
@@ -15075,36 +15239,59 @@
               </a:rPr>
               <a:t>Frequent atrial ectopics</a:t>
             </a:r>
-            <a:endParaRPr lang="en-US" sz="1550" dirty="0"/>
-          </a:p>
-        </p:txBody>
-      </p:sp>
-      <p:sp>
-        <p:nvSpPr>
-          <p:cNvPr id="20" name="Text 14"/>
-          <p:cNvSpPr/>
-          <p:nvPr/>
-        </p:nvSpPr>
-        <p:spPr>
-          <a:xfrm>
-            <a:off x="1417320" y="4242816"/>
-            <a:ext cx="5257800" cy="274320"/>
-          </a:xfrm>
-          <a:prstGeom prst="rect">
-            <a:avLst/>
-          </a:prstGeom>
-          <a:noFill/>
-          <a:ln/>
-        </p:spPr>
-        <p:txBody>
-          <a:bodyPr wrap="square" lIns="0" tIns="0" rIns="0" bIns="0" rtlCol="0" anchor="t"/>
-          <a:lstStyle/>
-          <a:p>
-            <a:pPr algn="l" indent="0" marL="0">
-              <a:buNone/>
-            </a:pPr>
-            <a:r>
-              <a:rPr lang="en-US" sz="1200" dirty="0">
+            <a:endParaRPr lang="en-US" sz="1700" dirty="0"/>
+          </a:p>
+        </p:txBody>
+      </p:sp>
+      <p:sp>
+        <p:nvSpPr>
+          <p:cNvPr id="23" name="Shape 17"/>
+          <p:cNvSpPr/>
+          <p:nvPr/>
+        </p:nvSpPr>
+        <p:spPr>
+          <a:xfrm>
+            <a:off x="5440680" y="3648456"/>
+            <a:ext cx="0" cy="438912"/>
+          </a:xfrm>
+          <a:prstGeom prst="line">
+            <a:avLst/>
+          </a:prstGeom>
+          <a:noFill/>
+          <a:ln w="12700">
+            <a:solidFill>
+              <a:srgbClr val="FBD8DF"/>
+            </a:solidFill>
+            <a:prstDash val="solid"/>
+          </a:ln>
+        </p:spPr>
+      </p:sp>
+      <p:sp>
+        <p:nvSpPr>
+          <p:cNvPr id="24" name="Text 18"/>
+          <p:cNvSpPr/>
+          <p:nvPr/>
+        </p:nvSpPr>
+        <p:spPr>
+          <a:xfrm>
+            <a:off x="5669280" y="3502152"/>
+            <a:ext cx="5806440" cy="731520"/>
+          </a:xfrm>
+          <a:prstGeom prst="rect">
+            <a:avLst/>
+          </a:prstGeom>
+          <a:noFill/>
+          <a:ln/>
+        </p:spPr>
+        <p:txBody>
+          <a:bodyPr wrap="square" lIns="0" tIns="0" rIns="0" bIns="0" rtlCol="0" anchor="ctr"/>
+          <a:lstStyle/>
+          <a:p>
+            <a:pPr algn="l" indent="0" marL="0">
+              <a:buNone/>
+            </a:pPr>
+            <a:r>
+              <a:rPr lang="en-US" sz="1400" dirty="0">
                 <a:solidFill>
                   <a:srgbClr val="6B6B76"/>
                 </a:solidFill>
@@ -15112,21 +15299,55 @@
                 <a:ea typeface="Calibri" pitchFamily="34" charset="-122"/>
                 <a:cs typeface="Calibri" pitchFamily="34" charset="-120"/>
               </a:rPr>
-              <a:t>No discrete P waves before each QRS</a:t>
-            </a:r>
-            <a:endParaRPr lang="en-US" sz="1200" dirty="0"/>
-          </a:p>
-        </p:txBody>
-      </p:sp>
-      <p:sp>
-        <p:nvSpPr>
-          <p:cNvPr id="21" name="Shape 15"/>
-          <p:cNvSpPr/>
-          <p:nvPr/>
-        </p:nvSpPr>
-        <p:spPr>
-          <a:xfrm>
-            <a:off x="868680" y="4645152"/>
+              <a:t>No discrete P waves preceding each QRS complex</a:t>
+            </a:r>
+            <a:endParaRPr lang="en-US" sz="1400" dirty="0"/>
+          </a:p>
+        </p:txBody>
+      </p:sp>
+      <p:sp>
+        <p:nvSpPr>
+          <p:cNvPr id="25" name="Shape 19"/>
+          <p:cNvSpPr/>
+          <p:nvPr/>
+        </p:nvSpPr>
+        <p:spPr>
+          <a:xfrm>
+            <a:off x="502920" y="4315968"/>
+            <a:ext cx="11183112" cy="731520"/>
+          </a:xfrm>
+          <a:prstGeom prst="roundRect">
+            <a:avLst>
+              <a:gd name="adj" fmla="val 12500"/>
+            </a:avLst>
+          </a:prstGeom>
+          <a:solidFill>
+            <a:srgbClr val="FFF0F3"/>
+          </a:solidFill>
+          <a:ln w="12700">
+            <a:solidFill>
+              <a:srgbClr val="FBD8DF"/>
+            </a:solidFill>
+            <a:prstDash val="solid"/>
+          </a:ln>
+          <a:effectLst>
+            <a:outerShdw sx="100000" sy="100000" kx="0" ky="0" algn="bl" rotWithShape="0" blurRad="127000" dist="50800" dir="5400000">
+              <a:srgbClr val="C9A3AC">
+                <a:alpha val="45000"/>
+              </a:srgbClr>
+            </a:outerShdw>
+          </a:effectLst>
+        </p:spPr>
+      </p:sp>
+      <p:sp>
+        <p:nvSpPr>
+          <p:cNvPr id="26" name="Shape 20"/>
+          <p:cNvSpPr/>
+          <p:nvPr/>
+        </p:nvSpPr>
+        <p:spPr>
+          <a:xfrm>
+            <a:off x="777240" y="4489704"/>
             <a:ext cx="384048" cy="384048"/>
           </a:xfrm>
           <a:prstGeom prst="ellipse">
@@ -15145,7 +15366,7 @@
       </p:sp>
       <p:pic>
         <p:nvPicPr>
-          <p:cNvPr id="22" name="Image 4" descr="preencoded.png">    </p:cNvPr>
+          <p:cNvPr id="27" name="Image 4" descr="preencoded.png">    </p:cNvPr>
           <p:cNvPicPr>
             <a:picLocks noChangeAspect="1"/>
           </p:cNvPicPr>
@@ -15159,7 +15380,7 @@
         </p:blipFill>
         <p:spPr>
           <a:xfrm>
-            <a:off x="941832" y="4718304"/>
+            <a:off x="850392" y="4562856"/>
             <a:ext cx="237744" cy="237744"/>
           </a:xfrm>
           <a:prstGeom prst="rect">
@@ -15169,30 +15390,30 @@
       </p:pic>
       <p:sp>
         <p:nvSpPr>
-          <p:cNvPr id="23" name="Text 16"/>
-          <p:cNvSpPr/>
-          <p:nvPr/>
-        </p:nvSpPr>
-        <p:spPr>
-          <a:xfrm>
-            <a:off x="1417320" y="4572000"/>
-            <a:ext cx="5212080" cy="292608"/>
-          </a:xfrm>
-          <a:prstGeom prst="rect">
-            <a:avLst/>
-          </a:prstGeom>
-          <a:noFill/>
-          <a:ln/>
-        </p:spPr>
-        <p:txBody>
-          <a:bodyPr wrap="square" lIns="0" tIns="0" rIns="0" bIns="0" rtlCol="0" anchor="t"/>
-          <a:lstStyle/>
-          <a:p>
-            <a:pPr algn="l" indent="0" marL="0">
-              <a:buNone/>
-            </a:pPr>
-            <a:r>
-              <a:rPr lang="en-US" sz="1550" b="1" dirty="0">
+          <p:cNvPr id="28" name="Text 21"/>
+          <p:cNvSpPr/>
+          <p:nvPr/>
+        </p:nvSpPr>
+        <p:spPr>
+          <a:xfrm>
+            <a:off x="1371600" y="4315968"/>
+            <a:ext cx="3977640" cy="731520"/>
+          </a:xfrm>
+          <a:prstGeom prst="rect">
+            <a:avLst/>
+          </a:prstGeom>
+          <a:noFill/>
+          <a:ln/>
+        </p:spPr>
+        <p:txBody>
+          <a:bodyPr wrap="square" lIns="0" tIns="0" rIns="0" bIns="0" rtlCol="0" anchor="ctr"/>
+          <a:lstStyle/>
+          <a:p>
+            <a:pPr algn="l" indent="0" marL="0">
+              <a:buNone/>
+            </a:pPr>
+            <a:r>
+              <a:rPr lang="en-US" sz="1700" b="1" dirty="0">
                 <a:solidFill>
                   <a:srgbClr val="2B2B33"/>
                 </a:solidFill>
@@ -15202,36 +15423,59 @@
               </a:rPr>
               <a:t>AVNRT / AVRT (SVT)</a:t>
             </a:r>
-            <a:endParaRPr lang="en-US" sz="1550" dirty="0"/>
-          </a:p>
-        </p:txBody>
-      </p:sp>
-      <p:sp>
-        <p:nvSpPr>
-          <p:cNvPr id="24" name="Text 17"/>
-          <p:cNvSpPr/>
-          <p:nvPr/>
-        </p:nvSpPr>
-        <p:spPr>
-          <a:xfrm>
-            <a:off x="1417320" y="4864608"/>
-            <a:ext cx="5257800" cy="274320"/>
-          </a:xfrm>
-          <a:prstGeom prst="rect">
-            <a:avLst/>
-          </a:prstGeom>
-          <a:noFill/>
-          <a:ln/>
-        </p:spPr>
-        <p:txBody>
-          <a:bodyPr wrap="square" lIns="0" tIns="0" rIns="0" bIns="0" rtlCol="0" anchor="t"/>
-          <a:lstStyle/>
-          <a:p>
-            <a:pPr algn="l" indent="0" marL="0">
-              <a:buNone/>
-            </a:pPr>
-            <a:r>
-              <a:rPr lang="en-US" sz="1200" dirty="0">
+            <a:endParaRPr lang="en-US" sz="1700" dirty="0"/>
+          </a:p>
+        </p:txBody>
+      </p:sp>
+      <p:sp>
+        <p:nvSpPr>
+          <p:cNvPr id="29" name="Shape 22"/>
+          <p:cNvSpPr/>
+          <p:nvPr/>
+        </p:nvSpPr>
+        <p:spPr>
+          <a:xfrm>
+            <a:off x="5440680" y="4462272"/>
+            <a:ext cx="0" cy="438912"/>
+          </a:xfrm>
+          <a:prstGeom prst="line">
+            <a:avLst/>
+          </a:prstGeom>
+          <a:noFill/>
+          <a:ln w="12700">
+            <a:solidFill>
+              <a:srgbClr val="FBD8DF"/>
+            </a:solidFill>
+            <a:prstDash val="solid"/>
+          </a:ln>
+        </p:spPr>
+      </p:sp>
+      <p:sp>
+        <p:nvSpPr>
+          <p:cNvPr id="30" name="Text 23"/>
+          <p:cNvSpPr/>
+          <p:nvPr/>
+        </p:nvSpPr>
+        <p:spPr>
+          <a:xfrm>
+            <a:off x="5669280" y="4315968"/>
+            <a:ext cx="5806440" cy="731520"/>
+          </a:xfrm>
+          <a:prstGeom prst="rect">
+            <a:avLst/>
+          </a:prstGeom>
+          <a:noFill/>
+          <a:ln/>
+        </p:spPr>
+        <p:txBody>
+          <a:bodyPr wrap="square" lIns="0" tIns="0" rIns="0" bIns="0" rtlCol="0" anchor="ctr"/>
+          <a:lstStyle/>
+          <a:p>
+            <a:pPr algn="l" indent="0" marL="0">
+              <a:buNone/>
+            </a:pPr>
+            <a:r>
+              <a:rPr lang="en-US" sz="1400" dirty="0">
                 <a:solidFill>
                   <a:srgbClr val="6B6B76"/>
                 </a:solidFill>
@@ -15239,21 +15483,55 @@
                 <a:ea typeface="Calibri" pitchFamily="34" charset="-122"/>
                 <a:cs typeface="Calibri" pitchFamily="34" charset="-120"/>
               </a:rPr>
-              <a:t>Regular in SVT — here rhythm is irregular</a:t>
-            </a:r>
-            <a:endParaRPr lang="en-US" sz="1200" dirty="0"/>
-          </a:p>
-        </p:txBody>
-      </p:sp>
-      <p:sp>
-        <p:nvSpPr>
-          <p:cNvPr id="25" name="Shape 18"/>
-          <p:cNvSpPr/>
-          <p:nvPr/>
-        </p:nvSpPr>
-        <p:spPr>
-          <a:xfrm>
-            <a:off x="868680" y="5266944"/>
+              <a:t>Paroxysmal SVT is regular — here the rhythm is irregular</a:t>
+            </a:r>
+            <a:endParaRPr lang="en-US" sz="1400" dirty="0"/>
+          </a:p>
+        </p:txBody>
+      </p:sp>
+      <p:sp>
+        <p:nvSpPr>
+          <p:cNvPr id="31" name="Shape 24"/>
+          <p:cNvSpPr/>
+          <p:nvPr/>
+        </p:nvSpPr>
+        <p:spPr>
+          <a:xfrm>
+            <a:off x="502920" y="5129784"/>
+            <a:ext cx="11183112" cy="731520"/>
+          </a:xfrm>
+          <a:prstGeom prst="roundRect">
+            <a:avLst>
+              <a:gd name="adj" fmla="val 12500"/>
+            </a:avLst>
+          </a:prstGeom>
+          <a:solidFill>
+            <a:srgbClr val="FFF0F3"/>
+          </a:solidFill>
+          <a:ln w="12700">
+            <a:solidFill>
+              <a:srgbClr val="FBD8DF"/>
+            </a:solidFill>
+            <a:prstDash val="solid"/>
+          </a:ln>
+          <a:effectLst>
+            <a:outerShdw sx="100000" sy="100000" kx="0" ky="0" algn="bl" rotWithShape="0" blurRad="127000" dist="50800" dir="5400000">
+              <a:srgbClr val="C9A3AC">
+                <a:alpha val="45000"/>
+              </a:srgbClr>
+            </a:outerShdw>
+          </a:effectLst>
+        </p:spPr>
+      </p:sp>
+      <p:sp>
+        <p:nvSpPr>
+          <p:cNvPr id="32" name="Shape 25"/>
+          <p:cNvSpPr/>
+          <p:nvPr/>
+        </p:nvSpPr>
+        <p:spPr>
+          <a:xfrm>
+            <a:off x="777240" y="5303520"/>
             <a:ext cx="384048" cy="384048"/>
           </a:xfrm>
           <a:prstGeom prst="ellipse">
@@ -15272,7 +15550,7 @@
       </p:sp>
       <p:pic>
         <p:nvPicPr>
-          <p:cNvPr id="26" name="Image 5" descr="preencoded.png">    </p:cNvPr>
+          <p:cNvPr id="33" name="Image 5" descr="preencoded.png">    </p:cNvPr>
           <p:cNvPicPr>
             <a:picLocks noChangeAspect="1"/>
           </p:cNvPicPr>
@@ -15286,7 +15564,7 @@
         </p:blipFill>
         <p:spPr>
           <a:xfrm>
-            <a:off x="941832" y="5340096"/>
+            <a:off x="850392" y="5376672"/>
             <a:ext cx="237744" cy="237744"/>
           </a:xfrm>
           <a:prstGeom prst="rect">
@@ -15296,30 +15574,30 @@
       </p:pic>
       <p:sp>
         <p:nvSpPr>
-          <p:cNvPr id="27" name="Text 19"/>
-          <p:cNvSpPr/>
-          <p:nvPr/>
-        </p:nvSpPr>
-        <p:spPr>
-          <a:xfrm>
-            <a:off x="1417320" y="5193792"/>
-            <a:ext cx="5212080" cy="292608"/>
-          </a:xfrm>
-          <a:prstGeom prst="rect">
-            <a:avLst/>
-          </a:prstGeom>
-          <a:noFill/>
-          <a:ln/>
-        </p:spPr>
-        <p:txBody>
-          <a:bodyPr wrap="square" lIns="0" tIns="0" rIns="0" bIns="0" rtlCol="0" anchor="t"/>
-          <a:lstStyle/>
-          <a:p>
-            <a:pPr algn="l" indent="0" marL="0">
-              <a:buNone/>
-            </a:pPr>
-            <a:r>
-              <a:rPr lang="en-US" sz="1550" b="1" dirty="0">
+          <p:cNvPr id="34" name="Text 26"/>
+          <p:cNvSpPr/>
+          <p:nvPr/>
+        </p:nvSpPr>
+        <p:spPr>
+          <a:xfrm>
+            <a:off x="1371600" y="5129784"/>
+            <a:ext cx="3977640" cy="731520"/>
+          </a:xfrm>
+          <a:prstGeom prst="rect">
+            <a:avLst/>
+          </a:prstGeom>
+          <a:noFill/>
+          <a:ln/>
+        </p:spPr>
+        <p:txBody>
+          <a:bodyPr wrap="square" lIns="0" tIns="0" rIns="0" bIns="0" rtlCol="0" anchor="ctr"/>
+          <a:lstStyle/>
+          <a:p>
+            <a:pPr algn="l" indent="0" marL="0">
+              <a:buNone/>
+            </a:pPr>
+            <a:r>
+              <a:rPr lang="en-US" sz="1700" b="1" dirty="0">
                 <a:solidFill>
                   <a:srgbClr val="2B2B33"/>
                 </a:solidFill>
@@ -15329,169 +15607,20 @@
               </a:rPr>
               <a:t>Sinus tachycardia + ectopics</a:t>
             </a:r>
-            <a:endParaRPr lang="en-US" sz="1550" dirty="0"/>
-          </a:p>
-        </p:txBody>
-      </p:sp>
-      <p:sp>
-        <p:nvSpPr>
-          <p:cNvPr id="28" name="Text 20"/>
-          <p:cNvSpPr/>
-          <p:nvPr/>
-        </p:nvSpPr>
-        <p:spPr>
-          <a:xfrm>
-            <a:off x="1417320" y="5486400"/>
-            <a:ext cx="5257800" cy="274320"/>
-          </a:xfrm>
-          <a:prstGeom prst="rect">
-            <a:avLst/>
-          </a:prstGeom>
-          <a:noFill/>
-          <a:ln/>
-        </p:spPr>
-        <p:txBody>
-          <a:bodyPr wrap="square" lIns="0" tIns="0" rIns="0" bIns="0" rtlCol="0" anchor="t"/>
-          <a:lstStyle/>
-          <a:p>
-            <a:pPr algn="l" indent="0" marL="0">
-              <a:buNone/>
-            </a:pPr>
-            <a:r>
-              <a:rPr lang="en-US" sz="1200" dirty="0">
-                <a:solidFill>
-                  <a:srgbClr val="6B6B76"/>
-                </a:solidFill>
-                <a:latin typeface="Calibri" pitchFamily="34" charset="0"/>
-                <a:ea typeface="Calibri" pitchFamily="34" charset="-122"/>
-                <a:cs typeface="Calibri" pitchFamily="34" charset="-120"/>
-              </a:rPr>
-              <a:t>P waves absent; irregularly irregular</a:t>
-            </a:r>
-            <a:endParaRPr lang="en-US" sz="1200" dirty="0"/>
-          </a:p>
-        </p:txBody>
-      </p:sp>
-      <p:sp>
-        <p:nvSpPr>
-          <p:cNvPr id="29" name="Shape 21"/>
-          <p:cNvSpPr/>
-          <p:nvPr/>
-        </p:nvSpPr>
-        <p:spPr>
-          <a:xfrm>
-            <a:off x="6995160" y="1783080"/>
-            <a:ext cx="4690872" cy="4206240"/>
-          </a:xfrm>
-          <a:prstGeom prst="roundRect">
-            <a:avLst>
-              <a:gd name="adj" fmla="val 2609"/>
-            </a:avLst>
-          </a:prstGeom>
-          <a:solidFill>
-            <a:srgbClr val="590D22"/>
-          </a:solidFill>
-          <a:ln/>
-          <a:effectLst>
-            <a:outerShdw sx="100000" sy="100000" kx="0" ky="0" algn="bl" rotWithShape="0" blurRad="127000" dist="50800" dir="5400000">
-              <a:srgbClr val="C9A3AC">
-                <a:alpha val="45000"/>
-              </a:srgbClr>
-            </a:outerShdw>
-          </a:effectLst>
-        </p:spPr>
-      </p:sp>
-      <p:sp>
-        <p:nvSpPr>
-          <p:cNvPr id="30" name="Text 22"/>
-          <p:cNvSpPr/>
-          <p:nvPr/>
-        </p:nvSpPr>
-        <p:spPr>
-          <a:xfrm>
-            <a:off x="7296912" y="2048256"/>
-            <a:ext cx="4114800" cy="274320"/>
-          </a:xfrm>
-          <a:prstGeom prst="rect">
-            <a:avLst/>
-          </a:prstGeom>
-          <a:noFill/>
-          <a:ln/>
-        </p:spPr>
-        <p:txBody>
-          <a:bodyPr wrap="square" rtlCol="0" anchor="t"/>
-          <a:lstStyle/>
-          <a:p>
-            <a:pPr algn="l" indent="0" marL="0">
-              <a:buNone/>
-            </a:pPr>
-            <a:r>
-              <a:rPr lang="en-US" sz="1250" b="1" spc="200" kern="0" dirty="0">
-                <a:solidFill>
-                  <a:srgbClr val="FF4D6D"/>
-                </a:solidFill>
-                <a:latin typeface="Calibri" pitchFamily="34" charset="0"/>
-                <a:ea typeface="Calibri" pitchFamily="34" charset="-122"/>
-                <a:cs typeface="Calibri" pitchFamily="34" charset="-120"/>
-              </a:rPr>
-              <a:t>FINAL DIAGNOSIS</a:t>
-            </a:r>
-            <a:endParaRPr lang="en-US" sz="1250" dirty="0"/>
-          </a:p>
-        </p:txBody>
-      </p:sp>
-      <p:sp>
-        <p:nvSpPr>
-          <p:cNvPr id="31" name="Text 23"/>
-          <p:cNvSpPr/>
-          <p:nvPr/>
-        </p:nvSpPr>
-        <p:spPr>
-          <a:xfrm>
-            <a:off x="7296912" y="2377440"/>
-            <a:ext cx="4160520" cy="1371600"/>
-          </a:xfrm>
-          <a:prstGeom prst="rect">
-            <a:avLst/>
-          </a:prstGeom>
-          <a:noFill/>
-          <a:ln/>
-        </p:spPr>
-        <p:txBody>
-          <a:bodyPr wrap="square" rtlCol="0" anchor="t"/>
-          <a:lstStyle/>
-          <a:p>
-            <a:pPr algn="l" indent="0" marL="0">
-              <a:lnSpc>
-                <a:spcPct val="100000"/>
-              </a:lnSpc>
-              <a:buNone/>
-            </a:pPr>
-            <a:r>
-              <a:rPr lang="en-US" sz="2400" b="1" dirty="0">
-                <a:solidFill>
-                  <a:srgbClr val="FFFFFF"/>
-                </a:solidFill>
-                <a:latin typeface="Cambria" pitchFamily="34" charset="0"/>
-                <a:ea typeface="Cambria" pitchFamily="34" charset="-122"/>
-                <a:cs typeface="Cambria" pitchFamily="34" charset="-120"/>
-              </a:rPr>
-              <a:t>Atrial Fibrillation with Rapid Ventricular Response</a:t>
-            </a:r>
-            <a:endParaRPr lang="en-US" sz="2400" dirty="0"/>
-          </a:p>
-        </p:txBody>
-      </p:sp>
-      <p:sp>
-        <p:nvSpPr>
-          <p:cNvPr id="32" name="Shape 24"/>
-          <p:cNvSpPr/>
-          <p:nvPr/>
-        </p:nvSpPr>
-        <p:spPr>
-          <a:xfrm>
-            <a:off x="7296912" y="3858768"/>
-            <a:ext cx="4114800" cy="0"/>
+            <a:endParaRPr lang="en-US" sz="1700" dirty="0"/>
+          </a:p>
+        </p:txBody>
+      </p:sp>
+      <p:sp>
+        <p:nvSpPr>
+          <p:cNvPr id="35" name="Shape 27"/>
+          <p:cNvSpPr/>
+          <p:nvPr/>
+        </p:nvSpPr>
+        <p:spPr>
+          <a:xfrm>
+            <a:off x="5440680" y="5276088"/>
+            <a:ext cx="0" cy="438912"/>
           </a:xfrm>
           <a:prstGeom prst="line">
             <a:avLst/>
@@ -15499,279 +15628,54 @@
           <a:noFill/>
           <a:ln w="12700">
             <a:solidFill>
-              <a:srgbClr val="7A2233"/>
+              <a:srgbClr val="FBD8DF"/>
             </a:solidFill>
             <a:prstDash val="solid"/>
           </a:ln>
         </p:spPr>
       </p:sp>
-      <p:pic>
-        <p:nvPicPr>
-          <p:cNvPr id="33" name="Image 6" descr="preencoded.png">    </p:cNvPr>
-          <p:cNvPicPr>
-            <a:picLocks noChangeAspect="1"/>
-          </p:cNvPicPr>
-          <p:nvPr/>
-        </p:nvPicPr>
-        <p:blipFill>
-          <a:blip r:embed="rId7"/>
-          <a:stretch>
-            <a:fillRect/>
-          </a:stretch>
-        </p:blipFill>
-        <p:spPr>
-          <a:xfrm>
-            <a:off x="7296912" y="4050792"/>
-            <a:ext cx="274320" cy="274320"/>
-          </a:xfrm>
-          <a:prstGeom prst="rect">
-            <a:avLst/>
-          </a:prstGeom>
-        </p:spPr>
-      </p:pic>
-      <p:sp>
-        <p:nvSpPr>
-          <p:cNvPr id="34" name="Text 25"/>
-          <p:cNvSpPr/>
-          <p:nvPr/>
-        </p:nvSpPr>
-        <p:spPr>
-          <a:xfrm>
-            <a:off x="7680960" y="4041648"/>
-            <a:ext cx="3794760" cy="457200"/>
-          </a:xfrm>
-          <a:prstGeom prst="rect">
-            <a:avLst/>
-          </a:prstGeom>
-          <a:noFill/>
-          <a:ln/>
-        </p:spPr>
-        <p:txBody>
-          <a:bodyPr wrap="square" lIns="0" tIns="0" rIns="0" bIns="0" rtlCol="0" anchor="t"/>
-          <a:lstStyle/>
-          <a:p>
-            <a:pPr algn="l" indent="0" marL="0">
-              <a:lnSpc>
-                <a:spcPct val="102000"/>
-              </a:lnSpc>
-              <a:buNone/>
-            </a:pPr>
-            <a:r>
-              <a:rPr lang="en-US" sz="1200" dirty="0">
-                <a:solidFill>
-                  <a:srgbClr val="FBD8DF"/>
-                </a:solidFill>
-                <a:latin typeface="Calibri" pitchFamily="34" charset="0"/>
-                <a:ea typeface="Calibri" pitchFamily="34" charset="-122"/>
-                <a:cs typeface="Calibri" pitchFamily="34" charset="-120"/>
-              </a:rPr>
-              <a:t>Confirmed on 12-lead ECG — 146 bpm, no P waves</a:t>
-            </a:r>
-            <a:endParaRPr lang="en-US" sz="1200" dirty="0"/>
-          </a:p>
-        </p:txBody>
-      </p:sp>
-      <p:pic>
-        <p:nvPicPr>
-          <p:cNvPr id="35" name="Image 7" descr="preencoded.png">    </p:cNvPr>
-          <p:cNvPicPr>
-            <a:picLocks noChangeAspect="1"/>
-          </p:cNvPicPr>
-          <p:nvPr/>
-        </p:nvPicPr>
-        <p:blipFill>
-          <a:blip r:embed="rId8"/>
-          <a:stretch>
-            <a:fillRect/>
-          </a:stretch>
-        </p:blipFill>
-        <p:spPr>
-          <a:xfrm>
-            <a:off x="7296912" y="4535424"/>
-            <a:ext cx="274320" cy="274320"/>
-          </a:xfrm>
-          <a:prstGeom prst="rect">
-            <a:avLst/>
-          </a:prstGeom>
-        </p:spPr>
-      </p:pic>
-      <p:sp>
-        <p:nvSpPr>
-          <p:cNvPr id="36" name="Text 26"/>
-          <p:cNvSpPr/>
-          <p:nvPr/>
-        </p:nvSpPr>
-        <p:spPr>
-          <a:xfrm>
-            <a:off x="7680960" y="4526280"/>
-            <a:ext cx="3794760" cy="457200"/>
-          </a:xfrm>
-          <a:prstGeom prst="rect">
-            <a:avLst/>
-          </a:prstGeom>
-          <a:noFill/>
-          <a:ln/>
-        </p:spPr>
-        <p:txBody>
-          <a:bodyPr wrap="square" lIns="0" tIns="0" rIns="0" bIns="0" rtlCol="0" anchor="t"/>
-          <a:lstStyle/>
-          <a:p>
-            <a:pPr algn="l" indent="0" marL="0">
-              <a:lnSpc>
-                <a:spcPct val="102000"/>
-              </a:lnSpc>
-              <a:buNone/>
-            </a:pPr>
-            <a:r>
-              <a:rPr lang="en-US" sz="1200" dirty="0">
-                <a:solidFill>
-                  <a:srgbClr val="FBD8DF"/>
-                </a:solidFill>
-                <a:latin typeface="Calibri" pitchFamily="34" charset="0"/>
-                <a:ea typeface="Calibri" pitchFamily="34" charset="-122"/>
-                <a:cs typeface="Calibri" pitchFamily="34" charset="-120"/>
-              </a:rPr>
-              <a:t>Structurally normal heart — LVEF 65%, no LA/LV clot</a:t>
-            </a:r>
-            <a:endParaRPr lang="en-US" sz="1200" dirty="0"/>
-          </a:p>
-        </p:txBody>
-      </p:sp>
-      <p:pic>
-        <p:nvPicPr>
-          <p:cNvPr id="37" name="Image 8" descr="preencoded.png">    </p:cNvPr>
-          <p:cNvPicPr>
-            <a:picLocks noChangeAspect="1"/>
-          </p:cNvPicPr>
-          <p:nvPr/>
-        </p:nvPicPr>
-        <p:blipFill>
-          <a:blip r:embed="rId9"/>
-          <a:stretch>
-            <a:fillRect/>
-          </a:stretch>
-        </p:blipFill>
-        <p:spPr>
-          <a:xfrm>
-            <a:off x="7296912" y="5020056"/>
-            <a:ext cx="274320" cy="274320"/>
-          </a:xfrm>
-          <a:prstGeom prst="rect">
-            <a:avLst/>
-          </a:prstGeom>
-        </p:spPr>
-      </p:pic>
-      <p:sp>
-        <p:nvSpPr>
-          <p:cNvPr id="38" name="Text 27"/>
-          <p:cNvSpPr/>
-          <p:nvPr/>
-        </p:nvSpPr>
-        <p:spPr>
-          <a:xfrm>
-            <a:off x="7680960" y="5010912"/>
-            <a:ext cx="3794760" cy="457200"/>
-          </a:xfrm>
-          <a:prstGeom prst="rect">
-            <a:avLst/>
-          </a:prstGeom>
-          <a:noFill/>
-          <a:ln/>
-        </p:spPr>
-        <p:txBody>
-          <a:bodyPr wrap="square" lIns="0" tIns="0" rIns="0" bIns="0" rtlCol="0" anchor="t"/>
-          <a:lstStyle/>
-          <a:p>
-            <a:pPr algn="l" indent="0" marL="0">
-              <a:lnSpc>
-                <a:spcPct val="102000"/>
-              </a:lnSpc>
-              <a:buNone/>
-            </a:pPr>
-            <a:r>
-              <a:rPr lang="en-US" sz="1200" dirty="0">
-                <a:solidFill>
-                  <a:srgbClr val="FBD8DF"/>
-                </a:solidFill>
-                <a:latin typeface="Calibri" pitchFamily="34" charset="0"/>
-                <a:ea typeface="Calibri" pitchFamily="34" charset="-122"/>
-                <a:cs typeface="Calibri" pitchFamily="34" charset="-120"/>
-              </a:rPr>
-              <a:t>Background hypertension</a:t>
-            </a:r>
-            <a:endParaRPr lang="en-US" sz="1200" dirty="0"/>
-          </a:p>
-        </p:txBody>
-      </p:sp>
-      <p:pic>
-        <p:nvPicPr>
-          <p:cNvPr id="39" name="Image 9" descr="preencoded.png">    </p:cNvPr>
-          <p:cNvPicPr>
-            <a:picLocks noChangeAspect="1"/>
-          </p:cNvPicPr>
-          <p:nvPr/>
-        </p:nvPicPr>
-        <p:blipFill>
-          <a:blip r:embed="rId10"/>
-          <a:stretch>
-            <a:fillRect/>
-          </a:stretch>
-        </p:blipFill>
-        <p:spPr>
-          <a:xfrm>
-            <a:off x="7296912" y="5504688"/>
-            <a:ext cx="274320" cy="274320"/>
-          </a:xfrm>
-          <a:prstGeom prst="rect">
-            <a:avLst/>
-          </a:prstGeom>
-        </p:spPr>
-      </p:pic>
-      <p:sp>
-        <p:nvSpPr>
-          <p:cNvPr id="40" name="Text 28"/>
-          <p:cNvSpPr/>
-          <p:nvPr/>
-        </p:nvSpPr>
-        <p:spPr>
-          <a:xfrm>
-            <a:off x="7680960" y="5495544"/>
-            <a:ext cx="3794760" cy="457200"/>
-          </a:xfrm>
-          <a:prstGeom prst="rect">
-            <a:avLst/>
-          </a:prstGeom>
-          <a:noFill/>
-          <a:ln/>
-        </p:spPr>
-        <p:txBody>
-          <a:bodyPr wrap="square" lIns="0" tIns="0" rIns="0" bIns="0" rtlCol="0" anchor="t"/>
-          <a:lstStyle/>
-          <a:p>
-            <a:pPr algn="l" indent="0" marL="0">
-              <a:lnSpc>
-                <a:spcPct val="102000"/>
-              </a:lnSpc>
-              <a:buNone/>
-            </a:pPr>
-            <a:r>
-              <a:rPr lang="en-US" sz="1200" dirty="0">
-                <a:solidFill>
-                  <a:srgbClr val="FBD8DF"/>
-                </a:solidFill>
-                <a:latin typeface="Calibri" pitchFamily="34" charset="0"/>
-                <a:ea typeface="Calibri" pitchFamily="34" charset="-122"/>
-                <a:cs typeface="Calibri" pitchFamily="34" charset="-120"/>
-              </a:rPr>
-              <a:t>Mild normocytic anaemia (incidental)</a:t>
-            </a:r>
-            <a:endParaRPr lang="en-US" sz="1200" dirty="0"/>
-          </a:p>
-        </p:txBody>
-      </p:sp>
-      <p:sp>
-        <p:nvSpPr>
-          <p:cNvPr id="41" name="Text 29"/>
+      <p:sp>
+        <p:nvSpPr>
+          <p:cNvPr id="36" name="Text 28"/>
+          <p:cNvSpPr/>
+          <p:nvPr/>
+        </p:nvSpPr>
+        <p:spPr>
+          <a:xfrm>
+            <a:off x="5669280" y="5129784"/>
+            <a:ext cx="5806440" cy="731520"/>
+          </a:xfrm>
+          <a:prstGeom prst="rect">
+            <a:avLst/>
+          </a:prstGeom>
+          <a:noFill/>
+          <a:ln/>
+        </p:spPr>
+        <p:txBody>
+          <a:bodyPr wrap="square" lIns="0" tIns="0" rIns="0" bIns="0" rtlCol="0" anchor="ctr"/>
+          <a:lstStyle/>
+          <a:p>
+            <a:pPr algn="l" indent="0" marL="0">
+              <a:buNone/>
+            </a:pPr>
+            <a:r>
+              <a:rPr lang="en-US" sz="1400" dirty="0">
+                <a:solidFill>
+                  <a:srgbClr val="6B6B76"/>
+                </a:solidFill>
+                <a:latin typeface="Calibri" pitchFamily="34" charset="0"/>
+                <a:ea typeface="Calibri" pitchFamily="34" charset="-122"/>
+                <a:cs typeface="Calibri" pitchFamily="34" charset="-120"/>
+              </a:rPr>
+              <a:t>P waves absent; rhythm is irregularly irregular</a:t>
+            </a:r>
+            <a:endParaRPr lang="en-US" sz="1400" dirty="0"/>
+          </a:p>
+        </p:txBody>
+      </p:sp>
+      <p:sp>
+        <p:nvSpPr>
+          <p:cNvPr id="37" name="Text 29"/>
           <p:cNvSpPr/>
           <p:nvPr/>
         </p:nvSpPr>
@@ -15810,7 +15714,7 @@
       </p:sp>
       <p:sp>
         <p:nvSpPr>
-          <p:cNvPr id="42" name="Text 30"/>
+          <p:cNvPr id="38" name="Text 30"/>
           <p:cNvSpPr/>
           <p:nvPr/>
         </p:nvSpPr>
@@ -15895,7 +15799,7 @@
           </a:prstGeom>
           <a:solidFill>
             <a:srgbClr val="3A0A17">
-              <a:alpha val="65000"/>
+              <a:alpha val="68000"/>
             </a:srgbClr>
           </a:solidFill>
           <a:ln/>
@@ -15911,7 +15815,7 @@
         </p:nvPicPr>
         <p:blipFill>
           <a:blip r:embed="rId1">
-            <a:alphaModFix amt="10000"/>
+            <a:alphaModFix amt="9000"/>
           </a:blip>
           <a:stretch>
             <a:fillRect/>
@@ -15919,8 +15823,8 @@
         </p:blipFill>
         <p:spPr>
           <a:xfrm>
-            <a:off x="7863840" y="3108960"/>
-            <a:ext cx="4754880" cy="4754880"/>
+            <a:off x="8138160" y="3200400"/>
+            <a:ext cx="4663440" cy="4663440"/>
           </a:xfrm>
           <a:prstGeom prst="rect">
             <a:avLst/>
@@ -15996,7 +15900,7 @@
               <a:buNone/>
             </a:pPr>
             <a:r>
-              <a:rPr lang="en-US" sz="1700" b="1" spc="250" kern="0" dirty="0">
+              <a:rPr lang="en-US" sz="1700" b="1" spc="300" kern="0" dirty="0">
                 <a:solidFill>
                   <a:srgbClr val="FF4D6D"/>
                 </a:solidFill>
@@ -16004,7 +15908,7 @@
                 <a:ea typeface="Calibri" pitchFamily="34" charset="-122"/>
                 <a:cs typeface="Calibri" pitchFamily="34" charset="-120"/>
               </a:rPr>
-              <a:t>HOSPITAL COURSE &amp; OUTCOME</a:t>
+              <a:t>FINAL DIAGNOSIS</a:t>
             </a:r>
             <a:endParaRPr lang="en-US" sz="1700" dirty="0"/>
           </a:p>
@@ -16018,8 +15922,8 @@
         </p:nvSpPr>
         <p:spPr>
           <a:xfrm>
-            <a:off x="640080" y="1965960"/>
-            <a:ext cx="10058400" cy="914400"/>
+            <a:off x="640080" y="1783080"/>
+            <a:ext cx="10698480" cy="1600200"/>
           </a:xfrm>
           <a:prstGeom prst="rect">
             <a:avLst/>
@@ -16032,10 +15936,13 @@
           <a:lstStyle/>
           <a:p>
             <a:pPr algn="l" indent="0" marL="0">
-              <a:buNone/>
-            </a:pPr>
-            <a:r>
-              <a:rPr lang="en-US" sz="5600" b="1" dirty="0">
+              <a:lnSpc>
+                <a:spcPct val="100000"/>
+              </a:lnSpc>
+              <a:buNone/>
+            </a:pPr>
+            <a:r>
+              <a:rPr lang="en-US" sz="4400" b="1" dirty="0">
                 <a:solidFill>
                   <a:srgbClr val="FFFFFF"/>
                 </a:solidFill>
@@ -16043,9 +15950,9 @@
                 <a:ea typeface="Cambria" pitchFamily="34" charset="-122"/>
                 <a:cs typeface="Cambria" pitchFamily="34" charset="-120"/>
               </a:rPr>
-              <a:t>Clinically Improved</a:t>
-            </a:r>
-            <a:endParaRPr lang="en-US" sz="5600" dirty="0"/>
+              <a:t>Atrial Fibrillation with Rapid Ventricular Response</a:t>
+            </a:r>
+            <a:endParaRPr lang="en-US" sz="4400" dirty="0"/>
           </a:p>
         </p:txBody>
       </p:sp>
@@ -16057,17 +15964,17 @@
         </p:nvSpPr>
         <p:spPr>
           <a:xfrm>
-            <a:off x="685800" y="3200400"/>
-            <a:ext cx="3749040" cy="1554480"/>
+            <a:off x="685800" y="3611880"/>
+            <a:ext cx="5394960" cy="1005840"/>
           </a:xfrm>
           <a:prstGeom prst="roundRect">
             <a:avLst>
-              <a:gd name="adj" fmla="val 7059"/>
+              <a:gd name="adj" fmla="val 10909"/>
             </a:avLst>
           </a:prstGeom>
           <a:solidFill>
             <a:srgbClr val="FFFFFF">
-              <a:alpha val="8000"/>
+              <a:alpha val="9000"/>
             </a:srgbClr>
           </a:solidFill>
           <a:ln w="12700">
@@ -16076,13 +15983,6 @@
             </a:solidFill>
             <a:prstDash val="solid"/>
           </a:ln>
-          <a:effectLst>
-            <a:outerShdw sx="100000" sy="100000" kx="0" ky="0" algn="bl" rotWithShape="0" blurRad="101600" dist="38100" dir="5400000">
-              <a:srgbClr val="8A8A8A">
-                <a:alpha val="35000"/>
-              </a:srgbClr>
-            </a:outerShdw>
-          </a:effectLst>
         </p:spPr>
       </p:sp>
       <p:sp>
@@ -16093,52 +15993,28 @@
         </p:nvSpPr>
         <p:spPr>
           <a:xfrm>
-            <a:off x="960120" y="3657600"/>
-            <a:ext cx="640080" cy="640080"/>
+            <a:off x="941832" y="3895344"/>
+            <a:ext cx="438912" cy="438912"/>
           </a:xfrm>
           <a:prstGeom prst="ellipse">
             <a:avLst/>
           </a:prstGeom>
           <a:solidFill>
-            <a:srgbClr val="FFFFFF"/>
+            <a:srgbClr val="2E7D32"/>
           </a:solidFill>
           <a:ln/>
         </p:spPr>
       </p:sp>
-      <p:pic>
-        <p:nvPicPr>
-          <p:cNvPr id="10" name="Image 2" descr="preencoded.png">    </p:cNvPr>
-          <p:cNvPicPr>
-            <a:picLocks noChangeAspect="1"/>
-          </p:cNvPicPr>
-          <p:nvPr/>
-        </p:nvPicPr>
-        <p:blipFill>
-          <a:blip r:embed="rId3"/>
-          <a:stretch>
-            <a:fillRect/>
-          </a:stretch>
-        </p:blipFill>
-        <p:spPr>
-          <a:xfrm>
-            <a:off x="1088136" y="3785616"/>
-            <a:ext cx="384048" cy="384048"/>
-          </a:xfrm>
-          <a:prstGeom prst="rect">
-            <a:avLst/>
-          </a:prstGeom>
-        </p:spPr>
-      </p:pic>
-      <p:sp>
-        <p:nvSpPr>
-          <p:cNvPr id="11" name="Text 6"/>
-          <p:cNvSpPr/>
-          <p:nvPr/>
-        </p:nvSpPr>
-        <p:spPr>
-          <a:xfrm>
-            <a:off x="1737360" y="3493008"/>
-            <a:ext cx="2560320" cy="457200"/>
+      <p:sp>
+        <p:nvSpPr>
+          <p:cNvPr id="10" name="Text 6"/>
+          <p:cNvSpPr/>
+          <p:nvPr/>
+        </p:nvSpPr>
+        <p:spPr>
+          <a:xfrm>
+            <a:off x="1554480" y="3794760"/>
+            <a:ext cx="4297680" cy="365760"/>
           </a:xfrm>
           <a:prstGeom prst="rect">
             <a:avLst/>
@@ -16154,7 +16030,7 @@
               <a:buNone/>
             </a:pPr>
             <a:r>
-              <a:rPr lang="en-US" sz="1900" b="1" dirty="0">
+              <a:rPr lang="en-US" sz="1800" b="1" dirty="0">
                 <a:solidFill>
                   <a:srgbClr val="FFFFFF"/>
                 </a:solidFill>
@@ -16162,31 +16038,31 @@
                 <a:ea typeface="Cambria" pitchFamily="34" charset="-122"/>
                 <a:cs typeface="Cambria" pitchFamily="34" charset="-120"/>
               </a:rPr>
-              <a:t>Symptoms settled</a:t>
-            </a:r>
-            <a:endParaRPr lang="en-US" sz="1900" dirty="0"/>
-          </a:p>
-        </p:txBody>
-      </p:sp>
-      <p:sp>
-        <p:nvSpPr>
-          <p:cNvPr id="12" name="Text 7"/>
-          <p:cNvSpPr/>
-          <p:nvPr/>
-        </p:nvSpPr>
-        <p:spPr>
-          <a:xfrm>
-            <a:off x="1737360" y="3950208"/>
-            <a:ext cx="2606040" cy="640080"/>
-          </a:xfrm>
-          <a:prstGeom prst="rect">
-            <a:avLst/>
-          </a:prstGeom>
-          <a:noFill/>
-          <a:ln/>
-        </p:spPr>
-        <p:txBody>
-          <a:bodyPr wrap="square" lIns="0" tIns="0" rIns="0" bIns="0" rtlCol="0" anchor="t"/>
+              <a:t>Confirmed on 12-lead ECG</a:t>
+            </a:r>
+            <a:endParaRPr lang="en-US" sz="1800" dirty="0"/>
+          </a:p>
+        </p:txBody>
+      </p:sp>
+      <p:sp>
+        <p:nvSpPr>
+          <p:cNvPr id="11" name="Text 7"/>
+          <p:cNvSpPr/>
+          <p:nvPr/>
+        </p:nvSpPr>
+        <p:spPr>
+          <a:xfrm>
+            <a:off x="1554480" y="4160520"/>
+            <a:ext cx="4297680" cy="329184"/>
+          </a:xfrm>
+          <a:prstGeom prst="rect">
+            <a:avLst/>
+          </a:prstGeom>
+          <a:noFill/>
+          <a:ln/>
+        </p:spPr>
+        <p:txBody>
+          <a:bodyPr wrap="square" lIns="0" tIns="0" rIns="0" bIns="0" rtlCol="0" anchor="ctr"/>
           <a:lstStyle/>
           <a:p>
             <a:pPr algn="l" indent="0" marL="0">
@@ -16201,7 +16077,7 @@
                 <a:ea typeface="Calibri" pitchFamily="34" charset="-122"/>
                 <a:cs typeface="Calibri" pitchFamily="34" charset="-120"/>
               </a:rPr>
-              <a:t>Rhythm &amp; symptoms controlled</a:t>
+              <a:t>146 bpm · irregularly irregular · no P waves</a:t>
             </a:r>
             <a:endParaRPr lang="en-US" sz="1250" dirty="0"/>
           </a:p>
@@ -16209,23 +16085,23 @@
       </p:sp>
       <p:sp>
         <p:nvSpPr>
-          <p:cNvPr id="13" name="Shape 8"/>
-          <p:cNvSpPr/>
-          <p:nvPr/>
-        </p:nvSpPr>
-        <p:spPr>
-          <a:xfrm>
-            <a:off x="4709160" y="3200400"/>
-            <a:ext cx="3749040" cy="1554480"/>
+          <p:cNvPr id="12" name="Shape 8"/>
+          <p:cNvSpPr/>
+          <p:nvPr/>
+        </p:nvSpPr>
+        <p:spPr>
+          <a:xfrm>
+            <a:off x="6263640" y="3611880"/>
+            <a:ext cx="5394960" cy="1005840"/>
           </a:xfrm>
           <a:prstGeom prst="roundRect">
             <a:avLst>
-              <a:gd name="adj" fmla="val 7059"/>
+              <a:gd name="adj" fmla="val 10909"/>
             </a:avLst>
           </a:prstGeom>
           <a:solidFill>
             <a:srgbClr val="FFFFFF">
-              <a:alpha val="8000"/>
+              <a:alpha val="9000"/>
             </a:srgbClr>
           </a:solidFill>
           <a:ln w="12700">
@@ -16234,69 +16110,38 @@
             </a:solidFill>
             <a:prstDash val="solid"/>
           </a:ln>
-          <a:effectLst>
-            <a:outerShdw sx="100000" sy="100000" kx="0" ky="0" algn="bl" rotWithShape="0" blurRad="101600" dist="38100" dir="5400000">
-              <a:srgbClr val="8A8A8A">
-                <a:alpha val="35000"/>
-              </a:srgbClr>
-            </a:outerShdw>
-          </a:effectLst>
-        </p:spPr>
-      </p:sp>
-      <p:sp>
-        <p:nvSpPr>
-          <p:cNvPr id="14" name="Shape 9"/>
-          <p:cNvSpPr/>
-          <p:nvPr/>
-        </p:nvSpPr>
-        <p:spPr>
-          <a:xfrm>
-            <a:off x="4983480" y="3657600"/>
-            <a:ext cx="640080" cy="640080"/>
+        </p:spPr>
+      </p:sp>
+      <p:sp>
+        <p:nvSpPr>
+          <p:cNvPr id="13" name="Shape 9"/>
+          <p:cNvSpPr/>
+          <p:nvPr/>
+        </p:nvSpPr>
+        <p:spPr>
+          <a:xfrm>
+            <a:off x="6519672" y="3895344"/>
+            <a:ext cx="438912" cy="438912"/>
           </a:xfrm>
           <a:prstGeom prst="ellipse">
             <a:avLst/>
           </a:prstGeom>
           <a:solidFill>
-            <a:srgbClr val="FFFFFF"/>
+            <a:srgbClr val="2E7D32"/>
           </a:solidFill>
           <a:ln/>
         </p:spPr>
       </p:sp>
-      <p:pic>
-        <p:nvPicPr>
-          <p:cNvPr id="15" name="Image 3" descr="preencoded.png">    </p:cNvPr>
-          <p:cNvPicPr>
-            <a:picLocks noChangeAspect="1"/>
-          </p:cNvPicPr>
-          <p:nvPr/>
-        </p:nvPicPr>
-        <p:blipFill>
-          <a:blip r:embed="rId4"/>
-          <a:stretch>
-            <a:fillRect/>
-          </a:stretch>
-        </p:blipFill>
-        <p:spPr>
-          <a:xfrm>
-            <a:off x="5111496" y="3785616"/>
-            <a:ext cx="384048" cy="384048"/>
-          </a:xfrm>
-          <a:prstGeom prst="rect">
-            <a:avLst/>
-          </a:prstGeom>
-        </p:spPr>
-      </p:pic>
-      <p:sp>
-        <p:nvSpPr>
-          <p:cNvPr id="16" name="Text 10"/>
-          <p:cNvSpPr/>
-          <p:nvPr/>
-        </p:nvSpPr>
-        <p:spPr>
-          <a:xfrm>
-            <a:off x="5760720" y="3493008"/>
-            <a:ext cx="2560320" cy="457200"/>
+      <p:sp>
+        <p:nvSpPr>
+          <p:cNvPr id="14" name="Text 10"/>
+          <p:cNvSpPr/>
+          <p:nvPr/>
+        </p:nvSpPr>
+        <p:spPr>
+          <a:xfrm>
+            <a:off x="7132320" y="3794760"/>
+            <a:ext cx="4297680" cy="365760"/>
           </a:xfrm>
           <a:prstGeom prst="rect">
             <a:avLst/>
@@ -16312,7 +16157,7 @@
               <a:buNone/>
             </a:pPr>
             <a:r>
-              <a:rPr lang="en-US" sz="1900" b="1" dirty="0">
+              <a:rPr lang="en-US" sz="1800" b="1" dirty="0">
                 <a:solidFill>
                   <a:srgbClr val="FFFFFF"/>
                 </a:solidFill>
@@ -16320,31 +16165,31 @@
                 <a:ea typeface="Cambria" pitchFamily="34" charset="-122"/>
                 <a:cs typeface="Cambria" pitchFamily="34" charset="-120"/>
               </a:rPr>
-              <a:t>Discharged home</a:t>
-            </a:r>
-            <a:endParaRPr lang="en-US" sz="1900" dirty="0"/>
-          </a:p>
-        </p:txBody>
-      </p:sp>
-      <p:sp>
-        <p:nvSpPr>
-          <p:cNvPr id="17" name="Text 11"/>
-          <p:cNvSpPr/>
-          <p:nvPr/>
-        </p:nvSpPr>
-        <p:spPr>
-          <a:xfrm>
-            <a:off x="5760720" y="3950208"/>
-            <a:ext cx="2606040" cy="640080"/>
-          </a:xfrm>
-          <a:prstGeom prst="rect">
-            <a:avLst/>
-          </a:prstGeom>
-          <a:noFill/>
-          <a:ln/>
-        </p:spPr>
-        <p:txBody>
-          <a:bodyPr wrap="square" lIns="0" tIns="0" rIns="0" bIns="0" rtlCol="0" anchor="t"/>
+              <a:t>Structurally normal heart</a:t>
+            </a:r>
+            <a:endParaRPr lang="en-US" sz="1800" dirty="0"/>
+          </a:p>
+        </p:txBody>
+      </p:sp>
+      <p:sp>
+        <p:nvSpPr>
+          <p:cNvPr id="15" name="Text 11"/>
+          <p:cNvSpPr/>
+          <p:nvPr/>
+        </p:nvSpPr>
+        <p:spPr>
+          <a:xfrm>
+            <a:off x="7132320" y="4160520"/>
+            <a:ext cx="4297680" cy="329184"/>
+          </a:xfrm>
+          <a:prstGeom prst="rect">
+            <a:avLst/>
+          </a:prstGeom>
+          <a:noFill/>
+          <a:ln/>
+        </p:spPr>
+        <p:txBody>
+          <a:bodyPr wrap="square" lIns="0" tIns="0" rIns="0" bIns="0" rtlCol="0" anchor="ctr"/>
           <a:lstStyle/>
           <a:p>
             <a:pPr algn="l" indent="0" marL="0">
@@ -16359,7 +16204,7 @@
                 <a:ea typeface="Calibri" pitchFamily="34" charset="-122"/>
                 <a:cs typeface="Calibri" pitchFamily="34" charset="-120"/>
               </a:rPr>
-              <a:t>Stable for outpatient follow-up</a:t>
+              <a:t>LVEF 65% · no clot in LA or LV</a:t>
             </a:r>
             <a:endParaRPr lang="en-US" sz="1250" dirty="0"/>
           </a:p>
@@ -16367,24 +16212,28 @@
       </p:sp>
       <p:sp>
         <p:nvSpPr>
-          <p:cNvPr id="18" name="Shape 12"/>
-          <p:cNvSpPr/>
-          <p:nvPr/>
-        </p:nvSpPr>
-        <p:spPr>
-          <a:xfrm>
-            <a:off x="731520" y="5486400"/>
-            <a:ext cx="2020824" cy="0"/>
-          </a:xfrm>
-          <a:prstGeom prst="line">
-            <a:avLst/>
-          </a:prstGeom>
-          <a:noFill/>
-          <a:ln w="28575">
+          <p:cNvPr id="16" name="Shape 12"/>
+          <p:cNvSpPr/>
+          <p:nvPr/>
+        </p:nvSpPr>
+        <p:spPr>
+          <a:xfrm>
+            <a:off x="685800" y="4764024"/>
+            <a:ext cx="5394960" cy="1005840"/>
+          </a:xfrm>
+          <a:prstGeom prst="roundRect">
+            <a:avLst>
+              <a:gd name="adj" fmla="val 10909"/>
+            </a:avLst>
+          </a:prstGeom>
+          <a:solidFill>
+            <a:srgbClr val="FFFFFF">
+              <a:alpha val="9000"/>
+            </a:srgbClr>
+          </a:solidFill>
+          <a:ln w="12700">
             <a:solidFill>
-              <a:srgbClr val="FF4D6D">
-                <a:alpha val="95000"/>
-              </a:srgbClr>
+              <a:srgbClr val="FF4D6D"/>
             </a:solidFill>
             <a:prstDash val="solid"/>
           </a:ln>
@@ -16392,24 +16241,126 @@
       </p:sp>
       <p:sp>
         <p:nvSpPr>
-          <p:cNvPr id="19" name="Shape 13"/>
-          <p:cNvSpPr/>
-          <p:nvPr/>
-        </p:nvSpPr>
-        <p:spPr>
-          <a:xfrm flipV="1">
-            <a:off x="2752344" y="5340096"/>
-            <a:ext cx="356616" cy="146304"/>
-          </a:xfrm>
-          <a:prstGeom prst="line">
-            <a:avLst/>
-          </a:prstGeom>
-          <a:noFill/>
-          <a:ln w="28575">
+          <p:cNvPr id="17" name="Shape 13"/>
+          <p:cNvSpPr/>
+          <p:nvPr/>
+        </p:nvSpPr>
+        <p:spPr>
+          <a:xfrm>
+            <a:off x="941832" y="5047488"/>
+            <a:ext cx="438912" cy="438912"/>
+          </a:xfrm>
+          <a:prstGeom prst="ellipse">
+            <a:avLst/>
+          </a:prstGeom>
+          <a:solidFill>
+            <a:srgbClr val="2E7D32"/>
+          </a:solidFill>
+          <a:ln/>
+        </p:spPr>
+      </p:sp>
+      <p:sp>
+        <p:nvSpPr>
+          <p:cNvPr id="18" name="Text 14"/>
+          <p:cNvSpPr/>
+          <p:nvPr/>
+        </p:nvSpPr>
+        <p:spPr>
+          <a:xfrm>
+            <a:off x="1554480" y="4946904"/>
+            <a:ext cx="4297680" cy="365760"/>
+          </a:xfrm>
+          <a:prstGeom prst="rect">
+            <a:avLst/>
+          </a:prstGeom>
+          <a:noFill/>
+          <a:ln/>
+        </p:spPr>
+        <p:txBody>
+          <a:bodyPr wrap="square" lIns="0" tIns="0" rIns="0" bIns="0" rtlCol="0" anchor="ctr"/>
+          <a:lstStyle/>
+          <a:p>
+            <a:pPr algn="l" indent="0" marL="0">
+              <a:buNone/>
+            </a:pPr>
+            <a:r>
+              <a:rPr lang="en-US" sz="1800" b="1" dirty="0">
+                <a:solidFill>
+                  <a:srgbClr val="FFFFFF"/>
+                </a:solidFill>
+                <a:latin typeface="Cambria" pitchFamily="34" charset="0"/>
+                <a:ea typeface="Cambria" pitchFamily="34" charset="-122"/>
+                <a:cs typeface="Cambria" pitchFamily="34" charset="-120"/>
+              </a:rPr>
+              <a:t>Background hypertension</a:t>
+            </a:r>
+            <a:endParaRPr lang="en-US" sz="1800" dirty="0"/>
+          </a:p>
+        </p:txBody>
+      </p:sp>
+      <p:sp>
+        <p:nvSpPr>
+          <p:cNvPr id="19" name="Text 15"/>
+          <p:cNvSpPr/>
+          <p:nvPr/>
+        </p:nvSpPr>
+        <p:spPr>
+          <a:xfrm>
+            <a:off x="1554480" y="5312664"/>
+            <a:ext cx="4297680" cy="329184"/>
+          </a:xfrm>
+          <a:prstGeom prst="rect">
+            <a:avLst/>
+          </a:prstGeom>
+          <a:noFill/>
+          <a:ln/>
+        </p:spPr>
+        <p:txBody>
+          <a:bodyPr wrap="square" lIns="0" tIns="0" rIns="0" bIns="0" rtlCol="0" anchor="ctr"/>
+          <a:lstStyle/>
+          <a:p>
+            <a:pPr algn="l" indent="0" marL="0">
+              <a:buNone/>
+            </a:pPr>
+            <a:r>
+              <a:rPr lang="en-US" sz="1250" i="1" dirty="0">
+                <a:solidFill>
+                  <a:srgbClr val="FBD8DF"/>
+                </a:solidFill>
+                <a:latin typeface="Calibri" pitchFamily="34" charset="0"/>
+                <a:ea typeface="Calibri" pitchFamily="34" charset="-122"/>
+                <a:cs typeface="Calibri" pitchFamily="34" charset="-120"/>
+              </a:rPr>
+              <a:t>Established comorbidity</a:t>
+            </a:r>
+            <a:endParaRPr lang="en-US" sz="1250" dirty="0"/>
+          </a:p>
+        </p:txBody>
+      </p:sp>
+      <p:sp>
+        <p:nvSpPr>
+          <p:cNvPr id="20" name="Shape 16"/>
+          <p:cNvSpPr/>
+          <p:nvPr/>
+        </p:nvSpPr>
+        <p:spPr>
+          <a:xfrm>
+            <a:off x="6263640" y="4764024"/>
+            <a:ext cx="5394960" cy="1005840"/>
+          </a:xfrm>
+          <a:prstGeom prst="roundRect">
+            <a:avLst>
+              <a:gd name="adj" fmla="val 10909"/>
+            </a:avLst>
+          </a:prstGeom>
+          <a:solidFill>
+            <a:srgbClr val="FFFFFF">
+              <a:alpha val="9000"/>
+            </a:srgbClr>
+          </a:solidFill>
+          <a:ln w="12700">
             <a:solidFill>
-              <a:srgbClr val="FF4D6D">
-                <a:alpha val="95000"/>
-              </a:srgbClr>
+              <a:srgbClr val="FF4D6D"/>
             </a:solidFill>
             <a:prstDash val="solid"/>
           </a:ln>
@@ -16417,171 +16368,105 @@
       </p:sp>
       <p:sp>
         <p:nvSpPr>
-          <p:cNvPr id="20" name="Shape 14"/>
-          <p:cNvSpPr/>
-          <p:nvPr/>
-        </p:nvSpPr>
-        <p:spPr>
-          <a:xfrm>
-            <a:off x="3108960" y="5340096"/>
-            <a:ext cx="356616" cy="457200"/>
-          </a:xfrm>
-          <a:prstGeom prst="line">
-            <a:avLst/>
-          </a:prstGeom>
-          <a:noFill/>
-          <a:ln w="28575">
-            <a:solidFill>
-              <a:srgbClr val="FF4D6D">
-                <a:alpha val="95000"/>
-              </a:srgbClr>
-            </a:solidFill>
-            <a:prstDash val="solid"/>
-          </a:ln>
-        </p:spPr>
-      </p:sp>
-      <p:sp>
-        <p:nvSpPr>
-          <p:cNvPr id="21" name="Shape 15"/>
-          <p:cNvSpPr/>
-          <p:nvPr/>
-        </p:nvSpPr>
-        <p:spPr>
-          <a:xfrm flipV="1">
-            <a:off x="3465576" y="4983480"/>
-            <a:ext cx="356616" cy="813816"/>
-          </a:xfrm>
-          <a:prstGeom prst="line">
-            <a:avLst/>
-          </a:prstGeom>
-          <a:noFill/>
-          <a:ln w="28575">
-            <a:solidFill>
-              <a:srgbClr val="FF4D6D">
-                <a:alpha val="95000"/>
-              </a:srgbClr>
-            </a:solidFill>
-            <a:prstDash val="solid"/>
-          </a:ln>
-        </p:spPr>
-      </p:sp>
-      <p:sp>
-        <p:nvSpPr>
-          <p:cNvPr id="22" name="Shape 16"/>
-          <p:cNvSpPr/>
-          <p:nvPr/>
-        </p:nvSpPr>
-        <p:spPr>
-          <a:xfrm>
-            <a:off x="3822192" y="4983480"/>
-            <a:ext cx="356616" cy="685800"/>
-          </a:xfrm>
-          <a:prstGeom prst="line">
-            <a:avLst/>
-          </a:prstGeom>
-          <a:noFill/>
-          <a:ln w="28575">
-            <a:solidFill>
-              <a:srgbClr val="FF4D6D">
-                <a:alpha val="95000"/>
-              </a:srgbClr>
-            </a:solidFill>
-            <a:prstDash val="solid"/>
-          </a:ln>
-        </p:spPr>
-      </p:sp>
-      <p:sp>
-        <p:nvSpPr>
-          <p:cNvPr id="23" name="Shape 17"/>
-          <p:cNvSpPr/>
-          <p:nvPr/>
-        </p:nvSpPr>
-        <p:spPr>
-          <a:xfrm flipV="1">
-            <a:off x="4178808" y="5486400"/>
-            <a:ext cx="356616" cy="182880"/>
-          </a:xfrm>
-          <a:prstGeom prst="line">
-            <a:avLst/>
-          </a:prstGeom>
-          <a:noFill/>
-          <a:ln w="28575">
-            <a:solidFill>
-              <a:srgbClr val="FF4D6D">
-                <a:alpha val="95000"/>
-              </a:srgbClr>
-            </a:solidFill>
-            <a:prstDash val="solid"/>
-          </a:ln>
-        </p:spPr>
-      </p:sp>
-      <p:sp>
-        <p:nvSpPr>
-          <p:cNvPr id="24" name="Shape 18"/>
-          <p:cNvSpPr/>
-          <p:nvPr/>
-        </p:nvSpPr>
-        <p:spPr>
-          <a:xfrm>
-            <a:off x="4535424" y="5486400"/>
-            <a:ext cx="2139696" cy="0"/>
-          </a:xfrm>
-          <a:prstGeom prst="line">
-            <a:avLst/>
-          </a:prstGeom>
-          <a:noFill/>
-          <a:ln w="28575">
-            <a:solidFill>
-              <a:srgbClr val="FF4D6D">
-                <a:alpha val="95000"/>
-              </a:srgbClr>
-            </a:solidFill>
-            <a:prstDash val="solid"/>
-          </a:ln>
-        </p:spPr>
-      </p:sp>
-      <p:sp>
-        <p:nvSpPr>
-          <p:cNvPr id="25" name="Text 19"/>
-          <p:cNvSpPr/>
-          <p:nvPr/>
-        </p:nvSpPr>
-        <p:spPr>
-          <a:xfrm>
-            <a:off x="685800" y="5715000"/>
-            <a:ext cx="5486400" cy="548640"/>
-          </a:xfrm>
-          <a:prstGeom prst="rect">
-            <a:avLst/>
-          </a:prstGeom>
-          <a:noFill/>
-          <a:ln/>
-        </p:spPr>
-        <p:txBody>
-          <a:bodyPr wrap="square" rtlCol="0" anchor="t"/>
-          <a:lstStyle/>
-          <a:p>
-            <a:pPr algn="l" indent="0" marL="0">
-              <a:buNone/>
-            </a:pPr>
-            <a:r>
-              <a:rPr lang="en-US" sz="2600" b="1" i="1" dirty="0">
-                <a:solidFill>
-                  <a:srgbClr val="FBD8DF"/>
+          <p:cNvPr id="21" name="Shape 17"/>
+          <p:cNvSpPr/>
+          <p:nvPr/>
+        </p:nvSpPr>
+        <p:spPr>
+          <a:xfrm>
+            <a:off x="6519672" y="5047488"/>
+            <a:ext cx="438912" cy="438912"/>
+          </a:xfrm>
+          <a:prstGeom prst="ellipse">
+            <a:avLst/>
+          </a:prstGeom>
+          <a:solidFill>
+            <a:srgbClr val="2E7D32"/>
+          </a:solidFill>
+          <a:ln/>
+        </p:spPr>
+      </p:sp>
+      <p:sp>
+        <p:nvSpPr>
+          <p:cNvPr id="22" name="Text 18"/>
+          <p:cNvSpPr/>
+          <p:nvPr/>
+        </p:nvSpPr>
+        <p:spPr>
+          <a:xfrm>
+            <a:off x="7132320" y="4946904"/>
+            <a:ext cx="4297680" cy="365760"/>
+          </a:xfrm>
+          <a:prstGeom prst="rect">
+            <a:avLst/>
+          </a:prstGeom>
+          <a:noFill/>
+          <a:ln/>
+        </p:spPr>
+        <p:txBody>
+          <a:bodyPr wrap="square" lIns="0" tIns="0" rIns="0" bIns="0" rtlCol="0" anchor="ctr"/>
+          <a:lstStyle/>
+          <a:p>
+            <a:pPr algn="l" indent="0" marL="0">
+              <a:buNone/>
+            </a:pPr>
+            <a:r>
+              <a:rPr lang="en-US" sz="1800" b="1" dirty="0">
+                <a:solidFill>
+                  <a:srgbClr val="FFFFFF"/>
                 </a:solidFill>
                 <a:latin typeface="Cambria" pitchFamily="34" charset="0"/>
                 <a:ea typeface="Cambria" pitchFamily="34" charset="-122"/>
                 <a:cs typeface="Cambria" pitchFamily="34" charset="-120"/>
               </a:rPr>
-              <a:t>Thank you</a:t>
-            </a:r>
-            <a:endParaRPr lang="en-US" sz="2600" dirty="0"/>
-          </a:p>
-        </p:txBody>
-      </p:sp>
-      <p:sp>
-        <p:nvSpPr>
-          <p:cNvPr id="26" name="Text 20"/>
+              <a:t>Mild normocytic anaemia</a:t>
+            </a:r>
+            <a:endParaRPr lang="en-US" sz="1800" dirty="0"/>
+          </a:p>
+        </p:txBody>
+      </p:sp>
+      <p:sp>
+        <p:nvSpPr>
+          <p:cNvPr id="23" name="Text 19"/>
+          <p:cNvSpPr/>
+          <p:nvPr/>
+        </p:nvSpPr>
+        <p:spPr>
+          <a:xfrm>
+            <a:off x="7132320" y="5312664"/>
+            <a:ext cx="4297680" cy="329184"/>
+          </a:xfrm>
+          <a:prstGeom prst="rect">
+            <a:avLst/>
+          </a:prstGeom>
+          <a:noFill/>
+          <a:ln/>
+        </p:spPr>
+        <p:txBody>
+          <a:bodyPr wrap="square" lIns="0" tIns="0" rIns="0" bIns="0" rtlCol="0" anchor="ctr"/>
+          <a:lstStyle/>
+          <a:p>
+            <a:pPr algn="l" indent="0" marL="0">
+              <a:buNone/>
+            </a:pPr>
+            <a:r>
+              <a:rPr lang="en-US" sz="1250" i="1" dirty="0">
+                <a:solidFill>
+                  <a:srgbClr val="FBD8DF"/>
+                </a:solidFill>
+                <a:latin typeface="Calibri" pitchFamily="34" charset="0"/>
+                <a:ea typeface="Calibri" pitchFamily="34" charset="-122"/>
+                <a:cs typeface="Calibri" pitchFamily="34" charset="-120"/>
+              </a:rPr>
+              <a:t>Incidental haematology finding</a:t>
+            </a:r>
+            <a:endParaRPr lang="en-US" sz="1250" dirty="0"/>
+          </a:p>
+        </p:txBody>
+      </p:sp>
+      <p:sp>
+        <p:nvSpPr>
+          <p:cNvPr id="24" name="Text 20"/>
           <p:cNvSpPr/>
           <p:nvPr/>
         </p:nvSpPr>
@@ -16620,7 +16505,7 @@
       </p:sp>
       <p:sp>
         <p:nvSpPr>
-          <p:cNvPr id="27" name="Text 21"/>
+          <p:cNvPr id="25" name="Text 21"/>
           <p:cNvSpPr/>
           <p:nvPr/>
         </p:nvSpPr>
@@ -17860,6 +17745,816 @@
               <a:rPr lang="en-US" sz="900" dirty="0">
                 <a:solidFill>
                   <a:srgbClr val="6B6B76"/>
+                </a:solidFill>
+                <a:latin typeface="Calibri" pitchFamily="34" charset="0"/>
+                <a:ea typeface="Calibri" pitchFamily="34" charset="-122"/>
+                <a:cs typeface="Calibri" pitchFamily="34" charset="-120"/>
+              </a:rPr>
+              <a:t>Clinicopathological Conference</a:t>
+            </a:r>
+            <a:endParaRPr lang="en-US" sz="900" dirty="0"/>
+          </a:p>
+        </p:txBody>
+      </p:sp>
+    </p:spTree>
+  </p:cSld>
+  <p:clrMapOvr>
+    <a:masterClrMapping/>
+  </p:clrMapOvr>
+</p:sld>
+</file>
+
+<file path=ppt/slides/slide20.xml><?xml version="1.0" encoding="utf-8"?>
+<p:sld xmlns:a="http://schemas.openxmlformats.org/drawingml/2006/main" xmlns:r="http://schemas.openxmlformats.org/officeDocument/2006/relationships" xmlns:p="http://schemas.openxmlformats.org/presentationml/2006/main">
+  <p:cSld name="Slide 20">
+    <p:bg>
+      <p:bgPr>
+        <a:solidFill>
+          <a:srgbClr val="590D22"/>
+        </a:solidFill>
+      </p:bgPr>
+    </p:bg>
+    <p:spTree>
+      <p:nvGrpSpPr>
+        <p:cNvPr id="1" name=""/>
+        <p:cNvGrpSpPr/>
+        <p:nvPr/>
+      </p:nvGrpSpPr>
+      <p:grpSpPr>
+        <a:xfrm>
+          <a:off x="0" y="0"/>
+          <a:ext cx="0" cy="0"/>
+          <a:chOff x="0" y="0"/>
+          <a:chExt cx="0" cy="0"/>
+        </a:xfrm>
+      </p:grpSpPr>
+      <p:sp>
+        <p:nvSpPr>
+          <p:cNvPr id="2" name="Shape 0"/>
+          <p:cNvSpPr/>
+          <p:nvPr/>
+        </p:nvSpPr>
+        <p:spPr>
+          <a:xfrm>
+            <a:off x="0" y="0"/>
+            <a:ext cx="12191695" cy="6858000"/>
+          </a:xfrm>
+          <a:prstGeom prst="rect">
+            <a:avLst/>
+          </a:prstGeom>
+          <a:solidFill>
+            <a:srgbClr val="3A0A17">
+              <a:alpha val="65000"/>
+            </a:srgbClr>
+          </a:solidFill>
+          <a:ln/>
+        </p:spPr>
+      </p:sp>
+      <p:pic>
+        <p:nvPicPr>
+          <p:cNvPr id="3" name="Image 0" descr="preencoded.png">    </p:cNvPr>
+          <p:cNvPicPr>
+            <a:picLocks noChangeAspect="1"/>
+          </p:cNvPicPr>
+          <p:nvPr/>
+        </p:nvPicPr>
+        <p:blipFill>
+          <a:blip r:embed="rId1">
+            <a:alphaModFix amt="10000"/>
+          </a:blip>
+          <a:stretch>
+            <a:fillRect/>
+          </a:stretch>
+        </p:blipFill>
+        <p:spPr>
+          <a:xfrm>
+            <a:off x="7863840" y="3108960"/>
+            <a:ext cx="4754880" cy="4754880"/>
+          </a:xfrm>
+          <a:prstGeom prst="rect">
+            <a:avLst/>
+          </a:prstGeom>
+        </p:spPr>
+      </p:pic>
+      <p:sp>
+        <p:nvSpPr>
+          <p:cNvPr id="4" name="Shape 1"/>
+          <p:cNvSpPr/>
+          <p:nvPr/>
+        </p:nvSpPr>
+        <p:spPr>
+          <a:xfrm>
+            <a:off x="685800" y="777240"/>
+            <a:ext cx="960120" cy="960120"/>
+          </a:xfrm>
+          <a:prstGeom prst="ellipse">
+            <a:avLst/>
+          </a:prstGeom>
+          <a:solidFill>
+            <a:srgbClr val="A4133C"/>
+          </a:solidFill>
+          <a:ln/>
+        </p:spPr>
+      </p:sp>
+      <p:pic>
+        <p:nvPicPr>
+          <p:cNvPr id="5" name="Image 1" descr="preencoded.png">    </p:cNvPr>
+          <p:cNvPicPr>
+            <a:picLocks noChangeAspect="1"/>
+          </p:cNvPicPr>
+          <p:nvPr/>
+        </p:nvPicPr>
+        <p:blipFill>
+          <a:blip r:embed="rId2"/>
+          <a:stretch>
+            <a:fillRect/>
+          </a:stretch>
+        </p:blipFill>
+        <p:spPr>
+          <a:xfrm>
+            <a:off x="896112" y="987552"/>
+            <a:ext cx="548640" cy="548640"/>
+          </a:xfrm>
+          <a:prstGeom prst="rect">
+            <a:avLst/>
+          </a:prstGeom>
+        </p:spPr>
+      </p:pic>
+      <p:sp>
+        <p:nvSpPr>
+          <p:cNvPr id="6" name="Text 2"/>
+          <p:cNvSpPr/>
+          <p:nvPr/>
+        </p:nvSpPr>
+        <p:spPr>
+          <a:xfrm>
+            <a:off x="1828800" y="960120"/>
+            <a:ext cx="8229600" cy="548640"/>
+          </a:xfrm>
+          <a:prstGeom prst="rect">
+            <a:avLst/>
+          </a:prstGeom>
+          <a:noFill/>
+          <a:ln/>
+        </p:spPr>
+        <p:txBody>
+          <a:bodyPr wrap="square" rtlCol="0" anchor="ctr"/>
+          <a:lstStyle/>
+          <a:p>
+            <a:pPr algn="l" indent="0" marL="0">
+              <a:buNone/>
+            </a:pPr>
+            <a:r>
+              <a:rPr lang="en-US" sz="1700" b="1" spc="250" kern="0" dirty="0">
+                <a:solidFill>
+                  <a:srgbClr val="FF4D6D"/>
+                </a:solidFill>
+                <a:latin typeface="Calibri" pitchFamily="34" charset="0"/>
+                <a:ea typeface="Calibri" pitchFamily="34" charset="-122"/>
+                <a:cs typeface="Calibri" pitchFamily="34" charset="-120"/>
+              </a:rPr>
+              <a:t>HOSPITAL COURSE &amp; OUTCOME</a:t>
+            </a:r>
+            <a:endParaRPr lang="en-US" sz="1700" dirty="0"/>
+          </a:p>
+        </p:txBody>
+      </p:sp>
+      <p:sp>
+        <p:nvSpPr>
+          <p:cNvPr id="7" name="Text 3"/>
+          <p:cNvSpPr/>
+          <p:nvPr/>
+        </p:nvSpPr>
+        <p:spPr>
+          <a:xfrm>
+            <a:off x="640080" y="1965960"/>
+            <a:ext cx="10058400" cy="914400"/>
+          </a:xfrm>
+          <a:prstGeom prst="rect">
+            <a:avLst/>
+          </a:prstGeom>
+          <a:noFill/>
+          <a:ln/>
+        </p:spPr>
+        <p:txBody>
+          <a:bodyPr wrap="square" rtlCol="0" anchor="t"/>
+          <a:lstStyle/>
+          <a:p>
+            <a:pPr algn="l" indent="0" marL="0">
+              <a:buNone/>
+            </a:pPr>
+            <a:r>
+              <a:rPr lang="en-US" sz="5600" b="1" dirty="0">
+                <a:solidFill>
+                  <a:srgbClr val="FFFFFF"/>
+                </a:solidFill>
+                <a:latin typeface="Cambria" pitchFamily="34" charset="0"/>
+                <a:ea typeface="Cambria" pitchFamily="34" charset="-122"/>
+                <a:cs typeface="Cambria" pitchFamily="34" charset="-120"/>
+              </a:rPr>
+              <a:t>Clinically Improved</a:t>
+            </a:r>
+            <a:endParaRPr lang="en-US" sz="5600" dirty="0"/>
+          </a:p>
+        </p:txBody>
+      </p:sp>
+      <p:sp>
+        <p:nvSpPr>
+          <p:cNvPr id="8" name="Shape 4"/>
+          <p:cNvSpPr/>
+          <p:nvPr/>
+        </p:nvSpPr>
+        <p:spPr>
+          <a:xfrm>
+            <a:off x="685800" y="3200400"/>
+            <a:ext cx="3749040" cy="1554480"/>
+          </a:xfrm>
+          <a:prstGeom prst="roundRect">
+            <a:avLst>
+              <a:gd name="adj" fmla="val 7059"/>
+            </a:avLst>
+          </a:prstGeom>
+          <a:solidFill>
+            <a:srgbClr val="FFFFFF">
+              <a:alpha val="8000"/>
+            </a:srgbClr>
+          </a:solidFill>
+          <a:ln w="12700">
+            <a:solidFill>
+              <a:srgbClr val="FF4D6D"/>
+            </a:solidFill>
+            <a:prstDash val="solid"/>
+          </a:ln>
+          <a:effectLst>
+            <a:outerShdw sx="100000" sy="100000" kx="0" ky="0" algn="bl" rotWithShape="0" blurRad="101600" dist="38100" dir="5400000">
+              <a:srgbClr val="8A8A8A">
+                <a:alpha val="35000"/>
+              </a:srgbClr>
+            </a:outerShdw>
+          </a:effectLst>
+        </p:spPr>
+      </p:sp>
+      <p:sp>
+        <p:nvSpPr>
+          <p:cNvPr id="9" name="Shape 5"/>
+          <p:cNvSpPr/>
+          <p:nvPr/>
+        </p:nvSpPr>
+        <p:spPr>
+          <a:xfrm>
+            <a:off x="960120" y="3657600"/>
+            <a:ext cx="640080" cy="640080"/>
+          </a:xfrm>
+          <a:prstGeom prst="ellipse">
+            <a:avLst/>
+          </a:prstGeom>
+          <a:solidFill>
+            <a:srgbClr val="FFFFFF"/>
+          </a:solidFill>
+          <a:ln/>
+        </p:spPr>
+      </p:sp>
+      <p:pic>
+        <p:nvPicPr>
+          <p:cNvPr id="10" name="Image 2" descr="preencoded.png">    </p:cNvPr>
+          <p:cNvPicPr>
+            <a:picLocks noChangeAspect="1"/>
+          </p:cNvPicPr>
+          <p:nvPr/>
+        </p:nvPicPr>
+        <p:blipFill>
+          <a:blip r:embed="rId3"/>
+          <a:stretch>
+            <a:fillRect/>
+          </a:stretch>
+        </p:blipFill>
+        <p:spPr>
+          <a:xfrm>
+            <a:off x="1088136" y="3785616"/>
+            <a:ext cx="384048" cy="384048"/>
+          </a:xfrm>
+          <a:prstGeom prst="rect">
+            <a:avLst/>
+          </a:prstGeom>
+        </p:spPr>
+      </p:pic>
+      <p:sp>
+        <p:nvSpPr>
+          <p:cNvPr id="11" name="Text 6"/>
+          <p:cNvSpPr/>
+          <p:nvPr/>
+        </p:nvSpPr>
+        <p:spPr>
+          <a:xfrm>
+            <a:off x="1737360" y="3493008"/>
+            <a:ext cx="2560320" cy="457200"/>
+          </a:xfrm>
+          <a:prstGeom prst="rect">
+            <a:avLst/>
+          </a:prstGeom>
+          <a:noFill/>
+          <a:ln/>
+        </p:spPr>
+        <p:txBody>
+          <a:bodyPr wrap="square" lIns="0" tIns="0" rIns="0" bIns="0" rtlCol="0" anchor="ctr"/>
+          <a:lstStyle/>
+          <a:p>
+            <a:pPr algn="l" indent="0" marL="0">
+              <a:buNone/>
+            </a:pPr>
+            <a:r>
+              <a:rPr lang="en-US" sz="1900" b="1" dirty="0">
+                <a:solidFill>
+                  <a:srgbClr val="FFFFFF"/>
+                </a:solidFill>
+                <a:latin typeface="Cambria" pitchFamily="34" charset="0"/>
+                <a:ea typeface="Cambria" pitchFamily="34" charset="-122"/>
+                <a:cs typeface="Cambria" pitchFamily="34" charset="-120"/>
+              </a:rPr>
+              <a:t>Symptoms settled</a:t>
+            </a:r>
+            <a:endParaRPr lang="en-US" sz="1900" dirty="0"/>
+          </a:p>
+        </p:txBody>
+      </p:sp>
+      <p:sp>
+        <p:nvSpPr>
+          <p:cNvPr id="12" name="Text 7"/>
+          <p:cNvSpPr/>
+          <p:nvPr/>
+        </p:nvSpPr>
+        <p:spPr>
+          <a:xfrm>
+            <a:off x="1737360" y="3950208"/>
+            <a:ext cx="2606040" cy="640080"/>
+          </a:xfrm>
+          <a:prstGeom prst="rect">
+            <a:avLst/>
+          </a:prstGeom>
+          <a:noFill/>
+          <a:ln/>
+        </p:spPr>
+        <p:txBody>
+          <a:bodyPr wrap="square" lIns="0" tIns="0" rIns="0" bIns="0" rtlCol="0" anchor="t"/>
+          <a:lstStyle/>
+          <a:p>
+            <a:pPr algn="l" indent="0" marL="0">
+              <a:buNone/>
+            </a:pPr>
+            <a:r>
+              <a:rPr lang="en-US" sz="1250" i="1" dirty="0">
+                <a:solidFill>
+                  <a:srgbClr val="FBD8DF"/>
+                </a:solidFill>
+                <a:latin typeface="Calibri" pitchFamily="34" charset="0"/>
+                <a:ea typeface="Calibri" pitchFamily="34" charset="-122"/>
+                <a:cs typeface="Calibri" pitchFamily="34" charset="-120"/>
+              </a:rPr>
+              <a:t>Rhythm &amp; symptoms controlled</a:t>
+            </a:r>
+            <a:endParaRPr lang="en-US" sz="1250" dirty="0"/>
+          </a:p>
+        </p:txBody>
+      </p:sp>
+      <p:sp>
+        <p:nvSpPr>
+          <p:cNvPr id="13" name="Shape 8"/>
+          <p:cNvSpPr/>
+          <p:nvPr/>
+        </p:nvSpPr>
+        <p:spPr>
+          <a:xfrm>
+            <a:off x="4709160" y="3200400"/>
+            <a:ext cx="3749040" cy="1554480"/>
+          </a:xfrm>
+          <a:prstGeom prst="roundRect">
+            <a:avLst>
+              <a:gd name="adj" fmla="val 7059"/>
+            </a:avLst>
+          </a:prstGeom>
+          <a:solidFill>
+            <a:srgbClr val="FFFFFF">
+              <a:alpha val="8000"/>
+            </a:srgbClr>
+          </a:solidFill>
+          <a:ln w="12700">
+            <a:solidFill>
+              <a:srgbClr val="FF4D6D"/>
+            </a:solidFill>
+            <a:prstDash val="solid"/>
+          </a:ln>
+          <a:effectLst>
+            <a:outerShdw sx="100000" sy="100000" kx="0" ky="0" algn="bl" rotWithShape="0" blurRad="101600" dist="38100" dir="5400000">
+              <a:srgbClr val="8A8A8A">
+                <a:alpha val="35000"/>
+              </a:srgbClr>
+            </a:outerShdw>
+          </a:effectLst>
+        </p:spPr>
+      </p:sp>
+      <p:sp>
+        <p:nvSpPr>
+          <p:cNvPr id="14" name="Shape 9"/>
+          <p:cNvSpPr/>
+          <p:nvPr/>
+        </p:nvSpPr>
+        <p:spPr>
+          <a:xfrm>
+            <a:off x="4983480" y="3657600"/>
+            <a:ext cx="640080" cy="640080"/>
+          </a:xfrm>
+          <a:prstGeom prst="ellipse">
+            <a:avLst/>
+          </a:prstGeom>
+          <a:solidFill>
+            <a:srgbClr val="FFFFFF"/>
+          </a:solidFill>
+          <a:ln/>
+        </p:spPr>
+      </p:sp>
+      <p:pic>
+        <p:nvPicPr>
+          <p:cNvPr id="15" name="Image 3" descr="preencoded.png">    </p:cNvPr>
+          <p:cNvPicPr>
+            <a:picLocks noChangeAspect="1"/>
+          </p:cNvPicPr>
+          <p:nvPr/>
+        </p:nvPicPr>
+        <p:blipFill>
+          <a:blip r:embed="rId4"/>
+          <a:stretch>
+            <a:fillRect/>
+          </a:stretch>
+        </p:blipFill>
+        <p:spPr>
+          <a:xfrm>
+            <a:off x="5111496" y="3785616"/>
+            <a:ext cx="384048" cy="384048"/>
+          </a:xfrm>
+          <a:prstGeom prst="rect">
+            <a:avLst/>
+          </a:prstGeom>
+        </p:spPr>
+      </p:pic>
+      <p:sp>
+        <p:nvSpPr>
+          <p:cNvPr id="16" name="Text 10"/>
+          <p:cNvSpPr/>
+          <p:nvPr/>
+        </p:nvSpPr>
+        <p:spPr>
+          <a:xfrm>
+            <a:off x="5760720" y="3493008"/>
+            <a:ext cx="2560320" cy="457200"/>
+          </a:xfrm>
+          <a:prstGeom prst="rect">
+            <a:avLst/>
+          </a:prstGeom>
+          <a:noFill/>
+          <a:ln/>
+        </p:spPr>
+        <p:txBody>
+          <a:bodyPr wrap="square" lIns="0" tIns="0" rIns="0" bIns="0" rtlCol="0" anchor="ctr"/>
+          <a:lstStyle/>
+          <a:p>
+            <a:pPr algn="l" indent="0" marL="0">
+              <a:buNone/>
+            </a:pPr>
+            <a:r>
+              <a:rPr lang="en-US" sz="1900" b="1" dirty="0">
+                <a:solidFill>
+                  <a:srgbClr val="FFFFFF"/>
+                </a:solidFill>
+                <a:latin typeface="Cambria" pitchFamily="34" charset="0"/>
+                <a:ea typeface="Cambria" pitchFamily="34" charset="-122"/>
+                <a:cs typeface="Cambria" pitchFamily="34" charset="-120"/>
+              </a:rPr>
+              <a:t>Discharged home</a:t>
+            </a:r>
+            <a:endParaRPr lang="en-US" sz="1900" dirty="0"/>
+          </a:p>
+        </p:txBody>
+      </p:sp>
+      <p:sp>
+        <p:nvSpPr>
+          <p:cNvPr id="17" name="Text 11"/>
+          <p:cNvSpPr/>
+          <p:nvPr/>
+        </p:nvSpPr>
+        <p:spPr>
+          <a:xfrm>
+            <a:off x="5760720" y="3950208"/>
+            <a:ext cx="2606040" cy="640080"/>
+          </a:xfrm>
+          <a:prstGeom prst="rect">
+            <a:avLst/>
+          </a:prstGeom>
+          <a:noFill/>
+          <a:ln/>
+        </p:spPr>
+        <p:txBody>
+          <a:bodyPr wrap="square" lIns="0" tIns="0" rIns="0" bIns="0" rtlCol="0" anchor="t"/>
+          <a:lstStyle/>
+          <a:p>
+            <a:pPr algn="l" indent="0" marL="0">
+              <a:buNone/>
+            </a:pPr>
+            <a:r>
+              <a:rPr lang="en-US" sz="1250" i="1" dirty="0">
+                <a:solidFill>
+                  <a:srgbClr val="FBD8DF"/>
+                </a:solidFill>
+                <a:latin typeface="Calibri" pitchFamily="34" charset="0"/>
+                <a:ea typeface="Calibri" pitchFamily="34" charset="-122"/>
+                <a:cs typeface="Calibri" pitchFamily="34" charset="-120"/>
+              </a:rPr>
+              <a:t>Stable for outpatient follow-up</a:t>
+            </a:r>
+            <a:endParaRPr lang="en-US" sz="1250" dirty="0"/>
+          </a:p>
+        </p:txBody>
+      </p:sp>
+      <p:sp>
+        <p:nvSpPr>
+          <p:cNvPr id="18" name="Shape 12"/>
+          <p:cNvSpPr/>
+          <p:nvPr/>
+        </p:nvSpPr>
+        <p:spPr>
+          <a:xfrm>
+            <a:off x="731520" y="5486400"/>
+            <a:ext cx="2020824" cy="0"/>
+          </a:xfrm>
+          <a:prstGeom prst="line">
+            <a:avLst/>
+          </a:prstGeom>
+          <a:noFill/>
+          <a:ln w="28575">
+            <a:solidFill>
+              <a:srgbClr val="FF4D6D">
+                <a:alpha val="95000"/>
+              </a:srgbClr>
+            </a:solidFill>
+            <a:prstDash val="solid"/>
+          </a:ln>
+        </p:spPr>
+      </p:sp>
+      <p:sp>
+        <p:nvSpPr>
+          <p:cNvPr id="19" name="Shape 13"/>
+          <p:cNvSpPr/>
+          <p:nvPr/>
+        </p:nvSpPr>
+        <p:spPr>
+          <a:xfrm flipV="1">
+            <a:off x="2752344" y="5340096"/>
+            <a:ext cx="356616" cy="146304"/>
+          </a:xfrm>
+          <a:prstGeom prst="line">
+            <a:avLst/>
+          </a:prstGeom>
+          <a:noFill/>
+          <a:ln w="28575">
+            <a:solidFill>
+              <a:srgbClr val="FF4D6D">
+                <a:alpha val="95000"/>
+              </a:srgbClr>
+            </a:solidFill>
+            <a:prstDash val="solid"/>
+          </a:ln>
+        </p:spPr>
+      </p:sp>
+      <p:sp>
+        <p:nvSpPr>
+          <p:cNvPr id="20" name="Shape 14"/>
+          <p:cNvSpPr/>
+          <p:nvPr/>
+        </p:nvSpPr>
+        <p:spPr>
+          <a:xfrm>
+            <a:off x="3108960" y="5340096"/>
+            <a:ext cx="356616" cy="457200"/>
+          </a:xfrm>
+          <a:prstGeom prst="line">
+            <a:avLst/>
+          </a:prstGeom>
+          <a:noFill/>
+          <a:ln w="28575">
+            <a:solidFill>
+              <a:srgbClr val="FF4D6D">
+                <a:alpha val="95000"/>
+              </a:srgbClr>
+            </a:solidFill>
+            <a:prstDash val="solid"/>
+          </a:ln>
+        </p:spPr>
+      </p:sp>
+      <p:sp>
+        <p:nvSpPr>
+          <p:cNvPr id="21" name="Shape 15"/>
+          <p:cNvSpPr/>
+          <p:nvPr/>
+        </p:nvSpPr>
+        <p:spPr>
+          <a:xfrm flipV="1">
+            <a:off x="3465576" y="4983480"/>
+            <a:ext cx="356616" cy="813816"/>
+          </a:xfrm>
+          <a:prstGeom prst="line">
+            <a:avLst/>
+          </a:prstGeom>
+          <a:noFill/>
+          <a:ln w="28575">
+            <a:solidFill>
+              <a:srgbClr val="FF4D6D">
+                <a:alpha val="95000"/>
+              </a:srgbClr>
+            </a:solidFill>
+            <a:prstDash val="solid"/>
+          </a:ln>
+        </p:spPr>
+      </p:sp>
+      <p:sp>
+        <p:nvSpPr>
+          <p:cNvPr id="22" name="Shape 16"/>
+          <p:cNvSpPr/>
+          <p:nvPr/>
+        </p:nvSpPr>
+        <p:spPr>
+          <a:xfrm>
+            <a:off x="3822192" y="4983480"/>
+            <a:ext cx="356616" cy="685800"/>
+          </a:xfrm>
+          <a:prstGeom prst="line">
+            <a:avLst/>
+          </a:prstGeom>
+          <a:noFill/>
+          <a:ln w="28575">
+            <a:solidFill>
+              <a:srgbClr val="FF4D6D">
+                <a:alpha val="95000"/>
+              </a:srgbClr>
+            </a:solidFill>
+            <a:prstDash val="solid"/>
+          </a:ln>
+        </p:spPr>
+      </p:sp>
+      <p:sp>
+        <p:nvSpPr>
+          <p:cNvPr id="23" name="Shape 17"/>
+          <p:cNvSpPr/>
+          <p:nvPr/>
+        </p:nvSpPr>
+        <p:spPr>
+          <a:xfrm flipV="1">
+            <a:off x="4178808" y="5486400"/>
+            <a:ext cx="356616" cy="182880"/>
+          </a:xfrm>
+          <a:prstGeom prst="line">
+            <a:avLst/>
+          </a:prstGeom>
+          <a:noFill/>
+          <a:ln w="28575">
+            <a:solidFill>
+              <a:srgbClr val="FF4D6D">
+                <a:alpha val="95000"/>
+              </a:srgbClr>
+            </a:solidFill>
+            <a:prstDash val="solid"/>
+          </a:ln>
+        </p:spPr>
+      </p:sp>
+      <p:sp>
+        <p:nvSpPr>
+          <p:cNvPr id="24" name="Shape 18"/>
+          <p:cNvSpPr/>
+          <p:nvPr/>
+        </p:nvSpPr>
+        <p:spPr>
+          <a:xfrm>
+            <a:off x="4535424" y="5486400"/>
+            <a:ext cx="2139696" cy="0"/>
+          </a:xfrm>
+          <a:prstGeom prst="line">
+            <a:avLst/>
+          </a:prstGeom>
+          <a:noFill/>
+          <a:ln w="28575">
+            <a:solidFill>
+              <a:srgbClr val="FF4D6D">
+                <a:alpha val="95000"/>
+              </a:srgbClr>
+            </a:solidFill>
+            <a:prstDash val="solid"/>
+          </a:ln>
+        </p:spPr>
+      </p:sp>
+      <p:sp>
+        <p:nvSpPr>
+          <p:cNvPr id="25" name="Text 19"/>
+          <p:cNvSpPr/>
+          <p:nvPr/>
+        </p:nvSpPr>
+        <p:spPr>
+          <a:xfrm>
+            <a:off x="685800" y="5715000"/>
+            <a:ext cx="5486400" cy="548640"/>
+          </a:xfrm>
+          <a:prstGeom prst="rect">
+            <a:avLst/>
+          </a:prstGeom>
+          <a:noFill/>
+          <a:ln/>
+        </p:spPr>
+        <p:txBody>
+          <a:bodyPr wrap="square" rtlCol="0" anchor="t"/>
+          <a:lstStyle/>
+          <a:p>
+            <a:pPr algn="l" indent="0" marL="0">
+              <a:buNone/>
+            </a:pPr>
+            <a:r>
+              <a:rPr lang="en-US" sz="2600" b="1" i="1" dirty="0">
+                <a:solidFill>
+                  <a:srgbClr val="FBD8DF"/>
+                </a:solidFill>
+                <a:latin typeface="Cambria" pitchFamily="34" charset="0"/>
+                <a:ea typeface="Cambria" pitchFamily="34" charset="-122"/>
+                <a:cs typeface="Cambria" pitchFamily="34" charset="-120"/>
+              </a:rPr>
+              <a:t>Thank you</a:t>
+            </a:r>
+            <a:endParaRPr lang="en-US" sz="2600" dirty="0"/>
+          </a:p>
+        </p:txBody>
+      </p:sp>
+      <p:sp>
+        <p:nvSpPr>
+          <p:cNvPr id="26" name="Text 20"/>
+          <p:cNvSpPr/>
+          <p:nvPr/>
+        </p:nvSpPr>
+        <p:spPr>
+          <a:xfrm>
+            <a:off x="11277295" y="6355080"/>
+            <a:ext cx="548640" cy="320040"/>
+          </a:xfrm>
+          <a:prstGeom prst="rect">
+            <a:avLst/>
+          </a:prstGeom>
+          <a:noFill/>
+          <a:ln/>
+        </p:spPr>
+        <p:txBody>
+          <a:bodyPr wrap="square" rtlCol="0" anchor="t"/>
+          <a:lstStyle/>
+          <a:p>
+            <a:pPr algn="r" indent="0" marL="0">
+              <a:buNone/>
+            </a:pPr>
+            <a:r>
+              <a:rPr lang="en-US" sz="1100" b="1" dirty="0">
+                <a:solidFill>
+                  <a:srgbClr val="FBD8DF"/>
+                </a:solidFill>
+                <a:latin typeface="Calibri" pitchFamily="34" charset="0"/>
+                <a:ea typeface="Calibri" pitchFamily="34" charset="-122"/>
+                <a:cs typeface="Calibri" pitchFamily="34" charset="-120"/>
+              </a:rPr>
+              <a:t>20</a:t>
+            </a:r>
+            <a:endParaRPr lang="en-US" sz="1100" dirty="0"/>
+          </a:p>
+        </p:txBody>
+      </p:sp>
+      <p:sp>
+        <p:nvSpPr>
+          <p:cNvPr id="27" name="Text 21"/>
+          <p:cNvSpPr/>
+          <p:nvPr/>
+        </p:nvSpPr>
+        <p:spPr>
+          <a:xfrm>
+            <a:off x="502920" y="6355080"/>
+            <a:ext cx="5486400" cy="320040"/>
+          </a:xfrm>
+          <a:prstGeom prst="rect">
+            <a:avLst/>
+          </a:prstGeom>
+          <a:noFill/>
+          <a:ln/>
+        </p:spPr>
+        <p:txBody>
+          <a:bodyPr wrap="square" rtlCol="0" anchor="t"/>
+          <a:lstStyle/>
+          <a:p>
+            <a:pPr algn="l" indent="0" marL="0">
+              <a:buNone/>
+            </a:pPr>
+            <a:r>
+              <a:rPr lang="en-US" sz="900" dirty="0">
+                <a:solidFill>
+                  <a:srgbClr val="FBD8DF"/>
                 </a:solidFill>
                 <a:latin typeface="Calibri" pitchFamily="34" charset="0"/>
                 <a:ea typeface="Calibri" pitchFamily="34" charset="-122"/>

--- a/presentations/Clinicopathological-Conference.pptx
+++ b/presentations/Clinicopathological-Conference.pptx
@@ -4708,11 +4708,11 @@
         <p:spPr>
           <a:xfrm>
             <a:off x="4937760" y="1783080"/>
-            <a:ext cx="6766560" cy="1280160"/>
+            <a:ext cx="6766560" cy="822960"/>
           </a:xfrm>
           <a:prstGeom prst="roundRect">
             <a:avLst>
-              <a:gd name="adj" fmla="val 7143"/>
+              <a:gd name="adj" fmla="val 11111"/>
             </a:avLst>
           </a:prstGeom>
           <a:solidFill>
@@ -4741,8 +4741,8 @@
         </p:nvSpPr>
         <p:spPr>
           <a:xfrm>
-            <a:off x="5257800" y="2075688"/>
-            <a:ext cx="694944" cy="694944"/>
+            <a:off x="5212080" y="1920240"/>
+            <a:ext cx="548640" cy="548640"/>
           </a:xfrm>
           <a:prstGeom prst="ellipse">
             <a:avLst/>
@@ -4774,8 +4774,8 @@
         </p:blipFill>
         <p:spPr>
           <a:xfrm>
-            <a:off x="5431536" y="2249424"/>
-            <a:ext cx="347472" cy="347472"/>
+            <a:off x="5349240" y="2057400"/>
+            <a:ext cx="274320" cy="274320"/>
           </a:xfrm>
           <a:prstGeom prst="rect">
             <a:avLst/>
@@ -4790,8 +4790,8 @@
         </p:nvSpPr>
         <p:spPr>
           <a:xfrm>
-            <a:off x="6172200" y="2002536"/>
-            <a:ext cx="5212080" cy="292608"/>
+            <a:off x="5925312" y="1929384"/>
+            <a:ext cx="5486400" cy="256032"/>
           </a:xfrm>
           <a:prstGeom prst="rect">
             <a:avLst/>
@@ -4807,7 +4807,7 @@
               <a:buNone/>
             </a:pPr>
             <a:r>
-              <a:rPr lang="en-US" sz="1250" b="1" spc="120" kern="0" dirty="0">
+              <a:rPr lang="en-US" sz="1200" b="1" spc="120" kern="0" dirty="0">
                 <a:solidFill>
                   <a:srgbClr val="A4133C"/>
                 </a:solidFill>
@@ -4817,7 +4817,7 @@
               </a:rPr>
               <a:t>INSPECTION</a:t>
             </a:r>
-            <a:endParaRPr lang="en-US" sz="1250" dirty="0"/>
+            <a:endParaRPr lang="en-US" sz="1200" dirty="0"/>
           </a:p>
         </p:txBody>
       </p:sp>
@@ -4829,24 +4829,24 @@
         </p:nvSpPr>
         <p:spPr>
           <a:xfrm>
-            <a:off x="6172200" y="2331720"/>
-            <a:ext cx="5166360" cy="548640"/>
-          </a:xfrm>
-          <a:prstGeom prst="rect">
-            <a:avLst/>
-          </a:prstGeom>
-          <a:noFill/>
-          <a:ln/>
-        </p:spPr>
-        <p:txBody>
-          <a:bodyPr wrap="square" lIns="0" tIns="0" rIns="0" bIns="0" rtlCol="0" anchor="t"/>
-          <a:lstStyle/>
-          <a:p>
-            <a:pPr algn="l" indent="0" marL="0">
-              <a:buNone/>
-            </a:pPr>
-            <a:r>
-              <a:rPr lang="en-US" sz="1900" b="1" dirty="0">
+            <a:off x="5925312" y="2185416"/>
+            <a:ext cx="5486400" cy="310896"/>
+          </a:xfrm>
+          <a:prstGeom prst="rect">
+            <a:avLst/>
+          </a:prstGeom>
+          <a:noFill/>
+          <a:ln/>
+        </p:spPr>
+        <p:txBody>
+          <a:bodyPr wrap="square" lIns="0" tIns="0" rIns="0" bIns="0" rtlCol="0" anchor="ctr"/>
+          <a:lstStyle/>
+          <a:p>
+            <a:pPr algn="l" indent="0" marL="0">
+              <a:buNone/>
+            </a:pPr>
+            <a:r>
+              <a:rPr lang="en-US" sz="1700" b="1" dirty="0">
                 <a:solidFill>
                   <a:srgbClr val="2B2B33"/>
                 </a:solidFill>
@@ -4856,7 +4856,7 @@
               </a:rPr>
               <a:t>No visible pulsations or striae marks</a:t>
             </a:r>
-            <a:endParaRPr lang="en-US" sz="1900" dirty="0"/>
+            <a:endParaRPr lang="en-US" sz="1700" dirty="0"/>
           </a:p>
         </p:txBody>
       </p:sp>
@@ -4868,12 +4868,12 @@
         </p:nvSpPr>
         <p:spPr>
           <a:xfrm>
-            <a:off x="4937760" y="3246120"/>
-            <a:ext cx="6766560" cy="1280160"/>
+            <a:off x="4937760" y="2715768"/>
+            <a:ext cx="6766560" cy="822960"/>
           </a:xfrm>
           <a:prstGeom prst="roundRect">
             <a:avLst>
-              <a:gd name="adj" fmla="val 7143"/>
+              <a:gd name="adj" fmla="val 11111"/>
             </a:avLst>
           </a:prstGeom>
           <a:solidFill>
@@ -4902,8 +4902,8 @@
         </p:nvSpPr>
         <p:spPr>
           <a:xfrm>
-            <a:off x="5257800" y="3538728"/>
-            <a:ext cx="694944" cy="694944"/>
+            <a:off x="5212080" y="2852928"/>
+            <a:ext cx="548640" cy="548640"/>
           </a:xfrm>
           <a:prstGeom prst="ellipse">
             <a:avLst/>
@@ -4935,8 +4935,8 @@
         </p:blipFill>
         <p:spPr>
           <a:xfrm>
-            <a:off x="5431536" y="3712464"/>
-            <a:ext cx="347472" cy="347472"/>
+            <a:off x="5349240" y="2990088"/>
+            <a:ext cx="274320" cy="274320"/>
           </a:xfrm>
           <a:prstGeom prst="rect">
             <a:avLst/>
@@ -4951,8 +4951,8 @@
         </p:nvSpPr>
         <p:spPr>
           <a:xfrm>
-            <a:off x="6172200" y="3465576"/>
-            <a:ext cx="5212080" cy="292608"/>
+            <a:off x="5925312" y="2862072"/>
+            <a:ext cx="5486400" cy="256032"/>
           </a:xfrm>
           <a:prstGeom prst="rect">
             <a:avLst/>
@@ -4968,7 +4968,7 @@
               <a:buNone/>
             </a:pPr>
             <a:r>
-              <a:rPr lang="en-US" sz="1250" b="1" spc="120" kern="0" dirty="0">
+              <a:rPr lang="en-US" sz="1200" b="1" spc="120" kern="0" dirty="0">
                 <a:solidFill>
                   <a:srgbClr val="A4133C"/>
                 </a:solidFill>
@@ -4978,7 +4978,7 @@
               </a:rPr>
               <a:t>PALPATION</a:t>
             </a:r>
-            <a:endParaRPr lang="en-US" sz="1250" dirty="0"/>
+            <a:endParaRPr lang="en-US" sz="1200" dirty="0"/>
           </a:p>
         </p:txBody>
       </p:sp>
@@ -4990,24 +4990,24 @@
         </p:nvSpPr>
         <p:spPr>
           <a:xfrm>
-            <a:off x="6172200" y="3794760"/>
-            <a:ext cx="5166360" cy="548640"/>
-          </a:xfrm>
-          <a:prstGeom prst="rect">
-            <a:avLst/>
-          </a:prstGeom>
-          <a:noFill/>
-          <a:ln/>
-        </p:spPr>
-        <p:txBody>
-          <a:bodyPr wrap="square" lIns="0" tIns="0" rIns="0" bIns="0" rtlCol="0" anchor="t"/>
-          <a:lstStyle/>
-          <a:p>
-            <a:pPr algn="l" indent="0" marL="0">
-              <a:buNone/>
-            </a:pPr>
-            <a:r>
-              <a:rPr lang="en-US" sz="1900" b="1" dirty="0">
+            <a:off x="5925312" y="3118104"/>
+            <a:ext cx="5486400" cy="310896"/>
+          </a:xfrm>
+          <a:prstGeom prst="rect">
+            <a:avLst/>
+          </a:prstGeom>
+          <a:noFill/>
+          <a:ln/>
+        </p:spPr>
+        <p:txBody>
+          <a:bodyPr wrap="square" lIns="0" tIns="0" rIns="0" bIns="0" rtlCol="0" anchor="ctr"/>
+          <a:lstStyle/>
+          <a:p>
+            <a:pPr algn="l" indent="0" marL="0">
+              <a:buNone/>
+            </a:pPr>
+            <a:r>
+              <a:rPr lang="en-US" sz="1700" b="1" dirty="0">
                 <a:solidFill>
                   <a:srgbClr val="2B2B33"/>
                 </a:solidFill>
@@ -5015,9 +5015,9 @@
                 <a:ea typeface="Cambria" pitchFamily="34" charset="-122"/>
                 <a:cs typeface="Cambria" pitchFamily="34" charset="-120"/>
               </a:rPr>
-              <a:t>Examined</a:t>
-            </a:r>
-            <a:endParaRPr lang="en-US" sz="1900" dirty="0"/>
+              <a:t>Normal</a:t>
+            </a:r>
+            <a:endParaRPr lang="en-US" sz="1700" dirty="0"/>
           </a:p>
         </p:txBody>
       </p:sp>
@@ -5029,12 +5029,12 @@
         </p:nvSpPr>
         <p:spPr>
           <a:xfrm>
-            <a:off x="4937760" y="4709160"/>
-            <a:ext cx="6766560" cy="1280160"/>
+            <a:off x="4937760" y="3703320"/>
+            <a:ext cx="6766560" cy="2286000"/>
           </a:xfrm>
           <a:prstGeom prst="roundRect">
             <a:avLst>
-              <a:gd name="adj" fmla="val 7143"/>
+              <a:gd name="adj" fmla="val 4000"/>
             </a:avLst>
           </a:prstGeom>
           <a:solidFill>
@@ -5063,8 +5063,8 @@
         </p:nvSpPr>
         <p:spPr>
           <a:xfrm>
-            <a:off x="5257800" y="5001768"/>
-            <a:ext cx="694944" cy="694944"/>
+            <a:off x="5212080" y="3941064"/>
+            <a:ext cx="603504" cy="603504"/>
           </a:xfrm>
           <a:prstGeom prst="ellipse">
             <a:avLst/>
@@ -5096,8 +5096,8 @@
         </p:blipFill>
         <p:spPr>
           <a:xfrm>
-            <a:off x="5431536" y="5175504"/>
-            <a:ext cx="347472" cy="347472"/>
+            <a:off x="5367528" y="4096512"/>
+            <a:ext cx="292608" cy="292608"/>
           </a:xfrm>
           <a:prstGeom prst="rect">
             <a:avLst/>
@@ -5112,8 +5112,8 @@
         </p:nvSpPr>
         <p:spPr>
           <a:xfrm>
-            <a:off x="6172200" y="4928616"/>
-            <a:ext cx="5212080" cy="292608"/>
+            <a:off x="5961888" y="4041648"/>
+            <a:ext cx="5486400" cy="292608"/>
           </a:xfrm>
           <a:prstGeom prst="rect">
             <a:avLst/>
@@ -5145,14 +5145,34 @@
       </p:sp>
       <p:sp>
         <p:nvSpPr>
-          <p:cNvPr id="31" name="Text 24"/>
-          <p:cNvSpPr/>
-          <p:nvPr/>
-        </p:nvSpPr>
-        <p:spPr>
-          <a:xfrm>
-            <a:off x="6172200" y="5257800"/>
-            <a:ext cx="5166360" cy="548640"/>
+          <p:cNvPr id="31" name="Shape 24"/>
+          <p:cNvSpPr/>
+          <p:nvPr/>
+        </p:nvSpPr>
+        <p:spPr>
+          <a:xfrm>
+            <a:off x="5394960" y="4718304"/>
+            <a:ext cx="128016" cy="128016"/>
+          </a:xfrm>
+          <a:prstGeom prst="ellipse">
+            <a:avLst/>
+          </a:prstGeom>
+          <a:solidFill>
+            <a:srgbClr val="FF4D6D"/>
+          </a:solidFill>
+          <a:ln/>
+        </p:spPr>
+      </p:sp>
+      <p:sp>
+        <p:nvSpPr>
+          <p:cNvPr id="32" name="Text 25"/>
+          <p:cNvSpPr/>
+          <p:nvPr/>
+        </p:nvSpPr>
+        <p:spPr>
+          <a:xfrm>
+            <a:off x="5687568" y="4636008"/>
+            <a:ext cx="5596128" cy="457200"/>
           </a:xfrm>
           <a:prstGeom prst="rect">
             <a:avLst/>
@@ -5165,26 +5185,153 @@
           <a:lstStyle/>
           <a:p>
             <a:pPr algn="l" indent="0" marL="0">
-              <a:buNone/>
-            </a:pPr>
-            <a:r>
-              <a:rPr lang="en-US" sz="1900" b="1" dirty="0">
+              <a:lnSpc>
+                <a:spcPct val="100000"/>
+              </a:lnSpc>
+              <a:buNone/>
+            </a:pPr>
+            <a:r>
+              <a:rPr lang="en-US" sz="1250" dirty="0">
                 <a:solidFill>
                   <a:srgbClr val="2B2B33"/>
                 </a:solidFill>
-                <a:latin typeface="Cambria" pitchFamily="34" charset="0"/>
-                <a:ea typeface="Cambria" pitchFamily="34" charset="-122"/>
-                <a:cs typeface="Cambria" pitchFamily="34" charset="-120"/>
-              </a:rPr>
-              <a:t>Examined</a:t>
-            </a:r>
-            <a:endParaRPr lang="en-US" sz="1900" dirty="0"/>
-          </a:p>
-        </p:txBody>
-      </p:sp>
-      <p:sp>
-        <p:nvSpPr>
-          <p:cNvPr id="32" name="Text 25"/>
+                <a:latin typeface="Calibri" pitchFamily="34" charset="0"/>
+                <a:ea typeface="Calibri" pitchFamily="34" charset="-122"/>
+                <a:cs typeface="Calibri" pitchFamily="34" charset="-120"/>
+              </a:rPr>
+              <a:t>1st heart sound &amp; both components of 2nd heart sound audible at their respective areas</a:t>
+            </a:r>
+            <a:endParaRPr lang="en-US" sz="1250" dirty="0"/>
+          </a:p>
+        </p:txBody>
+      </p:sp>
+      <p:sp>
+        <p:nvSpPr>
+          <p:cNvPr id="33" name="Shape 26"/>
+          <p:cNvSpPr/>
+          <p:nvPr/>
+        </p:nvSpPr>
+        <p:spPr>
+          <a:xfrm>
+            <a:off x="5394960" y="5175504"/>
+            <a:ext cx="128016" cy="128016"/>
+          </a:xfrm>
+          <a:prstGeom prst="ellipse">
+            <a:avLst/>
+          </a:prstGeom>
+          <a:solidFill>
+            <a:srgbClr val="FF4D6D"/>
+          </a:solidFill>
+          <a:ln/>
+        </p:spPr>
+      </p:sp>
+      <p:sp>
+        <p:nvSpPr>
+          <p:cNvPr id="34" name="Text 27"/>
+          <p:cNvSpPr/>
+          <p:nvPr/>
+        </p:nvSpPr>
+        <p:spPr>
+          <a:xfrm>
+            <a:off x="5687568" y="5093208"/>
+            <a:ext cx="5596128" cy="457200"/>
+          </a:xfrm>
+          <a:prstGeom prst="rect">
+            <a:avLst/>
+          </a:prstGeom>
+          <a:noFill/>
+          <a:ln/>
+        </p:spPr>
+        <p:txBody>
+          <a:bodyPr wrap="square" lIns="0" tIns="0" rIns="0" bIns="0" rtlCol="0" anchor="t"/>
+          <a:lstStyle/>
+          <a:p>
+            <a:pPr algn="l" indent="0" marL="0">
+              <a:lnSpc>
+                <a:spcPct val="100000"/>
+              </a:lnSpc>
+              <a:buNone/>
+            </a:pPr>
+            <a:r>
+              <a:rPr lang="en-US" sz="1250" dirty="0">
+                <a:solidFill>
+                  <a:srgbClr val="2B2B33"/>
+                </a:solidFill>
+                <a:latin typeface="Calibri" pitchFamily="34" charset="0"/>
+                <a:ea typeface="Calibri" pitchFamily="34" charset="-122"/>
+                <a:cs typeface="Calibri" pitchFamily="34" charset="-120"/>
+              </a:rPr>
+              <a:t>1st heart sound of variable intensity; both components of 2nd heart sound of normal intensity</a:t>
+            </a:r>
+            <a:endParaRPr lang="en-US" sz="1250" dirty="0"/>
+          </a:p>
+        </p:txBody>
+      </p:sp>
+      <p:sp>
+        <p:nvSpPr>
+          <p:cNvPr id="35" name="Shape 28"/>
+          <p:cNvSpPr/>
+          <p:nvPr/>
+        </p:nvSpPr>
+        <p:spPr>
+          <a:xfrm>
+            <a:off x="5394960" y="5632704"/>
+            <a:ext cx="128016" cy="128016"/>
+          </a:xfrm>
+          <a:prstGeom prst="ellipse">
+            <a:avLst/>
+          </a:prstGeom>
+          <a:solidFill>
+            <a:srgbClr val="FF4D6D"/>
+          </a:solidFill>
+          <a:ln/>
+        </p:spPr>
+      </p:sp>
+      <p:sp>
+        <p:nvSpPr>
+          <p:cNvPr id="36" name="Text 29"/>
+          <p:cNvSpPr/>
+          <p:nvPr/>
+        </p:nvSpPr>
+        <p:spPr>
+          <a:xfrm>
+            <a:off x="5687568" y="5550408"/>
+            <a:ext cx="5596128" cy="457200"/>
+          </a:xfrm>
+          <a:prstGeom prst="rect">
+            <a:avLst/>
+          </a:prstGeom>
+          <a:noFill/>
+          <a:ln/>
+        </p:spPr>
+        <p:txBody>
+          <a:bodyPr wrap="square" lIns="0" tIns="0" rIns="0" bIns="0" rtlCol="0" anchor="t"/>
+          <a:lstStyle/>
+          <a:p>
+            <a:pPr algn="l" indent="0" marL="0">
+              <a:lnSpc>
+                <a:spcPct val="100000"/>
+              </a:lnSpc>
+              <a:buNone/>
+            </a:pPr>
+            <a:r>
+              <a:rPr lang="en-US" sz="1250" dirty="0">
+                <a:solidFill>
+                  <a:srgbClr val="2B2B33"/>
+                </a:solidFill>
+                <a:latin typeface="Calibri" pitchFamily="34" charset="0"/>
+                <a:ea typeface="Calibri" pitchFamily="34" charset="-122"/>
+                <a:cs typeface="Calibri" pitchFamily="34" charset="-120"/>
+              </a:rPr>
+              <a:t>No added sounds audible</a:t>
+            </a:r>
+            <a:endParaRPr lang="en-US" sz="1250" dirty="0"/>
+          </a:p>
+        </p:txBody>
+      </p:sp>
+      <p:sp>
+        <p:nvSpPr>
+          <p:cNvPr id="37" name="Text 30"/>
           <p:cNvSpPr/>
           <p:nvPr/>
         </p:nvSpPr>
@@ -5223,7 +5370,7 @@
       </p:sp>
       <p:sp>
         <p:nvSpPr>
-          <p:cNvPr id="33" name="Text 26"/>
+          <p:cNvPr id="38" name="Text 31"/>
           <p:cNvSpPr/>
           <p:nvPr/>
         </p:nvSpPr>
@@ -21471,7 +21618,7 @@
           </a:prstGeom>
           <a:solidFill>
             <a:srgbClr val="3A0A17">
-              <a:alpha val="65000"/>
+              <a:alpha val="68000"/>
             </a:srgbClr>
           </a:solidFill>
           <a:ln/>
@@ -21487,7 +21634,7 @@
         </p:nvPicPr>
         <p:blipFill>
           <a:blip r:embed="rId1">
-            <a:alphaModFix amt="10000"/>
+            <a:alphaModFix amt="7000"/>
           </a:blip>
           <a:stretch>
             <a:fillRect/>
@@ -21495,52 +21642,34 @@
         </p:blipFill>
         <p:spPr>
           <a:xfrm>
-            <a:off x="7863840" y="3108960"/>
-            <a:ext cx="4754880" cy="4754880"/>
+            <a:off x="8321040" y="-960120"/>
+            <a:ext cx="4114800" cy="4114800"/>
           </a:xfrm>
           <a:prstGeom prst="rect">
             <a:avLst/>
           </a:prstGeom>
         </p:spPr>
       </p:pic>
-      <p:sp>
-        <p:nvSpPr>
-          <p:cNvPr id="4" name="Shape 1"/>
-          <p:cNvSpPr/>
-          <p:nvPr/>
-        </p:nvSpPr>
-        <p:spPr>
-          <a:xfrm>
-            <a:off x="685800" y="777240"/>
-            <a:ext cx="960120" cy="960120"/>
-          </a:xfrm>
-          <a:prstGeom prst="ellipse">
-            <a:avLst/>
-          </a:prstGeom>
-          <a:solidFill>
-            <a:srgbClr val="A4133C"/>
-          </a:solidFill>
-          <a:ln/>
-        </p:spPr>
-      </p:sp>
       <p:pic>
         <p:nvPicPr>
-          <p:cNvPr id="5" name="Image 1" descr="preencoded.png">    </p:cNvPr>
+          <p:cNvPr id="4" name="Image 1" descr="preencoded.png">    </p:cNvPr>
           <p:cNvPicPr>
             <a:picLocks noChangeAspect="1"/>
           </p:cNvPicPr>
           <p:nvPr/>
         </p:nvPicPr>
         <p:blipFill>
-          <a:blip r:embed="rId2"/>
+          <a:blip r:embed="rId2">
+            <a:alphaModFix amt="7000"/>
+          </a:blip>
           <a:stretch>
             <a:fillRect/>
           </a:stretch>
         </p:blipFill>
         <p:spPr>
           <a:xfrm>
-            <a:off x="896112" y="987552"/>
-            <a:ext cx="548640" cy="548640"/>
+            <a:off x="8046720" y="3749040"/>
+            <a:ext cx="4663440" cy="4663440"/>
           </a:xfrm>
           <a:prstGeom prst="rect">
             <a:avLst/>
@@ -21549,141 +21678,27 @@
       </p:pic>
       <p:sp>
         <p:nvSpPr>
-          <p:cNvPr id="6" name="Text 2"/>
-          <p:cNvSpPr/>
-          <p:nvPr/>
-        </p:nvSpPr>
-        <p:spPr>
-          <a:xfrm>
-            <a:off x="1828800" y="960120"/>
-            <a:ext cx="8229600" cy="548640"/>
-          </a:xfrm>
-          <a:prstGeom prst="rect">
-            <a:avLst/>
-          </a:prstGeom>
-          <a:noFill/>
-          <a:ln/>
-        </p:spPr>
-        <p:txBody>
-          <a:bodyPr wrap="square" rtlCol="0" anchor="ctr"/>
-          <a:lstStyle/>
-          <a:p>
-            <a:pPr algn="l" indent="0" marL="0">
-              <a:buNone/>
-            </a:pPr>
-            <a:r>
-              <a:rPr lang="en-US" sz="1700" b="1" spc="250" kern="0" dirty="0">
-                <a:solidFill>
-                  <a:srgbClr val="FF4D6D"/>
-                </a:solidFill>
-                <a:latin typeface="Calibri" pitchFamily="34" charset="0"/>
-                <a:ea typeface="Calibri" pitchFamily="34" charset="-122"/>
-                <a:cs typeface="Calibri" pitchFamily="34" charset="-120"/>
-              </a:rPr>
-              <a:t>HOSPITAL COURSE &amp; OUTCOME</a:t>
-            </a:r>
-            <a:endParaRPr lang="en-US" sz="1700" dirty="0"/>
-          </a:p>
-        </p:txBody>
-      </p:sp>
-      <p:sp>
-        <p:nvSpPr>
-          <p:cNvPr id="7" name="Text 3"/>
-          <p:cNvSpPr/>
-          <p:nvPr/>
-        </p:nvSpPr>
-        <p:spPr>
-          <a:xfrm>
-            <a:off x="640080" y="1965960"/>
-            <a:ext cx="10058400" cy="914400"/>
-          </a:xfrm>
-          <a:prstGeom prst="rect">
-            <a:avLst/>
-          </a:prstGeom>
-          <a:noFill/>
-          <a:ln/>
-        </p:spPr>
-        <p:txBody>
-          <a:bodyPr wrap="square" rtlCol="0" anchor="t"/>
-          <a:lstStyle/>
-          <a:p>
-            <a:pPr algn="l" indent="0" marL="0">
-              <a:buNone/>
-            </a:pPr>
-            <a:r>
-              <a:rPr lang="en-US" sz="5600" b="1" dirty="0">
-                <a:solidFill>
-                  <a:srgbClr val="FFFFFF"/>
-                </a:solidFill>
-                <a:latin typeface="Cambria" pitchFamily="34" charset="0"/>
-                <a:ea typeface="Cambria" pitchFamily="34" charset="-122"/>
-                <a:cs typeface="Cambria" pitchFamily="34" charset="-120"/>
-              </a:rPr>
-              <a:t>Clinically Improved</a:t>
-            </a:r>
-            <a:endParaRPr lang="en-US" sz="5600" dirty="0"/>
-          </a:p>
-        </p:txBody>
-      </p:sp>
-      <p:sp>
-        <p:nvSpPr>
-          <p:cNvPr id="8" name="Shape 4"/>
-          <p:cNvSpPr/>
-          <p:nvPr/>
-        </p:nvSpPr>
-        <p:spPr>
-          <a:xfrm>
-            <a:off x="685800" y="3200400"/>
-            <a:ext cx="3749040" cy="1554480"/>
-          </a:xfrm>
-          <a:prstGeom prst="roundRect">
-            <a:avLst>
-              <a:gd name="adj" fmla="val 7059"/>
-            </a:avLst>
+          <p:cNvPr id="5" name="Shape 1"/>
+          <p:cNvSpPr/>
+          <p:nvPr/>
+        </p:nvSpPr>
+        <p:spPr>
+          <a:xfrm>
+            <a:off x="685800" y="731520"/>
+            <a:ext cx="960120" cy="960120"/>
+          </a:xfrm>
+          <a:prstGeom prst="ellipse">
+            <a:avLst/>
           </a:prstGeom>
           <a:solidFill>
-            <a:srgbClr val="FFFFFF">
-              <a:alpha val="8000"/>
-            </a:srgbClr>
-          </a:solidFill>
-          <a:ln w="12700">
-            <a:solidFill>
-              <a:srgbClr val="FF4D6D"/>
-            </a:solidFill>
-            <a:prstDash val="solid"/>
-          </a:ln>
-          <a:effectLst>
-            <a:outerShdw sx="100000" sy="100000" kx="0" ky="0" algn="bl" rotWithShape="0" blurRad="101600" dist="38100" dir="5400000">
-              <a:srgbClr val="8A8A8A">
-                <a:alpha val="35000"/>
-              </a:srgbClr>
-            </a:outerShdw>
-          </a:effectLst>
-        </p:spPr>
-      </p:sp>
-      <p:sp>
-        <p:nvSpPr>
-          <p:cNvPr id="9" name="Shape 5"/>
-          <p:cNvSpPr/>
-          <p:nvPr/>
-        </p:nvSpPr>
-        <p:spPr>
-          <a:xfrm>
-            <a:off x="960120" y="3657600"/>
-            <a:ext cx="640080" cy="640080"/>
-          </a:xfrm>
-          <a:prstGeom prst="ellipse">
-            <a:avLst/>
-          </a:prstGeom>
-          <a:solidFill>
-            <a:srgbClr val="FFFFFF"/>
+            <a:srgbClr val="A4133C"/>
           </a:solidFill>
           <a:ln/>
         </p:spPr>
       </p:sp>
       <p:pic>
         <p:nvPicPr>
-          <p:cNvPr id="10" name="Image 2" descr="preencoded.png">    </p:cNvPr>
+          <p:cNvPr id="6" name="Image 2" descr="preencoded.png">    </p:cNvPr>
           <p:cNvPicPr>
             <a:picLocks noChangeAspect="1"/>
           </p:cNvPicPr>
@@ -21697,8 +21712,8 @@
         </p:blipFill>
         <p:spPr>
           <a:xfrm>
-            <a:off x="1088136" y="3785616"/>
-            <a:ext cx="384048" cy="384048"/>
+            <a:off x="896112" y="941832"/>
+            <a:ext cx="548640" cy="548640"/>
           </a:xfrm>
           <a:prstGeom prst="rect">
             <a:avLst/>
@@ -21707,30 +21722,69 @@
       </p:pic>
       <p:sp>
         <p:nvSpPr>
-          <p:cNvPr id="11" name="Text 6"/>
-          <p:cNvSpPr/>
-          <p:nvPr/>
-        </p:nvSpPr>
-        <p:spPr>
-          <a:xfrm>
-            <a:off x="1737360" y="3493008"/>
-            <a:ext cx="2560320" cy="457200"/>
-          </a:xfrm>
-          <a:prstGeom prst="rect">
-            <a:avLst/>
-          </a:prstGeom>
-          <a:noFill/>
-          <a:ln/>
-        </p:spPr>
-        <p:txBody>
-          <a:bodyPr wrap="square" lIns="0" tIns="0" rIns="0" bIns="0" rtlCol="0" anchor="ctr"/>
-          <a:lstStyle/>
-          <a:p>
-            <a:pPr algn="l" indent="0" marL="0">
-              <a:buNone/>
-            </a:pPr>
-            <a:r>
-              <a:rPr lang="en-US" sz="1900" b="1" dirty="0">
+          <p:cNvPr id="7" name="Text 2"/>
+          <p:cNvSpPr/>
+          <p:nvPr/>
+        </p:nvSpPr>
+        <p:spPr>
+          <a:xfrm>
+            <a:off x="1828800" y="914400"/>
+            <a:ext cx="8229600" cy="548640"/>
+          </a:xfrm>
+          <a:prstGeom prst="rect">
+            <a:avLst/>
+          </a:prstGeom>
+          <a:noFill/>
+          <a:ln/>
+        </p:spPr>
+        <p:txBody>
+          <a:bodyPr wrap="square" rtlCol="0" anchor="ctr"/>
+          <a:lstStyle/>
+          <a:p>
+            <a:pPr algn="l" indent="0" marL="0">
+              <a:buNone/>
+            </a:pPr>
+            <a:r>
+              <a:rPr lang="en-US" sz="1700" b="1" spc="250" kern="0" dirty="0">
+                <a:solidFill>
+                  <a:srgbClr val="FF4D6D"/>
+                </a:solidFill>
+                <a:latin typeface="Calibri" pitchFamily="34" charset="0"/>
+                <a:ea typeface="Calibri" pitchFamily="34" charset="-122"/>
+                <a:cs typeface="Calibri" pitchFamily="34" charset="-120"/>
+              </a:rPr>
+              <a:t>HOSPITAL COURSE &amp; OUTCOME</a:t>
+            </a:r>
+            <a:endParaRPr lang="en-US" sz="1700" dirty="0"/>
+          </a:p>
+        </p:txBody>
+      </p:sp>
+      <p:sp>
+        <p:nvSpPr>
+          <p:cNvPr id="8" name="Text 3"/>
+          <p:cNvSpPr/>
+          <p:nvPr/>
+        </p:nvSpPr>
+        <p:spPr>
+          <a:xfrm>
+            <a:off x="640080" y="1783080"/>
+            <a:ext cx="10515600" cy="868680"/>
+          </a:xfrm>
+          <a:prstGeom prst="rect">
+            <a:avLst/>
+          </a:prstGeom>
+          <a:noFill/>
+          <a:ln/>
+        </p:spPr>
+        <p:txBody>
+          <a:bodyPr wrap="square" rtlCol="0" anchor="t"/>
+          <a:lstStyle/>
+          <a:p>
+            <a:pPr algn="l" indent="0" marL="0">
+              <a:buNone/>
+            </a:pPr>
+            <a:r>
+              <a:rPr lang="en-US" sz="5200" b="1" dirty="0">
                 <a:solidFill>
                   <a:srgbClr val="FFFFFF"/>
                 </a:solidFill>
@@ -21738,38 +21792,38 @@
                 <a:ea typeface="Cambria" pitchFamily="34" charset="-122"/>
                 <a:cs typeface="Cambria" pitchFamily="34" charset="-120"/>
               </a:rPr>
-              <a:t>Symptoms settled</a:t>
-            </a:r>
-            <a:endParaRPr lang="en-US" sz="1900" dirty="0"/>
-          </a:p>
-        </p:txBody>
-      </p:sp>
-      <p:sp>
-        <p:nvSpPr>
-          <p:cNvPr id="12" name="Text 7"/>
-          <p:cNvSpPr/>
-          <p:nvPr/>
-        </p:nvSpPr>
-        <p:spPr>
-          <a:xfrm>
-            <a:off x="1737360" y="3950208"/>
-            <a:ext cx="2606040" cy="640080"/>
-          </a:xfrm>
-          <a:prstGeom prst="rect">
-            <a:avLst/>
-          </a:prstGeom>
-          <a:noFill/>
-          <a:ln/>
-        </p:spPr>
-        <p:txBody>
-          <a:bodyPr wrap="square" lIns="0" tIns="0" rIns="0" bIns="0" rtlCol="0" anchor="t"/>
-          <a:lstStyle/>
-          <a:p>
-            <a:pPr algn="l" indent="0" marL="0">
-              <a:buNone/>
-            </a:pPr>
-            <a:r>
-              <a:rPr lang="en-US" sz="1250" i="1" dirty="0">
+              <a:t>Clinically Improved</a:t>
+            </a:r>
+            <a:endParaRPr lang="en-US" sz="5200" dirty="0"/>
+          </a:p>
+        </p:txBody>
+      </p:sp>
+      <p:sp>
+        <p:nvSpPr>
+          <p:cNvPr id="9" name="Text 4"/>
+          <p:cNvSpPr/>
+          <p:nvPr/>
+        </p:nvSpPr>
+        <p:spPr>
+          <a:xfrm>
+            <a:off x="685800" y="2697480"/>
+            <a:ext cx="10515600" cy="365760"/>
+          </a:xfrm>
+          <a:prstGeom prst="rect">
+            <a:avLst/>
+          </a:prstGeom>
+          <a:noFill/>
+          <a:ln/>
+        </p:spPr>
+        <p:txBody>
+          <a:bodyPr wrap="square" rtlCol="0" anchor="t"/>
+          <a:lstStyle/>
+          <a:p>
+            <a:pPr algn="l" indent="0" marL="0">
+              <a:buNone/>
+            </a:pPr>
+            <a:r>
+              <a:rPr lang="en-US" sz="1600" i="1" dirty="0">
                 <a:solidFill>
                   <a:srgbClr val="FBD8DF"/>
                 </a:solidFill>
@@ -21777,71 +21831,64 @@
                 <a:ea typeface="Calibri" pitchFamily="34" charset="-122"/>
                 <a:cs typeface="Calibri" pitchFamily="34" charset="-120"/>
               </a:rPr>
-              <a:t>Rhythm &amp; symptoms controlled</a:t>
-            </a:r>
-            <a:endParaRPr lang="en-US" sz="1250" dirty="0"/>
-          </a:p>
-        </p:txBody>
-      </p:sp>
-      <p:sp>
-        <p:nvSpPr>
-          <p:cNvPr id="13" name="Shape 8"/>
-          <p:cNvSpPr/>
-          <p:nvPr/>
-        </p:nvSpPr>
-        <p:spPr>
-          <a:xfrm>
-            <a:off x="4709160" y="3200400"/>
-            <a:ext cx="3749040" cy="1554480"/>
+              <a:t>From cardiac emergency to safe discharge</a:t>
+            </a:r>
+            <a:endParaRPr lang="en-US" sz="1600" dirty="0"/>
+          </a:p>
+        </p:txBody>
+      </p:sp>
+      <p:sp>
+        <p:nvSpPr>
+          <p:cNvPr id="10" name="Shape 5"/>
+          <p:cNvSpPr/>
+          <p:nvPr/>
+        </p:nvSpPr>
+        <p:spPr>
+          <a:xfrm>
+            <a:off x="1874520" y="4133088"/>
+            <a:ext cx="8503920" cy="54864"/>
           </a:xfrm>
           <a:prstGeom prst="roundRect">
             <a:avLst>
-              <a:gd name="adj" fmla="val 7059"/>
+              <a:gd name="adj" fmla="val 50000"/>
             </a:avLst>
           </a:prstGeom>
           <a:solidFill>
-            <a:srgbClr val="FFFFFF">
-              <a:alpha val="8000"/>
+            <a:srgbClr val="FF4D6D">
+              <a:alpha val="55000"/>
             </a:srgbClr>
           </a:solidFill>
-          <a:ln w="12700">
+          <a:ln/>
+        </p:spPr>
+      </p:sp>
+      <p:sp>
+        <p:nvSpPr>
+          <p:cNvPr id="11" name="Shape 6"/>
+          <p:cNvSpPr/>
+          <p:nvPr/>
+        </p:nvSpPr>
+        <p:spPr>
+          <a:xfrm>
+            <a:off x="1371600" y="3657600"/>
+            <a:ext cx="1005840" cy="1005840"/>
+          </a:xfrm>
+          <a:prstGeom prst="ellipse">
+            <a:avLst/>
+          </a:prstGeom>
+          <a:solidFill>
+            <a:srgbClr val="A4133C"/>
+          </a:solidFill>
+          <a:ln w="19050">
             <a:solidFill>
               <a:srgbClr val="FF4D6D"/>
             </a:solidFill>
             <a:prstDash val="solid"/>
           </a:ln>
-          <a:effectLst>
-            <a:outerShdw sx="100000" sy="100000" kx="0" ky="0" algn="bl" rotWithShape="0" blurRad="101600" dist="38100" dir="5400000">
-              <a:srgbClr val="8A8A8A">
-                <a:alpha val="35000"/>
-              </a:srgbClr>
-            </a:outerShdw>
-          </a:effectLst>
-        </p:spPr>
-      </p:sp>
-      <p:sp>
-        <p:nvSpPr>
-          <p:cNvPr id="14" name="Shape 9"/>
-          <p:cNvSpPr/>
-          <p:nvPr/>
-        </p:nvSpPr>
-        <p:spPr>
-          <a:xfrm>
-            <a:off x="4983480" y="3657600"/>
-            <a:ext cx="640080" cy="640080"/>
-          </a:xfrm>
-          <a:prstGeom prst="ellipse">
-            <a:avLst/>
-          </a:prstGeom>
-          <a:solidFill>
-            <a:srgbClr val="FFFFFF"/>
-          </a:solidFill>
-          <a:ln/>
         </p:spPr>
       </p:sp>
       <p:pic>
         <p:nvPicPr>
-          <p:cNvPr id="15" name="Image 3" descr="preencoded.png">    </p:cNvPr>
+          <p:cNvPr id="12" name="Image 3" descr="preencoded.png">    </p:cNvPr>
           <p:cNvPicPr>
             <a:picLocks noChangeAspect="1"/>
           </p:cNvPicPr>
@@ -21855,8 +21902,8 @@
         </p:blipFill>
         <p:spPr>
           <a:xfrm>
-            <a:off x="5111496" y="3785616"/>
-            <a:ext cx="384048" cy="384048"/>
+            <a:off x="1609344" y="3895344"/>
+            <a:ext cx="530352" cy="530352"/>
           </a:xfrm>
           <a:prstGeom prst="rect">
             <a:avLst/>
@@ -21865,26 +21912,26 @@
       </p:pic>
       <p:sp>
         <p:nvSpPr>
-          <p:cNvPr id="16" name="Text 10"/>
-          <p:cNvSpPr/>
-          <p:nvPr/>
-        </p:nvSpPr>
-        <p:spPr>
-          <a:xfrm>
-            <a:off x="5760720" y="3493008"/>
-            <a:ext cx="2560320" cy="457200"/>
-          </a:xfrm>
-          <a:prstGeom prst="rect">
-            <a:avLst/>
-          </a:prstGeom>
-          <a:noFill/>
-          <a:ln/>
-        </p:spPr>
-        <p:txBody>
-          <a:bodyPr wrap="square" lIns="0" tIns="0" rIns="0" bIns="0" rtlCol="0" anchor="ctr"/>
-          <a:lstStyle/>
-          <a:p>
-            <a:pPr algn="l" indent="0" marL="0">
+          <p:cNvPr id="13" name="Text 7"/>
+          <p:cNvSpPr/>
+          <p:nvPr/>
+        </p:nvSpPr>
+        <p:spPr>
+          <a:xfrm>
+            <a:off x="548640" y="4818888"/>
+            <a:ext cx="2651760" cy="320040"/>
+          </a:xfrm>
+          <a:prstGeom prst="rect">
+            <a:avLst/>
+          </a:prstGeom>
+          <a:noFill/>
+          <a:ln/>
+        </p:spPr>
+        <p:txBody>
+          <a:bodyPr wrap="square" rtlCol="0" anchor="t"/>
+          <a:lstStyle/>
+          <a:p>
+            <a:pPr algn="ctr" indent="0" marL="0">
               <a:buNone/>
             </a:pPr>
             <a:r>
@@ -21896,7 +21943,7 @@
                 <a:ea typeface="Cambria" pitchFamily="34" charset="-122"/>
                 <a:cs typeface="Cambria" pitchFamily="34" charset="-120"/>
               </a:rPr>
-              <a:t>Discharged home</a:t>
+              <a:t>Admitted</a:t>
             </a:r>
             <a:endParaRPr lang="en-US" sz="1900" dirty="0"/>
           </a:p>
@@ -21904,30 +21951,33 @@
       </p:sp>
       <p:sp>
         <p:nvSpPr>
-          <p:cNvPr id="17" name="Text 11"/>
-          <p:cNvSpPr/>
-          <p:nvPr/>
-        </p:nvSpPr>
-        <p:spPr>
-          <a:xfrm>
-            <a:off x="5760720" y="3950208"/>
-            <a:ext cx="2606040" cy="640080"/>
-          </a:xfrm>
-          <a:prstGeom prst="rect">
-            <a:avLst/>
-          </a:prstGeom>
-          <a:noFill/>
-          <a:ln/>
-        </p:spPr>
-        <p:txBody>
-          <a:bodyPr wrap="square" lIns="0" tIns="0" rIns="0" bIns="0" rtlCol="0" anchor="t"/>
-          <a:lstStyle/>
-          <a:p>
-            <a:pPr algn="l" indent="0" marL="0">
-              <a:buNone/>
-            </a:pPr>
-            <a:r>
-              <a:rPr lang="en-US" sz="1250" i="1" dirty="0">
+          <p:cNvPr id="14" name="Text 8"/>
+          <p:cNvSpPr/>
+          <p:nvPr/>
+        </p:nvSpPr>
+        <p:spPr>
+          <a:xfrm>
+            <a:off x="548640" y="5148072"/>
+            <a:ext cx="2651760" cy="548640"/>
+          </a:xfrm>
+          <a:prstGeom prst="rect">
+            <a:avLst/>
+          </a:prstGeom>
+          <a:noFill/>
+          <a:ln/>
+        </p:spPr>
+        <p:txBody>
+          <a:bodyPr wrap="square" rtlCol="0" anchor="t"/>
+          <a:lstStyle/>
+          <a:p>
+            <a:pPr algn="ctr" indent="0" marL="0">
+              <a:lnSpc>
+                <a:spcPct val="102000"/>
+              </a:lnSpc>
+              <a:buNone/>
+            </a:pPr>
+            <a:r>
+              <a:rPr lang="en-US" sz="1250" dirty="0">
                 <a:solidFill>
                   <a:srgbClr val="FBD8DF"/>
                 </a:solidFill>
@@ -21935,7 +21985,7 @@
                 <a:ea typeface="Calibri" pitchFamily="34" charset="-122"/>
                 <a:cs typeface="Calibri" pitchFamily="34" charset="-120"/>
               </a:rPr>
-              <a:t>Stable for outpatient follow-up</a:t>
+              <a:t>Cardiac emergency</a:t>
             </a:r>
             <a:endParaRPr lang="en-US" sz="1250" dirty="0"/>
           </a:p>
@@ -21943,189 +21993,323 @@
       </p:sp>
       <p:sp>
         <p:nvSpPr>
-          <p:cNvPr id="18" name="Shape 12"/>
-          <p:cNvSpPr/>
-          <p:nvPr/>
-        </p:nvSpPr>
-        <p:spPr>
-          <a:xfrm>
-            <a:off x="731520" y="5486400"/>
-            <a:ext cx="2020824" cy="0"/>
-          </a:xfrm>
-          <a:prstGeom prst="line">
-            <a:avLst/>
-          </a:prstGeom>
-          <a:noFill/>
-          <a:ln w="28575">
+          <p:cNvPr id="15" name="Shape 9"/>
+          <p:cNvSpPr/>
+          <p:nvPr/>
+        </p:nvSpPr>
+        <p:spPr>
+          <a:xfrm>
+            <a:off x="4206240" y="3657600"/>
+            <a:ext cx="1005840" cy="1005840"/>
+          </a:xfrm>
+          <a:prstGeom prst="ellipse">
+            <a:avLst/>
+          </a:prstGeom>
+          <a:solidFill>
+            <a:srgbClr val="A4133C"/>
+          </a:solidFill>
+          <a:ln w="19050">
             <a:solidFill>
-              <a:srgbClr val="FF4D6D">
-                <a:alpha val="95000"/>
-              </a:srgbClr>
+              <a:srgbClr val="FF4D6D"/>
             </a:solidFill>
             <a:prstDash val="solid"/>
           </a:ln>
         </p:spPr>
       </p:sp>
-      <p:sp>
-        <p:nvSpPr>
-          <p:cNvPr id="19" name="Shape 13"/>
-          <p:cNvSpPr/>
-          <p:nvPr/>
-        </p:nvSpPr>
-        <p:spPr>
-          <a:xfrm flipV="1">
-            <a:off x="2752344" y="5340096"/>
-            <a:ext cx="356616" cy="146304"/>
-          </a:xfrm>
-          <a:prstGeom prst="line">
-            <a:avLst/>
-          </a:prstGeom>
-          <a:noFill/>
-          <a:ln w="28575">
+      <p:pic>
+        <p:nvPicPr>
+          <p:cNvPr id="16" name="Image 4" descr="preencoded.png">    </p:cNvPr>
+          <p:cNvPicPr>
+            <a:picLocks noChangeAspect="1"/>
+          </p:cNvPicPr>
+          <p:nvPr/>
+        </p:nvPicPr>
+        <p:blipFill>
+          <a:blip r:embed="rId5"/>
+          <a:stretch>
+            <a:fillRect/>
+          </a:stretch>
+        </p:blipFill>
+        <p:spPr>
+          <a:xfrm>
+            <a:off x="4443984" y="3895344"/>
+            <a:ext cx="530352" cy="530352"/>
+          </a:xfrm>
+          <a:prstGeom prst="rect">
+            <a:avLst/>
+          </a:prstGeom>
+        </p:spPr>
+      </p:pic>
+      <p:sp>
+        <p:nvSpPr>
+          <p:cNvPr id="17" name="Text 10"/>
+          <p:cNvSpPr/>
+          <p:nvPr/>
+        </p:nvSpPr>
+        <p:spPr>
+          <a:xfrm>
+            <a:off x="3383280" y="4818888"/>
+            <a:ext cx="2651760" cy="320040"/>
+          </a:xfrm>
+          <a:prstGeom prst="rect">
+            <a:avLst/>
+          </a:prstGeom>
+          <a:noFill/>
+          <a:ln/>
+        </p:spPr>
+        <p:txBody>
+          <a:bodyPr wrap="square" rtlCol="0" anchor="t"/>
+          <a:lstStyle/>
+          <a:p>
+            <a:pPr algn="ctr" indent="0" marL="0">
+              <a:buNone/>
+            </a:pPr>
+            <a:r>
+              <a:rPr lang="en-US" sz="1900" b="1" dirty="0">
+                <a:solidFill>
+                  <a:srgbClr val="FFFFFF"/>
+                </a:solidFill>
+                <a:latin typeface="Cambria" pitchFamily="34" charset="0"/>
+                <a:ea typeface="Cambria" pitchFamily="34" charset="-122"/>
+                <a:cs typeface="Cambria" pitchFamily="34" charset="-120"/>
+              </a:rPr>
+              <a:t>Treated</a:t>
+            </a:r>
+            <a:endParaRPr lang="en-US" sz="1900" dirty="0"/>
+          </a:p>
+        </p:txBody>
+      </p:sp>
+      <p:sp>
+        <p:nvSpPr>
+          <p:cNvPr id="18" name="Text 11"/>
+          <p:cNvSpPr/>
+          <p:nvPr/>
+        </p:nvSpPr>
+        <p:spPr>
+          <a:xfrm>
+            <a:off x="3383280" y="5148072"/>
+            <a:ext cx="2651760" cy="548640"/>
+          </a:xfrm>
+          <a:prstGeom prst="rect">
+            <a:avLst/>
+          </a:prstGeom>
+          <a:noFill/>
+          <a:ln/>
+        </p:spPr>
+        <p:txBody>
+          <a:bodyPr wrap="square" rtlCol="0" anchor="t"/>
+          <a:lstStyle/>
+          <a:p>
+            <a:pPr algn="ctr" indent="0" marL="0">
+              <a:lnSpc>
+                <a:spcPct val="102000"/>
+              </a:lnSpc>
+              <a:buNone/>
+            </a:pPr>
+            <a:r>
+              <a:rPr lang="en-US" sz="1250" dirty="0">
+                <a:solidFill>
+                  <a:srgbClr val="FBD8DF"/>
+                </a:solidFill>
+                <a:latin typeface="Calibri" pitchFamily="34" charset="0"/>
+                <a:ea typeface="Calibri" pitchFamily="34" charset="-122"/>
+                <a:cs typeface="Calibri" pitchFamily="34" charset="-120"/>
+              </a:rPr>
+              <a:t>IV medication</a:t>
+            </a:r>
+            <a:endParaRPr lang="en-US" sz="1250" dirty="0"/>
+          </a:p>
+        </p:txBody>
+      </p:sp>
+      <p:sp>
+        <p:nvSpPr>
+          <p:cNvPr id="19" name="Shape 12"/>
+          <p:cNvSpPr/>
+          <p:nvPr/>
+        </p:nvSpPr>
+        <p:spPr>
+          <a:xfrm>
+            <a:off x="7040880" y="3657600"/>
+            <a:ext cx="1005840" cy="1005840"/>
+          </a:xfrm>
+          <a:prstGeom prst="ellipse">
+            <a:avLst/>
+          </a:prstGeom>
+          <a:solidFill>
+            <a:srgbClr val="A4133C"/>
+          </a:solidFill>
+          <a:ln w="19050">
             <a:solidFill>
-              <a:srgbClr val="FF4D6D">
-                <a:alpha val="95000"/>
-              </a:srgbClr>
+              <a:srgbClr val="FF4D6D"/>
             </a:solidFill>
             <a:prstDash val="solid"/>
           </a:ln>
         </p:spPr>
       </p:sp>
-      <p:sp>
-        <p:nvSpPr>
-          <p:cNvPr id="20" name="Shape 14"/>
-          <p:cNvSpPr/>
-          <p:nvPr/>
-        </p:nvSpPr>
-        <p:spPr>
-          <a:xfrm>
-            <a:off x="3108960" y="5340096"/>
-            <a:ext cx="356616" cy="457200"/>
-          </a:xfrm>
-          <a:prstGeom prst="line">
-            <a:avLst/>
-          </a:prstGeom>
-          <a:noFill/>
-          <a:ln w="28575">
+      <p:pic>
+        <p:nvPicPr>
+          <p:cNvPr id="20" name="Image 5" descr="preencoded.png">    </p:cNvPr>
+          <p:cNvPicPr>
+            <a:picLocks noChangeAspect="1"/>
+          </p:cNvPicPr>
+          <p:nvPr/>
+        </p:nvPicPr>
+        <p:blipFill>
+          <a:blip r:embed="rId6"/>
+          <a:stretch>
+            <a:fillRect/>
+          </a:stretch>
+        </p:blipFill>
+        <p:spPr>
+          <a:xfrm>
+            <a:off x="7278624" y="3895344"/>
+            <a:ext cx="530352" cy="530352"/>
+          </a:xfrm>
+          <a:prstGeom prst="rect">
+            <a:avLst/>
+          </a:prstGeom>
+        </p:spPr>
+      </p:pic>
+      <p:sp>
+        <p:nvSpPr>
+          <p:cNvPr id="21" name="Text 13"/>
+          <p:cNvSpPr/>
+          <p:nvPr/>
+        </p:nvSpPr>
+        <p:spPr>
+          <a:xfrm>
+            <a:off x="6217920" y="4818888"/>
+            <a:ext cx="2651760" cy="320040"/>
+          </a:xfrm>
+          <a:prstGeom prst="rect">
+            <a:avLst/>
+          </a:prstGeom>
+          <a:noFill/>
+          <a:ln/>
+        </p:spPr>
+        <p:txBody>
+          <a:bodyPr wrap="square" rtlCol="0" anchor="t"/>
+          <a:lstStyle/>
+          <a:p>
+            <a:pPr algn="ctr" indent="0" marL="0">
+              <a:buNone/>
+            </a:pPr>
+            <a:r>
+              <a:rPr lang="en-US" sz="1900" b="1" dirty="0">
+                <a:solidFill>
+                  <a:srgbClr val="FFFFFF"/>
+                </a:solidFill>
+                <a:latin typeface="Cambria" pitchFamily="34" charset="0"/>
+                <a:ea typeface="Cambria" pitchFamily="34" charset="-122"/>
+                <a:cs typeface="Cambria" pitchFamily="34" charset="-120"/>
+              </a:rPr>
+              <a:t>Improved</a:t>
+            </a:r>
+            <a:endParaRPr lang="en-US" sz="1900" dirty="0"/>
+          </a:p>
+        </p:txBody>
+      </p:sp>
+      <p:sp>
+        <p:nvSpPr>
+          <p:cNvPr id="22" name="Text 14"/>
+          <p:cNvSpPr/>
+          <p:nvPr/>
+        </p:nvSpPr>
+        <p:spPr>
+          <a:xfrm>
+            <a:off x="6217920" y="5148072"/>
+            <a:ext cx="2651760" cy="548640"/>
+          </a:xfrm>
+          <a:prstGeom prst="rect">
+            <a:avLst/>
+          </a:prstGeom>
+          <a:noFill/>
+          <a:ln/>
+        </p:spPr>
+        <p:txBody>
+          <a:bodyPr wrap="square" rtlCol="0" anchor="t"/>
+          <a:lstStyle/>
+          <a:p>
+            <a:pPr algn="ctr" indent="0" marL="0">
+              <a:lnSpc>
+                <a:spcPct val="102000"/>
+              </a:lnSpc>
+              <a:buNone/>
+            </a:pPr>
+            <a:r>
+              <a:rPr lang="en-US" sz="1250" dirty="0">
+                <a:solidFill>
+                  <a:srgbClr val="FBD8DF"/>
+                </a:solidFill>
+                <a:latin typeface="Calibri" pitchFamily="34" charset="0"/>
+                <a:ea typeface="Calibri" pitchFamily="34" charset="-122"/>
+                <a:cs typeface="Calibri" pitchFamily="34" charset="-120"/>
+              </a:rPr>
+              <a:t>Rhythm &amp; symptoms settled</a:t>
+            </a:r>
+            <a:endParaRPr lang="en-US" sz="1250" dirty="0"/>
+          </a:p>
+        </p:txBody>
+      </p:sp>
+      <p:sp>
+        <p:nvSpPr>
+          <p:cNvPr id="23" name="Shape 15"/>
+          <p:cNvSpPr/>
+          <p:nvPr/>
+        </p:nvSpPr>
+        <p:spPr>
+          <a:xfrm>
+            <a:off x="9875520" y="3657600"/>
+            <a:ext cx="1005840" cy="1005840"/>
+          </a:xfrm>
+          <a:prstGeom prst="ellipse">
+            <a:avLst/>
+          </a:prstGeom>
+          <a:solidFill>
+            <a:srgbClr val="A4133C"/>
+          </a:solidFill>
+          <a:ln w="19050">
             <a:solidFill>
-              <a:srgbClr val="FF4D6D">
-                <a:alpha val="95000"/>
-              </a:srgbClr>
+              <a:srgbClr val="FF4D6D"/>
             </a:solidFill>
             <a:prstDash val="solid"/>
           </a:ln>
         </p:spPr>
       </p:sp>
-      <p:sp>
-        <p:nvSpPr>
-          <p:cNvPr id="21" name="Shape 15"/>
-          <p:cNvSpPr/>
-          <p:nvPr/>
-        </p:nvSpPr>
-        <p:spPr>
-          <a:xfrm flipV="1">
-            <a:off x="3465576" y="4983480"/>
-            <a:ext cx="356616" cy="813816"/>
-          </a:xfrm>
-          <a:prstGeom prst="line">
-            <a:avLst/>
-          </a:prstGeom>
-          <a:noFill/>
-          <a:ln w="28575">
-            <a:solidFill>
-              <a:srgbClr val="FF4D6D">
-                <a:alpha val="95000"/>
-              </a:srgbClr>
-            </a:solidFill>
-            <a:prstDash val="solid"/>
-          </a:ln>
-        </p:spPr>
-      </p:sp>
-      <p:sp>
-        <p:nvSpPr>
-          <p:cNvPr id="22" name="Shape 16"/>
-          <p:cNvSpPr/>
-          <p:nvPr/>
-        </p:nvSpPr>
-        <p:spPr>
-          <a:xfrm>
-            <a:off x="3822192" y="4983480"/>
-            <a:ext cx="356616" cy="685800"/>
-          </a:xfrm>
-          <a:prstGeom prst="line">
-            <a:avLst/>
-          </a:prstGeom>
-          <a:noFill/>
-          <a:ln w="28575">
-            <a:solidFill>
-              <a:srgbClr val="FF4D6D">
-                <a:alpha val="95000"/>
-              </a:srgbClr>
-            </a:solidFill>
-            <a:prstDash val="solid"/>
-          </a:ln>
-        </p:spPr>
-      </p:sp>
-      <p:sp>
-        <p:nvSpPr>
-          <p:cNvPr id="23" name="Shape 17"/>
-          <p:cNvSpPr/>
-          <p:nvPr/>
-        </p:nvSpPr>
-        <p:spPr>
-          <a:xfrm flipV="1">
-            <a:off x="4178808" y="5486400"/>
-            <a:ext cx="356616" cy="182880"/>
-          </a:xfrm>
-          <a:prstGeom prst="line">
-            <a:avLst/>
-          </a:prstGeom>
-          <a:noFill/>
-          <a:ln w="28575">
-            <a:solidFill>
-              <a:srgbClr val="FF4D6D">
-                <a:alpha val="95000"/>
-              </a:srgbClr>
-            </a:solidFill>
-            <a:prstDash val="solid"/>
-          </a:ln>
-        </p:spPr>
-      </p:sp>
-      <p:sp>
-        <p:nvSpPr>
-          <p:cNvPr id="24" name="Shape 18"/>
-          <p:cNvSpPr/>
-          <p:nvPr/>
-        </p:nvSpPr>
-        <p:spPr>
-          <a:xfrm>
-            <a:off x="4535424" y="5486400"/>
-            <a:ext cx="2139696" cy="0"/>
-          </a:xfrm>
-          <a:prstGeom prst="line">
-            <a:avLst/>
-          </a:prstGeom>
-          <a:noFill/>
-          <a:ln w="28575">
-            <a:solidFill>
-              <a:srgbClr val="FF4D6D">
-                <a:alpha val="95000"/>
-              </a:srgbClr>
-            </a:solidFill>
-            <a:prstDash val="solid"/>
-          </a:ln>
-        </p:spPr>
-      </p:sp>
-      <p:sp>
-        <p:nvSpPr>
-          <p:cNvPr id="25" name="Text 19"/>
-          <p:cNvSpPr/>
-          <p:nvPr/>
-        </p:nvSpPr>
-        <p:spPr>
-          <a:xfrm>
-            <a:off x="685800" y="5715000"/>
-            <a:ext cx="5486400" cy="548640"/>
+      <p:pic>
+        <p:nvPicPr>
+          <p:cNvPr id="24" name="Image 6" descr="preencoded.png">    </p:cNvPr>
+          <p:cNvPicPr>
+            <a:picLocks noChangeAspect="1"/>
+          </p:cNvPicPr>
+          <p:nvPr/>
+        </p:nvPicPr>
+        <p:blipFill>
+          <a:blip r:embed="rId7"/>
+          <a:stretch>
+            <a:fillRect/>
+          </a:stretch>
+        </p:blipFill>
+        <p:spPr>
+          <a:xfrm>
+            <a:off x="10113264" y="3895344"/>
+            <a:ext cx="530352" cy="530352"/>
+          </a:xfrm>
+          <a:prstGeom prst="rect">
+            <a:avLst/>
+          </a:prstGeom>
+        </p:spPr>
+      </p:pic>
+      <p:sp>
+        <p:nvSpPr>
+          <p:cNvPr id="25" name="Text 16"/>
+          <p:cNvSpPr/>
+          <p:nvPr/>
+        </p:nvSpPr>
+        <p:spPr>
+          <a:xfrm>
+            <a:off x="9052560" y="4818888"/>
+            <a:ext cx="2651760" cy="320040"/>
           </a:xfrm>
           <a:prstGeom prst="rect">
             <a:avLst/>
@@ -22137,27 +22321,108 @@
           <a:bodyPr wrap="square" rtlCol="0" anchor="t"/>
           <a:lstStyle/>
           <a:p>
-            <a:pPr algn="l" indent="0" marL="0">
-              <a:buNone/>
-            </a:pPr>
-            <a:r>
-              <a:rPr lang="en-US" sz="2600" b="1" i="1" dirty="0">
-                <a:solidFill>
-                  <a:srgbClr val="FBD8DF"/>
+            <a:pPr algn="ctr" indent="0" marL="0">
+              <a:buNone/>
+            </a:pPr>
+            <a:r>
+              <a:rPr lang="en-US" sz="1900" b="1" dirty="0">
+                <a:solidFill>
+                  <a:srgbClr val="FFFFFF"/>
                 </a:solidFill>
                 <a:latin typeface="Cambria" pitchFamily="34" charset="0"/>
                 <a:ea typeface="Cambria" pitchFamily="34" charset="-122"/>
                 <a:cs typeface="Cambria" pitchFamily="34" charset="-120"/>
               </a:rPr>
+              <a:t>Discharged</a:t>
+            </a:r>
+            <a:endParaRPr lang="en-US" sz="1900" dirty="0"/>
+          </a:p>
+        </p:txBody>
+      </p:sp>
+      <p:sp>
+        <p:nvSpPr>
+          <p:cNvPr id="26" name="Text 17"/>
+          <p:cNvSpPr/>
+          <p:nvPr/>
+        </p:nvSpPr>
+        <p:spPr>
+          <a:xfrm>
+            <a:off x="9052560" y="5148072"/>
+            <a:ext cx="2651760" cy="548640"/>
+          </a:xfrm>
+          <a:prstGeom prst="rect">
+            <a:avLst/>
+          </a:prstGeom>
+          <a:noFill/>
+          <a:ln/>
+        </p:spPr>
+        <p:txBody>
+          <a:bodyPr wrap="square" rtlCol="0" anchor="t"/>
+          <a:lstStyle/>
+          <a:p>
+            <a:pPr algn="ctr" indent="0" marL="0">
+              <a:lnSpc>
+                <a:spcPct val="102000"/>
+              </a:lnSpc>
+              <a:buNone/>
+            </a:pPr>
+            <a:r>
+              <a:rPr lang="en-US" sz="1250" dirty="0">
+                <a:solidFill>
+                  <a:srgbClr val="FBD8DF"/>
+                </a:solidFill>
+                <a:latin typeface="Calibri" pitchFamily="34" charset="0"/>
+                <a:ea typeface="Calibri" pitchFamily="34" charset="-122"/>
+                <a:cs typeface="Calibri" pitchFamily="34" charset="-120"/>
+              </a:rPr>
+              <a:t>Home for follow-up</a:t>
+            </a:r>
+            <a:endParaRPr lang="en-US" sz="1250" dirty="0"/>
+          </a:p>
+        </p:txBody>
+      </p:sp>
+      <p:sp>
+        <p:nvSpPr>
+          <p:cNvPr id="27" name="Text 18"/>
+          <p:cNvSpPr/>
+          <p:nvPr/>
+        </p:nvSpPr>
+        <p:spPr>
+          <a:xfrm>
+            <a:off x="685800" y="5943600"/>
+            <a:ext cx="5486400" cy="411480"/>
+          </a:xfrm>
+          <a:prstGeom prst="rect">
+            <a:avLst/>
+          </a:prstGeom>
+          <a:noFill/>
+          <a:ln/>
+        </p:spPr>
+        <p:txBody>
+          <a:bodyPr wrap="square" rtlCol="0" anchor="t"/>
+          <a:lstStyle/>
+          <a:p>
+            <a:pPr algn="l" indent="0" marL="0">
+              <a:buNone/>
+            </a:pPr>
+            <a:r>
+              <a:rPr lang="en-US" sz="2400" b="1" i="1" dirty="0">
+                <a:solidFill>
+                  <a:srgbClr val="FBD8DF"/>
+                </a:solidFill>
+                <a:latin typeface="Cambria" pitchFamily="34" charset="0"/>
+                <a:ea typeface="Cambria" pitchFamily="34" charset="-122"/>
+                <a:cs typeface="Cambria" pitchFamily="34" charset="-120"/>
+              </a:rPr>
               <a:t>Thank you</a:t>
             </a:r>
-            <a:endParaRPr lang="en-US" sz="2600" dirty="0"/>
-          </a:p>
-        </p:txBody>
-      </p:sp>
-      <p:sp>
-        <p:nvSpPr>
-          <p:cNvPr id="26" name="Text 20"/>
+            <a:endParaRPr lang="en-US" sz="2400" dirty="0"/>
+          </a:p>
+        </p:txBody>
+      </p:sp>
+      <p:sp>
+        <p:nvSpPr>
+          <p:cNvPr id="28" name="Text 19"/>
           <p:cNvSpPr/>
           <p:nvPr/>
         </p:nvSpPr>
@@ -22196,7 +22461,7 @@
       </p:sp>
       <p:sp>
         <p:nvSpPr>
-          <p:cNvPr id="27" name="Text 21"/>
+          <p:cNvPr id="29" name="Text 20"/>
           <p:cNvSpPr/>
           <p:nvPr/>
         </p:nvSpPr>

--- a/presentations/Clinicopathological-Conference.pptx
+++ b/presentations/Clinicopathological-Conference.pptx
@@ -4708,11 +4708,11 @@
         <p:spPr>
           <a:xfrm>
             <a:off x="4937760" y="1783080"/>
-            <a:ext cx="6766560" cy="822960"/>
+            <a:ext cx="6766560" cy="777240"/>
           </a:xfrm>
           <a:prstGeom prst="roundRect">
             <a:avLst>
-              <a:gd name="adj" fmla="val 11111"/>
+              <a:gd name="adj" fmla="val 11765"/>
             </a:avLst>
           </a:prstGeom>
           <a:solidFill>
@@ -4741,7 +4741,7 @@
         </p:nvSpPr>
         <p:spPr>
           <a:xfrm>
-            <a:off x="5212080" y="1920240"/>
+            <a:off x="5212080" y="1901952"/>
             <a:ext cx="548640" cy="548640"/>
           </a:xfrm>
           <a:prstGeom prst="ellipse">
@@ -4774,7 +4774,7 @@
         </p:blipFill>
         <p:spPr>
           <a:xfrm>
-            <a:off x="5349240" y="2057400"/>
+            <a:off x="5349240" y="2039112"/>
             <a:ext cx="274320" cy="274320"/>
           </a:xfrm>
           <a:prstGeom prst="rect">
@@ -4790,8 +4790,8 @@
         </p:nvSpPr>
         <p:spPr>
           <a:xfrm>
-            <a:off x="5925312" y="1929384"/>
-            <a:ext cx="5486400" cy="256032"/>
+            <a:off x="5925312" y="1901952"/>
+            <a:ext cx="5577840" cy="237744"/>
           </a:xfrm>
           <a:prstGeom prst="rect">
             <a:avLst/>
@@ -4807,7 +4807,7 @@
               <a:buNone/>
             </a:pPr>
             <a:r>
-              <a:rPr lang="en-US" sz="1200" b="1" spc="120" kern="0" dirty="0">
+              <a:rPr lang="en-US" sz="1150" b="1" spc="120" kern="0" dirty="0">
                 <a:solidFill>
                   <a:srgbClr val="A4133C"/>
                 </a:solidFill>
@@ -4817,7 +4817,7 @@
               </a:rPr>
               <a:t>INSPECTION</a:t>
             </a:r>
-            <a:endParaRPr lang="en-US" sz="1200" dirty="0"/>
+            <a:endParaRPr lang="en-US" sz="1150" dirty="0"/>
           </a:p>
         </p:txBody>
       </p:sp>
@@ -4829,24 +4829,27 @@
         </p:nvSpPr>
         <p:spPr>
           <a:xfrm>
-            <a:off x="5925312" y="2185416"/>
-            <a:ext cx="5486400" cy="310896"/>
-          </a:xfrm>
-          <a:prstGeom prst="rect">
-            <a:avLst/>
-          </a:prstGeom>
-          <a:noFill/>
-          <a:ln/>
-        </p:spPr>
-        <p:txBody>
-          <a:bodyPr wrap="square" lIns="0" tIns="0" rIns="0" bIns="0" rtlCol="0" anchor="ctr"/>
-          <a:lstStyle/>
-          <a:p>
-            <a:pPr algn="l" indent="0" marL="0">
-              <a:buNone/>
-            </a:pPr>
-            <a:r>
-              <a:rPr lang="en-US" sz="1700" b="1" dirty="0">
+            <a:off x="5925312" y="2148840"/>
+            <a:ext cx="5532120" cy="365760"/>
+          </a:xfrm>
+          <a:prstGeom prst="rect">
+            <a:avLst/>
+          </a:prstGeom>
+          <a:noFill/>
+          <a:ln/>
+        </p:spPr>
+        <p:txBody>
+          <a:bodyPr wrap="square" lIns="0" tIns="0" rIns="0" bIns="0" rtlCol="0" anchor="t"/>
+          <a:lstStyle/>
+          <a:p>
+            <a:pPr algn="l" indent="0" marL="0">
+              <a:lnSpc>
+                <a:spcPct val="100000"/>
+              </a:lnSpc>
+              <a:buNone/>
+            </a:pPr>
+            <a:r>
+              <a:rPr lang="en-US" sz="1350" b="1" dirty="0">
                 <a:solidFill>
                   <a:srgbClr val="2B2B33"/>
                 </a:solidFill>
@@ -4854,9 +4857,9 @@
                 <a:ea typeface="Cambria" pitchFamily="34" charset="-122"/>
                 <a:cs typeface="Cambria" pitchFamily="34" charset="-120"/>
               </a:rPr>
-              <a:t>No visible pulsations or striae marks</a:t>
-            </a:r>
-            <a:endParaRPr lang="en-US" sz="1700" dirty="0"/>
+              <a:t>Shape normal, no scar, no pulsations visible over the precordium</a:t>
+            </a:r>
+            <a:endParaRPr lang="en-US" sz="1350" dirty="0"/>
           </a:p>
         </p:txBody>
       </p:sp>
@@ -4868,12 +4871,12 @@
         </p:nvSpPr>
         <p:spPr>
           <a:xfrm>
-            <a:off x="4937760" y="2715768"/>
-            <a:ext cx="6766560" cy="822960"/>
+            <a:off x="4937760" y="2651760"/>
+            <a:ext cx="6766560" cy="1554480"/>
           </a:xfrm>
           <a:prstGeom prst="roundRect">
             <a:avLst>
-              <a:gd name="adj" fmla="val 11111"/>
+              <a:gd name="adj" fmla="val 5882"/>
             </a:avLst>
           </a:prstGeom>
           <a:solidFill>
@@ -4902,7 +4905,7 @@
         </p:nvSpPr>
         <p:spPr>
           <a:xfrm>
-            <a:off x="5212080" y="2852928"/>
+            <a:off x="5212080" y="2816352"/>
             <a:ext cx="548640" cy="548640"/>
           </a:xfrm>
           <a:prstGeom prst="ellipse">
@@ -4935,7 +4938,7 @@
         </p:blipFill>
         <p:spPr>
           <a:xfrm>
-            <a:off x="5349240" y="2990088"/>
+            <a:off x="5349240" y="2953512"/>
             <a:ext cx="274320" cy="274320"/>
           </a:xfrm>
           <a:prstGeom prst="rect">
@@ -4951,8 +4954,8 @@
         </p:nvSpPr>
         <p:spPr>
           <a:xfrm>
-            <a:off x="5925312" y="2862072"/>
-            <a:ext cx="5486400" cy="256032"/>
+            <a:off x="5925312" y="2852928"/>
+            <a:ext cx="5577840" cy="274320"/>
           </a:xfrm>
           <a:prstGeom prst="rect">
             <a:avLst/>
@@ -4984,57 +4987,204 @@
       </p:sp>
       <p:sp>
         <p:nvSpPr>
-          <p:cNvPr id="26" name="Text 20"/>
-          <p:cNvSpPr/>
-          <p:nvPr/>
-        </p:nvSpPr>
-        <p:spPr>
-          <a:xfrm>
-            <a:off x="5925312" y="3118104"/>
-            <a:ext cx="5486400" cy="310896"/>
-          </a:xfrm>
-          <a:prstGeom prst="rect">
-            <a:avLst/>
-          </a:prstGeom>
-          <a:noFill/>
-          <a:ln/>
-        </p:spPr>
-        <p:txBody>
-          <a:bodyPr wrap="square" lIns="0" tIns="0" rIns="0" bIns="0" rtlCol="0" anchor="ctr"/>
-          <a:lstStyle/>
-          <a:p>
-            <a:pPr algn="l" indent="0" marL="0">
-              <a:buNone/>
-            </a:pPr>
-            <a:r>
-              <a:rPr lang="en-US" sz="1700" b="1" dirty="0">
+          <p:cNvPr id="26" name="Shape 20"/>
+          <p:cNvSpPr/>
+          <p:nvPr/>
+        </p:nvSpPr>
+        <p:spPr>
+          <a:xfrm>
+            <a:off x="5394960" y="3255264"/>
+            <a:ext cx="118872" cy="118872"/>
+          </a:xfrm>
+          <a:prstGeom prst="ellipse">
+            <a:avLst/>
+          </a:prstGeom>
+          <a:solidFill>
+            <a:srgbClr val="FF4D6D"/>
+          </a:solidFill>
+          <a:ln/>
+        </p:spPr>
+      </p:sp>
+      <p:sp>
+        <p:nvSpPr>
+          <p:cNvPr id="27" name="Text 21"/>
+          <p:cNvSpPr/>
+          <p:nvPr/>
+        </p:nvSpPr>
+        <p:spPr>
+          <a:xfrm>
+            <a:off x="5669280" y="3182112"/>
+            <a:ext cx="5623560" cy="420624"/>
+          </a:xfrm>
+          <a:prstGeom prst="rect">
+            <a:avLst/>
+          </a:prstGeom>
+          <a:noFill/>
+          <a:ln/>
+        </p:spPr>
+        <p:txBody>
+          <a:bodyPr wrap="square" lIns="0" tIns="0" rIns="0" bIns="0" rtlCol="0" anchor="t"/>
+          <a:lstStyle/>
+          <a:p>
+            <a:pPr algn="l" indent="0" marL="0">
+              <a:lnSpc>
+                <a:spcPct val="100000"/>
+              </a:lnSpc>
+              <a:buNone/>
+            </a:pPr>
+            <a:r>
+              <a:rPr lang="en-US" sz="1250" dirty="0">
                 <a:solidFill>
                   <a:srgbClr val="2B2B33"/>
                 </a:solidFill>
-                <a:latin typeface="Cambria" pitchFamily="34" charset="0"/>
-                <a:ea typeface="Cambria" pitchFamily="34" charset="-122"/>
-                <a:cs typeface="Cambria" pitchFamily="34" charset="-120"/>
-              </a:rPr>
-              <a:t>Normal</a:t>
-            </a:r>
-            <a:endParaRPr lang="en-US" sz="1700" dirty="0"/>
-          </a:p>
-        </p:txBody>
-      </p:sp>
-      <p:sp>
-        <p:nvSpPr>
-          <p:cNvPr id="27" name="Shape 21"/>
-          <p:cNvSpPr/>
-          <p:nvPr/>
-        </p:nvSpPr>
-        <p:spPr>
-          <a:xfrm>
-            <a:off x="4937760" y="3703320"/>
-            <a:ext cx="6766560" cy="2286000"/>
+                <a:latin typeface="Calibri" pitchFamily="34" charset="0"/>
+                <a:ea typeface="Calibri" pitchFamily="34" charset="-122"/>
+                <a:cs typeface="Calibri" pitchFamily="34" charset="-120"/>
+              </a:rPr>
+              <a:t>Apex beat in 5th intercostal space, medial to midclavicular line — normal character</a:t>
+            </a:r>
+            <a:endParaRPr lang="en-US" sz="1250" dirty="0"/>
+          </a:p>
+        </p:txBody>
+      </p:sp>
+      <p:sp>
+        <p:nvSpPr>
+          <p:cNvPr id="28" name="Shape 22"/>
+          <p:cNvSpPr/>
+          <p:nvPr/>
+        </p:nvSpPr>
+        <p:spPr>
+          <a:xfrm>
+            <a:off x="5394960" y="3712464"/>
+            <a:ext cx="118872" cy="118872"/>
+          </a:xfrm>
+          <a:prstGeom prst="ellipse">
+            <a:avLst/>
+          </a:prstGeom>
+          <a:solidFill>
+            <a:srgbClr val="FF4D6D"/>
+          </a:solidFill>
+          <a:ln/>
+        </p:spPr>
+      </p:sp>
+      <p:sp>
+        <p:nvSpPr>
+          <p:cNvPr id="29" name="Text 23"/>
+          <p:cNvSpPr/>
+          <p:nvPr/>
+        </p:nvSpPr>
+        <p:spPr>
+          <a:xfrm>
+            <a:off x="5669280" y="3639312"/>
+            <a:ext cx="5623560" cy="420624"/>
+          </a:xfrm>
+          <a:prstGeom prst="rect">
+            <a:avLst/>
+          </a:prstGeom>
+          <a:noFill/>
+          <a:ln/>
+        </p:spPr>
+        <p:txBody>
+          <a:bodyPr wrap="square" lIns="0" tIns="0" rIns="0" bIns="0" rtlCol="0" anchor="t"/>
+          <a:lstStyle/>
+          <a:p>
+            <a:pPr algn="l" indent="0" marL="0">
+              <a:lnSpc>
+                <a:spcPct val="100000"/>
+              </a:lnSpc>
+              <a:buNone/>
+            </a:pPr>
+            <a:r>
+              <a:rPr lang="en-US" sz="1250" dirty="0">
+                <a:solidFill>
+                  <a:srgbClr val="2B2B33"/>
+                </a:solidFill>
+                <a:latin typeface="Calibri" pitchFamily="34" charset="0"/>
+                <a:ea typeface="Calibri" pitchFamily="34" charset="-122"/>
+                <a:cs typeface="Calibri" pitchFamily="34" charset="-120"/>
+              </a:rPr>
+              <a:t>No thrill; no other palpable sounds</a:t>
+            </a:r>
+            <a:endParaRPr lang="en-US" sz="1250" dirty="0"/>
+          </a:p>
+        </p:txBody>
+      </p:sp>
+      <p:sp>
+        <p:nvSpPr>
+          <p:cNvPr id="30" name="Shape 24"/>
+          <p:cNvSpPr/>
+          <p:nvPr/>
+        </p:nvSpPr>
+        <p:spPr>
+          <a:xfrm>
+            <a:off x="5394960" y="4023360"/>
+            <a:ext cx="118872" cy="118872"/>
+          </a:xfrm>
+          <a:prstGeom prst="ellipse">
+            <a:avLst/>
+          </a:prstGeom>
+          <a:solidFill>
+            <a:srgbClr val="FF4D6D"/>
+          </a:solidFill>
+          <a:ln/>
+        </p:spPr>
+      </p:sp>
+      <p:sp>
+        <p:nvSpPr>
+          <p:cNvPr id="31" name="Text 25"/>
+          <p:cNvSpPr/>
+          <p:nvPr/>
+        </p:nvSpPr>
+        <p:spPr>
+          <a:xfrm>
+            <a:off x="5669280" y="3950208"/>
+            <a:ext cx="5623560" cy="420624"/>
+          </a:xfrm>
+          <a:prstGeom prst="rect">
+            <a:avLst/>
+          </a:prstGeom>
+          <a:noFill/>
+          <a:ln/>
+        </p:spPr>
+        <p:txBody>
+          <a:bodyPr wrap="square" lIns="0" tIns="0" rIns="0" bIns="0" rtlCol="0" anchor="t"/>
+          <a:lstStyle/>
+          <a:p>
+            <a:pPr algn="l" indent="0" marL="0">
+              <a:lnSpc>
+                <a:spcPct val="100000"/>
+              </a:lnSpc>
+              <a:buNone/>
+            </a:pPr>
+            <a:r>
+              <a:rPr lang="en-US" sz="1250" dirty="0">
+                <a:solidFill>
+                  <a:srgbClr val="2B2B33"/>
+                </a:solidFill>
+                <a:latin typeface="Calibri" pitchFamily="34" charset="0"/>
+                <a:ea typeface="Calibri" pitchFamily="34" charset="-122"/>
+                <a:cs typeface="Calibri" pitchFamily="34" charset="-120"/>
+              </a:rPr>
+              <a:t>No left parasternal heave</a:t>
+            </a:r>
+            <a:endParaRPr lang="en-US" sz="1250" dirty="0"/>
+          </a:p>
+        </p:txBody>
+      </p:sp>
+      <p:sp>
+        <p:nvSpPr>
+          <p:cNvPr id="32" name="Shape 26"/>
+          <p:cNvSpPr/>
+          <p:nvPr/>
+        </p:nvSpPr>
+        <p:spPr>
+          <a:xfrm>
+            <a:off x="4937760" y="4297680"/>
+            <a:ext cx="6766560" cy="1691640"/>
           </a:xfrm>
           <a:prstGeom prst="roundRect">
             <a:avLst>
-              <a:gd name="adj" fmla="val 4000"/>
+              <a:gd name="adj" fmla="val 5405"/>
             </a:avLst>
           </a:prstGeom>
           <a:solidFill>
@@ -5057,14 +5207,14 @@
       </p:sp>
       <p:sp>
         <p:nvSpPr>
-          <p:cNvPr id="28" name="Shape 22"/>
-          <p:cNvSpPr/>
-          <p:nvPr/>
-        </p:nvSpPr>
-        <p:spPr>
-          <a:xfrm>
-            <a:off x="5212080" y="3941064"/>
-            <a:ext cx="603504" cy="603504"/>
+          <p:cNvPr id="33" name="Shape 27"/>
+          <p:cNvSpPr/>
+          <p:nvPr/>
+        </p:nvSpPr>
+        <p:spPr>
+          <a:xfrm>
+            <a:off x="5212080" y="4462272"/>
+            <a:ext cx="548640" cy="548640"/>
           </a:xfrm>
           <a:prstGeom prst="ellipse">
             <a:avLst/>
@@ -5082,7 +5232,7 @@
       </p:sp>
       <p:pic>
         <p:nvPicPr>
-          <p:cNvPr id="29" name="Image 4" descr="preencoded.png">    </p:cNvPr>
+          <p:cNvPr id="34" name="Image 4" descr="preencoded.png">    </p:cNvPr>
           <p:cNvPicPr>
             <a:picLocks noChangeAspect="1"/>
           </p:cNvPicPr>
@@ -5096,8 +5246,8 @@
         </p:blipFill>
         <p:spPr>
           <a:xfrm>
-            <a:off x="5367528" y="4096512"/>
-            <a:ext cx="292608" cy="292608"/>
+            <a:off x="5349240" y="4599432"/>
+            <a:ext cx="274320" cy="274320"/>
           </a:xfrm>
           <a:prstGeom prst="rect">
             <a:avLst/>
@@ -5106,14 +5256,14 @@
       </p:pic>
       <p:sp>
         <p:nvSpPr>
-          <p:cNvPr id="30" name="Text 23"/>
-          <p:cNvSpPr/>
-          <p:nvPr/>
-        </p:nvSpPr>
-        <p:spPr>
-          <a:xfrm>
-            <a:off x="5961888" y="4041648"/>
-            <a:ext cx="5486400" cy="292608"/>
+          <p:cNvPr id="35" name="Text 28"/>
+          <p:cNvSpPr/>
+          <p:nvPr/>
+        </p:nvSpPr>
+        <p:spPr>
+          <a:xfrm>
+            <a:off x="5925312" y="4498848"/>
+            <a:ext cx="5577840" cy="274320"/>
           </a:xfrm>
           <a:prstGeom prst="rect">
             <a:avLst/>
@@ -5129,7 +5279,7 @@
               <a:buNone/>
             </a:pPr>
             <a:r>
-              <a:rPr lang="en-US" sz="1250" b="1" spc="120" kern="0" dirty="0">
+              <a:rPr lang="en-US" sz="1200" b="1" spc="120" kern="0" dirty="0">
                 <a:solidFill>
                   <a:srgbClr val="A4133C"/>
                 </a:solidFill>
@@ -5139,20 +5289,20 @@
               </a:rPr>
               <a:t>AUSCULTATION</a:t>
             </a:r>
-            <a:endParaRPr lang="en-US" sz="1250" dirty="0"/>
-          </a:p>
-        </p:txBody>
-      </p:sp>
-      <p:sp>
-        <p:nvSpPr>
-          <p:cNvPr id="31" name="Shape 24"/>
-          <p:cNvSpPr/>
-          <p:nvPr/>
-        </p:nvSpPr>
-        <p:spPr>
-          <a:xfrm>
-            <a:off x="5394960" y="4718304"/>
-            <a:ext cx="128016" cy="128016"/>
+            <a:endParaRPr lang="en-US" sz="1200" dirty="0"/>
+          </a:p>
+        </p:txBody>
+      </p:sp>
+      <p:sp>
+        <p:nvSpPr>
+          <p:cNvPr id="36" name="Shape 29"/>
+          <p:cNvSpPr/>
+          <p:nvPr/>
+        </p:nvSpPr>
+        <p:spPr>
+          <a:xfrm>
+            <a:off x="5394960" y="4901184"/>
+            <a:ext cx="118872" cy="118872"/>
           </a:xfrm>
           <a:prstGeom prst="ellipse">
             <a:avLst/>
@@ -5165,14 +5315,14 @@
       </p:sp>
       <p:sp>
         <p:nvSpPr>
-          <p:cNvPr id="32" name="Text 25"/>
-          <p:cNvSpPr/>
-          <p:nvPr/>
-        </p:nvSpPr>
-        <p:spPr>
-          <a:xfrm>
-            <a:off x="5687568" y="4636008"/>
-            <a:ext cx="5596128" cy="457200"/>
+          <p:cNvPr id="37" name="Text 30"/>
+          <p:cNvSpPr/>
+          <p:nvPr/>
+        </p:nvSpPr>
+        <p:spPr>
+          <a:xfrm>
+            <a:off x="5669280" y="4828032"/>
+            <a:ext cx="5623560" cy="420624"/>
           </a:xfrm>
           <a:prstGeom prst="rect">
             <a:avLst/>
@@ -5207,14 +5357,14 @@
       </p:sp>
       <p:sp>
         <p:nvSpPr>
-          <p:cNvPr id="33" name="Shape 26"/>
-          <p:cNvSpPr/>
-          <p:nvPr/>
-        </p:nvSpPr>
-        <p:spPr>
-          <a:xfrm>
-            <a:off x="5394960" y="5175504"/>
-            <a:ext cx="128016" cy="128016"/>
+          <p:cNvPr id="38" name="Shape 31"/>
+          <p:cNvSpPr/>
+          <p:nvPr/>
+        </p:nvSpPr>
+        <p:spPr>
+          <a:xfrm>
+            <a:off x="5394960" y="5340096"/>
+            <a:ext cx="118872" cy="118872"/>
           </a:xfrm>
           <a:prstGeom prst="ellipse">
             <a:avLst/>
@@ -5227,14 +5377,14 @@
       </p:sp>
       <p:sp>
         <p:nvSpPr>
-          <p:cNvPr id="34" name="Text 27"/>
-          <p:cNvSpPr/>
-          <p:nvPr/>
-        </p:nvSpPr>
-        <p:spPr>
-          <a:xfrm>
-            <a:off x="5687568" y="5093208"/>
-            <a:ext cx="5596128" cy="457200"/>
+          <p:cNvPr id="39" name="Text 32"/>
+          <p:cNvSpPr/>
+          <p:nvPr/>
+        </p:nvSpPr>
+        <p:spPr>
+          <a:xfrm>
+            <a:off x="5669280" y="5266944"/>
+            <a:ext cx="5623560" cy="420624"/>
           </a:xfrm>
           <a:prstGeom prst="rect">
             <a:avLst/>
@@ -5269,14 +5419,14 @@
       </p:sp>
       <p:sp>
         <p:nvSpPr>
-          <p:cNvPr id="35" name="Shape 28"/>
-          <p:cNvSpPr/>
-          <p:nvPr/>
-        </p:nvSpPr>
-        <p:spPr>
-          <a:xfrm>
-            <a:off x="5394960" y="5632704"/>
-            <a:ext cx="128016" cy="128016"/>
+          <p:cNvPr id="40" name="Shape 33"/>
+          <p:cNvSpPr/>
+          <p:nvPr/>
+        </p:nvSpPr>
+        <p:spPr>
+          <a:xfrm>
+            <a:off x="5394960" y="5779008"/>
+            <a:ext cx="118872" cy="118872"/>
           </a:xfrm>
           <a:prstGeom prst="ellipse">
             <a:avLst/>
@@ -5289,14 +5439,14 @@
       </p:sp>
       <p:sp>
         <p:nvSpPr>
-          <p:cNvPr id="36" name="Text 29"/>
-          <p:cNvSpPr/>
-          <p:nvPr/>
-        </p:nvSpPr>
-        <p:spPr>
-          <a:xfrm>
-            <a:off x="5687568" y="5550408"/>
-            <a:ext cx="5596128" cy="457200"/>
+          <p:cNvPr id="41" name="Text 34"/>
+          <p:cNvSpPr/>
+          <p:nvPr/>
+        </p:nvSpPr>
+        <p:spPr>
+          <a:xfrm>
+            <a:off x="5669280" y="5705856"/>
+            <a:ext cx="5623560" cy="420624"/>
           </a:xfrm>
           <a:prstGeom prst="rect">
             <a:avLst/>
@@ -5331,7 +5481,7 @@
       </p:sp>
       <p:sp>
         <p:nvSpPr>
-          <p:cNvPr id="37" name="Text 30"/>
+          <p:cNvPr id="42" name="Text 35"/>
           <p:cNvSpPr/>
           <p:nvPr/>
         </p:nvSpPr>
@@ -5370,7 +5520,7 @@
       </p:sp>
       <p:sp>
         <p:nvSpPr>
-          <p:cNvPr id="38" name="Text 31"/>
+          <p:cNvPr id="43" name="Text 36"/>
           <p:cNvSpPr/>
           <p:nvPr/>
         </p:nvSpPr>

--- a/presentations/Clinicopathological-Conference.pptx
+++ b/presentations/Clinicopathological-Conference.pptx
@@ -3567,12 +3567,12 @@
         </p:nvSpPr>
         <p:spPr>
           <a:xfrm>
-            <a:off x="502920" y="1920240"/>
-            <a:ext cx="3611880" cy="4023360"/>
+            <a:off x="502920" y="1463040"/>
+            <a:ext cx="2084832" cy="1261872"/>
           </a:xfrm>
           <a:prstGeom prst="roundRect">
             <a:avLst>
-              <a:gd name="adj" fmla="val 3038"/>
+              <a:gd name="adj" fmla="val 7246"/>
             </a:avLst>
           </a:prstGeom>
           <a:solidFill>
@@ -3595,63 +3595,14 @@
       </p:sp>
       <p:sp>
         <p:nvSpPr>
-          <p:cNvPr id="7" name="Shape 4"/>
-          <p:cNvSpPr/>
-          <p:nvPr/>
-        </p:nvSpPr>
-        <p:spPr>
-          <a:xfrm>
-            <a:off x="868680" y="2331720"/>
-            <a:ext cx="1051560" cy="1051560"/>
-          </a:xfrm>
-          <a:prstGeom prst="ellipse">
-            <a:avLst/>
-          </a:prstGeom>
-          <a:solidFill>
-            <a:srgbClr val="FFFFFF"/>
-          </a:solidFill>
-          <a:ln w="12700">
-            <a:solidFill>
-              <a:srgbClr val="FBD8DF"/>
-            </a:solidFill>
-            <a:prstDash val="solid"/>
-          </a:ln>
-        </p:spPr>
-      </p:sp>
-      <p:pic>
-        <p:nvPicPr>
-          <p:cNvPr id="8" name="Image 1" descr="preencoded.png">    </p:cNvPr>
-          <p:cNvPicPr>
-            <a:picLocks noChangeAspect="1"/>
-          </p:cNvPicPr>
-          <p:nvPr/>
-        </p:nvPicPr>
-        <p:blipFill>
-          <a:blip r:embed="rId2"/>
-          <a:stretch>
-            <a:fillRect/>
-          </a:stretch>
-        </p:blipFill>
-        <p:spPr>
-          <a:xfrm>
-            <a:off x="1161288" y="2624328"/>
-            <a:ext cx="466344" cy="466344"/>
-          </a:xfrm>
-          <a:prstGeom prst="rect">
-            <a:avLst/>
-          </a:prstGeom>
-        </p:spPr>
-      </p:pic>
-      <p:sp>
-        <p:nvSpPr>
-          <p:cNvPr id="9" name="Text 5"/>
-          <p:cNvSpPr/>
-          <p:nvPr/>
-        </p:nvSpPr>
-        <p:spPr>
-          <a:xfrm>
-            <a:off x="3063240" y="2286000"/>
-            <a:ext cx="822960" cy="640080"/>
+          <p:cNvPr id="7" name="Text 4"/>
+          <p:cNvSpPr/>
+          <p:nvPr/>
+        </p:nvSpPr>
+        <p:spPr>
+          <a:xfrm>
+            <a:off x="612648" y="1609344"/>
+            <a:ext cx="1865376" cy="237744"/>
           </a:xfrm>
           <a:prstGeom prst="rect">
             <a:avLst/>
@@ -3663,322 +3614,116 @@
           <a:bodyPr wrap="square" lIns="0" tIns="0" rIns="0" bIns="0" rtlCol="0" anchor="t"/>
           <a:lstStyle/>
           <a:p>
-            <a:pPr algn="r" indent="0" marL="0">
-              <a:buNone/>
-            </a:pPr>
-            <a:r>
-              <a:rPr lang="en-US" sz="4000" b="1" dirty="0">
-                <a:solidFill>
-                  <a:srgbClr val="FBD8DF"/>
+            <a:pPr algn="ctr" indent="0" marL="0">
+              <a:buNone/>
+            </a:pPr>
+            <a:r>
+              <a:rPr lang="en-US" sz="1000" b="1" spc="80" kern="0" dirty="0">
+                <a:solidFill>
+                  <a:srgbClr val="A4133C"/>
+                </a:solidFill>
+                <a:latin typeface="Calibri" pitchFamily="34" charset="0"/>
+                <a:ea typeface="Calibri" pitchFamily="34" charset="-122"/>
+                <a:cs typeface="Calibri" pitchFamily="34" charset="-120"/>
+              </a:rPr>
+              <a:t>HEART RATE</a:t>
+            </a:r>
+            <a:endParaRPr lang="en-US" sz="1000" dirty="0"/>
+          </a:p>
+        </p:txBody>
+      </p:sp>
+      <p:sp>
+        <p:nvSpPr>
+          <p:cNvPr id="8" name="Text 5"/>
+          <p:cNvSpPr/>
+          <p:nvPr/>
+        </p:nvSpPr>
+        <p:spPr>
+          <a:xfrm>
+            <a:off x="576072" y="1847088"/>
+            <a:ext cx="1938528" cy="548640"/>
+          </a:xfrm>
+          <a:prstGeom prst="rect">
+            <a:avLst/>
+          </a:prstGeom>
+          <a:noFill/>
+          <a:ln/>
+        </p:spPr>
+        <p:txBody>
+          <a:bodyPr wrap="square" lIns="0" tIns="0" rIns="0" bIns="0" rtlCol="0" anchor="ctr"/>
+          <a:lstStyle/>
+          <a:p>
+            <a:pPr algn="ctr" indent="0" marL="0">
+              <a:buNone/>
+            </a:pPr>
+            <a:r>
+              <a:rPr lang="en-US" sz="3200" b="1" dirty="0">
+                <a:solidFill>
+                  <a:srgbClr val="FF4D6D"/>
                 </a:solidFill>
                 <a:latin typeface="Cambria" pitchFamily="34" charset="0"/>
                 <a:ea typeface="Cambria" pitchFamily="34" charset="-122"/>
                 <a:cs typeface="Cambria" pitchFamily="34" charset="-120"/>
               </a:rPr>
-              <a:t>01</a:t>
-            </a:r>
-            <a:endParaRPr lang="en-US" sz="4000" dirty="0"/>
-          </a:p>
-        </p:txBody>
-      </p:sp>
-      <p:sp>
-        <p:nvSpPr>
-          <p:cNvPr id="10" name="Text 6"/>
-          <p:cNvSpPr/>
-          <p:nvPr/>
-        </p:nvSpPr>
-        <p:spPr>
-          <a:xfrm>
-            <a:off x="886968" y="3703320"/>
-            <a:ext cx="2971800" cy="292608"/>
-          </a:xfrm>
-          <a:prstGeom prst="rect">
-            <a:avLst/>
-          </a:prstGeom>
-          <a:noFill/>
-          <a:ln/>
-        </p:spPr>
-        <p:txBody>
-          <a:bodyPr wrap="square" rtlCol="0" anchor="t"/>
-          <a:lstStyle/>
-          <a:p>
-            <a:pPr algn="l" indent="0" marL="0">
-              <a:buNone/>
-            </a:pPr>
-            <a:r>
-              <a:rPr lang="en-US" sz="1300" b="1" spc="120" kern="0" dirty="0">
-                <a:solidFill>
-                  <a:srgbClr val="A4133C"/>
-                </a:solidFill>
-                <a:latin typeface="Calibri" pitchFamily="34" charset="0"/>
-                <a:ea typeface="Calibri" pitchFamily="34" charset="-122"/>
-                <a:cs typeface="Calibri" pitchFamily="34" charset="-120"/>
-              </a:rPr>
-              <a:t>BUILD</a:t>
-            </a:r>
-            <a:endParaRPr lang="en-US" sz="1300" dirty="0"/>
-          </a:p>
-        </p:txBody>
-      </p:sp>
-      <p:sp>
-        <p:nvSpPr>
-          <p:cNvPr id="11" name="Text 7"/>
-          <p:cNvSpPr/>
-          <p:nvPr/>
-        </p:nvSpPr>
-        <p:spPr>
-          <a:xfrm>
-            <a:off x="886968" y="4069080"/>
-            <a:ext cx="2880360" cy="1554480"/>
-          </a:xfrm>
-          <a:prstGeom prst="rect">
-            <a:avLst/>
-          </a:prstGeom>
-          <a:noFill/>
-          <a:ln/>
-        </p:spPr>
-        <p:txBody>
-          <a:bodyPr wrap="square" rtlCol="0" anchor="t"/>
-          <a:lstStyle/>
-          <a:p>
-            <a:pPr algn="l" indent="0" marL="0">
-              <a:lnSpc>
-                <a:spcPct val="115000"/>
-              </a:lnSpc>
-              <a:buNone/>
-            </a:pPr>
-            <a:r>
-              <a:rPr lang="en-US" sz="1650" dirty="0">
-                <a:solidFill>
-                  <a:srgbClr val="2B2B33"/>
-                </a:solidFill>
-                <a:latin typeface="Calibri" pitchFamily="34" charset="0"/>
-                <a:ea typeface="Calibri" pitchFamily="34" charset="-122"/>
-                <a:cs typeface="Calibri" pitchFamily="34" charset="-120"/>
-              </a:rPr>
-              <a:t>Thin, lean, middle-aged female lying comfortably in bed</a:t>
-            </a:r>
-            <a:endParaRPr lang="en-US" sz="1650" dirty="0"/>
-          </a:p>
-        </p:txBody>
-      </p:sp>
-      <p:sp>
-        <p:nvSpPr>
-          <p:cNvPr id="12" name="Shape 8"/>
-          <p:cNvSpPr/>
-          <p:nvPr/>
-        </p:nvSpPr>
-        <p:spPr>
-          <a:xfrm>
-            <a:off x="4407408" y="1920240"/>
-            <a:ext cx="3611880" cy="4023360"/>
+              <a:t>136</a:t>
+            </a:r>
+            <a:endParaRPr lang="en-US" sz="3200" dirty="0"/>
+          </a:p>
+        </p:txBody>
+      </p:sp>
+      <p:sp>
+        <p:nvSpPr>
+          <p:cNvPr id="9" name="Text 6"/>
+          <p:cNvSpPr/>
+          <p:nvPr/>
+        </p:nvSpPr>
+        <p:spPr>
+          <a:xfrm>
+            <a:off x="612648" y="2414016"/>
+            <a:ext cx="1865376" cy="219456"/>
+          </a:xfrm>
+          <a:prstGeom prst="rect">
+            <a:avLst/>
+          </a:prstGeom>
+          <a:noFill/>
+          <a:ln/>
+        </p:spPr>
+        <p:txBody>
+          <a:bodyPr wrap="square" lIns="0" tIns="0" rIns="0" bIns="0" rtlCol="0" anchor="t"/>
+          <a:lstStyle/>
+          <a:p>
+            <a:pPr algn="ctr" indent="0" marL="0">
+              <a:buNone/>
+            </a:pPr>
+            <a:r>
+              <a:rPr lang="en-US" sz="1150" dirty="0">
+                <a:solidFill>
+                  <a:srgbClr val="6B6B76"/>
+                </a:solidFill>
+                <a:latin typeface="Calibri" pitchFamily="34" charset="0"/>
+                <a:ea typeface="Calibri" pitchFamily="34" charset="-122"/>
+                <a:cs typeface="Calibri" pitchFamily="34" charset="-120"/>
+              </a:rPr>
+              <a:t>bpm</a:t>
+            </a:r>
+            <a:endParaRPr lang="en-US" sz="1150" dirty="0"/>
+          </a:p>
+        </p:txBody>
+      </p:sp>
+      <p:sp>
+        <p:nvSpPr>
+          <p:cNvPr id="10" name="Shape 7"/>
+          <p:cNvSpPr/>
+          <p:nvPr/>
+        </p:nvSpPr>
+        <p:spPr>
+          <a:xfrm>
+            <a:off x="2761488" y="1463040"/>
+            <a:ext cx="2084832" cy="1261872"/>
           </a:xfrm>
           <a:prstGeom prst="roundRect">
             <a:avLst>
-              <a:gd name="adj" fmla="val 3038"/>
-            </a:avLst>
-          </a:prstGeom>
-          <a:solidFill>
-            <a:srgbClr val="590D22"/>
-          </a:solidFill>
-          <a:ln w="12700">
-            <a:solidFill>
-              <a:srgbClr val="FBD8DF"/>
-            </a:solidFill>
-            <a:prstDash val="solid"/>
-          </a:ln>
-          <a:effectLst>
-            <a:outerShdw sx="100000" sy="100000" kx="0" ky="0" algn="bl" rotWithShape="0" blurRad="127000" dist="50800" dir="5400000">
-              <a:srgbClr val="C9A3AC">
-                <a:alpha val="45000"/>
-              </a:srgbClr>
-            </a:outerShdw>
-          </a:effectLst>
-        </p:spPr>
-      </p:sp>
-      <p:sp>
-        <p:nvSpPr>
-          <p:cNvPr id="13" name="Shape 9"/>
-          <p:cNvSpPr/>
-          <p:nvPr/>
-        </p:nvSpPr>
-        <p:spPr>
-          <a:xfrm>
-            <a:off x="4773168" y="2331720"/>
-            <a:ext cx="1051560" cy="1051560"/>
-          </a:xfrm>
-          <a:prstGeom prst="ellipse">
-            <a:avLst/>
-          </a:prstGeom>
-          <a:solidFill>
-            <a:srgbClr val="A4133C"/>
-          </a:solidFill>
-          <a:ln w="12700">
-            <a:solidFill>
-              <a:srgbClr val="FBD8DF"/>
-            </a:solidFill>
-            <a:prstDash val="solid"/>
-          </a:ln>
-        </p:spPr>
-      </p:sp>
-      <p:pic>
-        <p:nvPicPr>
-          <p:cNvPr id="14" name="Image 2" descr="preencoded.png">    </p:cNvPr>
-          <p:cNvPicPr>
-            <a:picLocks noChangeAspect="1"/>
-          </p:cNvPicPr>
-          <p:nvPr/>
-        </p:nvPicPr>
-        <p:blipFill>
-          <a:blip r:embed="rId3"/>
-          <a:stretch>
-            <a:fillRect/>
-          </a:stretch>
-        </p:blipFill>
-        <p:spPr>
-          <a:xfrm>
-            <a:off x="5065776" y="2624328"/>
-            <a:ext cx="466344" cy="466344"/>
-          </a:xfrm>
-          <a:prstGeom prst="rect">
-            <a:avLst/>
-          </a:prstGeom>
-        </p:spPr>
-      </p:pic>
-      <p:sp>
-        <p:nvSpPr>
-          <p:cNvPr id="15" name="Text 10"/>
-          <p:cNvSpPr/>
-          <p:nvPr/>
-        </p:nvSpPr>
-        <p:spPr>
-          <a:xfrm>
-            <a:off x="6967728" y="2286000"/>
-            <a:ext cx="822960" cy="640080"/>
-          </a:xfrm>
-          <a:prstGeom prst="rect">
-            <a:avLst/>
-          </a:prstGeom>
-          <a:noFill/>
-          <a:ln/>
-        </p:spPr>
-        <p:txBody>
-          <a:bodyPr wrap="square" lIns="0" tIns="0" rIns="0" bIns="0" rtlCol="0" anchor="t"/>
-          <a:lstStyle/>
-          <a:p>
-            <a:pPr algn="r" indent="0" marL="0">
-              <a:buNone/>
-            </a:pPr>
-            <a:r>
-              <a:rPr lang="en-US" sz="4000" b="1" dirty="0">
-                <a:solidFill>
-                  <a:srgbClr val="7A2233"/>
-                </a:solidFill>
-                <a:latin typeface="Cambria" pitchFamily="34" charset="0"/>
-                <a:ea typeface="Cambria" pitchFamily="34" charset="-122"/>
-                <a:cs typeface="Cambria" pitchFamily="34" charset="-120"/>
-              </a:rPr>
-              <a:t>02</a:t>
-            </a:r>
-            <a:endParaRPr lang="en-US" sz="4000" dirty="0"/>
-          </a:p>
-        </p:txBody>
-      </p:sp>
-      <p:sp>
-        <p:nvSpPr>
-          <p:cNvPr id="16" name="Text 11"/>
-          <p:cNvSpPr/>
-          <p:nvPr/>
-        </p:nvSpPr>
-        <p:spPr>
-          <a:xfrm>
-            <a:off x="4791456" y="3703320"/>
-            <a:ext cx="2971800" cy="292608"/>
-          </a:xfrm>
-          <a:prstGeom prst="rect">
-            <a:avLst/>
-          </a:prstGeom>
-          <a:noFill/>
-          <a:ln/>
-        </p:spPr>
-        <p:txBody>
-          <a:bodyPr wrap="square" rtlCol="0" anchor="t"/>
-          <a:lstStyle/>
-          <a:p>
-            <a:pPr algn="l" indent="0" marL="0">
-              <a:buNone/>
-            </a:pPr>
-            <a:r>
-              <a:rPr lang="en-US" sz="1300" b="1" spc="120" kern="0" dirty="0">
-                <a:solidFill>
-                  <a:srgbClr val="FF4D6D"/>
-                </a:solidFill>
-                <a:latin typeface="Calibri" pitchFamily="34" charset="0"/>
-                <a:ea typeface="Calibri" pitchFamily="34" charset="-122"/>
-                <a:cs typeface="Calibri" pitchFamily="34" charset="-120"/>
-              </a:rPr>
-              <a:t>ACCESS</a:t>
-            </a:r>
-            <a:endParaRPr lang="en-US" sz="1300" dirty="0"/>
-          </a:p>
-        </p:txBody>
-      </p:sp>
-      <p:sp>
-        <p:nvSpPr>
-          <p:cNvPr id="17" name="Text 12"/>
-          <p:cNvSpPr/>
-          <p:nvPr/>
-        </p:nvSpPr>
-        <p:spPr>
-          <a:xfrm>
-            <a:off x="4791456" y="4069080"/>
-            <a:ext cx="2880360" cy="1554480"/>
-          </a:xfrm>
-          <a:prstGeom prst="rect">
-            <a:avLst/>
-          </a:prstGeom>
-          <a:noFill/>
-          <a:ln/>
-        </p:spPr>
-        <p:txBody>
-          <a:bodyPr wrap="square" rtlCol="0" anchor="t"/>
-          <a:lstStyle/>
-          <a:p>
-            <a:pPr algn="l" indent="0" marL="0">
-              <a:lnSpc>
-                <a:spcPct val="115000"/>
-              </a:lnSpc>
-              <a:buNone/>
-            </a:pPr>
-            <a:r>
-              <a:rPr lang="en-US" sz="1650" dirty="0">
-                <a:solidFill>
-                  <a:srgbClr val="FFFFFF"/>
-                </a:solidFill>
-                <a:latin typeface="Calibri" pitchFamily="34" charset="0"/>
-                <a:ea typeface="Calibri" pitchFamily="34" charset="-122"/>
-                <a:cs typeface="Calibri" pitchFamily="34" charset="-120"/>
-              </a:rPr>
-              <a:t>IV cannula in situ — right hand</a:t>
-            </a:r>
-            <a:endParaRPr lang="en-US" sz="1650" dirty="0"/>
-          </a:p>
-        </p:txBody>
-      </p:sp>
-      <p:sp>
-        <p:nvSpPr>
-          <p:cNvPr id="18" name="Shape 13"/>
-          <p:cNvSpPr/>
-          <p:nvPr/>
-        </p:nvSpPr>
-        <p:spPr>
-          <a:xfrm>
-            <a:off x="8311896" y="1920240"/>
-            <a:ext cx="3611880" cy="4023360"/>
-          </a:xfrm>
-          <a:prstGeom prst="roundRect">
-            <a:avLst>
-              <a:gd name="adj" fmla="val 3038"/>
+              <a:gd name="adj" fmla="val 7246"/>
             </a:avLst>
           </a:prstGeom>
           <a:solidFill>
@@ -4001,14 +3746,724 @@
       </p:sp>
       <p:sp>
         <p:nvSpPr>
-          <p:cNvPr id="19" name="Shape 14"/>
-          <p:cNvSpPr/>
-          <p:nvPr/>
-        </p:nvSpPr>
-        <p:spPr>
-          <a:xfrm>
-            <a:off x="8677656" y="2331720"/>
-            <a:ext cx="1051560" cy="1051560"/>
+          <p:cNvPr id="11" name="Text 8"/>
+          <p:cNvSpPr/>
+          <p:nvPr/>
+        </p:nvSpPr>
+        <p:spPr>
+          <a:xfrm>
+            <a:off x="2871216" y="1609344"/>
+            <a:ext cx="1865376" cy="237744"/>
+          </a:xfrm>
+          <a:prstGeom prst="rect">
+            <a:avLst/>
+          </a:prstGeom>
+          <a:noFill/>
+          <a:ln/>
+        </p:spPr>
+        <p:txBody>
+          <a:bodyPr wrap="square" lIns="0" tIns="0" rIns="0" bIns="0" rtlCol="0" anchor="t"/>
+          <a:lstStyle/>
+          <a:p>
+            <a:pPr algn="ctr" indent="0" marL="0">
+              <a:buNone/>
+            </a:pPr>
+            <a:r>
+              <a:rPr lang="en-US" sz="1000" b="1" spc="80" kern="0" dirty="0">
+                <a:solidFill>
+                  <a:srgbClr val="A4133C"/>
+                </a:solidFill>
+                <a:latin typeface="Calibri" pitchFamily="34" charset="0"/>
+                <a:ea typeface="Calibri" pitchFamily="34" charset="-122"/>
+                <a:cs typeface="Calibri" pitchFamily="34" charset="-120"/>
+              </a:rPr>
+              <a:t>RADIAL PULSE</a:t>
+            </a:r>
+            <a:endParaRPr lang="en-US" sz="1000" dirty="0"/>
+          </a:p>
+        </p:txBody>
+      </p:sp>
+      <p:sp>
+        <p:nvSpPr>
+          <p:cNvPr id="12" name="Text 9"/>
+          <p:cNvSpPr/>
+          <p:nvPr/>
+        </p:nvSpPr>
+        <p:spPr>
+          <a:xfrm>
+            <a:off x="2834640" y="1847088"/>
+            <a:ext cx="1938528" cy="548640"/>
+          </a:xfrm>
+          <a:prstGeom prst="rect">
+            <a:avLst/>
+          </a:prstGeom>
+          <a:noFill/>
+          <a:ln/>
+        </p:spPr>
+        <p:txBody>
+          <a:bodyPr wrap="square" lIns="0" tIns="0" rIns="0" bIns="0" rtlCol="0" anchor="ctr"/>
+          <a:lstStyle/>
+          <a:p>
+            <a:pPr algn="ctr" indent="0" marL="0">
+              <a:buNone/>
+            </a:pPr>
+            <a:r>
+              <a:rPr lang="en-US" sz="3200" b="1" dirty="0">
+                <a:solidFill>
+                  <a:srgbClr val="2B2B33"/>
+                </a:solidFill>
+                <a:latin typeface="Cambria" pitchFamily="34" charset="0"/>
+                <a:ea typeface="Cambria" pitchFamily="34" charset="-122"/>
+                <a:cs typeface="Cambria" pitchFamily="34" charset="-120"/>
+              </a:rPr>
+              <a:t>96</a:t>
+            </a:r>
+            <a:endParaRPr lang="en-US" sz="3200" dirty="0"/>
+          </a:p>
+        </p:txBody>
+      </p:sp>
+      <p:sp>
+        <p:nvSpPr>
+          <p:cNvPr id="13" name="Text 10"/>
+          <p:cNvSpPr/>
+          <p:nvPr/>
+        </p:nvSpPr>
+        <p:spPr>
+          <a:xfrm>
+            <a:off x="2871216" y="2414016"/>
+            <a:ext cx="1865376" cy="219456"/>
+          </a:xfrm>
+          <a:prstGeom prst="rect">
+            <a:avLst/>
+          </a:prstGeom>
+          <a:noFill/>
+          <a:ln/>
+        </p:spPr>
+        <p:txBody>
+          <a:bodyPr wrap="square" lIns="0" tIns="0" rIns="0" bIns="0" rtlCol="0" anchor="t"/>
+          <a:lstStyle/>
+          <a:p>
+            <a:pPr algn="ctr" indent="0" marL="0">
+              <a:buNone/>
+            </a:pPr>
+            <a:r>
+              <a:rPr lang="en-US" sz="1150" dirty="0">
+                <a:solidFill>
+                  <a:srgbClr val="6B6B76"/>
+                </a:solidFill>
+                <a:latin typeface="Calibri" pitchFamily="34" charset="0"/>
+                <a:ea typeface="Calibri" pitchFamily="34" charset="-122"/>
+                <a:cs typeface="Calibri" pitchFamily="34" charset="-120"/>
+              </a:rPr>
+              <a:t>bpm</a:t>
+            </a:r>
+            <a:endParaRPr lang="en-US" sz="1150" dirty="0"/>
+          </a:p>
+        </p:txBody>
+      </p:sp>
+      <p:sp>
+        <p:nvSpPr>
+          <p:cNvPr id="14" name="Shape 11"/>
+          <p:cNvSpPr/>
+          <p:nvPr/>
+        </p:nvSpPr>
+        <p:spPr>
+          <a:xfrm>
+            <a:off x="5020056" y="1463040"/>
+            <a:ext cx="2084832" cy="1261872"/>
+          </a:xfrm>
+          <a:prstGeom prst="roundRect">
+            <a:avLst>
+              <a:gd name="adj" fmla="val 7246"/>
+            </a:avLst>
+          </a:prstGeom>
+          <a:solidFill>
+            <a:srgbClr val="FFF0F3"/>
+          </a:solidFill>
+          <a:ln w="12700">
+            <a:solidFill>
+              <a:srgbClr val="FBD8DF"/>
+            </a:solidFill>
+            <a:prstDash val="solid"/>
+          </a:ln>
+          <a:effectLst>
+            <a:outerShdw sx="100000" sy="100000" kx="0" ky="0" algn="bl" rotWithShape="0" blurRad="127000" dist="50800" dir="5400000">
+              <a:srgbClr val="C9A3AC">
+                <a:alpha val="45000"/>
+              </a:srgbClr>
+            </a:outerShdw>
+          </a:effectLst>
+        </p:spPr>
+      </p:sp>
+      <p:sp>
+        <p:nvSpPr>
+          <p:cNvPr id="15" name="Text 12"/>
+          <p:cNvSpPr/>
+          <p:nvPr/>
+        </p:nvSpPr>
+        <p:spPr>
+          <a:xfrm>
+            <a:off x="5129784" y="1609344"/>
+            <a:ext cx="1865376" cy="237744"/>
+          </a:xfrm>
+          <a:prstGeom prst="rect">
+            <a:avLst/>
+          </a:prstGeom>
+          <a:noFill/>
+          <a:ln/>
+        </p:spPr>
+        <p:txBody>
+          <a:bodyPr wrap="square" lIns="0" tIns="0" rIns="0" bIns="0" rtlCol="0" anchor="t"/>
+          <a:lstStyle/>
+          <a:p>
+            <a:pPr algn="ctr" indent="0" marL="0">
+              <a:buNone/>
+            </a:pPr>
+            <a:r>
+              <a:rPr lang="en-US" sz="1000" b="1" spc="80" kern="0" dirty="0">
+                <a:solidFill>
+                  <a:srgbClr val="A4133C"/>
+                </a:solidFill>
+                <a:latin typeface="Calibri" pitchFamily="34" charset="0"/>
+                <a:ea typeface="Calibri" pitchFamily="34" charset="-122"/>
+                <a:cs typeface="Calibri" pitchFamily="34" charset="-120"/>
+              </a:rPr>
+              <a:t>BLOOD PRESSURE</a:t>
+            </a:r>
+            <a:endParaRPr lang="en-US" sz="1000" dirty="0"/>
+          </a:p>
+        </p:txBody>
+      </p:sp>
+      <p:sp>
+        <p:nvSpPr>
+          <p:cNvPr id="16" name="Text 13"/>
+          <p:cNvSpPr/>
+          <p:nvPr/>
+        </p:nvSpPr>
+        <p:spPr>
+          <a:xfrm>
+            <a:off x="5093208" y="1847088"/>
+            <a:ext cx="1938528" cy="548640"/>
+          </a:xfrm>
+          <a:prstGeom prst="rect">
+            <a:avLst/>
+          </a:prstGeom>
+          <a:noFill/>
+          <a:ln/>
+        </p:spPr>
+        <p:txBody>
+          <a:bodyPr wrap="square" lIns="0" tIns="0" rIns="0" bIns="0" rtlCol="0" anchor="ctr"/>
+          <a:lstStyle/>
+          <a:p>
+            <a:pPr algn="ctr" indent="0" marL="0">
+              <a:buNone/>
+            </a:pPr>
+            <a:r>
+              <a:rPr lang="en-US" sz="2600" b="1" dirty="0">
+                <a:solidFill>
+                  <a:srgbClr val="2B2B33"/>
+                </a:solidFill>
+                <a:latin typeface="Cambria" pitchFamily="34" charset="0"/>
+                <a:ea typeface="Cambria" pitchFamily="34" charset="-122"/>
+                <a:cs typeface="Cambria" pitchFamily="34" charset="-120"/>
+              </a:rPr>
+              <a:t>110/70</a:t>
+            </a:r>
+            <a:endParaRPr lang="en-US" sz="2600" dirty="0"/>
+          </a:p>
+        </p:txBody>
+      </p:sp>
+      <p:sp>
+        <p:nvSpPr>
+          <p:cNvPr id="17" name="Text 14"/>
+          <p:cNvSpPr/>
+          <p:nvPr/>
+        </p:nvSpPr>
+        <p:spPr>
+          <a:xfrm>
+            <a:off x="5129784" y="2414016"/>
+            <a:ext cx="1865376" cy="219456"/>
+          </a:xfrm>
+          <a:prstGeom prst="rect">
+            <a:avLst/>
+          </a:prstGeom>
+          <a:noFill/>
+          <a:ln/>
+        </p:spPr>
+        <p:txBody>
+          <a:bodyPr wrap="square" lIns="0" tIns="0" rIns="0" bIns="0" rtlCol="0" anchor="t"/>
+          <a:lstStyle/>
+          <a:p>
+            <a:pPr algn="ctr" indent="0" marL="0">
+              <a:buNone/>
+            </a:pPr>
+            <a:r>
+              <a:rPr lang="en-US" sz="1150" dirty="0">
+                <a:solidFill>
+                  <a:srgbClr val="6B6B76"/>
+                </a:solidFill>
+                <a:latin typeface="Calibri" pitchFamily="34" charset="0"/>
+                <a:ea typeface="Calibri" pitchFamily="34" charset="-122"/>
+                <a:cs typeface="Calibri" pitchFamily="34" charset="-120"/>
+              </a:rPr>
+              <a:t>mmHg</a:t>
+            </a:r>
+            <a:endParaRPr lang="en-US" sz="1150" dirty="0"/>
+          </a:p>
+        </p:txBody>
+      </p:sp>
+      <p:sp>
+        <p:nvSpPr>
+          <p:cNvPr id="18" name="Shape 15"/>
+          <p:cNvSpPr/>
+          <p:nvPr/>
+        </p:nvSpPr>
+        <p:spPr>
+          <a:xfrm>
+            <a:off x="7278624" y="1463040"/>
+            <a:ext cx="2084832" cy="1261872"/>
+          </a:xfrm>
+          <a:prstGeom prst="roundRect">
+            <a:avLst>
+              <a:gd name="adj" fmla="val 7246"/>
+            </a:avLst>
+          </a:prstGeom>
+          <a:solidFill>
+            <a:srgbClr val="FFF0F3"/>
+          </a:solidFill>
+          <a:ln w="12700">
+            <a:solidFill>
+              <a:srgbClr val="FBD8DF"/>
+            </a:solidFill>
+            <a:prstDash val="solid"/>
+          </a:ln>
+          <a:effectLst>
+            <a:outerShdw sx="100000" sy="100000" kx="0" ky="0" algn="bl" rotWithShape="0" blurRad="127000" dist="50800" dir="5400000">
+              <a:srgbClr val="C9A3AC">
+                <a:alpha val="45000"/>
+              </a:srgbClr>
+            </a:outerShdw>
+          </a:effectLst>
+        </p:spPr>
+      </p:sp>
+      <p:sp>
+        <p:nvSpPr>
+          <p:cNvPr id="19" name="Text 16"/>
+          <p:cNvSpPr/>
+          <p:nvPr/>
+        </p:nvSpPr>
+        <p:spPr>
+          <a:xfrm>
+            <a:off x="7388352" y="1609344"/>
+            <a:ext cx="1865376" cy="237744"/>
+          </a:xfrm>
+          <a:prstGeom prst="rect">
+            <a:avLst/>
+          </a:prstGeom>
+          <a:noFill/>
+          <a:ln/>
+        </p:spPr>
+        <p:txBody>
+          <a:bodyPr wrap="square" lIns="0" tIns="0" rIns="0" bIns="0" rtlCol="0" anchor="t"/>
+          <a:lstStyle/>
+          <a:p>
+            <a:pPr algn="ctr" indent="0" marL="0">
+              <a:buNone/>
+            </a:pPr>
+            <a:r>
+              <a:rPr lang="en-US" sz="1000" b="1" spc="80" kern="0" dirty="0">
+                <a:solidFill>
+                  <a:srgbClr val="A4133C"/>
+                </a:solidFill>
+                <a:latin typeface="Calibri" pitchFamily="34" charset="0"/>
+                <a:ea typeface="Calibri" pitchFamily="34" charset="-122"/>
+                <a:cs typeface="Calibri" pitchFamily="34" charset="-120"/>
+              </a:rPr>
+              <a:t>TEMPERATURE</a:t>
+            </a:r>
+            <a:endParaRPr lang="en-US" sz="1000" dirty="0"/>
+          </a:p>
+        </p:txBody>
+      </p:sp>
+      <p:sp>
+        <p:nvSpPr>
+          <p:cNvPr id="20" name="Text 17"/>
+          <p:cNvSpPr/>
+          <p:nvPr/>
+        </p:nvSpPr>
+        <p:spPr>
+          <a:xfrm>
+            <a:off x="7351776" y="1847088"/>
+            <a:ext cx="1938528" cy="548640"/>
+          </a:xfrm>
+          <a:prstGeom prst="rect">
+            <a:avLst/>
+          </a:prstGeom>
+          <a:noFill/>
+          <a:ln/>
+        </p:spPr>
+        <p:txBody>
+          <a:bodyPr wrap="square" lIns="0" tIns="0" rIns="0" bIns="0" rtlCol="0" anchor="ctr"/>
+          <a:lstStyle/>
+          <a:p>
+            <a:pPr algn="ctr" indent="0" marL="0">
+              <a:buNone/>
+            </a:pPr>
+            <a:r>
+              <a:rPr lang="en-US" sz="3200" b="1" dirty="0">
+                <a:solidFill>
+                  <a:srgbClr val="2B2B33"/>
+                </a:solidFill>
+                <a:latin typeface="Cambria" pitchFamily="34" charset="0"/>
+                <a:ea typeface="Cambria" pitchFamily="34" charset="-122"/>
+                <a:cs typeface="Cambria" pitchFamily="34" charset="-120"/>
+              </a:rPr>
+              <a:t>98</a:t>
+            </a:r>
+            <a:endParaRPr lang="en-US" sz="3200" dirty="0"/>
+          </a:p>
+        </p:txBody>
+      </p:sp>
+      <p:sp>
+        <p:nvSpPr>
+          <p:cNvPr id="21" name="Text 18"/>
+          <p:cNvSpPr/>
+          <p:nvPr/>
+        </p:nvSpPr>
+        <p:spPr>
+          <a:xfrm>
+            <a:off x="7388352" y="2414016"/>
+            <a:ext cx="1865376" cy="219456"/>
+          </a:xfrm>
+          <a:prstGeom prst="rect">
+            <a:avLst/>
+          </a:prstGeom>
+          <a:noFill/>
+          <a:ln/>
+        </p:spPr>
+        <p:txBody>
+          <a:bodyPr wrap="square" lIns="0" tIns="0" rIns="0" bIns="0" rtlCol="0" anchor="t"/>
+          <a:lstStyle/>
+          <a:p>
+            <a:pPr algn="ctr" indent="0" marL="0">
+              <a:buNone/>
+            </a:pPr>
+            <a:r>
+              <a:rPr lang="en-US" sz="1150" dirty="0">
+                <a:solidFill>
+                  <a:srgbClr val="6B6B76"/>
+                </a:solidFill>
+                <a:latin typeface="Calibri" pitchFamily="34" charset="0"/>
+                <a:ea typeface="Calibri" pitchFamily="34" charset="-122"/>
+                <a:cs typeface="Calibri" pitchFamily="34" charset="-120"/>
+              </a:rPr>
+              <a:t>°F</a:t>
+            </a:r>
+            <a:endParaRPr lang="en-US" sz="1150" dirty="0"/>
+          </a:p>
+        </p:txBody>
+      </p:sp>
+      <p:sp>
+        <p:nvSpPr>
+          <p:cNvPr id="22" name="Shape 19"/>
+          <p:cNvSpPr/>
+          <p:nvPr/>
+        </p:nvSpPr>
+        <p:spPr>
+          <a:xfrm>
+            <a:off x="9537192" y="1463040"/>
+            <a:ext cx="2084832" cy="1261872"/>
+          </a:xfrm>
+          <a:prstGeom prst="roundRect">
+            <a:avLst>
+              <a:gd name="adj" fmla="val 7246"/>
+            </a:avLst>
+          </a:prstGeom>
+          <a:solidFill>
+            <a:srgbClr val="FFF0F3"/>
+          </a:solidFill>
+          <a:ln w="12700">
+            <a:solidFill>
+              <a:srgbClr val="FBD8DF"/>
+            </a:solidFill>
+            <a:prstDash val="solid"/>
+          </a:ln>
+          <a:effectLst>
+            <a:outerShdw sx="100000" sy="100000" kx="0" ky="0" algn="bl" rotWithShape="0" blurRad="127000" dist="50800" dir="5400000">
+              <a:srgbClr val="C9A3AC">
+                <a:alpha val="45000"/>
+              </a:srgbClr>
+            </a:outerShdw>
+          </a:effectLst>
+        </p:spPr>
+      </p:sp>
+      <p:sp>
+        <p:nvSpPr>
+          <p:cNvPr id="23" name="Text 20"/>
+          <p:cNvSpPr/>
+          <p:nvPr/>
+        </p:nvSpPr>
+        <p:spPr>
+          <a:xfrm>
+            <a:off x="9646920" y="1609344"/>
+            <a:ext cx="1865376" cy="237744"/>
+          </a:xfrm>
+          <a:prstGeom prst="rect">
+            <a:avLst/>
+          </a:prstGeom>
+          <a:noFill/>
+          <a:ln/>
+        </p:spPr>
+        <p:txBody>
+          <a:bodyPr wrap="square" lIns="0" tIns="0" rIns="0" bIns="0" rtlCol="0" anchor="t"/>
+          <a:lstStyle/>
+          <a:p>
+            <a:pPr algn="ctr" indent="0" marL="0">
+              <a:buNone/>
+            </a:pPr>
+            <a:r>
+              <a:rPr lang="en-US" sz="1000" b="1" spc="80" kern="0" dirty="0">
+                <a:solidFill>
+                  <a:srgbClr val="A4133C"/>
+                </a:solidFill>
+                <a:latin typeface="Calibri" pitchFamily="34" charset="0"/>
+                <a:ea typeface="Calibri" pitchFamily="34" charset="-122"/>
+                <a:cs typeface="Calibri" pitchFamily="34" charset="-120"/>
+              </a:rPr>
+              <a:t>RESP. RATE</a:t>
+            </a:r>
+            <a:endParaRPr lang="en-US" sz="1000" dirty="0"/>
+          </a:p>
+        </p:txBody>
+      </p:sp>
+      <p:sp>
+        <p:nvSpPr>
+          <p:cNvPr id="24" name="Text 21"/>
+          <p:cNvSpPr/>
+          <p:nvPr/>
+        </p:nvSpPr>
+        <p:spPr>
+          <a:xfrm>
+            <a:off x="9610344" y="1847088"/>
+            <a:ext cx="1938528" cy="548640"/>
+          </a:xfrm>
+          <a:prstGeom prst="rect">
+            <a:avLst/>
+          </a:prstGeom>
+          <a:noFill/>
+          <a:ln/>
+        </p:spPr>
+        <p:txBody>
+          <a:bodyPr wrap="square" lIns="0" tIns="0" rIns="0" bIns="0" rtlCol="0" anchor="ctr"/>
+          <a:lstStyle/>
+          <a:p>
+            <a:pPr algn="ctr" indent="0" marL="0">
+              <a:buNone/>
+            </a:pPr>
+            <a:r>
+              <a:rPr lang="en-US" sz="3200" b="1" dirty="0">
+                <a:solidFill>
+                  <a:srgbClr val="2B2B33"/>
+                </a:solidFill>
+                <a:latin typeface="Cambria" pitchFamily="34" charset="0"/>
+                <a:ea typeface="Cambria" pitchFamily="34" charset="-122"/>
+                <a:cs typeface="Cambria" pitchFamily="34" charset="-120"/>
+              </a:rPr>
+              <a:t>14</a:t>
+            </a:r>
+            <a:endParaRPr lang="en-US" sz="3200" dirty="0"/>
+          </a:p>
+        </p:txBody>
+      </p:sp>
+      <p:sp>
+        <p:nvSpPr>
+          <p:cNvPr id="25" name="Text 22"/>
+          <p:cNvSpPr/>
+          <p:nvPr/>
+        </p:nvSpPr>
+        <p:spPr>
+          <a:xfrm>
+            <a:off x="9646920" y="2414016"/>
+            <a:ext cx="1865376" cy="219456"/>
+          </a:xfrm>
+          <a:prstGeom prst="rect">
+            <a:avLst/>
+          </a:prstGeom>
+          <a:noFill/>
+          <a:ln/>
+        </p:spPr>
+        <p:txBody>
+          <a:bodyPr wrap="square" lIns="0" tIns="0" rIns="0" bIns="0" rtlCol="0" anchor="t"/>
+          <a:lstStyle/>
+          <a:p>
+            <a:pPr algn="ctr" indent="0" marL="0">
+              <a:buNone/>
+            </a:pPr>
+            <a:r>
+              <a:rPr lang="en-US" sz="1150" dirty="0">
+                <a:solidFill>
+                  <a:srgbClr val="6B6B76"/>
+                </a:solidFill>
+                <a:latin typeface="Calibri" pitchFamily="34" charset="0"/>
+                <a:ea typeface="Calibri" pitchFamily="34" charset="-122"/>
+                <a:cs typeface="Calibri" pitchFamily="34" charset="-120"/>
+              </a:rPr>
+              <a:t>/min</a:t>
+            </a:r>
+            <a:endParaRPr lang="en-US" sz="1150" dirty="0"/>
+          </a:p>
+        </p:txBody>
+      </p:sp>
+      <p:sp>
+        <p:nvSpPr>
+          <p:cNvPr id="26" name="Shape 23"/>
+          <p:cNvSpPr/>
+          <p:nvPr/>
+        </p:nvSpPr>
+        <p:spPr>
+          <a:xfrm>
+            <a:off x="502920" y="2816352"/>
+            <a:ext cx="11183112" cy="548640"/>
+          </a:xfrm>
+          <a:prstGeom prst="roundRect">
+            <a:avLst>
+              <a:gd name="adj" fmla="val 16667"/>
+            </a:avLst>
+          </a:prstGeom>
+          <a:solidFill>
+            <a:srgbClr val="590D22"/>
+          </a:solidFill>
+          <a:ln/>
+          <a:effectLst>
+            <a:outerShdw sx="100000" sy="100000" kx="0" ky="0" algn="bl" rotWithShape="0" blurRad="127000" dist="50800" dir="5400000">
+              <a:srgbClr val="C9A3AC">
+                <a:alpha val="45000"/>
+              </a:srgbClr>
+            </a:outerShdw>
+          </a:effectLst>
+        </p:spPr>
+      </p:sp>
+      <p:pic>
+        <p:nvPicPr>
+          <p:cNvPr id="27" name="Image 1" descr="preencoded.png">    </p:cNvPr>
+          <p:cNvPicPr>
+            <a:picLocks noChangeAspect="1"/>
+          </p:cNvPicPr>
+          <p:nvPr/>
+        </p:nvPicPr>
+        <p:blipFill>
+          <a:blip r:embed="rId2"/>
+          <a:stretch>
+            <a:fillRect/>
+          </a:stretch>
+        </p:blipFill>
+        <p:spPr>
+          <a:xfrm>
+            <a:off x="777240" y="2926080"/>
+            <a:ext cx="329184" cy="329184"/>
+          </a:xfrm>
+          <a:prstGeom prst="rect">
+            <a:avLst/>
+          </a:prstGeom>
+        </p:spPr>
+      </p:pic>
+      <p:sp>
+        <p:nvSpPr>
+          <p:cNvPr id="28" name="Text 24"/>
+          <p:cNvSpPr/>
+          <p:nvPr/>
+        </p:nvSpPr>
+        <p:spPr>
+          <a:xfrm>
+            <a:off x="1280160" y="2816352"/>
+            <a:ext cx="10241280" cy="548640"/>
+          </a:xfrm>
+          <a:prstGeom prst="rect">
+            <a:avLst/>
+          </a:prstGeom>
+          <a:noFill/>
+          <a:ln/>
+        </p:spPr>
+        <p:txBody>
+          <a:bodyPr wrap="square" lIns="0" tIns="0" rIns="0" bIns="0" rtlCol="0" anchor="ctr"/>
+          <a:lstStyle/>
+          <a:p>
+            <a:pPr algn="l" indent="0" marL="0">
+              <a:buNone/>
+            </a:pPr>
+            <a:r>
+              <a:rPr lang="en-US" sz="1400" b="1" dirty="0">
+                <a:solidFill>
+                  <a:srgbClr val="FF4D6D"/>
+                </a:solidFill>
+                <a:latin typeface="Calibri" pitchFamily="34" charset="0"/>
+                <a:ea typeface="Calibri" pitchFamily="34" charset="-122"/>
+                <a:cs typeface="Calibri" pitchFamily="34" charset="-120"/>
+              </a:rPr>
+              <a:t>Apex–radial pulse deficit ≈ 40 bpm</a:t>
+            </a:r>
+            <a:pPr algn="l" indent="0" marL="0">
+              <a:buNone/>
+            </a:pPr>
+            <a:r>
+              <a:rPr lang="en-US" sz="1400" dirty="0">
+                <a:solidFill>
+                  <a:srgbClr val="FBD8DF"/>
+                </a:solidFill>
+                <a:latin typeface="Calibri" pitchFamily="34" charset="0"/>
+                <a:ea typeface="Calibri" pitchFamily="34" charset="-122"/>
+                <a:cs typeface="Calibri" pitchFamily="34" charset="-120"/>
+              </a:rPr>
+              <a:t>   (heart rate 136 vs radial pulse 96) — a hallmark of atrial fibrillation.</a:t>
+            </a:r>
+            <a:endParaRPr lang="en-US" sz="1400" dirty="0"/>
+          </a:p>
+        </p:txBody>
+      </p:sp>
+      <p:sp>
+        <p:nvSpPr>
+          <p:cNvPr id="29" name="Shape 25"/>
+          <p:cNvSpPr/>
+          <p:nvPr/>
+        </p:nvSpPr>
+        <p:spPr>
+          <a:xfrm>
+            <a:off x="502920" y="3474720"/>
+            <a:ext cx="3611880" cy="2514600"/>
+          </a:xfrm>
+          <a:prstGeom prst="roundRect">
+            <a:avLst>
+              <a:gd name="adj" fmla="val 4364"/>
+            </a:avLst>
+          </a:prstGeom>
+          <a:solidFill>
+            <a:srgbClr val="FFF0F3"/>
+          </a:solidFill>
+          <a:ln w="12700">
+            <a:solidFill>
+              <a:srgbClr val="FBD8DF"/>
+            </a:solidFill>
+            <a:prstDash val="solid"/>
+          </a:ln>
+          <a:effectLst>
+            <a:outerShdw sx="100000" sy="100000" kx="0" ky="0" algn="bl" rotWithShape="0" blurRad="127000" dist="50800" dir="5400000">
+              <a:srgbClr val="C9A3AC">
+                <a:alpha val="45000"/>
+              </a:srgbClr>
+            </a:outerShdw>
+          </a:effectLst>
+        </p:spPr>
+      </p:sp>
+      <p:sp>
+        <p:nvSpPr>
+          <p:cNvPr id="30" name="Shape 26"/>
+          <p:cNvSpPr/>
+          <p:nvPr/>
+        </p:nvSpPr>
+        <p:spPr>
+          <a:xfrm>
+            <a:off x="777240" y="3694176"/>
+            <a:ext cx="566928" cy="566928"/>
           </a:xfrm>
           <a:prstGeom prst="ellipse">
             <a:avLst/>
@@ -4026,7 +4481,439 @@
       </p:sp>
       <p:pic>
         <p:nvPicPr>
-          <p:cNvPr id="20" name="Image 3" descr="preencoded.png">    </p:cNvPr>
+          <p:cNvPr id="31" name="Image 2" descr="preencoded.png">    </p:cNvPr>
+          <p:cNvPicPr>
+            <a:picLocks noChangeAspect="1"/>
+          </p:cNvPicPr>
+          <p:nvPr/>
+        </p:nvPicPr>
+        <p:blipFill>
+          <a:blip r:embed="rId3"/>
+          <a:stretch>
+            <a:fillRect/>
+          </a:stretch>
+        </p:blipFill>
+        <p:spPr>
+          <a:xfrm>
+            <a:off x="923544" y="3840480"/>
+            <a:ext cx="274320" cy="274320"/>
+          </a:xfrm>
+          <a:prstGeom prst="rect">
+            <a:avLst/>
+          </a:prstGeom>
+        </p:spPr>
+      </p:pic>
+      <p:sp>
+        <p:nvSpPr>
+          <p:cNvPr id="32" name="Text 27"/>
+          <p:cNvSpPr/>
+          <p:nvPr/>
+        </p:nvSpPr>
+        <p:spPr>
+          <a:xfrm>
+            <a:off x="1463040" y="3694176"/>
+            <a:ext cx="2514600" cy="566928"/>
+          </a:xfrm>
+          <a:prstGeom prst="rect">
+            <a:avLst/>
+          </a:prstGeom>
+          <a:noFill/>
+          <a:ln/>
+        </p:spPr>
+        <p:txBody>
+          <a:bodyPr wrap="square" lIns="0" tIns="0" rIns="0" bIns="0" rtlCol="0" anchor="ctr"/>
+          <a:lstStyle/>
+          <a:p>
+            <a:pPr algn="l" indent="0" marL="0">
+              <a:buNone/>
+            </a:pPr>
+            <a:r>
+              <a:rPr lang="en-US" sz="1600" b="1" dirty="0">
+                <a:solidFill>
+                  <a:srgbClr val="2B2B33"/>
+                </a:solidFill>
+                <a:latin typeface="Cambria" pitchFamily="34" charset="0"/>
+                <a:ea typeface="Cambria" pitchFamily="34" charset="-122"/>
+                <a:cs typeface="Cambria" pitchFamily="34" charset="-120"/>
+              </a:rPr>
+              <a:t>Pulse Character</a:t>
+            </a:r>
+            <a:endParaRPr lang="en-US" sz="1600" dirty="0"/>
+          </a:p>
+        </p:txBody>
+      </p:sp>
+      <p:sp>
+        <p:nvSpPr>
+          <p:cNvPr id="33" name="Shape 28"/>
+          <p:cNvSpPr/>
+          <p:nvPr/>
+        </p:nvSpPr>
+        <p:spPr>
+          <a:xfrm>
+            <a:off x="795528" y="4443984"/>
+            <a:ext cx="109728" cy="109728"/>
+          </a:xfrm>
+          <a:prstGeom prst="ellipse">
+            <a:avLst/>
+          </a:prstGeom>
+          <a:solidFill>
+            <a:srgbClr val="FF4D6D"/>
+          </a:solidFill>
+          <a:ln/>
+        </p:spPr>
+      </p:sp>
+      <p:sp>
+        <p:nvSpPr>
+          <p:cNvPr id="34" name="Text 29"/>
+          <p:cNvSpPr/>
+          <p:nvPr/>
+        </p:nvSpPr>
+        <p:spPr>
+          <a:xfrm>
+            <a:off x="1014984" y="4389120"/>
+            <a:ext cx="2880360" cy="301752"/>
+          </a:xfrm>
+          <a:prstGeom prst="rect">
+            <a:avLst/>
+          </a:prstGeom>
+          <a:noFill/>
+          <a:ln/>
+        </p:spPr>
+        <p:txBody>
+          <a:bodyPr wrap="square" lIns="0" tIns="0" rIns="0" bIns="0" rtlCol="0" anchor="t"/>
+          <a:lstStyle/>
+          <a:p>
+            <a:pPr algn="l" indent="0" marL="0">
+              <a:lnSpc>
+                <a:spcPct val="100000"/>
+              </a:lnSpc>
+              <a:buNone/>
+            </a:pPr>
+            <a:r>
+              <a:rPr lang="en-US" sz="1200" dirty="0">
+                <a:solidFill>
+                  <a:srgbClr val="2B2B33"/>
+                </a:solidFill>
+                <a:latin typeface="Calibri" pitchFamily="34" charset="0"/>
+                <a:ea typeface="Calibri" pitchFamily="34" charset="-122"/>
+                <a:cs typeface="Calibri" pitchFamily="34" charset="-120"/>
+              </a:rPr>
+              <a:t>Irregularly irregular</a:t>
+            </a:r>
+            <a:endParaRPr lang="en-US" sz="1200" dirty="0"/>
+          </a:p>
+        </p:txBody>
+      </p:sp>
+      <p:sp>
+        <p:nvSpPr>
+          <p:cNvPr id="35" name="Shape 30"/>
+          <p:cNvSpPr/>
+          <p:nvPr/>
+        </p:nvSpPr>
+        <p:spPr>
+          <a:xfrm>
+            <a:off x="795528" y="4745736"/>
+            <a:ext cx="109728" cy="109728"/>
+          </a:xfrm>
+          <a:prstGeom prst="ellipse">
+            <a:avLst/>
+          </a:prstGeom>
+          <a:solidFill>
+            <a:srgbClr val="FF4D6D"/>
+          </a:solidFill>
+          <a:ln/>
+        </p:spPr>
+      </p:sp>
+      <p:sp>
+        <p:nvSpPr>
+          <p:cNvPr id="36" name="Text 31"/>
+          <p:cNvSpPr/>
+          <p:nvPr/>
+        </p:nvSpPr>
+        <p:spPr>
+          <a:xfrm>
+            <a:off x="1014984" y="4690872"/>
+            <a:ext cx="2880360" cy="301752"/>
+          </a:xfrm>
+          <a:prstGeom prst="rect">
+            <a:avLst/>
+          </a:prstGeom>
+          <a:noFill/>
+          <a:ln/>
+        </p:spPr>
+        <p:txBody>
+          <a:bodyPr wrap="square" lIns="0" tIns="0" rIns="0" bIns="0" rtlCol="0" anchor="t"/>
+          <a:lstStyle/>
+          <a:p>
+            <a:pPr algn="l" indent="0" marL="0">
+              <a:lnSpc>
+                <a:spcPct val="100000"/>
+              </a:lnSpc>
+              <a:buNone/>
+            </a:pPr>
+            <a:r>
+              <a:rPr lang="en-US" sz="1200" dirty="0">
+                <a:solidFill>
+                  <a:srgbClr val="2B2B33"/>
+                </a:solidFill>
+                <a:latin typeface="Calibri" pitchFamily="34" charset="0"/>
+                <a:ea typeface="Calibri" pitchFamily="34" charset="-122"/>
+                <a:cs typeface="Calibri" pitchFamily="34" charset="-120"/>
+              </a:rPr>
+              <a:t>Normal volume &amp; character</a:t>
+            </a:r>
+            <a:endParaRPr lang="en-US" sz="1200" dirty="0"/>
+          </a:p>
+        </p:txBody>
+      </p:sp>
+      <p:sp>
+        <p:nvSpPr>
+          <p:cNvPr id="37" name="Shape 32"/>
+          <p:cNvSpPr/>
+          <p:nvPr/>
+        </p:nvSpPr>
+        <p:spPr>
+          <a:xfrm>
+            <a:off x="795528" y="5047488"/>
+            <a:ext cx="109728" cy="109728"/>
+          </a:xfrm>
+          <a:prstGeom prst="ellipse">
+            <a:avLst/>
+          </a:prstGeom>
+          <a:solidFill>
+            <a:srgbClr val="FF4D6D"/>
+          </a:solidFill>
+          <a:ln/>
+        </p:spPr>
+      </p:sp>
+      <p:sp>
+        <p:nvSpPr>
+          <p:cNvPr id="38" name="Text 33"/>
+          <p:cNvSpPr/>
+          <p:nvPr/>
+        </p:nvSpPr>
+        <p:spPr>
+          <a:xfrm>
+            <a:off x="1014984" y="4992624"/>
+            <a:ext cx="2880360" cy="301752"/>
+          </a:xfrm>
+          <a:prstGeom prst="rect">
+            <a:avLst/>
+          </a:prstGeom>
+          <a:noFill/>
+          <a:ln/>
+        </p:spPr>
+        <p:txBody>
+          <a:bodyPr wrap="square" lIns="0" tIns="0" rIns="0" bIns="0" rtlCol="0" anchor="t"/>
+          <a:lstStyle/>
+          <a:p>
+            <a:pPr algn="l" indent="0" marL="0">
+              <a:lnSpc>
+                <a:spcPct val="100000"/>
+              </a:lnSpc>
+              <a:buNone/>
+            </a:pPr>
+            <a:r>
+              <a:rPr lang="en-US" sz="1200" dirty="0">
+                <a:solidFill>
+                  <a:srgbClr val="2B2B33"/>
+                </a:solidFill>
+                <a:latin typeface="Calibri" pitchFamily="34" charset="0"/>
+                <a:ea typeface="Calibri" pitchFamily="34" charset="-122"/>
+                <a:cs typeface="Calibri" pitchFamily="34" charset="-120"/>
+              </a:rPr>
+              <a:t>Vessel wall not palpable</a:t>
+            </a:r>
+            <a:endParaRPr lang="en-US" sz="1200" dirty="0"/>
+          </a:p>
+        </p:txBody>
+      </p:sp>
+      <p:sp>
+        <p:nvSpPr>
+          <p:cNvPr id="39" name="Shape 34"/>
+          <p:cNvSpPr/>
+          <p:nvPr/>
+        </p:nvSpPr>
+        <p:spPr>
+          <a:xfrm>
+            <a:off x="795528" y="5349240"/>
+            <a:ext cx="109728" cy="109728"/>
+          </a:xfrm>
+          <a:prstGeom prst="ellipse">
+            <a:avLst/>
+          </a:prstGeom>
+          <a:solidFill>
+            <a:srgbClr val="FF4D6D"/>
+          </a:solidFill>
+          <a:ln/>
+        </p:spPr>
+      </p:sp>
+      <p:sp>
+        <p:nvSpPr>
+          <p:cNvPr id="40" name="Text 35"/>
+          <p:cNvSpPr/>
+          <p:nvPr/>
+        </p:nvSpPr>
+        <p:spPr>
+          <a:xfrm>
+            <a:off x="1014984" y="5294376"/>
+            <a:ext cx="2880360" cy="301752"/>
+          </a:xfrm>
+          <a:prstGeom prst="rect">
+            <a:avLst/>
+          </a:prstGeom>
+          <a:noFill/>
+          <a:ln/>
+        </p:spPr>
+        <p:txBody>
+          <a:bodyPr wrap="square" lIns="0" tIns="0" rIns="0" bIns="0" rtlCol="0" anchor="t"/>
+          <a:lstStyle/>
+          <a:p>
+            <a:pPr algn="l" indent="0" marL="0">
+              <a:lnSpc>
+                <a:spcPct val="100000"/>
+              </a:lnSpc>
+              <a:buNone/>
+            </a:pPr>
+            <a:r>
+              <a:rPr lang="en-US" sz="1200" dirty="0">
+                <a:solidFill>
+                  <a:srgbClr val="2B2B33"/>
+                </a:solidFill>
+                <a:latin typeface="Calibri" pitchFamily="34" charset="0"/>
+                <a:ea typeface="Calibri" pitchFamily="34" charset="-122"/>
+                <a:cs typeface="Calibri" pitchFamily="34" charset="-120"/>
+              </a:rPr>
+              <a:t>No radio-radial / femoral delay</a:t>
+            </a:r>
+            <a:endParaRPr lang="en-US" sz="1200" dirty="0"/>
+          </a:p>
+        </p:txBody>
+      </p:sp>
+      <p:sp>
+        <p:nvSpPr>
+          <p:cNvPr id="41" name="Shape 36"/>
+          <p:cNvSpPr/>
+          <p:nvPr/>
+        </p:nvSpPr>
+        <p:spPr>
+          <a:xfrm>
+            <a:off x="795528" y="5650992"/>
+            <a:ext cx="109728" cy="109728"/>
+          </a:xfrm>
+          <a:prstGeom prst="ellipse">
+            <a:avLst/>
+          </a:prstGeom>
+          <a:solidFill>
+            <a:srgbClr val="FF4D6D"/>
+          </a:solidFill>
+          <a:ln/>
+        </p:spPr>
+      </p:sp>
+      <p:sp>
+        <p:nvSpPr>
+          <p:cNvPr id="42" name="Text 37"/>
+          <p:cNvSpPr/>
+          <p:nvPr/>
+        </p:nvSpPr>
+        <p:spPr>
+          <a:xfrm>
+            <a:off x="1014984" y="5596128"/>
+            <a:ext cx="2880360" cy="301752"/>
+          </a:xfrm>
+          <a:prstGeom prst="rect">
+            <a:avLst/>
+          </a:prstGeom>
+          <a:noFill/>
+          <a:ln/>
+        </p:spPr>
+        <p:txBody>
+          <a:bodyPr wrap="square" lIns="0" tIns="0" rIns="0" bIns="0" rtlCol="0" anchor="t"/>
+          <a:lstStyle/>
+          <a:p>
+            <a:pPr algn="l" indent="0" marL="0">
+              <a:lnSpc>
+                <a:spcPct val="100000"/>
+              </a:lnSpc>
+              <a:buNone/>
+            </a:pPr>
+            <a:r>
+              <a:rPr lang="en-US" sz="1200" dirty="0">
+                <a:solidFill>
+                  <a:srgbClr val="2B2B33"/>
+                </a:solidFill>
+                <a:latin typeface="Calibri" pitchFamily="34" charset="0"/>
+                <a:ea typeface="Calibri" pitchFamily="34" charset="-122"/>
+                <a:cs typeface="Calibri" pitchFamily="34" charset="-120"/>
+              </a:rPr>
+              <a:t>Pulse deficit present</a:t>
+            </a:r>
+            <a:endParaRPr lang="en-US" sz="1200" dirty="0"/>
+          </a:p>
+        </p:txBody>
+      </p:sp>
+      <p:sp>
+        <p:nvSpPr>
+          <p:cNvPr id="43" name="Shape 38"/>
+          <p:cNvSpPr/>
+          <p:nvPr/>
+        </p:nvSpPr>
+        <p:spPr>
+          <a:xfrm>
+            <a:off x="4288536" y="3474720"/>
+            <a:ext cx="3611880" cy="2514600"/>
+          </a:xfrm>
+          <a:prstGeom prst="roundRect">
+            <a:avLst>
+              <a:gd name="adj" fmla="val 4364"/>
+            </a:avLst>
+          </a:prstGeom>
+          <a:solidFill>
+            <a:srgbClr val="FFF0F3"/>
+          </a:solidFill>
+          <a:ln w="12700">
+            <a:solidFill>
+              <a:srgbClr val="FBD8DF"/>
+            </a:solidFill>
+            <a:prstDash val="solid"/>
+          </a:ln>
+          <a:effectLst>
+            <a:outerShdw sx="100000" sy="100000" kx="0" ky="0" algn="bl" rotWithShape="0" blurRad="127000" dist="50800" dir="5400000">
+              <a:srgbClr val="C9A3AC">
+                <a:alpha val="45000"/>
+              </a:srgbClr>
+            </a:outerShdw>
+          </a:effectLst>
+        </p:spPr>
+      </p:sp>
+      <p:sp>
+        <p:nvSpPr>
+          <p:cNvPr id="44" name="Shape 39"/>
+          <p:cNvSpPr/>
+          <p:nvPr/>
+        </p:nvSpPr>
+        <p:spPr>
+          <a:xfrm>
+            <a:off x="4562856" y="3694176"/>
+            <a:ext cx="566928" cy="566928"/>
+          </a:xfrm>
+          <a:prstGeom prst="ellipse">
+            <a:avLst/>
+          </a:prstGeom>
+          <a:solidFill>
+            <a:srgbClr val="FFFFFF"/>
+          </a:solidFill>
+          <a:ln w="12700">
+            <a:solidFill>
+              <a:srgbClr val="FBD8DF"/>
+            </a:solidFill>
+            <a:prstDash val="solid"/>
+          </a:ln>
+        </p:spPr>
+      </p:sp>
+      <p:pic>
+        <p:nvPicPr>
+          <p:cNvPr id="45" name="Image 3" descr="preencoded.png">    </p:cNvPr>
           <p:cNvPicPr>
             <a:picLocks noChangeAspect="1"/>
           </p:cNvPicPr>
@@ -4040,8 +4927,8 @@
         </p:blipFill>
         <p:spPr>
           <a:xfrm>
-            <a:off x="8970264" y="2624328"/>
-            <a:ext cx="466344" cy="466344"/>
+            <a:off x="4709160" y="3840480"/>
+            <a:ext cx="274320" cy="274320"/>
           </a:xfrm>
           <a:prstGeom prst="rect">
             <a:avLst/>
@@ -4050,111 +4937,92 @@
       </p:pic>
       <p:sp>
         <p:nvSpPr>
-          <p:cNvPr id="21" name="Text 15"/>
-          <p:cNvSpPr/>
-          <p:nvPr/>
-        </p:nvSpPr>
-        <p:spPr>
-          <a:xfrm>
-            <a:off x="10872216" y="2286000"/>
-            <a:ext cx="822960" cy="640080"/>
-          </a:xfrm>
-          <a:prstGeom prst="rect">
-            <a:avLst/>
-          </a:prstGeom>
-          <a:noFill/>
-          <a:ln/>
-        </p:spPr>
-        <p:txBody>
-          <a:bodyPr wrap="square" lIns="0" tIns="0" rIns="0" bIns="0" rtlCol="0" anchor="t"/>
-          <a:lstStyle/>
-          <a:p>
-            <a:pPr algn="r" indent="0" marL="0">
-              <a:buNone/>
-            </a:pPr>
-            <a:r>
-              <a:rPr lang="en-US" sz="4000" b="1" dirty="0">
-                <a:solidFill>
-                  <a:srgbClr val="FBD8DF"/>
+          <p:cNvPr id="46" name="Text 40"/>
+          <p:cNvSpPr/>
+          <p:nvPr/>
+        </p:nvSpPr>
+        <p:spPr>
+          <a:xfrm>
+            <a:off x="5248656" y="3694176"/>
+            <a:ext cx="2514600" cy="566928"/>
+          </a:xfrm>
+          <a:prstGeom prst="rect">
+            <a:avLst/>
+          </a:prstGeom>
+          <a:noFill/>
+          <a:ln/>
+        </p:spPr>
+        <p:txBody>
+          <a:bodyPr wrap="square" lIns="0" tIns="0" rIns="0" bIns="0" rtlCol="0" anchor="ctr"/>
+          <a:lstStyle/>
+          <a:p>
+            <a:pPr algn="l" indent="0" marL="0">
+              <a:buNone/>
+            </a:pPr>
+            <a:r>
+              <a:rPr lang="en-US" sz="1600" b="1" dirty="0">
+                <a:solidFill>
+                  <a:srgbClr val="2B2B33"/>
                 </a:solidFill>
                 <a:latin typeface="Cambria" pitchFamily="34" charset="0"/>
                 <a:ea typeface="Cambria" pitchFamily="34" charset="-122"/>
                 <a:cs typeface="Cambria" pitchFamily="34" charset="-120"/>
               </a:rPr>
-              <a:t>03</a:t>
-            </a:r>
-            <a:endParaRPr lang="en-US" sz="4000" dirty="0"/>
-          </a:p>
-        </p:txBody>
-      </p:sp>
-      <p:sp>
-        <p:nvSpPr>
-          <p:cNvPr id="22" name="Text 16"/>
-          <p:cNvSpPr/>
-          <p:nvPr/>
-        </p:nvSpPr>
-        <p:spPr>
-          <a:xfrm>
-            <a:off x="8695944" y="3703320"/>
-            <a:ext cx="2971800" cy="292608"/>
-          </a:xfrm>
-          <a:prstGeom prst="rect">
-            <a:avLst/>
-          </a:prstGeom>
-          <a:noFill/>
-          <a:ln/>
-        </p:spPr>
-        <p:txBody>
-          <a:bodyPr wrap="square" rtlCol="0" anchor="t"/>
-          <a:lstStyle/>
-          <a:p>
-            <a:pPr algn="l" indent="0" marL="0">
-              <a:buNone/>
-            </a:pPr>
-            <a:r>
-              <a:rPr lang="en-US" sz="1300" b="1" spc="120" kern="0" dirty="0">
-                <a:solidFill>
-                  <a:srgbClr val="A4133C"/>
-                </a:solidFill>
-                <a:latin typeface="Calibri" pitchFamily="34" charset="0"/>
-                <a:ea typeface="Calibri" pitchFamily="34" charset="-122"/>
-                <a:cs typeface="Calibri" pitchFamily="34" charset="-120"/>
-              </a:rPr>
-              <a:t>CONSCIOUSNESS</a:t>
-            </a:r>
-            <a:endParaRPr lang="en-US" sz="1300" dirty="0"/>
-          </a:p>
-        </p:txBody>
-      </p:sp>
-      <p:sp>
-        <p:nvSpPr>
-          <p:cNvPr id="23" name="Text 17"/>
-          <p:cNvSpPr/>
-          <p:nvPr/>
-        </p:nvSpPr>
-        <p:spPr>
-          <a:xfrm>
-            <a:off x="8695944" y="4069080"/>
-            <a:ext cx="2880360" cy="1554480"/>
-          </a:xfrm>
-          <a:prstGeom prst="rect">
-            <a:avLst/>
-          </a:prstGeom>
-          <a:noFill/>
-          <a:ln/>
-        </p:spPr>
-        <p:txBody>
-          <a:bodyPr wrap="square" rtlCol="0" anchor="t"/>
+              <a:t>Blood Pressure</a:t>
+            </a:r>
+            <a:endParaRPr lang="en-US" sz="1600" dirty="0"/>
+          </a:p>
+        </p:txBody>
+      </p:sp>
+      <p:sp>
+        <p:nvSpPr>
+          <p:cNvPr id="47" name="Shape 41"/>
+          <p:cNvSpPr/>
+          <p:nvPr/>
+        </p:nvSpPr>
+        <p:spPr>
+          <a:xfrm>
+            <a:off x="4581144" y="4443984"/>
+            <a:ext cx="109728" cy="109728"/>
+          </a:xfrm>
+          <a:prstGeom prst="ellipse">
+            <a:avLst/>
+          </a:prstGeom>
+          <a:solidFill>
+            <a:srgbClr val="FF4D6D"/>
+          </a:solidFill>
+          <a:ln/>
+        </p:spPr>
+      </p:sp>
+      <p:sp>
+        <p:nvSpPr>
+          <p:cNvPr id="48" name="Text 42"/>
+          <p:cNvSpPr/>
+          <p:nvPr/>
+        </p:nvSpPr>
+        <p:spPr>
+          <a:xfrm>
+            <a:off x="4800600" y="4389120"/>
+            <a:ext cx="2880360" cy="502920"/>
+          </a:xfrm>
+          <a:prstGeom prst="rect">
+            <a:avLst/>
+          </a:prstGeom>
+          <a:noFill/>
+          <a:ln/>
+        </p:spPr>
+        <p:txBody>
+          <a:bodyPr wrap="square" lIns="0" tIns="0" rIns="0" bIns="0" rtlCol="0" anchor="t"/>
           <a:lstStyle/>
           <a:p>
             <a:pPr algn="l" indent="0" marL="0">
               <a:lnSpc>
-                <a:spcPct val="115000"/>
+                <a:spcPct val="100000"/>
               </a:lnSpc>
               <a:buNone/>
             </a:pPr>
             <a:r>
-              <a:rPr lang="en-US" sz="1650" dirty="0">
+              <a:rPr lang="en-US" sz="1200" dirty="0">
                 <a:solidFill>
                   <a:srgbClr val="2B2B33"/>
                 </a:solidFill>
@@ -4162,15 +5030,447 @@
                 <a:ea typeface="Calibri" pitchFamily="34" charset="-122"/>
                 <a:cs typeface="Calibri" pitchFamily="34" charset="-120"/>
               </a:rPr>
-              <a:t>Alert &amp; oriented to time, place and person</a:t>
-            </a:r>
-            <a:endParaRPr lang="en-US" sz="1650" dirty="0"/>
-          </a:p>
-        </p:txBody>
-      </p:sp>
-      <p:sp>
-        <p:nvSpPr>
-          <p:cNvPr id="24" name="Text 18"/>
+              <a:t>110/70 mmHg — right arm, lying</a:t>
+            </a:r>
+            <a:endParaRPr lang="en-US" sz="1200" dirty="0"/>
+          </a:p>
+        </p:txBody>
+      </p:sp>
+      <p:sp>
+        <p:nvSpPr>
+          <p:cNvPr id="49" name="Shape 43"/>
+          <p:cNvSpPr/>
+          <p:nvPr/>
+        </p:nvSpPr>
+        <p:spPr>
+          <a:xfrm>
+            <a:off x="4581144" y="4946904"/>
+            <a:ext cx="109728" cy="109728"/>
+          </a:xfrm>
+          <a:prstGeom prst="ellipse">
+            <a:avLst/>
+          </a:prstGeom>
+          <a:solidFill>
+            <a:srgbClr val="FF4D6D"/>
+          </a:solidFill>
+          <a:ln/>
+        </p:spPr>
+      </p:sp>
+      <p:sp>
+        <p:nvSpPr>
+          <p:cNvPr id="50" name="Text 44"/>
+          <p:cNvSpPr/>
+          <p:nvPr/>
+        </p:nvSpPr>
+        <p:spPr>
+          <a:xfrm>
+            <a:off x="4800600" y="4892040"/>
+            <a:ext cx="2880360" cy="502920"/>
+          </a:xfrm>
+          <a:prstGeom prst="rect">
+            <a:avLst/>
+          </a:prstGeom>
+          <a:noFill/>
+          <a:ln/>
+        </p:spPr>
+        <p:txBody>
+          <a:bodyPr wrap="square" lIns="0" tIns="0" rIns="0" bIns="0" rtlCol="0" anchor="t"/>
+          <a:lstStyle/>
+          <a:p>
+            <a:pPr algn="l" indent="0" marL="0">
+              <a:lnSpc>
+                <a:spcPct val="100000"/>
+              </a:lnSpc>
+              <a:buNone/>
+            </a:pPr>
+            <a:r>
+              <a:rPr lang="en-US" sz="1200" dirty="0">
+                <a:solidFill>
+                  <a:srgbClr val="2B2B33"/>
+                </a:solidFill>
+                <a:latin typeface="Calibri" pitchFamily="34" charset="0"/>
+                <a:ea typeface="Calibri" pitchFamily="34" charset="-122"/>
+                <a:cs typeface="Calibri" pitchFamily="34" charset="-120"/>
+              </a:rPr>
+              <a:t>No significant inter-arm difference</a:t>
+            </a:r>
+            <a:endParaRPr lang="en-US" sz="1200" dirty="0"/>
+          </a:p>
+        </p:txBody>
+      </p:sp>
+      <p:sp>
+        <p:nvSpPr>
+          <p:cNvPr id="51" name="Shape 45"/>
+          <p:cNvSpPr/>
+          <p:nvPr/>
+        </p:nvSpPr>
+        <p:spPr>
+          <a:xfrm>
+            <a:off x="4581144" y="5449824"/>
+            <a:ext cx="109728" cy="109728"/>
+          </a:xfrm>
+          <a:prstGeom prst="ellipse">
+            <a:avLst/>
+          </a:prstGeom>
+          <a:solidFill>
+            <a:srgbClr val="FF4D6D"/>
+          </a:solidFill>
+          <a:ln/>
+        </p:spPr>
+      </p:sp>
+      <p:sp>
+        <p:nvSpPr>
+          <p:cNvPr id="52" name="Text 46"/>
+          <p:cNvSpPr/>
+          <p:nvPr/>
+        </p:nvSpPr>
+        <p:spPr>
+          <a:xfrm>
+            <a:off x="4800600" y="5394960"/>
+            <a:ext cx="2880360" cy="502920"/>
+          </a:xfrm>
+          <a:prstGeom prst="rect">
+            <a:avLst/>
+          </a:prstGeom>
+          <a:noFill/>
+          <a:ln/>
+        </p:spPr>
+        <p:txBody>
+          <a:bodyPr wrap="square" lIns="0" tIns="0" rIns="0" bIns="0" rtlCol="0" anchor="t"/>
+          <a:lstStyle/>
+          <a:p>
+            <a:pPr algn="l" indent="0" marL="0">
+              <a:lnSpc>
+                <a:spcPct val="100000"/>
+              </a:lnSpc>
+              <a:buNone/>
+            </a:pPr>
+            <a:r>
+              <a:rPr lang="en-US" sz="1200" dirty="0">
+                <a:solidFill>
+                  <a:srgbClr val="2B2B33"/>
+                </a:solidFill>
+                <a:latin typeface="Calibri" pitchFamily="34" charset="0"/>
+                <a:ea typeface="Calibri" pitchFamily="34" charset="-122"/>
+                <a:cs typeface="Calibri" pitchFamily="34" charset="-120"/>
+              </a:rPr>
+              <a:t>No postural drop</a:t>
+            </a:r>
+            <a:endParaRPr lang="en-US" sz="1200" dirty="0"/>
+          </a:p>
+        </p:txBody>
+      </p:sp>
+      <p:sp>
+        <p:nvSpPr>
+          <p:cNvPr id="53" name="Shape 47"/>
+          <p:cNvSpPr/>
+          <p:nvPr/>
+        </p:nvSpPr>
+        <p:spPr>
+          <a:xfrm>
+            <a:off x="8074152" y="3474720"/>
+            <a:ext cx="3611880" cy="2514600"/>
+          </a:xfrm>
+          <a:prstGeom prst="roundRect">
+            <a:avLst>
+              <a:gd name="adj" fmla="val 4364"/>
+            </a:avLst>
+          </a:prstGeom>
+          <a:solidFill>
+            <a:srgbClr val="FFF0F3"/>
+          </a:solidFill>
+          <a:ln w="12700">
+            <a:solidFill>
+              <a:srgbClr val="FBD8DF"/>
+            </a:solidFill>
+            <a:prstDash val="solid"/>
+          </a:ln>
+          <a:effectLst>
+            <a:outerShdw sx="100000" sy="100000" kx="0" ky="0" algn="bl" rotWithShape="0" blurRad="127000" dist="50800" dir="5400000">
+              <a:srgbClr val="C9A3AC">
+                <a:alpha val="45000"/>
+              </a:srgbClr>
+            </a:outerShdw>
+          </a:effectLst>
+        </p:spPr>
+      </p:sp>
+      <p:sp>
+        <p:nvSpPr>
+          <p:cNvPr id="54" name="Shape 48"/>
+          <p:cNvSpPr/>
+          <p:nvPr/>
+        </p:nvSpPr>
+        <p:spPr>
+          <a:xfrm>
+            <a:off x="8348472" y="3694176"/>
+            <a:ext cx="566928" cy="566928"/>
+          </a:xfrm>
+          <a:prstGeom prst="ellipse">
+            <a:avLst/>
+          </a:prstGeom>
+          <a:solidFill>
+            <a:srgbClr val="FFFFFF"/>
+          </a:solidFill>
+          <a:ln w="12700">
+            <a:solidFill>
+              <a:srgbClr val="FBD8DF"/>
+            </a:solidFill>
+            <a:prstDash val="solid"/>
+          </a:ln>
+        </p:spPr>
+      </p:sp>
+      <p:pic>
+        <p:nvPicPr>
+          <p:cNvPr id="55" name="Image 4" descr="preencoded.png">    </p:cNvPr>
+          <p:cNvPicPr>
+            <a:picLocks noChangeAspect="1"/>
+          </p:cNvPicPr>
+          <p:nvPr/>
+        </p:nvPicPr>
+        <p:blipFill>
+          <a:blip r:embed="rId5"/>
+          <a:stretch>
+            <a:fillRect/>
+          </a:stretch>
+        </p:blipFill>
+        <p:spPr>
+          <a:xfrm>
+            <a:off x="8494776" y="3840480"/>
+            <a:ext cx="274320" cy="274320"/>
+          </a:xfrm>
+          <a:prstGeom prst="rect">
+            <a:avLst/>
+          </a:prstGeom>
+        </p:spPr>
+      </p:pic>
+      <p:sp>
+        <p:nvSpPr>
+          <p:cNvPr id="56" name="Text 49"/>
+          <p:cNvSpPr/>
+          <p:nvPr/>
+        </p:nvSpPr>
+        <p:spPr>
+          <a:xfrm>
+            <a:off x="9034272" y="3694176"/>
+            <a:ext cx="2514600" cy="566928"/>
+          </a:xfrm>
+          <a:prstGeom prst="rect">
+            <a:avLst/>
+          </a:prstGeom>
+          <a:noFill/>
+          <a:ln/>
+        </p:spPr>
+        <p:txBody>
+          <a:bodyPr wrap="square" lIns="0" tIns="0" rIns="0" bIns="0" rtlCol="0" anchor="ctr"/>
+          <a:lstStyle/>
+          <a:p>
+            <a:pPr algn="l" indent="0" marL="0">
+              <a:buNone/>
+            </a:pPr>
+            <a:r>
+              <a:rPr lang="en-US" sz="1600" b="1" dirty="0">
+                <a:solidFill>
+                  <a:srgbClr val="2B2B33"/>
+                </a:solidFill>
+                <a:latin typeface="Cambria" pitchFamily="34" charset="0"/>
+                <a:ea typeface="Cambria" pitchFamily="34" charset="-122"/>
+                <a:cs typeface="Cambria" pitchFamily="34" charset="-120"/>
+              </a:rPr>
+              <a:t>General</a:t>
+            </a:r>
+            <a:endParaRPr lang="en-US" sz="1600" dirty="0"/>
+          </a:p>
+        </p:txBody>
+      </p:sp>
+      <p:sp>
+        <p:nvSpPr>
+          <p:cNvPr id="57" name="Shape 50"/>
+          <p:cNvSpPr/>
+          <p:nvPr/>
+        </p:nvSpPr>
+        <p:spPr>
+          <a:xfrm>
+            <a:off x="8366760" y="4443984"/>
+            <a:ext cx="109728" cy="109728"/>
+          </a:xfrm>
+          <a:prstGeom prst="ellipse">
+            <a:avLst/>
+          </a:prstGeom>
+          <a:solidFill>
+            <a:srgbClr val="FF4D6D"/>
+          </a:solidFill>
+          <a:ln/>
+        </p:spPr>
+      </p:sp>
+      <p:sp>
+        <p:nvSpPr>
+          <p:cNvPr id="58" name="Text 51"/>
+          <p:cNvSpPr/>
+          <p:nvPr/>
+        </p:nvSpPr>
+        <p:spPr>
+          <a:xfrm>
+            <a:off x="8586216" y="4389120"/>
+            <a:ext cx="2880360" cy="502920"/>
+          </a:xfrm>
+          <a:prstGeom prst="rect">
+            <a:avLst/>
+          </a:prstGeom>
+          <a:noFill/>
+          <a:ln/>
+        </p:spPr>
+        <p:txBody>
+          <a:bodyPr wrap="square" lIns="0" tIns="0" rIns="0" bIns="0" rtlCol="0" anchor="t"/>
+          <a:lstStyle/>
+          <a:p>
+            <a:pPr algn="l" indent="0" marL="0">
+              <a:lnSpc>
+                <a:spcPct val="100000"/>
+              </a:lnSpc>
+              <a:buNone/>
+            </a:pPr>
+            <a:r>
+              <a:rPr lang="en-US" sz="1200" dirty="0">
+                <a:solidFill>
+                  <a:srgbClr val="2B2B33"/>
+                </a:solidFill>
+                <a:latin typeface="Calibri" pitchFamily="34" charset="0"/>
+                <a:ea typeface="Calibri" pitchFamily="34" charset="-122"/>
+                <a:cs typeface="Calibri" pitchFamily="34" charset="-120"/>
+              </a:rPr>
+              <a:t>Thin, lean, middle-aged female; comfortable in bed</a:t>
+            </a:r>
+            <a:endParaRPr lang="en-US" sz="1200" dirty="0"/>
+          </a:p>
+        </p:txBody>
+      </p:sp>
+      <p:sp>
+        <p:nvSpPr>
+          <p:cNvPr id="59" name="Shape 52"/>
+          <p:cNvSpPr/>
+          <p:nvPr/>
+        </p:nvSpPr>
+        <p:spPr>
+          <a:xfrm>
+            <a:off x="8366760" y="4946904"/>
+            <a:ext cx="109728" cy="109728"/>
+          </a:xfrm>
+          <a:prstGeom prst="ellipse">
+            <a:avLst/>
+          </a:prstGeom>
+          <a:solidFill>
+            <a:srgbClr val="FF4D6D"/>
+          </a:solidFill>
+          <a:ln/>
+        </p:spPr>
+      </p:sp>
+      <p:sp>
+        <p:nvSpPr>
+          <p:cNvPr id="60" name="Text 53"/>
+          <p:cNvSpPr/>
+          <p:nvPr/>
+        </p:nvSpPr>
+        <p:spPr>
+          <a:xfrm>
+            <a:off x="8586216" y="4892040"/>
+            <a:ext cx="2880360" cy="502920"/>
+          </a:xfrm>
+          <a:prstGeom prst="rect">
+            <a:avLst/>
+          </a:prstGeom>
+          <a:noFill/>
+          <a:ln/>
+        </p:spPr>
+        <p:txBody>
+          <a:bodyPr wrap="square" lIns="0" tIns="0" rIns="0" bIns="0" rtlCol="0" anchor="t"/>
+          <a:lstStyle/>
+          <a:p>
+            <a:pPr algn="l" indent="0" marL="0">
+              <a:lnSpc>
+                <a:spcPct val="100000"/>
+              </a:lnSpc>
+              <a:buNone/>
+            </a:pPr>
+            <a:r>
+              <a:rPr lang="en-US" sz="1200" dirty="0">
+                <a:solidFill>
+                  <a:srgbClr val="2B2B33"/>
+                </a:solidFill>
+                <a:latin typeface="Calibri" pitchFamily="34" charset="0"/>
+                <a:ea typeface="Calibri" pitchFamily="34" charset="-122"/>
+                <a:cs typeface="Calibri" pitchFamily="34" charset="-120"/>
+              </a:rPr>
+              <a:t>IV cannula in situ (right hand)</a:t>
+            </a:r>
+            <a:endParaRPr lang="en-US" sz="1200" dirty="0"/>
+          </a:p>
+        </p:txBody>
+      </p:sp>
+      <p:sp>
+        <p:nvSpPr>
+          <p:cNvPr id="61" name="Shape 54"/>
+          <p:cNvSpPr/>
+          <p:nvPr/>
+        </p:nvSpPr>
+        <p:spPr>
+          <a:xfrm>
+            <a:off x="8366760" y="5449824"/>
+            <a:ext cx="109728" cy="109728"/>
+          </a:xfrm>
+          <a:prstGeom prst="ellipse">
+            <a:avLst/>
+          </a:prstGeom>
+          <a:solidFill>
+            <a:srgbClr val="FF4D6D"/>
+          </a:solidFill>
+          <a:ln/>
+        </p:spPr>
+      </p:sp>
+      <p:sp>
+        <p:nvSpPr>
+          <p:cNvPr id="62" name="Text 55"/>
+          <p:cNvSpPr/>
+          <p:nvPr/>
+        </p:nvSpPr>
+        <p:spPr>
+          <a:xfrm>
+            <a:off x="8586216" y="5394960"/>
+            <a:ext cx="2880360" cy="502920"/>
+          </a:xfrm>
+          <a:prstGeom prst="rect">
+            <a:avLst/>
+          </a:prstGeom>
+          <a:noFill/>
+          <a:ln/>
+        </p:spPr>
+        <p:txBody>
+          <a:bodyPr wrap="square" lIns="0" tIns="0" rIns="0" bIns="0" rtlCol="0" anchor="t"/>
+          <a:lstStyle/>
+          <a:p>
+            <a:pPr algn="l" indent="0" marL="0">
+              <a:lnSpc>
+                <a:spcPct val="100000"/>
+              </a:lnSpc>
+              <a:buNone/>
+            </a:pPr>
+            <a:r>
+              <a:rPr lang="en-US" sz="1200" dirty="0">
+                <a:solidFill>
+                  <a:srgbClr val="2B2B33"/>
+                </a:solidFill>
+                <a:latin typeface="Calibri" pitchFamily="34" charset="0"/>
+                <a:ea typeface="Calibri" pitchFamily="34" charset="-122"/>
+                <a:cs typeface="Calibri" pitchFamily="34" charset="-120"/>
+              </a:rPr>
+              <a:t>Alert &amp; oriented — time, place, person</a:t>
+            </a:r>
+            <a:endParaRPr lang="en-US" sz="1200" dirty="0"/>
+          </a:p>
+        </p:txBody>
+      </p:sp>
+      <p:sp>
+        <p:nvSpPr>
+          <p:cNvPr id="63" name="Text 56"/>
           <p:cNvSpPr/>
           <p:nvPr/>
         </p:nvSpPr>
@@ -4209,7 +5509,7 @@
       </p:sp>
       <p:sp>
         <p:nvSpPr>
-          <p:cNvPr id="25" name="Text 19"/>
+          <p:cNvPr id="64" name="Text 57"/>
           <p:cNvSpPr/>
           <p:nvPr/>
         </p:nvSpPr>

--- a/presentations/Clinicopathological-Conference.pptx
+++ b/presentations/Clinicopathological-Conference.pptx
@@ -3075,7 +3075,7 @@
                 <a:ea typeface="Calibri" pitchFamily="34" charset="-122"/>
                 <a:cs typeface="Calibri" pitchFamily="34" charset="-120"/>
               </a:rPr>
-              <a:t>DEPARTMENT OF CARDIOLOGY  ·  PEIC, BAHAWALPUR</a:t>
+              <a:t>DEPARTMENT OF CARDIOLOGY  ·  PIC, BAHAWALPUR</a:t>
             </a:r>
             <a:endParaRPr lang="en-US" sz="1400" dirty="0"/>
           </a:p>
@@ -3316,7 +3316,7 @@
                 <a:ea typeface="Calibri" pitchFamily="34" charset="-122"/>
                 <a:cs typeface="Calibri" pitchFamily="34" charset="-120"/>
               </a:rPr>
-              <a:t>PGR Cardiology  ·  PEIC, BWP</a:t>
+              <a:t>PGR Cardiology  ·  PIC, BWP</a:t>
             </a:r>
             <a:endParaRPr lang="en-US" sz="1900" dirty="0"/>
           </a:p>

--- a/presentations/Clinicopathological-Conference.pptx
+++ b/presentations/Clinicopathological-Conference.pptx
@@ -6008,11 +6008,11 @@
         <p:spPr>
           <a:xfrm>
             <a:off x="4937760" y="1783080"/>
-            <a:ext cx="6766560" cy="777240"/>
+            <a:ext cx="6766560" cy="822960"/>
           </a:xfrm>
           <a:prstGeom prst="roundRect">
             <a:avLst>
-              <a:gd name="adj" fmla="val 11765"/>
+              <a:gd name="adj" fmla="val 12222"/>
             </a:avLst>
           </a:prstGeom>
           <a:solidFill>
@@ -6041,18 +6041,18 @@
         </p:nvSpPr>
         <p:spPr>
           <a:xfrm>
-            <a:off x="5212080" y="1901952"/>
-            <a:ext cx="548640" cy="548640"/>
+            <a:off x="5193792" y="1920240"/>
+            <a:ext cx="475488" cy="475488"/>
           </a:xfrm>
           <a:prstGeom prst="ellipse">
             <a:avLst/>
           </a:prstGeom>
           <a:solidFill>
-            <a:srgbClr val="FFFFFF"/>
+            <a:srgbClr val="A4133C"/>
           </a:solidFill>
           <a:ln w="12700">
             <a:solidFill>
-              <a:srgbClr val="FBD8DF"/>
+              <a:srgbClr val="FF4D6D"/>
             </a:solidFill>
             <a:prstDash val="solid"/>
           </a:ln>
@@ -6074,8 +6074,8 @@
         </p:blipFill>
         <p:spPr>
           <a:xfrm>
-            <a:off x="5349240" y="2039112"/>
-            <a:ext cx="274320" cy="274320"/>
+            <a:off x="5312664" y="2039112"/>
+            <a:ext cx="237744" cy="237744"/>
           </a:xfrm>
           <a:prstGeom prst="rect">
             <a:avLst/>
@@ -6090,8 +6090,8 @@
         </p:nvSpPr>
         <p:spPr>
           <a:xfrm>
-            <a:off x="5925312" y="1901952"/>
-            <a:ext cx="5577840" cy="237744"/>
+            <a:off x="5852160" y="1975104"/>
+            <a:ext cx="5623560" cy="256032"/>
           </a:xfrm>
           <a:prstGeom prst="rect">
             <a:avLst/>
@@ -6107,7 +6107,7 @@
               <a:buNone/>
             </a:pPr>
             <a:r>
-              <a:rPr lang="en-US" sz="1150" b="1" spc="120" kern="0" dirty="0">
+              <a:rPr lang="en-US" sz="1150" b="1" spc="150" kern="0" dirty="0">
                 <a:solidFill>
                   <a:srgbClr val="A4133C"/>
                 </a:solidFill>
@@ -6129,8 +6129,8 @@
         </p:nvSpPr>
         <p:spPr>
           <a:xfrm>
-            <a:off x="5925312" y="2148840"/>
-            <a:ext cx="5532120" cy="365760"/>
+            <a:off x="5852160" y="2167128"/>
+            <a:ext cx="5623560" cy="384048"/>
           </a:xfrm>
           <a:prstGeom prst="rect">
             <a:avLst/>
@@ -6149,17 +6149,17 @@
               <a:buNone/>
             </a:pPr>
             <a:r>
-              <a:rPr lang="en-US" sz="1350" b="1" dirty="0">
+              <a:rPr lang="en-US" sz="1250" dirty="0">
                 <a:solidFill>
                   <a:srgbClr val="2B2B33"/>
                 </a:solidFill>
-                <a:latin typeface="Cambria" pitchFamily="34" charset="0"/>
-                <a:ea typeface="Cambria" pitchFamily="34" charset="-122"/>
-                <a:cs typeface="Cambria" pitchFamily="34" charset="-120"/>
-              </a:rPr>
-              <a:t>Shape normal, no scar, no pulsations visible over the precordium</a:t>
-            </a:r>
-            <a:endParaRPr lang="en-US" sz="1350" dirty="0"/>
+                <a:latin typeface="Calibri" pitchFamily="34" charset="0"/>
+                <a:ea typeface="Calibri" pitchFamily="34" charset="-122"/>
+                <a:cs typeface="Calibri" pitchFamily="34" charset="-120"/>
+              </a:rPr>
+              <a:t>Shape of the precordium was normal; the rest of the inspection could not be performed because of limited exposure</a:t>
+            </a:r>
+            <a:endParaRPr lang="en-US" sz="1250" dirty="0"/>
           </a:p>
         </p:txBody>
       </p:sp>
@@ -6171,12 +6171,12 @@
         </p:nvSpPr>
         <p:spPr>
           <a:xfrm>
-            <a:off x="4937760" y="2651760"/>
-            <a:ext cx="6766560" cy="1554480"/>
+            <a:off x="4937760" y="2679192"/>
+            <a:ext cx="6766560" cy="1572768"/>
           </a:xfrm>
           <a:prstGeom prst="roundRect">
             <a:avLst>
-              <a:gd name="adj" fmla="val 5882"/>
+              <a:gd name="adj" fmla="val 6395"/>
             </a:avLst>
           </a:prstGeom>
           <a:solidFill>
@@ -6205,18 +6205,18 @@
         </p:nvSpPr>
         <p:spPr>
           <a:xfrm>
-            <a:off x="5212080" y="2816352"/>
-            <a:ext cx="548640" cy="548640"/>
+            <a:off x="5193792" y="2816352"/>
+            <a:ext cx="475488" cy="475488"/>
           </a:xfrm>
           <a:prstGeom prst="ellipse">
             <a:avLst/>
           </a:prstGeom>
           <a:solidFill>
-            <a:srgbClr val="FFFFFF"/>
+            <a:srgbClr val="A4133C"/>
           </a:solidFill>
           <a:ln w="12700">
             <a:solidFill>
-              <a:srgbClr val="FBD8DF"/>
+              <a:srgbClr val="FF4D6D"/>
             </a:solidFill>
             <a:prstDash val="solid"/>
           </a:ln>
@@ -6238,8 +6238,8 @@
         </p:blipFill>
         <p:spPr>
           <a:xfrm>
-            <a:off x="5349240" y="2953512"/>
-            <a:ext cx="274320" cy="274320"/>
+            <a:off x="5312664" y="2935224"/>
+            <a:ext cx="237744" cy="237744"/>
           </a:xfrm>
           <a:prstGeom prst="rect">
             <a:avLst/>
@@ -6254,8 +6254,8 @@
         </p:nvSpPr>
         <p:spPr>
           <a:xfrm>
-            <a:off x="5925312" y="2852928"/>
-            <a:ext cx="5577840" cy="274320"/>
+            <a:off x="5852160" y="2871216"/>
+            <a:ext cx="5623560" cy="256032"/>
           </a:xfrm>
           <a:prstGeom prst="rect">
             <a:avLst/>
@@ -6271,7 +6271,7 @@
               <a:buNone/>
             </a:pPr>
             <a:r>
-              <a:rPr lang="en-US" sz="1200" b="1" spc="120" kern="0" dirty="0">
+              <a:rPr lang="en-US" sz="1150" b="1" spc="150" kern="0" dirty="0">
                 <a:solidFill>
                   <a:srgbClr val="A4133C"/>
                 </a:solidFill>
@@ -6281,7 +6281,7 @@
               </a:rPr>
               <a:t>PALPATION</a:t>
             </a:r>
-            <a:endParaRPr lang="en-US" sz="1200" dirty="0"/>
+            <a:endParaRPr lang="en-US" sz="1150" dirty="0"/>
           </a:p>
         </p:txBody>
       </p:sp>
@@ -6293,8 +6293,8 @@
         </p:nvSpPr>
         <p:spPr>
           <a:xfrm>
-            <a:off x="5394960" y="3255264"/>
-            <a:ext cx="118872" cy="118872"/>
+            <a:off x="5394960" y="3401568"/>
+            <a:ext cx="109728" cy="109728"/>
           </a:xfrm>
           <a:prstGeom prst="ellipse">
             <a:avLst/>
@@ -6313,8 +6313,8 @@
         </p:nvSpPr>
         <p:spPr>
           <a:xfrm>
-            <a:off x="5669280" y="3182112"/>
-            <a:ext cx="5623560" cy="420624"/>
+            <a:off x="5650992" y="3337560"/>
+            <a:ext cx="5669280" cy="384048"/>
           </a:xfrm>
           <a:prstGeom prst="rect">
             <a:avLst/>
@@ -6333,7 +6333,7 @@
               <a:buNone/>
             </a:pPr>
             <a:r>
-              <a:rPr lang="en-US" sz="1250" dirty="0">
+              <a:rPr lang="en-US" sz="1200" dirty="0">
                 <a:solidFill>
                   <a:srgbClr val="2B2B33"/>
                 </a:solidFill>
@@ -6343,7 +6343,7 @@
               </a:rPr>
               <a:t>Apex beat in 5th intercostal space, medial to midclavicular line — normal character</a:t>
             </a:r>
-            <a:endParaRPr lang="en-US" sz="1250" dirty="0"/>
+            <a:endParaRPr lang="en-US" sz="1200" dirty="0"/>
           </a:p>
         </p:txBody>
       </p:sp>
@@ -6355,8 +6355,8 @@
         </p:nvSpPr>
         <p:spPr>
           <a:xfrm>
-            <a:off x="5394960" y="3712464"/>
-            <a:ext cx="118872" cy="118872"/>
+            <a:off x="5394960" y="3785616"/>
+            <a:ext cx="109728" cy="109728"/>
           </a:xfrm>
           <a:prstGeom prst="ellipse">
             <a:avLst/>
@@ -6375,8 +6375,8 @@
         </p:nvSpPr>
         <p:spPr>
           <a:xfrm>
-            <a:off x="5669280" y="3639312"/>
-            <a:ext cx="5623560" cy="420624"/>
+            <a:off x="5650992" y="3721608"/>
+            <a:ext cx="5669280" cy="384048"/>
           </a:xfrm>
           <a:prstGeom prst="rect">
             <a:avLst/>
@@ -6395,7 +6395,7 @@
               <a:buNone/>
             </a:pPr>
             <a:r>
-              <a:rPr lang="en-US" sz="1250" dirty="0">
+              <a:rPr lang="en-US" sz="1200" dirty="0">
                 <a:solidFill>
                   <a:srgbClr val="2B2B33"/>
                 </a:solidFill>
@@ -6405,7 +6405,7 @@
               </a:rPr>
               <a:t>No thrill; no other palpable sounds</a:t>
             </a:r>
-            <a:endParaRPr lang="en-US" sz="1250" dirty="0"/>
+            <a:endParaRPr lang="en-US" sz="1200" dirty="0"/>
           </a:p>
         </p:txBody>
       </p:sp>
@@ -6417,8 +6417,8 @@
         </p:nvSpPr>
         <p:spPr>
           <a:xfrm>
-            <a:off x="5394960" y="4023360"/>
-            <a:ext cx="118872" cy="118872"/>
+            <a:off x="5394960" y="4041648"/>
+            <a:ext cx="109728" cy="109728"/>
           </a:xfrm>
           <a:prstGeom prst="ellipse">
             <a:avLst/>
@@ -6437,8 +6437,8 @@
         </p:nvSpPr>
         <p:spPr>
           <a:xfrm>
-            <a:off x="5669280" y="3950208"/>
-            <a:ext cx="5623560" cy="420624"/>
+            <a:off x="5650992" y="3977640"/>
+            <a:ext cx="5669280" cy="384048"/>
           </a:xfrm>
           <a:prstGeom prst="rect">
             <a:avLst/>
@@ -6457,7 +6457,7 @@
               <a:buNone/>
             </a:pPr>
             <a:r>
-              <a:rPr lang="en-US" sz="1250" dirty="0">
+              <a:rPr lang="en-US" sz="1200" dirty="0">
                 <a:solidFill>
                   <a:srgbClr val="2B2B33"/>
                 </a:solidFill>
@@ -6467,7 +6467,7 @@
               </a:rPr>
               <a:t>No left parasternal heave</a:t>
             </a:r>
-            <a:endParaRPr lang="en-US" sz="1250" dirty="0"/>
+            <a:endParaRPr lang="en-US" sz="1200" dirty="0"/>
           </a:p>
         </p:txBody>
       </p:sp>
@@ -6479,12 +6479,12 @@
         </p:nvSpPr>
         <p:spPr>
           <a:xfrm>
-            <a:off x="4937760" y="4297680"/>
-            <a:ext cx="6766560" cy="1691640"/>
+            <a:off x="4937760" y="4325112"/>
+            <a:ext cx="6766560" cy="1664208"/>
           </a:xfrm>
           <a:prstGeom prst="roundRect">
             <a:avLst>
-              <a:gd name="adj" fmla="val 5405"/>
+              <a:gd name="adj" fmla="val 6044"/>
             </a:avLst>
           </a:prstGeom>
           <a:solidFill>
@@ -6513,57 +6513,33 @@
         </p:nvSpPr>
         <p:spPr>
           <a:xfrm>
-            <a:off x="5212080" y="4462272"/>
-            <a:ext cx="548640" cy="548640"/>
+            <a:off x="5193792" y="4462272"/>
+            <a:ext cx="475488" cy="475488"/>
           </a:xfrm>
           <a:prstGeom prst="ellipse">
             <a:avLst/>
           </a:prstGeom>
           <a:solidFill>
-            <a:srgbClr val="FFFFFF"/>
+            <a:srgbClr val="A4133C"/>
           </a:solidFill>
           <a:ln w="12700">
             <a:solidFill>
-              <a:srgbClr val="FBD8DF"/>
+              <a:srgbClr val="FF4D6D"/>
             </a:solidFill>
             <a:prstDash val="solid"/>
           </a:ln>
         </p:spPr>
       </p:sp>
-      <p:pic>
-        <p:nvPicPr>
-          <p:cNvPr id="34" name="Image 4" descr="preencoded.png">    </p:cNvPr>
-          <p:cNvPicPr>
-            <a:picLocks noChangeAspect="1"/>
-          </p:cNvPicPr>
-          <p:nvPr/>
-        </p:nvPicPr>
-        <p:blipFill>
-          <a:blip r:embed="rId5"/>
-          <a:stretch>
-            <a:fillRect/>
-          </a:stretch>
-        </p:blipFill>
-        <p:spPr>
-          <a:xfrm>
-            <a:off x="5349240" y="4599432"/>
-            <a:ext cx="274320" cy="274320"/>
-          </a:xfrm>
-          <a:prstGeom prst="rect">
-            <a:avLst/>
-          </a:prstGeom>
-        </p:spPr>
-      </p:pic>
-      <p:sp>
-        <p:nvSpPr>
-          <p:cNvPr id="35" name="Text 28"/>
-          <p:cNvSpPr/>
-          <p:nvPr/>
-        </p:nvSpPr>
-        <p:spPr>
-          <a:xfrm>
-            <a:off x="5925312" y="4498848"/>
-            <a:ext cx="5577840" cy="274320"/>
+      <p:sp>
+        <p:nvSpPr>
+          <p:cNvPr id="34" name="Text 28"/>
+          <p:cNvSpPr/>
+          <p:nvPr/>
+        </p:nvSpPr>
+        <p:spPr>
+          <a:xfrm>
+            <a:off x="5852160" y="4517136"/>
+            <a:ext cx="5623560" cy="256032"/>
           </a:xfrm>
           <a:prstGeom prst="rect">
             <a:avLst/>
@@ -6579,7 +6555,7 @@
               <a:buNone/>
             </a:pPr>
             <a:r>
-              <a:rPr lang="en-US" sz="1200" b="1" spc="120" kern="0" dirty="0">
+              <a:rPr lang="en-US" sz="1150" b="1" spc="150" kern="0" dirty="0">
                 <a:solidFill>
                   <a:srgbClr val="A4133C"/>
                 </a:solidFill>
@@ -6589,20 +6565,20 @@
               </a:rPr>
               <a:t>AUSCULTATION</a:t>
             </a:r>
-            <a:endParaRPr lang="en-US" sz="1200" dirty="0"/>
-          </a:p>
-        </p:txBody>
-      </p:sp>
-      <p:sp>
-        <p:nvSpPr>
-          <p:cNvPr id="36" name="Shape 29"/>
-          <p:cNvSpPr/>
-          <p:nvPr/>
-        </p:nvSpPr>
-        <p:spPr>
-          <a:xfrm>
-            <a:off x="5394960" y="4901184"/>
-            <a:ext cx="118872" cy="118872"/>
+            <a:endParaRPr lang="en-US" sz="1150" dirty="0"/>
+          </a:p>
+        </p:txBody>
+      </p:sp>
+      <p:sp>
+        <p:nvSpPr>
+          <p:cNvPr id="35" name="Shape 29"/>
+          <p:cNvSpPr/>
+          <p:nvPr/>
+        </p:nvSpPr>
+        <p:spPr>
+          <a:xfrm>
+            <a:off x="5394960" y="5029200"/>
+            <a:ext cx="109728" cy="109728"/>
           </a:xfrm>
           <a:prstGeom prst="ellipse">
             <a:avLst/>
@@ -6615,14 +6591,14 @@
       </p:sp>
       <p:sp>
         <p:nvSpPr>
-          <p:cNvPr id="37" name="Text 30"/>
-          <p:cNvSpPr/>
-          <p:nvPr/>
-        </p:nvSpPr>
-        <p:spPr>
-          <a:xfrm>
-            <a:off x="5669280" y="4828032"/>
-            <a:ext cx="5623560" cy="420624"/>
+          <p:cNvPr id="36" name="Text 30"/>
+          <p:cNvSpPr/>
+          <p:nvPr/>
+        </p:nvSpPr>
+        <p:spPr>
+          <a:xfrm>
+            <a:off x="5650992" y="4965192"/>
+            <a:ext cx="5669280" cy="384048"/>
           </a:xfrm>
           <a:prstGeom prst="rect">
             <a:avLst/>
@@ -6641,7 +6617,7 @@
               <a:buNone/>
             </a:pPr>
             <a:r>
-              <a:rPr lang="en-US" sz="1250" dirty="0">
+              <a:rPr lang="en-US" sz="1200" dirty="0">
                 <a:solidFill>
                   <a:srgbClr val="2B2B33"/>
                 </a:solidFill>
@@ -6651,20 +6627,20 @@
               </a:rPr>
               <a:t>1st heart sound &amp; both components of 2nd heart sound audible at their respective areas</a:t>
             </a:r>
-            <a:endParaRPr lang="en-US" sz="1250" dirty="0"/>
-          </a:p>
-        </p:txBody>
-      </p:sp>
-      <p:sp>
-        <p:nvSpPr>
-          <p:cNvPr id="38" name="Shape 31"/>
-          <p:cNvSpPr/>
-          <p:nvPr/>
-        </p:nvSpPr>
-        <p:spPr>
-          <a:xfrm>
-            <a:off x="5394960" y="5340096"/>
-            <a:ext cx="118872" cy="118872"/>
+            <a:endParaRPr lang="en-US" sz="1200" dirty="0"/>
+          </a:p>
+        </p:txBody>
+      </p:sp>
+      <p:sp>
+        <p:nvSpPr>
+          <p:cNvPr id="37" name="Shape 31"/>
+          <p:cNvSpPr/>
+          <p:nvPr/>
+        </p:nvSpPr>
+        <p:spPr>
+          <a:xfrm>
+            <a:off x="5394960" y="5394960"/>
+            <a:ext cx="109728" cy="109728"/>
           </a:xfrm>
           <a:prstGeom prst="ellipse">
             <a:avLst/>
@@ -6677,14 +6653,14 @@
       </p:sp>
       <p:sp>
         <p:nvSpPr>
-          <p:cNvPr id="39" name="Text 32"/>
-          <p:cNvSpPr/>
-          <p:nvPr/>
-        </p:nvSpPr>
-        <p:spPr>
-          <a:xfrm>
-            <a:off x="5669280" y="5266944"/>
-            <a:ext cx="5623560" cy="420624"/>
+          <p:cNvPr id="38" name="Text 32"/>
+          <p:cNvSpPr/>
+          <p:nvPr/>
+        </p:nvSpPr>
+        <p:spPr>
+          <a:xfrm>
+            <a:off x="5650992" y="5330952"/>
+            <a:ext cx="5669280" cy="384048"/>
           </a:xfrm>
           <a:prstGeom prst="rect">
             <a:avLst/>
@@ -6703,7 +6679,7 @@
               <a:buNone/>
             </a:pPr>
             <a:r>
-              <a:rPr lang="en-US" sz="1250" dirty="0">
+              <a:rPr lang="en-US" sz="1200" dirty="0">
                 <a:solidFill>
                   <a:srgbClr val="2B2B33"/>
                 </a:solidFill>
@@ -6713,20 +6689,20 @@
               </a:rPr>
               <a:t>1st heart sound of variable intensity; both components of 2nd heart sound of normal intensity</a:t>
             </a:r>
-            <a:endParaRPr lang="en-US" sz="1250" dirty="0"/>
-          </a:p>
-        </p:txBody>
-      </p:sp>
-      <p:sp>
-        <p:nvSpPr>
-          <p:cNvPr id="40" name="Shape 33"/>
-          <p:cNvSpPr/>
-          <p:nvPr/>
-        </p:nvSpPr>
-        <p:spPr>
-          <a:xfrm>
-            <a:off x="5394960" y="5779008"/>
-            <a:ext cx="118872" cy="118872"/>
+            <a:endParaRPr lang="en-US" sz="1200" dirty="0"/>
+          </a:p>
+        </p:txBody>
+      </p:sp>
+      <p:sp>
+        <p:nvSpPr>
+          <p:cNvPr id="39" name="Shape 33"/>
+          <p:cNvSpPr/>
+          <p:nvPr/>
+        </p:nvSpPr>
+        <p:spPr>
+          <a:xfrm>
+            <a:off x="5394960" y="5760720"/>
+            <a:ext cx="109728" cy="109728"/>
           </a:xfrm>
           <a:prstGeom prst="ellipse">
             <a:avLst/>
@@ -6739,14 +6715,14 @@
       </p:sp>
       <p:sp>
         <p:nvSpPr>
-          <p:cNvPr id="41" name="Text 34"/>
-          <p:cNvSpPr/>
-          <p:nvPr/>
-        </p:nvSpPr>
-        <p:spPr>
-          <a:xfrm>
-            <a:off x="5669280" y="5705856"/>
-            <a:ext cx="5623560" cy="420624"/>
+          <p:cNvPr id="40" name="Text 34"/>
+          <p:cNvSpPr/>
+          <p:nvPr/>
+        </p:nvSpPr>
+        <p:spPr>
+          <a:xfrm>
+            <a:off x="5650992" y="5696712"/>
+            <a:ext cx="5669280" cy="384048"/>
           </a:xfrm>
           <a:prstGeom prst="rect">
             <a:avLst/>
@@ -6765,7 +6741,7 @@
               <a:buNone/>
             </a:pPr>
             <a:r>
-              <a:rPr lang="en-US" sz="1250" dirty="0">
+              <a:rPr lang="en-US" sz="1200" dirty="0">
                 <a:solidFill>
                   <a:srgbClr val="2B2B33"/>
                 </a:solidFill>
@@ -6775,13 +6751,13 @@
               </a:rPr>
               <a:t>No added sounds audible</a:t>
             </a:r>
-            <a:endParaRPr lang="en-US" sz="1250" dirty="0"/>
-          </a:p>
-        </p:txBody>
-      </p:sp>
-      <p:sp>
-        <p:nvSpPr>
-          <p:cNvPr id="42" name="Text 35"/>
+            <a:endParaRPr lang="en-US" sz="1200" dirty="0"/>
+          </a:p>
+        </p:txBody>
+      </p:sp>
+      <p:sp>
+        <p:nvSpPr>
+          <p:cNvPr id="41" name="Text 35"/>
           <p:cNvSpPr/>
           <p:nvPr/>
         </p:nvSpPr>
@@ -6820,7 +6796,7 @@
       </p:sp>
       <p:sp>
         <p:nvSpPr>
-          <p:cNvPr id="43" name="Text 36"/>
+          <p:cNvPr id="42" name="Text 36"/>
           <p:cNvSpPr/>
           <p:nvPr/>
         </p:nvSpPr>

--- a/presentations/Clinicopathological-Conference.pptx
+++ b/presentations/Clinicopathological-Conference.pptx
@@ -5713,306 +5713,12 @@
         </p:nvSpPr>
         <p:spPr>
           <a:xfrm>
-            <a:off x="502920" y="1783080"/>
-            <a:ext cx="4114800" cy="4206240"/>
+            <a:off x="502920" y="1691640"/>
+            <a:ext cx="11183112" cy="1097280"/>
           </a:xfrm>
           <a:prstGeom prst="roundRect">
             <a:avLst>
-              <a:gd name="adj" fmla="val 3111"/>
-            </a:avLst>
-          </a:prstGeom>
-          <a:solidFill>
-            <a:srgbClr val="590D22"/>
-          </a:solidFill>
-          <a:ln/>
-          <a:effectLst>
-            <a:outerShdw sx="100000" sy="100000" kx="0" ky="0" algn="bl" rotWithShape="0" blurRad="127000" dist="50800" dir="5400000">
-              <a:srgbClr val="C9A3AC">
-                <a:alpha val="45000"/>
-              </a:srgbClr>
-            </a:outerShdw>
-          </a:effectLst>
-        </p:spPr>
-      </p:sp>
-      <p:sp>
-        <p:nvSpPr>
-          <p:cNvPr id="7" name="Shape 4"/>
-          <p:cNvSpPr/>
-          <p:nvPr/>
-        </p:nvSpPr>
-        <p:spPr>
-          <a:xfrm>
-            <a:off x="1691640" y="2423160"/>
-            <a:ext cx="1737360" cy="1737360"/>
-          </a:xfrm>
-          <a:prstGeom prst="ellipse">
-            <a:avLst/>
-          </a:prstGeom>
-          <a:solidFill>
-            <a:srgbClr val="FFFFFF">
-              <a:alpha val="10000"/>
-            </a:srgbClr>
-          </a:solidFill>
-          <a:ln w="19050">
-            <a:solidFill>
-              <a:srgbClr val="FF4D6D"/>
-            </a:solidFill>
-            <a:prstDash val="solid"/>
-          </a:ln>
-        </p:spPr>
-      </p:sp>
-      <p:pic>
-        <p:nvPicPr>
-          <p:cNvPr id="8" name="Image 1" descr="preencoded.png">    </p:cNvPr>
-          <p:cNvPicPr>
-            <a:picLocks noChangeAspect="1"/>
-          </p:cNvPicPr>
-          <p:nvPr/>
-        </p:nvPicPr>
-        <p:blipFill>
-          <a:blip r:embed="rId2"/>
-          <a:stretch>
-            <a:fillRect/>
-          </a:stretch>
-        </p:blipFill>
-        <p:spPr>
-          <a:xfrm>
-            <a:off x="2057400" y="2788920"/>
-            <a:ext cx="1005840" cy="1005840"/>
-          </a:xfrm>
-          <a:prstGeom prst="rect">
-            <a:avLst/>
-          </a:prstGeom>
-        </p:spPr>
-      </p:pic>
-      <p:sp>
-        <p:nvSpPr>
-          <p:cNvPr id="9" name="Text 5"/>
-          <p:cNvSpPr/>
-          <p:nvPr/>
-        </p:nvSpPr>
-        <p:spPr>
-          <a:xfrm>
-            <a:off x="685800" y="4434840"/>
-            <a:ext cx="3749040" cy="548640"/>
-          </a:xfrm>
-          <a:prstGeom prst="rect">
-            <a:avLst/>
-          </a:prstGeom>
-          <a:noFill/>
-          <a:ln/>
-        </p:spPr>
-        <p:txBody>
-          <a:bodyPr wrap="square" rtlCol="0" anchor="t"/>
-          <a:lstStyle/>
-          <a:p>
-            <a:pPr algn="ctr" indent="0" marL="0">
-              <a:buNone/>
-            </a:pPr>
-            <a:r>
-              <a:rPr lang="en-US" sz="2500" b="1" dirty="0">
-                <a:solidFill>
-                  <a:srgbClr val="FFFFFF"/>
-                </a:solidFill>
-                <a:latin typeface="Cambria" pitchFamily="34" charset="0"/>
-                <a:ea typeface="Cambria" pitchFamily="34" charset="-122"/>
-                <a:cs typeface="Cambria" pitchFamily="34" charset="-120"/>
-              </a:rPr>
-              <a:t>CVS</a:t>
-            </a:r>
-            <a:endParaRPr lang="en-US" sz="2500" dirty="0"/>
-          </a:p>
-        </p:txBody>
-      </p:sp>
-      <p:sp>
-        <p:nvSpPr>
-          <p:cNvPr id="10" name="Shape 6"/>
-          <p:cNvSpPr/>
-          <p:nvPr/>
-        </p:nvSpPr>
-        <p:spPr>
-          <a:xfrm>
-            <a:off x="1280160" y="5349240"/>
-            <a:ext cx="839419" cy="0"/>
-          </a:xfrm>
-          <a:prstGeom prst="line">
-            <a:avLst/>
-          </a:prstGeom>
-          <a:noFill/>
-          <a:ln w="28575">
-            <a:solidFill>
-              <a:srgbClr val="FF4D6D">
-                <a:alpha val="88000"/>
-              </a:srgbClr>
-            </a:solidFill>
-            <a:prstDash val="solid"/>
-          </a:ln>
-        </p:spPr>
-      </p:sp>
-      <p:sp>
-        <p:nvSpPr>
-          <p:cNvPr id="11" name="Shape 7"/>
-          <p:cNvSpPr/>
-          <p:nvPr/>
-        </p:nvSpPr>
-        <p:spPr>
-          <a:xfrm flipV="1">
-            <a:off x="2119579" y="5202936"/>
-            <a:ext cx="148133" cy="146304"/>
-          </a:xfrm>
-          <a:prstGeom prst="line">
-            <a:avLst/>
-          </a:prstGeom>
-          <a:noFill/>
-          <a:ln w="28575">
-            <a:solidFill>
-              <a:srgbClr val="FF4D6D">
-                <a:alpha val="88000"/>
-              </a:srgbClr>
-            </a:solidFill>
-            <a:prstDash val="solid"/>
-          </a:ln>
-        </p:spPr>
-      </p:sp>
-      <p:sp>
-        <p:nvSpPr>
-          <p:cNvPr id="12" name="Shape 8"/>
-          <p:cNvSpPr/>
-          <p:nvPr/>
-        </p:nvSpPr>
-        <p:spPr>
-          <a:xfrm>
-            <a:off x="2267712" y="5202936"/>
-            <a:ext cx="148133" cy="457200"/>
-          </a:xfrm>
-          <a:prstGeom prst="line">
-            <a:avLst/>
-          </a:prstGeom>
-          <a:noFill/>
-          <a:ln w="28575">
-            <a:solidFill>
-              <a:srgbClr val="FF4D6D">
-                <a:alpha val="88000"/>
-              </a:srgbClr>
-            </a:solidFill>
-            <a:prstDash val="solid"/>
-          </a:ln>
-        </p:spPr>
-      </p:sp>
-      <p:sp>
-        <p:nvSpPr>
-          <p:cNvPr id="13" name="Shape 9"/>
-          <p:cNvSpPr/>
-          <p:nvPr/>
-        </p:nvSpPr>
-        <p:spPr>
-          <a:xfrm flipV="1">
-            <a:off x="2415845" y="4846320"/>
-            <a:ext cx="148133" cy="813816"/>
-          </a:xfrm>
-          <a:prstGeom prst="line">
-            <a:avLst/>
-          </a:prstGeom>
-          <a:noFill/>
-          <a:ln w="28575">
-            <a:solidFill>
-              <a:srgbClr val="FF4D6D">
-                <a:alpha val="88000"/>
-              </a:srgbClr>
-            </a:solidFill>
-            <a:prstDash val="solid"/>
-          </a:ln>
-        </p:spPr>
-      </p:sp>
-      <p:sp>
-        <p:nvSpPr>
-          <p:cNvPr id="14" name="Shape 10"/>
-          <p:cNvSpPr/>
-          <p:nvPr/>
-        </p:nvSpPr>
-        <p:spPr>
-          <a:xfrm>
-            <a:off x="2563978" y="4846320"/>
-            <a:ext cx="148133" cy="685800"/>
-          </a:xfrm>
-          <a:prstGeom prst="line">
-            <a:avLst/>
-          </a:prstGeom>
-          <a:noFill/>
-          <a:ln w="28575">
-            <a:solidFill>
-              <a:srgbClr val="FF4D6D">
-                <a:alpha val="88000"/>
-              </a:srgbClr>
-            </a:solidFill>
-            <a:prstDash val="solid"/>
-          </a:ln>
-        </p:spPr>
-      </p:sp>
-      <p:sp>
-        <p:nvSpPr>
-          <p:cNvPr id="15" name="Shape 11"/>
-          <p:cNvSpPr/>
-          <p:nvPr/>
-        </p:nvSpPr>
-        <p:spPr>
-          <a:xfrm flipV="1">
-            <a:off x="2712110" y="5349240"/>
-            <a:ext cx="148133" cy="182880"/>
-          </a:xfrm>
-          <a:prstGeom prst="line">
-            <a:avLst/>
-          </a:prstGeom>
-          <a:noFill/>
-          <a:ln w="28575">
-            <a:solidFill>
-              <a:srgbClr val="FF4D6D">
-                <a:alpha val="88000"/>
-              </a:srgbClr>
-            </a:solidFill>
-            <a:prstDash val="solid"/>
-          </a:ln>
-        </p:spPr>
-      </p:sp>
-      <p:sp>
-        <p:nvSpPr>
-          <p:cNvPr id="16" name="Shape 12"/>
-          <p:cNvSpPr/>
-          <p:nvPr/>
-        </p:nvSpPr>
-        <p:spPr>
-          <a:xfrm>
-            <a:off x="2860243" y="5349240"/>
-            <a:ext cx="888797" cy="0"/>
-          </a:xfrm>
-          <a:prstGeom prst="line">
-            <a:avLst/>
-          </a:prstGeom>
-          <a:noFill/>
-          <a:ln w="28575">
-            <a:solidFill>
-              <a:srgbClr val="FF4D6D">
-                <a:alpha val="88000"/>
-              </a:srgbClr>
-            </a:solidFill>
-            <a:prstDash val="solid"/>
-          </a:ln>
-        </p:spPr>
-      </p:sp>
-      <p:sp>
-        <p:nvSpPr>
-          <p:cNvPr id="17" name="Shape 13"/>
-          <p:cNvSpPr/>
-          <p:nvPr/>
-        </p:nvSpPr>
-        <p:spPr>
-          <a:xfrm>
-            <a:off x="4937760" y="1783080"/>
-            <a:ext cx="6766560" cy="822960"/>
-          </a:xfrm>
-          <a:prstGeom prst="roundRect">
-            <a:avLst>
-              <a:gd name="adj" fmla="val 12222"/>
+              <a:gd name="adj" fmla="val 10000"/>
             </a:avLst>
           </a:prstGeom>
           <a:solidFill>
@@ -6035,14 +5741,14 @@
       </p:sp>
       <p:sp>
         <p:nvSpPr>
-          <p:cNvPr id="18" name="Shape 14"/>
-          <p:cNvSpPr/>
-          <p:nvPr/>
-        </p:nvSpPr>
-        <p:spPr>
-          <a:xfrm>
-            <a:off x="5193792" y="1920240"/>
-            <a:ext cx="475488" cy="475488"/>
+          <p:cNvPr id="7" name="Shape 4"/>
+          <p:cNvSpPr/>
+          <p:nvPr/>
+        </p:nvSpPr>
+        <p:spPr>
+          <a:xfrm>
+            <a:off x="868680" y="1856232"/>
+            <a:ext cx="768096" cy="768096"/>
           </a:xfrm>
           <a:prstGeom prst="ellipse">
             <a:avLst/>
@@ -6050,7 +5756,7 @@
           <a:solidFill>
             <a:srgbClr val="A4133C"/>
           </a:solidFill>
-          <a:ln w="12700">
+          <a:ln w="19050">
             <a:solidFill>
               <a:srgbClr val="FF4D6D"/>
             </a:solidFill>
@@ -6060,22 +5766,22 @@
       </p:sp>
       <p:pic>
         <p:nvPicPr>
-          <p:cNvPr id="19" name="Image 2" descr="preencoded.png">    </p:cNvPr>
+          <p:cNvPr id="8" name="Image 1" descr="preencoded.png">    </p:cNvPr>
           <p:cNvPicPr>
             <a:picLocks noChangeAspect="1"/>
           </p:cNvPicPr>
           <p:nvPr/>
         </p:nvPicPr>
         <p:blipFill>
-          <a:blip r:embed="rId3"/>
+          <a:blip r:embed="rId2"/>
           <a:stretch>
             <a:fillRect/>
           </a:stretch>
         </p:blipFill>
         <p:spPr>
           <a:xfrm>
-            <a:off x="5312664" y="2039112"/>
-            <a:ext cx="237744" cy="237744"/>
+            <a:off x="1088136" y="2075688"/>
+            <a:ext cx="329184" cy="329184"/>
           </a:xfrm>
           <a:prstGeom prst="rect">
             <a:avLst/>
@@ -6084,68 +5790,111 @@
       </p:pic>
       <p:sp>
         <p:nvSpPr>
-          <p:cNvPr id="20" name="Text 15"/>
-          <p:cNvSpPr/>
-          <p:nvPr/>
-        </p:nvSpPr>
-        <p:spPr>
-          <a:xfrm>
-            <a:off x="5852160" y="1975104"/>
-            <a:ext cx="5623560" cy="256032"/>
-          </a:xfrm>
-          <a:prstGeom prst="rect">
-            <a:avLst/>
-          </a:prstGeom>
-          <a:noFill/>
-          <a:ln/>
-        </p:spPr>
-        <p:txBody>
-          <a:bodyPr wrap="square" lIns="0" tIns="0" rIns="0" bIns="0" rtlCol="0" anchor="t"/>
-          <a:lstStyle/>
-          <a:p>
-            <a:pPr algn="l" indent="0" marL="0">
-              <a:buNone/>
-            </a:pPr>
-            <a:r>
-              <a:rPr lang="en-US" sz="1150" b="1" spc="150" kern="0" dirty="0">
+          <p:cNvPr id="9" name="Text 5"/>
+          <p:cNvSpPr/>
+          <p:nvPr/>
+        </p:nvSpPr>
+        <p:spPr>
+          <a:xfrm>
+            <a:off x="1783080" y="1691640"/>
+            <a:ext cx="1417320" cy="1097280"/>
+          </a:xfrm>
+          <a:prstGeom prst="rect">
+            <a:avLst/>
+          </a:prstGeom>
+          <a:noFill/>
+          <a:ln/>
+        </p:spPr>
+        <p:txBody>
+          <a:bodyPr wrap="square" lIns="0" tIns="0" rIns="0" bIns="0" rtlCol="0" anchor="ctr"/>
+          <a:lstStyle/>
+          <a:p>
+            <a:pPr algn="l" indent="0" marL="0">
+              <a:lnSpc>
+                <a:spcPct val="95000"/>
+              </a:lnSpc>
+              <a:buNone/>
+            </a:pPr>
+            <a:r>
+              <a:rPr lang="en-US" sz="1400" b="1" dirty="0">
                 <a:solidFill>
                   <a:srgbClr val="A4133C"/>
                 </a:solidFill>
-                <a:latin typeface="Calibri" pitchFamily="34" charset="0"/>
-                <a:ea typeface="Calibri" pitchFamily="34" charset="-122"/>
-                <a:cs typeface="Calibri" pitchFamily="34" charset="-120"/>
+                <a:latin typeface="Cambria" pitchFamily="34" charset="0"/>
+                <a:ea typeface="Cambria" pitchFamily="34" charset="-122"/>
+                <a:cs typeface="Cambria" pitchFamily="34" charset="-120"/>
               </a:rPr>
               <a:t>INSPECTION</a:t>
             </a:r>
-            <a:endParaRPr lang="en-US" sz="1150" dirty="0"/>
-          </a:p>
-        </p:txBody>
-      </p:sp>
-      <p:sp>
-        <p:nvSpPr>
-          <p:cNvPr id="21" name="Text 16"/>
-          <p:cNvSpPr/>
-          <p:nvPr/>
-        </p:nvSpPr>
-        <p:spPr>
-          <a:xfrm>
-            <a:off x="5852160" y="2167128"/>
-            <a:ext cx="5623560" cy="384048"/>
-          </a:xfrm>
-          <a:prstGeom prst="rect">
-            <a:avLst/>
-          </a:prstGeom>
-          <a:noFill/>
-          <a:ln/>
-        </p:spPr>
-        <p:txBody>
-          <a:bodyPr wrap="square" lIns="0" tIns="0" rIns="0" bIns="0" rtlCol="0" anchor="t"/>
-          <a:lstStyle/>
-          <a:p>
-            <a:pPr algn="l" indent="0" marL="0">
-              <a:lnSpc>
-                <a:spcPct val="100000"/>
-              </a:lnSpc>
+            <a:endParaRPr lang="en-US" sz="1400" dirty="0"/>
+          </a:p>
+        </p:txBody>
+      </p:sp>
+      <p:sp>
+        <p:nvSpPr>
+          <p:cNvPr id="10" name="Shape 6"/>
+          <p:cNvSpPr/>
+          <p:nvPr/>
+        </p:nvSpPr>
+        <p:spPr>
+          <a:xfrm>
+            <a:off x="3246120" y="1929384"/>
+            <a:ext cx="0" cy="621792"/>
+          </a:xfrm>
+          <a:prstGeom prst="line">
+            <a:avLst/>
+          </a:prstGeom>
+          <a:noFill/>
+          <a:ln w="12700">
+            <a:solidFill>
+              <a:srgbClr val="FBD8DF"/>
+            </a:solidFill>
+            <a:prstDash val="solid"/>
+          </a:ln>
+        </p:spPr>
+      </p:sp>
+      <p:sp>
+        <p:nvSpPr>
+          <p:cNvPr id="11" name="Shape 7"/>
+          <p:cNvSpPr/>
+          <p:nvPr/>
+        </p:nvSpPr>
+        <p:spPr>
+          <a:xfrm>
+            <a:off x="3520440" y="2002536"/>
+            <a:ext cx="118872" cy="118872"/>
+          </a:xfrm>
+          <a:prstGeom prst="ellipse">
+            <a:avLst/>
+          </a:prstGeom>
+          <a:solidFill>
+            <a:srgbClr val="FF4D6D"/>
+          </a:solidFill>
+          <a:ln/>
+        </p:spPr>
+      </p:sp>
+      <p:sp>
+        <p:nvSpPr>
+          <p:cNvPr id="12" name="Text 8"/>
+          <p:cNvSpPr/>
+          <p:nvPr/>
+        </p:nvSpPr>
+        <p:spPr>
+          <a:xfrm>
+            <a:off x="3767328" y="1874520"/>
+            <a:ext cx="7680960" cy="384048"/>
+          </a:xfrm>
+          <a:prstGeom prst="rect">
+            <a:avLst/>
+          </a:prstGeom>
+          <a:noFill/>
+          <a:ln/>
+        </p:spPr>
+        <p:txBody>
+          <a:bodyPr wrap="square" lIns="0" tIns="0" rIns="0" bIns="0" rtlCol="0" anchor="ctr"/>
+          <a:lstStyle/>
+          <a:p>
+            <a:pPr algn="l" indent="0" marL="0">
               <a:buNone/>
             </a:pPr>
             <a:r>
@@ -6157,7 +5906,7 @@
                 <a:ea typeface="Calibri" pitchFamily="34" charset="-122"/>
                 <a:cs typeface="Calibri" pitchFamily="34" charset="-120"/>
               </a:rPr>
-              <a:t>Shape of the precordium was normal; the rest of the inspection could not be performed because of limited exposure</a:t>
+              <a:t>Shape of the precordium — normal</a:t>
             </a:r>
             <a:endParaRPr lang="en-US" sz="1250" dirty="0"/>
           </a:p>
@@ -6165,18 +5914,77 @@
       </p:sp>
       <p:sp>
         <p:nvSpPr>
-          <p:cNvPr id="22" name="Shape 17"/>
-          <p:cNvSpPr/>
-          <p:nvPr/>
-        </p:nvSpPr>
-        <p:spPr>
-          <a:xfrm>
-            <a:off x="4937760" y="2679192"/>
-            <a:ext cx="6766560" cy="1572768"/>
+          <p:cNvPr id="13" name="Shape 9"/>
+          <p:cNvSpPr/>
+          <p:nvPr/>
+        </p:nvSpPr>
+        <p:spPr>
+          <a:xfrm>
+            <a:off x="3520440" y="2386584"/>
+            <a:ext cx="118872" cy="118872"/>
+          </a:xfrm>
+          <a:prstGeom prst="ellipse">
+            <a:avLst/>
+          </a:prstGeom>
+          <a:solidFill>
+            <a:srgbClr val="FF4D6D"/>
+          </a:solidFill>
+          <a:ln/>
+        </p:spPr>
+      </p:sp>
+      <p:sp>
+        <p:nvSpPr>
+          <p:cNvPr id="14" name="Text 10"/>
+          <p:cNvSpPr/>
+          <p:nvPr/>
+        </p:nvSpPr>
+        <p:spPr>
+          <a:xfrm>
+            <a:off x="3767328" y="2258568"/>
+            <a:ext cx="7680960" cy="384048"/>
+          </a:xfrm>
+          <a:prstGeom prst="rect">
+            <a:avLst/>
+          </a:prstGeom>
+          <a:noFill/>
+          <a:ln/>
+        </p:spPr>
+        <p:txBody>
+          <a:bodyPr wrap="square" lIns="0" tIns="0" rIns="0" bIns="0" rtlCol="0" anchor="ctr"/>
+          <a:lstStyle/>
+          <a:p>
+            <a:pPr algn="l" indent="0" marL="0">
+              <a:buNone/>
+            </a:pPr>
+            <a:r>
+              <a:rPr lang="en-US" sz="1250" dirty="0">
+                <a:solidFill>
+                  <a:srgbClr val="2B2B33"/>
+                </a:solidFill>
+                <a:latin typeface="Calibri" pitchFamily="34" charset="0"/>
+                <a:ea typeface="Calibri" pitchFamily="34" charset="-122"/>
+                <a:cs typeface="Calibri" pitchFamily="34" charset="-120"/>
+              </a:rPr>
+              <a:t>Remainder of the inspection limited by exposure</a:t>
+            </a:r>
+            <a:endParaRPr lang="en-US" sz="1250" dirty="0"/>
+          </a:p>
+        </p:txBody>
+      </p:sp>
+      <p:sp>
+        <p:nvSpPr>
+          <p:cNvPr id="15" name="Shape 11"/>
+          <p:cNvSpPr/>
+          <p:nvPr/>
+        </p:nvSpPr>
+        <p:spPr>
+          <a:xfrm>
+            <a:off x="502920" y="2926080"/>
+            <a:ext cx="11183112" cy="1444752"/>
           </a:xfrm>
           <a:prstGeom prst="roundRect">
             <a:avLst>
-              <a:gd name="adj" fmla="val 6395"/>
+              <a:gd name="adj" fmla="val 7595"/>
             </a:avLst>
           </a:prstGeom>
           <a:solidFill>
@@ -6199,14 +6007,14 @@
       </p:sp>
       <p:sp>
         <p:nvSpPr>
-          <p:cNvPr id="23" name="Shape 18"/>
-          <p:cNvSpPr/>
-          <p:nvPr/>
-        </p:nvSpPr>
-        <p:spPr>
-          <a:xfrm>
-            <a:off x="5193792" y="2816352"/>
-            <a:ext cx="475488" cy="475488"/>
+          <p:cNvPr id="16" name="Shape 12"/>
+          <p:cNvSpPr/>
+          <p:nvPr/>
+        </p:nvSpPr>
+        <p:spPr>
+          <a:xfrm>
+            <a:off x="868680" y="3264408"/>
+            <a:ext cx="768096" cy="768096"/>
           </a:xfrm>
           <a:prstGeom prst="ellipse">
             <a:avLst/>
@@ -6214,7 +6022,7 @@
           <a:solidFill>
             <a:srgbClr val="A4133C"/>
           </a:solidFill>
-          <a:ln w="12700">
+          <a:ln w="19050">
             <a:solidFill>
               <a:srgbClr val="FF4D6D"/>
             </a:solidFill>
@@ -6224,22 +6032,22 @@
       </p:sp>
       <p:pic>
         <p:nvPicPr>
-          <p:cNvPr id="24" name="Image 3" descr="preencoded.png">    </p:cNvPr>
+          <p:cNvPr id="17" name="Image 2" descr="preencoded.png">    </p:cNvPr>
           <p:cNvPicPr>
             <a:picLocks noChangeAspect="1"/>
           </p:cNvPicPr>
           <p:nvPr/>
         </p:nvPicPr>
         <p:blipFill>
-          <a:blip r:embed="rId4"/>
+          <a:blip r:embed="rId3"/>
           <a:stretch>
             <a:fillRect/>
           </a:stretch>
         </p:blipFill>
         <p:spPr>
           <a:xfrm>
-            <a:off x="5312664" y="2935224"/>
-            <a:ext cx="237744" cy="237744"/>
+            <a:off x="1088136" y="3483864"/>
+            <a:ext cx="329184" cy="329184"/>
           </a:xfrm>
           <a:prstGeom prst="rect">
             <a:avLst/>
@@ -6248,53 +6056,79 @@
       </p:pic>
       <p:sp>
         <p:nvSpPr>
-          <p:cNvPr id="25" name="Text 19"/>
-          <p:cNvSpPr/>
-          <p:nvPr/>
-        </p:nvSpPr>
-        <p:spPr>
-          <a:xfrm>
-            <a:off x="5852160" y="2871216"/>
-            <a:ext cx="5623560" cy="256032"/>
-          </a:xfrm>
-          <a:prstGeom prst="rect">
-            <a:avLst/>
-          </a:prstGeom>
-          <a:noFill/>
-          <a:ln/>
-        </p:spPr>
-        <p:txBody>
-          <a:bodyPr wrap="square" lIns="0" tIns="0" rIns="0" bIns="0" rtlCol="0" anchor="t"/>
-          <a:lstStyle/>
-          <a:p>
-            <a:pPr algn="l" indent="0" marL="0">
-              <a:buNone/>
-            </a:pPr>
-            <a:r>
-              <a:rPr lang="en-US" sz="1150" b="1" spc="150" kern="0" dirty="0">
+          <p:cNvPr id="18" name="Text 13"/>
+          <p:cNvSpPr/>
+          <p:nvPr/>
+        </p:nvSpPr>
+        <p:spPr>
+          <a:xfrm>
+            <a:off x="1783080" y="2926080"/>
+            <a:ext cx="1417320" cy="1444752"/>
+          </a:xfrm>
+          <a:prstGeom prst="rect">
+            <a:avLst/>
+          </a:prstGeom>
+          <a:noFill/>
+          <a:ln/>
+        </p:spPr>
+        <p:txBody>
+          <a:bodyPr wrap="square" lIns="0" tIns="0" rIns="0" bIns="0" rtlCol="0" anchor="ctr"/>
+          <a:lstStyle/>
+          <a:p>
+            <a:pPr algn="l" indent="0" marL="0">
+              <a:lnSpc>
+                <a:spcPct val="95000"/>
+              </a:lnSpc>
+              <a:buNone/>
+            </a:pPr>
+            <a:r>
+              <a:rPr lang="en-US" sz="1400" b="1" dirty="0">
                 <a:solidFill>
                   <a:srgbClr val="A4133C"/>
                 </a:solidFill>
-                <a:latin typeface="Calibri" pitchFamily="34" charset="0"/>
-                <a:ea typeface="Calibri" pitchFamily="34" charset="-122"/>
-                <a:cs typeface="Calibri" pitchFamily="34" charset="-120"/>
+                <a:latin typeface="Cambria" pitchFamily="34" charset="0"/>
+                <a:ea typeface="Cambria" pitchFamily="34" charset="-122"/>
+                <a:cs typeface="Cambria" pitchFamily="34" charset="-120"/>
               </a:rPr>
               <a:t>PALPATION</a:t>
             </a:r>
-            <a:endParaRPr lang="en-US" sz="1150" dirty="0"/>
-          </a:p>
-        </p:txBody>
-      </p:sp>
-      <p:sp>
-        <p:nvSpPr>
-          <p:cNvPr id="26" name="Shape 20"/>
-          <p:cNvSpPr/>
-          <p:nvPr/>
-        </p:nvSpPr>
-        <p:spPr>
-          <a:xfrm>
-            <a:off x="5394960" y="3401568"/>
-            <a:ext cx="109728" cy="109728"/>
+            <a:endParaRPr lang="en-US" sz="1400" dirty="0"/>
+          </a:p>
+        </p:txBody>
+      </p:sp>
+      <p:sp>
+        <p:nvSpPr>
+          <p:cNvPr id="19" name="Shape 14"/>
+          <p:cNvSpPr/>
+          <p:nvPr/>
+        </p:nvSpPr>
+        <p:spPr>
+          <a:xfrm>
+            <a:off x="3246120" y="3163824"/>
+            <a:ext cx="0" cy="969264"/>
+          </a:xfrm>
+          <a:prstGeom prst="line">
+            <a:avLst/>
+          </a:prstGeom>
+          <a:noFill/>
+          <a:ln w="12700">
+            <a:solidFill>
+              <a:srgbClr val="FBD8DF"/>
+            </a:solidFill>
+            <a:prstDash val="solid"/>
+          </a:ln>
+        </p:spPr>
+      </p:sp>
+      <p:sp>
+        <p:nvSpPr>
+          <p:cNvPr id="20" name="Shape 15"/>
+          <p:cNvSpPr/>
+          <p:nvPr/>
+        </p:nvSpPr>
+        <p:spPr>
+          <a:xfrm>
+            <a:off x="3520440" y="3218688"/>
+            <a:ext cx="118872" cy="118872"/>
           </a:xfrm>
           <a:prstGeom prst="ellipse">
             <a:avLst/>
@@ -6307,33 +6141,30 @@
       </p:sp>
       <p:sp>
         <p:nvSpPr>
-          <p:cNvPr id="27" name="Text 21"/>
-          <p:cNvSpPr/>
-          <p:nvPr/>
-        </p:nvSpPr>
-        <p:spPr>
-          <a:xfrm>
-            <a:off x="5650992" y="3337560"/>
-            <a:ext cx="5669280" cy="384048"/>
-          </a:xfrm>
-          <a:prstGeom prst="rect">
-            <a:avLst/>
-          </a:prstGeom>
-          <a:noFill/>
-          <a:ln/>
-        </p:spPr>
-        <p:txBody>
-          <a:bodyPr wrap="square" lIns="0" tIns="0" rIns="0" bIns="0" rtlCol="0" anchor="t"/>
-          <a:lstStyle/>
-          <a:p>
-            <a:pPr algn="l" indent="0" marL="0">
-              <a:lnSpc>
-                <a:spcPct val="100000"/>
-              </a:lnSpc>
-              <a:buNone/>
-            </a:pPr>
-            <a:r>
-              <a:rPr lang="en-US" sz="1200" dirty="0">
+          <p:cNvPr id="21" name="Text 16"/>
+          <p:cNvSpPr/>
+          <p:nvPr/>
+        </p:nvSpPr>
+        <p:spPr>
+          <a:xfrm>
+            <a:off x="3767328" y="3090672"/>
+            <a:ext cx="7680960" cy="384048"/>
+          </a:xfrm>
+          <a:prstGeom prst="rect">
+            <a:avLst/>
+          </a:prstGeom>
+          <a:noFill/>
+          <a:ln/>
+        </p:spPr>
+        <p:txBody>
+          <a:bodyPr wrap="square" lIns="0" tIns="0" rIns="0" bIns="0" rtlCol="0" anchor="ctr"/>
+          <a:lstStyle/>
+          <a:p>
+            <a:pPr algn="l" indent="0" marL="0">
+              <a:buNone/>
+            </a:pPr>
+            <a:r>
+              <a:rPr lang="en-US" sz="1250" dirty="0">
                 <a:solidFill>
                   <a:srgbClr val="2B2B33"/>
                 </a:solidFill>
@@ -6341,22 +6172,22 @@
                 <a:ea typeface="Calibri" pitchFamily="34" charset="-122"/>
                 <a:cs typeface="Calibri" pitchFamily="34" charset="-120"/>
               </a:rPr>
-              <a:t>Apex beat in 5th intercostal space, medial to midclavicular line — normal character</a:t>
-            </a:r>
-            <a:endParaRPr lang="en-US" sz="1200" dirty="0"/>
-          </a:p>
-        </p:txBody>
-      </p:sp>
-      <p:sp>
-        <p:nvSpPr>
-          <p:cNvPr id="28" name="Shape 22"/>
-          <p:cNvSpPr/>
-          <p:nvPr/>
-        </p:nvSpPr>
-        <p:spPr>
-          <a:xfrm>
-            <a:off x="5394960" y="3785616"/>
-            <a:ext cx="109728" cy="109728"/>
+              <a:t>Apex beat: 5th intercostal space, medial to the midclavicular line — normal character</a:t>
+            </a:r>
+            <a:endParaRPr lang="en-US" sz="1250" dirty="0"/>
+          </a:p>
+        </p:txBody>
+      </p:sp>
+      <p:sp>
+        <p:nvSpPr>
+          <p:cNvPr id="22" name="Shape 17"/>
+          <p:cNvSpPr/>
+          <p:nvPr/>
+        </p:nvSpPr>
+        <p:spPr>
+          <a:xfrm>
+            <a:off x="3520440" y="3602736"/>
+            <a:ext cx="118872" cy="118872"/>
           </a:xfrm>
           <a:prstGeom prst="ellipse">
             <a:avLst/>
@@ -6369,33 +6200,30 @@
       </p:sp>
       <p:sp>
         <p:nvSpPr>
-          <p:cNvPr id="29" name="Text 23"/>
-          <p:cNvSpPr/>
-          <p:nvPr/>
-        </p:nvSpPr>
-        <p:spPr>
-          <a:xfrm>
-            <a:off x="5650992" y="3721608"/>
-            <a:ext cx="5669280" cy="384048"/>
-          </a:xfrm>
-          <a:prstGeom prst="rect">
-            <a:avLst/>
-          </a:prstGeom>
-          <a:noFill/>
-          <a:ln/>
-        </p:spPr>
-        <p:txBody>
-          <a:bodyPr wrap="square" lIns="0" tIns="0" rIns="0" bIns="0" rtlCol="0" anchor="t"/>
-          <a:lstStyle/>
-          <a:p>
-            <a:pPr algn="l" indent="0" marL="0">
-              <a:lnSpc>
-                <a:spcPct val="100000"/>
-              </a:lnSpc>
-              <a:buNone/>
-            </a:pPr>
-            <a:r>
-              <a:rPr lang="en-US" sz="1200" dirty="0">
+          <p:cNvPr id="23" name="Text 18"/>
+          <p:cNvSpPr/>
+          <p:nvPr/>
+        </p:nvSpPr>
+        <p:spPr>
+          <a:xfrm>
+            <a:off x="3767328" y="3474720"/>
+            <a:ext cx="7680960" cy="384048"/>
+          </a:xfrm>
+          <a:prstGeom prst="rect">
+            <a:avLst/>
+          </a:prstGeom>
+          <a:noFill/>
+          <a:ln/>
+        </p:spPr>
+        <p:txBody>
+          <a:bodyPr wrap="square" lIns="0" tIns="0" rIns="0" bIns="0" rtlCol="0" anchor="ctr"/>
+          <a:lstStyle/>
+          <a:p>
+            <a:pPr algn="l" indent="0" marL="0">
+              <a:buNone/>
+            </a:pPr>
+            <a:r>
+              <a:rPr lang="en-US" sz="1250" dirty="0">
                 <a:solidFill>
                   <a:srgbClr val="2B2B33"/>
                 </a:solidFill>
@@ -6405,20 +6233,20 @@
               </a:rPr>
               <a:t>No thrill; no other palpable sounds</a:t>
             </a:r>
-            <a:endParaRPr lang="en-US" sz="1200" dirty="0"/>
-          </a:p>
-        </p:txBody>
-      </p:sp>
-      <p:sp>
-        <p:nvSpPr>
-          <p:cNvPr id="30" name="Shape 24"/>
-          <p:cNvSpPr/>
-          <p:nvPr/>
-        </p:nvSpPr>
-        <p:spPr>
-          <a:xfrm>
-            <a:off x="5394960" y="4041648"/>
-            <a:ext cx="109728" cy="109728"/>
+            <a:endParaRPr lang="en-US" sz="1250" dirty="0"/>
+          </a:p>
+        </p:txBody>
+      </p:sp>
+      <p:sp>
+        <p:nvSpPr>
+          <p:cNvPr id="24" name="Shape 19"/>
+          <p:cNvSpPr/>
+          <p:nvPr/>
+        </p:nvSpPr>
+        <p:spPr>
+          <a:xfrm>
+            <a:off x="3520440" y="3986784"/>
+            <a:ext cx="118872" cy="118872"/>
           </a:xfrm>
           <a:prstGeom prst="ellipse">
             <a:avLst/>
@@ -6431,33 +6259,30 @@
       </p:sp>
       <p:sp>
         <p:nvSpPr>
-          <p:cNvPr id="31" name="Text 25"/>
-          <p:cNvSpPr/>
-          <p:nvPr/>
-        </p:nvSpPr>
-        <p:spPr>
-          <a:xfrm>
-            <a:off x="5650992" y="3977640"/>
-            <a:ext cx="5669280" cy="384048"/>
-          </a:xfrm>
-          <a:prstGeom prst="rect">
-            <a:avLst/>
-          </a:prstGeom>
-          <a:noFill/>
-          <a:ln/>
-        </p:spPr>
-        <p:txBody>
-          <a:bodyPr wrap="square" lIns="0" tIns="0" rIns="0" bIns="0" rtlCol="0" anchor="t"/>
-          <a:lstStyle/>
-          <a:p>
-            <a:pPr algn="l" indent="0" marL="0">
-              <a:lnSpc>
-                <a:spcPct val="100000"/>
-              </a:lnSpc>
-              <a:buNone/>
-            </a:pPr>
-            <a:r>
-              <a:rPr lang="en-US" sz="1200" dirty="0">
+          <p:cNvPr id="25" name="Text 20"/>
+          <p:cNvSpPr/>
+          <p:nvPr/>
+        </p:nvSpPr>
+        <p:spPr>
+          <a:xfrm>
+            <a:off x="3767328" y="3858768"/>
+            <a:ext cx="7680960" cy="384048"/>
+          </a:xfrm>
+          <a:prstGeom prst="rect">
+            <a:avLst/>
+          </a:prstGeom>
+          <a:noFill/>
+          <a:ln/>
+        </p:spPr>
+        <p:txBody>
+          <a:bodyPr wrap="square" lIns="0" tIns="0" rIns="0" bIns="0" rtlCol="0" anchor="ctr"/>
+          <a:lstStyle/>
+          <a:p>
+            <a:pPr algn="l" indent="0" marL="0">
+              <a:buNone/>
+            </a:pPr>
+            <a:r>
+              <a:rPr lang="en-US" sz="1250" dirty="0">
                 <a:solidFill>
                   <a:srgbClr val="2B2B33"/>
                 </a:solidFill>
@@ -6467,24 +6292,24 @@
               </a:rPr>
               <a:t>No left parasternal heave</a:t>
             </a:r>
-            <a:endParaRPr lang="en-US" sz="1200" dirty="0"/>
-          </a:p>
-        </p:txBody>
-      </p:sp>
-      <p:sp>
-        <p:nvSpPr>
-          <p:cNvPr id="32" name="Shape 26"/>
-          <p:cNvSpPr/>
-          <p:nvPr/>
-        </p:nvSpPr>
-        <p:spPr>
-          <a:xfrm>
-            <a:off x="4937760" y="4325112"/>
-            <a:ext cx="6766560" cy="1664208"/>
+            <a:endParaRPr lang="en-US" sz="1250" dirty="0"/>
+          </a:p>
+        </p:txBody>
+      </p:sp>
+      <p:sp>
+        <p:nvSpPr>
+          <p:cNvPr id="26" name="Shape 21"/>
+          <p:cNvSpPr/>
+          <p:nvPr/>
+        </p:nvSpPr>
+        <p:spPr>
+          <a:xfrm>
+            <a:off x="502920" y="4507992"/>
+            <a:ext cx="11183112" cy="1444752"/>
           </a:xfrm>
           <a:prstGeom prst="roundRect">
             <a:avLst>
-              <a:gd name="adj" fmla="val 6044"/>
+              <a:gd name="adj" fmla="val 7595"/>
             </a:avLst>
           </a:prstGeom>
           <a:solidFill>
@@ -6507,14 +6332,14 @@
       </p:sp>
       <p:sp>
         <p:nvSpPr>
-          <p:cNvPr id="33" name="Shape 27"/>
-          <p:cNvSpPr/>
-          <p:nvPr/>
-        </p:nvSpPr>
-        <p:spPr>
-          <a:xfrm>
-            <a:off x="5193792" y="4462272"/>
-            <a:ext cx="475488" cy="475488"/>
+          <p:cNvPr id="27" name="Shape 22"/>
+          <p:cNvSpPr/>
+          <p:nvPr/>
+        </p:nvSpPr>
+        <p:spPr>
+          <a:xfrm>
+            <a:off x="868680" y="4846320"/>
+            <a:ext cx="768096" cy="768096"/>
           </a:xfrm>
           <a:prstGeom prst="ellipse">
             <a:avLst/>
@@ -6522,7 +6347,7 @@
           <a:solidFill>
             <a:srgbClr val="A4133C"/>
           </a:solidFill>
-          <a:ln w="12700">
+          <a:ln w="19050">
             <a:solidFill>
               <a:srgbClr val="FF4D6D"/>
             </a:solidFill>
@@ -6532,53 +6357,79 @@
       </p:sp>
       <p:sp>
         <p:nvSpPr>
-          <p:cNvPr id="34" name="Text 28"/>
-          <p:cNvSpPr/>
-          <p:nvPr/>
-        </p:nvSpPr>
-        <p:spPr>
-          <a:xfrm>
-            <a:off x="5852160" y="4517136"/>
-            <a:ext cx="5623560" cy="256032"/>
-          </a:xfrm>
-          <a:prstGeom prst="rect">
-            <a:avLst/>
-          </a:prstGeom>
-          <a:noFill/>
-          <a:ln/>
-        </p:spPr>
-        <p:txBody>
-          <a:bodyPr wrap="square" lIns="0" tIns="0" rIns="0" bIns="0" rtlCol="0" anchor="t"/>
-          <a:lstStyle/>
-          <a:p>
-            <a:pPr algn="l" indent="0" marL="0">
-              <a:buNone/>
-            </a:pPr>
-            <a:r>
-              <a:rPr lang="en-US" sz="1150" b="1" spc="150" kern="0" dirty="0">
+          <p:cNvPr id="28" name="Text 23"/>
+          <p:cNvSpPr/>
+          <p:nvPr/>
+        </p:nvSpPr>
+        <p:spPr>
+          <a:xfrm>
+            <a:off x="1783080" y="4507992"/>
+            <a:ext cx="1417320" cy="1444752"/>
+          </a:xfrm>
+          <a:prstGeom prst="rect">
+            <a:avLst/>
+          </a:prstGeom>
+          <a:noFill/>
+          <a:ln/>
+        </p:spPr>
+        <p:txBody>
+          <a:bodyPr wrap="square" lIns="0" tIns="0" rIns="0" bIns="0" rtlCol="0" anchor="ctr"/>
+          <a:lstStyle/>
+          <a:p>
+            <a:pPr algn="l" indent="0" marL="0">
+              <a:lnSpc>
+                <a:spcPct val="95000"/>
+              </a:lnSpc>
+              <a:buNone/>
+            </a:pPr>
+            <a:r>
+              <a:rPr lang="en-US" sz="1400" b="1" dirty="0">
                 <a:solidFill>
                   <a:srgbClr val="A4133C"/>
                 </a:solidFill>
-                <a:latin typeface="Calibri" pitchFamily="34" charset="0"/>
-                <a:ea typeface="Calibri" pitchFamily="34" charset="-122"/>
-                <a:cs typeface="Calibri" pitchFamily="34" charset="-120"/>
+                <a:latin typeface="Cambria" pitchFamily="34" charset="0"/>
+                <a:ea typeface="Cambria" pitchFamily="34" charset="-122"/>
+                <a:cs typeface="Cambria" pitchFamily="34" charset="-120"/>
               </a:rPr>
               <a:t>AUSCULTATION</a:t>
             </a:r>
-            <a:endParaRPr lang="en-US" sz="1150" dirty="0"/>
-          </a:p>
-        </p:txBody>
-      </p:sp>
-      <p:sp>
-        <p:nvSpPr>
-          <p:cNvPr id="35" name="Shape 29"/>
-          <p:cNvSpPr/>
-          <p:nvPr/>
-        </p:nvSpPr>
-        <p:spPr>
-          <a:xfrm>
-            <a:off x="5394960" y="5029200"/>
-            <a:ext cx="109728" cy="109728"/>
+            <a:endParaRPr lang="en-US" sz="1400" dirty="0"/>
+          </a:p>
+        </p:txBody>
+      </p:sp>
+      <p:sp>
+        <p:nvSpPr>
+          <p:cNvPr id="29" name="Shape 24"/>
+          <p:cNvSpPr/>
+          <p:nvPr/>
+        </p:nvSpPr>
+        <p:spPr>
+          <a:xfrm>
+            <a:off x="3246120" y="4745736"/>
+            <a:ext cx="0" cy="969264"/>
+          </a:xfrm>
+          <a:prstGeom prst="line">
+            <a:avLst/>
+          </a:prstGeom>
+          <a:noFill/>
+          <a:ln w="12700">
+            <a:solidFill>
+              <a:srgbClr val="FBD8DF"/>
+            </a:solidFill>
+            <a:prstDash val="solid"/>
+          </a:ln>
+        </p:spPr>
+      </p:sp>
+      <p:sp>
+        <p:nvSpPr>
+          <p:cNvPr id="30" name="Shape 25"/>
+          <p:cNvSpPr/>
+          <p:nvPr/>
+        </p:nvSpPr>
+        <p:spPr>
+          <a:xfrm>
+            <a:off x="3520440" y="4800600"/>
+            <a:ext cx="118872" cy="118872"/>
           </a:xfrm>
           <a:prstGeom prst="ellipse">
             <a:avLst/>
@@ -6591,33 +6442,30 @@
       </p:sp>
       <p:sp>
         <p:nvSpPr>
-          <p:cNvPr id="36" name="Text 30"/>
-          <p:cNvSpPr/>
-          <p:nvPr/>
-        </p:nvSpPr>
-        <p:spPr>
-          <a:xfrm>
-            <a:off x="5650992" y="4965192"/>
-            <a:ext cx="5669280" cy="384048"/>
-          </a:xfrm>
-          <a:prstGeom prst="rect">
-            <a:avLst/>
-          </a:prstGeom>
-          <a:noFill/>
-          <a:ln/>
-        </p:spPr>
-        <p:txBody>
-          <a:bodyPr wrap="square" lIns="0" tIns="0" rIns="0" bIns="0" rtlCol="0" anchor="t"/>
-          <a:lstStyle/>
-          <a:p>
-            <a:pPr algn="l" indent="0" marL="0">
-              <a:lnSpc>
-                <a:spcPct val="100000"/>
-              </a:lnSpc>
-              <a:buNone/>
-            </a:pPr>
-            <a:r>
-              <a:rPr lang="en-US" sz="1200" dirty="0">
+          <p:cNvPr id="31" name="Text 26"/>
+          <p:cNvSpPr/>
+          <p:nvPr/>
+        </p:nvSpPr>
+        <p:spPr>
+          <a:xfrm>
+            <a:off x="3767328" y="4672584"/>
+            <a:ext cx="7680960" cy="384048"/>
+          </a:xfrm>
+          <a:prstGeom prst="rect">
+            <a:avLst/>
+          </a:prstGeom>
+          <a:noFill/>
+          <a:ln/>
+        </p:spPr>
+        <p:txBody>
+          <a:bodyPr wrap="square" lIns="0" tIns="0" rIns="0" bIns="0" rtlCol="0" anchor="ctr"/>
+          <a:lstStyle/>
+          <a:p>
+            <a:pPr algn="l" indent="0" marL="0">
+              <a:buNone/>
+            </a:pPr>
+            <a:r>
+              <a:rPr lang="en-US" sz="1250" dirty="0">
                 <a:solidFill>
                   <a:srgbClr val="2B2B33"/>
                 </a:solidFill>
@@ -6627,20 +6475,20 @@
               </a:rPr>
               <a:t>1st heart sound &amp; both components of 2nd heart sound audible at their respective areas</a:t>
             </a:r>
-            <a:endParaRPr lang="en-US" sz="1200" dirty="0"/>
-          </a:p>
-        </p:txBody>
-      </p:sp>
-      <p:sp>
-        <p:nvSpPr>
-          <p:cNvPr id="37" name="Shape 31"/>
-          <p:cNvSpPr/>
-          <p:nvPr/>
-        </p:nvSpPr>
-        <p:spPr>
-          <a:xfrm>
-            <a:off x="5394960" y="5394960"/>
-            <a:ext cx="109728" cy="109728"/>
+            <a:endParaRPr lang="en-US" sz="1250" dirty="0"/>
+          </a:p>
+        </p:txBody>
+      </p:sp>
+      <p:sp>
+        <p:nvSpPr>
+          <p:cNvPr id="32" name="Shape 27"/>
+          <p:cNvSpPr/>
+          <p:nvPr/>
+        </p:nvSpPr>
+        <p:spPr>
+          <a:xfrm>
+            <a:off x="3520440" y="5184648"/>
+            <a:ext cx="118872" cy="118872"/>
           </a:xfrm>
           <a:prstGeom prst="ellipse">
             <a:avLst/>
@@ -6653,33 +6501,30 @@
       </p:sp>
       <p:sp>
         <p:nvSpPr>
-          <p:cNvPr id="38" name="Text 32"/>
-          <p:cNvSpPr/>
-          <p:nvPr/>
-        </p:nvSpPr>
-        <p:spPr>
-          <a:xfrm>
-            <a:off x="5650992" y="5330952"/>
-            <a:ext cx="5669280" cy="384048"/>
-          </a:xfrm>
-          <a:prstGeom prst="rect">
-            <a:avLst/>
-          </a:prstGeom>
-          <a:noFill/>
-          <a:ln/>
-        </p:spPr>
-        <p:txBody>
-          <a:bodyPr wrap="square" lIns="0" tIns="0" rIns="0" bIns="0" rtlCol="0" anchor="t"/>
-          <a:lstStyle/>
-          <a:p>
-            <a:pPr algn="l" indent="0" marL="0">
-              <a:lnSpc>
-                <a:spcPct val="100000"/>
-              </a:lnSpc>
-              <a:buNone/>
-            </a:pPr>
-            <a:r>
-              <a:rPr lang="en-US" sz="1200" dirty="0">
+          <p:cNvPr id="33" name="Text 28"/>
+          <p:cNvSpPr/>
+          <p:nvPr/>
+        </p:nvSpPr>
+        <p:spPr>
+          <a:xfrm>
+            <a:off x="3767328" y="5056632"/>
+            <a:ext cx="7680960" cy="384048"/>
+          </a:xfrm>
+          <a:prstGeom prst="rect">
+            <a:avLst/>
+          </a:prstGeom>
+          <a:noFill/>
+          <a:ln/>
+        </p:spPr>
+        <p:txBody>
+          <a:bodyPr wrap="square" lIns="0" tIns="0" rIns="0" bIns="0" rtlCol="0" anchor="ctr"/>
+          <a:lstStyle/>
+          <a:p>
+            <a:pPr algn="l" indent="0" marL="0">
+              <a:buNone/>
+            </a:pPr>
+            <a:r>
+              <a:rPr lang="en-US" sz="1250" dirty="0">
                 <a:solidFill>
                   <a:srgbClr val="2B2B33"/>
                 </a:solidFill>
@@ -6687,22 +6532,22 @@
                 <a:ea typeface="Calibri" pitchFamily="34" charset="-122"/>
                 <a:cs typeface="Calibri" pitchFamily="34" charset="-120"/>
               </a:rPr>
-              <a:t>1st heart sound of variable intensity; both components of 2nd heart sound of normal intensity</a:t>
-            </a:r>
-            <a:endParaRPr lang="en-US" sz="1200" dirty="0"/>
-          </a:p>
-        </p:txBody>
-      </p:sp>
-      <p:sp>
-        <p:nvSpPr>
-          <p:cNvPr id="39" name="Shape 33"/>
-          <p:cNvSpPr/>
-          <p:nvPr/>
-        </p:nvSpPr>
-        <p:spPr>
-          <a:xfrm>
-            <a:off x="5394960" y="5760720"/>
-            <a:ext cx="109728" cy="109728"/>
+              <a:t>1st heart sound: variable intensity;  2nd heart sound: both components normal intensity</a:t>
+            </a:r>
+            <a:endParaRPr lang="en-US" sz="1250" dirty="0"/>
+          </a:p>
+        </p:txBody>
+      </p:sp>
+      <p:sp>
+        <p:nvSpPr>
+          <p:cNvPr id="34" name="Shape 29"/>
+          <p:cNvSpPr/>
+          <p:nvPr/>
+        </p:nvSpPr>
+        <p:spPr>
+          <a:xfrm>
+            <a:off x="3520440" y="5568696"/>
+            <a:ext cx="118872" cy="118872"/>
           </a:xfrm>
           <a:prstGeom prst="ellipse">
             <a:avLst/>
@@ -6715,33 +6560,30 @@
       </p:sp>
       <p:sp>
         <p:nvSpPr>
-          <p:cNvPr id="40" name="Text 34"/>
-          <p:cNvSpPr/>
-          <p:nvPr/>
-        </p:nvSpPr>
-        <p:spPr>
-          <a:xfrm>
-            <a:off x="5650992" y="5696712"/>
-            <a:ext cx="5669280" cy="384048"/>
-          </a:xfrm>
-          <a:prstGeom prst="rect">
-            <a:avLst/>
-          </a:prstGeom>
-          <a:noFill/>
-          <a:ln/>
-        </p:spPr>
-        <p:txBody>
-          <a:bodyPr wrap="square" lIns="0" tIns="0" rIns="0" bIns="0" rtlCol="0" anchor="t"/>
-          <a:lstStyle/>
-          <a:p>
-            <a:pPr algn="l" indent="0" marL="0">
-              <a:lnSpc>
-                <a:spcPct val="100000"/>
-              </a:lnSpc>
-              <a:buNone/>
-            </a:pPr>
-            <a:r>
-              <a:rPr lang="en-US" sz="1200" dirty="0">
+          <p:cNvPr id="35" name="Text 30"/>
+          <p:cNvSpPr/>
+          <p:nvPr/>
+        </p:nvSpPr>
+        <p:spPr>
+          <a:xfrm>
+            <a:off x="3767328" y="5440680"/>
+            <a:ext cx="7680960" cy="384048"/>
+          </a:xfrm>
+          <a:prstGeom prst="rect">
+            <a:avLst/>
+          </a:prstGeom>
+          <a:noFill/>
+          <a:ln/>
+        </p:spPr>
+        <p:txBody>
+          <a:bodyPr wrap="square" lIns="0" tIns="0" rIns="0" bIns="0" rtlCol="0" anchor="ctr"/>
+          <a:lstStyle/>
+          <a:p>
+            <a:pPr algn="l" indent="0" marL="0">
+              <a:buNone/>
+            </a:pPr>
+            <a:r>
+              <a:rPr lang="en-US" sz="1250" dirty="0">
                 <a:solidFill>
                   <a:srgbClr val="2B2B33"/>
                 </a:solidFill>
@@ -6751,13 +6593,13 @@
               </a:rPr>
               <a:t>No added sounds audible</a:t>
             </a:r>
-            <a:endParaRPr lang="en-US" sz="1200" dirty="0"/>
-          </a:p>
-        </p:txBody>
-      </p:sp>
-      <p:sp>
-        <p:nvSpPr>
-          <p:cNvPr id="41" name="Text 35"/>
+            <a:endParaRPr lang="en-US" sz="1250" dirty="0"/>
+          </a:p>
+        </p:txBody>
+      </p:sp>
+      <p:sp>
+        <p:nvSpPr>
+          <p:cNvPr id="36" name="Text 31"/>
           <p:cNvSpPr/>
           <p:nvPr/>
         </p:nvSpPr>
@@ -6796,7 +6638,7 @@
       </p:sp>
       <p:sp>
         <p:nvSpPr>
-          <p:cNvPr id="42" name="Text 36"/>
+          <p:cNvPr id="37" name="Text 32"/>
           <p:cNvSpPr/>
           <p:nvPr/>
         </p:nvSpPr>

--- a/presentations/Clinicopathological-Conference.pptx
+++ b/presentations/Clinicopathological-Conference.pptx
@@ -4536,7 +4536,7 @@
                 <a:ea typeface="Cambria" pitchFamily="34" charset="-122"/>
                 <a:cs typeface="Cambria" pitchFamily="34" charset="-120"/>
               </a:rPr>
-              <a:t>Pulse Character</a:t>
+              <a:t>General</a:t>
             </a:r>
             <a:endParaRPr lang="en-US" sz="1600" dirty="0"/>
           </a:p>
@@ -4571,7 +4571,7 @@
         <p:spPr>
           <a:xfrm>
             <a:off x="1014984" y="4389120"/>
-            <a:ext cx="2880360" cy="301752"/>
+            <a:ext cx="2880360" cy="502920"/>
           </a:xfrm>
           <a:prstGeom prst="rect">
             <a:avLst/>
@@ -4598,7 +4598,7 @@
                 <a:ea typeface="Calibri" pitchFamily="34" charset="-122"/>
                 <a:cs typeface="Calibri" pitchFamily="34" charset="-120"/>
               </a:rPr>
-              <a:t>Irregularly irregular</a:t>
+              <a:t>Thin, lean, middle-aged female; comfortable in bed</a:t>
             </a:r>
             <a:endParaRPr lang="en-US" sz="1200" dirty="0"/>
           </a:p>
@@ -4612,7 +4612,7 @@
         </p:nvSpPr>
         <p:spPr>
           <a:xfrm>
-            <a:off x="795528" y="4745736"/>
+            <a:off x="795528" y="4946904"/>
             <a:ext cx="109728" cy="109728"/>
           </a:xfrm>
           <a:prstGeom prst="ellipse">
@@ -4632,8 +4632,8 @@
         </p:nvSpPr>
         <p:spPr>
           <a:xfrm>
-            <a:off x="1014984" y="4690872"/>
-            <a:ext cx="2880360" cy="301752"/>
+            <a:off x="1014984" y="4892040"/>
+            <a:ext cx="2880360" cy="502920"/>
           </a:xfrm>
           <a:prstGeom prst="rect">
             <a:avLst/>
@@ -4660,7 +4660,7 @@
                 <a:ea typeface="Calibri" pitchFamily="34" charset="-122"/>
                 <a:cs typeface="Calibri" pitchFamily="34" charset="-120"/>
               </a:rPr>
-              <a:t>Normal volume &amp; character</a:t>
+              <a:t>IV cannula in situ (right hand)</a:t>
             </a:r>
             <a:endParaRPr lang="en-US" sz="1200" dirty="0"/>
           </a:p>
@@ -4674,7 +4674,7 @@
         </p:nvSpPr>
         <p:spPr>
           <a:xfrm>
-            <a:off x="795528" y="5047488"/>
+            <a:off x="795528" y="5449824"/>
             <a:ext cx="109728" cy="109728"/>
           </a:xfrm>
           <a:prstGeom prst="ellipse">
@@ -4694,8 +4694,8 @@
         </p:nvSpPr>
         <p:spPr>
           <a:xfrm>
-            <a:off x="1014984" y="4992624"/>
-            <a:ext cx="2880360" cy="301752"/>
+            <a:off x="1014984" y="5394960"/>
+            <a:ext cx="2880360" cy="502920"/>
           </a:xfrm>
           <a:prstGeom prst="rect">
             <a:avLst/>
@@ -4722,7 +4722,7 @@
                 <a:ea typeface="Calibri" pitchFamily="34" charset="-122"/>
                 <a:cs typeface="Calibri" pitchFamily="34" charset="-120"/>
               </a:rPr>
-              <a:t>Vessel wall not palpable</a:t>
+              <a:t>Alert &amp; oriented — time, place, person</a:t>
             </a:r>
             <a:endParaRPr lang="en-US" sz="1200" dirty="0"/>
           </a:p>
@@ -4731,130 +4731,6 @@
       <p:sp>
         <p:nvSpPr>
           <p:cNvPr id="39" name="Shape 34"/>
-          <p:cNvSpPr/>
-          <p:nvPr/>
-        </p:nvSpPr>
-        <p:spPr>
-          <a:xfrm>
-            <a:off x="795528" y="5349240"/>
-            <a:ext cx="109728" cy="109728"/>
-          </a:xfrm>
-          <a:prstGeom prst="ellipse">
-            <a:avLst/>
-          </a:prstGeom>
-          <a:solidFill>
-            <a:srgbClr val="FF4D6D"/>
-          </a:solidFill>
-          <a:ln/>
-        </p:spPr>
-      </p:sp>
-      <p:sp>
-        <p:nvSpPr>
-          <p:cNvPr id="40" name="Text 35"/>
-          <p:cNvSpPr/>
-          <p:nvPr/>
-        </p:nvSpPr>
-        <p:spPr>
-          <a:xfrm>
-            <a:off x="1014984" y="5294376"/>
-            <a:ext cx="2880360" cy="301752"/>
-          </a:xfrm>
-          <a:prstGeom prst="rect">
-            <a:avLst/>
-          </a:prstGeom>
-          <a:noFill/>
-          <a:ln/>
-        </p:spPr>
-        <p:txBody>
-          <a:bodyPr wrap="square" lIns="0" tIns="0" rIns="0" bIns="0" rtlCol="0" anchor="t"/>
-          <a:lstStyle/>
-          <a:p>
-            <a:pPr algn="l" indent="0" marL="0">
-              <a:lnSpc>
-                <a:spcPct val="100000"/>
-              </a:lnSpc>
-              <a:buNone/>
-            </a:pPr>
-            <a:r>
-              <a:rPr lang="en-US" sz="1200" dirty="0">
-                <a:solidFill>
-                  <a:srgbClr val="2B2B33"/>
-                </a:solidFill>
-                <a:latin typeface="Calibri" pitchFamily="34" charset="0"/>
-                <a:ea typeface="Calibri" pitchFamily="34" charset="-122"/>
-                <a:cs typeface="Calibri" pitchFamily="34" charset="-120"/>
-              </a:rPr>
-              <a:t>No radio-radial / femoral delay</a:t>
-            </a:r>
-            <a:endParaRPr lang="en-US" sz="1200" dirty="0"/>
-          </a:p>
-        </p:txBody>
-      </p:sp>
-      <p:sp>
-        <p:nvSpPr>
-          <p:cNvPr id="41" name="Shape 36"/>
-          <p:cNvSpPr/>
-          <p:nvPr/>
-        </p:nvSpPr>
-        <p:spPr>
-          <a:xfrm>
-            <a:off x="795528" y="5650992"/>
-            <a:ext cx="109728" cy="109728"/>
-          </a:xfrm>
-          <a:prstGeom prst="ellipse">
-            <a:avLst/>
-          </a:prstGeom>
-          <a:solidFill>
-            <a:srgbClr val="FF4D6D"/>
-          </a:solidFill>
-          <a:ln/>
-        </p:spPr>
-      </p:sp>
-      <p:sp>
-        <p:nvSpPr>
-          <p:cNvPr id="42" name="Text 37"/>
-          <p:cNvSpPr/>
-          <p:nvPr/>
-        </p:nvSpPr>
-        <p:spPr>
-          <a:xfrm>
-            <a:off x="1014984" y="5596128"/>
-            <a:ext cx="2880360" cy="301752"/>
-          </a:xfrm>
-          <a:prstGeom prst="rect">
-            <a:avLst/>
-          </a:prstGeom>
-          <a:noFill/>
-          <a:ln/>
-        </p:spPr>
-        <p:txBody>
-          <a:bodyPr wrap="square" lIns="0" tIns="0" rIns="0" bIns="0" rtlCol="0" anchor="t"/>
-          <a:lstStyle/>
-          <a:p>
-            <a:pPr algn="l" indent="0" marL="0">
-              <a:lnSpc>
-                <a:spcPct val="100000"/>
-              </a:lnSpc>
-              <a:buNone/>
-            </a:pPr>
-            <a:r>
-              <a:rPr lang="en-US" sz="1200" dirty="0">
-                <a:solidFill>
-                  <a:srgbClr val="2B2B33"/>
-                </a:solidFill>
-                <a:latin typeface="Calibri" pitchFamily="34" charset="0"/>
-                <a:ea typeface="Calibri" pitchFamily="34" charset="-122"/>
-                <a:cs typeface="Calibri" pitchFamily="34" charset="-120"/>
-              </a:rPr>
-              <a:t>Pulse deficit present</a:t>
-            </a:r>
-            <a:endParaRPr lang="en-US" sz="1200" dirty="0"/>
-          </a:p>
-        </p:txBody>
-      </p:sp>
-      <p:sp>
-        <p:nvSpPr>
-          <p:cNvPr id="43" name="Shape 38"/>
           <p:cNvSpPr/>
           <p:nvPr/>
         </p:nvSpPr>
@@ -4888,7 +4764,7 @@
       </p:sp>
       <p:sp>
         <p:nvSpPr>
-          <p:cNvPr id="44" name="Shape 39"/>
+          <p:cNvPr id="40" name="Shape 35"/>
           <p:cNvSpPr/>
           <p:nvPr/>
         </p:nvSpPr>
@@ -4913,7 +4789,7 @@
       </p:sp>
       <p:pic>
         <p:nvPicPr>
-          <p:cNvPr id="45" name="Image 3" descr="preencoded.png">    </p:cNvPr>
+          <p:cNvPr id="41" name="Image 3" descr="preencoded.png">    </p:cNvPr>
           <p:cNvPicPr>
             <a:picLocks noChangeAspect="1"/>
           </p:cNvPicPr>
@@ -4937,7 +4813,7 @@
       </p:pic>
       <p:sp>
         <p:nvSpPr>
-          <p:cNvPr id="46" name="Text 40"/>
+          <p:cNvPr id="42" name="Text 36"/>
           <p:cNvSpPr/>
           <p:nvPr/>
         </p:nvSpPr>
@@ -4968,7 +4844,7 @@
                 <a:ea typeface="Cambria" pitchFamily="34" charset="-122"/>
                 <a:cs typeface="Cambria" pitchFamily="34" charset="-120"/>
               </a:rPr>
-              <a:t>Blood Pressure</a:t>
+              <a:t>Pulse Character</a:t>
             </a:r>
             <a:endParaRPr lang="en-US" sz="1600" dirty="0"/>
           </a:p>
@@ -4976,7 +4852,7 @@
       </p:sp>
       <p:sp>
         <p:nvSpPr>
-          <p:cNvPr id="47" name="Shape 41"/>
+          <p:cNvPr id="43" name="Shape 37"/>
           <p:cNvSpPr/>
           <p:nvPr/>
         </p:nvSpPr>
@@ -4996,14 +4872,14 @@
       </p:sp>
       <p:sp>
         <p:nvSpPr>
-          <p:cNvPr id="48" name="Text 42"/>
+          <p:cNvPr id="44" name="Text 38"/>
           <p:cNvSpPr/>
           <p:nvPr/>
         </p:nvSpPr>
         <p:spPr>
           <a:xfrm>
             <a:off x="4800600" y="4389120"/>
-            <a:ext cx="2880360" cy="502920"/>
+            <a:ext cx="2880360" cy="301752"/>
           </a:xfrm>
           <a:prstGeom prst="rect">
             <a:avLst/>
@@ -5030,7 +4906,7 @@
                 <a:ea typeface="Calibri" pitchFamily="34" charset="-122"/>
                 <a:cs typeface="Calibri" pitchFamily="34" charset="-120"/>
               </a:rPr>
-              <a:t>110/70 mmHg — right arm, lying</a:t>
+              <a:t>Irregularly irregular</a:t>
             </a:r>
             <a:endParaRPr lang="en-US" sz="1200" dirty="0"/>
           </a:p>
@@ -5038,13 +4914,13 @@
       </p:sp>
       <p:sp>
         <p:nvSpPr>
-          <p:cNvPr id="49" name="Shape 43"/>
-          <p:cNvSpPr/>
-          <p:nvPr/>
-        </p:nvSpPr>
-        <p:spPr>
-          <a:xfrm>
-            <a:off x="4581144" y="4946904"/>
+          <p:cNvPr id="45" name="Shape 39"/>
+          <p:cNvSpPr/>
+          <p:nvPr/>
+        </p:nvSpPr>
+        <p:spPr>
+          <a:xfrm>
+            <a:off x="4581144" y="4745736"/>
             <a:ext cx="109728" cy="109728"/>
           </a:xfrm>
           <a:prstGeom prst="ellipse">
@@ -5058,14 +4934,14 @@
       </p:sp>
       <p:sp>
         <p:nvSpPr>
-          <p:cNvPr id="50" name="Text 44"/>
-          <p:cNvSpPr/>
-          <p:nvPr/>
-        </p:nvSpPr>
-        <p:spPr>
-          <a:xfrm>
-            <a:off x="4800600" y="4892040"/>
-            <a:ext cx="2880360" cy="502920"/>
+          <p:cNvPr id="46" name="Text 40"/>
+          <p:cNvSpPr/>
+          <p:nvPr/>
+        </p:nvSpPr>
+        <p:spPr>
+          <a:xfrm>
+            <a:off x="4800600" y="4690872"/>
+            <a:ext cx="2880360" cy="301752"/>
           </a:xfrm>
           <a:prstGeom prst="rect">
             <a:avLst/>
@@ -5092,7 +4968,7 @@
                 <a:ea typeface="Calibri" pitchFamily="34" charset="-122"/>
                 <a:cs typeface="Calibri" pitchFamily="34" charset="-120"/>
               </a:rPr>
-              <a:t>No significant inter-arm difference</a:t>
+              <a:t>Normal volume &amp; character</a:t>
             </a:r>
             <a:endParaRPr lang="en-US" sz="1200" dirty="0"/>
           </a:p>
@@ -5100,13 +4976,13 @@
       </p:sp>
       <p:sp>
         <p:nvSpPr>
-          <p:cNvPr id="51" name="Shape 45"/>
-          <p:cNvSpPr/>
-          <p:nvPr/>
-        </p:nvSpPr>
-        <p:spPr>
-          <a:xfrm>
-            <a:off x="4581144" y="5449824"/>
+          <p:cNvPr id="47" name="Shape 41"/>
+          <p:cNvSpPr/>
+          <p:nvPr/>
+        </p:nvSpPr>
+        <p:spPr>
+          <a:xfrm>
+            <a:off x="4581144" y="5047488"/>
             <a:ext cx="109728" cy="109728"/>
           </a:xfrm>
           <a:prstGeom prst="ellipse">
@@ -5120,14 +4996,14 @@
       </p:sp>
       <p:sp>
         <p:nvSpPr>
-          <p:cNvPr id="52" name="Text 46"/>
-          <p:cNvSpPr/>
-          <p:nvPr/>
-        </p:nvSpPr>
-        <p:spPr>
-          <a:xfrm>
-            <a:off x="4800600" y="5394960"/>
-            <a:ext cx="2880360" cy="502920"/>
+          <p:cNvPr id="48" name="Text 42"/>
+          <p:cNvSpPr/>
+          <p:nvPr/>
+        </p:nvSpPr>
+        <p:spPr>
+          <a:xfrm>
+            <a:off x="4800600" y="4992624"/>
+            <a:ext cx="2880360" cy="301752"/>
           </a:xfrm>
           <a:prstGeom prst="rect">
             <a:avLst/>
@@ -5154,7 +5030,131 @@
                 <a:ea typeface="Calibri" pitchFamily="34" charset="-122"/>
                 <a:cs typeface="Calibri" pitchFamily="34" charset="-120"/>
               </a:rPr>
-              <a:t>No postural drop</a:t>
+              <a:t>Vessel wall not palpable</a:t>
+            </a:r>
+            <a:endParaRPr lang="en-US" sz="1200" dirty="0"/>
+          </a:p>
+        </p:txBody>
+      </p:sp>
+      <p:sp>
+        <p:nvSpPr>
+          <p:cNvPr id="49" name="Shape 43"/>
+          <p:cNvSpPr/>
+          <p:nvPr/>
+        </p:nvSpPr>
+        <p:spPr>
+          <a:xfrm>
+            <a:off x="4581144" y="5349240"/>
+            <a:ext cx="109728" cy="109728"/>
+          </a:xfrm>
+          <a:prstGeom prst="ellipse">
+            <a:avLst/>
+          </a:prstGeom>
+          <a:solidFill>
+            <a:srgbClr val="FF4D6D"/>
+          </a:solidFill>
+          <a:ln/>
+        </p:spPr>
+      </p:sp>
+      <p:sp>
+        <p:nvSpPr>
+          <p:cNvPr id="50" name="Text 44"/>
+          <p:cNvSpPr/>
+          <p:nvPr/>
+        </p:nvSpPr>
+        <p:spPr>
+          <a:xfrm>
+            <a:off x="4800600" y="5294376"/>
+            <a:ext cx="2880360" cy="301752"/>
+          </a:xfrm>
+          <a:prstGeom prst="rect">
+            <a:avLst/>
+          </a:prstGeom>
+          <a:noFill/>
+          <a:ln/>
+        </p:spPr>
+        <p:txBody>
+          <a:bodyPr wrap="square" lIns="0" tIns="0" rIns="0" bIns="0" rtlCol="0" anchor="t"/>
+          <a:lstStyle/>
+          <a:p>
+            <a:pPr algn="l" indent="0" marL="0">
+              <a:lnSpc>
+                <a:spcPct val="100000"/>
+              </a:lnSpc>
+              <a:buNone/>
+            </a:pPr>
+            <a:r>
+              <a:rPr lang="en-US" sz="1200" dirty="0">
+                <a:solidFill>
+                  <a:srgbClr val="2B2B33"/>
+                </a:solidFill>
+                <a:latin typeface="Calibri" pitchFamily="34" charset="0"/>
+                <a:ea typeface="Calibri" pitchFamily="34" charset="-122"/>
+                <a:cs typeface="Calibri" pitchFamily="34" charset="-120"/>
+              </a:rPr>
+              <a:t>No radio-radial / femoral delay</a:t>
+            </a:r>
+            <a:endParaRPr lang="en-US" sz="1200" dirty="0"/>
+          </a:p>
+        </p:txBody>
+      </p:sp>
+      <p:sp>
+        <p:nvSpPr>
+          <p:cNvPr id="51" name="Shape 45"/>
+          <p:cNvSpPr/>
+          <p:nvPr/>
+        </p:nvSpPr>
+        <p:spPr>
+          <a:xfrm>
+            <a:off x="4581144" y="5650992"/>
+            <a:ext cx="109728" cy="109728"/>
+          </a:xfrm>
+          <a:prstGeom prst="ellipse">
+            <a:avLst/>
+          </a:prstGeom>
+          <a:solidFill>
+            <a:srgbClr val="FF4D6D"/>
+          </a:solidFill>
+          <a:ln/>
+        </p:spPr>
+      </p:sp>
+      <p:sp>
+        <p:nvSpPr>
+          <p:cNvPr id="52" name="Text 46"/>
+          <p:cNvSpPr/>
+          <p:nvPr/>
+        </p:nvSpPr>
+        <p:spPr>
+          <a:xfrm>
+            <a:off x="4800600" y="5596128"/>
+            <a:ext cx="2880360" cy="301752"/>
+          </a:xfrm>
+          <a:prstGeom prst="rect">
+            <a:avLst/>
+          </a:prstGeom>
+          <a:noFill/>
+          <a:ln/>
+        </p:spPr>
+        <p:txBody>
+          <a:bodyPr wrap="square" lIns="0" tIns="0" rIns="0" bIns="0" rtlCol="0" anchor="t"/>
+          <a:lstStyle/>
+          <a:p>
+            <a:pPr algn="l" indent="0" marL="0">
+              <a:lnSpc>
+                <a:spcPct val="100000"/>
+              </a:lnSpc>
+              <a:buNone/>
+            </a:pPr>
+            <a:r>
+              <a:rPr lang="en-US" sz="1200" dirty="0">
+                <a:solidFill>
+                  <a:srgbClr val="2B2B33"/>
+                </a:solidFill>
+                <a:latin typeface="Calibri" pitchFamily="34" charset="0"/>
+                <a:ea typeface="Calibri" pitchFamily="34" charset="-122"/>
+                <a:cs typeface="Calibri" pitchFamily="34" charset="-120"/>
+              </a:rPr>
+              <a:t>Pulse deficit present</a:t>
             </a:r>
             <a:endParaRPr lang="en-US" sz="1200" dirty="0"/>
           </a:p>
@@ -5276,7 +5276,7 @@
                 <a:ea typeface="Cambria" pitchFamily="34" charset="-122"/>
                 <a:cs typeface="Cambria" pitchFamily="34" charset="-120"/>
               </a:rPr>
-              <a:t>General</a:t>
+              <a:t>Blood Pressure</a:t>
             </a:r>
             <a:endParaRPr lang="en-US" sz="1600" dirty="0"/>
           </a:p>
@@ -5338,7 +5338,7 @@
                 <a:ea typeface="Calibri" pitchFamily="34" charset="-122"/>
                 <a:cs typeface="Calibri" pitchFamily="34" charset="-120"/>
               </a:rPr>
-              <a:t>Thin, lean, middle-aged female; comfortable in bed</a:t>
+              <a:t>110/70 mmHg — right arm, lying</a:t>
             </a:r>
             <a:endParaRPr lang="en-US" sz="1200" dirty="0"/>
           </a:p>
@@ -5400,7 +5400,7 @@
                 <a:ea typeface="Calibri" pitchFamily="34" charset="-122"/>
                 <a:cs typeface="Calibri" pitchFamily="34" charset="-120"/>
               </a:rPr>
-              <a:t>IV cannula in situ (right hand)</a:t>
+              <a:t>No significant inter-arm difference</a:t>
             </a:r>
             <a:endParaRPr lang="en-US" sz="1200" dirty="0"/>
           </a:p>
@@ -5462,7 +5462,7 @@
                 <a:ea typeface="Calibri" pitchFamily="34" charset="-122"/>
                 <a:cs typeface="Calibri" pitchFamily="34" charset="-120"/>
               </a:rPr>
-              <a:t>Alert &amp; oriented — time, place, person</a:t>
+              <a:t>No postural drop</a:t>
             </a:r>
             <a:endParaRPr lang="en-US" sz="1200" dirty="0"/>
           </a:p>
